--- a/Lessons/01_introduction_and_workflow/Slides/introduction_and_workflow_slides.pptx
+++ b/Lessons/01_introduction_and_workflow/Slides/introduction_and_workflow_slides.pptx
@@ -10677,8 +10677,8 @@
         </p:blipFill>
         <p:spPr bwMode="auto">
           <a:xfrm>
-            <a:off x="457200" y="1595239"/>
-            <a:ext cx="8229600" cy="2501900"/>
+            <a:off x="457200" y="1582539"/>
+            <a:ext cx="8229600" cy="2527300"/>
           </a:xfrm>
           <a:prstGeom prst="rect">
             <a:avLst/>
@@ -11326,8 +11326,8 @@
         </p:blipFill>
         <p:spPr bwMode="auto">
           <a:xfrm>
-            <a:off x="1966916" y="1166099"/>
-            <a:ext cx="5210168" cy="3360181"/>
+            <a:off x="1973208" y="1166099"/>
+            <a:ext cx="5197583" cy="3360181"/>
           </a:xfrm>
           <a:prstGeom prst="rect">
             <a:avLst/>
@@ -11945,8 +11945,8 @@
         </p:blipFill>
         <p:spPr bwMode="auto">
           <a:xfrm>
-            <a:off x="2715720" y="1166099"/>
-            <a:ext cx="3712559" cy="3360181"/>
+            <a:off x="2722013" y="1166099"/>
+            <a:ext cx="3699974" cy="3360181"/>
           </a:xfrm>
           <a:prstGeom prst="rect">
             <a:avLst/>
@@ -12433,8 +12433,8 @@
         </p:blipFill>
         <p:spPr bwMode="auto">
           <a:xfrm>
-            <a:off x="1929161" y="1166099"/>
-            <a:ext cx="5285677" cy="3360181"/>
+            <a:off x="1916576" y="1166099"/>
+            <a:ext cx="5310847" cy="3360181"/>
           </a:xfrm>
           <a:prstGeom prst="rect">
             <a:avLst/>
@@ -12823,8 +12823,8 @@
         </p:blipFill>
         <p:spPr bwMode="auto">
           <a:xfrm>
-            <a:off x="1350253" y="1166099"/>
-            <a:ext cx="6443493" cy="3360181"/>
+            <a:off x="1343961" y="1166099"/>
+            <a:ext cx="6456078" cy="3360181"/>
           </a:xfrm>
           <a:prstGeom prst="rect">
             <a:avLst/>

--- a/Lessons/01_introduction_and_workflow/Slides/introduction_and_workflow_slides.pptx
+++ b/Lessons/01_introduction_and_workflow/Slides/introduction_and_workflow_slides.pptx
@@ -5,7 +5,7 @@
     <p:sldMasterId id="2147483648" r:id="rId1"/>
   </p:sldMasterIdLst>
   <p:notesMasterIdLst>
-    <p:notesMasterId r:id="rId55"/>
+    <p:notesMasterId r:id="rId57"/>
   </p:notesMasterIdLst>
   <p:sldIdLst>
     <p:sldId id="256" r:id="rId2"/>
@@ -61,6 +61,8 @@
     <p:sldId id="306" r:id="rId52"/>
     <p:sldId id="307" r:id="rId53"/>
     <p:sldId id="308" r:id="rId54"/>
+    <p:sldId id="309" r:id="rId55"/>
+    <p:sldId id="310" r:id="rId56"/>
   </p:sldIdLst>
   <p:sldSz cx="9144000" cy="5143500" type="screen16x9"/>
   <p:notesSz cx="6858000" cy="9144000"/>
@@ -576,7 +578,35 @@
             </a:pPr>
             <a:r>
               <a:rPr/>
-              <a:t>Introduce yourself briefly. Establish the two facts that matter: this is a fundamentals course, and it assumes programming ability but no ML background. Ask for a show of hands: who has trained a model before? Usually a handful. Tell them that group has an advantage of about two lessons and a disadvantage that lasts longer, because they will have to unlearn some habits around evaluation.</a:t>
+              <a:t>Introduce yourself briefly, then establish the two facts that shape everything: this is a fundamentals course, and it assumes programming ability but no ML background.</a:t>
+            </a:r>
+          </a:p>
+          <a:p>
+            <a:pPr lvl="0" indent="0" marL="0">
+              <a:buNone/>
+            </a:pPr>
+          </a:p>
+          <a:p>
+            <a:pPr lvl="0" indent="0" marL="0">
+              <a:buNone/>
+            </a:pPr>
+            <a:r>
+              <a:rPr/>
+              <a:t>Ask for a show of hands: who has trained a model before? Usually a handful. Tell that group they have an advantage of about two lessons, and a disadvantage that lasts longer, because they will have habits to unlearn around evaluation - most self-taught practice picks up the modelling and skips the validation.</a:t>
+            </a:r>
+          </a:p>
+          <a:p>
+            <a:pPr lvl="0" indent="0" marL="0">
+              <a:buNone/>
+            </a:pPr>
+          </a:p>
+          <a:p>
+            <a:pPr lvl="0" indent="0" marL="0">
+              <a:buNone/>
+            </a:pPr>
+            <a:r>
+              <a:rPr/>
+              <a:t>Practical notes to give now: the repository is public to them via git, everything runs offline in Docker, and there is no cost attached to any part of this course. Nobody needs an API key, a cloud account or a GPU.</a:t>
             </a:r>
           </a:p>
         </p:txBody>
@@ -658,7 +688,49 @@
             </a:pPr>
             <a:r>
               <a:rPr/>
-              <a:t>This is the conceptual move that defines the field, so say it slowly. We stop specifying behaviour and start specifying examples of correct behaviour. Everything else in the course is machinery for doing that search well.</a:t>
+              <a:t>This is the conceptual move that defines the field, so say it slowly while the figure is up.</a:t>
+            </a:r>
+          </a:p>
+          <a:p>
+            <a:pPr lvl="0" indent="0" marL="0">
+              <a:buNone/>
+            </a:pPr>
+          </a:p>
+          <a:p>
+            <a:pPr lvl="0" indent="0" marL="0">
+              <a:buNone/>
+            </a:pPr>
+            <a:r>
+              <a:rPr/>
+              <a:t>Traditional programming: you supply rules and data, the machine produces answers. Machine learning: you supply data and answers, and the machine produces the rules. The arrows literally reverse.</a:t>
+            </a:r>
+          </a:p>
+          <a:p>
+            <a:pPr lvl="0" indent="0" marL="0">
+              <a:buNone/>
+            </a:pPr>
+          </a:p>
+          <a:p>
+            <a:pPr lvl="0" indent="0" marL="0">
+              <a:buNone/>
+            </a:pPr>
+            <a:r>
+              <a:rPr/>
+              <a:t>Everything else in this course is machinery for doing that search well - and for telling whether the rules it found are real or an artefact of the sample you happened to collect.</a:t>
+            </a:r>
+          </a:p>
+          <a:p>
+            <a:pPr lvl="0" indent="0" marL="0">
+              <a:buNone/>
+            </a:pPr>
+          </a:p>
+          <a:p>
+            <a:pPr lvl="0" indent="0" marL="0">
+              <a:buNone/>
+            </a:pPr>
+            <a:r>
+              <a:rPr/>
+              <a:t>Worth adding: this framing is due to Arthur Samuel in the 1950s, and it is still the cleanest one-sentence description of what changed.</a:t>
             </a:r>
           </a:p>
         </p:txBody>
@@ -740,7 +812,35 @@
             </a:pPr>
             <a:r>
               <a:rPr/>
-              <a:t>Keep this brisk - the full treatment is in handout section 2.1. The one thing to stress is that D is UNKNOWN and FIXED. Unknown is why we need data; fixed is an assumption that quietly fails in practice, and when it does, models degrade. Promise them we return to that.</a:t>
+              <a:t>Keep this brisk - handout section 2.1 has the full treatment and they will read it.</a:t>
+            </a:r>
+          </a:p>
+          <a:p>
+            <a:pPr lvl="0" indent="0" marL="0">
+              <a:buNone/>
+            </a:pPr>
+          </a:p>
+          <a:p>
+            <a:pPr lvl="0" indent="0" marL="0">
+              <a:buNone/>
+            </a:pPr>
+            <a:r>
+              <a:rPr/>
+              <a:t>Two things to stress about D. It is UNKNOWN, which is why we need data at all. And it is assumed FIXED - the same distribution generates the training data and the data we will meet later. That assumption is quiet and it fails constantly in practice: the hospital changes its equipment, the users change, the season turns. When it fails, models degrade without any warning from their metrics. Promise them we return to it.</a:t>
+            </a:r>
+          </a:p>
+          <a:p>
+            <a:pPr lvl="0" indent="0" marL="0">
+              <a:buNone/>
+            </a:pPr>
+          </a:p>
+          <a:p>
+            <a:pPr lvl="0" indent="0" marL="0">
+              <a:buNone/>
+            </a:pPr>
+            <a:r>
+              <a:rPr/>
+              <a:t>The loss function is where the domain enters the mathematics. Choosing it is a decision about which mistakes matter, and we make that choice explicitly in twenty minutes.</a:t>
             </a:r>
           </a:p>
         </p:txBody>
@@ -822,7 +922,35 @@
             </a:pPr>
             <a:r>
               <a:rPr/>
-              <a:t>Name it: expected risk. Then deliver the punchline - we cannot compute it, because D is unknown. Pause there. This is the central obstacle of the field and everything else follows from it.</a:t>
+              <a:t>Name it: expected risk, sometimes called true risk or generalisation error.</a:t>
+            </a:r>
+          </a:p>
+          <a:p>
+            <a:pPr lvl="0" indent="0" marL="0">
+              <a:buNone/>
+            </a:pPr>
+          </a:p>
+          <a:p>
+            <a:pPr lvl="0" indent="0" marL="0">
+              <a:buNone/>
+            </a:pPr>
+            <a:r>
+              <a:rPr/>
+              <a:t>Then deliver the punchline and pause on it - we cannot compute this. D is unknown, the expectation is over data that has not been collected, and no amount of cleverness gets around it.</a:t>
+            </a:r>
+          </a:p>
+          <a:p>
+            <a:pPr lvl="0" indent="0" marL="0">
+              <a:buNone/>
+            </a:pPr>
+          </a:p>
+          <a:p>
+            <a:pPr lvl="0" indent="0" marL="0">
+              <a:buNone/>
+            </a:pPr>
+            <a:r>
+              <a:rPr/>
+              <a:t>This is the central obstacle of the field, and everything else in the course follows from it. If a student takes one idea away today, this is a good candidate.</a:t>
             </a:r>
           </a:p>
         </p:txBody>
@@ -904,7 +1032,21 @@
             </a:pPr>
             <a:r>
               <a:rPr/>
-              <a:t>Empirical risk. Minimising it is called empirical risk minimisation, and essentially every method in this course is an instance of it. Ask the room: what could go wrong with minimising this instead of the thing we actually want? Someone will get it.</a:t>
+              <a:t>Empirical risk. Minimising it is empirical risk minimisation, and essentially every method in this course is an instance of it - linear regression, logistic regression, trees, neural networks. Different function classes, same principle.</a:t>
+            </a:r>
+          </a:p>
+          <a:p>
+            <a:pPr lvl="0" indent="0" marL="0">
+              <a:buNone/>
+            </a:pPr>
+          </a:p>
+          <a:p>
+            <a:pPr lvl="0" indent="0" marL="0">
+              <a:buNone/>
+            </a:pPr>
+            <a:r>
+              <a:rPr/>
+              <a:t>Ask the room: what could go wrong with minimising this instead of the thing we actually want? Give them a moment. Someone usually says “it might not generalise”, which is exactly right and is the next slide.</a:t>
             </a:r>
           </a:p>
         </p:txBody>
@@ -986,7 +1128,63 @@
             </a:pPr>
             <a:r>
               <a:rPr/>
-              <a:t>The central slide of the lesson. A model that stores every training pair and recites answers has zero empirical risk and is useless. So performance on data you fitted to is always optimistic and sometimes meaningless. Everything about held-out data exists to estimate the number we cannot compute.</a:t>
+              <a:t>The central slide of the lesson. Walk the figure carefully.</a:t>
+            </a:r>
+          </a:p>
+          <a:p>
+            <a:pPr lvl="0" indent="0" marL="0">
+              <a:buNone/>
+            </a:pPr>
+          </a:p>
+          <a:p>
+            <a:pPr lvl="0" indent="0" marL="0">
+              <a:buNone/>
+            </a:pPr>
+            <a:r>
+              <a:rPr/>
+              <a:t>Empirical risk falls monotonically as the model gets more flexible - more parameters always fit the sample better, and with enough of them you reach zero by storing every example and reciting its answer.</a:t>
+            </a:r>
+          </a:p>
+          <a:p>
+            <a:pPr lvl="0" indent="0" marL="0">
+              <a:buNone/>
+            </a:pPr>
+          </a:p>
+          <a:p>
+            <a:pPr lvl="0" indent="0" marL="0">
+              <a:buNone/>
+            </a:pPr>
+            <a:r>
+              <a:rPr/>
+              <a:t>Expected risk turns back up. The shaded region between the curves is overfitting: the model has learnt the sample rather than the pattern.</a:t>
+            </a:r>
+          </a:p>
+          <a:p>
+            <a:pPr lvl="0" indent="0" marL="0">
+              <a:buNone/>
+            </a:pPr>
+          </a:p>
+          <a:p>
+            <a:pPr lvl="0" indent="0" marL="0">
+              <a:buNone/>
+            </a:pPr>
+            <a:r>
+              <a:rPr/>
+              <a:t>The consequence for practice: performance on data you fitted to is ALWAYS optimistic and sometimes meaningless. Handout section 2.2 makes the argument in full.</a:t>
+            </a:r>
+          </a:p>
+          <a:p>
+            <a:pPr lvl="0" indent="0" marL="0">
+              <a:buNone/>
+            </a:pPr>
+          </a:p>
+          <a:p>
+            <a:pPr lvl="0" indent="0" marL="0">
+              <a:buNone/>
+            </a:pPr>
+            <a:r>
+              <a:rPr/>
+              <a:t>Note the dotted line - the best trade-off - and say we spend lesson 5 learning to find it honestly, and lessons 3 and 7 meeting the two standard tools for controlling it, regularisation and ensembling.</a:t>
             </a:r>
           </a:p>
         </p:txBody>
@@ -1068,7 +1266,35 @@
             </a:pPr>
             <a:r>
               <a:rPr/>
-              <a:t>Say clearly: this is not bureaucratic caution, it is the only thing standing between them and a meaningless number. We will violate it deliberately later today and watch 77% accuracy appear out of pure noise.</a:t>
+              <a:t>Three fits to identical points. Left: a straight line cannot follow the curve, so it is wrong everywhere in the same way - high bias, poor on training AND test data. Right: degree-18 passes through nearly every point and oscillates wildly between them - it will be badly wrong on anything new.</a:t>
+            </a:r>
+          </a:p>
+          <a:p>
+            <a:pPr lvl="0" indent="0" marL="0">
+              <a:buNone/>
+            </a:pPr>
+          </a:p>
+          <a:p>
+            <a:pPr lvl="0" indent="0" marL="0">
+              <a:buNone/>
+            </a:pPr>
+            <a:r>
+              <a:rPr/>
+              <a:t>Ask which one they would choose without seeing the dashed line. That is the real situation: the true pattern is never visible, only the sample.</a:t>
+            </a:r>
+          </a:p>
+          <a:p>
+            <a:pPr lvl="0" indent="0" marL="0">
+              <a:buNone/>
+            </a:pPr>
+          </a:p>
+          <a:p>
+            <a:pPr lvl="0" indent="0" marL="0">
+              <a:buNone/>
+            </a:pPr>
+            <a:r>
+              <a:rPr/>
+              <a:t>Point out the trap in the right-hand panel - it has the LOWEST training error of the three. If you selected a model by training error you would pick it every time. That is precisely why we hold data out.</a:t>
             </a:r>
           </a:p>
         </p:txBody>
@@ -1150,7 +1376,35 @@
             </a:pPr>
             <a:r>
               <a:rPr/>
-              <a:t>Unfashionable and immediately useful. Give the even-number example for the first, and say it is violated constantly because ML is the interesting option. For the fourth, note that a model is not neutral because it is mathematical - it is a compressed summary of the decisions in its training data. We return to this at the end.</a:t>
+              <a:t>Say clearly: this is not bureaucratic caution. It is the only thing standing between them and a meaningless number, and it is the operational consequence of the last two slides - since the expected risk cannot be computed, we estimate it on data the model has never seen.</a:t>
+            </a:r>
+          </a:p>
+          <a:p>
+            <a:pPr lvl="0" indent="0" marL="0">
+              <a:buNone/>
+            </a:pPr>
+          </a:p>
+          <a:p>
+            <a:pPr lvl="0" indent="0" marL="0">
+              <a:buNone/>
+            </a:pPr>
+            <a:r>
+              <a:rPr/>
+              <a:t>Warn them we will violate this deliberately later today and watch 77% accuracy appear out of pure random noise.</a:t>
+            </a:r>
+          </a:p>
+          <a:p>
+            <a:pPr lvl="0" indent="0" marL="0">
+              <a:buNone/>
+            </a:pPr>
+          </a:p>
+          <a:p>
+            <a:pPr lvl="0" indent="0" marL="0">
+              <a:buNone/>
+            </a:pPr>
+            <a:r>
+              <a:rPr/>
+              <a:t>If someone asks “how much do we hold out?” - typically 20-30%, and lesson 5 explains the trade-off: more test data gives a more reliable estimate, less training data gives a worse model.</a:t>
             </a:r>
           </a:p>
         </p:txBody>
@@ -1232,7 +1486,77 @@
             </a:pPr>
             <a:r>
               <a:rPr/>
-              <a:t>Start the history section. The claim was philosophical as much as technical: thought might be computation. Weights were set by hand, nothing learned yet. Tell them the unit in lesson 9 is this unit with a smoother threshold - the history is not decoration, it is the same objects.</a:t>
+              <a:t>Unfashionable and immediately useful - handout section 3.</a:t>
+            </a:r>
+          </a:p>
+          <a:p>
+            <a:pPr lvl="0" indent="0" marL="0">
+              <a:buNone/>
+            </a:pPr>
+          </a:p>
+          <a:p>
+            <a:pPr lvl="0" indent="0" marL="0">
+              <a:buNone/>
+            </a:pPr>
+            <a:r>
+              <a:rPr/>
+              <a:t>First point: nobody should train a classifier to detect whether a number is even. It sounds obvious and is violated constantly, usually because ML is the interesting option and a rule is boring.</a:t>
+            </a:r>
+          </a:p>
+          <a:p>
+            <a:pPr lvl="0" indent="0" marL="0">
+              <a:buNone/>
+            </a:pPr>
+          </a:p>
+          <a:p>
+            <a:pPr lvl="0" indent="0" marL="0">
+              <a:buNone/>
+            </a:pPr>
+            <a:r>
+              <a:rPr/>
+              <a:t>Second: a model learns the distribution it was trained on. Sample from one hospital, deploy in another, and the measured accuracy says very little.</a:t>
+            </a:r>
+          </a:p>
+          <a:p>
+            <a:pPr lvl="0" indent="0" marL="0">
+              <a:buNone/>
+            </a:pPr>
+          </a:p>
+          <a:p>
+            <a:pPr lvl="0" indent="0" marL="0">
+              <a:buNone/>
+            </a:pPr>
+            <a:r>
+              <a:rPr/>
+              <a:t>Third: learned models are wrong sometimes, in ways that are hard to predict and often hard to explain. If a mistake is unrecoverable and nobody reviews the output, the question is not whether accuracy is high enough but whether anyone can tell when it has failed.</a:t>
+            </a:r>
+          </a:p>
+          <a:p>
+            <a:pPr lvl="0" indent="0" marL="0">
+              <a:buNone/>
+            </a:pPr>
+          </a:p>
+          <a:p>
+            <a:pPr lvl="0" indent="0" marL="0">
+              <a:buNone/>
+            </a:pPr>
+            <a:r>
+              <a:rPr/>
+              <a:t>Fourth: a model is not neutral because it is mathematical. It is a compressed summary of the decisions in its training data. We return to this at the end of the lesson.</a:t>
+            </a:r>
+          </a:p>
+          <a:p>
+            <a:pPr lvl="0" indent="0" marL="0">
+              <a:buNone/>
+            </a:pPr>
+          </a:p>
+          <a:p>
+            <a:pPr lvl="0" indent="0" marL="0">
+              <a:buNone/>
+            </a:pPr>
+            <a:r>
+              <a:rPr/>
+              <a:t>Fifth: often a threshold on one variable solves 90% of the problem, is understandable by everyone, and needs no maintenance. Establishing baselines - step 4 of the workflow - is partly how you discover this before building something complicated.</a:t>
             </a:r>
           </a:p>
         </p:txBody>
@@ -1314,7 +1638,21 @@
             </a:pPr>
             <a:r>
               <a:rPr/>
-              <a:t>Highlight the MOVE, not the test. Turing replaced an unanswerable question with a measurable proxy. That is exactly what they do every time they choose a metric, and it carries the same obligation: stay aware of the gap between what you measure and what you mean. Recommend the paper - it is readable and funny.</a:t>
+              <a:t>Open the history section with the whole arc visible, then walk the individual moments. Resources/history_of_ai.md has the full version with primary sources - tell them it is worth an hour and is not examinable in itself.</a:t>
+            </a:r>
+          </a:p>
+          <a:p>
+            <a:pPr lvl="0" indent="0" marL="0">
+              <a:buNone/>
+            </a:pPr>
+          </a:p>
+          <a:p>
+            <a:pPr lvl="0" indent="0" marL="0">
+              <a:buNone/>
+            </a:pPr>
+            <a:r>
+              <a:rPr/>
+              <a:t>The two grey bands are the AI winters. Point at them now and say the question for the next ten minutes is what caused them, because the answer is not “the technology did not work”.</a:t>
             </a:r>
           </a:p>
         </p:txBody>
@@ -1396,7 +1734,35 @@
             </a:pPr>
             <a:r>
               <a:rPr/>
-              <a:t>Let the room react to “two months”. Seventy years later it is unsolved. The optimism is not incidental - it is present at the field’s naming and it recurs on a cycle.</a:t>
+              <a:t>A neurophysiologist and a logician. Their claim was philosophical as much as technical: thought might be computation. They showed networks of such units can compute any logical proposition.</a:t>
+            </a:r>
+          </a:p>
+          <a:p>
+            <a:pPr lvl="0" indent="0" marL="0">
+              <a:buNone/>
+            </a:pPr>
+          </a:p>
+          <a:p>
+            <a:pPr lvl="0" indent="0" marL="0">
+              <a:buNone/>
+            </a:pPr>
+            <a:r>
+              <a:rPr/>
+              <a:t>Weights were set by hand - nothing learned yet. That comes in 1957.</a:t>
+            </a:r>
+          </a:p>
+          <a:p>
+            <a:pPr lvl="0" indent="0" marL="0">
+              <a:buNone/>
+            </a:pPr>
+          </a:p>
+          <a:p>
+            <a:pPr lvl="0" indent="0" marL="0">
+              <a:buNone/>
+            </a:pPr>
+            <a:r>
+              <a:rPr/>
+              <a:t>Tell them the unit in lesson 9 is this unit with a smoother threshold. The history is not decoration; it is the same objects under different names.</a:t>
             </a:r>
           </a:p>
         </p:txBody>
@@ -1478,7 +1844,35 @@
             </a:pPr>
             <a:r>
               <a:rPr/>
-              <a:t>Point at lesson 5 and say it is deliberately in the middle, not at the end. That is the lesson about whether your results mean anything, and everything after it depends on it. Mention explicitly: no LLMs in this course, they belong to another module. Some will be disappointed; tell them the material here is what those systems are built on.</a:t>
+              <a:t>Point at lesson 5 and say it is deliberately in the middle, not at the end. It is the lesson about whether results mean anything, and everything after it depends on it. Most courses put this material last, where it arrives too late to change how students work.</a:t>
+            </a:r>
+          </a:p>
+          <a:p>
+            <a:pPr lvl="0" indent="0" marL="0">
+              <a:buNone/>
+            </a:pPr>
+          </a:p>
+          <a:p>
+            <a:pPr lvl="0" indent="0" marL="0">
+              <a:buNone/>
+            </a:pPr>
+            <a:r>
+              <a:rPr/>
+              <a:t>Say explicitly that there are no LLMs in this course - they belong to another module in the programme. Some will be disappointed. Tell them the material here is what those systems are built on: the transformer is a neural network, trained by gradient descent on a loss function, and evaluated - badly, often - with the same statistical tools we will spend ten weeks on.</a:t>
+            </a:r>
+          </a:p>
+          <a:p>
+            <a:pPr lvl="0" indent="0" marL="0">
+              <a:buNone/>
+            </a:pPr>
+          </a:p>
+          <a:p>
+            <a:pPr lvl="0" indent="0" marL="0">
+              <a:buNone/>
+            </a:pPr>
+            <a:r>
+              <a:rPr/>
+              <a:t>If asked “will we do deep learning?”: yes, lessons 9 and 10, but on a laptop CPU and with the emphasis on understanding rather than scale.</a:t>
             </a:r>
           </a:p>
         </p:txBody>
@@ -1560,7 +1954,35 @@
             </a:pPr>
             <a:r>
               <a:rPr/>
-              <a:t>The first machine that learns. Stress the CONDITION on the theorem - “if linearly separable”. The theorem is true and the condition is doing heavy lifting. Then contrast with the press: the New York Times reported the Navy expected a machine that would walk, talk, see, write and reproduce itself.</a:t>
+              <a:t>Highlight the MOVE rather than the test. Turing opens by declaring the original question too meaningless to deserve discussion, and substitutes an operational one.</a:t>
+            </a:r>
+          </a:p>
+          <a:p>
+            <a:pPr lvl="0" indent="0" marL="0">
+              <a:buNone/>
+            </a:pPr>
+          </a:p>
+          <a:p>
+            <a:pPr lvl="0" indent="0" marL="0">
+              <a:buNone/>
+            </a:pPr>
+            <a:r>
+              <a:rPr/>
+              <a:t>That is exactly what they do every time they choose a metric: replace something that cannot be measured - “is this model good?” - with something that can. It carries the same obligation, to stay aware of the gap between the proxy and the thing itself. The whole of lesson 4 is about that gap for classification.</a:t>
+            </a:r>
+          </a:p>
+          <a:p>
+            <a:pPr lvl="0" indent="0" marL="0">
+              <a:buNone/>
+            </a:pPr>
+          </a:p>
+          <a:p>
+            <a:pPr lvl="0" indent="0" marL="0">
+              <a:buNone/>
+            </a:pPr>
+            <a:r>
+              <a:rPr/>
+              <a:t>Recommend the paper. It is readable, funny, and answers nine objections including “a machine can only do what it is told” - his reply, that this assumes we can foresee the consequences of what we tell it, has aged extremely well.</a:t>
             </a:r>
           </a:p>
         </p:txBody>
@@ -1642,7 +2064,21 @@
             </a:pPr>
             <a:r>
               <a:rPr/>
-              <a:t>Draw XOR on the board and let them see no line separates it. Then make the key point: the result applies to ONE LAYER. Multi-layer networks were known to be more expressive; what was missing was a way to train them. That distinction was lost, funding collapsed, and the field lost roughly fifteen years. In lesson 9 a hidden layer disposes of XOR in four lines.</a:t>
+              <a:t>Let the room react to “two months”. Seventy years later the problem is open.</a:t>
+            </a:r>
+          </a:p>
+          <a:p>
+            <a:pPr lvl="0" indent="0" marL="0">
+              <a:buNone/>
+            </a:pPr>
+          </a:p>
+          <a:p>
+            <a:pPr lvl="0" indent="0" marL="0">
+              <a:buNone/>
+            </a:pPr>
+            <a:r>
+              <a:rPr/>
+              <a:t>McCarthy, Minsky, Shannon and Rochester convened it. The optimism is not incidental - it is present at the field’s naming and it recurs on a cycle, which is the argument of this whole section.</a:t>
             </a:r>
           </a:p>
         </p:txBody>
@@ -1724,7 +2160,35 @@
             </a:pPr>
             <a:r>
               <a:rPr/>
-              <a:t>Note the technique had been derived before - Linnainmaa 1970, Werbos 1974 - without taking hold. Ideas need context as much as correctness. The second winter came in the early 90s: too little data, too little compute, and expert-system companies collapsing.</a:t>
+              <a:t>The first machine that learns. Physical hardware - photocells, potentiometers, motors.</a:t>
+            </a:r>
+          </a:p>
+          <a:p>
+            <a:pPr lvl="0" indent="0" marL="0">
+              <a:buNone/>
+            </a:pPr>
+          </a:p>
+          <a:p>
+            <a:pPr lvl="0" indent="0" marL="0">
+              <a:buNone/>
+            </a:pPr>
+            <a:r>
+              <a:rPr/>
+              <a:t>Stress the CONDITION on the theorem: “if linearly separable”. The theorem is true and that clause is carrying enormous weight, as 1969 will show.</a:t>
+            </a:r>
+          </a:p>
+          <a:p>
+            <a:pPr lvl="0" indent="0" marL="0">
+              <a:buNone/>
+            </a:pPr>
+          </a:p>
+          <a:p>
+            <a:pPr lvl="0" indent="0" marL="0">
+              <a:buNone/>
+            </a:pPr>
+            <a:r>
+              <a:rPr/>
+              <a:t>Then the contrast: the New York Times reported the Navy expected a machine that would walk, talk, see, write and reproduce itself. Same year, same machine. Ask them which of those two statements a careful reader could have checked.</a:t>
             </a:r>
           </a:p>
         </p:txBody>
@@ -1806,7 +2270,49 @@
             </a:pPr>
             <a:r>
               <a:rPr/>
-              <a:t>Say that most of this course lives here, and that it is where the reliable tools come from. It is unglamorous. It is also what actually gets deployed. Lessons 5, 6 and 7 are this period.</a:t>
+              <a:t>Draw XOR on the board - four points, alternating labels - and let them see that no single straight line separates them. Takes thirty seconds and lands permanently.</a:t>
+            </a:r>
+          </a:p>
+          <a:p>
+            <a:pPr lvl="0" indent="0" marL="0">
+              <a:buNone/>
+            </a:pPr>
+          </a:p>
+          <a:p>
+            <a:pPr lvl="0" indent="0" marL="0">
+              <a:buNone/>
+            </a:pPr>
+            <a:r>
+              <a:rPr/>
+              <a:t>Then the key point: the result applies to ONE LAYER. Multi-layer networks were already known to be more expressive; what was missing was a way to train them. That distinction was lost in the retelling, funding collapsed, and neural network research became close to unpublishable for a decade.</a:t>
+            </a:r>
+          </a:p>
+          <a:p>
+            <a:pPr lvl="0" indent="0" marL="0">
+              <a:buNone/>
+            </a:pPr>
+          </a:p>
+          <a:p>
+            <a:pPr lvl="0" indent="0" marL="0">
+              <a:buNone/>
+            </a:pPr>
+            <a:r>
+              <a:rPr/>
+              <a:t>In lesson 9 a hidden layer disposes of XOR in four lines of Keras. Fifteen years of lost time for a limitation that a correct reading would have scoped much more narrowly.</a:t>
+            </a:r>
+          </a:p>
+          <a:p>
+            <a:pPr lvl="0" indent="0" marL="0">
+              <a:buNone/>
+            </a:pPr>
+          </a:p>
+          <a:p>
+            <a:pPr lvl="0" indent="0" marL="0">
+              <a:buNone/>
+            </a:pPr>
+            <a:r>
+              <a:rPr/>
+              <a:t>The transferable lesson: a correct result about a restricted case was received as a verdict on the whole approach. That failure mode is alive and well in how ML results get reported today.</a:t>
             </a:r>
           </a:p>
         </p:txBody>
@@ -1888,7 +2394,35 @@
             </a:pPr>
             <a:r>
               <a:rPr/>
-              <a:t>The most important slide in the history section. What changed was DATA (1.2M labelled images) and COMPUTE (two consumer GPUs), plus details like ReLU and dropout. A conceptual advance would have been visible in 1989. This was a scaling result - and saying so is not a criticism, it is the key fact about the last decade.</a:t>
+              <a:t>Rumelhart, Hinton and Williams. Note the technique had been derived before - Linnainmaa 1970, Werbos 1974 - without taking hold. Ideas need context as much as correctness, which is a useful thing for a researcher to know.</a:t>
+            </a:r>
+          </a:p>
+          <a:p>
+            <a:pPr lvl="0" indent="0" marL="0">
+              <a:buNone/>
+            </a:pPr>
+          </a:p>
+          <a:p>
+            <a:pPr lvl="0" indent="0" marL="0">
+              <a:buNone/>
+            </a:pPr>
+            <a:r>
+              <a:rPr/>
+              <a:t>The second winter arrived in the early 1990s: networks were hard to train, needed more data than existed, and took too long on the hardware. Expert system companies collapsed as their products proved unmaintainable.</a:t>
+            </a:r>
+          </a:p>
+          <a:p>
+            <a:pPr lvl="0" indent="0" marL="0">
+              <a:buNone/>
+            </a:pPr>
+          </a:p>
+          <a:p>
+            <a:pPr lvl="0" indent="0" marL="0">
+              <a:buNone/>
+            </a:pPr>
+            <a:r>
+              <a:rPr/>
+              <a:t>Lesson 9 derives this algorithm.</a:t>
             </a:r>
           </a:p>
         </p:txBody>
@@ -1970,7 +2504,21 @@
             </a:pPr>
             <a:r>
               <a:rPr/>
-              <a:t>Leave the question marks. Ask the room what belongs there. The professional skill is distinguishing a demonstrated result from an extrapolated promise - Rosenblatt’s theorem was true, “it will reproduce itself” was not, and both appeared in the same press cycle. Point them at Resources/history_of_ai.md for the full version with primary sources.</a:t>
+              <a:t>Say that most of this course lives here, and it is where the reliable tools come from. SVMs arrived with theory explaining WHY they generalise. Random forests and boosting won competitions for a decade. The bias-variance decomposition and cross-validation became standard practice.</a:t>
+            </a:r>
+          </a:p>
+          <a:p>
+            <a:pPr lvl="0" indent="0" marL="0">
+              <a:buNone/>
+            </a:pPr>
+          </a:p>
+          <a:p>
+            <a:pPr lvl="0" indent="0" marL="0">
+              <a:buNone/>
+            </a:pPr>
+            <a:r>
+              <a:rPr/>
+              <a:t>It is unglamorous and it is what actually gets deployed. Lessons 5, 6 and 7 are this period, and lesson 5 in particular is its central contribution.</a:t>
             </a:r>
           </a:p>
         </p:txBody>
@@ -2052,7 +2600,49 @@
             </a:pPr>
             <a:r>
               <a:rPr/>
-              <a:t>Correct the common misconception immediately: it is not about which algorithm you use. The same estimator can serve more than one setting, as they will see in notebook 02.</a:t>
+              <a:t>The most important slide in the history section.</a:t>
+            </a:r>
+          </a:p>
+          <a:p>
+            <a:pPr lvl="0" indent="0" marL="0">
+              <a:buNone/>
+            </a:pPr>
+          </a:p>
+          <a:p>
+            <a:pPr lvl="0" indent="0" marL="0">
+              <a:buNone/>
+            </a:pPr>
+            <a:r>
+              <a:rPr/>
+              <a:t>What changed was DATA - ImageNet, 1.2 million labelled images, assembled over years - and COMPUTE, two consumer GPUs. Plus details that mattered: ReLU activations, dropout, augmentation.</a:t>
+            </a:r>
+          </a:p>
+          <a:p>
+            <a:pPr lvl="0" indent="0" marL="0">
+              <a:buNone/>
+            </a:pPr>
+          </a:p>
+          <a:p>
+            <a:pPr lvl="0" indent="0" marL="0">
+              <a:buNone/>
+            </a:pPr>
+            <a:r>
+              <a:rPr/>
+              <a:t>A conceptual advance would have been visible in 1989, when LeCun was already reading postal codes with convolutional networks. This was a scaling result.</a:t>
+            </a:r>
+          </a:p>
+          <a:p>
+            <a:pPr lvl="0" indent="0" marL="0">
+              <a:buNone/>
+            </a:pPr>
+          </a:p>
+          <a:p>
+            <a:pPr lvl="0" indent="0" marL="0">
+              <a:buNone/>
+            </a:pPr>
+            <a:r>
+              <a:rPr/>
+              <a:t>Saying so is not a criticism. It is the single most important fact about the last decade, and it licenses very different predictions than a conceptual breakthrough would.</a:t>
             </a:r>
           </a:p>
         </p:txBody>
@@ -2134,7 +2724,35 @@
             </a:pPr>
             <a:r>
               <a:rPr/>
-              <a:t>Lessons 3, 4, 6 and 7 are all supervised. Ask what the expensive part is - someone will say the labels. Confirm it: in practice labels, not algorithms and not compute, are what limits most real projects.</a:t>
+              <a:t>Leave the question marks and ask the room what belongs there. It usually produces a good discussion, and there is no answer you need to supply.</a:t>
+            </a:r>
+          </a:p>
+          <a:p>
+            <a:pPr lvl="0" indent="0" marL="0">
+              <a:buNone/>
+            </a:pPr>
+          </a:p>
+          <a:p>
+            <a:pPr lvl="0" indent="0" marL="0">
+              <a:buNone/>
+            </a:pPr>
+            <a:r>
+              <a:rPr/>
+              <a:t>Three things to draw out. First, distinguishing a demonstrated result from an extrapolated promise: Rosenblatt’s theorem was true, “it will reproduce itself” was not, and both appeared in the same press cycle. Second, asking what changed - idea or resources. Third, and this is the one they will use professionally: the winters were caused by the gap between claims and evidence, not by the technology being worthless. The perceptron was genuinely useful; it was oversold.</a:t>
+            </a:r>
+          </a:p>
+          <a:p>
+            <a:pPr lvl="0" indent="0" marL="0">
+              <a:buNone/>
+            </a:pPr>
+          </a:p>
+          <a:p>
+            <a:pPr lvl="0" indent="0" marL="0">
+              <a:buNone/>
+            </a:pPr>
+            <a:r>
+              <a:rPr/>
+              <a:t>Then make the connection explicit: the habit that prevents this is the same one we use to evaluate a model - state precisely what was measured, on what data, and what that does not establish.</a:t>
             </a:r>
           </a:p>
         </p:txBody>
@@ -2216,7 +2834,21 @@
             </a:pPr>
             <a:r>
               <a:rPr/>
-              <a:t>Lesson 8. The difficulty to plant now: there is no accuracy to report. The algorithm always returns groups, whether or not the data has any. Whether they mean something is a judgement about the domain and cannot be delegated to a metric.</a:t>
+              <a:t>Correct the common misconception immediately, before it takes hold. It is not about which algorithm you use: the same estimator can serve more than one setting, and they will see exactly that in notebook 02 where the supervised regression and the self-supervised task run identical code.</a:t>
+            </a:r>
+          </a:p>
+          <a:p>
+            <a:pPr lvl="0" indent="0" marL="0">
+              <a:buNone/>
+            </a:pPr>
+          </a:p>
+          <a:p>
+            <a:pPr lvl="0" indent="0" marL="0">
+              <a:buNone/>
+            </a:pPr>
+            <a:r>
+              <a:rPr/>
+              <a:t>Handout section 5 has the full taxonomy.</a:t>
             </a:r>
           </a:p>
         </p:txBody>
@@ -2298,7 +2930,35 @@
             </a:pPr>
             <a:r>
               <a:rPr/>
-              <a:t>The one they will have heard about without a clean definition. The reconstruction task is a PRETEXT: nobody wants a flavanoid predictor. Solving it forces the model to represent how the parts relate, and that transfers. Scale it up - hide a word, hide an image patch - and it is how modern large models are trained. Free supervision is why they scale.</a:t>
+              <a:t>Lessons 3, 4, 6 and 7 are all supervised, so this is most of the course.</a:t>
+            </a:r>
+          </a:p>
+          <a:p>
+            <a:pPr lvl="0" indent="0" marL="0">
+              <a:buNone/>
+            </a:pPr>
+          </a:p>
+          <a:p>
+            <a:pPr lvl="0" indent="0" marL="0">
+              <a:buNone/>
+            </a:pPr>
+            <a:r>
+              <a:rPr/>
+              <a:t>Ask what the expensive part is. Someone will say the labels, and that is right: in practice labels - not algorithms, not compute - are what limits most real projects. Somebody has to produce them, correctly, in quantity, and for many problems that is expensive or simply impossible.</a:t>
+            </a:r>
+          </a:p>
+          <a:p>
+            <a:pPr lvl="0" indent="0" marL="0">
+              <a:buNone/>
+            </a:pPr>
+          </a:p>
+          <a:p>
+            <a:pPr lvl="0" indent="0" marL="0">
+              <a:buNone/>
+            </a:pPr>
+            <a:r>
+              <a:rPr/>
+              <a:t>Give the concrete example: ImageNet took years of human annotation, and it is the reason 2012 happened when it did rather than in 1995.</a:t>
             </a:r>
           </a:p>
         </p:txBody>
@@ -2380,7 +3040,21 @@
             </a:pPr>
             <a:r>
               <a:rPr/>
-              <a:t>Be direct here. They can learn scikit-learn’s API from documentation in an afternoon. What takes a semester is knowing which number to trust. If they leave able to spot a broken evaluation in someone else’s work, the course succeeded.</a:t>
+              <a:t>Be direct here. They can learn the scikit-learn API from documentation in an afternoon, and they will. What takes a semester is knowing which number to trust.</a:t>
+            </a:r>
+          </a:p>
+          <a:p>
+            <a:pPr lvl="0" indent="0" marL="0">
+              <a:buNone/>
+            </a:pPr>
+          </a:p>
+          <a:p>
+            <a:pPr lvl="0" indent="0" marL="0">
+              <a:buNone/>
+            </a:pPr>
+            <a:r>
+              <a:rPr/>
+              <a:t>The concrete promise to make: if they leave this course able to look at someone else’s reported result - a paper, a colleague’s notebook, a vendor’s benchmark - and identify what is wrong with the evaluation, the course succeeded. That skill outlasts every library we touch.</a:t>
             </a:r>
           </a:p>
         </p:txBody>
@@ -2462,7 +3136,35 @@
             </a:pPr>
             <a:r>
               <a:rPr/>
-              <a:t>Walk through notebook 02 here, live. Same 178 wines in all three panels. Left: what the algorithm sees without labels. Middle: labels a person supplied. Right: groups found by geometry alone. Point out the cluster colours do not match the label colours - k-means numbers arbitrarily, and without labels there is nothing to align to. Warn them the high agreement here is a happy accident of this dataset.</a:t>
+              <a:t>Lesson 8.</a:t>
+            </a:r>
+          </a:p>
+          <a:p>
+            <a:pPr lvl="0" indent="0" marL="0">
+              <a:buNone/>
+            </a:pPr>
+          </a:p>
+          <a:p>
+            <a:pPr lvl="0" indent="0" marL="0">
+              <a:buNone/>
+            </a:pPr>
+            <a:r>
+              <a:rPr/>
+              <a:t>Plant the difficulty now: there is no accuracy to report. The algorithm ALWAYS returns clusters, whether or not the data contains any groups. Whether they mean something is a judgement about the domain and cannot be delegated to a metric.</a:t>
+            </a:r>
+          </a:p>
+          <a:p>
+            <a:pPr lvl="0" indent="0" marL="0">
+              <a:buNone/>
+            </a:pPr>
+          </a:p>
+          <a:p>
+            <a:pPr lvl="0" indent="0" marL="0">
+              <a:buNone/>
+            </a:pPr>
+            <a:r>
+              <a:rPr/>
+              <a:t>This is genuinely harder than supervised learning to do well, which is the opposite of how it is usually taught - it looks easier because there is no labelling effort.</a:t>
             </a:r>
           </a:p>
         </p:txBody>
@@ -2544,7 +3246,49 @@
             </a:pPr>
             <a:r>
               <a:rPr/>
-              <a:t>Read the cost column: it explains why self-supervision dominates where data is abundant and annotation is not. Then read the right-hand column and flag the trap: in two of three cases you cannot straightforwardly measure success at the thing you want.</a:t>
+              <a:t>The one they will have heard about without a clean definition, so define it precisely.</a:t>
+            </a:r>
+          </a:p>
+          <a:p>
+            <a:pPr lvl="0" indent="0" marL="0">
+              <a:buNone/>
+            </a:pPr>
+          </a:p>
+          <a:p>
+            <a:pPr lvl="0" indent="0" marL="0">
+              <a:buNone/>
+            </a:pPr>
+            <a:r>
+              <a:rPr/>
+              <a:t>The reconstruction task is a PRETEXT: nobody wants a flavanoid predictor, which is what notebook 02 builds. The point is that solving it forces the model to represent how the parts of an input relate, and that representation transfers to tasks you do care about.</a:t>
+            </a:r>
+          </a:p>
+          <a:p>
+            <a:pPr lvl="0" indent="0" marL="0">
+              <a:buNone/>
+            </a:pPr>
+          </a:p>
+          <a:p>
+            <a:pPr lvl="0" indent="0" marL="0">
+              <a:buNone/>
+            </a:pPr>
+            <a:r>
+              <a:rPr/>
+              <a:t>Scale the idea up - hide a word in a sentence, hide a patch of an image - and it is how modern large models are trained. Free supervision is precisely why they scale: text and images exist in enormous quantities and nobody has to annotate them.</a:t>
+            </a:r>
+          </a:p>
+          <a:p>
+            <a:pPr lvl="0" indent="0" marL="0">
+              <a:buNone/>
+            </a:pPr>
+          </a:p>
+          <a:p>
+            <a:pPr lvl="0" indent="0" marL="0">
+              <a:buNone/>
+            </a:pPr>
+            <a:r>
+              <a:rPr/>
+              <a:t>This is the honest one-paragraph answer to “how does ChatGPT learn?”, and it is worth giving them, since they will be asked it at every family dinner.</a:t>
             </a:r>
           </a:p>
         </p:txBody>
@@ -2626,7 +3370,49 @@
             </a:pPr>
             <a:r>
               <a:rPr/>
-              <a:t>Say the order is not a convention: several steps are only valid in this order. This is the map for notebook 01, which we now work through live. Tell them to open it.</a:t>
+              <a:t>Work notebook 02 here, live. The same 178 wines appear in all three panels.</a:t>
+            </a:r>
+          </a:p>
+          <a:p>
+            <a:pPr lvl="0" indent="0" marL="0">
+              <a:buNone/>
+            </a:pPr>
+          </a:p>
+          <a:p>
+            <a:pPr lvl="0" indent="0" marL="0">
+              <a:buNone/>
+            </a:pPr>
+            <a:r>
+              <a:rPr/>
+              <a:t>Left: what the algorithm sees when there are no labels - just points in space. Middle: labels supplied by a person. Right: groups found by geometry alone.</a:t>
+            </a:r>
+          </a:p>
+          <a:p>
+            <a:pPr lvl="0" indent="0" marL="0">
+              <a:buNone/>
+            </a:pPr>
+          </a:p>
+          <a:p>
+            <a:pPr lvl="0" indent="0" marL="0">
+              <a:buNone/>
+            </a:pPr>
+            <a:r>
+              <a:rPr/>
+              <a:t>Point out that the cluster colours do not match the label colours. k-means numbers its groups arbitrarily, and without labels there is nothing to align to. That arbitrariness IS the point of the unsupervised setting.</a:t>
+            </a:r>
+          </a:p>
+          <a:p>
+            <a:pPr lvl="0" indent="0" marL="0">
+              <a:buNone/>
+            </a:pPr>
+          </a:p>
+          <a:p>
+            <a:pPr lvl="0" indent="0" marL="0">
+              <a:buNone/>
+            </a:pPr>
+            <a:r>
+              <a:rPr/>
+              <a:t>Warn them the strong agreement here - adjusted Rand index 0.897 - is a happy accident of this dataset, where the chemical groups really are geometrically separated. Do not expect it. In most real data, clustering finds structure that corresponds to nothing you care about.</a:t>
             </a:r>
           </a:p>
         </p:txBody>
@@ -2708,7 +3494,21 @@
             </a:pPr>
             <a:r>
               <a:rPr/>
-              <a:t>The step everyone skips. In the tumour example the two errors are not comparable: a false alarm costs anxiety and a follow-up test; a missed malignancy can cost a life. Ask the room which they would rather make. That answer determines the metric - and it must be fixed BEFORE seeing results, or it is chosen to flatter them.</a:t>
+              <a:t>Read the cost column aloud: it explains why self-supervision dominates wherever data is abundant and annotation is not, and why supervised learning still wins whenever someone has already paid for good labels.</a:t>
+            </a:r>
+          </a:p>
+          <a:p>
+            <a:pPr lvl="0" indent="0" marL="0">
+              <a:buNone/>
+            </a:pPr>
+          </a:p>
+          <a:p>
+            <a:pPr lvl="0" indent="0" marL="0">
+              <a:buNone/>
+            </a:pPr>
+            <a:r>
+              <a:rPr/>
+              <a:t>Then read the right-hand column and flag the trap: in two cases out of three you cannot straightforwardly measure success at the thing you actually want. That is a much bigger practical problem than the choice of algorithm, and it is why unsupervised results are so often oversold.</a:t>
             </a:r>
           </a:p>
         </p:txBody>
@@ -2790,7 +3590,35 @@
             </a:pPr>
             <a:r>
               <a:rPr/>
-              <a:t>569 samples, 30 features, 357 benign against 212 malignant. Get them to compute the consequence out loud: always answering “benign” is right 63% of the time. That is the bar any real model has to clear, and it is why the next step exists.</a:t>
+              <a:t>Say the order is not a convention: several steps are only valid in this order, and step 3 is the one that cannot move - hence the colour.</a:t>
+            </a:r>
+          </a:p>
+          <a:p>
+            <a:pPr lvl="0" indent="0" marL="0">
+              <a:buNone/>
+            </a:pPr>
+          </a:p>
+          <a:p>
+            <a:pPr lvl="0" indent="0" marL="0">
+              <a:buNone/>
+            </a:pPr>
+            <a:r>
+              <a:rPr/>
+              <a:t>This is the map for notebook 01, which we now work through live. Tell them to open it and follow along rather than watch.</a:t>
+            </a:r>
+          </a:p>
+          <a:p>
+            <a:pPr lvl="0" indent="0" marL="0">
+              <a:buNone/>
+            </a:pPr>
+          </a:p>
+          <a:p>
+            <a:pPr lvl="0" indent="0" marL="0">
+              <a:buNone/>
+            </a:pPr>
+            <a:r>
+              <a:rPr/>
+              <a:t>Handout section 6 has each step in full. The two they will be tempted to skip are 1 and 4 - framing and baseline - and those are the two that make the difference between a result and a number.</a:t>
             </a:r>
           </a:p>
         </p:txBody>
@@ -2872,7 +3700,49 @@
             </a:pPr>
             <a:r>
               <a:rPr/>
-              <a:t>Return to the empirical/expected risk argument - this is that slide made operational. The moment anything from the test rows influences a decision, even computing a mean, the test set stops being unseen. Mention stratify: it keeps class proportions identical so the test set is a fair miniature.</a:t>
+              <a:t>The step everyone skips, and the one the exercise marks hardest.</a:t>
+            </a:r>
+          </a:p>
+          <a:p>
+            <a:pPr lvl="0" indent="0" marL="0">
+              <a:buNone/>
+            </a:pPr>
+          </a:p>
+          <a:p>
+            <a:pPr lvl="0" indent="0" marL="0">
+              <a:buNone/>
+            </a:pPr>
+            <a:r>
+              <a:rPr/>
+              <a:t>Our example: predicting whether a breast tumour is malignant from measurements of cell nuclei. A model here would be a screening aid, never a diagnosis - say that clearly, it matters.</a:t>
+            </a:r>
+          </a:p>
+          <a:p>
+            <a:pPr lvl="0" indent="0" marL="0">
+              <a:buNone/>
+            </a:pPr>
+          </a:p>
+          <a:p>
+            <a:pPr lvl="0" indent="0" marL="0">
+              <a:buNone/>
+            </a:pPr>
+            <a:r>
+              <a:rPr/>
+              <a:t>The two errors are not comparable. A false alarm costs anxiety and a follow-up test; a missed malignancy can cost a life. Ask the room which they would rather make, and let them answer before showing any metric.</a:t>
+            </a:r>
+          </a:p>
+          <a:p>
+            <a:pPr lvl="0" indent="0" marL="0">
+              <a:buNone/>
+            </a:pPr>
+          </a:p>
+          <a:p>
+            <a:pPr lvl="0" indent="0" marL="0">
+              <a:buNone/>
+            </a:pPr>
+            <a:r>
+              <a:rPr/>
+              <a:t>That answer determines the metric, and it must be fixed BEFORE seeing results. A metric chosen afterwards is a metric chosen to flatter - with enough candidates, one always looks good.</a:t>
             </a:r>
           </a:p>
         </p:txBody>
@@ -2954,7 +3824,35 @@
             </a:pPr>
             <a:r>
               <a:rPr/>
-              <a:t>Without this, “96% accuracy” has no scale. With it, they can see the model is worth something. On the imbalanced example later, the baseline will be unbeatable on accuracy and useless - which is the lesson, not a curiosity.</a:t>
+              <a:t>569 samples, 30 features, 357 benign against 212 malignant.</a:t>
+            </a:r>
+          </a:p>
+          <a:p>
+            <a:pPr lvl="0" indent="0" marL="0">
+              <a:buNone/>
+            </a:pPr>
+          </a:p>
+          <a:p>
+            <a:pPr lvl="0" indent="0" marL="0">
+              <a:buNone/>
+            </a:pPr>
+            <a:r>
+              <a:rPr/>
+              <a:t>Get them to compute the consequence out loud: always answering “benign” is right 62.7% of the time. That number is the bar any real model has to clear, and it is why step 4 exists.</a:t>
+            </a:r>
+          </a:p>
+          <a:p>
+            <a:pPr lvl="0" indent="0" marL="0">
+              <a:buNone/>
+            </a:pPr>
+          </a:p>
+          <a:p>
+            <a:pPr lvl="0" indent="0" marL="0">
+              <a:buNone/>
+            </a:pPr>
+            <a:r>
+              <a:rPr/>
+              <a:t>Mild imbalance here. Later today we will see what happens at 99 to 1, where the same reasoning destroys accuracy as a metric entirely.</a:t>
             </a:r>
           </a:p>
         </p:txBody>
@@ -3036,7 +3934,49 @@
             </a:pPr>
             <a:r>
               <a:rPr/>
-              <a:t>Explain WHY, not just what. StandardScaler learns a mean and a standard deviation - it is part of the model, not preparation of the data. Inside a pipeline it learns them from the training fold every time. Done by hand, one day you scale on the full dataset and nothing warns you. Structure beating discipline.</a:t>
+              <a:t>Return to the risk_gap figure verbally - this slide is that argument made operational.</a:t>
+            </a:r>
+          </a:p>
+          <a:p>
+            <a:pPr lvl="0" indent="0" marL="0">
+              <a:buNone/>
+            </a:pPr>
+          </a:p>
+          <a:p>
+            <a:pPr lvl="0" indent="0" marL="0">
+              <a:buNone/>
+            </a:pPr>
+            <a:r>
+              <a:rPr/>
+              <a:t>The moment anything from the test rows influences a decision, even something as innocent as computing a mean for scaling, the test set stops being unseen and the number it gives you is optimistic.</a:t>
+            </a:r>
+          </a:p>
+          <a:p>
+            <a:pPr lvl="0" indent="0" marL="0">
+              <a:buNone/>
+            </a:pPr>
+          </a:p>
+          <a:p>
+            <a:pPr lvl="0" indent="0" marL="0">
+              <a:buNone/>
+            </a:pPr>
+            <a:r>
+              <a:rPr/>
+              <a:t>Mention stratify=y: it keeps the class proportions identical in both parts, so the test set is a fair miniature of the whole. Without it, on a small or imbalanced dataset, you can get a test set whose composition differs from the training set by chance.</a:t>
+            </a:r>
+          </a:p>
+          <a:p>
+            <a:pPr lvl="0" indent="0" marL="0">
+              <a:buNone/>
+            </a:pPr>
+          </a:p>
+          <a:p>
+            <a:pPr lvl="0" indent="0" marL="0">
+              <a:buNone/>
+            </a:pPr>
+            <a:r>
+              <a:rPr/>
+              <a:t>They will violate this deliberately in the third notebook and see what it costs.</a:t>
             </a:r>
           </a:p>
         </p:txBody>
@@ -3118,7 +4058,35 @@
             </a:pPr>
             <a:r>
               <a:rPr/>
-              <a:t>Let “done?” hang. Someone will say no. If nobody does, ask what 0.986 does not tell them. Then move to the confusion matrix - this is the pivot of the lesson.</a:t>
+              <a:t>Without this, “96% accuracy” has no scale at all. With it, they can see whether the model is worth anything.</a:t>
+            </a:r>
+          </a:p>
+          <a:p>
+            <a:pPr lvl="0" indent="0" marL="0">
+              <a:buNone/>
+            </a:pPr>
+          </a:p>
+          <a:p>
+            <a:pPr lvl="0" indent="0" marL="0">
+              <a:buNone/>
+            </a:pPr>
+            <a:r>
+              <a:rPr/>
+              <a:t>DummyClassifier does this in two lines, and the exercise requires it.</a:t>
+            </a:r>
+          </a:p>
+          <a:p>
+            <a:pPr lvl="0" indent="0" marL="0">
+              <a:buNone/>
+            </a:pPr>
+          </a:p>
+          <a:p>
+            <a:pPr lvl="0" indent="0" marL="0">
+              <a:buNone/>
+            </a:pPr>
+            <a:r>
+              <a:rPr/>
+              <a:t>Foreshadow: on the imbalanced example later, the baseline will be unbeatable on accuracy and completely useless in practice. That is the lesson, not a curiosity - it is how you discover that accuracy is the wrong metric for your problem.</a:t>
             </a:r>
           </a:p>
         </p:txBody>
@@ -3200,7 +4168,49 @@
             </a:pPr>
             <a:r>
               <a:rPr/>
-              <a:t>One malignant tumour classified as benign. As a fraction it is 1 in 143 and vanishes into the accuracy figure. As a consequence it is a person sent home who should not have been. Say that sentence deliberately - it is the gap between a metric and what the metric stands for, and it is the most important idea today.</a:t>
+              <a:t>Explain WHY, not just what.</a:t>
+            </a:r>
+          </a:p>
+          <a:p>
+            <a:pPr lvl="0" indent="0" marL="0">
+              <a:buNone/>
+            </a:pPr>
+          </a:p>
+          <a:p>
+            <a:pPr lvl="0" indent="0" marL="0">
+              <a:buNone/>
+            </a:pPr>
+            <a:r>
+              <a:rPr/>
+              <a:t>StandardScaler LEARNS something - a mean and a standard deviation per feature. That makes it part of the model, not preparation of the data. Inside a pipeline it learns them from the training fold every time the pipeline is fitted, including inside each cross-validation fold in lesson 5.</a:t>
+            </a:r>
+          </a:p>
+          <a:p>
+            <a:pPr lvl="0" indent="0" marL="0">
+              <a:buNone/>
+            </a:pPr>
+          </a:p>
+          <a:p>
+            <a:pPr lvl="0" indent="0" marL="0">
+              <a:buNone/>
+            </a:pPr>
+            <a:r>
+              <a:rPr/>
+              <a:t>Write the two steps separately and one day you will scale using statistics computed over the whole dataset. Nothing warns you: no error, no exception, just a better number than you deserve.</a:t>
+            </a:r>
+          </a:p>
+          <a:p>
+            <a:pPr lvl="0" indent="0" marL="0">
+              <a:buNone/>
+            </a:pPr>
+          </a:p>
+          <a:p>
+            <a:pPr lvl="0" indent="0" marL="0">
+              <a:buNone/>
+            </a:pPr>
+            <a:r>
+              <a:rPr/>
+              <a:t>This is structure beating discipline, and it is the single most useful habit in the scikit-learn API.</a:t>
             </a:r>
           </a:p>
         </p:txBody>
@@ -3282,7 +4292,35 @@
             </a:pPr>
             <a:r>
               <a:rPr/>
-              <a:t>This is the framing for the whole course, so spend a minute on it. Within three weeks they will write thirty lines that give 95% accuracy on something. The hard question is whether it means anything. Say plainly: the most common failure in this field is not a bug, it is a number that was never valid in the first place.</a:t>
+              <a:t>This is the framing for the whole course, so spend a real minute on it. Handout section 1 develops it.</a:t>
+            </a:r>
+          </a:p>
+          <a:p>
+            <a:pPr lvl="0" indent="0" marL="0">
+              <a:buNone/>
+            </a:pPr>
+          </a:p>
+          <a:p>
+            <a:pPr lvl="0" indent="0" marL="0">
+              <a:buNone/>
+            </a:pPr>
+            <a:r>
+              <a:rPr/>
+              <a:t>Within three weeks they will write thirty lines that give 95% accuracy on something. The hard question is whether it means anything. Say plainly: the most common failure in this field is not a bug - the code runs exactly as written - it is a number that was never valid in the first place.</a:t>
+            </a:r>
+          </a:p>
+          <a:p>
+            <a:pPr lvl="0" indent="0" marL="0">
+              <a:buNone/>
+            </a:pPr>
+          </a:p>
+          <a:p>
+            <a:pPr lvl="0" indent="0" marL="0">
+              <a:buNone/>
+            </a:pPr>
+            <a:r>
+              <a:rPr/>
+              <a:t>Contrast with the audience this material used to serve: PhD engineers who had the mathematics and lacked the coding. This group is the mirror image, so the emphasis moves from “make it run” to “make it true”.</a:t>
             </a:r>
           </a:p>
         </p:txBody>
@@ -3364,7 +4402,21 @@
             </a:pPr>
             <a:r>
               <a:rPr/>
-              <a:t>Push recall to 1.0 by flagging everything and precision collapses; demand precision and you miss cases. No single number resolves the trade-off, because the resolution is not mathematical - it is a question about consequences and belongs to the people who bear them. Lesson 4 builds the tools; today they just need to see the trade-off exists.</a:t>
+              <a:t>Let “done?” hang for a few seconds. Someone will say no.</a:t>
+            </a:r>
+          </a:p>
+          <a:p>
+            <a:pPr lvl="0" indent="0" marL="0">
+              <a:buNone/>
+            </a:pPr>
+          </a:p>
+          <a:p>
+            <a:pPr lvl="0" indent="0" marL="0">
+              <a:buNone/>
+            </a:pPr>
+            <a:r>
+              <a:rPr/>
+              <a:t>If nobody does, ask what 0.986 does not tell them. Then move to the confusion matrix - this is the pivot of the entire lesson.</a:t>
             </a:r>
           </a:p>
         </p:txBody>
@@ -3446,7 +4498,49 @@
             </a:pPr>
             <a:r>
               <a:rPr/>
-              <a:t>Each omission is a later lesson - name them: 5, 6-7, 5 again. Then land the last line: that discipline is the reason the 0.986 is worth anything at all.</a:t>
+              <a:t>One malignant tumour classified as benign.</a:t>
+            </a:r>
+          </a:p>
+          <a:p>
+            <a:pPr lvl="0" indent="0" marL="0">
+              <a:buNone/>
+            </a:pPr>
+          </a:p>
+          <a:p>
+            <a:pPr lvl="0" indent="0" marL="0">
+              <a:buNone/>
+            </a:pPr>
+            <a:r>
+              <a:rPr/>
+              <a:t>As a fraction it is 1 in 143 and vanishes into the accuracy figure. As a consequence it is a person sent home who should not have been.</a:t>
+            </a:r>
+          </a:p>
+          <a:p>
+            <a:pPr lvl="0" indent="0" marL="0">
+              <a:buNone/>
+            </a:pPr>
+          </a:p>
+          <a:p>
+            <a:pPr lvl="0" indent="0" marL="0">
+              <a:buNone/>
+            </a:pPr>
+            <a:r>
+              <a:rPr/>
+              <a:t>Say that sentence deliberately and let it sit. It is the gap between a metric and what the metric stands for, and it is the most important idea in today’s lesson.</a:t>
+            </a:r>
+          </a:p>
+          <a:p>
+            <a:pPr lvl="0" indent="0" marL="0">
+              <a:buNone/>
+            </a:pPr>
+          </a:p>
+          <a:p>
+            <a:pPr lvl="0" indent="0" marL="0">
+              <a:buNone/>
+            </a:pPr>
+            <a:r>
+              <a:rPr/>
+              <a:t>Then the practical form: accuracy collapses every kind of mistake into one number, and our two mistakes are not comparable. The confusion matrix is the minimum tool for seeing them separately.</a:t>
             </a:r>
           </a:p>
         </p:txBody>
@@ -3528,7 +4622,49 @@
             </a:pPr>
             <a:r>
               <a:rPr/>
-              <a:t>Open notebook 03. Frame it: none of these is a coding error. All four run exactly as written and return a number a reviewer, supervisor or customer would accept. This is the section they should remember in five years.</a:t>
+              <a:t>Use the figure to make the trade-off physical: the threshold is a line you slide, and sliding it moves errors from one column to the other.</a:t>
+            </a:r>
+          </a:p>
+          <a:p>
+            <a:pPr lvl="0" indent="0" marL="0">
+              <a:buNone/>
+            </a:pPr>
+          </a:p>
+          <a:p>
+            <a:pPr lvl="0" indent="0" marL="0">
+              <a:buNone/>
+            </a:pPr>
+            <a:r>
+              <a:rPr/>
+              <a:t>Push recall towards 1.0 by flagging anything suspicious, and precision collapses - the clinic drowns in unnecessary biopsies. Demand high precision and you start missing cases.</a:t>
+            </a:r>
+          </a:p>
+          <a:p>
+            <a:pPr lvl="0" indent="0" marL="0">
+              <a:buNone/>
+            </a:pPr>
+          </a:p>
+          <a:p>
+            <a:pPr lvl="0" indent="0" marL="0">
+              <a:buNone/>
+            </a:pPr>
+            <a:r>
+              <a:rPr/>
+              <a:t>No single number resolves this, because the resolution is not mathematical. It is a question about consequences and it belongs to the people who bear them - here, patients and clinicians, not the person who trained the model.</a:t>
+            </a:r>
+          </a:p>
+          <a:p>
+            <a:pPr lvl="0" indent="0" marL="0">
+              <a:buNone/>
+            </a:pPr>
+          </a:p>
+          <a:p>
+            <a:pPr lvl="0" indent="0" marL="0">
+              <a:buNone/>
+            </a:pPr>
+            <a:r>
+              <a:rPr/>
+              <a:t>Lesson 4 builds the tools properly: ROC curves, precision-recall curves, choosing an operating point. Today they need to see that the trade-off exists and that it is not the model’s decision to make.</a:t>
             </a:r>
           </a:p>
         </p:txBody>
@@ -3610,7 +4746,21 @@
             </a:pPr>
             <a:r>
               <a:rPr/>
-              <a:t>Set it up carefully before revealing the result. Make sure they understand the data is pure noise by construction - no signal exists. Ask what accuracy they expect.</a:t>
+              <a:t>Name where each omission gets addressed: tuning and stability in lesson 5, model families in 6 and 7.</a:t>
+            </a:r>
+          </a:p>
+          <a:p>
+            <a:pPr lvl="0" indent="0" marL="0">
+              <a:buNone/>
+            </a:pPr>
+          </a:p>
+          <a:p>
+            <a:pPr lvl="0" indent="0" marL="0">
+              <a:buNone/>
+            </a:pPr>
+            <a:r>
+              <a:rPr/>
+              <a:t>Then land the last line, which is the point of the slide: that discipline is the reason the 0.986 is worth anything at all. Every one of the four failures we are about to see comes from breaking it in some form.</a:t>
             </a:r>
           </a:p>
         </p:txBody>
@@ -3692,7 +4842,21 @@
             </a:pPr>
             <a:r>
               <a:rPr/>
-              <a:t>77% on pure noise. Explain the mechanism: with 5000 random features some correlate with the labels by chance, including the labels of rows that later become the test set. The selection encoded information about the test labels. Nobody wrote a bug. Then ask what happens with 20000 features - it gets WORSE, because there are more chances for a spurious correlation.</a:t>
+              <a:t>Open notebook 03. Frame it before starting: none of these is a coding error. All four run exactly as written and return a number that a reviewer, a supervisor or a customer would accept.</a:t>
+            </a:r>
+          </a:p>
+          <a:p>
+            <a:pPr lvl="0" indent="0" marL="0">
+              <a:buNone/>
+            </a:pPr>
+          </a:p>
+          <a:p>
+            <a:pPr lvl="0" indent="0" marL="0">
+              <a:buNone/>
+            </a:pPr>
+            <a:r>
+              <a:rPr/>
+              <a:t>This is the section they should still remember in five years. Handout section 7 summarises it, and every one of the four has been found in published work and in shipped products.</a:t>
             </a:r>
           </a:p>
         </p:txBody>
@@ -3774,7 +4938,21 @@
             </a:pPr>
             <a:r>
               <a:rPr/>
-              <a:t>This is the practical takeaway from the whole leakage section. Pipelines enforce it structurally. Tell them: if they remember one operational rule from today, this is it.</a:t>
+              <a:t>Set this up carefully before revealing anything. Make sure they understand the data is pure noise BY CONSTRUCTION - the labels come from a random number generator and no feature carries any information about them.</a:t>
+            </a:r>
+          </a:p>
+          <a:p>
+            <a:pPr lvl="0" indent="0" marL="0">
+              <a:buNone/>
+            </a:pPr>
+          </a:p>
+          <a:p>
+            <a:pPr lvl="0" indent="0" marL="0">
+              <a:buNone/>
+            </a:pPr>
+            <a:r>
+              <a:rPr/>
+              <a:t>Ask what accuracy they expect. The honest answer is 50%, chance.</a:t>
             </a:r>
           </a:p>
         </p:txBody>
@@ -3856,7 +5034,49 @@
             </a:pPr>
             <a:r>
               <a:rPr/>
-              <a:t>The trained model in the notebook reaches 0.987 accuracy - barely above the trivial one - while missing 20 of 21 positives. On a problem where the positives are the entire reason the system exists. Accuracy is dominated by the class nobody is looking for.</a:t>
+              <a:t>77% on pure noise, against 50% for the honest pipeline.</a:t>
+            </a:r>
+          </a:p>
+          <a:p>
+            <a:pPr lvl="0" indent="0" marL="0">
+              <a:buNone/>
+            </a:pPr>
+          </a:p>
+          <a:p>
+            <a:pPr lvl="0" indent="0" marL="0">
+              <a:buNone/>
+            </a:pPr>
+            <a:r>
+              <a:rPr/>
+              <a:t>Explain the mechanism: with 5000 random features, some correlate with the labels by chance. Selecting the best 20 using the whole dataset picks exactly those - including the ones that correlate with the labels of rows that later become the test set. The selection encoded information about the test labels, and the model inherited it.</a:t>
+            </a:r>
+          </a:p>
+          <a:p>
+            <a:pPr lvl="0" indent="0" marL="0">
+              <a:buNone/>
+            </a:pPr>
+          </a:p>
+          <a:p>
+            <a:pPr lvl="0" indent="0" marL="0">
+              <a:buNone/>
+            </a:pPr>
+            <a:r>
+              <a:rPr/>
+              <a:t>Nobody wrote a bug. Selection feels harmless because it fits no model - but it LEARNS from data, so it belongs inside the training fold.</a:t>
+            </a:r>
+          </a:p>
+          <a:p>
+            <a:pPr lvl="0" indent="0" marL="0">
+              <a:buNone/>
+            </a:pPr>
+          </a:p>
+          <a:p>
+            <a:pPr lvl="0" indent="0" marL="0">
+              <a:buNone/>
+            </a:pPr>
+            <a:r>
+              <a:rPr/>
+              <a:t>Then ask what happens with 20000 features instead of 5000. The illusion gets STRONGER, because there are more opportunities for a spurious correlation. That is the “try this” at the end of the notebook.</a:t>
             </a:r>
           </a:p>
         </p:txBody>
@@ -3938,7 +5158,35 @@
             </a:pPr>
             <a:r>
               <a:rPr/>
-              <a:t>Explain why it is worthless: the field is only populated after the diagnosis it is supposed to predict. At prediction time for a new patient it is empty. Then the key point - no metric detects this, including cross-validated ones, because the information genuinely is in the training data. Only knowing HOW THE DATA WAS RECORDED catches it. Ask them to imagine a hospital extract with 200 columns and no documentation.</a:t>
+              <a:t>The practical takeaway from the whole leakage section, and the thing to put on the board if anything goes on the board today.</a:t>
+            </a:r>
+          </a:p>
+          <a:p>
+            <a:pPr lvl="0" indent="0" marL="0">
+              <a:buNone/>
+            </a:pPr>
+          </a:p>
+          <a:p>
+            <a:pPr lvl="0" indent="0" marL="0">
+              <a:buNone/>
+            </a:pPr>
+            <a:r>
+              <a:rPr/>
+              <a:t>Pipelines enforce it structurally, which is why we used one from the first notebook.</a:t>
+            </a:r>
+          </a:p>
+          <a:p>
+            <a:pPr lvl="0" indent="0" marL="0">
+              <a:buNone/>
+            </a:pPr>
+          </a:p>
+          <a:p>
+            <a:pPr lvl="0" indent="0" marL="0">
+              <a:buNone/>
+            </a:pPr>
+            <a:r>
+              <a:rPr/>
+              <a:t>Tell them the exercise checks this: scaling the full dataset before splitting caps the methodology marks regardless of the result obtained.</a:t>
             </a:r>
           </a:p>
         </p:txBody>
@@ -4020,7 +5268,35 @@
             </a:pPr>
             <a:r>
               <a:rPr/>
-              <a:t>Same model, same data, 30 different seeds. Spread of 0.083 - larger than most claimed improvements between competing methods in the literature. Pick your favourite seed and report anything in that range; a reader cannot tell. A number quoted without variability is incomplete. Lesson 5 makes this the centre of the course.</a:t>
+              <a:t>The trained model in the notebook reaches 0.987 accuracy - barely above the trivial one - while missing 20 of the 21 positives in the test set.</a:t>
+            </a:r>
+          </a:p>
+          <a:p>
+            <a:pPr lvl="0" indent="0" marL="0">
+              <a:buNone/>
+            </a:pPr>
+          </a:p>
+          <a:p>
+            <a:pPr lvl="0" indent="0" marL="0">
+              <a:buNone/>
+            </a:pPr>
+            <a:r>
+              <a:rPr/>
+              <a:t>On a problem where the positives are the entire reason the system exists.</a:t>
+            </a:r>
+          </a:p>
+          <a:p>
+            <a:pPr lvl="0" indent="0" marL="0">
+              <a:buNone/>
+            </a:pPr>
+          </a:p>
+          <a:p>
+            <a:pPr lvl="0" indent="0" marL="0">
+              <a:buNone/>
+            </a:pPr>
+            <a:r>
+              <a:rPr/>
+              <a:t>Accuracy is dominated by the class nobody is looking for. Ask them what metric they would report to someone deploying this, and steer towards recall on the positive class - then note that recall alone is also gameable, by flagging everything, which is why lesson 4 needs a whole session.</a:t>
             </a:r>
           </a:p>
         </p:txBody>
@@ -4102,7 +5378,49 @@
             </a:pPr>
             <a:r>
               <a:rPr/>
-              <a:t>They are caught by asking questions about the data and the process, not by reading the metric. Give them the question to carry: where did this number come from, what does it leave out, and would it still hold on data I have never touched?</a:t>
+              <a:t>Explain why it is worthless: biopsies are scheduled once malignancy is already suspected, so the field is populated AFTER the diagnosis it is supposed to predict. At prediction time for a new patient it is empty.</a:t>
+            </a:r>
+          </a:p>
+          <a:p>
+            <a:pPr lvl="0" indent="0" marL="0">
+              <a:buNone/>
+            </a:pPr>
+          </a:p>
+          <a:p>
+            <a:pPr lvl="0" indent="0" marL="0">
+              <a:buNone/>
+            </a:pPr>
+            <a:r>
+              <a:rPr/>
+              <a:t>Then the point that makes this different from the others: no metric detects it, including cross-validated ones, because the information genuinely IS in the training data. The model is not cheating; the data is.</a:t>
+            </a:r>
+          </a:p>
+          <a:p>
+            <a:pPr lvl="0" indent="0" marL="0">
+              <a:buNone/>
+            </a:pPr>
+          </a:p>
+          <a:p>
+            <a:pPr lvl="0" indent="0" marL="0">
+              <a:buNone/>
+            </a:pPr>
+            <a:r>
+              <a:rPr/>
+              <a:t>Only knowing how the data was recorded catches it. Ask them to imagine a hospital extract with 200 columns and no documentation - which is the normal case - and to think about how they would find this.</a:t>
+            </a:r>
+          </a:p>
+          <a:p>
+            <a:pPr lvl="0" indent="0" marL="0">
+              <a:buNone/>
+            </a:pPr>
+          </a:p>
+          <a:p>
+            <a:pPr lvl="0" indent="0" marL="0">
+              <a:buNone/>
+            </a:pPr>
+            <a:r>
+              <a:rPr/>
+              <a:t>The question to carry: at the moment a prediction is needed, does this value exist yet?</a:t>
             </a:r>
           </a:p>
         </p:txBody>
@@ -4184,7 +5502,49 @@
             </a:pPr>
             <a:r>
               <a:rPr/>
-              <a:t>Set expectations now. The exercises are not optional and they build towards the project. Point them at Assessment/ in the repository, and say the project brief is available today so they can start thinking about a dataset. Emphasise: methodology outweighs accuracy in every component. Two students with different scores can both get full marks; a spectacular score obtained by leaking the test set will not.</a:t>
+              <a:t>Set expectations now. The exercises are not optional and they build towards the project: by lesson 5 they should be able to write their project’s evaluation plan, by lesson 7 to have a draft comparison.</a:t>
+            </a:r>
+          </a:p>
+          <a:p>
+            <a:pPr lvl="0" indent="0" marL="0">
+              <a:buNone/>
+            </a:pPr>
+          </a:p>
+          <a:p>
+            <a:pPr lvl="0" indent="0" marL="0">
+              <a:buNone/>
+            </a:pPr>
+            <a:r>
+              <a:rPr/>
+              <a:t>Point them at Assessment/ in the repository. The project brief is available today, so they can start thinking about a dataset - the topic must be confirmed by lesson 4.</a:t>
+            </a:r>
+          </a:p>
+          <a:p>
+            <a:pPr lvl="0" indent="0" marL="0">
+              <a:buNone/>
+            </a:pPr>
+          </a:p>
+          <a:p>
+            <a:pPr lvl="0" indent="0" marL="0">
+              <a:buNone/>
+            </a:pPr>
+            <a:r>
+              <a:rPr/>
+              <a:t>Emphasise the principle that runs through all three components: methodology outweighs accuracy. Two students with different scores can both earn full marks. A spectacular score obtained by leaking the test set will not - the rubric caps methodology marks at 40% for that, and today’s third notebook shows exactly why.</a:t>
+            </a:r>
+          </a:p>
+          <a:p>
+            <a:pPr lvl="0" indent="0" marL="0">
+              <a:buNone/>
+            </a:pPr>
+          </a:p>
+          <a:p>
+            <a:pPr lvl="0" indent="0" marL="0">
+              <a:buNone/>
+            </a:pPr>
+            <a:r>
+              <a:rPr/>
+              <a:t>The exam is closed book and drawn from the handouts, including the derivations. Say this now so nobody treats the handouts as optional reading.</a:t>
             </a:r>
           </a:p>
         </p:txBody>
@@ -4266,7 +5626,63 @@
             </a:pPr>
             <a:r>
               <a:rPr/>
-              <a:t>Close the loop with the “when not to use ML” slide. If past decisions discriminated, a model fitted to them discriminates - with an appearance of objectivity that makes it harder to contest than a human decision would be. And a model can be highly accurate and completely wrong about why, which is why it fails abruptly when conditions change. Keep this short and serious; do not moralise.</a:t>
+              <a:t>Same model, same data, 30 different random seeds. Accuracy ranges from 0.917 to 1.000 - a spread of 0.083.</a:t>
+            </a:r>
+          </a:p>
+          <a:p>
+            <a:pPr lvl="0" indent="0" marL="0">
+              <a:buNone/>
+            </a:pPr>
+          </a:p>
+          <a:p>
+            <a:pPr lvl="0" indent="0" marL="0">
+              <a:buNone/>
+            </a:pPr>
+            <a:r>
+              <a:rPr/>
+              <a:t>That is larger than most claimed improvements between competing methods in published work. Let that land.</a:t>
+            </a:r>
+          </a:p>
+          <a:p>
+            <a:pPr lvl="0" indent="0" marL="0">
+              <a:buNone/>
+            </a:pPr>
+          </a:p>
+          <a:p>
+            <a:pPr lvl="0" indent="0" marL="0">
+              <a:buNone/>
+            </a:pPr>
+            <a:r>
+              <a:rPr/>
+              <a:t>Pick your favourite seed and you can report anything in that range, and a reader seeing one number cannot tell which you got. This is not fraud; it is the default behaviour of anyone who runs the code once.</a:t>
+            </a:r>
+          </a:p>
+          <a:p>
+            <a:pPr lvl="0" indent="0" marL="0">
+              <a:buNone/>
+            </a:pPr>
+          </a:p>
+          <a:p>
+            <a:pPr lvl="0" indent="0" marL="0">
+              <a:buNone/>
+            </a:pPr>
+            <a:r>
+              <a:rPr/>
+              <a:t>Cross-validation replaces the single draw with an average and - more usefully - reports the spread. On this data, 5-fold gives 0.960 ± 0.030.</a:t>
+            </a:r>
+          </a:p>
+          <a:p>
+            <a:pPr lvl="0" indent="0" marL="0">
+              <a:buNone/>
+            </a:pPr>
+          </a:p>
+          <a:p>
+            <a:pPr lvl="0" indent="0" marL="0">
+              <a:buNone/>
+            </a:pPr>
+            <a:r>
+              <a:rPr/>
+              <a:t>A result quoted with no indication of variability is incomplete. Lesson 5 makes this the centre of the course.</a:t>
             </a:r>
           </a:p>
         </p:txBody>
@@ -4348,7 +5764,35 @@
             </a:pPr>
             <a:r>
               <a:rPr/>
-              <a:t>Set it explicitly, do not let them leave without knowing it exists. Walk through the tasks briefly. Flag task 7 - repeat the split with ten seeds - as the one that connects to what they just saw. Remind them: scaling the full dataset before splitting loses the methodology marks regardless of the score. Also point them at the quiz and at the project brief, so they can start thinking about a dataset.</a:t>
+              <a:t>They are caught by asking questions about the data and the process, not by reading the metric.</a:t>
+            </a:r>
+          </a:p>
+          <a:p>
+            <a:pPr lvl="0" indent="0" marL="0">
+              <a:buNone/>
+            </a:pPr>
+          </a:p>
+          <a:p>
+            <a:pPr lvl="0" indent="0" marL="0">
+              <a:buNone/>
+            </a:pPr>
+            <a:r>
+              <a:rPr/>
+              <a:t>Give them the three questions to carry out of this room: where did this number come from, what does it leave out, and would it still hold on data I have never touched?</a:t>
+            </a:r>
+          </a:p>
+          <a:p>
+            <a:pPr lvl="0" indent="0" marL="0">
+              <a:buNone/>
+            </a:pPr>
+          </a:p>
+          <a:p>
+            <a:pPr lvl="0" indent="0" marL="0">
+              <a:buNone/>
+            </a:pPr>
+            <a:r>
+              <a:rPr/>
+              <a:t>Then the professional version, connecting back to the history section: the habit of distinguishing what was demonstrated from what was extrapolated is the same habit, applied to your own work instead of someone else’s.</a:t>
             </a:r>
           </a:p>
         </p:txBody>
@@ -4430,7 +5874,63 @@
             </a:pPr>
             <a:r>
               <a:rPr/>
-              <a:t>Close on time. Offer to stay for setup problems. Tell them lesson 2 goes deeper into data preparation, and that the leakage they saw today was the simple version.</a:t>
+              <a:t>Close the loop with the “when not to use ML” slide. Handout section 8.</a:t>
+            </a:r>
+          </a:p>
+          <a:p>
+            <a:pPr lvl="0" indent="0" marL="0">
+              <a:buNone/>
+            </a:pPr>
+          </a:p>
+          <a:p>
+            <a:pPr lvl="0" indent="0" marL="0">
+              <a:buNone/>
+            </a:pPr>
+            <a:r>
+              <a:rPr/>
+              <a:t>If past decisions discriminated, a model fitted to them discriminates too - and it does so with an appearance of objectivity that makes it HARDER to contest than a human decision would be. “The algorithm decided” is a much harder claim to argue with than “the manager decided”.</a:t>
+            </a:r>
+          </a:p>
+          <a:p>
+            <a:pPr lvl="0" indent="0" marL="0">
+              <a:buNone/>
+            </a:pPr>
+          </a:p>
+          <a:p>
+            <a:pPr lvl="0" indent="0" marL="0">
+              <a:buNone/>
+            </a:pPr>
+            <a:r>
+              <a:rPr/>
+              <a:t>Second point: nothing in empirical risk minimisation distinguishes a cause from a coincidence that predicts well in this sample. A model can be highly accurate and completely wrong about why - which is exactly why it fails abruptly when conditions change.</a:t>
+            </a:r>
+          </a:p>
+          <a:p>
+            <a:pPr lvl="0" indent="0" marL="0">
+              <a:buNone/>
+            </a:pPr>
+          </a:p>
+          <a:p>
+            <a:pPr lvl="0" indent="0" marL="0">
+              <a:buNone/>
+            </a:pPr>
+            <a:r>
+              <a:rPr/>
+              <a:t>Third: whether a decision can be explained to the person affected, whether errors are recoverable, and who bears the cost of being wrong are engineering requirements. They belong in step 1, where they can still change what you build, not in a paragraph at the end of a report.</a:t>
+            </a:r>
+          </a:p>
+          <a:p>
+            <a:pPr lvl="0" indent="0" marL="0">
+              <a:buNone/>
+            </a:pPr>
+          </a:p>
+          <a:p>
+            <a:pPr lvl="0" indent="0" marL="0">
+              <a:buNone/>
+            </a:pPr>
+            <a:r>
+              <a:rPr/>
+              <a:t>Keep this short and serious. Do not moralise - state it and move on.</a:t>
             </a:r>
           </a:p>
         </p:txBody>
@@ -4453,6 +5953,240 @@
             <a:fld id="{18BDFEC3-8487-43E8-A154-7C12CBC1FFF2}" type="slidenum">
               <a:rPr lang="en-US"/>
               <a:t>53</a:t>
+            </a:fld>
+            <a:endParaRPr lang="en-US"/>
+          </a:p>
+        </p:txBody>
+      </p:sp>
+    </p:spTree>
+  </p:cSld>
+</p:notes>
+</file>
+
+<file path=ppt/notesSlides/notesSlide53.xml><?xml version="1.0" encoding="utf-8"?>
+<p:notes xmlns:a="http://schemas.openxmlformats.org/drawingml/2006/main" xmlns:r="http://schemas.openxmlformats.org/officeDocument/2006/relationships" xmlns:p="http://schemas.openxmlformats.org/presentationml/2006/main">
+  <p:cSld>
+    <p:spTree>
+      <p:nvGrpSpPr>
+        <p:cNvPr id="1" name=""/>
+        <p:cNvGrpSpPr/>
+        <p:nvPr/>
+      </p:nvGrpSpPr>
+      <p:grpSpPr>
+        <a:xfrm>
+          <a:off x="0" y="0"/>
+          <a:ext cx="0" cy="0"/>
+          <a:chOff x="0" y="0"/>
+          <a:chExt cx="0" cy="0"/>
+        </a:xfrm>
+      </p:grpSpPr>
+      <p:sp>
+        <p:nvSpPr>
+          <p:cNvPr id="2" name="Slide Image Placeholder 1"/>
+          <p:cNvSpPr>
+            <a:spLocks noGrp="1" noRot="1" noChangeAspect="1"/>
+          </p:cNvSpPr>
+          <p:nvPr>
+            <p:ph type="sldImg"/>
+          </p:nvPr>
+        </p:nvSpPr>
+        <p:spPr/>
+      </p:sp>
+      <p:sp>
+        <p:nvSpPr>
+          <p:cNvPr id="3" name="Notes Placeholder 2"/>
+          <p:cNvSpPr>
+            <a:spLocks noGrp="1"/>
+          </p:cNvSpPr>
+          <p:nvPr>
+            <p:ph type="body" idx="1"/>
+          </p:nvPr>
+        </p:nvSpPr>
+        <p:spPr/>
+        <p:txBody>
+          <a:bodyPr/>
+          <a:lstStyle/>
+          <a:p>
+            <a:pPr lvl="0" indent="0" marL="0">
+              <a:buNone/>
+            </a:pPr>
+            <a:r>
+              <a:rPr/>
+              <a:t>Set it explicitly - do not let anyone leave without knowing it exists and when it is due.</a:t>
+            </a:r>
+          </a:p>
+          <a:p>
+            <a:pPr lvl="0" indent="0" marL="0">
+              <a:buNone/>
+            </a:pPr>
+          </a:p>
+          <a:p>
+            <a:pPr lvl="0" indent="0" marL="0">
+              <a:buNone/>
+            </a:pPr>
+            <a:r>
+              <a:rPr/>
+              <a:t>Walk the tasks briefly. Task 1 is framing, and there is no single right answer: quality is an integer from 3 to 9, so they must decide how to treat it and defend the choice. Task 7 - repeat the split with ten seeds - connects directly to the figure they just saw.</a:t>
+            </a:r>
+          </a:p>
+          <a:p>
+            <a:pPr lvl="0" indent="0" marL="0">
+              <a:buNone/>
+            </a:pPr>
+          </a:p>
+          <a:p>
+            <a:pPr lvl="0" indent="0" marL="0">
+              <a:buNone/>
+            </a:pPr>
+            <a:r>
+              <a:rPr/>
+              <a:t>Remind them: scaling the full dataset before splitting loses the methodology marks regardless of the score. And there are no marks for accuracy anywhere in this course.</a:t>
+            </a:r>
+          </a:p>
+          <a:p>
+            <a:pPr lvl="0" indent="0" marL="0">
+              <a:buNone/>
+            </a:pPr>
+          </a:p>
+          <a:p>
+            <a:pPr lvl="0" indent="0" marL="0">
+              <a:buNone/>
+            </a:pPr>
+            <a:r>
+              <a:rPr/>
+              <a:t>Also point them at the quiz - 20 questions, ungraded, and the ones marked “reasoning” are the closest thing to the exam - and at the project brief, so they can start thinking about a dataset. Topic confirmed by lesson 4.</a:t>
+            </a:r>
+          </a:p>
+        </p:txBody>
+      </p:sp>
+      <p:sp>
+        <p:nvSpPr>
+          <p:cNvPr id="4" name="Slide Number Placeholder 3"/>
+          <p:cNvSpPr>
+            <a:spLocks noGrp="1"/>
+          </p:cNvSpPr>
+          <p:nvPr>
+            <p:ph type="sldNum" sz="quarter" idx="10"/>
+          </p:nvPr>
+        </p:nvSpPr>
+        <p:spPr/>
+        <p:txBody>
+          <a:bodyPr/>
+          <a:lstStyle/>
+          <a:p>
+            <a:fld id="{18BDFEC3-8487-43E8-A154-7C12CBC1FFF2}" type="slidenum">
+              <a:rPr lang="en-US"/>
+              <a:t>54</a:t>
+            </a:fld>
+            <a:endParaRPr lang="en-US"/>
+          </a:p>
+        </p:txBody>
+      </p:sp>
+    </p:spTree>
+  </p:cSld>
+</p:notes>
+</file>
+
+<file path=ppt/notesSlides/notesSlide54.xml><?xml version="1.0" encoding="utf-8"?>
+<p:notes xmlns:a="http://schemas.openxmlformats.org/drawingml/2006/main" xmlns:r="http://schemas.openxmlformats.org/officeDocument/2006/relationships" xmlns:p="http://schemas.openxmlformats.org/presentationml/2006/main">
+  <p:cSld>
+    <p:spTree>
+      <p:nvGrpSpPr>
+        <p:cNvPr id="1" name=""/>
+        <p:cNvGrpSpPr/>
+        <p:nvPr/>
+      </p:nvGrpSpPr>
+      <p:grpSpPr>
+        <a:xfrm>
+          <a:off x="0" y="0"/>
+          <a:ext cx="0" cy="0"/>
+          <a:chOff x="0" y="0"/>
+          <a:chExt cx="0" cy="0"/>
+        </a:xfrm>
+      </p:grpSpPr>
+      <p:sp>
+        <p:nvSpPr>
+          <p:cNvPr id="2" name="Slide Image Placeholder 1"/>
+          <p:cNvSpPr>
+            <a:spLocks noGrp="1" noRot="1" noChangeAspect="1"/>
+          </p:cNvSpPr>
+          <p:nvPr>
+            <p:ph type="sldImg"/>
+          </p:nvPr>
+        </p:nvSpPr>
+        <p:spPr/>
+      </p:sp>
+      <p:sp>
+        <p:nvSpPr>
+          <p:cNvPr id="3" name="Notes Placeholder 2"/>
+          <p:cNvSpPr>
+            <a:spLocks noGrp="1"/>
+          </p:cNvSpPr>
+          <p:nvPr>
+            <p:ph type="body" idx="1"/>
+          </p:nvPr>
+        </p:nvSpPr>
+        <p:spPr/>
+        <p:txBody>
+          <a:bodyPr/>
+          <a:lstStyle/>
+          <a:p>
+            <a:pPr lvl="0" indent="0" marL="0">
+              <a:buNone/>
+            </a:pPr>
+            <a:r>
+              <a:rPr/>
+              <a:t>Close on time and offer to stay for setup problems - it is worth twenty minutes now to avoid three people stuck for a fortnight.</a:t>
+            </a:r>
+          </a:p>
+          <a:p>
+            <a:pPr lvl="0" indent="0" marL="0">
+              <a:buNone/>
+            </a:pPr>
+          </a:p>
+          <a:p>
+            <a:pPr lvl="0" indent="0" marL="0">
+              <a:buNone/>
+            </a:pPr>
+            <a:r>
+              <a:rPr/>
+              <a:t>Tell them lesson 2 goes deeper into data preparation, and that the leakage they saw today was the simple, visible version. The next one is subtler.</a:t>
+            </a:r>
+          </a:p>
+          <a:p>
+            <a:pPr lvl="0" indent="0" marL="0">
+              <a:buNone/>
+            </a:pPr>
+          </a:p>
+          <a:p>
+            <a:pPr lvl="0" indent="0" marL="0">
+              <a:buNone/>
+            </a:pPr>
+            <a:r>
+              <a:rPr/>
+              <a:t>If anyone asks what to read beyond the handout: Resources/history_of_ai.md for context, and the scikit-learn “common pitfalls” page, which is the library’s own account of everything in notebook 03.</a:t>
+            </a:r>
+          </a:p>
+        </p:txBody>
+      </p:sp>
+      <p:sp>
+        <p:nvSpPr>
+          <p:cNvPr id="4" name="Slide Number Placeholder 3"/>
+          <p:cNvSpPr>
+            <a:spLocks noGrp="1"/>
+          </p:cNvSpPr>
+          <p:nvPr>
+            <p:ph type="sldNum" sz="quarter" idx="10"/>
+          </p:nvPr>
+        </p:nvSpPr>
+        <p:spPr/>
+        <p:txBody>
+          <a:bodyPr/>
+          <a:lstStyle/>
+          <a:p>
+            <a:fld id="{18BDFEC3-8487-43E8-A154-7C12CBC1FFF2}" type="slidenum">
+              <a:rPr lang="en-US"/>
+              <a:t>55</a:t>
             </a:fld>
             <a:endParaRPr lang="en-US"/>
           </a:p>
@@ -4512,7 +6246,49 @@
             </a:pPr>
             <a:r>
               <a:rPr/>
-              <a:t>Explain the division of labour, because it is unusual and it matters. Derivations are NOT on the slides — they are in the handout, to be read afterwards. In the room we do results, intuition and code. Tell them the exam draws on the handouts, so treating them as optional is a mistake.</a:t>
+              <a:t>Explain the division of labour, because it is unusual and it matters.</a:t>
+            </a:r>
+          </a:p>
+          <a:p>
+            <a:pPr lvl="0" indent="0" marL="0">
+              <a:buNone/>
+            </a:pPr>
+          </a:p>
+          <a:p>
+            <a:pPr lvl="0" indent="0" marL="0">
+              <a:buNone/>
+            </a:pPr>
+            <a:r>
+              <a:rPr/>
+              <a:t>Derivations are NOT on the slides. They are in the handout, to be read afterwards. In the room we do results, intuition and code. This is what lets the lecture move at a sensible pace while the course stays rigorous - and it is why the exam can ask them to reproduce a derivation.</a:t>
+            </a:r>
+          </a:p>
+          <a:p>
+            <a:pPr lvl="0" indent="0" marL="0">
+              <a:buNone/>
+            </a:pPr>
+          </a:p>
+          <a:p>
+            <a:pPr lvl="0" indent="0" marL="0">
+              <a:buNone/>
+            </a:pPr>
+            <a:r>
+              <a:rPr/>
+              <a:t>Slides and notebooks arrive on the Friday; the handout follows by the Monday, since it is study material rather than lecture support.</a:t>
+            </a:r>
+          </a:p>
+          <a:p>
+            <a:pPr lvl="0" indent="0" marL="0">
+              <a:buNone/>
+            </a:pPr>
+          </a:p>
+          <a:p>
+            <a:pPr lvl="0" indent="0" marL="0">
+              <a:buNone/>
+            </a:pPr>
+            <a:r>
+              <a:rPr/>
+              <a:t>The quizzes are self-check and ungraded, but three or four questions in each require reasoning about a derivation rather than recall - those are the closest thing to the exam they will see before the sample papers.</a:t>
             </a:r>
           </a:p>
         </p:txBody>
@@ -4594,7 +6370,21 @@
             </a:pPr>
             <a:r>
               <a:rPr/>
-              <a:t>Do this live. Take ten minutes and make sure everyone has JupyterLab running before moving on - it is far cheaper to fix now than during lesson 3. New material arrives with </a:t>
+              <a:t>Do this live and take ten minutes over it. Making sure everyone has JupyterLab running today is far cheaper than fixing it during lesson 3, when they also have an exercise due.</a:t>
+            </a:r>
+          </a:p>
+          <a:p>
+            <a:pPr lvl="0" indent="0" marL="0">
+              <a:buNone/>
+            </a:pPr>
+          </a:p>
+          <a:p>
+            <a:pPr lvl="0" indent="0" marL="0">
+              <a:buNone/>
+            </a:pPr>
+            <a:r>
+              <a:rPr/>
+              <a:t>Explain the two-part design: the Docker image carries the environment, the repository carries the content. New lessons arrive with </a:t>
             </a:r>
             <a:r>
               <a:rPr>
@@ -4604,7 +6394,21 @@
             </a:r>
             <a:r>
               <a:rPr/>
-              <a:t>, a few megabytes, not a new image. No API keys, no cloud accounts, no GPU: everything in this course runs on a laptop CPU, offline.</a:t>
+              <a:t> - a few megabytes, seconds - not a new multi-gigabyte image. The image only changes if the libraries change, and they will be told when that happens.</a:t>
+            </a:r>
+          </a:p>
+          <a:p>
+            <a:pPr lvl="0" indent="0" marL="0">
+              <a:buNone/>
+            </a:pPr>
+          </a:p>
+          <a:p>
+            <a:pPr lvl="0" indent="0" marL="0">
+              <a:buNone/>
+            </a:pPr>
+            <a:r>
+              <a:rPr/>
+              <a:t>Common problems: port 8888 already in use (edit docker-compose.yml to 8889), and the first pull taking several minutes on the room’s wifi. Warn them the first start is slow and every later one is not.</a:t>
             </a:r>
           </a:p>
         </p:txBody>
@@ -4686,7 +6490,21 @@
             </a:pPr>
             <a:r>
               <a:rPr/>
-              <a:t>Agenda slide. Flag the last item as the one that matters most today: everything before it is orientation, and that section is where the course’s real subject appears.</a:t>
+              <a:t>Agenda slide. Flag the last item as the one that matters most today: everything before it is orientation, and that section is where the real subject of the course appears.</a:t>
+            </a:r>
+          </a:p>
+          <a:p>
+            <a:pPr lvl="0" indent="0" marL="0">
+              <a:buNone/>
+            </a:pPr>
+          </a:p>
+          <a:p>
+            <a:pPr lvl="0" indent="0" marL="0">
+              <a:buNone/>
+            </a:pPr>
+            <a:r>
+              <a:rPr/>
+              <a:t>Timing: roughly 50 minutes to the break, then the three kinds of learning, then the workflow worked live, then the failure modes. Homework is set in the last five minutes - do not let it slip, it is due next Friday.</a:t>
             </a:r>
           </a:p>
         </p:txBody>
@@ -4768,7 +6586,35 @@
             </a:pPr>
             <a:r>
               <a:rPr/>
-              <a:t>Work this example conversationally. Ask the room for rules and write two or three on the board, then break each one. Get them to feel the frustration before offering the alternative. The point to land: the program is not hard to write, the RULE is impossible to state.</a:t>
+              <a:t>Work this conversationally. Ask the room for rules and write two or three on the board, then break each one: “buy now” - what about a legitimate shop newsletter? Sender blacklists - what about a compromised account belonging to a colleague?</a:t>
+            </a:r>
+          </a:p>
+          <a:p>
+            <a:pPr lvl="0" indent="0" marL="0">
+              <a:buNone/>
+            </a:pPr>
+          </a:p>
+          <a:p>
+            <a:pPr lvl="0" indent="0" marL="0">
+              <a:buNone/>
+            </a:pPr>
+            <a:r>
+              <a:rPr/>
+              <a:t>Get them to feel the frustration before offering the alternative. The point to land, and it is handout section 2: the program is not hard to write, the RULE is impossible to state. You recognise spam instantly and cannot articulate how.</a:t>
+            </a:r>
+          </a:p>
+          <a:p>
+            <a:pPr lvl="0" indent="0" marL="0">
+              <a:buNone/>
+            </a:pPr>
+          </a:p>
+          <a:p>
+            <a:pPr lvl="0" indent="0" marL="0">
+              <a:buNone/>
+            </a:pPr>
+            <a:r>
+              <a:rPr/>
+              <a:t>If someone proposes machine learning immediately, slow them down - the interesting part is understanding precisely which difficulty it addresses.</a:t>
             </a:r>
           </a:p>
         </p:txBody>
@@ -8049,8 +9895,8 @@
         </p:nvSpPr>
         <p:spPr>
           <a:xfrm>
-            <a:off x="457200" y="205979"/>
-            <a:ext cx="8229600" cy="857250"/>
+            <a:off x="457200" y="205740"/>
+            <a:ext cx="8229600" cy="874395"/>
           </a:xfrm>
         </p:spPr>
         <p:txBody>
@@ -8069,18 +9915,18 @@
       </p:sp>
       <p:sp>
         <p:nvSpPr>
-          <p:cNvPr id="3" name="Content Placeholder 2"/>
-          <p:cNvSpPr>
-            <a:spLocks noGrp="1"/>
-          </p:cNvSpPr>
-          <p:nvPr>
-            <p:ph idx="1"/>
+          <p:cNvPr id="4" name="Text Placeholder 3"/>
+          <p:cNvSpPr>
+            <a:spLocks noGrp="1"/>
+          </p:cNvSpPr>
+          <p:nvPr>
+            <p:ph idx="2" sz="half" type="body"/>
           </p:nvPr>
         </p:nvSpPr>
         <p:spPr>
           <a:xfrm>
-            <a:off x="457200" y="1200151"/>
-            <a:ext cx="8229600" cy="3394472"/>
+            <a:off x="457200" y="1183005"/>
+            <a:ext cx="8229600" cy="874395"/>
           </a:xfrm>
         </p:spPr>
         <p:txBody>
@@ -8103,17 +9949,38 @@
               <a:t> the answer.</a:t>
             </a:r>
           </a:p>
-          <a:p>
-            <a:pPr lvl="0" indent="0" marL="0">
-              <a:buNone/>
-            </a:pPr>
-            <a:r>
-              <a:rPr/>
-              <a:t>So: supply examples, and let a procedure find a rule consistent with them.</a:t>
-            </a:r>
-          </a:p>
-        </p:txBody>
-      </p:sp>
+        </p:txBody>
+      </p:sp>
+      <p:pic>
+        <p:nvPicPr>
+          <p:cNvPr descr="rules_versus_learning.png" id="0" name="Picture 1"/>
+          <p:cNvPicPr>
+            <a:picLocks noGrp="1" noChangeAspect="1"/>
+          </p:cNvPicPr>
+          <p:nvPr/>
+        </p:nvPicPr>
+        <p:blipFill>
+          <a:blip r:embed="rId3"/>
+          <a:stretch>
+            <a:fillRect/>
+          </a:stretch>
+        </p:blipFill>
+        <p:spPr bwMode="auto">
+          <a:xfrm>
+            <a:off x="1422543" y="2160270"/>
+            <a:ext cx="6298914" cy="2366010"/>
+          </a:xfrm>
+          <a:prstGeom prst="rect">
+            <a:avLst/>
+          </a:prstGeom>
+          <a:noFill/>
+          <a:ln w="9525">
+            <a:noFill/>
+            <a:headEnd/>
+            <a:tailEnd/>
+          </a:ln>
+        </p:spPr>
+      </p:pic>
     </p:spTree>
   </p:cSld>
 </p:sld>
@@ -8312,7 +10179,7 @@
         <p:spPr>
           <a:xfrm>
             <a:off x="457200" y="1183005"/>
-            <a:ext cx="8229600" cy="822960"/>
+            <a:ext cx="8229600" cy="874395"/>
           </a:xfrm>
         </p:spPr>
         <p:txBody>
@@ -8345,7 +10212,7 @@
         </p:blipFill>
         <p:spPr bwMode="auto">
           <a:xfrm>
-            <a:off x="457202" y="2846710"/>
+            <a:off x="457202" y="2872427"/>
             <a:ext cx="8229595" cy="941695"/>
           </a:xfrm>
           <a:prstGeom prst="rect">
@@ -8424,7 +10291,7 @@
         <p:spPr>
           <a:xfrm>
             <a:off x="457200" y="1183005"/>
-            <a:ext cx="8229600" cy="822960"/>
+            <a:ext cx="8229600" cy="874395"/>
           </a:xfrm>
         </p:spPr>
         <p:txBody>
@@ -8457,7 +10324,7 @@
         </p:blipFill>
         <p:spPr bwMode="auto">
           <a:xfrm>
-            <a:off x="457200" y="2181381"/>
+            <a:off x="457200" y="2207099"/>
             <a:ext cx="8229599" cy="2272352"/>
           </a:xfrm>
           <a:prstGeom prst="rect">
@@ -8505,8 +10372,8 @@
         </p:nvSpPr>
         <p:spPr>
           <a:xfrm>
-            <a:off x="457200" y="205979"/>
-            <a:ext cx="8229600" cy="857250"/>
+            <a:off x="457200" y="205740"/>
+            <a:ext cx="8229600" cy="874395"/>
           </a:xfrm>
         </p:spPr>
         <p:txBody>
@@ -8525,18 +10392,18 @@
       </p:sp>
       <p:sp>
         <p:nvSpPr>
-          <p:cNvPr id="3" name="Content Placeholder 2"/>
-          <p:cNvSpPr>
-            <a:spLocks noGrp="1"/>
-          </p:cNvSpPr>
-          <p:nvPr>
-            <p:ph idx="1"/>
+          <p:cNvPr id="4" name="Text Placeholder 3"/>
+          <p:cNvSpPr>
+            <a:spLocks noGrp="1"/>
+          </p:cNvSpPr>
+          <p:nvPr>
+            <p:ph idx="2" sz="half" type="body"/>
           </p:nvPr>
         </p:nvSpPr>
         <p:spPr>
           <a:xfrm>
-            <a:off x="457200" y="1200151"/>
-            <a:ext cx="8229600" cy="3394472"/>
+            <a:off x="457200" y="1183005"/>
+            <a:ext cx="8229600" cy="874395"/>
           </a:xfrm>
         </p:spPr>
         <p:txBody>
@@ -8572,28 +10439,38 @@
               <a:t> the expected risk</a:t>
             </a:r>
           </a:p>
-          <a:p>
-            <a:pPr lvl="0"/>
-            <a:r>
-              <a:rPr/>
-              <a:t>A flexible enough model drives the first to zero by memorising</a:t>
-            </a:r>
-          </a:p>
-          <a:p>
-            <a:pPr lvl="0" indent="0" marL="0">
-              <a:buNone/>
-            </a:pPr>
-            <a:r>
-              <a:rPr/>
-              <a:t>That gap is </a:t>
-            </a:r>
-            <a:r>
-              <a:rPr b="1"/>
-              <a:t>overfitting</a:t>
-            </a:r>
-          </a:p>
-        </p:txBody>
-      </p:sp>
+        </p:txBody>
+      </p:sp>
+      <p:pic>
+        <p:nvPicPr>
+          <p:cNvPr descr="risk_gap.png" id="0" name="Picture 1"/>
+          <p:cNvPicPr>
+            <a:picLocks noGrp="1" noChangeAspect="1"/>
+          </p:cNvPicPr>
+          <p:nvPr/>
+        </p:nvPicPr>
+        <p:blipFill>
+          <a:blip r:embed="rId3"/>
+          <a:stretch>
+            <a:fillRect/>
+          </a:stretch>
+        </p:blipFill>
+        <p:spPr bwMode="auto">
+          <a:xfrm>
+            <a:off x="2458364" y="2160270"/>
+            <a:ext cx="4227271" cy="2366010"/>
+          </a:xfrm>
+          <a:prstGeom prst="rect">
+            <a:avLst/>
+          </a:prstGeom>
+          <a:noFill/>
+          <a:ln w="9525">
+            <a:noFill/>
+            <a:headEnd/>
+            <a:tailEnd/>
+          </a:ln>
+        </p:spPr>
+      </p:pic>
     </p:spTree>
   </p:cSld>
 </p:sld>
@@ -8641,41 +10518,41 @@
             </a:pPr>
             <a:r>
               <a:rPr/>
-              <a:t>Which gives us the one rule for today</a:t>
-            </a:r>
-          </a:p>
-        </p:txBody>
-      </p:sp>
-      <p:sp>
-        <p:nvSpPr>
-          <p:cNvPr id="3" name="Content Placeholder 2"/>
-          <p:cNvSpPr>
-            <a:spLocks noGrp="1"/>
-          </p:cNvSpPr>
-          <p:nvPr>
-            <p:ph idx="1"/>
-          </p:nvPr>
-        </p:nvSpPr>
-        <p:spPr>
+              <a:t>The same idea, on real data</a:t>
+            </a:r>
+          </a:p>
+        </p:txBody>
+      </p:sp>
+      <p:pic>
+        <p:nvPicPr>
+          <p:cNvPr descr="overfitting.png" id="0" name="Picture 1"/>
+          <p:cNvPicPr>
+            <a:picLocks noGrp="1" noChangeAspect="1"/>
+          </p:cNvPicPr>
+          <p:nvPr/>
+        </p:nvPicPr>
+        <p:blipFill>
+          <a:blip r:embed="rId3"/>
+          <a:stretch>
+            <a:fillRect/>
+          </a:stretch>
+        </p:blipFill>
+        <p:spPr bwMode="auto">
           <a:xfrm>
-            <a:off x="457200" y="1200151"/>
-            <a:ext cx="8229600" cy="3394472"/>
+            <a:off x="457200" y="1677789"/>
+            <a:ext cx="8229600" cy="2336800"/>
           </a:xfrm>
+          <a:prstGeom prst="rect">
+            <a:avLst/>
+          </a:prstGeom>
+          <a:noFill/>
+          <a:ln w="9525">
+            <a:noFill/>
+            <a:headEnd/>
+            <a:tailEnd/>
+          </a:ln>
         </p:spPr>
-        <p:txBody>
-          <a:bodyPr/>
-          <a:lstStyle/>
-          <a:p>
-            <a:pPr lvl="0" indent="0" marL="0">
-              <a:buNone/>
-            </a:pPr>
-            <a:r>
-              <a:rPr/>
-              <a:t>Hold out part of the data. Never let the fitting procedure touch it. Measure there.</a:t>
-            </a:r>
-          </a:p>
-        </p:txBody>
-      </p:sp>
+      </p:pic>
     </p:spTree>
   </p:cSld>
 </p:sld>
@@ -8723,15 +10600,7 @@
             </a:pPr>
             <a:r>
               <a:rPr/>
-              <a:t>When </a:t>
-            </a:r>
-            <a:r>
-              <a:rPr i="1"/>
-              <a:t>not</a:t>
-            </a:r>
-            <a:r>
-              <a:rPr/>
-              <a:t> to use machine learning</a:t>
+              <a:t>Which gives us the one rule for today</a:t>
             </a:r>
           </a:p>
         </p:txBody>
@@ -8756,74 +10625,12 @@
           <a:bodyPr/>
           <a:lstStyle/>
           <a:p>
-            <a:pPr lvl="0"/>
-            <a:r>
-              <a:rPr/>
-              <a:t>The rule is </a:t>
-            </a:r>
-            <a:r>
-              <a:rPr b="1"/>
-              <a:t>known</a:t>
-            </a:r>
-            <a:r>
-              <a:rPr/>
-              <a:t> — write it</a:t>
-            </a:r>
-          </a:p>
-          <a:p>
-            <a:pPr lvl="0"/>
-            <a:r>
-              <a:rPr/>
-              <a:t>The data is </a:t>
-            </a:r>
-            <a:r>
-              <a:rPr b="1"/>
-              <a:t>not representative</a:t>
-            </a:r>
-            <a:r>
-              <a:rPr/>
-              <a:t> of deployment</a:t>
-            </a:r>
-          </a:p>
-          <a:p>
-            <a:pPr lvl="0"/>
-            <a:r>
-              <a:rPr/>
-              <a:t>Errors are </a:t>
-            </a:r>
-            <a:r>
-              <a:rPr b="1"/>
-              <a:t>catastrophic and unexplainable</a:t>
-            </a:r>
-          </a:p>
-          <a:p>
-            <a:pPr lvl="0"/>
-            <a:r>
-              <a:rPr/>
-              <a:t>The data encodes an </a:t>
-            </a:r>
-            <a:r>
-              <a:rPr b="1"/>
-              <a:t>injustice</a:t>
-            </a:r>
-            <a:r>
-              <a:rPr/>
-              <a:t> you would automate</a:t>
-            </a:r>
-          </a:p>
-          <a:p>
-            <a:pPr lvl="0"/>
-            <a:r>
-              <a:rPr/>
-              <a:t>A </a:t>
-            </a:r>
-            <a:r>
-              <a:rPr b="1"/>
-              <a:t>simple baseline</a:t>
-            </a:r>
-            <a:r>
-              <a:rPr/>
-              <a:t> already suffices</a:t>
+            <a:pPr lvl="0" indent="0" marL="0">
+              <a:buNone/>
+            </a:pPr>
+            <a:r>
+              <a:rPr/>
+              <a:t>Hold out part of the data. Never let the fitting procedure touch it. Measure there.</a:t>
             </a:r>
           </a:p>
         </p:txBody>
@@ -8875,7 +10682,15 @@
             </a:pPr>
             <a:r>
               <a:rPr/>
-              <a:t>1943 — the first artificial neuron</a:t>
+              <a:t>When </a:t>
+            </a:r>
+            <a:r>
+              <a:rPr i="1"/>
+              <a:t>not</a:t>
+            </a:r>
+            <a:r>
+              <a:rPr/>
+              <a:t> to use machine learning</a:t>
             </a:r>
           </a:p>
         </p:txBody>
@@ -8900,21 +10715,74 @@
           <a:bodyPr/>
           <a:lstStyle/>
           <a:p>
-            <a:pPr lvl="0" indent="0" marL="0">
-              <a:buNone/>
-            </a:pPr>
-            <a:r>
-              <a:rPr/>
-              <a:t>McCulloch and Pitts: a neuron as a threshold unit.</a:t>
-            </a:r>
-          </a:p>
-          <a:p>
-            <a:pPr lvl="0" indent="0" marL="0">
-              <a:buNone/>
-            </a:pPr>
-            <a:r>
-              <a:rPr/>
-              <a:t>Fires when the weighted sum of inputs passes a threshold.</a:t>
+            <a:pPr lvl="0"/>
+            <a:r>
+              <a:rPr/>
+              <a:t>The rule is </a:t>
+            </a:r>
+            <a:r>
+              <a:rPr b="1"/>
+              <a:t>known</a:t>
+            </a:r>
+            <a:r>
+              <a:rPr/>
+              <a:t> — write it</a:t>
+            </a:r>
+          </a:p>
+          <a:p>
+            <a:pPr lvl="0"/>
+            <a:r>
+              <a:rPr/>
+              <a:t>The data is </a:t>
+            </a:r>
+            <a:r>
+              <a:rPr b="1"/>
+              <a:t>not representative</a:t>
+            </a:r>
+            <a:r>
+              <a:rPr/>
+              <a:t> of deployment</a:t>
+            </a:r>
+          </a:p>
+          <a:p>
+            <a:pPr lvl="0"/>
+            <a:r>
+              <a:rPr/>
+              <a:t>Errors are </a:t>
+            </a:r>
+            <a:r>
+              <a:rPr b="1"/>
+              <a:t>catastrophic and unexplainable</a:t>
+            </a:r>
+          </a:p>
+          <a:p>
+            <a:pPr lvl="0"/>
+            <a:r>
+              <a:rPr/>
+              <a:t>The data encodes an </a:t>
+            </a:r>
+            <a:r>
+              <a:rPr b="1"/>
+              <a:t>injustice</a:t>
+            </a:r>
+            <a:r>
+              <a:rPr/>
+              <a:t> you would automate</a:t>
+            </a:r>
+          </a:p>
+          <a:p>
+            <a:pPr lvl="0"/>
+            <a:r>
+              <a:rPr/>
+              <a:t>A </a:t>
+            </a:r>
+            <a:r>
+              <a:rPr b="1"/>
+              <a:t>simple baseline</a:t>
+            </a:r>
+            <a:r>
+              <a:rPr/>
+              <a:t> already suffices</a:t>
             </a:r>
           </a:p>
         </p:txBody>
@@ -8966,41 +10834,41 @@
             </a:pPr>
             <a:r>
               <a:rPr/>
-              <a:t>1950 — Turing’s imitation game</a:t>
-            </a:r>
-          </a:p>
-        </p:txBody>
-      </p:sp>
-      <p:sp>
-        <p:nvSpPr>
-          <p:cNvPr id="3" name="Content Placeholder 2"/>
-          <p:cNvSpPr>
-            <a:spLocks noGrp="1"/>
-          </p:cNvSpPr>
-          <p:nvPr>
-            <p:ph idx="1"/>
-          </p:nvPr>
-        </p:nvSpPr>
-        <p:spPr>
+              <a:t>Seventy years in one picture</a:t>
+            </a:r>
+          </a:p>
+        </p:txBody>
+      </p:sp>
+      <p:pic>
+        <p:nvPicPr>
+          <p:cNvPr descr="ai_timeline.png" id="0" name="Picture 1"/>
+          <p:cNvPicPr>
+            <a:picLocks noGrp="1" noChangeAspect="1"/>
+          </p:cNvPicPr>
+          <p:nvPr/>
+        </p:nvPicPr>
+        <p:blipFill>
+          <a:blip r:embed="rId3"/>
+          <a:stretch>
+            <a:fillRect/>
+          </a:stretch>
+        </p:blipFill>
+        <p:spPr bwMode="auto">
           <a:xfrm>
-            <a:off x="457200" y="1200151"/>
-            <a:ext cx="8229600" cy="3394472"/>
+            <a:off x="457200" y="1734939"/>
+            <a:ext cx="8229600" cy="2222500"/>
           </a:xfrm>
+          <a:prstGeom prst="rect">
+            <a:avLst/>
+          </a:prstGeom>
+          <a:noFill/>
+          <a:ln w="9525">
+            <a:noFill/>
+            <a:headEnd/>
+            <a:tailEnd/>
+          </a:ln>
         </p:spPr>
-        <p:txBody>
-          <a:bodyPr/>
-          <a:lstStyle/>
-          <a:p>
-            <a:pPr lvl="0" indent="0" marL="0">
-              <a:buNone/>
-            </a:pPr>
-            <a:r>
-              <a:rPr/>
-              <a:t>“Can machines think?” — replaced by a question you can test by observation.</a:t>
-            </a:r>
-          </a:p>
-        </p:txBody>
-      </p:sp>
+      </p:pic>
     </p:spTree>
   </p:cSld>
 </p:sld>
@@ -9150,7 +11018,7 @@
             </a:pPr>
             <a:r>
               <a:rPr/>
-              <a:t>1956 — Dartmouth</a:t>
+              <a:t>1943 — the first artificial neuron</a:t>
             </a:r>
           </a:p>
         </p:txBody>
@@ -9180,24 +11048,16 @@
             </a:pPr>
             <a:r>
               <a:rPr/>
-              <a:t>The term </a:t>
-            </a:r>
-            <a:r>
-              <a:rPr i="1"/>
-              <a:t>artificial intelligence</a:t>
-            </a:r>
-            <a:r>
-              <a:rPr/>
-              <a:t> is coined.</a:t>
-            </a:r>
-          </a:p>
-          <a:p>
-            <a:pPr lvl="0" indent="0" marL="0">
-              <a:buNone/>
-            </a:pPr>
-            <a:r>
-              <a:rPr/>
-              <a:t>The proposal: ten people, two months, significant progress.</a:t>
+              <a:t>McCulloch and Pitts: a neuron as a threshold unit.</a:t>
+            </a:r>
+          </a:p>
+          <a:p>
+            <a:pPr lvl="0" indent="0" marL="0">
+              <a:buNone/>
+            </a:pPr>
+            <a:r>
+              <a:rPr/>
+              <a:t>Fires when the weighted sum of inputs passes a threshold.</a:t>
             </a:r>
           </a:p>
         </p:txBody>
@@ -9249,7 +11109,7 @@
             </a:pPr>
             <a:r>
               <a:rPr/>
-              <a:t>1957 — the perceptron learns</a:t>
+              <a:t>1950 — Turing’s imitation game</a:t>
             </a:r>
           </a:p>
         </p:txBody>
@@ -9279,24 +11139,7 @@
             </a:pPr>
             <a:r>
               <a:rPr/>
-              <a:t>Rosenblatt: weights adjusted </a:t>
-            </a:r>
-            <a:r>
-              <a:rPr b="1"/>
-              <a:t>from examples</a:t>
-            </a:r>
-            <a:r>
-              <a:rPr/>
-              <a:t>, not set by hand.</a:t>
-            </a:r>
-          </a:p>
-          <a:p>
-            <a:pPr lvl="0" indent="0" marL="0">
-              <a:buNone/>
-            </a:pPr>
-            <a:r>
-              <a:rPr/>
-              <a:t>Convergence theorem: if the data is linearly separable, it will find a separator.</a:t>
+              <a:t>“Can machines think?” — replaced by a question you can test by observation.</a:t>
             </a:r>
           </a:p>
         </p:txBody>
@@ -9348,7 +11191,7 @@
             </a:pPr>
             <a:r>
               <a:rPr/>
-              <a:t>1969 — the first winter</a:t>
+              <a:t>1956 — Dartmouth</a:t>
             </a:r>
           </a:p>
         </p:txBody>
@@ -9378,16 +11221,24 @@
             </a:pPr>
             <a:r>
               <a:rPr/>
-              <a:t>Minsky and Papert: a single-layer perceptron cannot represent XOR.</a:t>
-            </a:r>
-          </a:p>
-          <a:p>
-            <a:pPr lvl="0" indent="0" marL="0">
-              <a:buNone/>
-            </a:pPr>
-            <a:r>
-              <a:rPr/>
-              <a:t>Correct. And narrower than the reception suggested.</a:t>
+              <a:t>The term </a:t>
+            </a:r>
+            <a:r>
+              <a:rPr i="1"/>
+              <a:t>artificial intelligence</a:t>
+            </a:r>
+            <a:r>
+              <a:rPr/>
+              <a:t> is coined.</a:t>
+            </a:r>
+          </a:p>
+          <a:p>
+            <a:pPr lvl="0" indent="0" marL="0">
+              <a:buNone/>
+            </a:pPr>
+            <a:r>
+              <a:rPr/>
+              <a:t>The proposal: ten people, two months, significant progress.</a:t>
             </a:r>
           </a:p>
         </p:txBody>
@@ -9439,7 +11290,7 @@
             </a:pPr>
             <a:r>
               <a:rPr/>
-              <a:t>1986 — backpropagation</a:t>
+              <a:t>1957 — the perceptron learns</a:t>
             </a:r>
           </a:p>
         </p:txBody>
@@ -9469,16 +11320,24 @@
             </a:pPr>
             <a:r>
               <a:rPr/>
-              <a:t>An efficient way to train multi-layer networks.</a:t>
-            </a:r>
-          </a:p>
-          <a:p>
-            <a:pPr lvl="0" indent="0" marL="0">
-              <a:buNone/>
-            </a:pPr>
-            <a:r>
-              <a:rPr/>
-              <a:t>The 1969 objection is answered. A second winter follows anyway.</a:t>
+              <a:t>Rosenblatt: weights adjusted </a:t>
+            </a:r>
+            <a:r>
+              <a:rPr b="1"/>
+              <a:t>from examples</a:t>
+            </a:r>
+            <a:r>
+              <a:rPr/>
+              <a:t>, not set by hand.</a:t>
+            </a:r>
+          </a:p>
+          <a:p>
+            <a:pPr lvl="0" indent="0" marL="0">
+              <a:buNone/>
+            </a:pPr>
+            <a:r>
+              <a:rPr/>
+              <a:t>Convergence theorem: if the data is linearly separable, it will find a separator.</a:t>
             </a:r>
           </a:p>
         </p:txBody>
@@ -9530,7 +11389,7 @@
             </a:pPr>
             <a:r>
               <a:rPr/>
-              <a:t>1995–2010 — statistics takes over</a:t>
+              <a:t>1969 — the first winter</a:t>
             </a:r>
           </a:p>
         </p:txBody>
@@ -9555,26 +11414,21 @@
           <a:bodyPr/>
           <a:lstStyle/>
           <a:p>
-            <a:pPr lvl="0"/>
-            <a:r>
-              <a:rPr/>
-              <a:t>Support vector machines, ensembles, probabilistic methods</a:t>
-            </a:r>
-          </a:p>
-          <a:p>
-            <a:pPr lvl="0"/>
-            <a:r>
-              <a:rPr/>
-              <a:t>From “simulating intelligence” to “estimating functions from data”</a:t>
-            </a:r>
-          </a:p>
-          <a:p>
-            <a:pPr lvl="0" indent="0" marL="0">
-              <a:buNone/>
-            </a:pPr>
-            <a:r>
-              <a:rPr/>
-              <a:t>A retreat in ambition. An advance in rigour.</a:t>
+            <a:pPr lvl="0" indent="0" marL="0">
+              <a:buNone/>
+            </a:pPr>
+            <a:r>
+              <a:rPr/>
+              <a:t>Minsky and Papert: a single-layer perceptron cannot represent XOR.</a:t>
+            </a:r>
+          </a:p>
+          <a:p>
+            <a:pPr lvl="0" indent="0" marL="0">
+              <a:buNone/>
+            </a:pPr>
+            <a:r>
+              <a:rPr/>
+              <a:t>Correct. And narrower than the reception suggested.</a:t>
             </a:r>
           </a:p>
         </p:txBody>
@@ -9626,7 +11480,7 @@
             </a:pPr>
             <a:r>
               <a:rPr/>
-              <a:t>2012 — AlexNet</a:t>
+              <a:t>1986 — backpropagation</a:t>
             </a:r>
           </a:p>
         </p:txBody>
@@ -9656,16 +11510,16 @@
             </a:pPr>
             <a:r>
               <a:rPr/>
-              <a:t>ImageNet error: 26% → 15%.</a:t>
-            </a:r>
-          </a:p>
-          <a:p>
-            <a:pPr lvl="0" indent="0" marL="0">
-              <a:buNone/>
-            </a:pPr>
-            <a:r>
-              <a:rPr/>
-              <a:t>The architecture was recognisably LeNet, from 1989.</a:t>
+              <a:t>An efficient way to train multi-layer networks.</a:t>
+            </a:r>
+          </a:p>
+          <a:p>
+            <a:pPr lvl="0" indent="0" marL="0">
+              <a:buNone/>
+            </a:pPr>
+            <a:r>
+              <a:rPr/>
+              <a:t>The 1969 objection is answered. A second winter follows anyway.</a:t>
             </a:r>
           </a:p>
         </p:txBody>
@@ -9676,6 +11530,193 @@
 </file>
 
 <file path=ppt/slides/slide26.xml><?xml version="1.0" encoding="utf-8"?>
+<p:sld xmlns:a="http://schemas.openxmlformats.org/drawingml/2006/main" xmlns:r="http://schemas.openxmlformats.org/officeDocument/2006/relationships" xmlns:p="http://schemas.openxmlformats.org/presentationml/2006/main">
+  <p:cSld>
+    <p:spTree>
+      <p:nvGrpSpPr>
+        <p:cNvPr id="1" name=""/>
+        <p:cNvGrpSpPr/>
+        <p:nvPr/>
+      </p:nvGrpSpPr>
+      <p:grpSpPr>
+        <a:xfrm>
+          <a:off x="0" y="0"/>
+          <a:ext cx="0" cy="0"/>
+          <a:chOff x="0" y="0"/>
+          <a:chExt cx="0" cy="0"/>
+        </a:xfrm>
+      </p:grpSpPr>
+      <p:sp>
+        <p:nvSpPr>
+          <p:cNvPr id="2" name="Title 1"/>
+          <p:cNvSpPr>
+            <a:spLocks noGrp="1"/>
+          </p:cNvSpPr>
+          <p:nvPr>
+            <p:ph type="title"/>
+          </p:nvPr>
+        </p:nvSpPr>
+        <p:spPr>
+          <a:xfrm>
+            <a:off x="457200" y="205979"/>
+            <a:ext cx="8229600" cy="857250"/>
+          </a:xfrm>
+        </p:spPr>
+        <p:txBody>
+          <a:bodyPr/>
+          <a:lstStyle/>
+          <a:p>
+            <a:pPr lvl="0" indent="0" marL="0">
+              <a:buNone/>
+            </a:pPr>
+            <a:r>
+              <a:rPr/>
+              <a:t>1995–2010 — statistics takes over</a:t>
+            </a:r>
+          </a:p>
+        </p:txBody>
+      </p:sp>
+      <p:sp>
+        <p:nvSpPr>
+          <p:cNvPr id="3" name="Content Placeholder 2"/>
+          <p:cNvSpPr>
+            <a:spLocks noGrp="1"/>
+          </p:cNvSpPr>
+          <p:nvPr>
+            <p:ph idx="1"/>
+          </p:nvPr>
+        </p:nvSpPr>
+        <p:spPr>
+          <a:xfrm>
+            <a:off x="457200" y="1200151"/>
+            <a:ext cx="8229600" cy="3394472"/>
+          </a:xfrm>
+        </p:spPr>
+        <p:txBody>
+          <a:bodyPr/>
+          <a:lstStyle/>
+          <a:p>
+            <a:pPr lvl="0"/>
+            <a:r>
+              <a:rPr/>
+              <a:t>Support vector machines, ensembles, probabilistic methods</a:t>
+            </a:r>
+          </a:p>
+          <a:p>
+            <a:pPr lvl="0"/>
+            <a:r>
+              <a:rPr/>
+              <a:t>From “simulating intelligence” to “estimating functions from data”</a:t>
+            </a:r>
+          </a:p>
+          <a:p>
+            <a:pPr lvl="0" indent="0" marL="0">
+              <a:buNone/>
+            </a:pPr>
+            <a:r>
+              <a:rPr/>
+              <a:t>A retreat in ambition. An advance in rigour.</a:t>
+            </a:r>
+          </a:p>
+        </p:txBody>
+      </p:sp>
+    </p:spTree>
+  </p:cSld>
+</p:sld>
+</file>
+
+<file path=ppt/slides/slide27.xml><?xml version="1.0" encoding="utf-8"?>
+<p:sld xmlns:a="http://schemas.openxmlformats.org/drawingml/2006/main" xmlns:r="http://schemas.openxmlformats.org/officeDocument/2006/relationships" xmlns:p="http://schemas.openxmlformats.org/presentationml/2006/main">
+  <p:cSld>
+    <p:spTree>
+      <p:nvGrpSpPr>
+        <p:cNvPr id="1" name=""/>
+        <p:cNvGrpSpPr/>
+        <p:nvPr/>
+      </p:nvGrpSpPr>
+      <p:grpSpPr>
+        <a:xfrm>
+          <a:off x="0" y="0"/>
+          <a:ext cx="0" cy="0"/>
+          <a:chOff x="0" y="0"/>
+          <a:chExt cx="0" cy="0"/>
+        </a:xfrm>
+      </p:grpSpPr>
+      <p:sp>
+        <p:nvSpPr>
+          <p:cNvPr id="2" name="Title 1"/>
+          <p:cNvSpPr>
+            <a:spLocks noGrp="1"/>
+          </p:cNvSpPr>
+          <p:nvPr>
+            <p:ph type="title"/>
+          </p:nvPr>
+        </p:nvSpPr>
+        <p:spPr>
+          <a:xfrm>
+            <a:off x="457200" y="205979"/>
+            <a:ext cx="8229600" cy="857250"/>
+          </a:xfrm>
+        </p:spPr>
+        <p:txBody>
+          <a:bodyPr/>
+          <a:lstStyle/>
+          <a:p>
+            <a:pPr lvl="0" indent="0" marL="0">
+              <a:buNone/>
+            </a:pPr>
+            <a:r>
+              <a:rPr/>
+              <a:t>2012 — AlexNet</a:t>
+            </a:r>
+          </a:p>
+        </p:txBody>
+      </p:sp>
+      <p:sp>
+        <p:nvSpPr>
+          <p:cNvPr id="3" name="Content Placeholder 2"/>
+          <p:cNvSpPr>
+            <a:spLocks noGrp="1"/>
+          </p:cNvSpPr>
+          <p:nvPr>
+            <p:ph idx="1"/>
+          </p:nvPr>
+        </p:nvSpPr>
+        <p:spPr>
+          <a:xfrm>
+            <a:off x="457200" y="1200151"/>
+            <a:ext cx="8229600" cy="3394472"/>
+          </a:xfrm>
+        </p:spPr>
+        <p:txBody>
+          <a:bodyPr/>
+          <a:lstStyle/>
+          <a:p>
+            <a:pPr lvl="0" indent="0" marL="0">
+              <a:buNone/>
+            </a:pPr>
+            <a:r>
+              <a:rPr/>
+              <a:t>ImageNet error: 26% → 15%.</a:t>
+            </a:r>
+          </a:p>
+          <a:p>
+            <a:pPr lvl="0" indent="0" marL="0">
+              <a:buNone/>
+            </a:pPr>
+            <a:r>
+              <a:rPr/>
+              <a:t>The architecture was recognisably LeNet, from 1989.</a:t>
+            </a:r>
+          </a:p>
+        </p:txBody>
+      </p:sp>
+    </p:spTree>
+  </p:cSld>
+</p:sld>
+</file>
+
+<file path=ppt/slides/slide28.xml><?xml version="1.0" encoding="utf-8"?>
 <p:sld xmlns:a="http://schemas.openxmlformats.org/drawingml/2006/main" xmlns:r="http://schemas.openxmlformats.org/officeDocument/2006/relationships" xmlns:p="http://schemas.openxmlformats.org/presentationml/2006/main">
   <p:cSld>
     <p:spTree>
@@ -9947,207 +11988,6 @@
 </p:sld>
 </file>
 
-<file path=ppt/slides/slide27.xml><?xml version="1.0" encoding="utf-8"?>
-<p:sld xmlns:a="http://schemas.openxmlformats.org/drawingml/2006/main" xmlns:r="http://schemas.openxmlformats.org/officeDocument/2006/relationships" xmlns:p="http://schemas.openxmlformats.org/presentationml/2006/main">
-  <p:cSld>
-    <p:spTree>
-      <p:nvGrpSpPr>
-        <p:cNvPr id="1" name=""/>
-        <p:cNvGrpSpPr/>
-        <p:nvPr/>
-      </p:nvGrpSpPr>
-      <p:grpSpPr>
-        <a:xfrm>
-          <a:off x="0" y="0"/>
-          <a:ext cx="0" cy="0"/>
-          <a:chOff x="0" y="0"/>
-          <a:chExt cx="0" cy="0"/>
-        </a:xfrm>
-      </p:grpSpPr>
-      <p:sp>
-        <p:nvSpPr>
-          <p:cNvPr id="2" name="Title 1"/>
-          <p:cNvSpPr>
-            <a:spLocks noGrp="1"/>
-          </p:cNvSpPr>
-          <p:nvPr>
-            <p:ph type="title"/>
-          </p:nvPr>
-        </p:nvSpPr>
-        <p:spPr>
-          <a:xfrm>
-            <a:off x="457200" y="205979"/>
-            <a:ext cx="8229600" cy="857250"/>
-          </a:xfrm>
-        </p:spPr>
-        <p:txBody>
-          <a:bodyPr/>
-          <a:lstStyle/>
-          <a:p>
-            <a:pPr lvl="0" indent="0" marL="0">
-              <a:buNone/>
-            </a:pPr>
-            <a:r>
-              <a:rPr/>
-              <a:t>Three kinds of learning</a:t>
-            </a:r>
-          </a:p>
-        </p:txBody>
-      </p:sp>
-      <p:sp>
-        <p:nvSpPr>
-          <p:cNvPr id="3" name="Content Placeholder 2"/>
-          <p:cNvSpPr>
-            <a:spLocks noGrp="1"/>
-          </p:cNvSpPr>
-          <p:nvPr>
-            <p:ph idx="1"/>
-          </p:nvPr>
-        </p:nvSpPr>
-        <p:spPr>
-          <a:xfrm>
-            <a:off x="457200" y="1200151"/>
-            <a:ext cx="8229600" cy="3394472"/>
-          </a:xfrm>
-        </p:spPr>
-        <p:txBody>
-          <a:bodyPr/>
-          <a:lstStyle/>
-          <a:p>
-            <a:pPr lvl="0" indent="0" marL="0">
-              <a:buNone/>
-            </a:pPr>
-            <a:r>
-              <a:rPr/>
-              <a:t>The taxonomy divides by </a:t>
-            </a:r>
-            <a:r>
-              <a:rPr b="1"/>
-              <a:t>where the target comes from</a:t>
-            </a:r>
-            <a:r>
-              <a:rPr/>
-              <a:t> — not by algorithm.</a:t>
-            </a:r>
-          </a:p>
-        </p:txBody>
-      </p:sp>
-    </p:spTree>
-  </p:cSld>
-</p:sld>
-</file>
-
-<file path=ppt/slides/slide28.xml><?xml version="1.0" encoding="utf-8"?>
-<p:sld xmlns:a="http://schemas.openxmlformats.org/drawingml/2006/main" xmlns:r="http://schemas.openxmlformats.org/officeDocument/2006/relationships" xmlns:p="http://schemas.openxmlformats.org/presentationml/2006/main">
-  <p:cSld>
-    <p:spTree>
-      <p:nvGrpSpPr>
-        <p:cNvPr id="1" name=""/>
-        <p:cNvGrpSpPr/>
-        <p:nvPr/>
-      </p:nvGrpSpPr>
-      <p:grpSpPr>
-        <a:xfrm>
-          <a:off x="0" y="0"/>
-          <a:ext cx="0" cy="0"/>
-          <a:chOff x="0" y="0"/>
-          <a:chExt cx="0" cy="0"/>
-        </a:xfrm>
-      </p:grpSpPr>
-      <p:sp>
-        <p:nvSpPr>
-          <p:cNvPr id="2" name="Title 1"/>
-          <p:cNvSpPr>
-            <a:spLocks noGrp="1"/>
-          </p:cNvSpPr>
-          <p:nvPr>
-            <p:ph type="title"/>
-          </p:nvPr>
-        </p:nvSpPr>
-        <p:spPr>
-          <a:xfrm>
-            <a:off x="457200" y="205979"/>
-            <a:ext cx="8229600" cy="857250"/>
-          </a:xfrm>
-        </p:spPr>
-        <p:txBody>
-          <a:bodyPr/>
-          <a:lstStyle/>
-          <a:p>
-            <a:pPr lvl="0" indent="0" marL="0">
-              <a:buNone/>
-            </a:pPr>
-            <a:r>
-              <a:rPr/>
-              <a:t>Supervised</a:t>
-            </a:r>
-          </a:p>
-        </p:txBody>
-      </p:sp>
-      <p:sp>
-        <p:nvSpPr>
-          <p:cNvPr id="3" name="Content Placeholder 2"/>
-          <p:cNvSpPr>
-            <a:spLocks noGrp="1"/>
-          </p:cNvSpPr>
-          <p:nvPr>
-            <p:ph idx="1"/>
-          </p:nvPr>
-        </p:nvSpPr>
-        <p:spPr>
-          <a:xfrm>
-            <a:off x="457200" y="1200151"/>
-            <a:ext cx="8229600" cy="3394472"/>
-          </a:xfrm>
-        </p:spPr>
-        <p:txBody>
-          <a:bodyPr/>
-          <a:lstStyle/>
-          <a:p>
-            <a:pPr lvl="0" indent="0" marL="0">
-              <a:buNone/>
-            </a:pPr>
-            <a:r>
-              <a:rPr/>
-              <a:t>Each example carries a label a person produced.</a:t>
-            </a:r>
-          </a:p>
-          <a:p>
-            <a:pPr lvl="0"/>
-            <a:r>
-              <a:rPr/>
-              <a:t>Category → </a:t>
-            </a:r>
-            <a:r>
-              <a:rPr b="1"/>
-              <a:t>classification</a:t>
-            </a:r>
-          </a:p>
-          <a:p>
-            <a:pPr lvl="0"/>
-            <a:r>
-              <a:rPr/>
-              <a:t>Continuous → </a:t>
-            </a:r>
-            <a:r>
-              <a:rPr b="1"/>
-              <a:t>regression</a:t>
-            </a:r>
-          </a:p>
-          <a:p>
-            <a:pPr lvl="0"/>
-            <a:r>
-              <a:rPr/>
-              <a:t>You can check answers against truth</a:t>
-            </a:r>
-          </a:p>
-        </p:txBody>
-      </p:sp>
-    </p:spTree>
-  </p:cSld>
-</p:sld>
-</file>
-
 <file path=ppt/slides/slide29.xml><?xml version="1.0" encoding="utf-8"?>
 <p:sld xmlns:a="http://schemas.openxmlformats.org/drawingml/2006/main" xmlns:r="http://schemas.openxmlformats.org/officeDocument/2006/relationships" xmlns:p="http://schemas.openxmlformats.org/presentationml/2006/main">
   <p:cSld>
@@ -10190,7 +12030,7 @@
             </a:pPr>
             <a:r>
               <a:rPr/>
-              <a:t>Unsupervised</a:t>
+              <a:t>Three kinds of learning</a:t>
             </a:r>
           </a:p>
         </p:txBody>
@@ -10220,28 +12060,15 @@
             </a:pPr>
             <a:r>
               <a:rPr/>
-              <a:t>No targets at all. Find structure.</a:t>
-            </a:r>
-          </a:p>
-          <a:p>
-            <a:pPr lvl="0"/>
-            <a:r>
-              <a:rPr/>
-              <a:t>Groups → clustering</a:t>
-            </a:r>
-          </a:p>
-          <a:p>
-            <a:pPr lvl="0"/>
-            <a:r>
-              <a:rPr/>
-              <a:t>Fewer dimensions → dimensionality reduction</a:t>
-            </a:r>
-          </a:p>
-          <a:p>
-            <a:pPr lvl="0"/>
-            <a:r>
-              <a:rPr/>
-              <a:t>Odd points → anomaly detection</a:t>
+              <a:t>The taxonomy divides by </a:t>
+            </a:r>
+            <a:r>
+              <a:rPr b="1"/>
+              <a:t>where the target comes from</a:t>
+            </a:r>
+            <a:r>
+              <a:rPr/>
+              <a:t> — not by algorithm.</a:t>
             </a:r>
           </a:p>
         </p:txBody>
@@ -10565,7 +12392,7 @@
             </a:pPr>
             <a:r>
               <a:rPr/>
-              <a:t>Self-supervised</a:t>
+              <a:t>Supervised</a:t>
             </a:r>
           </a:p>
         </p:txBody>
@@ -10595,16 +12422,36 @@
             </a:pPr>
             <a:r>
               <a:rPr/>
-              <a:t>Hide part of the input. Predict it from the rest.</a:t>
-            </a:r>
-          </a:p>
-          <a:p>
-            <a:pPr lvl="0" indent="0" marL="0">
-              <a:buNone/>
-            </a:pPr>
-            <a:r>
-              <a:rPr/>
-              <a:t>Nobody annotates anything — and the supervision is real.</a:t>
+              <a:t>Each example carries a label a person produced.</a:t>
+            </a:r>
+          </a:p>
+          <a:p>
+            <a:pPr lvl="0"/>
+            <a:r>
+              <a:rPr/>
+              <a:t>Category → </a:t>
+            </a:r>
+            <a:r>
+              <a:rPr b="1"/>
+              <a:t>classification</a:t>
+            </a:r>
+          </a:p>
+          <a:p>
+            <a:pPr lvl="0"/>
+            <a:r>
+              <a:rPr/>
+              <a:t>Continuous → </a:t>
+            </a:r>
+            <a:r>
+              <a:rPr b="1"/>
+              <a:t>regression</a:t>
+            </a:r>
+          </a:p>
+          <a:p>
+            <a:pPr lvl="0"/>
+            <a:r>
+              <a:rPr/>
+              <a:t>You can check answers against truth</a:t>
             </a:r>
           </a:p>
         </p:txBody>
@@ -10615,6 +12462,200 @@
 </file>
 
 <file path=ppt/slides/slide31.xml><?xml version="1.0" encoding="utf-8"?>
+<p:sld xmlns:a="http://schemas.openxmlformats.org/drawingml/2006/main" xmlns:r="http://schemas.openxmlformats.org/officeDocument/2006/relationships" xmlns:p="http://schemas.openxmlformats.org/presentationml/2006/main">
+  <p:cSld>
+    <p:spTree>
+      <p:nvGrpSpPr>
+        <p:cNvPr id="1" name=""/>
+        <p:cNvGrpSpPr/>
+        <p:nvPr/>
+      </p:nvGrpSpPr>
+      <p:grpSpPr>
+        <a:xfrm>
+          <a:off x="0" y="0"/>
+          <a:ext cx="0" cy="0"/>
+          <a:chOff x="0" y="0"/>
+          <a:chExt cx="0" cy="0"/>
+        </a:xfrm>
+      </p:grpSpPr>
+      <p:sp>
+        <p:nvSpPr>
+          <p:cNvPr id="2" name="Title 1"/>
+          <p:cNvSpPr>
+            <a:spLocks noGrp="1"/>
+          </p:cNvSpPr>
+          <p:nvPr>
+            <p:ph type="title"/>
+          </p:nvPr>
+        </p:nvSpPr>
+        <p:spPr>
+          <a:xfrm>
+            <a:off x="457200" y="205979"/>
+            <a:ext cx="8229600" cy="857250"/>
+          </a:xfrm>
+        </p:spPr>
+        <p:txBody>
+          <a:bodyPr/>
+          <a:lstStyle/>
+          <a:p>
+            <a:pPr lvl="0" indent="0" marL="0">
+              <a:buNone/>
+            </a:pPr>
+            <a:r>
+              <a:rPr/>
+              <a:t>Unsupervised</a:t>
+            </a:r>
+          </a:p>
+        </p:txBody>
+      </p:sp>
+      <p:sp>
+        <p:nvSpPr>
+          <p:cNvPr id="3" name="Content Placeholder 2"/>
+          <p:cNvSpPr>
+            <a:spLocks noGrp="1"/>
+          </p:cNvSpPr>
+          <p:nvPr>
+            <p:ph idx="1"/>
+          </p:nvPr>
+        </p:nvSpPr>
+        <p:spPr>
+          <a:xfrm>
+            <a:off x="457200" y="1200151"/>
+            <a:ext cx="8229600" cy="3394472"/>
+          </a:xfrm>
+        </p:spPr>
+        <p:txBody>
+          <a:bodyPr/>
+          <a:lstStyle/>
+          <a:p>
+            <a:pPr lvl="0" indent="0" marL="0">
+              <a:buNone/>
+            </a:pPr>
+            <a:r>
+              <a:rPr/>
+              <a:t>No targets at all. Find structure.</a:t>
+            </a:r>
+          </a:p>
+          <a:p>
+            <a:pPr lvl="0"/>
+            <a:r>
+              <a:rPr/>
+              <a:t>Groups → clustering</a:t>
+            </a:r>
+          </a:p>
+          <a:p>
+            <a:pPr lvl="0"/>
+            <a:r>
+              <a:rPr/>
+              <a:t>Fewer dimensions → dimensionality reduction</a:t>
+            </a:r>
+          </a:p>
+          <a:p>
+            <a:pPr lvl="0"/>
+            <a:r>
+              <a:rPr/>
+              <a:t>Odd points → anomaly detection</a:t>
+            </a:r>
+          </a:p>
+        </p:txBody>
+      </p:sp>
+    </p:spTree>
+  </p:cSld>
+</p:sld>
+</file>
+
+<file path=ppt/slides/slide32.xml><?xml version="1.0" encoding="utf-8"?>
+<p:sld xmlns:a="http://schemas.openxmlformats.org/drawingml/2006/main" xmlns:r="http://schemas.openxmlformats.org/officeDocument/2006/relationships" xmlns:p="http://schemas.openxmlformats.org/presentationml/2006/main">
+  <p:cSld>
+    <p:spTree>
+      <p:nvGrpSpPr>
+        <p:cNvPr id="1" name=""/>
+        <p:cNvGrpSpPr/>
+        <p:nvPr/>
+      </p:nvGrpSpPr>
+      <p:grpSpPr>
+        <a:xfrm>
+          <a:off x="0" y="0"/>
+          <a:ext cx="0" cy="0"/>
+          <a:chOff x="0" y="0"/>
+          <a:chExt cx="0" cy="0"/>
+        </a:xfrm>
+      </p:grpSpPr>
+      <p:sp>
+        <p:nvSpPr>
+          <p:cNvPr id="2" name="Title 1"/>
+          <p:cNvSpPr>
+            <a:spLocks noGrp="1"/>
+          </p:cNvSpPr>
+          <p:nvPr>
+            <p:ph type="title"/>
+          </p:nvPr>
+        </p:nvSpPr>
+        <p:spPr>
+          <a:xfrm>
+            <a:off x="457200" y="205979"/>
+            <a:ext cx="8229600" cy="857250"/>
+          </a:xfrm>
+        </p:spPr>
+        <p:txBody>
+          <a:bodyPr/>
+          <a:lstStyle/>
+          <a:p>
+            <a:pPr lvl="0" indent="0" marL="0">
+              <a:buNone/>
+            </a:pPr>
+            <a:r>
+              <a:rPr/>
+              <a:t>Self-supervised</a:t>
+            </a:r>
+          </a:p>
+        </p:txBody>
+      </p:sp>
+      <p:sp>
+        <p:nvSpPr>
+          <p:cNvPr id="3" name="Content Placeholder 2"/>
+          <p:cNvSpPr>
+            <a:spLocks noGrp="1"/>
+          </p:cNvSpPr>
+          <p:nvPr>
+            <p:ph idx="1"/>
+          </p:nvPr>
+        </p:nvSpPr>
+        <p:spPr>
+          <a:xfrm>
+            <a:off x="457200" y="1200151"/>
+            <a:ext cx="8229600" cy="3394472"/>
+          </a:xfrm>
+        </p:spPr>
+        <p:txBody>
+          <a:bodyPr/>
+          <a:lstStyle/>
+          <a:p>
+            <a:pPr lvl="0" indent="0" marL="0">
+              <a:buNone/>
+            </a:pPr>
+            <a:r>
+              <a:rPr/>
+              <a:t>Hide part of the input. Predict it from the rest.</a:t>
+            </a:r>
+          </a:p>
+          <a:p>
+            <a:pPr lvl="0" indent="0" marL="0">
+              <a:buNone/>
+            </a:pPr>
+            <a:r>
+              <a:rPr/>
+              <a:t>Nobody annotates anything — and the supervision is real.</a:t>
+            </a:r>
+          </a:p>
+        </p:txBody>
+      </p:sp>
+    </p:spTree>
+  </p:cSld>
+</p:sld>
+</file>
+
+<file path=ppt/slides/slide33.xml><?xml version="1.0" encoding="utf-8"?>
 <p:sld xmlns:a="http://schemas.openxmlformats.org/drawingml/2006/main" xmlns:r="http://schemas.openxmlformats.org/officeDocument/2006/relationships" xmlns:p="http://schemas.openxmlformats.org/presentationml/2006/main">
   <p:cSld>
     <p:spTree>
@@ -10696,7 +12737,7 @@
 </p:sld>
 </file>
 
-<file path=ppt/slides/slide32.xml><?xml version="1.0" encoding="utf-8"?>
+<file path=ppt/slides/slide34.xml><?xml version="1.0" encoding="utf-8"?>
 <p:sld xmlns:a="http://schemas.openxmlformats.org/drawingml/2006/main" xmlns:r="http://schemas.openxmlformats.org/officeDocument/2006/relationships" xmlns:p="http://schemas.openxmlformats.org/presentationml/2006/main">
   <p:cSld>
     <p:spTree>
@@ -11024,7 +13065,7 @@
 </p:sld>
 </file>
 
-<file path=ppt/slides/slide33.xml><?xml version="1.0" encoding="utf-8"?>
+<file path=ppt/slides/slide35.xml><?xml version="1.0" encoding="utf-8"?>
 <p:sld xmlns:a="http://schemas.openxmlformats.org/drawingml/2006/main" xmlns:r="http://schemas.openxmlformats.org/officeDocument/2006/relationships" xmlns:p="http://schemas.openxmlformats.org/presentationml/2006/main">
   <p:cSld>
     <p:spTree>
@@ -11071,105 +13112,42 @@
           </a:p>
         </p:txBody>
       </p:sp>
-      <p:sp>
-        <p:nvSpPr>
-          <p:cNvPr id="3" name="Content Placeholder 2"/>
-          <p:cNvSpPr>
-            <a:spLocks noGrp="1"/>
-          </p:cNvSpPr>
-          <p:nvPr>
-            <p:ph idx="1"/>
-          </p:nvPr>
-        </p:nvSpPr>
-        <p:spPr>
+      <p:pic>
+        <p:nvPicPr>
+          <p:cNvPr descr="ml_workflow.png" id="0" name="Picture 1"/>
+          <p:cNvPicPr>
+            <a:picLocks noGrp="1" noChangeAspect="1"/>
+          </p:cNvPicPr>
+          <p:nvPr/>
+        </p:nvPicPr>
+        <p:blipFill>
+          <a:blip r:embed="rId3"/>
+          <a:stretch>
+            <a:fillRect/>
+          </a:stretch>
+        </p:blipFill>
+        <p:spPr bwMode="auto">
           <a:xfrm>
-            <a:off x="457200" y="1200151"/>
-            <a:ext cx="8229600" cy="3394472"/>
+            <a:off x="457200" y="2090539"/>
+            <a:ext cx="8229600" cy="1511300"/>
           </a:xfrm>
+          <a:prstGeom prst="rect">
+            <a:avLst/>
+          </a:prstGeom>
+          <a:noFill/>
+          <a:ln w="9525">
+            <a:noFill/>
+            <a:headEnd/>
+            <a:tailEnd/>
+          </a:ln>
         </p:spPr>
-        <p:txBody>
-          <a:bodyPr/>
-          <a:lstStyle/>
-          <a:p>
-            <a:pPr lvl="0" indent="-342900" marL="342900">
-              <a:buAutoNum type="arabicPeriod"/>
-            </a:pPr>
-            <a:r>
-              <a:rPr/>
-              <a:t>Frame the problem</a:t>
-            </a:r>
-          </a:p>
-          <a:p>
-            <a:pPr lvl="0" indent="-342900" marL="342900">
-              <a:buAutoNum type="arabicPeriod"/>
-            </a:pPr>
-            <a:r>
-              <a:rPr/>
-              <a:t>Inspect the data</a:t>
-            </a:r>
-          </a:p>
-          <a:p>
-            <a:pPr lvl="0" indent="-342900" marL="342900">
-              <a:buAutoNum type="arabicPeriod"/>
-            </a:pPr>
-            <a:r>
-              <a:rPr b="1"/>
-              <a:t>Split</a:t>
-            </a:r>
-          </a:p>
-          <a:p>
-            <a:pPr lvl="0" indent="-342900" marL="342900">
-              <a:buAutoNum type="arabicPeriod"/>
-            </a:pPr>
-            <a:r>
-              <a:rPr/>
-              <a:t>Baseline</a:t>
-            </a:r>
-          </a:p>
-          <a:p>
-            <a:pPr lvl="0" indent="-342900" marL="342900">
-              <a:buAutoNum type="arabicPeriod"/>
-            </a:pPr>
-            <a:r>
-              <a:rPr/>
-              <a:t>Preprocess and model, in a pipeline</a:t>
-            </a:r>
-          </a:p>
-          <a:p>
-            <a:pPr lvl="0" indent="-342900" marL="342900">
-              <a:buAutoNum type="arabicPeriod"/>
-            </a:pPr>
-            <a:r>
-              <a:rPr/>
-              <a:t>Evaluate with an honest metric</a:t>
-            </a:r>
-          </a:p>
-          <a:p>
-            <a:pPr lvl="0" indent="-342900" marL="342900">
-              <a:buAutoNum type="arabicPeriod"/>
-            </a:pPr>
-            <a:r>
-              <a:rPr/>
-              <a:t>Diagnose</a:t>
-            </a:r>
-          </a:p>
-          <a:p>
-            <a:pPr lvl="0" indent="-342900" marL="342900">
-              <a:buAutoNum type="arabicPeriod"/>
-            </a:pPr>
-            <a:r>
-              <a:rPr/>
-              <a:t>Iterate — with discipline</a:t>
-            </a:r>
-          </a:p>
-        </p:txBody>
-      </p:sp>
+      </p:pic>
     </p:spTree>
   </p:cSld>
 </p:sld>
 </file>
 
-<file path=ppt/slides/slide34.xml><?xml version="1.0" encoding="utf-8"?>
+<file path=ppt/slides/slide36.xml><?xml version="1.0" encoding="utf-8"?>
 <p:sld xmlns:a="http://schemas.openxmlformats.org/drawingml/2006/main" xmlns:r="http://schemas.openxmlformats.org/officeDocument/2006/relationships" xmlns:p="http://schemas.openxmlformats.org/presentationml/2006/main">
   <p:cSld>
     <p:spTree>
@@ -11263,7 +13241,7 @@
 </p:sld>
 </file>
 
-<file path=ppt/slides/slide35.xml><?xml version="1.0" encoding="utf-8"?>
+<file path=ppt/slides/slide37.xml><?xml version="1.0" encoding="utf-8"?>
 <p:sld xmlns:a="http://schemas.openxmlformats.org/drawingml/2006/main" xmlns:r="http://schemas.openxmlformats.org/officeDocument/2006/relationships" xmlns:p="http://schemas.openxmlformats.org/presentationml/2006/main">
   <p:cSld>
     <p:spTree>
@@ -11345,188 +13323,6 @@
 </p:sld>
 </file>
 
-<file path=ppt/slides/slide36.xml><?xml version="1.0" encoding="utf-8"?>
-<p:sld xmlns:a="http://schemas.openxmlformats.org/drawingml/2006/main" xmlns:r="http://schemas.openxmlformats.org/officeDocument/2006/relationships" xmlns:p="http://schemas.openxmlformats.org/presentationml/2006/main">
-  <p:cSld>
-    <p:spTree>
-      <p:nvGrpSpPr>
-        <p:cNvPr id="1" name=""/>
-        <p:cNvGrpSpPr/>
-        <p:nvPr/>
-      </p:nvGrpSpPr>
-      <p:grpSpPr>
-        <a:xfrm>
-          <a:off x="0" y="0"/>
-          <a:ext cx="0" cy="0"/>
-          <a:chOff x="0" y="0"/>
-          <a:chExt cx="0" cy="0"/>
-        </a:xfrm>
-      </p:grpSpPr>
-      <p:sp>
-        <p:nvSpPr>
-          <p:cNvPr id="2" name="Title 1"/>
-          <p:cNvSpPr>
-            <a:spLocks noGrp="1"/>
-          </p:cNvSpPr>
-          <p:nvPr>
-            <p:ph type="title"/>
-          </p:nvPr>
-        </p:nvSpPr>
-        <p:spPr>
-          <a:xfrm>
-            <a:off x="457200" y="205979"/>
-            <a:ext cx="8229600" cy="857250"/>
-          </a:xfrm>
-        </p:spPr>
-        <p:txBody>
-          <a:bodyPr/>
-          <a:lstStyle/>
-          <a:p>
-            <a:pPr lvl="0" indent="0" marL="0">
-              <a:buNone/>
-            </a:pPr>
-            <a:r>
-              <a:rPr/>
-              <a:t>Step 3 — split, before anything else</a:t>
-            </a:r>
-          </a:p>
-        </p:txBody>
-      </p:sp>
-      <p:sp>
-        <p:nvSpPr>
-          <p:cNvPr id="3" name="Content Placeholder 2"/>
-          <p:cNvSpPr>
-            <a:spLocks noGrp="1"/>
-          </p:cNvSpPr>
-          <p:nvPr>
-            <p:ph idx="1"/>
-          </p:nvPr>
-        </p:nvSpPr>
-        <p:spPr>
-          <a:xfrm>
-            <a:off x="457200" y="1200151"/>
-            <a:ext cx="8229600" cy="3394472"/>
-          </a:xfrm>
-        </p:spPr>
-        <p:txBody>
-          <a:bodyPr/>
-          <a:lstStyle/>
-          <a:p>
-            <a:pPr lvl="0" indent="0" marL="0">
-              <a:buNone/>
-            </a:pPr>
-            <a:r>
-              <a:rPr/>
-              <a:t>Before scaling. Before selecting features. Before looking at correlations with the target.</a:t>
-            </a:r>
-          </a:p>
-        </p:txBody>
-      </p:sp>
-    </p:spTree>
-  </p:cSld>
-</p:sld>
-</file>
-
-<file path=ppt/slides/slide37.xml><?xml version="1.0" encoding="utf-8"?>
-<p:sld xmlns:a="http://schemas.openxmlformats.org/drawingml/2006/main" xmlns:r="http://schemas.openxmlformats.org/officeDocument/2006/relationships" xmlns:p="http://schemas.openxmlformats.org/presentationml/2006/main">
-  <p:cSld>
-    <p:spTree>
-      <p:nvGrpSpPr>
-        <p:cNvPr id="1" name=""/>
-        <p:cNvGrpSpPr/>
-        <p:nvPr/>
-      </p:nvGrpSpPr>
-      <p:grpSpPr>
-        <a:xfrm>
-          <a:off x="0" y="0"/>
-          <a:ext cx="0" cy="0"/>
-          <a:chOff x="0" y="0"/>
-          <a:chExt cx="0" cy="0"/>
-        </a:xfrm>
-      </p:grpSpPr>
-      <p:sp>
-        <p:nvSpPr>
-          <p:cNvPr id="2" name="Title 1"/>
-          <p:cNvSpPr>
-            <a:spLocks noGrp="1"/>
-          </p:cNvSpPr>
-          <p:nvPr>
-            <p:ph type="title"/>
-          </p:nvPr>
-        </p:nvSpPr>
-        <p:spPr>
-          <a:xfrm>
-            <a:off x="457200" y="205979"/>
-            <a:ext cx="8229600" cy="857250"/>
-          </a:xfrm>
-        </p:spPr>
-        <p:txBody>
-          <a:bodyPr/>
-          <a:lstStyle/>
-          <a:p>
-            <a:pPr lvl="0" indent="0" marL="0">
-              <a:buNone/>
-            </a:pPr>
-            <a:r>
-              <a:rPr/>
-              <a:t>Step 4 — baseline first</a:t>
-            </a:r>
-          </a:p>
-        </p:txBody>
-      </p:sp>
-      <p:sp>
-        <p:nvSpPr>
-          <p:cNvPr id="3" name="Content Placeholder 2"/>
-          <p:cNvSpPr>
-            <a:spLocks noGrp="1"/>
-          </p:cNvSpPr>
-          <p:nvPr>
-            <p:ph idx="1"/>
-          </p:nvPr>
-        </p:nvSpPr>
-        <p:spPr>
-          <a:xfrm>
-            <a:off x="457200" y="1200151"/>
-            <a:ext cx="8229600" cy="3394472"/>
-          </a:xfrm>
-        </p:spPr>
-        <p:txBody>
-          <a:bodyPr/>
-          <a:lstStyle/>
-          <a:p>
-            <a:pPr lvl="0" indent="0" marL="0">
-              <a:buNone/>
-            </a:pPr>
-            <a:r>
-              <a:rPr/>
-              <a:t>Predict the majority class. Nothing else.</a:t>
-            </a:r>
-          </a:p>
-          <a:p>
-            <a:pPr lvl="0" indent="0" marL="0">
-              <a:buNone/>
-            </a:pPr>
-            <a:r>
-              <a:rPr b="1"/>
-              <a:t>63%</a:t>
-            </a:r>
-          </a:p>
-          <a:p>
-            <a:pPr lvl="0" indent="0" marL="0">
-              <a:buNone/>
-            </a:pPr>
-            <a:r>
-              <a:rPr/>
-              <a:t>Everything from here is measured against that.</a:t>
-            </a:r>
-          </a:p>
-        </p:txBody>
-      </p:sp>
-    </p:spTree>
-  </p:cSld>
-</p:sld>
-</file>
-
 <file path=ppt/slides/slide38.xml><?xml version="1.0" encoding="utf-8"?>
 <p:sld xmlns:a="http://schemas.openxmlformats.org/drawingml/2006/main" xmlns:r="http://schemas.openxmlformats.org/officeDocument/2006/relationships" xmlns:p="http://schemas.openxmlformats.org/presentationml/2006/main">
   <p:cSld>
@@ -11569,7 +13365,7 @@
             </a:pPr>
             <a:r>
               <a:rPr/>
-              <a:t>Step 5 — pipeline, not two steps</a:t>
+              <a:t>Step 3 — split, before anything else</a:t>
             </a:r>
           </a:p>
         </p:txBody>
@@ -11594,81 +13390,12 @@
           <a:bodyPr/>
           <a:lstStyle/>
           <a:p>
-            <a:pPr lvl="0" indent="0">
-              <a:buNone/>
-            </a:pPr>
-            <a:r>
-              <a:rPr>
-                <a:latin typeface="Courier"/>
-              </a:rPr>
-              <a:t>model </a:t>
-            </a:r>
-            <a:r>
-              <a:rPr>
-                <a:solidFill>
-                  <a:srgbClr val="666666"/>
-                </a:solidFill>
-                <a:latin typeface="Courier"/>
-              </a:rPr>
-              <a:t>=</a:t>
-            </a:r>
-            <a:r>
-              <a:rPr>
-                <a:latin typeface="Courier"/>
-              </a:rPr>
-              <a:t> make_pipeline(</a:t>
-            </a:r>
-            <a:br/>
-            <a:r>
-              <a:rPr>
-                <a:latin typeface="Courier"/>
-              </a:rPr>
-              <a:t>    StandardScaler(),</a:t>
-            </a:r>
-            <a:br/>
-            <a:r>
-              <a:rPr>
-                <a:latin typeface="Courier"/>
-              </a:rPr>
-              <a:t>    LogisticRegression(max_iter</a:t>
-            </a:r>
-            <a:r>
-              <a:rPr>
-                <a:solidFill>
-                  <a:srgbClr val="666666"/>
-                </a:solidFill>
-                <a:latin typeface="Courier"/>
-              </a:rPr>
-              <a:t>=</a:t>
-            </a:r>
-            <a:r>
-              <a:rPr>
-                <a:solidFill>
-                  <a:srgbClr val="40A070"/>
-                </a:solidFill>
-                <a:latin typeface="Courier"/>
-              </a:rPr>
-              <a:t>5000</a:t>
-            </a:r>
-            <a:r>
-              <a:rPr>
-                <a:latin typeface="Courier"/>
-              </a:rPr>
-              <a:t>),</a:t>
-            </a:r>
-            <a:br/>
-            <a:r>
-              <a:rPr>
-                <a:latin typeface="Courier"/>
-              </a:rPr>
-              <a:t>)</a:t>
-            </a:r>
-            <a:br/>
-            <a:r>
-              <a:rPr>
-                <a:latin typeface="Courier"/>
-              </a:rPr>
-              <a:t>model.fit(X_train, y_train)</a:t>
+            <a:pPr lvl="0" indent="0" marL="0">
+              <a:buNone/>
+            </a:pPr>
+            <a:r>
+              <a:rPr/>
+              <a:t>Before scaling. Before selecting features. Before looking at correlations with the target.</a:t>
             </a:r>
           </a:p>
         </p:txBody>
@@ -11720,7 +13447,7 @@
             </a:pPr>
             <a:r>
               <a:rPr/>
-              <a:t>Step 6 — the result</a:t>
+              <a:t>Step 4 — baseline first</a:t>
             </a:r>
           </a:p>
         </p:txBody>
@@ -11745,30 +13472,30 @@
           <a:bodyPr/>
           <a:lstStyle/>
           <a:p>
-            <a:pPr lvl="0"/>
-            <a:r>
-              <a:rPr/>
-              <a:t>Baseline: 0.629</a:t>
-            </a:r>
-          </a:p>
-          <a:p>
-            <a:pPr lvl="0"/>
-            <a:r>
-              <a:rPr/>
-              <a:t>Model: </a:t>
-            </a:r>
+            <a:pPr lvl="0" indent="0" marL="0">
+              <a:buNone/>
+            </a:pPr>
+            <a:r>
+              <a:rPr/>
+              <a:t>Predict the majority class. Nothing else.</a:t>
+            </a:r>
+          </a:p>
+          <a:p>
+            <a:pPr lvl="0" indent="0" marL="0">
+              <a:buNone/>
+            </a:pPr>
             <a:r>
               <a:rPr b="1"/>
-              <a:t>0.986</a:t>
-            </a:r>
-          </a:p>
-          <a:p>
-            <a:pPr lvl="0" indent="0" marL="0">
-              <a:buNone/>
-            </a:pPr>
-            <a:r>
-              <a:rPr/>
-              <a:t>Done?</a:t>
+              <a:t>62.7%</a:t>
+            </a:r>
+          </a:p>
+          <a:p>
+            <a:pPr lvl="0" indent="0" marL="0">
+              <a:buNone/>
+            </a:pPr>
+            <a:r>
+              <a:rPr/>
+              <a:t>Everything from here is measured against that.</a:t>
             </a:r>
           </a:p>
         </p:txBody>
@@ -11883,6 +13610,257 @@
 </file>
 
 <file path=ppt/slides/slide40.xml><?xml version="1.0" encoding="utf-8"?>
+<p:sld xmlns:a="http://schemas.openxmlformats.org/drawingml/2006/main" xmlns:r="http://schemas.openxmlformats.org/officeDocument/2006/relationships" xmlns:p="http://schemas.openxmlformats.org/presentationml/2006/main">
+  <p:cSld>
+    <p:spTree>
+      <p:nvGrpSpPr>
+        <p:cNvPr id="1" name=""/>
+        <p:cNvGrpSpPr/>
+        <p:nvPr/>
+      </p:nvGrpSpPr>
+      <p:grpSpPr>
+        <a:xfrm>
+          <a:off x="0" y="0"/>
+          <a:ext cx="0" cy="0"/>
+          <a:chOff x="0" y="0"/>
+          <a:chExt cx="0" cy="0"/>
+        </a:xfrm>
+      </p:grpSpPr>
+      <p:sp>
+        <p:nvSpPr>
+          <p:cNvPr id="2" name="Title 1"/>
+          <p:cNvSpPr>
+            <a:spLocks noGrp="1"/>
+          </p:cNvSpPr>
+          <p:nvPr>
+            <p:ph type="title"/>
+          </p:nvPr>
+        </p:nvSpPr>
+        <p:spPr>
+          <a:xfrm>
+            <a:off x="457200" y="205979"/>
+            <a:ext cx="8229600" cy="857250"/>
+          </a:xfrm>
+        </p:spPr>
+        <p:txBody>
+          <a:bodyPr/>
+          <a:lstStyle/>
+          <a:p>
+            <a:pPr lvl="0" indent="0" marL="0">
+              <a:buNone/>
+            </a:pPr>
+            <a:r>
+              <a:rPr/>
+              <a:t>Step 5 — pipeline, not two steps</a:t>
+            </a:r>
+          </a:p>
+        </p:txBody>
+      </p:sp>
+      <p:sp>
+        <p:nvSpPr>
+          <p:cNvPr id="3" name="Content Placeholder 2"/>
+          <p:cNvSpPr>
+            <a:spLocks noGrp="1"/>
+          </p:cNvSpPr>
+          <p:nvPr>
+            <p:ph idx="1"/>
+          </p:nvPr>
+        </p:nvSpPr>
+        <p:spPr>
+          <a:xfrm>
+            <a:off x="457200" y="1200151"/>
+            <a:ext cx="8229600" cy="3394472"/>
+          </a:xfrm>
+        </p:spPr>
+        <p:txBody>
+          <a:bodyPr/>
+          <a:lstStyle/>
+          <a:p>
+            <a:pPr lvl="0" indent="0">
+              <a:buNone/>
+            </a:pPr>
+            <a:r>
+              <a:rPr>
+                <a:latin typeface="Courier"/>
+              </a:rPr>
+              <a:t>model </a:t>
+            </a:r>
+            <a:r>
+              <a:rPr>
+                <a:solidFill>
+                  <a:srgbClr val="666666"/>
+                </a:solidFill>
+                <a:latin typeface="Courier"/>
+              </a:rPr>
+              <a:t>=</a:t>
+            </a:r>
+            <a:r>
+              <a:rPr>
+                <a:latin typeface="Courier"/>
+              </a:rPr>
+              <a:t> make_pipeline(</a:t>
+            </a:r>
+            <a:br/>
+            <a:r>
+              <a:rPr>
+                <a:latin typeface="Courier"/>
+              </a:rPr>
+              <a:t>    StandardScaler(),</a:t>
+            </a:r>
+            <a:br/>
+            <a:r>
+              <a:rPr>
+                <a:latin typeface="Courier"/>
+              </a:rPr>
+              <a:t>    LogisticRegression(max_iter</a:t>
+            </a:r>
+            <a:r>
+              <a:rPr>
+                <a:solidFill>
+                  <a:srgbClr val="666666"/>
+                </a:solidFill>
+                <a:latin typeface="Courier"/>
+              </a:rPr>
+              <a:t>=</a:t>
+            </a:r>
+            <a:r>
+              <a:rPr>
+                <a:solidFill>
+                  <a:srgbClr val="40A070"/>
+                </a:solidFill>
+                <a:latin typeface="Courier"/>
+              </a:rPr>
+              <a:t>5000</a:t>
+            </a:r>
+            <a:r>
+              <a:rPr>
+                <a:latin typeface="Courier"/>
+              </a:rPr>
+              <a:t>),</a:t>
+            </a:r>
+            <a:br/>
+            <a:r>
+              <a:rPr>
+                <a:latin typeface="Courier"/>
+              </a:rPr>
+              <a:t>)</a:t>
+            </a:r>
+            <a:br/>
+            <a:r>
+              <a:rPr>
+                <a:latin typeface="Courier"/>
+              </a:rPr>
+              <a:t>model.fit(X_train, y_train)</a:t>
+            </a:r>
+          </a:p>
+        </p:txBody>
+      </p:sp>
+    </p:spTree>
+  </p:cSld>
+</p:sld>
+</file>
+
+<file path=ppt/slides/slide41.xml><?xml version="1.0" encoding="utf-8"?>
+<p:sld xmlns:a="http://schemas.openxmlformats.org/drawingml/2006/main" xmlns:r="http://schemas.openxmlformats.org/officeDocument/2006/relationships" xmlns:p="http://schemas.openxmlformats.org/presentationml/2006/main">
+  <p:cSld>
+    <p:spTree>
+      <p:nvGrpSpPr>
+        <p:cNvPr id="1" name=""/>
+        <p:cNvGrpSpPr/>
+        <p:nvPr/>
+      </p:nvGrpSpPr>
+      <p:grpSpPr>
+        <a:xfrm>
+          <a:off x="0" y="0"/>
+          <a:ext cx="0" cy="0"/>
+          <a:chOff x="0" y="0"/>
+          <a:chExt cx="0" cy="0"/>
+        </a:xfrm>
+      </p:grpSpPr>
+      <p:sp>
+        <p:nvSpPr>
+          <p:cNvPr id="2" name="Title 1"/>
+          <p:cNvSpPr>
+            <a:spLocks noGrp="1"/>
+          </p:cNvSpPr>
+          <p:nvPr>
+            <p:ph type="title"/>
+          </p:nvPr>
+        </p:nvSpPr>
+        <p:spPr>
+          <a:xfrm>
+            <a:off x="457200" y="205979"/>
+            <a:ext cx="8229600" cy="857250"/>
+          </a:xfrm>
+        </p:spPr>
+        <p:txBody>
+          <a:bodyPr/>
+          <a:lstStyle/>
+          <a:p>
+            <a:pPr lvl="0" indent="0" marL="0">
+              <a:buNone/>
+            </a:pPr>
+            <a:r>
+              <a:rPr/>
+              <a:t>Step 6 — the result</a:t>
+            </a:r>
+          </a:p>
+        </p:txBody>
+      </p:sp>
+      <p:sp>
+        <p:nvSpPr>
+          <p:cNvPr id="3" name="Content Placeholder 2"/>
+          <p:cNvSpPr>
+            <a:spLocks noGrp="1"/>
+          </p:cNvSpPr>
+          <p:nvPr>
+            <p:ph idx="1"/>
+          </p:nvPr>
+        </p:nvSpPr>
+        <p:spPr>
+          <a:xfrm>
+            <a:off x="457200" y="1200151"/>
+            <a:ext cx="8229600" cy="3394472"/>
+          </a:xfrm>
+        </p:spPr>
+        <p:txBody>
+          <a:bodyPr/>
+          <a:lstStyle/>
+          <a:p>
+            <a:pPr lvl="0"/>
+            <a:r>
+              <a:rPr/>
+              <a:t>Baseline: 0.629</a:t>
+            </a:r>
+          </a:p>
+          <a:p>
+            <a:pPr lvl="0"/>
+            <a:r>
+              <a:rPr/>
+              <a:t>Model: </a:t>
+            </a:r>
+            <a:r>
+              <a:rPr b="1"/>
+              <a:t>0.986</a:t>
+            </a:r>
+          </a:p>
+          <a:p>
+            <a:pPr lvl="0" indent="0" marL="0">
+              <a:buNone/>
+            </a:pPr>
+            <a:r>
+              <a:rPr/>
+              <a:t>Done?</a:t>
+            </a:r>
+          </a:p>
+        </p:txBody>
+      </p:sp>
+    </p:spTree>
+  </p:cSld>
+</p:sld>
+</file>
+
+<file path=ppt/slides/slide42.xml><?xml version="1.0" encoding="utf-8"?>
 <p:sld xmlns:a="http://schemas.openxmlformats.org/drawingml/2006/main" xmlns:r="http://schemas.openxmlformats.org/officeDocument/2006/relationships" xmlns:p="http://schemas.openxmlformats.org/presentationml/2006/main">
   <p:cSld>
     <p:spTree>
@@ -11964,211 +13942,6 @@
 </p:sld>
 </file>
 
-<file path=ppt/slides/slide41.xml><?xml version="1.0" encoding="utf-8"?>
-<p:sld xmlns:a="http://schemas.openxmlformats.org/drawingml/2006/main" xmlns:r="http://schemas.openxmlformats.org/officeDocument/2006/relationships" xmlns:p="http://schemas.openxmlformats.org/presentationml/2006/main">
-  <p:cSld>
-    <p:spTree>
-      <p:nvGrpSpPr>
-        <p:cNvPr id="1" name=""/>
-        <p:cNvGrpSpPr/>
-        <p:nvPr/>
-      </p:nvGrpSpPr>
-      <p:grpSpPr>
-        <a:xfrm>
-          <a:off x="0" y="0"/>
-          <a:ext cx="0" cy="0"/>
-          <a:chOff x="0" y="0"/>
-          <a:chExt cx="0" cy="0"/>
-        </a:xfrm>
-      </p:grpSpPr>
-      <p:sp>
-        <p:nvSpPr>
-          <p:cNvPr id="2" name="Title 1"/>
-          <p:cNvSpPr>
-            <a:spLocks noGrp="1"/>
-          </p:cNvSpPr>
-          <p:nvPr>
-            <p:ph type="title"/>
-          </p:nvPr>
-        </p:nvSpPr>
-        <p:spPr>
-          <a:xfrm>
-            <a:off x="457200" y="205979"/>
-            <a:ext cx="8229600" cy="857250"/>
-          </a:xfrm>
-        </p:spPr>
-        <p:txBody>
-          <a:bodyPr/>
-          <a:lstStyle/>
-          <a:p>
-            <a:pPr lvl="0" indent="0" marL="0">
-              <a:buNone/>
-            </a:pPr>
-            <a:r>
-              <a:rPr/>
-              <a:t>Precision and recall</a:t>
-            </a:r>
-          </a:p>
-        </p:txBody>
-      </p:sp>
-      <p:sp>
-        <p:nvSpPr>
-          <p:cNvPr id="3" name="Content Placeholder 2"/>
-          <p:cNvSpPr>
-            <a:spLocks noGrp="1"/>
-          </p:cNvSpPr>
-          <p:nvPr>
-            <p:ph idx="1"/>
-          </p:nvPr>
-        </p:nvSpPr>
-        <p:spPr>
-          <a:xfrm>
-            <a:off x="457200" y="1200151"/>
-            <a:ext cx="8229600" cy="3394472"/>
-          </a:xfrm>
-        </p:spPr>
-        <p:txBody>
-          <a:bodyPr/>
-          <a:lstStyle/>
-          <a:p>
-            <a:pPr lvl="0"/>
-            <a:r>
-              <a:rPr b="1"/>
-              <a:t>Recall</a:t>
-            </a:r>
-            <a:r>
-              <a:rPr/>
-              <a:t> (malignant): how many malignant tumours we caught</a:t>
-            </a:r>
-          </a:p>
-          <a:p>
-            <a:pPr lvl="0"/>
-            <a:r>
-              <a:rPr b="1"/>
-              <a:t>Precision</a:t>
-            </a:r>
-            <a:r>
-              <a:rPr/>
-              <a:t> (malignant): how often an alert is correct</a:t>
-            </a:r>
-          </a:p>
-          <a:p>
-            <a:pPr lvl="0"/>
-            <a:r>
-              <a:rPr/>
-              <a:t>They trade off against each other</a:t>
-            </a:r>
-          </a:p>
-        </p:txBody>
-      </p:sp>
-    </p:spTree>
-  </p:cSld>
-</p:sld>
-</file>
-
-<file path=ppt/slides/slide42.xml><?xml version="1.0" encoding="utf-8"?>
-<p:sld xmlns:a="http://schemas.openxmlformats.org/drawingml/2006/main" xmlns:r="http://schemas.openxmlformats.org/officeDocument/2006/relationships" xmlns:p="http://schemas.openxmlformats.org/presentationml/2006/main">
-  <p:cSld>
-    <p:spTree>
-      <p:nvGrpSpPr>
-        <p:cNvPr id="1" name=""/>
-        <p:cNvGrpSpPr/>
-        <p:nvPr/>
-      </p:nvGrpSpPr>
-      <p:grpSpPr>
-        <a:xfrm>
-          <a:off x="0" y="0"/>
-          <a:ext cx="0" cy="0"/>
-          <a:chOff x="0" y="0"/>
-          <a:chExt cx="0" cy="0"/>
-        </a:xfrm>
-      </p:grpSpPr>
-      <p:sp>
-        <p:nvSpPr>
-          <p:cNvPr id="2" name="Title 1"/>
-          <p:cNvSpPr>
-            <a:spLocks noGrp="1"/>
-          </p:cNvSpPr>
-          <p:nvPr>
-            <p:ph type="title"/>
-          </p:nvPr>
-        </p:nvSpPr>
-        <p:spPr>
-          <a:xfrm>
-            <a:off x="457200" y="205979"/>
-            <a:ext cx="8229600" cy="857250"/>
-          </a:xfrm>
-        </p:spPr>
-        <p:txBody>
-          <a:bodyPr/>
-          <a:lstStyle/>
-          <a:p>
-            <a:pPr lvl="0" indent="0" marL="0">
-              <a:buNone/>
-            </a:pPr>
-            <a:r>
-              <a:rPr/>
-              <a:t>What we did not do</a:t>
-            </a:r>
-          </a:p>
-        </p:txBody>
-      </p:sp>
-      <p:sp>
-        <p:nvSpPr>
-          <p:cNvPr id="3" name="Content Placeholder 2"/>
-          <p:cNvSpPr>
-            <a:spLocks noGrp="1"/>
-          </p:cNvSpPr>
-          <p:nvPr>
-            <p:ph idx="1"/>
-          </p:nvPr>
-        </p:nvSpPr>
-        <p:spPr>
-          <a:xfrm>
-            <a:off x="457200" y="1200151"/>
-            <a:ext cx="8229600" cy="3394472"/>
-          </a:xfrm>
-        </p:spPr>
-        <p:txBody>
-          <a:bodyPr/>
-          <a:lstStyle/>
-          <a:p>
-            <a:pPr lvl="0"/>
-            <a:r>
-              <a:rPr/>
-              <a:t>No tuning</a:t>
-            </a:r>
-          </a:p>
-          <a:p>
-            <a:pPr lvl="0"/>
-            <a:r>
-              <a:rPr/>
-              <a:t>No comparison of model families</a:t>
-            </a:r>
-          </a:p>
-          <a:p>
-            <a:pPr lvl="0"/>
-            <a:r>
-              <a:rPr/>
-              <a:t>No check of stability across splits</a:t>
-            </a:r>
-          </a:p>
-          <a:p>
-            <a:pPr lvl="0" indent="0" marL="0">
-              <a:buNone/>
-            </a:pPr>
-            <a:r>
-              <a:rPr/>
-              <a:t>And: we never looked at the test set to make a decision.</a:t>
-            </a:r>
-          </a:p>
-        </p:txBody>
-      </p:sp>
-    </p:spTree>
-  </p:cSld>
-</p:sld>
-</file>
-
 <file path=ppt/slides/slide43.xml><?xml version="1.0" encoding="utf-8"?>
 <p:sld xmlns:a="http://schemas.openxmlformats.org/drawingml/2006/main" xmlns:r="http://schemas.openxmlformats.org/officeDocument/2006/relationships" xmlns:p="http://schemas.openxmlformats.org/presentationml/2006/main">
   <p:cSld>
@@ -12198,8 +13971,8 @@
         </p:nvSpPr>
         <p:spPr>
           <a:xfrm>
-            <a:off x="457200" y="205979"/>
-            <a:ext cx="8229600" cy="857250"/>
+            <a:off x="457200" y="205740"/>
+            <a:ext cx="8229600" cy="874395"/>
           </a:xfrm>
         </p:spPr>
         <p:txBody>
@@ -12211,25 +13984,25 @@
             </a:pPr>
             <a:r>
               <a:rPr/>
-              <a:t>Four ways a model misleads you</a:t>
-            </a:r>
-          </a:p>
-        </p:txBody>
-      </p:sp>
-      <p:sp>
-        <p:nvSpPr>
-          <p:cNvPr id="3" name="Content Placeholder 2"/>
-          <p:cNvSpPr>
-            <a:spLocks noGrp="1"/>
-          </p:cNvSpPr>
-          <p:nvPr>
-            <p:ph idx="1"/>
+              <a:t>Precision and recall</a:t>
+            </a:r>
+          </a:p>
+        </p:txBody>
+      </p:sp>
+      <p:sp>
+        <p:nvSpPr>
+          <p:cNvPr id="4" name="Text Placeholder 3"/>
+          <p:cNvSpPr>
+            <a:spLocks noGrp="1"/>
+          </p:cNvSpPr>
+          <p:nvPr>
+            <p:ph idx="2" sz="half" type="body"/>
           </p:nvPr>
         </p:nvSpPr>
         <p:spPr>
           <a:xfrm>
-            <a:off x="457200" y="1200151"/>
-            <a:ext cx="8229600" cy="3394472"/>
+            <a:off x="457200" y="1183005"/>
+            <a:ext cx="8229600" cy="1748790"/>
           </a:xfrm>
         </p:spPr>
         <p:txBody>
@@ -12238,42 +14011,64 @@
           <a:p>
             <a:pPr lvl="0"/>
             <a:r>
-              <a:rPr/>
-              <a:t>Leakage</a:t>
+              <a:rPr b="1"/>
+              <a:t>Recall</a:t>
+            </a:r>
+            <a:r>
+              <a:rPr/>
+              <a:t> (malignant): how many malignant tumours we caught</a:t>
             </a:r>
           </a:p>
           <a:p>
             <a:pPr lvl="0"/>
             <a:r>
-              <a:rPr/>
-              <a:t>Imbalance</a:t>
+              <a:rPr b="1"/>
+              <a:t>Precision</a:t>
+            </a:r>
+            <a:r>
+              <a:rPr/>
+              <a:t> (malignant): how often an alert is correct</a:t>
             </a:r>
           </a:p>
           <a:p>
             <a:pPr lvl="0"/>
             <a:r>
               <a:rPr/>
-              <a:t>Shortcut features</a:t>
-            </a:r>
-          </a:p>
-          <a:p>
-            <a:pPr lvl="0"/>
-            <a:r>
-              <a:rPr/>
-              <a:t>Single-split noise</a:t>
-            </a:r>
-          </a:p>
-          <a:p>
-            <a:pPr lvl="0" indent="0" marL="0">
-              <a:buNone/>
-            </a:pPr>
-            <a:r>
-              <a:rPr/>
-              <a:t>All produce numbers that pass a casual review.</a:t>
-            </a:r>
-          </a:p>
-        </p:txBody>
-      </p:sp>
+              <a:t>They trade off against each other</a:t>
+            </a:r>
+          </a:p>
+        </p:txBody>
+      </p:sp>
+      <p:pic>
+        <p:nvPicPr>
+          <p:cNvPr descr="precision_recall_tradeoff.png" id="0" name="Picture 1"/>
+          <p:cNvPicPr>
+            <a:picLocks noGrp="1" noChangeAspect="1"/>
+          </p:cNvPicPr>
+          <p:nvPr/>
+        </p:nvPicPr>
+        <p:blipFill>
+          <a:blip r:embed="rId3"/>
+          <a:stretch>
+            <a:fillRect/>
+          </a:stretch>
+        </p:blipFill>
+        <p:spPr bwMode="auto">
+          <a:xfrm>
+            <a:off x="3130584" y="3034665"/>
+            <a:ext cx="2882832" cy="1491615"/>
+          </a:xfrm>
+          <a:prstGeom prst="rect">
+            <a:avLst/>
+          </a:prstGeom>
+          <a:noFill/>
+          <a:ln w="9525">
+            <a:noFill/>
+            <a:headEnd/>
+            <a:tailEnd/>
+          </a:ln>
+        </p:spPr>
+      </p:pic>
     </p:spTree>
   </p:cSld>
 </p:sld>
@@ -12321,7 +14116,7 @@
             </a:pPr>
             <a:r>
               <a:rPr/>
-              <a:t>200 samples. 5000 random features. Coin-flip labels.</a:t>
+              <a:t>What we did not do</a:t>
             </a:r>
           </a:p>
         </p:txBody>
@@ -12346,21 +14141,33 @@
           <a:bodyPr/>
           <a:lstStyle/>
           <a:p>
-            <a:pPr lvl="0" indent="0" marL="0">
-              <a:buNone/>
-            </a:pPr>
-            <a:r>
-              <a:rPr/>
-              <a:t>There is nothing to learn.</a:t>
-            </a:r>
-          </a:p>
-          <a:p>
-            <a:pPr lvl="0" indent="0" marL="0">
-              <a:buNone/>
-            </a:pPr>
-            <a:r>
-              <a:rPr/>
-              <a:t>Anything above 50% is an artefact.</a:t>
+            <a:pPr lvl="0"/>
+            <a:r>
+              <a:rPr/>
+              <a:t>No tuning</a:t>
+            </a:r>
+          </a:p>
+          <a:p>
+            <a:pPr lvl="0"/>
+            <a:r>
+              <a:rPr/>
+              <a:t>No comparison of model families</a:t>
+            </a:r>
+          </a:p>
+          <a:p>
+            <a:pPr lvl="0"/>
+            <a:r>
+              <a:rPr/>
+              <a:t>No check of stability across splits</a:t>
+            </a:r>
+          </a:p>
+          <a:p>
+            <a:pPr lvl="0" indent="0" marL="0">
+              <a:buNone/>
+            </a:pPr>
+            <a:r>
+              <a:rPr/>
+              <a:t>And: we never looked at the test set to make a decision.</a:t>
             </a:r>
           </a:p>
         </p:txBody>
@@ -12371,6 +14178,207 @@
 </file>
 
 <file path=ppt/slides/slide45.xml><?xml version="1.0" encoding="utf-8"?>
+<p:sld xmlns:a="http://schemas.openxmlformats.org/drawingml/2006/main" xmlns:r="http://schemas.openxmlformats.org/officeDocument/2006/relationships" xmlns:p="http://schemas.openxmlformats.org/presentationml/2006/main">
+  <p:cSld>
+    <p:spTree>
+      <p:nvGrpSpPr>
+        <p:cNvPr id="1" name=""/>
+        <p:cNvGrpSpPr/>
+        <p:nvPr/>
+      </p:nvGrpSpPr>
+      <p:grpSpPr>
+        <a:xfrm>
+          <a:off x="0" y="0"/>
+          <a:ext cx="0" cy="0"/>
+          <a:chOff x="0" y="0"/>
+          <a:chExt cx="0" cy="0"/>
+        </a:xfrm>
+      </p:grpSpPr>
+      <p:sp>
+        <p:nvSpPr>
+          <p:cNvPr id="2" name="Title 1"/>
+          <p:cNvSpPr>
+            <a:spLocks noGrp="1"/>
+          </p:cNvSpPr>
+          <p:nvPr>
+            <p:ph type="title"/>
+          </p:nvPr>
+        </p:nvSpPr>
+        <p:spPr>
+          <a:xfrm>
+            <a:off x="457200" y="205979"/>
+            <a:ext cx="8229600" cy="857250"/>
+          </a:xfrm>
+        </p:spPr>
+        <p:txBody>
+          <a:bodyPr/>
+          <a:lstStyle/>
+          <a:p>
+            <a:pPr lvl="0" indent="0" marL="0">
+              <a:buNone/>
+            </a:pPr>
+            <a:r>
+              <a:rPr/>
+              <a:t>Four ways a model misleads you</a:t>
+            </a:r>
+          </a:p>
+        </p:txBody>
+      </p:sp>
+      <p:sp>
+        <p:nvSpPr>
+          <p:cNvPr id="3" name="Content Placeholder 2"/>
+          <p:cNvSpPr>
+            <a:spLocks noGrp="1"/>
+          </p:cNvSpPr>
+          <p:nvPr>
+            <p:ph idx="1"/>
+          </p:nvPr>
+        </p:nvSpPr>
+        <p:spPr>
+          <a:xfrm>
+            <a:off x="457200" y="1200151"/>
+            <a:ext cx="8229600" cy="3394472"/>
+          </a:xfrm>
+        </p:spPr>
+        <p:txBody>
+          <a:bodyPr/>
+          <a:lstStyle/>
+          <a:p>
+            <a:pPr lvl="0"/>
+            <a:r>
+              <a:rPr/>
+              <a:t>Leakage</a:t>
+            </a:r>
+          </a:p>
+          <a:p>
+            <a:pPr lvl="0"/>
+            <a:r>
+              <a:rPr/>
+              <a:t>Imbalance</a:t>
+            </a:r>
+          </a:p>
+          <a:p>
+            <a:pPr lvl="0"/>
+            <a:r>
+              <a:rPr/>
+              <a:t>Shortcut features</a:t>
+            </a:r>
+          </a:p>
+          <a:p>
+            <a:pPr lvl="0"/>
+            <a:r>
+              <a:rPr/>
+              <a:t>Single-split noise</a:t>
+            </a:r>
+          </a:p>
+          <a:p>
+            <a:pPr lvl="0" indent="0" marL="0">
+              <a:buNone/>
+            </a:pPr>
+            <a:r>
+              <a:rPr/>
+              <a:t>All produce numbers that pass a casual review.</a:t>
+            </a:r>
+          </a:p>
+        </p:txBody>
+      </p:sp>
+    </p:spTree>
+  </p:cSld>
+</p:sld>
+</file>
+
+<file path=ppt/slides/slide46.xml><?xml version="1.0" encoding="utf-8"?>
+<p:sld xmlns:a="http://schemas.openxmlformats.org/drawingml/2006/main" xmlns:r="http://schemas.openxmlformats.org/officeDocument/2006/relationships" xmlns:p="http://schemas.openxmlformats.org/presentationml/2006/main">
+  <p:cSld>
+    <p:spTree>
+      <p:nvGrpSpPr>
+        <p:cNvPr id="1" name=""/>
+        <p:cNvGrpSpPr/>
+        <p:nvPr/>
+      </p:nvGrpSpPr>
+      <p:grpSpPr>
+        <a:xfrm>
+          <a:off x="0" y="0"/>
+          <a:ext cx="0" cy="0"/>
+          <a:chOff x="0" y="0"/>
+          <a:chExt cx="0" cy="0"/>
+        </a:xfrm>
+      </p:grpSpPr>
+      <p:sp>
+        <p:nvSpPr>
+          <p:cNvPr id="2" name="Title 1"/>
+          <p:cNvSpPr>
+            <a:spLocks noGrp="1"/>
+          </p:cNvSpPr>
+          <p:nvPr>
+            <p:ph type="title"/>
+          </p:nvPr>
+        </p:nvSpPr>
+        <p:spPr>
+          <a:xfrm>
+            <a:off x="457200" y="205979"/>
+            <a:ext cx="8229600" cy="857250"/>
+          </a:xfrm>
+        </p:spPr>
+        <p:txBody>
+          <a:bodyPr/>
+          <a:lstStyle/>
+          <a:p>
+            <a:pPr lvl="0" indent="0" marL="0">
+              <a:buNone/>
+            </a:pPr>
+            <a:r>
+              <a:rPr/>
+              <a:t>200 samples. 5000 random features. Coin-flip labels.</a:t>
+            </a:r>
+          </a:p>
+        </p:txBody>
+      </p:sp>
+      <p:sp>
+        <p:nvSpPr>
+          <p:cNvPr id="3" name="Content Placeholder 2"/>
+          <p:cNvSpPr>
+            <a:spLocks noGrp="1"/>
+          </p:cNvSpPr>
+          <p:nvPr>
+            <p:ph idx="1"/>
+          </p:nvPr>
+        </p:nvSpPr>
+        <p:spPr>
+          <a:xfrm>
+            <a:off x="457200" y="1200151"/>
+            <a:ext cx="8229600" cy="3394472"/>
+          </a:xfrm>
+        </p:spPr>
+        <p:txBody>
+          <a:bodyPr/>
+          <a:lstStyle/>
+          <a:p>
+            <a:pPr lvl="0" indent="0" marL="0">
+              <a:buNone/>
+            </a:pPr>
+            <a:r>
+              <a:rPr/>
+              <a:t>There is nothing to learn.</a:t>
+            </a:r>
+          </a:p>
+          <a:p>
+            <a:pPr lvl="0" indent="0" marL="0">
+              <a:buNone/>
+            </a:pPr>
+            <a:r>
+              <a:rPr/>
+              <a:t>Anything above 50% is an artefact.</a:t>
+            </a:r>
+          </a:p>
+        </p:txBody>
+      </p:sp>
+    </p:spTree>
+  </p:cSld>
+</p:sld>
+</file>
+
+<file path=ppt/slides/slide47.xml><?xml version="1.0" encoding="utf-8"?>
 <p:sld xmlns:a="http://schemas.openxmlformats.org/drawingml/2006/main" xmlns:r="http://schemas.openxmlformats.org/officeDocument/2006/relationships" xmlns:p="http://schemas.openxmlformats.org/presentationml/2006/main">
   <p:cSld>
     <p:spTree>
@@ -12452,209 +14460,6 @@
 </p:sld>
 </file>
 
-<file path=ppt/slides/slide46.xml><?xml version="1.0" encoding="utf-8"?>
-<p:sld xmlns:a="http://schemas.openxmlformats.org/drawingml/2006/main" xmlns:r="http://schemas.openxmlformats.org/officeDocument/2006/relationships" xmlns:p="http://schemas.openxmlformats.org/presentationml/2006/main">
-  <p:cSld>
-    <p:spTree>
-      <p:nvGrpSpPr>
-        <p:cNvPr id="1" name=""/>
-        <p:cNvGrpSpPr/>
-        <p:nvPr/>
-      </p:nvGrpSpPr>
-      <p:grpSpPr>
-        <a:xfrm>
-          <a:off x="0" y="0"/>
-          <a:ext cx="0" cy="0"/>
-          <a:chOff x="0" y="0"/>
-          <a:chExt cx="0" cy="0"/>
-        </a:xfrm>
-      </p:grpSpPr>
-      <p:sp>
-        <p:nvSpPr>
-          <p:cNvPr id="2" name="Title 1"/>
-          <p:cNvSpPr>
-            <a:spLocks noGrp="1"/>
-          </p:cNvSpPr>
-          <p:nvPr>
-            <p:ph type="title"/>
-          </p:nvPr>
-        </p:nvSpPr>
-        <p:spPr>
-          <a:xfrm>
-            <a:off x="457200" y="205979"/>
-            <a:ext cx="8229600" cy="857250"/>
-          </a:xfrm>
-        </p:spPr>
-        <p:txBody>
-          <a:bodyPr/>
-          <a:lstStyle/>
-          <a:p>
-            <a:pPr lvl="0" indent="0" marL="0">
-              <a:buNone/>
-            </a:pPr>
-            <a:r>
-              <a:rPr/>
-              <a:t>The rule</a:t>
-            </a:r>
-          </a:p>
-        </p:txBody>
-      </p:sp>
-      <p:sp>
-        <p:nvSpPr>
-          <p:cNvPr id="3" name="Content Placeholder 2"/>
-          <p:cNvSpPr>
-            <a:spLocks noGrp="1"/>
-          </p:cNvSpPr>
-          <p:nvPr>
-            <p:ph idx="1"/>
-          </p:nvPr>
-        </p:nvSpPr>
-        <p:spPr>
-          <a:xfrm>
-            <a:off x="457200" y="1200151"/>
-            <a:ext cx="8229600" cy="3394472"/>
-          </a:xfrm>
-        </p:spPr>
-        <p:txBody>
-          <a:bodyPr/>
-          <a:lstStyle/>
-          <a:p>
-            <a:pPr lvl="0" indent="0" marL="0">
-              <a:buNone/>
-            </a:pPr>
-            <a:r>
-              <a:rPr/>
-              <a:t>Every step that </a:t>
-            </a:r>
-            <a:r>
-              <a:rPr b="1"/>
-              <a:t>learns anything</a:t>
-            </a:r>
-            <a:r>
-              <a:rPr/>
-              <a:t> must be fitted inside the training fold.</a:t>
-            </a:r>
-          </a:p>
-          <a:p>
-            <a:pPr lvl="0" indent="0" marL="0">
-              <a:buNone/>
-            </a:pPr>
-            <a:r>
-              <a:rPr/>
-              <a:t>Scaling. Imputation. Encoding. Selection. Tuning.</a:t>
-            </a:r>
-          </a:p>
-        </p:txBody>
-      </p:sp>
-    </p:spTree>
-  </p:cSld>
-</p:sld>
-</file>
-
-<file path=ppt/slides/slide47.xml><?xml version="1.0" encoding="utf-8"?>
-<p:sld xmlns:a="http://schemas.openxmlformats.org/drawingml/2006/main" xmlns:r="http://schemas.openxmlformats.org/officeDocument/2006/relationships" xmlns:p="http://schemas.openxmlformats.org/presentationml/2006/main">
-  <p:cSld>
-    <p:spTree>
-      <p:nvGrpSpPr>
-        <p:cNvPr id="1" name=""/>
-        <p:cNvGrpSpPr/>
-        <p:nvPr/>
-      </p:nvGrpSpPr>
-      <p:grpSpPr>
-        <a:xfrm>
-          <a:off x="0" y="0"/>
-          <a:ext cx="0" cy="0"/>
-          <a:chOff x="0" y="0"/>
-          <a:chExt cx="0" cy="0"/>
-        </a:xfrm>
-      </p:grpSpPr>
-      <p:sp>
-        <p:nvSpPr>
-          <p:cNvPr id="2" name="Title 1"/>
-          <p:cNvSpPr>
-            <a:spLocks noGrp="1"/>
-          </p:cNvSpPr>
-          <p:nvPr>
-            <p:ph type="title"/>
-          </p:nvPr>
-        </p:nvSpPr>
-        <p:spPr>
-          <a:xfrm>
-            <a:off x="457200" y="205979"/>
-            <a:ext cx="8229600" cy="857250"/>
-          </a:xfrm>
-        </p:spPr>
-        <p:txBody>
-          <a:bodyPr/>
-          <a:lstStyle/>
-          <a:p>
-            <a:pPr lvl="0" indent="0" marL="0">
-              <a:buNone/>
-            </a:pPr>
-            <a:r>
-              <a:rPr/>
-              <a:t>99% accuracy, detecting nothing</a:t>
-            </a:r>
-          </a:p>
-        </p:txBody>
-      </p:sp>
-      <p:sp>
-        <p:nvSpPr>
-          <p:cNvPr id="3" name="Content Placeholder 2"/>
-          <p:cNvSpPr>
-            <a:spLocks noGrp="1"/>
-          </p:cNvSpPr>
-          <p:nvPr>
-            <p:ph idx="1"/>
-          </p:nvPr>
-        </p:nvSpPr>
-        <p:spPr>
-          <a:xfrm>
-            <a:off x="457200" y="1200151"/>
-            <a:ext cx="8229600" cy="3394472"/>
-          </a:xfrm>
-        </p:spPr>
-        <p:txBody>
-          <a:bodyPr/>
-          <a:lstStyle/>
-          <a:p>
-            <a:pPr lvl="0" indent="0" marL="0">
-              <a:buNone/>
-            </a:pPr>
-            <a:r>
-              <a:rPr/>
-              <a:t>1% positives. Answer “negative” every time.</a:t>
-            </a:r>
-          </a:p>
-          <a:p>
-            <a:pPr lvl="0"/>
-            <a:r>
-              <a:rPr/>
-              <a:t>Accuracy: </a:t>
-            </a:r>
-            <a:r>
-              <a:rPr b="1"/>
-              <a:t>0.986</a:t>
-            </a:r>
-          </a:p>
-          <a:p>
-            <a:pPr lvl="0"/>
-            <a:r>
-              <a:rPr/>
-              <a:t>Recall on positives: </a:t>
-            </a:r>
-            <a:r>
-              <a:rPr b="1"/>
-              <a:t>0.000</a:t>
-            </a:r>
-          </a:p>
-        </p:txBody>
-      </p:sp>
-    </p:spTree>
-  </p:cSld>
-</p:sld>
-</file>
-
 <file path=ppt/slides/slide48.xml><?xml version="1.0" encoding="utf-8"?>
 <p:sld xmlns:a="http://schemas.openxmlformats.org/drawingml/2006/main" xmlns:r="http://schemas.openxmlformats.org/officeDocument/2006/relationships" xmlns:p="http://schemas.openxmlformats.org/presentationml/2006/main">
   <p:cSld>
@@ -12697,7 +14502,7 @@
             </a:pPr>
             <a:r>
               <a:rPr/>
-              <a:t>Shortcut features</a:t>
+              <a:t>The rule</a:t>
             </a:r>
           </a:p>
         </p:txBody>
@@ -12727,30 +14532,24 @@
             </a:pPr>
             <a:r>
               <a:rPr/>
-              <a:t>A column that is a </a:t>
+              <a:t>Every step that </a:t>
             </a:r>
             <a:r>
               <a:rPr b="1"/>
-              <a:t>consequence</a:t>
-            </a:r>
-            <a:r>
-              <a:rPr/>
-              <a:t> of the label, not a predictor of it.</a:t>
-            </a:r>
-          </a:p>
-          <a:p>
-            <a:pPr lvl="0" indent="0" marL="0">
-              <a:buNone/>
-            </a:pPr>
-            <a:r>
-              <a:rPr>
-                <a:latin typeface="Courier"/>
-              </a:rPr>
-              <a:t>biopsy_scheduled</a:t>
-            </a:r>
-            <a:r>
-              <a:rPr/>
-              <a:t> → accuracy rises → model is worthless</a:t>
+              <a:t>learns anything</a:t>
+            </a:r>
+            <a:r>
+              <a:rPr/>
+              <a:t> must be fitted inside the training fold.</a:t>
+            </a:r>
+          </a:p>
+          <a:p>
+            <a:pPr lvl="0" indent="0" marL="0">
+              <a:buNone/>
+            </a:pPr>
+            <a:r>
+              <a:rPr/>
+              <a:t>Scaling. Imputation. Encoding. Selection. Tuning.</a:t>
             </a:r>
           </a:p>
         </p:txBody>
@@ -12761,6 +14560,314 @@
 </file>
 
 <file path=ppt/slides/slide49.xml><?xml version="1.0" encoding="utf-8"?>
+<p:sld xmlns:a="http://schemas.openxmlformats.org/drawingml/2006/main" xmlns:r="http://schemas.openxmlformats.org/officeDocument/2006/relationships" xmlns:p="http://schemas.openxmlformats.org/presentationml/2006/main">
+  <p:cSld>
+    <p:spTree>
+      <p:nvGrpSpPr>
+        <p:cNvPr id="1" name=""/>
+        <p:cNvGrpSpPr/>
+        <p:nvPr/>
+      </p:nvGrpSpPr>
+      <p:grpSpPr>
+        <a:xfrm>
+          <a:off x="0" y="0"/>
+          <a:ext cx="0" cy="0"/>
+          <a:chOff x="0" y="0"/>
+          <a:chExt cx="0" cy="0"/>
+        </a:xfrm>
+      </p:grpSpPr>
+      <p:sp>
+        <p:nvSpPr>
+          <p:cNvPr id="2" name="Title 1"/>
+          <p:cNvSpPr>
+            <a:spLocks noGrp="1"/>
+          </p:cNvSpPr>
+          <p:nvPr>
+            <p:ph type="title"/>
+          </p:nvPr>
+        </p:nvSpPr>
+        <p:spPr>
+          <a:xfrm>
+            <a:off x="457200" y="205979"/>
+            <a:ext cx="8229600" cy="857250"/>
+          </a:xfrm>
+        </p:spPr>
+        <p:txBody>
+          <a:bodyPr/>
+          <a:lstStyle/>
+          <a:p>
+            <a:pPr lvl="0" indent="0" marL="0">
+              <a:buNone/>
+            </a:pPr>
+            <a:r>
+              <a:rPr/>
+              <a:t>99% accuracy, detecting nothing</a:t>
+            </a:r>
+          </a:p>
+        </p:txBody>
+      </p:sp>
+      <p:sp>
+        <p:nvSpPr>
+          <p:cNvPr id="3" name="Content Placeholder 2"/>
+          <p:cNvSpPr>
+            <a:spLocks noGrp="1"/>
+          </p:cNvSpPr>
+          <p:nvPr>
+            <p:ph idx="1"/>
+          </p:nvPr>
+        </p:nvSpPr>
+        <p:spPr>
+          <a:xfrm>
+            <a:off x="457200" y="1200151"/>
+            <a:ext cx="8229600" cy="3394472"/>
+          </a:xfrm>
+        </p:spPr>
+        <p:txBody>
+          <a:bodyPr/>
+          <a:lstStyle/>
+          <a:p>
+            <a:pPr lvl="0" indent="0" marL="0">
+              <a:buNone/>
+            </a:pPr>
+            <a:r>
+              <a:rPr/>
+              <a:t>1% positives. Answer “negative” every time.</a:t>
+            </a:r>
+          </a:p>
+          <a:p>
+            <a:pPr lvl="0"/>
+            <a:r>
+              <a:rPr/>
+              <a:t>Accuracy: </a:t>
+            </a:r>
+            <a:r>
+              <a:rPr b="1"/>
+              <a:t>0.986</a:t>
+            </a:r>
+          </a:p>
+          <a:p>
+            <a:pPr lvl="0"/>
+            <a:r>
+              <a:rPr/>
+              <a:t>Recall on positives: </a:t>
+            </a:r>
+            <a:r>
+              <a:rPr b="1"/>
+              <a:t>0.000</a:t>
+            </a:r>
+          </a:p>
+        </p:txBody>
+      </p:sp>
+    </p:spTree>
+  </p:cSld>
+</p:sld>
+</file>
+
+<file path=ppt/slides/slide5.xml><?xml version="1.0" encoding="utf-8"?>
+<p:sld xmlns:a="http://schemas.openxmlformats.org/drawingml/2006/main" xmlns:r="http://schemas.openxmlformats.org/officeDocument/2006/relationships" xmlns:p="http://schemas.openxmlformats.org/presentationml/2006/main">
+  <p:cSld>
+    <p:spTree>
+      <p:nvGrpSpPr>
+        <p:cNvPr id="1" name=""/>
+        <p:cNvGrpSpPr/>
+        <p:nvPr/>
+      </p:nvGrpSpPr>
+      <p:grpSpPr>
+        <a:xfrm>
+          <a:off x="0" y="0"/>
+          <a:ext cx="0" cy="0"/>
+          <a:chOff x="0" y="0"/>
+          <a:chExt cx="0" cy="0"/>
+        </a:xfrm>
+      </p:grpSpPr>
+      <p:sp>
+        <p:nvSpPr>
+          <p:cNvPr id="2" name="Title 1"/>
+          <p:cNvSpPr>
+            <a:spLocks noGrp="1"/>
+          </p:cNvSpPr>
+          <p:nvPr>
+            <p:ph type="title"/>
+          </p:nvPr>
+        </p:nvSpPr>
+        <p:spPr>
+          <a:xfrm>
+            <a:off x="457200" y="205979"/>
+            <a:ext cx="8229600" cy="857250"/>
+          </a:xfrm>
+        </p:spPr>
+        <p:txBody>
+          <a:bodyPr/>
+          <a:lstStyle/>
+          <a:p>
+            <a:pPr lvl="0" indent="0" marL="0">
+              <a:buNone/>
+            </a:pPr>
+            <a:r>
+              <a:rPr/>
+              <a:t>Your advantage, and your gap</a:t>
+            </a:r>
+          </a:p>
+        </p:txBody>
+      </p:sp>
+      <p:sp>
+        <p:nvSpPr>
+          <p:cNvPr id="3" name="Content Placeholder 2"/>
+          <p:cNvSpPr>
+            <a:spLocks noGrp="1"/>
+          </p:cNvSpPr>
+          <p:nvPr>
+            <p:ph idx="1"/>
+          </p:nvPr>
+        </p:nvSpPr>
+        <p:spPr>
+          <a:xfrm>
+            <a:off x="457200" y="1200151"/>
+            <a:ext cx="8229600" cy="3394472"/>
+          </a:xfrm>
+        </p:spPr>
+        <p:txBody>
+          <a:bodyPr/>
+          <a:lstStyle/>
+          <a:p>
+            <a:pPr lvl="0" indent="0" marL="0">
+              <a:buNone/>
+            </a:pPr>
+            <a:r>
+              <a:rPr b="1"/>
+              <a:t>Advantage:</a:t>
+            </a:r>
+            <a:r>
+              <a:rPr/>
+              <a:t> you can program. You will implement methods, not only call them.</a:t>
+            </a:r>
+          </a:p>
+          <a:p>
+            <a:pPr lvl="0" indent="0" marL="0">
+              <a:buNone/>
+            </a:pPr>
+            <a:r>
+              <a:rPr b="1"/>
+              <a:t>Gap:</a:t>
+            </a:r>
+            <a:r>
+              <a:rPr/>
+              <a:t> you can produce results faster than you can judge them.</a:t>
+            </a:r>
+          </a:p>
+        </p:txBody>
+      </p:sp>
+    </p:spTree>
+  </p:cSld>
+</p:sld>
+</file>
+
+<file path=ppt/slides/slide50.xml><?xml version="1.0" encoding="utf-8"?>
+<p:sld xmlns:a="http://schemas.openxmlformats.org/drawingml/2006/main" xmlns:r="http://schemas.openxmlformats.org/officeDocument/2006/relationships" xmlns:p="http://schemas.openxmlformats.org/presentationml/2006/main">
+  <p:cSld>
+    <p:spTree>
+      <p:nvGrpSpPr>
+        <p:cNvPr id="1" name=""/>
+        <p:cNvGrpSpPr/>
+        <p:nvPr/>
+      </p:nvGrpSpPr>
+      <p:grpSpPr>
+        <a:xfrm>
+          <a:off x="0" y="0"/>
+          <a:ext cx="0" cy="0"/>
+          <a:chOff x="0" y="0"/>
+          <a:chExt cx="0" cy="0"/>
+        </a:xfrm>
+      </p:grpSpPr>
+      <p:sp>
+        <p:nvSpPr>
+          <p:cNvPr id="2" name="Title 1"/>
+          <p:cNvSpPr>
+            <a:spLocks noGrp="1"/>
+          </p:cNvSpPr>
+          <p:nvPr>
+            <p:ph type="title"/>
+          </p:nvPr>
+        </p:nvSpPr>
+        <p:spPr>
+          <a:xfrm>
+            <a:off x="457200" y="205979"/>
+            <a:ext cx="8229600" cy="857250"/>
+          </a:xfrm>
+        </p:spPr>
+        <p:txBody>
+          <a:bodyPr/>
+          <a:lstStyle/>
+          <a:p>
+            <a:pPr lvl="0" indent="0" marL="0">
+              <a:buNone/>
+            </a:pPr>
+            <a:r>
+              <a:rPr/>
+              <a:t>Shortcut features</a:t>
+            </a:r>
+          </a:p>
+        </p:txBody>
+      </p:sp>
+      <p:sp>
+        <p:nvSpPr>
+          <p:cNvPr id="3" name="Content Placeholder 2"/>
+          <p:cNvSpPr>
+            <a:spLocks noGrp="1"/>
+          </p:cNvSpPr>
+          <p:nvPr>
+            <p:ph idx="1"/>
+          </p:nvPr>
+        </p:nvSpPr>
+        <p:spPr>
+          <a:xfrm>
+            <a:off x="457200" y="1200151"/>
+            <a:ext cx="8229600" cy="3394472"/>
+          </a:xfrm>
+        </p:spPr>
+        <p:txBody>
+          <a:bodyPr/>
+          <a:lstStyle/>
+          <a:p>
+            <a:pPr lvl="0" indent="0" marL="0">
+              <a:buNone/>
+            </a:pPr>
+            <a:r>
+              <a:rPr/>
+              <a:t>A column that is a </a:t>
+            </a:r>
+            <a:r>
+              <a:rPr b="1"/>
+              <a:t>consequence</a:t>
+            </a:r>
+            <a:r>
+              <a:rPr/>
+              <a:t> of the label, not a predictor of it.</a:t>
+            </a:r>
+          </a:p>
+          <a:p>
+            <a:pPr lvl="0" indent="0" marL="0">
+              <a:buNone/>
+            </a:pPr>
+            <a:r>
+              <a:rPr>
+                <a:latin typeface="Courier"/>
+              </a:rPr>
+              <a:t>biopsy_scheduled</a:t>
+            </a:r>
+            <a:r>
+              <a:rPr/>
+              <a:t> → accuracy rises → model is worthless</a:t>
+            </a:r>
+          </a:p>
+        </p:txBody>
+      </p:sp>
+    </p:spTree>
+  </p:cSld>
+</p:sld>
+</file>
+
+<file path=ppt/slides/slide51.xml><?xml version="1.0" encoding="utf-8"?>
 <p:sld xmlns:a="http://schemas.openxmlformats.org/drawingml/2006/main" xmlns:r="http://schemas.openxmlformats.org/officeDocument/2006/relationships" xmlns:p="http://schemas.openxmlformats.org/presentationml/2006/main">
   <p:cSld>
     <p:spTree>
@@ -12842,302 +14949,6 @@
 </p:sld>
 </file>
 
-<file path=ppt/slides/slide5.xml><?xml version="1.0" encoding="utf-8"?>
-<p:sld xmlns:a="http://schemas.openxmlformats.org/drawingml/2006/main" xmlns:r="http://schemas.openxmlformats.org/officeDocument/2006/relationships" xmlns:p="http://schemas.openxmlformats.org/presentationml/2006/main">
-  <p:cSld>
-    <p:spTree>
-      <p:nvGrpSpPr>
-        <p:cNvPr id="1" name=""/>
-        <p:cNvGrpSpPr/>
-        <p:nvPr/>
-      </p:nvGrpSpPr>
-      <p:grpSpPr>
-        <a:xfrm>
-          <a:off x="0" y="0"/>
-          <a:ext cx="0" cy="0"/>
-          <a:chOff x="0" y="0"/>
-          <a:chExt cx="0" cy="0"/>
-        </a:xfrm>
-      </p:grpSpPr>
-      <p:sp>
-        <p:nvSpPr>
-          <p:cNvPr id="2" name="Title 1"/>
-          <p:cNvSpPr>
-            <a:spLocks noGrp="1"/>
-          </p:cNvSpPr>
-          <p:nvPr>
-            <p:ph type="title"/>
-          </p:nvPr>
-        </p:nvSpPr>
-        <p:spPr>
-          <a:xfrm>
-            <a:off x="457200" y="205979"/>
-            <a:ext cx="8229600" cy="857250"/>
-          </a:xfrm>
-        </p:spPr>
-        <p:txBody>
-          <a:bodyPr/>
-          <a:lstStyle/>
-          <a:p>
-            <a:pPr lvl="0" indent="0" marL="0">
-              <a:buNone/>
-            </a:pPr>
-            <a:r>
-              <a:rPr/>
-              <a:t>Your advantage, and your gap</a:t>
-            </a:r>
-          </a:p>
-        </p:txBody>
-      </p:sp>
-      <p:sp>
-        <p:nvSpPr>
-          <p:cNvPr id="3" name="Content Placeholder 2"/>
-          <p:cNvSpPr>
-            <a:spLocks noGrp="1"/>
-          </p:cNvSpPr>
-          <p:nvPr>
-            <p:ph idx="1"/>
-          </p:nvPr>
-        </p:nvSpPr>
-        <p:spPr>
-          <a:xfrm>
-            <a:off x="457200" y="1200151"/>
-            <a:ext cx="8229600" cy="3394472"/>
-          </a:xfrm>
-        </p:spPr>
-        <p:txBody>
-          <a:bodyPr/>
-          <a:lstStyle/>
-          <a:p>
-            <a:pPr lvl="0" indent="0" marL="0">
-              <a:buNone/>
-            </a:pPr>
-            <a:r>
-              <a:rPr b="1"/>
-              <a:t>Advantage:</a:t>
-            </a:r>
-            <a:r>
-              <a:rPr/>
-              <a:t> you can program. You will implement methods, not only call them.</a:t>
-            </a:r>
-          </a:p>
-          <a:p>
-            <a:pPr lvl="0" indent="0" marL="0">
-              <a:buNone/>
-            </a:pPr>
-            <a:r>
-              <a:rPr b="1"/>
-              <a:t>Gap:</a:t>
-            </a:r>
-            <a:r>
-              <a:rPr/>
-              <a:t> you can produce results faster than you can judge them.</a:t>
-            </a:r>
-          </a:p>
-        </p:txBody>
-      </p:sp>
-    </p:spTree>
-  </p:cSld>
-</p:sld>
-</file>
-
-<file path=ppt/slides/slide50.xml><?xml version="1.0" encoding="utf-8"?>
-<p:sld xmlns:a="http://schemas.openxmlformats.org/drawingml/2006/main" xmlns:r="http://schemas.openxmlformats.org/officeDocument/2006/relationships" xmlns:p="http://schemas.openxmlformats.org/presentationml/2006/main">
-  <p:cSld>
-    <p:spTree>
-      <p:nvGrpSpPr>
-        <p:cNvPr id="1" name=""/>
-        <p:cNvGrpSpPr/>
-        <p:nvPr/>
-      </p:nvGrpSpPr>
-      <p:grpSpPr>
-        <a:xfrm>
-          <a:off x="0" y="0"/>
-          <a:ext cx="0" cy="0"/>
-          <a:chOff x="0" y="0"/>
-          <a:chExt cx="0" cy="0"/>
-        </a:xfrm>
-      </p:grpSpPr>
-      <p:sp>
-        <p:nvSpPr>
-          <p:cNvPr id="2" name="Title 1"/>
-          <p:cNvSpPr>
-            <a:spLocks noGrp="1"/>
-          </p:cNvSpPr>
-          <p:nvPr>
-            <p:ph type="title"/>
-          </p:nvPr>
-        </p:nvSpPr>
-        <p:spPr>
-          <a:xfrm>
-            <a:off x="457200" y="205979"/>
-            <a:ext cx="8229600" cy="857250"/>
-          </a:xfrm>
-        </p:spPr>
-        <p:txBody>
-          <a:bodyPr/>
-          <a:lstStyle/>
-          <a:p>
-            <a:pPr lvl="0" indent="0" marL="0">
-              <a:buNone/>
-            </a:pPr>
-            <a:r>
-              <a:rPr/>
-              <a:t>What the four have in common</a:t>
-            </a:r>
-          </a:p>
-        </p:txBody>
-      </p:sp>
-      <p:sp>
-        <p:nvSpPr>
-          <p:cNvPr id="3" name="Content Placeholder 2"/>
-          <p:cNvSpPr>
-            <a:spLocks noGrp="1"/>
-          </p:cNvSpPr>
-          <p:nvPr>
-            <p:ph idx="1"/>
-          </p:nvPr>
-        </p:nvSpPr>
-        <p:spPr>
-          <a:xfrm>
-            <a:off x="457200" y="1200151"/>
-            <a:ext cx="8229600" cy="3394472"/>
-          </a:xfrm>
-        </p:spPr>
-        <p:txBody>
-          <a:bodyPr/>
-          <a:lstStyle/>
-          <a:p>
-            <a:pPr lvl="0" indent="0" marL="0">
-              <a:buNone/>
-            </a:pPr>
-            <a:r>
-              <a:rPr/>
-              <a:t>None is a coding error.</a:t>
-            </a:r>
-          </a:p>
-          <a:p>
-            <a:pPr lvl="0" indent="0" marL="0">
-              <a:buNone/>
-            </a:pPr>
-            <a:r>
-              <a:rPr/>
-              <a:t>All four run exactly as written and return a plausible number.</a:t>
-            </a:r>
-          </a:p>
-        </p:txBody>
-      </p:sp>
-    </p:spTree>
-  </p:cSld>
-</p:sld>
-</file>
-
-<file path=ppt/slides/slide51.xml><?xml version="1.0" encoding="utf-8"?>
-<p:sld xmlns:a="http://schemas.openxmlformats.org/drawingml/2006/main" xmlns:r="http://schemas.openxmlformats.org/officeDocument/2006/relationships" xmlns:p="http://schemas.openxmlformats.org/presentationml/2006/main">
-  <p:cSld>
-    <p:spTree>
-      <p:nvGrpSpPr>
-        <p:cNvPr id="1" name=""/>
-        <p:cNvGrpSpPr/>
-        <p:nvPr/>
-      </p:nvGrpSpPr>
-      <p:grpSpPr>
-        <a:xfrm>
-          <a:off x="0" y="0"/>
-          <a:ext cx="0" cy="0"/>
-          <a:chOff x="0" y="0"/>
-          <a:chExt cx="0" cy="0"/>
-        </a:xfrm>
-      </p:grpSpPr>
-      <p:sp>
-        <p:nvSpPr>
-          <p:cNvPr id="2" name="Title 1"/>
-          <p:cNvSpPr>
-            <a:spLocks noGrp="1"/>
-          </p:cNvSpPr>
-          <p:nvPr>
-            <p:ph type="title"/>
-          </p:nvPr>
-        </p:nvSpPr>
-        <p:spPr>
-          <a:xfrm>
-            <a:off x="457200" y="205979"/>
-            <a:ext cx="8229600" cy="857250"/>
-          </a:xfrm>
-        </p:spPr>
-        <p:txBody>
-          <a:bodyPr/>
-          <a:lstStyle/>
-          <a:p>
-            <a:pPr lvl="0" indent="0" marL="0">
-              <a:buNone/>
-            </a:pPr>
-            <a:r>
-              <a:rPr/>
-              <a:t>A model is not objective</a:t>
-            </a:r>
-          </a:p>
-        </p:txBody>
-      </p:sp>
-      <p:sp>
-        <p:nvSpPr>
-          <p:cNvPr id="3" name="Content Placeholder 2"/>
-          <p:cNvSpPr>
-            <a:spLocks noGrp="1"/>
-          </p:cNvSpPr>
-          <p:nvPr>
-            <p:ph idx="1"/>
-          </p:nvPr>
-        </p:nvSpPr>
-        <p:spPr>
-          <a:xfrm>
-            <a:off x="457200" y="1200151"/>
-            <a:ext cx="8229600" cy="3394472"/>
-          </a:xfrm>
-        </p:spPr>
-        <p:txBody>
-          <a:bodyPr/>
-          <a:lstStyle/>
-          <a:p>
-            <a:pPr lvl="0"/>
-            <a:r>
-              <a:rPr/>
-              <a:t>It is a compressed summary of its training data, </a:t>
-            </a:r>
-            <a:r>
-              <a:rPr b="1"/>
-              <a:t>including its injustices</a:t>
-            </a:r>
-          </a:p>
-          <a:p>
-            <a:pPr lvl="0"/>
-            <a:r>
-              <a:rPr/>
-              <a:t>These methods find </a:t>
-            </a:r>
-            <a:r>
-              <a:rPr b="1"/>
-              <a:t>correlation</a:t>
-            </a:r>
-            <a:r>
-              <a:rPr/>
-              <a:t>, not cause</a:t>
-            </a:r>
-          </a:p>
-          <a:p>
-            <a:pPr lvl="0"/>
-            <a:r>
-              <a:rPr/>
-              <a:t>Accuracy is not the only property that matters</a:t>
-            </a:r>
-          </a:p>
-        </p:txBody>
-      </p:sp>
-    </p:spTree>
-  </p:cSld>
-</p:sld>
-</file>
-
 <file path=ppt/slides/slide52.xml><?xml version="1.0" encoding="utf-8"?>
 <p:sld xmlns:a="http://schemas.openxmlformats.org/drawingml/2006/main" xmlns:r="http://schemas.openxmlformats.org/officeDocument/2006/relationships" xmlns:p="http://schemas.openxmlformats.org/presentationml/2006/main">
   <p:cSld>
@@ -13180,7 +14991,7 @@
             </a:pPr>
             <a:r>
               <a:rPr/>
-              <a:t>Homework — due Friday 2 October</a:t>
+              <a:t>What the four have in common</a:t>
             </a:r>
           </a:p>
         </p:txBody>
@@ -13209,41 +15020,17 @@
               <a:buNone/>
             </a:pPr>
             <a:r>
-              <a:rPr>
-                <a:latin typeface="Courier"/>
-              </a:rPr>
-              <a:t>Exercises/01_first_workflow.md</a:t>
-            </a:r>
-          </a:p>
-          <a:p>
-            <a:pPr lvl="0" indent="0" marL="0">
-              <a:buNone/>
-            </a:pPr>
-            <a:r>
-              <a:rPr/>
-              <a:t>Wine quality: run the workflow yourself, and </a:t>
-            </a:r>
-            <a:r>
-              <a:rPr b="1"/>
-              <a:t>justify every decision</a:t>
-            </a:r>
-            <a:r>
-              <a:rPr/>
-              <a:t>.</a:t>
-            </a:r>
-          </a:p>
-          <a:p>
-            <a:pPr lvl="0"/>
-            <a:r>
-              <a:rPr/>
-              <a:t>No marks for accuracy</a:t>
-            </a:r>
-          </a:p>
-          <a:p>
-            <a:pPr lvl="0"/>
-            <a:r>
-              <a:rPr/>
-              <a:t>Marks for methodology, and for saying what your number does not mean</a:t>
+              <a:rPr/>
+              <a:t>None is a coding error.</a:t>
+            </a:r>
+          </a:p>
+          <a:p>
+            <a:pPr lvl="0" indent="0" marL="0">
+              <a:buNone/>
+            </a:pPr>
+            <a:r>
+              <a:rPr/>
+              <a:t>All four run exactly as written and return a plausible number.</a:t>
             </a:r>
           </a:p>
         </p:txBody>
@@ -13254,6 +15041,227 @@
 </file>
 
 <file path=ppt/slides/slide53.xml><?xml version="1.0" encoding="utf-8"?>
+<p:sld xmlns:a="http://schemas.openxmlformats.org/drawingml/2006/main" xmlns:r="http://schemas.openxmlformats.org/officeDocument/2006/relationships" xmlns:p="http://schemas.openxmlformats.org/presentationml/2006/main">
+  <p:cSld>
+    <p:spTree>
+      <p:nvGrpSpPr>
+        <p:cNvPr id="1" name=""/>
+        <p:cNvGrpSpPr/>
+        <p:nvPr/>
+      </p:nvGrpSpPr>
+      <p:grpSpPr>
+        <a:xfrm>
+          <a:off x="0" y="0"/>
+          <a:ext cx="0" cy="0"/>
+          <a:chOff x="0" y="0"/>
+          <a:chExt cx="0" cy="0"/>
+        </a:xfrm>
+      </p:grpSpPr>
+      <p:sp>
+        <p:nvSpPr>
+          <p:cNvPr id="2" name="Title 1"/>
+          <p:cNvSpPr>
+            <a:spLocks noGrp="1"/>
+          </p:cNvSpPr>
+          <p:nvPr>
+            <p:ph type="title"/>
+          </p:nvPr>
+        </p:nvSpPr>
+        <p:spPr>
+          <a:xfrm>
+            <a:off x="457200" y="205979"/>
+            <a:ext cx="8229600" cy="857250"/>
+          </a:xfrm>
+        </p:spPr>
+        <p:txBody>
+          <a:bodyPr/>
+          <a:lstStyle/>
+          <a:p>
+            <a:pPr lvl="0" indent="0" marL="0">
+              <a:buNone/>
+            </a:pPr>
+            <a:r>
+              <a:rPr/>
+              <a:t>A model is not objective</a:t>
+            </a:r>
+          </a:p>
+        </p:txBody>
+      </p:sp>
+      <p:sp>
+        <p:nvSpPr>
+          <p:cNvPr id="3" name="Content Placeholder 2"/>
+          <p:cNvSpPr>
+            <a:spLocks noGrp="1"/>
+          </p:cNvSpPr>
+          <p:nvPr>
+            <p:ph idx="1"/>
+          </p:nvPr>
+        </p:nvSpPr>
+        <p:spPr>
+          <a:xfrm>
+            <a:off x="457200" y="1200151"/>
+            <a:ext cx="8229600" cy="3394472"/>
+          </a:xfrm>
+        </p:spPr>
+        <p:txBody>
+          <a:bodyPr/>
+          <a:lstStyle/>
+          <a:p>
+            <a:pPr lvl="0"/>
+            <a:r>
+              <a:rPr/>
+              <a:t>It is a compressed summary of its training data, </a:t>
+            </a:r>
+            <a:r>
+              <a:rPr b="1"/>
+              <a:t>including its injustices</a:t>
+            </a:r>
+          </a:p>
+          <a:p>
+            <a:pPr lvl="0"/>
+            <a:r>
+              <a:rPr/>
+              <a:t>These methods find </a:t>
+            </a:r>
+            <a:r>
+              <a:rPr b="1"/>
+              <a:t>correlation</a:t>
+            </a:r>
+            <a:r>
+              <a:rPr/>
+              <a:t>, not cause</a:t>
+            </a:r>
+          </a:p>
+          <a:p>
+            <a:pPr lvl="0"/>
+            <a:r>
+              <a:rPr/>
+              <a:t>Accuracy is not the only property that matters</a:t>
+            </a:r>
+          </a:p>
+        </p:txBody>
+      </p:sp>
+    </p:spTree>
+  </p:cSld>
+</p:sld>
+</file>
+
+<file path=ppt/slides/slide54.xml><?xml version="1.0" encoding="utf-8"?>
+<p:sld xmlns:a="http://schemas.openxmlformats.org/drawingml/2006/main" xmlns:r="http://schemas.openxmlformats.org/officeDocument/2006/relationships" xmlns:p="http://schemas.openxmlformats.org/presentationml/2006/main">
+  <p:cSld>
+    <p:spTree>
+      <p:nvGrpSpPr>
+        <p:cNvPr id="1" name=""/>
+        <p:cNvGrpSpPr/>
+        <p:nvPr/>
+      </p:nvGrpSpPr>
+      <p:grpSpPr>
+        <a:xfrm>
+          <a:off x="0" y="0"/>
+          <a:ext cx="0" cy="0"/>
+          <a:chOff x="0" y="0"/>
+          <a:chExt cx="0" cy="0"/>
+        </a:xfrm>
+      </p:grpSpPr>
+      <p:sp>
+        <p:nvSpPr>
+          <p:cNvPr id="2" name="Title 1"/>
+          <p:cNvSpPr>
+            <a:spLocks noGrp="1"/>
+          </p:cNvSpPr>
+          <p:nvPr>
+            <p:ph type="title"/>
+          </p:nvPr>
+        </p:nvSpPr>
+        <p:spPr>
+          <a:xfrm>
+            <a:off x="457200" y="205979"/>
+            <a:ext cx="8229600" cy="857250"/>
+          </a:xfrm>
+        </p:spPr>
+        <p:txBody>
+          <a:bodyPr/>
+          <a:lstStyle/>
+          <a:p>
+            <a:pPr lvl="0" indent="0" marL="0">
+              <a:buNone/>
+            </a:pPr>
+            <a:r>
+              <a:rPr/>
+              <a:t>Homework — due Friday 2 October</a:t>
+            </a:r>
+          </a:p>
+        </p:txBody>
+      </p:sp>
+      <p:sp>
+        <p:nvSpPr>
+          <p:cNvPr id="3" name="Content Placeholder 2"/>
+          <p:cNvSpPr>
+            <a:spLocks noGrp="1"/>
+          </p:cNvSpPr>
+          <p:nvPr>
+            <p:ph idx="1"/>
+          </p:nvPr>
+        </p:nvSpPr>
+        <p:spPr>
+          <a:xfrm>
+            <a:off x="457200" y="1200151"/>
+            <a:ext cx="8229600" cy="3394472"/>
+          </a:xfrm>
+        </p:spPr>
+        <p:txBody>
+          <a:bodyPr/>
+          <a:lstStyle/>
+          <a:p>
+            <a:pPr lvl="0" indent="0" marL="0">
+              <a:buNone/>
+            </a:pPr>
+            <a:r>
+              <a:rPr>
+                <a:latin typeface="Courier"/>
+              </a:rPr>
+              <a:t>Exercises/01_first_workflow.md</a:t>
+            </a:r>
+          </a:p>
+          <a:p>
+            <a:pPr lvl="0" indent="0" marL="0">
+              <a:buNone/>
+            </a:pPr>
+            <a:r>
+              <a:rPr/>
+              <a:t>Wine quality: run the workflow yourself, and </a:t>
+            </a:r>
+            <a:r>
+              <a:rPr b="1"/>
+              <a:t>justify every decision</a:t>
+            </a:r>
+            <a:r>
+              <a:rPr/>
+              <a:t>.</a:t>
+            </a:r>
+          </a:p>
+          <a:p>
+            <a:pPr lvl="0"/>
+            <a:r>
+              <a:rPr/>
+              <a:t>No marks for accuracy</a:t>
+            </a:r>
+          </a:p>
+          <a:p>
+            <a:pPr lvl="0"/>
+            <a:r>
+              <a:rPr/>
+              <a:t>Marks for methodology, and for saying what your number does not mean</a:t>
+            </a:r>
+          </a:p>
+        </p:txBody>
+      </p:sp>
+    </p:spTree>
+  </p:cSld>
+</p:sld>
+</file>
+
+<file path=ppt/slides/slide55.xml><?xml version="1.0" encoding="utf-8"?>
 <p:sld xmlns:a="http://schemas.openxmlformats.org/drawingml/2006/main" xmlns:r="http://schemas.openxmlformats.org/officeDocument/2006/relationships" xmlns:p="http://schemas.openxmlformats.org/presentationml/2006/main">
   <p:cSld>
     <p:spTree>

--- a/Lessons/01_introduction_and_workflow/Slides/introduction_and_workflow_slides.pptx
+++ b/Lessons/01_introduction_and_workflow/Slides/introduction_and_workflow_slides.pptx
@@ -1765,6 +1765,20 @@
               <a:t>Tell them the unit in lesson 9 is this unit with a smoother threshold. The history is not decoration; it is the same objects under different names.</a:t>
             </a:r>
           </a:p>
+          <a:p>
+            <a:pPr lvl="0" indent="0" marL="0">
+              <a:buNone/>
+            </a:pPr>
+          </a:p>
+          <a:p>
+            <a:pPr lvl="0" indent="0" marL="0">
+              <a:buNone/>
+            </a:pPr>
+            <a:r>
+              <a:rPr/>
+              <a:t>Walk the diagram: inputs, a weight on each, a sum, and a hard threshold. Then point at the right-hand panel - the step function is what makes it all-or-nothing, and it is exactly what gets replaced by a smooth sigmoid in lesson 4 and by ReLU in lesson 9. Same object, softened, so that it becomes differentiable and therefore trainable.</a:t>
+            </a:r>
+          </a:p>
         </p:txBody>
       </p:sp>
       <p:sp>
@@ -1985,6 +1999,20 @@
               <a:t>Recommend the paper. It is readable, funny, and answers nine objections including “a machine can only do what it is told” - his reply, that this assumes we can foresee the consequences of what we tell it, has aged extremely well.</a:t>
             </a:r>
           </a:p>
+          <a:p>
+            <a:pPr lvl="0" indent="0" marL="0">
+              <a:buNone/>
+            </a:pPr>
+          </a:p>
+          <a:p>
+            <a:pPr lvl="0" indent="0" marL="0">
+              <a:buNone/>
+            </a:pPr>
+            <a:r>
+              <a:rPr/>
+              <a:t>The screen is the whole design: it removes appearance, voice and everything except the behaviour being tested. Ask the room what this test does NOT measure - understanding, consciousness, correctness - and note that Turing knew, and argued the substitution was worth making anyway.</a:t>
+            </a:r>
+          </a:p>
         </p:txBody>
       </p:sp>
       <p:sp>
@@ -2081,6 +2109,20 @@
               <a:t>McCarthy, Minsky, Shannon and Rochester convened it. The optimism is not incidental - it is present at the field’s naming and it recurs on a cycle, which is the argument of this whole section.</a:t>
             </a:r>
           </a:p>
+          <a:p>
+            <a:pPr lvl="0" indent="0" marL="0">
+              <a:buNone/>
+            </a:pPr>
+          </a:p>
+          <a:p>
+            <a:pPr lvl="0" indent="0" marL="0">
+              <a:buNone/>
+            </a:pPr>
+            <a:r>
+              <a:rPr/>
+              <a:t>These are the seven topics from the actual proposal. Read two or three aloud - ‘self-improvement’, ‘randomness and creativity’ - and let the room judge how much of the list is settled. Then note that the proposal’s authors expected substantial progress on all of it in one summer.</a:t>
+            </a:r>
+          </a:p>
         </p:txBody>
       </p:sp>
       <p:sp>
@@ -2191,6 +2233,20 @@
               <a:t>Then the contrast: the New York Times reported the Navy expected a machine that would walk, talk, see, write and reproduce itself. Same year, same machine. Ask them which of those two statements a careful reader could have checked.</a:t>
             </a:r>
           </a:p>
+          <a:p>
+            <a:pPr lvl="0" indent="0" marL="0">
+              <a:buNone/>
+            </a:pPr>
+          </a:p>
+          <a:p>
+            <a:pPr lvl="0" indent="0" marL="0">
+              <a:buNone/>
+            </a:pPr>
+            <a:r>
+              <a:rPr/>
+              <a:t>The faded lines are earlier states of the boundary. Every time the machine misclassified an example it nudged the weights, and the line moved. That is the whole idea: the model is corrected by its own mistakes, which is still what gradient descent does in lesson 3 - just with a smoother update rule.</a:t>
+            </a:r>
+          </a:p>
         </p:txBody>
       </p:sp>
       <p:sp>
@@ -2315,6 +2371,20 @@
               <a:t>The transferable lesson: a correct result about a restricted case was received as a verdict on the whole approach. That failure mode is alive and well in how ML results get reported today.</a:t>
             </a:r>
           </a:p>
+          <a:p>
+            <a:pPr lvl="0" indent="0" marL="0">
+              <a:buNone/>
+            </a:pPr>
+          </a:p>
+          <a:p>
+            <a:pPr lvl="0" indent="0" marL="0">
+              <a:buNone/>
+            </a:pPr>
+            <a:r>
+              <a:rPr/>
+              <a:t>Use the figure instead of the board. AND on the left: one line, done. XOR on the right: the dashed lines are attempts, and each leaves a point on the wrong side. Ask them to try to find one that works before you move on - the impossibility is more convincing when they have looked for it themselves.</a:t>
+            </a:r>
+          </a:p>
         </p:txBody>
       </p:sp>
       <p:sp>
@@ -2425,6 +2495,20 @@
               <a:t>Lesson 9 derives this algorithm.</a:t>
             </a:r>
           </a:p>
+          <a:p>
+            <a:pPr lvl="0" indent="0" marL="0">
+              <a:buNone/>
+            </a:pPr>
+          </a:p>
+          <a:p>
+            <a:pPr lvl="0" indent="0" marL="0">
+              <a:buNone/>
+            </a:pPr>
+            <a:r>
+              <a:rPr/>
+              <a:t>Two passes: forward to compute a prediction, backward to distribute the error across every weight, including the hidden ones. That second arrow is what was missing in 1969 - not expressiveness, but a way to assign blame to a unit that never sees the target directly. Lesson 9 derives it.</a:t>
+            </a:r>
+          </a:p>
         </p:txBody>
       </p:sp>
       <p:sp>
@@ -2521,6 +2605,20 @@
               <a:t>It is unglamorous and it is what actually gets deployed. Lessons 5, 6 and 7 are this period, and lesson 5 in particular is its central contribution.</a:t>
             </a:r>
           </a:p>
+          <a:p>
+            <a:pPr lvl="0" indent="0" marL="0">
+              <a:buNone/>
+            </a:pPr>
+          </a:p>
+          <a:p>
+            <a:pPr lvl="0" indent="0" marL="0">
+              <a:buNone/>
+            </a:pPr>
+            <a:r>
+              <a:rPr/>
+              <a:t>The dotted line also separates the classes perfectly, and would score identically on this training data. The SVM picks the solid one - the boundary furthest from both classes. Ask which they would trust on a new point near the middle. That intuition is what the theory of the period made precise, and it is lesson 6.</a:t>
+            </a:r>
+          </a:p>
         </p:txBody>
       </p:sp>
       <p:sp>
@@ -2643,6 +2741,20 @@
             <a:r>
               <a:rPr/>
               <a:t>Saying so is not a criticism. It is the single most important fact about the last decade, and it licenses very different predictions than a conceptual breakthrough would.</a:t>
+            </a:r>
+          </a:p>
+          <a:p>
+            <a:pPr lvl="0" indent="0" marL="0">
+              <a:buNone/>
+            </a:pPr>
+          </a:p>
+          <a:p>
+            <a:pPr lvl="0" indent="0" marL="0">
+              <a:buNone/>
+            </a:pPr>
+            <a:r>
+              <a:rPr/>
+              <a:t>Read the bars left to right. Two ordinary years, then the drop, then everyone adopts the approach and the error keeps falling past human performance by 2015. Point out that the years after 2012 fell further than 2012 itself did - the story is not one heroic result, it is a field switching methods.</a:t>
             </a:r>
           </a:p>
         </p:txBody>
@@ -11005,8 +11117,8 @@
         </p:nvSpPr>
         <p:spPr>
           <a:xfrm>
-            <a:off x="457200" y="205979"/>
-            <a:ext cx="8229600" cy="857250"/>
+            <a:off x="457200" y="205740"/>
+            <a:ext cx="8229600" cy="874395"/>
           </a:xfrm>
         </p:spPr>
         <p:txBody>
@@ -11025,18 +11137,18 @@
       </p:sp>
       <p:sp>
         <p:nvSpPr>
-          <p:cNvPr id="3" name="Content Placeholder 2"/>
-          <p:cNvSpPr>
-            <a:spLocks noGrp="1"/>
-          </p:cNvSpPr>
-          <p:nvPr>
-            <p:ph idx="1"/>
+          <p:cNvPr id="4" name="Text Placeholder 3"/>
+          <p:cNvSpPr>
+            <a:spLocks noGrp="1"/>
+          </p:cNvSpPr>
+          <p:nvPr>
+            <p:ph idx="2" sz="half" type="body"/>
           </p:nvPr>
         </p:nvSpPr>
         <p:spPr>
           <a:xfrm>
-            <a:off x="457200" y="1200151"/>
-            <a:ext cx="8229600" cy="3394472"/>
+            <a:off x="457200" y="1183005"/>
+            <a:ext cx="8229600" cy="874395"/>
           </a:xfrm>
         </p:spPr>
         <p:txBody>
@@ -11048,20 +11160,41 @@
             </a:pPr>
             <a:r>
               <a:rPr/>
-              <a:t>McCulloch and Pitts: a neuron as a threshold unit.</a:t>
-            </a:r>
-          </a:p>
-          <a:p>
-            <a:pPr lvl="0" indent="0" marL="0">
-              <a:buNone/>
-            </a:pPr>
-            <a:r>
-              <a:rPr/>
-              <a:t>Fires when the weighted sum of inputs passes a threshold.</a:t>
-            </a:r>
-          </a:p>
-        </p:txBody>
-      </p:sp>
+              <a:t>A neuron as a threshold unit: it fires when the weighted sum passes θ.</a:t>
+            </a:r>
+          </a:p>
+        </p:txBody>
+      </p:sp>
+      <p:pic>
+        <p:nvPicPr>
+          <p:cNvPr descr="hist_1943_neuron.png" id="0" name="Picture 1"/>
+          <p:cNvPicPr>
+            <a:picLocks noGrp="1" noChangeAspect="1"/>
+          </p:cNvPicPr>
+          <p:nvPr/>
+        </p:nvPicPr>
+        <p:blipFill>
+          <a:blip r:embed="rId3"/>
+          <a:stretch>
+            <a:fillRect/>
+          </a:stretch>
+        </p:blipFill>
+        <p:spPr bwMode="auto">
+          <a:xfrm>
+            <a:off x="767456" y="2160270"/>
+            <a:ext cx="7609088" cy="2366010"/>
+          </a:xfrm>
+          <a:prstGeom prst="rect">
+            <a:avLst/>
+          </a:prstGeom>
+          <a:noFill/>
+          <a:ln w="9525">
+            <a:noFill/>
+            <a:headEnd/>
+            <a:tailEnd/>
+          </a:ln>
+        </p:spPr>
+      </p:pic>
     </p:spTree>
   </p:cSld>
 </p:sld>
@@ -11096,8 +11229,8 @@
         </p:nvSpPr>
         <p:spPr>
           <a:xfrm>
-            <a:off x="457200" y="205979"/>
-            <a:ext cx="8229600" cy="857250"/>
+            <a:off x="457200" y="205740"/>
+            <a:ext cx="8229600" cy="874395"/>
           </a:xfrm>
         </p:spPr>
         <p:txBody>
@@ -11116,18 +11249,18 @@
       </p:sp>
       <p:sp>
         <p:nvSpPr>
-          <p:cNvPr id="3" name="Content Placeholder 2"/>
-          <p:cNvSpPr>
-            <a:spLocks noGrp="1"/>
-          </p:cNvSpPr>
-          <p:nvPr>
-            <p:ph idx="1"/>
+          <p:cNvPr id="4" name="Text Placeholder 3"/>
+          <p:cNvSpPr>
+            <a:spLocks noGrp="1"/>
+          </p:cNvSpPr>
+          <p:nvPr>
+            <p:ph idx="2" sz="half" type="body"/>
           </p:nvPr>
         </p:nvSpPr>
         <p:spPr>
           <a:xfrm>
-            <a:off x="457200" y="1200151"/>
-            <a:ext cx="8229600" cy="3394472"/>
+            <a:off x="457200" y="1183005"/>
+            <a:ext cx="8229600" cy="874395"/>
           </a:xfrm>
         </p:spPr>
         <p:txBody>
@@ -11139,11 +11272,41 @@
             </a:pPr>
             <a:r>
               <a:rPr/>
-              <a:t>“Can machines think?” — replaced by a question you can test by observation.</a:t>
-            </a:r>
-          </a:p>
-        </p:txBody>
-      </p:sp>
+              <a:t>“Can machines think?” — replaced by something observable.</a:t>
+            </a:r>
+          </a:p>
+        </p:txBody>
+      </p:sp>
+      <p:pic>
+        <p:nvPicPr>
+          <p:cNvPr descr="hist_1950_imitation.png" id="0" name="Picture 1"/>
+          <p:cNvPicPr>
+            <a:picLocks noGrp="1" noChangeAspect="1"/>
+          </p:cNvPicPr>
+          <p:nvPr/>
+        </p:nvPicPr>
+        <p:blipFill>
+          <a:blip r:embed="rId3"/>
+          <a:stretch>
+            <a:fillRect/>
+          </a:stretch>
+        </p:blipFill>
+        <p:spPr bwMode="auto">
+          <a:xfrm>
+            <a:off x="1483896" y="2160270"/>
+            <a:ext cx="6176207" cy="2366010"/>
+          </a:xfrm>
+          <a:prstGeom prst="rect">
+            <a:avLst/>
+          </a:prstGeom>
+          <a:noFill/>
+          <a:ln w="9525">
+            <a:noFill/>
+            <a:headEnd/>
+            <a:tailEnd/>
+          </a:ln>
+        </p:spPr>
+      </p:pic>
     </p:spTree>
   </p:cSld>
 </p:sld>
@@ -11178,8 +11341,8 @@
         </p:nvSpPr>
         <p:spPr>
           <a:xfrm>
-            <a:off x="457200" y="205979"/>
-            <a:ext cx="8229600" cy="857250"/>
+            <a:off x="457200" y="205740"/>
+            <a:ext cx="8229600" cy="874395"/>
           </a:xfrm>
         </p:spPr>
         <p:txBody>
@@ -11198,18 +11361,18 @@
       </p:sp>
       <p:sp>
         <p:nvSpPr>
-          <p:cNvPr id="3" name="Content Placeholder 2"/>
-          <p:cNvSpPr>
-            <a:spLocks noGrp="1"/>
-          </p:cNvSpPr>
-          <p:nvPr>
-            <p:ph idx="1"/>
+          <p:cNvPr id="4" name="Text Placeholder 3"/>
+          <p:cNvSpPr>
+            <a:spLocks noGrp="1"/>
+          </p:cNvSpPr>
+          <p:nvPr>
+            <p:ph idx="2" sz="half" type="body"/>
           </p:nvPr>
         </p:nvSpPr>
         <p:spPr>
           <a:xfrm>
-            <a:off x="457200" y="1200151"/>
-            <a:ext cx="8229600" cy="3394472"/>
+            <a:off x="457200" y="1183005"/>
+            <a:ext cx="8229600" cy="437197"/>
           </a:xfrm>
         </p:spPr>
         <p:txBody>
@@ -11232,17 +11395,38 @@
               <a:t> is coined.</a:t>
             </a:r>
           </a:p>
-          <a:p>
-            <a:pPr lvl="0" indent="0" marL="0">
-              <a:buNone/>
-            </a:pPr>
-            <a:r>
-              <a:rPr/>
-              <a:t>The proposal: ten people, two months, significant progress.</a:t>
-            </a:r>
-          </a:p>
-        </p:txBody>
-      </p:sp>
+        </p:txBody>
+      </p:sp>
+      <p:pic>
+        <p:nvPicPr>
+          <p:cNvPr descr="hist_1956_dartmouth.png" id="0" name="Picture 1"/>
+          <p:cNvPicPr>
+            <a:picLocks noGrp="1" noChangeAspect="1"/>
+          </p:cNvPicPr>
+          <p:nvPr/>
+        </p:nvPicPr>
+        <p:blipFill>
+          <a:blip r:embed="rId3"/>
+          <a:stretch>
+            <a:fillRect/>
+          </a:stretch>
+        </p:blipFill>
+        <p:spPr bwMode="auto">
+          <a:xfrm>
+            <a:off x="960174" y="1723072"/>
+            <a:ext cx="7223651" cy="2803208"/>
+          </a:xfrm>
+          <a:prstGeom prst="rect">
+            <a:avLst/>
+          </a:prstGeom>
+          <a:noFill/>
+          <a:ln w="9525">
+            <a:noFill/>
+            <a:headEnd/>
+            <a:tailEnd/>
+          </a:ln>
+        </p:spPr>
+      </p:pic>
     </p:spTree>
   </p:cSld>
 </p:sld>
@@ -11277,8 +11461,8 @@
         </p:nvSpPr>
         <p:spPr>
           <a:xfrm>
-            <a:off x="457200" y="205979"/>
-            <a:ext cx="8229600" cy="857250"/>
+            <a:off x="457200" y="205740"/>
+            <a:ext cx="8229600" cy="874395"/>
           </a:xfrm>
         </p:spPr>
         <p:txBody>
@@ -11297,18 +11481,18 @@
       </p:sp>
       <p:sp>
         <p:nvSpPr>
-          <p:cNvPr id="3" name="Content Placeholder 2"/>
-          <p:cNvSpPr>
-            <a:spLocks noGrp="1"/>
-          </p:cNvSpPr>
-          <p:nvPr>
-            <p:ph idx="1"/>
+          <p:cNvPr id="4" name="Text Placeholder 3"/>
+          <p:cNvSpPr>
+            <a:spLocks noGrp="1"/>
+          </p:cNvSpPr>
+          <p:nvPr>
+            <p:ph idx="2" sz="half" type="body"/>
           </p:nvPr>
         </p:nvSpPr>
         <p:spPr>
           <a:xfrm>
-            <a:off x="457200" y="1200151"/>
-            <a:ext cx="8229600" cy="3394472"/>
+            <a:off x="457200" y="1183005"/>
+            <a:ext cx="8229600" cy="874395"/>
           </a:xfrm>
         </p:spPr>
         <p:txBody>
@@ -11331,17 +11515,38 @@
               <a:t>, not set by hand.</a:t>
             </a:r>
           </a:p>
-          <a:p>
-            <a:pPr lvl="0" indent="0" marL="0">
-              <a:buNone/>
-            </a:pPr>
-            <a:r>
-              <a:rPr/>
-              <a:t>Convergence theorem: if the data is linearly separable, it will find a separator.</a:t>
-            </a:r>
-          </a:p>
-        </p:txBody>
-      </p:sp>
+        </p:txBody>
+      </p:sp>
+      <p:pic>
+        <p:nvPicPr>
+          <p:cNvPr descr="hist_1957_perceptron.png" id="0" name="Picture 1"/>
+          <p:cNvPicPr>
+            <a:picLocks noGrp="1" noChangeAspect="1"/>
+          </p:cNvPicPr>
+          <p:nvPr/>
+        </p:nvPicPr>
+        <p:blipFill>
+          <a:blip r:embed="rId3"/>
+          <a:stretch>
+            <a:fillRect/>
+          </a:stretch>
+        </p:blipFill>
+        <p:spPr bwMode="auto">
+          <a:xfrm>
+            <a:off x="2646623" y="2160270"/>
+            <a:ext cx="3850753" cy="2366010"/>
+          </a:xfrm>
+          <a:prstGeom prst="rect">
+            <a:avLst/>
+          </a:prstGeom>
+          <a:noFill/>
+          <a:ln w="9525">
+            <a:noFill/>
+            <a:headEnd/>
+            <a:tailEnd/>
+          </a:ln>
+        </p:spPr>
+      </p:pic>
     </p:spTree>
   </p:cSld>
 </p:sld>
@@ -11376,8 +11581,8 @@
         </p:nvSpPr>
         <p:spPr>
           <a:xfrm>
-            <a:off x="457200" y="205979"/>
-            <a:ext cx="8229600" cy="857250"/>
+            <a:off x="457200" y="205740"/>
+            <a:ext cx="8229600" cy="874395"/>
           </a:xfrm>
         </p:spPr>
         <p:txBody>
@@ -11396,18 +11601,18 @@
       </p:sp>
       <p:sp>
         <p:nvSpPr>
-          <p:cNvPr id="3" name="Content Placeholder 2"/>
-          <p:cNvSpPr>
-            <a:spLocks noGrp="1"/>
-          </p:cNvSpPr>
-          <p:nvPr>
-            <p:ph idx="1"/>
+          <p:cNvPr id="4" name="Text Placeholder 3"/>
+          <p:cNvSpPr>
+            <a:spLocks noGrp="1"/>
+          </p:cNvSpPr>
+          <p:nvPr>
+            <p:ph idx="2" sz="half" type="body"/>
           </p:nvPr>
         </p:nvSpPr>
         <p:spPr>
           <a:xfrm>
-            <a:off x="457200" y="1200151"/>
-            <a:ext cx="8229600" cy="3394472"/>
+            <a:off x="457200" y="1183005"/>
+            <a:ext cx="8229600" cy="437197"/>
           </a:xfrm>
         </p:spPr>
         <p:txBody>
@@ -11419,20 +11624,41 @@
             </a:pPr>
             <a:r>
               <a:rPr/>
-              <a:t>Minsky and Papert: a single-layer perceptron cannot represent XOR.</a:t>
-            </a:r>
-          </a:p>
-          <a:p>
-            <a:pPr lvl="0" indent="0" marL="0">
-              <a:buNone/>
-            </a:pPr>
-            <a:r>
-              <a:rPr/>
-              <a:t>Correct. And narrower than the reception suggested.</a:t>
-            </a:r>
-          </a:p>
-        </p:txBody>
-      </p:sp>
+              <a:t>A single-layer perceptron cannot represent XOR.</a:t>
+            </a:r>
+          </a:p>
+        </p:txBody>
+      </p:sp>
+      <p:pic>
+        <p:nvPicPr>
+          <p:cNvPr descr="hist_1969_xor.png" id="0" name="Picture 1"/>
+          <p:cNvPicPr>
+            <a:picLocks noGrp="1" noChangeAspect="1"/>
+          </p:cNvPicPr>
+          <p:nvPr/>
+        </p:nvPicPr>
+        <p:blipFill>
+          <a:blip r:embed="rId3"/>
+          <a:stretch>
+            <a:fillRect/>
+          </a:stretch>
+        </p:blipFill>
+        <p:spPr bwMode="auto">
+          <a:xfrm>
+            <a:off x="1277001" y="1723072"/>
+            <a:ext cx="6589997" cy="2803208"/>
+          </a:xfrm>
+          <a:prstGeom prst="rect">
+            <a:avLst/>
+          </a:prstGeom>
+          <a:noFill/>
+          <a:ln w="9525">
+            <a:noFill/>
+            <a:headEnd/>
+            <a:tailEnd/>
+          </a:ln>
+        </p:spPr>
+      </p:pic>
     </p:spTree>
   </p:cSld>
 </p:sld>
@@ -11467,8 +11693,8 @@
         </p:nvSpPr>
         <p:spPr>
           <a:xfrm>
-            <a:off x="457200" y="205979"/>
-            <a:ext cx="8229600" cy="857250"/>
+            <a:off x="457200" y="205740"/>
+            <a:ext cx="8229600" cy="874395"/>
           </a:xfrm>
         </p:spPr>
         <p:txBody>
@@ -11487,18 +11713,18 @@
       </p:sp>
       <p:sp>
         <p:nvSpPr>
-          <p:cNvPr id="3" name="Content Placeholder 2"/>
-          <p:cNvSpPr>
-            <a:spLocks noGrp="1"/>
-          </p:cNvSpPr>
-          <p:nvPr>
-            <p:ph idx="1"/>
+          <p:cNvPr id="4" name="Text Placeholder 3"/>
+          <p:cNvSpPr>
+            <a:spLocks noGrp="1"/>
+          </p:cNvSpPr>
+          <p:nvPr>
+            <p:ph idx="2" sz="half" type="body"/>
           </p:nvPr>
         </p:nvSpPr>
         <p:spPr>
           <a:xfrm>
-            <a:off x="457200" y="1200151"/>
-            <a:ext cx="8229600" cy="3394472"/>
+            <a:off x="457200" y="1183005"/>
+            <a:ext cx="8229600" cy="437197"/>
           </a:xfrm>
         </p:spPr>
         <p:txBody>
@@ -11513,17 +11739,38 @@
               <a:t>An efficient way to train multi-layer networks.</a:t>
             </a:r>
           </a:p>
-          <a:p>
-            <a:pPr lvl="0" indent="0" marL="0">
-              <a:buNone/>
-            </a:pPr>
-            <a:r>
-              <a:rPr/>
-              <a:t>The 1969 objection is answered. A second winter follows anyway.</a:t>
-            </a:r>
-          </a:p>
-        </p:txBody>
-      </p:sp>
+        </p:txBody>
+      </p:sp>
+      <p:pic>
+        <p:nvPicPr>
+          <p:cNvPr descr="hist_1986_backprop.png" id="0" name="Picture 1"/>
+          <p:cNvPicPr>
+            <a:picLocks noGrp="1" noChangeAspect="1"/>
+          </p:cNvPicPr>
+          <p:nvPr/>
+        </p:nvPicPr>
+        <p:blipFill>
+          <a:blip r:embed="rId3"/>
+          <a:stretch>
+            <a:fillRect/>
+          </a:stretch>
+        </p:blipFill>
+        <p:spPr bwMode="auto">
+          <a:xfrm>
+            <a:off x="960174" y="1723072"/>
+            <a:ext cx="7223651" cy="2803208"/>
+          </a:xfrm>
+          <a:prstGeom prst="rect">
+            <a:avLst/>
+          </a:prstGeom>
+          <a:noFill/>
+          <a:ln w="9525">
+            <a:noFill/>
+            <a:headEnd/>
+            <a:tailEnd/>
+          </a:ln>
+        </p:spPr>
+      </p:pic>
     </p:spTree>
   </p:cSld>
 </p:sld>
@@ -11558,8 +11805,8 @@
         </p:nvSpPr>
         <p:spPr>
           <a:xfrm>
-            <a:off x="457200" y="205979"/>
-            <a:ext cx="8229600" cy="857250"/>
+            <a:off x="457200" y="205740"/>
+            <a:ext cx="8229600" cy="874395"/>
           </a:xfrm>
         </p:spPr>
         <p:txBody>
@@ -11578,48 +11825,64 @@
       </p:sp>
       <p:sp>
         <p:nvSpPr>
-          <p:cNvPr id="3" name="Content Placeholder 2"/>
-          <p:cNvSpPr>
-            <a:spLocks noGrp="1"/>
-          </p:cNvSpPr>
-          <p:nvPr>
-            <p:ph idx="1"/>
+          <p:cNvPr id="4" name="Text Placeholder 3"/>
+          <p:cNvSpPr>
+            <a:spLocks noGrp="1"/>
+          </p:cNvSpPr>
+          <p:nvPr>
+            <p:ph idx="2" sz="half" type="body"/>
           </p:nvPr>
         </p:nvSpPr>
         <p:spPr>
           <a:xfrm>
-            <a:off x="457200" y="1200151"/>
-            <a:ext cx="8229600" cy="3394472"/>
+            <a:off x="457200" y="1183005"/>
+            <a:ext cx="8229600" cy="874395"/>
           </a:xfrm>
         </p:spPr>
         <p:txBody>
           <a:bodyPr/>
           <a:lstStyle/>
           <a:p>
-            <a:pPr lvl="0"/>
-            <a:r>
-              <a:rPr/>
-              <a:t>Support vector machines, ensembles, probabilistic methods</a:t>
-            </a:r>
-          </a:p>
-          <a:p>
-            <a:pPr lvl="0"/>
-            <a:r>
-              <a:rPr/>
-              <a:t>From “simulating intelligence” to “estimating functions from data”</a:t>
-            </a:r>
-          </a:p>
-          <a:p>
-            <a:pPr lvl="0" indent="0" marL="0">
-              <a:buNone/>
-            </a:pPr>
-            <a:r>
-              <a:rPr/>
-              <a:t>A retreat in ambition. An advance in rigour.</a:t>
-            </a:r>
-          </a:p>
-        </p:txBody>
-      </p:sp>
+            <a:pPr lvl="0" indent="0" marL="0">
+              <a:buNone/>
+            </a:pPr>
+            <a:r>
+              <a:rPr/>
+              <a:t>From “simulating intelligence” to “estimating functions from data”.</a:t>
+            </a:r>
+          </a:p>
+        </p:txBody>
+      </p:sp>
+      <p:pic>
+        <p:nvPicPr>
+          <p:cNvPr descr="hist_1995_svm.png" id="0" name="Picture 1"/>
+          <p:cNvPicPr>
+            <a:picLocks noGrp="1" noChangeAspect="1"/>
+          </p:cNvPicPr>
+          <p:nvPr/>
+        </p:nvPicPr>
+        <p:blipFill>
+          <a:blip r:embed="rId3"/>
+          <a:stretch>
+            <a:fillRect/>
+          </a:stretch>
+        </p:blipFill>
+        <p:spPr bwMode="auto">
+          <a:xfrm>
+            <a:off x="2646623" y="2160270"/>
+            <a:ext cx="3850753" cy="2366010"/>
+          </a:xfrm>
+          <a:prstGeom prst="rect">
+            <a:avLst/>
+          </a:prstGeom>
+          <a:noFill/>
+          <a:ln w="9525">
+            <a:noFill/>
+            <a:headEnd/>
+            <a:tailEnd/>
+          </a:ln>
+        </p:spPr>
+      </p:pic>
     </p:spTree>
   </p:cSld>
 </p:sld>
@@ -11654,8 +11917,8 @@
         </p:nvSpPr>
         <p:spPr>
           <a:xfrm>
-            <a:off x="457200" y="205979"/>
-            <a:ext cx="8229600" cy="857250"/>
+            <a:off x="457200" y="205740"/>
+            <a:ext cx="8229600" cy="874395"/>
           </a:xfrm>
         </p:spPr>
         <p:txBody>
@@ -11674,18 +11937,18 @@
       </p:sp>
       <p:sp>
         <p:nvSpPr>
-          <p:cNvPr id="3" name="Content Placeholder 2"/>
-          <p:cNvSpPr>
-            <a:spLocks noGrp="1"/>
-          </p:cNvSpPr>
-          <p:nvPr>
-            <p:ph idx="1"/>
+          <p:cNvPr id="4" name="Text Placeholder 3"/>
+          <p:cNvSpPr>
+            <a:spLocks noGrp="1"/>
+          </p:cNvSpPr>
+          <p:nvPr>
+            <p:ph idx="2" sz="half" type="body"/>
           </p:nvPr>
         </p:nvSpPr>
         <p:spPr>
           <a:xfrm>
-            <a:off x="457200" y="1200151"/>
-            <a:ext cx="8229600" cy="3394472"/>
+            <a:off x="457200" y="1183005"/>
+            <a:ext cx="8229600" cy="437197"/>
           </a:xfrm>
         </p:spPr>
         <p:txBody>
@@ -11697,20 +11960,41 @@
             </a:pPr>
             <a:r>
               <a:rPr/>
-              <a:t>ImageNet error: 26% → 15%.</a:t>
-            </a:r>
-          </a:p>
-          <a:p>
-            <a:pPr lvl="0" indent="0" marL="0">
-              <a:buNone/>
-            </a:pPr>
-            <a:r>
-              <a:rPr/>
               <a:t>The architecture was recognisably LeNet, from 1989.</a:t>
             </a:r>
           </a:p>
         </p:txBody>
       </p:sp>
+      <p:pic>
+        <p:nvPicPr>
+          <p:cNvPr descr="hist_2012_imagenet.png" id="0" name="Picture 1"/>
+          <p:cNvPicPr>
+            <a:picLocks noGrp="1" noChangeAspect="1"/>
+          </p:cNvPicPr>
+          <p:nvPr/>
+        </p:nvPicPr>
+        <p:blipFill>
+          <a:blip r:embed="rId3"/>
+          <a:stretch>
+            <a:fillRect/>
+          </a:stretch>
+        </p:blipFill>
+        <p:spPr bwMode="auto">
+          <a:xfrm>
+            <a:off x="1652597" y="1723072"/>
+            <a:ext cx="5838806" cy="2803208"/>
+          </a:xfrm>
+          <a:prstGeom prst="rect">
+            <a:avLst/>
+          </a:prstGeom>
+          <a:noFill/>
+          <a:ln w="9525">
+            <a:noFill/>
+            <a:headEnd/>
+            <a:tailEnd/>
+          </a:ln>
+        </p:spPr>
+      </p:pic>
     </p:spTree>
   </p:cSld>
 </p:sld>

--- a/Lessons/01_introduction_and_workflow/Slides/introduction_and_workflow_slides.pptx
+++ b/Lessons/01_introduction_and_workflow/Slides/introduction_and_workflow_slides.pptx
@@ -843,6 +843,20 @@
               <a:t>The loss function is where the domain enters the mathematics. Choosing it is a decision about which mistakes matter, and we make that choice explicitly in twenty minutes.</a:t>
             </a:r>
           </a:p>
+          <a:p>
+            <a:pPr lvl="0" indent="0" marL="0">
+              <a:buNone/>
+            </a:pPr>
+          </a:p>
+          <a:p>
+            <a:pPr lvl="0" indent="0" marL="0">
+              <a:buNone/>
+            </a:pPr>
+            <a:r>
+              <a:rPr/>
+              <a:t>Point at the dashed box. Three of these objects we handle directly - the inputs, the function we search for, the predictions. The fourth, the distribution the data comes from, we never see. Everything difficult in this course comes from that one box being out of reach.</a:t>
+            </a:r>
+          </a:p>
         </p:txBody>
       </p:sp>
       <p:sp>
@@ -3403,6 +3417,20 @@
               <a:t>This is the honest one-paragraph answer to “how does ChatGPT learn?”, and it is worth giving them, since they will be asked it at every family dinner.</a:t>
             </a:r>
           </a:p>
+          <a:p>
+            <a:pPr lvl="0" indent="0" marL="0">
+              <a:buNone/>
+            </a:pPr>
+          </a:p>
+          <a:p>
+            <a:pPr lvl="0" indent="0" marL="0">
+              <a:buNone/>
+            </a:pPr>
+            <a:r>
+              <a:rPr/>
+              <a:t>Walk it left to right: one column hidden, the rest used to predict it. Nobody labelled anything, yet there is a genuine target. Then scale the idea in their heads - hide a word in a sentence, a patch in an image - and they have the training principle behind every large model they have heard of.</a:t>
+            </a:r>
+          </a:p>
         </p:txBody>
       </p:sp>
       <p:sp>
@@ -3857,6 +3885,20 @@
               <a:t>That answer determines the metric, and it must be fixed BEFORE seeing results. A metric chosen afterwards is a metric chosen to flatter - with enough candidates, one always looks good.</a:t>
             </a:r>
           </a:p>
+          <a:p>
+            <a:pPr lvl="0" indent="0" marL="0">
+              <a:buNone/>
+            </a:pPr>
+          </a:p>
+          <a:p>
+            <a:pPr lvl="0" indent="0" marL="0">
+              <a:buNone/>
+            </a:pPr>
+            <a:r>
+              <a:rPr/>
+              <a:t>Two of these cells are fine and two are not, and the two failures are not the same size. Accuracy adds them up as if they were. Ask which cell they would accept more of - and note that answering requires knowing who bears the cost, which is not a question about data.</a:t>
+            </a:r>
+          </a:p>
         </p:txBody>
       </p:sp>
       <p:sp>
@@ -4091,6 +4133,20 @@
               <a:t>They will violate this deliberately in the third notebook and see what it costs.</a:t>
             </a:r>
           </a:p>
+          <a:p>
+            <a:pPr lvl="0" indent="0" marL="0">
+              <a:buNone/>
+            </a:pPr>
+          </a:p>
+          <a:p>
+            <a:pPr lvl="0" indent="0" marL="0">
+              <a:buNone/>
+            </a:pPr>
+            <a:r>
+              <a:rPr/>
+              <a:t>The caption under the test set is the whole discipline: touched once, at the very end. Say that every additional look spends some of its independence - if you test twenty variants and report the best, you have selected on the test set and the number is no longer honest.</a:t>
+            </a:r>
+          </a:p>
         </p:txBody>
       </p:sp>
       <p:sp>
@@ -4325,6 +4381,20 @@
               <a:t>This is structure beating discipline, and it is the single most useful habit in the scikit-learn API.</a:t>
             </a:r>
           </a:p>
+          <a:p>
+            <a:pPr lvl="0" indent="0" marL="0">
+              <a:buNone/>
+            </a:pPr>
+          </a:p>
+          <a:p>
+            <a:pPr lvl="0" indent="0" marL="0">
+              <a:buNone/>
+            </a:pPr>
+            <a:r>
+              <a:rPr/>
+              <a:t>The top row is the mistake, and note where ‘split’ sits: after the scaling. The mean used to scale the training rows was computed with the test rows included. Nothing errors, nothing warns, and the score comes out slightly too good - which is the worst kind of bug, because there is nothing to debug.</a:t>
+            </a:r>
+          </a:p>
         </p:txBody>
       </p:sp>
       <p:sp>
@@ -5411,6 +5481,20 @@
               <a:t>Accuracy is dominated by the class nobody is looking for. Ask them what metric they would report to someone deploying this, and steer towards recall on the positive class - then note that recall alone is also gameable, by flagging everything, which is why lesson 4 needs a whole session.</a:t>
             </a:r>
           </a:p>
+          <a:p>
+            <a:pPr lvl="0" indent="0" marL="0">
+              <a:buNone/>
+            </a:pPr>
+          </a:p>
+          <a:p>
+            <a:pPr lvl="0" indent="0" marL="0">
+              <a:buNone/>
+            </a:pPr>
+            <a:r>
+              <a:rPr/>
+              <a:t>Read the bottom-left cell in both matrices: 21 missed, then 20 missed. The accuracies differ by one thousandth. If you reported only accuracy, these two systems look identical - and one of them is a constant function that never looks at the input.</a:t>
+            </a:r>
+          </a:p>
         </p:txBody>
       </p:sp>
       <p:sp>
@@ -5535,6 +5619,20 @@
               <a:t>The question to carry: at the moment a prediction is needed, does this value exist yet?</a:t>
             </a:r>
           </a:p>
+          <a:p>
+            <a:pPr lvl="0" indent="0" marL="0">
+              <a:buNone/>
+            </a:pPr>
+          </a:p>
+          <a:p>
+            <a:pPr lvl="0" indent="0" marL="0">
+              <a:buNone/>
+            </a:pPr>
+            <a:r>
+              <a:rPr/>
+              <a:t>The shaded region is the trap. Everything to the right of the blue marker happens after the moment a prediction is needed, so none of it can be an input. Give them the question in the title as the thing to ask of every column in every dataset they are handed.</a:t>
+            </a:r>
+          </a:p>
         </p:txBody>
       </p:sp>
       <p:sp>
@@ -6727,6 +6825,20 @@
             <a:r>
               <a:rPr/>
               <a:t>If someone proposes machine learning immediately, slow them down - the interesting part is understanding precisely which difficulty it addresses.</a:t>
+            </a:r>
+          </a:p>
+          <a:p>
+            <a:pPr lvl="0" indent="0" marL="0">
+              <a:buNone/>
+            </a:pPr>
+          </a:p>
+          <a:p>
+            <a:pPr lvl="0" indent="0" marL="0">
+              <a:buNone/>
+            </a:pPr>
+            <a:r>
+              <a:rPr/>
+              <a:t>Take each row in turn and let someone in the room supply the exception before you reveal it. The pattern to draw out: every rule is defensible and every rule breaks, and the list has no end.</a:t>
             </a:r>
           </a:p>
         </p:txBody>
@@ -9904,8 +10016,8 @@
         </p:nvSpPr>
         <p:spPr>
           <a:xfrm>
-            <a:off x="457200" y="205979"/>
-            <a:ext cx="8229600" cy="857250"/>
+            <a:off x="457200" y="205740"/>
+            <a:ext cx="8229600" cy="874395"/>
           </a:xfrm>
         </p:spPr>
         <p:txBody>
@@ -9924,18 +10036,18 @@
       </p:sp>
       <p:sp>
         <p:nvSpPr>
-          <p:cNvPr id="3" name="Content Placeholder 2"/>
-          <p:cNvSpPr>
-            <a:spLocks noGrp="1"/>
-          </p:cNvSpPr>
-          <p:nvPr>
-            <p:ph idx="1"/>
+          <p:cNvPr id="4" name="Text Placeholder 3"/>
+          <p:cNvSpPr>
+            <a:spLocks noGrp="1"/>
+          </p:cNvSpPr>
+          <p:nvPr>
+            <p:ph idx="2" sz="half" type="body"/>
           </p:nvPr>
         </p:nvSpPr>
         <p:spPr>
           <a:xfrm>
-            <a:off x="457200" y="1200151"/>
-            <a:ext cx="8229600" cy="3394472"/>
+            <a:off x="457200" y="1183005"/>
+            <a:ext cx="8229600" cy="2185987"/>
           </a:xfrm>
         </p:spPr>
         <p:txBody>
@@ -9973,6 +10085,36 @@
           </a:p>
         </p:txBody>
       </p:sp>
+      <p:pic>
+        <p:nvPicPr>
+          <p:cNvPr descr="spam_rules.png" id="0" name="Picture 1"/>
+          <p:cNvPicPr>
+            <a:picLocks noGrp="1" noChangeAspect="1"/>
+          </p:cNvPicPr>
+          <p:nvPr/>
+        </p:nvPicPr>
+        <p:blipFill>
+          <a:blip r:embed="rId3"/>
+          <a:stretch>
+            <a:fillRect/>
+          </a:stretch>
+        </p:blipFill>
+        <p:spPr bwMode="auto">
+          <a:xfrm>
+            <a:off x="3130245" y="3471862"/>
+            <a:ext cx="2883510" cy="1054418"/>
+          </a:xfrm>
+          <a:prstGeom prst="rect">
+            <a:avLst/>
+          </a:prstGeom>
+          <a:noFill/>
+          <a:ln w="9525">
+            <a:noFill/>
+            <a:headEnd/>
+            <a:tailEnd/>
+          </a:ln>
+        </p:spPr>
+      </p:pic>
     </p:spTree>
   </p:cSld>
 </p:sld>
@@ -10127,8 +10269,8 @@
         </p:nvSpPr>
         <p:spPr>
           <a:xfrm>
-            <a:off x="457200" y="205979"/>
-            <a:ext cx="8229600" cy="857250"/>
+            <a:off x="457200" y="205740"/>
+            <a:ext cx="8229600" cy="874395"/>
           </a:xfrm>
         </p:spPr>
         <p:txBody>
@@ -10147,18 +10289,18 @@
       </p:sp>
       <p:sp>
         <p:nvSpPr>
-          <p:cNvPr id="3" name="Content Placeholder 2"/>
-          <p:cNvSpPr>
-            <a:spLocks noGrp="1"/>
-          </p:cNvSpPr>
-          <p:nvPr>
-            <p:ph idx="1"/>
+          <p:cNvPr id="4" name="Text Placeholder 3"/>
+          <p:cNvSpPr>
+            <a:spLocks noGrp="1"/>
+          </p:cNvSpPr>
+          <p:nvPr>
+            <p:ph idx="2" sz="half" type="body"/>
           </p:nvPr>
         </p:nvSpPr>
         <p:spPr>
           <a:xfrm>
-            <a:off x="457200" y="1200151"/>
-            <a:ext cx="8229600" cy="3394472"/>
+            <a:off x="457200" y="1183005"/>
+            <a:ext cx="8229600" cy="2185987"/>
           </a:xfrm>
         </p:spPr>
         <p:txBody>
@@ -10226,6 +10368,36 @@
           </a:p>
         </p:txBody>
       </p:sp>
+      <p:pic>
+        <p:nvPicPr>
+          <p:cNvPr descr="learning_setup.png" id="0" name="Picture 1"/>
+          <p:cNvPicPr>
+            <a:picLocks noGrp="1" noChangeAspect="1"/>
+          </p:cNvPicPr>
+          <p:nvPr/>
+        </p:nvPicPr>
+        <p:blipFill>
+          <a:blip r:embed="rId3"/>
+          <a:stretch>
+            <a:fillRect/>
+          </a:stretch>
+        </p:blipFill>
+        <p:spPr bwMode="auto">
+          <a:xfrm>
+            <a:off x="2978481" y="3471862"/>
+            <a:ext cx="3187037" cy="1054418"/>
+          </a:xfrm>
+          <a:prstGeom prst="rect">
+            <a:avLst/>
+          </a:prstGeom>
+          <a:noFill/>
+          <a:ln w="9525">
+            <a:noFill/>
+            <a:headEnd/>
+            <a:tailEnd/>
+          </a:ln>
+        </p:spPr>
+      </p:pic>
     </p:spTree>
   </p:cSld>
 </p:sld>
@@ -12877,8 +13049,8 @@
         </p:nvSpPr>
         <p:spPr>
           <a:xfrm>
-            <a:off x="457200" y="205979"/>
-            <a:ext cx="8229600" cy="857250"/>
+            <a:off x="457200" y="205740"/>
+            <a:ext cx="8229600" cy="874395"/>
           </a:xfrm>
         </p:spPr>
         <p:txBody>
@@ -12897,18 +13069,18 @@
       </p:sp>
       <p:sp>
         <p:nvSpPr>
-          <p:cNvPr id="3" name="Content Placeholder 2"/>
-          <p:cNvSpPr>
-            <a:spLocks noGrp="1"/>
-          </p:cNvSpPr>
-          <p:nvPr>
-            <p:ph idx="1"/>
+          <p:cNvPr id="4" name="Text Placeholder 3"/>
+          <p:cNvSpPr>
+            <a:spLocks noGrp="1"/>
+          </p:cNvSpPr>
+          <p:nvPr>
+            <p:ph idx="2" sz="half" type="body"/>
           </p:nvPr>
         </p:nvSpPr>
         <p:spPr>
           <a:xfrm>
-            <a:off x="457200" y="1200151"/>
-            <a:ext cx="8229600" cy="3394472"/>
+            <a:off x="457200" y="1183005"/>
+            <a:ext cx="8229600" cy="1311592"/>
           </a:xfrm>
         </p:spPr>
         <p:txBody>
@@ -12934,6 +13106,36 @@
           </a:p>
         </p:txBody>
       </p:sp>
+      <p:pic>
+        <p:nvPicPr>
+          <p:cNvPr descr="self_supervision.png" id="0" name="Picture 1"/>
+          <p:cNvPicPr>
+            <a:picLocks noGrp="1" noChangeAspect="1"/>
+          </p:cNvPicPr>
+          <p:nvPr/>
+        </p:nvPicPr>
+        <p:blipFill>
+          <a:blip r:embed="rId3"/>
+          <a:stretch>
+            <a:fillRect/>
+          </a:stretch>
+        </p:blipFill>
+        <p:spPr bwMode="auto">
+          <a:xfrm>
+            <a:off x="1657027" y="2597467"/>
+            <a:ext cx="5829946" cy="1928813"/>
+          </a:xfrm>
+          <a:prstGeom prst="rect">
+            <a:avLst/>
+          </a:prstGeom>
+          <a:noFill/>
+          <a:ln w="9525">
+            <a:noFill/>
+            <a:headEnd/>
+            <a:tailEnd/>
+          </a:ln>
+        </p:spPr>
+      </p:pic>
     </p:spTree>
   </p:cSld>
 </p:sld>
@@ -13460,8 +13662,8 @@
         </p:nvSpPr>
         <p:spPr>
           <a:xfrm>
-            <a:off x="457200" y="205979"/>
-            <a:ext cx="8229600" cy="857250"/>
+            <a:off x="457200" y="205740"/>
+            <a:ext cx="8229600" cy="874395"/>
           </a:xfrm>
         </p:spPr>
         <p:txBody>
@@ -13480,18 +13682,18 @@
       </p:sp>
       <p:sp>
         <p:nvSpPr>
-          <p:cNvPr id="3" name="Content Placeholder 2"/>
-          <p:cNvSpPr>
-            <a:spLocks noGrp="1"/>
-          </p:cNvSpPr>
-          <p:nvPr>
-            <p:ph idx="1"/>
+          <p:cNvPr id="4" name="Text Placeholder 3"/>
+          <p:cNvSpPr>
+            <a:spLocks noGrp="1"/>
+          </p:cNvSpPr>
+          <p:nvPr>
+            <p:ph idx="2" sz="half" type="body"/>
           </p:nvPr>
         </p:nvSpPr>
         <p:spPr>
           <a:xfrm>
-            <a:off x="457200" y="1200151"/>
-            <a:ext cx="8229600" cy="3394472"/>
+            <a:off x="457200" y="1183005"/>
+            <a:ext cx="8229600" cy="1311592"/>
           </a:xfrm>
         </p:spPr>
         <p:txBody>
@@ -13520,6 +13722,36 @@
           </a:p>
         </p:txBody>
       </p:sp>
+      <p:pic>
+        <p:nvPicPr>
+          <p:cNvPr descr="error_costs.png" id="0" name="Picture 1"/>
+          <p:cNvPicPr>
+            <a:picLocks noGrp="1" noChangeAspect="1"/>
+          </p:cNvPicPr>
+          <p:nvPr/>
+        </p:nvPicPr>
+        <p:blipFill>
+          <a:blip r:embed="rId3"/>
+          <a:stretch>
+            <a:fillRect/>
+          </a:stretch>
+        </p:blipFill>
+        <p:spPr bwMode="auto">
+          <a:xfrm>
+            <a:off x="2734600" y="2597467"/>
+            <a:ext cx="3674800" cy="1928813"/>
+          </a:xfrm>
+          <a:prstGeom prst="rect">
+            <a:avLst/>
+          </a:prstGeom>
+          <a:noFill/>
+          <a:ln w="9525">
+            <a:noFill/>
+            <a:headEnd/>
+            <a:tailEnd/>
+          </a:ln>
+        </p:spPr>
+      </p:pic>
     </p:spTree>
   </p:cSld>
 </p:sld>
@@ -13636,8 +13868,8 @@
         </p:nvSpPr>
         <p:spPr>
           <a:xfrm>
-            <a:off x="457200" y="205979"/>
-            <a:ext cx="8229600" cy="857250"/>
+            <a:off x="457200" y="205740"/>
+            <a:ext cx="8229600" cy="874395"/>
           </a:xfrm>
         </p:spPr>
         <p:txBody>
@@ -13656,18 +13888,18 @@
       </p:sp>
       <p:sp>
         <p:nvSpPr>
-          <p:cNvPr id="3" name="Content Placeholder 2"/>
-          <p:cNvSpPr>
-            <a:spLocks noGrp="1"/>
-          </p:cNvSpPr>
-          <p:nvPr>
-            <p:ph idx="1"/>
+          <p:cNvPr id="4" name="Text Placeholder 3"/>
+          <p:cNvSpPr>
+            <a:spLocks noGrp="1"/>
+          </p:cNvSpPr>
+          <p:nvPr>
+            <p:ph idx="2" sz="half" type="body"/>
           </p:nvPr>
         </p:nvSpPr>
         <p:spPr>
           <a:xfrm>
-            <a:off x="457200" y="1200151"/>
-            <a:ext cx="8229600" cy="3394472"/>
+            <a:off x="457200" y="1183005"/>
+            <a:ext cx="8229600" cy="874395"/>
           </a:xfrm>
         </p:spPr>
         <p:txBody>
@@ -13684,6 +13916,36 @@
           </a:p>
         </p:txBody>
       </p:sp>
+      <p:pic>
+        <p:nvPicPr>
+          <p:cNvPr descr="split_scheme.png" id="0" name="Picture 1"/>
+          <p:cNvPicPr>
+            <a:picLocks noGrp="1" noChangeAspect="1"/>
+          </p:cNvPicPr>
+          <p:nvPr/>
+        </p:nvPicPr>
+        <p:blipFill>
+          <a:blip r:embed="rId3"/>
+          <a:stretch>
+            <a:fillRect/>
+          </a:stretch>
+        </p:blipFill>
+        <p:spPr bwMode="auto">
+          <a:xfrm>
+            <a:off x="767456" y="2160270"/>
+            <a:ext cx="7609088" cy="2366010"/>
+          </a:xfrm>
+          <a:prstGeom prst="rect">
+            <a:avLst/>
+          </a:prstGeom>
+          <a:noFill/>
+          <a:ln w="9525">
+            <a:noFill/>
+            <a:headEnd/>
+            <a:tailEnd/>
+          </a:ln>
+        </p:spPr>
+      </p:pic>
     </p:spTree>
   </p:cSld>
 </p:sld>
@@ -13922,8 +14184,8 @@
         </p:nvSpPr>
         <p:spPr>
           <a:xfrm>
-            <a:off x="457200" y="205979"/>
-            <a:ext cx="8229600" cy="857250"/>
+            <a:off x="457200" y="205740"/>
+            <a:ext cx="8229600" cy="874395"/>
           </a:xfrm>
         </p:spPr>
         <p:txBody>
@@ -13942,18 +14204,18 @@
       </p:sp>
       <p:sp>
         <p:nvSpPr>
-          <p:cNvPr id="3" name="Content Placeholder 2"/>
-          <p:cNvSpPr>
-            <a:spLocks noGrp="1"/>
-          </p:cNvSpPr>
-          <p:nvPr>
-            <p:ph idx="1"/>
+          <p:cNvPr id="4" name="Text Placeholder 3"/>
+          <p:cNvSpPr>
+            <a:spLocks noGrp="1"/>
+          </p:cNvSpPr>
+          <p:nvPr>
+            <p:ph idx="2" sz="half" type="body"/>
           </p:nvPr>
         </p:nvSpPr>
         <p:spPr>
           <a:xfrm>
-            <a:off x="457200" y="1200151"/>
-            <a:ext cx="8229600" cy="3394472"/>
+            <a:off x="457200" y="1183005"/>
+            <a:ext cx="8229600" cy="1311592"/>
           </a:xfrm>
         </p:spPr>
         <p:txBody>
@@ -14039,6 +14301,36 @@
           </a:p>
         </p:txBody>
       </p:sp>
+      <p:pic>
+        <p:nvPicPr>
+          <p:cNvPr descr="pipeline_versus_manual.png" id="0" name="Picture 1"/>
+          <p:cNvPicPr>
+            <a:picLocks noGrp="1" noChangeAspect="1"/>
+          </p:cNvPicPr>
+          <p:nvPr/>
+        </p:nvPicPr>
+        <p:blipFill>
+          <a:blip r:embed="rId3"/>
+          <a:stretch>
+            <a:fillRect/>
+          </a:stretch>
+        </p:blipFill>
+        <p:spPr bwMode="auto">
+          <a:xfrm>
+            <a:off x="2291462" y="2597467"/>
+            <a:ext cx="4561075" cy="1928813"/>
+          </a:xfrm>
+          <a:prstGeom prst="rect">
+            <a:avLst/>
+          </a:prstGeom>
+          <a:noFill/>
+          <a:ln w="9525">
+            <a:noFill/>
+            <a:headEnd/>
+            <a:tailEnd/>
+          </a:ln>
+        </p:spPr>
+      </p:pic>
     </p:spTree>
   </p:cSld>
 </p:sld>
@@ -14872,8 +15164,8 @@
         </p:nvSpPr>
         <p:spPr>
           <a:xfrm>
-            <a:off x="457200" y="205979"/>
-            <a:ext cx="8229600" cy="857250"/>
+            <a:off x="457200" y="205740"/>
+            <a:ext cx="8229600" cy="874395"/>
           </a:xfrm>
         </p:spPr>
         <p:txBody>
@@ -14892,18 +15184,18 @@
       </p:sp>
       <p:sp>
         <p:nvSpPr>
-          <p:cNvPr id="3" name="Content Placeholder 2"/>
-          <p:cNvSpPr>
-            <a:spLocks noGrp="1"/>
-          </p:cNvSpPr>
-          <p:nvPr>
-            <p:ph idx="1"/>
+          <p:cNvPr id="4" name="Text Placeholder 3"/>
+          <p:cNvSpPr>
+            <a:spLocks noGrp="1"/>
+          </p:cNvSpPr>
+          <p:nvPr>
+            <p:ph idx="2" sz="half" type="body"/>
           </p:nvPr>
         </p:nvSpPr>
         <p:spPr>
           <a:xfrm>
-            <a:off x="457200" y="1200151"/>
-            <a:ext cx="8229600" cy="3394472"/>
+            <a:off x="457200" y="1183005"/>
+            <a:ext cx="8229600" cy="1311592"/>
           </a:xfrm>
         </p:spPr>
         <p:txBody>
@@ -14942,6 +15234,36 @@
           </a:p>
         </p:txBody>
       </p:sp>
+      <p:pic>
+        <p:nvPicPr>
+          <p:cNvPr descr="imbalance_matrix.png" id="0" name="Picture 1"/>
+          <p:cNvPicPr>
+            <a:picLocks noGrp="1" noChangeAspect="1"/>
+          </p:cNvPicPr>
+          <p:nvPr/>
+        </p:nvPicPr>
+        <p:blipFill>
+          <a:blip r:embed="rId3"/>
+          <a:stretch>
+            <a:fillRect/>
+          </a:stretch>
+        </p:blipFill>
+        <p:spPr bwMode="auto">
+          <a:xfrm>
+            <a:off x="2583839" y="2597467"/>
+            <a:ext cx="3976322" cy="1928813"/>
+          </a:xfrm>
+          <a:prstGeom prst="rect">
+            <a:avLst/>
+          </a:prstGeom>
+          <a:noFill/>
+          <a:ln w="9525">
+            <a:noFill/>
+            <a:headEnd/>
+            <a:tailEnd/>
+          </a:ln>
+        </p:spPr>
+      </p:pic>
     </p:spTree>
   </p:cSld>
 </p:sld>
@@ -15075,8 +15397,8 @@
         </p:nvSpPr>
         <p:spPr>
           <a:xfrm>
-            <a:off x="457200" y="205979"/>
-            <a:ext cx="8229600" cy="857250"/>
+            <a:off x="457200" y="205740"/>
+            <a:ext cx="8229600" cy="874395"/>
           </a:xfrm>
         </p:spPr>
         <p:txBody>
@@ -15095,18 +15417,18 @@
       </p:sp>
       <p:sp>
         <p:nvSpPr>
-          <p:cNvPr id="3" name="Content Placeholder 2"/>
-          <p:cNvSpPr>
-            <a:spLocks noGrp="1"/>
-          </p:cNvSpPr>
-          <p:nvPr>
-            <p:ph idx="1"/>
+          <p:cNvPr id="4" name="Text Placeholder 3"/>
+          <p:cNvSpPr>
+            <a:spLocks noGrp="1"/>
+          </p:cNvSpPr>
+          <p:nvPr>
+            <p:ph idx="2" sz="half" type="body"/>
           </p:nvPr>
         </p:nvSpPr>
         <p:spPr>
           <a:xfrm>
-            <a:off x="457200" y="1200151"/>
-            <a:ext cx="8229600" cy="3394472"/>
+            <a:off x="457200" y="1183005"/>
+            <a:ext cx="8229600" cy="1748790"/>
           </a:xfrm>
         </p:spPr>
         <p:txBody>
@@ -15146,6 +15468,36 @@
           </a:p>
         </p:txBody>
       </p:sp>
+      <p:pic>
+        <p:nvPicPr>
+          <p:cNvPr descr="shortcut_timeline.png" id="0" name="Picture 1"/>
+          <p:cNvPicPr>
+            <a:picLocks noGrp="1" noChangeAspect="1"/>
+          </p:cNvPicPr>
+          <p:nvPr/>
+        </p:nvPicPr>
+        <p:blipFill>
+          <a:blip r:embed="rId3"/>
+          <a:stretch>
+            <a:fillRect/>
+          </a:stretch>
+        </p:blipFill>
+        <p:spPr bwMode="auto">
+          <a:xfrm>
+            <a:off x="2247856" y="3034665"/>
+            <a:ext cx="4648288" cy="1491615"/>
+          </a:xfrm>
+          <a:prstGeom prst="rect">
+            <a:avLst/>
+          </a:prstGeom>
+          <a:noFill/>
+          <a:ln w="9525">
+            <a:noFill/>
+            <a:headEnd/>
+            <a:tailEnd/>
+          </a:ln>
+        </p:spPr>
+      </p:pic>
     </p:spTree>
   </p:cSld>
 </p:sld>

--- a/Lessons/01_introduction_and_workflow/Slides/introduction_and_workflow_slides.pptx
+++ b/Lessons/01_introduction_and_workflow/Slides/introduction_and_workflow_slides.pptx
@@ -1390,35 +1390,91 @@
             </a:pPr>
             <a:r>
               <a:rPr/>
-              <a:t>Say clearly: this is not bureaucratic caution. It is the only thing standing between them and a meaningless number, and it is the operational consequence of the last two slides - since the expected risk cannot be computed, we estimate it on data the model has never seen.</a:t>
-            </a:r>
-          </a:p>
-          <a:p>
-            <a:pPr lvl="0" indent="0" marL="0">
-              <a:buNone/>
-            </a:pPr>
-          </a:p>
-          <a:p>
-            <a:pPr lvl="0" indent="0" marL="0">
-              <a:buNone/>
-            </a:pPr>
-            <a:r>
-              <a:rPr/>
-              <a:t>Warn them we will violate this deliberately later today and watch 77% accuracy appear out of pure random noise.</a:t>
-            </a:r>
-          </a:p>
-          <a:p>
-            <a:pPr lvl="0" indent="0" marL="0">
-              <a:buNone/>
-            </a:pPr>
-          </a:p>
-          <a:p>
-            <a:pPr lvl="0" indent="0" marL="0">
-              <a:buNone/>
-            </a:pPr>
-            <a:r>
-              <a:rPr/>
-              <a:t>If someone asks “how much do we hold out?” - typically 20-30%, and lesson 5 explains the trade-off: more test data gives a more reliable estimate, less training data gives a worse model.</a:t>
+              <a:t>Say clearly: this is not bureaucratic caution, and give the reason rather than the instruction. Handout sections 2.3 to 2.5 carry the full argument.</a:t>
+            </a:r>
+          </a:p>
+          <a:p>
+            <a:pPr lvl="0" indent="0" marL="0">
+              <a:buNone/>
+            </a:pPr>
+          </a:p>
+          <a:p>
+            <a:pPr lvl="0" indent="0" marL="0">
+              <a:buNone/>
+            </a:pPr>
+            <a:r>
+              <a:rPr/>
+              <a:t>The difficulty is not that a sample is small. It is that if the same data both CHOOSES the model and JUDGES it, the judgement stops being an unbiased estimate. The analogy that works: writing the exam questions after reading the students’ answers. Nobody cheated - you let the answers influence the question.</a:t>
+            </a:r>
+          </a:p>
+          <a:p>
+            <a:pPr lvl="0" indent="0" marL="0">
+              <a:buNone/>
+            </a:pPr>
+          </a:p>
+          <a:p>
+            <a:pPr lvl="0" indent="0" marL="0">
+              <a:buNone/>
+            </a:pPr>
+            <a:r>
+              <a:rPr/>
+              <a:t>Why a held-out set repairs it: if the test set played no part in choosing f, it stays independent of f, and the error measured on it is an unbiased estimate of the expected risk - the quantity we just said was not computable. Worth putting on the board.</a:t>
+            </a:r>
+          </a:p>
+          <a:p>
+            <a:pPr lvl="0" indent="0" marL="0">
+              <a:buNone/>
+            </a:pPr>
+          </a:p>
+          <a:p>
+            <a:pPr lvl="0" indent="0" marL="0">
+              <a:buNone/>
+            </a:pPr>
+            <a:r>
+              <a:rPr/>
+              <a:t>Stress what that argument depends on: the INDEPENDENCE of the test set, not its size or its proportion. The moment those rows influence any decision - a mean for scaling, a ranking for feature selection, a comparison between models - the independence breaks and the estimate is optimistic by an unknown amount. That is why the rule is “nothing is learned before the split” rather than “keep some data aside”.</a:t>
+            </a:r>
+          </a:p>
+          <a:p>
+            <a:pPr lvl="0" indent="0" marL="0">
+              <a:buNone/>
+            </a:pPr>
+          </a:p>
+          <a:p>
+            <a:pPr lvl="0" indent="0" marL="0">
+              <a:buNone/>
+            </a:pPr>
+            <a:r>
+              <a:rPr/>
+              <a:t>Warn them we will break exactly that independence later today and watch 77% accuracy appear out of coin-flip labels.</a:t>
+            </a:r>
+          </a:p>
+          <a:p>
+            <a:pPr lvl="0" indent="0" marL="0">
+              <a:buNone/>
+            </a:pPr>
+          </a:p>
+          <a:p>
+            <a:pPr lvl="0" indent="0" marL="0">
+              <a:buNone/>
+            </a:pPr>
+            <a:r>
+              <a:rPr/>
+              <a:t>If someone asks “how much do we hold out?” - typically 20-30%, and the trade-off is real in both directions: a bigger test set gives a more stable estimate (the standard error falls as one over root n), a bigger training set gives a better model. Give them the concrete number from notebook 01: 143 test examples at 0.986 accuracy carries a standard error of about one percentage point, so the third decimal place is noise. With a few hundred examples both sides hurt at once, which is what cross-validation exists for - lesson 5.</a:t>
+            </a:r>
+          </a:p>
+          <a:p>
+            <a:pPr lvl="0" indent="0" marL="0">
+              <a:buNone/>
+            </a:pPr>
+          </a:p>
+          <a:p>
+            <a:pPr lvl="0" indent="0" marL="0">
+              <a:buNone/>
+            </a:pPr>
+            <a:r>
+              <a:rPr/>
+              <a:t>If someone asks “what if I try ten models and report the best?” - they have just selected using the test set, and the number is optimistic again. That is the bridge to the validation set, and to lesson 5. Today we need only train and test because we make no choices: one model, no tuning.</a:t>
             </a:r>
           </a:p>
         </p:txBody>

--- a/Lessons/01_introduction_and_workflow/Slides/introduction_and_workflow_slides.pptx
+++ b/Lessons/01_introduction_and_workflow/Slides/introduction_and_workflow_slides.pptx
@@ -606,7 +606,7 @@
             </a:pPr>
             <a:r>
               <a:rPr/>
-              <a:t>Practical notes to give now: the repository is public to them via git, everything runs offline in Docker, and there is no cost attached to any part of this course. Nobody needs an API key, a cloud account or a GPU.</a:t>
+              <a:t>Practical notes to give now: the repository is public to them via git, everything runs offline in Docker, and there is no cost attached to any part of this course. Nobody needs an application programming interface (API) key, a cloud account or a graphics processing unit (GPU).</a:t>
             </a:r>
           </a:p>
         </p:txBody>
@@ -4902,7 +4902,7 @@
             </a:pPr>
             <a:r>
               <a:rPr/>
-              <a:t>Lesson 4 builds the tools properly: ROC curves, precision-recall curves, choosing an operating point. Today they need to see that the trade-off exists and that it is not the model’s decision to make.</a:t>
+              <a:t>Lesson 4 builds the tools properly: receiver operating characteristic (ROC) curves, precision-recall curves, choosing an operating point. Today they need to see that the trade-off exists and that it is not the model’s decision to make.</a:t>
             </a:r>
           </a:p>
         </p:txBody>
@@ -12783,7 +12783,7 @@
                       </a:pPr>
                       <a:r>
                         <a:rPr/>
-                        <a:t>k-NN, SVM, trees, ensembles</a:t>
+                        <a:t>k-NN, support vector machines, trees, ensembles</a:t>
                       </a:r>
                     </a:p>
                   </a:txBody>

--- a/Lessons/01_introduction_and_workflow/Slides/introduction_and_workflow_slides.pptx
+++ b/Lessons/01_introduction_and_workflow/Slides/introduction_and_workflow_slides.pptx
@@ -5,7 +5,7 @@
     <p:sldMasterId id="2147483648" r:id="rId1"/>
   </p:sldMasterIdLst>
   <p:notesMasterIdLst>
-    <p:notesMasterId r:id="rId57"/>
+    <p:notesMasterId r:id="rId64"/>
   </p:notesMasterIdLst>
   <p:sldIdLst>
     <p:sldId id="256" r:id="rId2"/>
@@ -63,6 +63,13 @@
     <p:sldId id="308" r:id="rId54"/>
     <p:sldId id="309" r:id="rId55"/>
     <p:sldId id="310" r:id="rId56"/>
+    <p:sldId id="311" r:id="rId57"/>
+    <p:sldId id="312" r:id="rId58"/>
+    <p:sldId id="313" r:id="rId59"/>
+    <p:sldId id="314" r:id="rId60"/>
+    <p:sldId id="315" r:id="rId61"/>
+    <p:sldId id="316" r:id="rId62"/>
+    <p:sldId id="317" r:id="rId63"/>
   </p:sldIdLst>
   <p:sldSz cx="9144000" cy="5143500" type="screen16x9"/>
   <p:notesSz cx="6858000" cy="9144000"/>
@@ -688,49 +695,35 @@
             </a:pPr>
             <a:r>
               <a:rPr/>
-              <a:t>This is the conceptual move that defines the field, so say it slowly while the figure is up.</a:t>
-            </a:r>
-          </a:p>
-          <a:p>
-            <a:pPr lvl="0" indent="0" marL="0">
-              <a:buNone/>
-            </a:pPr>
-          </a:p>
-          <a:p>
-            <a:pPr lvl="0" indent="0" marL="0">
-              <a:buNone/>
-            </a:pPr>
-            <a:r>
-              <a:rPr/>
-              <a:t>Traditional programming: you supply rules and data, the machine produces answers. Machine learning: you supply data and answers, and the machine produces the rules. The arrows literally reverse.</a:t>
-            </a:r>
-          </a:p>
-          <a:p>
-            <a:pPr lvl="0" indent="0" marL="0">
-              <a:buNone/>
-            </a:pPr>
-          </a:p>
-          <a:p>
-            <a:pPr lvl="0" indent="0" marL="0">
-              <a:buNone/>
-            </a:pPr>
-            <a:r>
-              <a:rPr/>
-              <a:t>Everything else in this course is machinery for doing that search well - and for telling whether the rules it found are real or an artefact of the sample you happened to collect.</a:t>
-            </a:r>
-          </a:p>
-          <a:p>
-            <a:pPr lvl="0" indent="0" marL="0">
-              <a:buNone/>
-            </a:pPr>
-          </a:p>
-          <a:p>
-            <a:pPr lvl="0" indent="0" marL="0">
-              <a:buNone/>
-            </a:pPr>
-            <a:r>
-              <a:rPr/>
-              <a:t>Worth adding: this framing is due to Arthur Samuel in the 1950s, and it is still the cleanest one-sentence description of what changed.</a:t>
+              <a:t>Read the four rows down the left, and the exception each one buys on the right. Take them one at a time - the effect depends on the accumulation.</a:t>
+            </a:r>
+          </a:p>
+          <a:p>
+            <a:pPr lvl="0" indent="0" marL="0">
+              <a:buNone/>
+            </a:pPr>
+          </a:p>
+          <a:p>
+            <a:pPr lvl="0" indent="0" marL="0">
+              <a:buNone/>
+            </a:pPr>
+            <a:r>
+              <a:rPr/>
+              <a:t>The point is not that these are bad rules. Each is a reasonable idea, and each fails on a case that is obviously not spam to any human reader. Ask the room for a fifth rule and then for what breaks it; somebody will supply both within a few seconds, which is the demonstration.</a:t>
+            </a:r>
+          </a:p>
+          <a:p>
+            <a:pPr lvl="0" indent="0" marL="0">
+              <a:buNone/>
+            </a:pPr>
+          </a:p>
+          <a:p>
+            <a:pPr lvl="0" indent="0" marL="0">
+              <a:buNone/>
+            </a:pPr>
+            <a:r>
+              <a:rPr/>
+              <a:t>The line at the bottom is the one to leave them with: you cannot state the rule, but you recognise the answer. That gap is the whole reason this course exists, and every method in it is a way of closing it from examples instead of from specification.</a:t>
             </a:r>
           </a:p>
         </p:txBody>
@@ -812,49 +805,49 @@
             </a:pPr>
             <a:r>
               <a:rPr/>
-              <a:t>Keep this brisk - handout section 2.1 has the full treatment and they will read it.</a:t>
-            </a:r>
-          </a:p>
-          <a:p>
-            <a:pPr lvl="0" indent="0" marL="0">
-              <a:buNone/>
-            </a:pPr>
-          </a:p>
-          <a:p>
-            <a:pPr lvl="0" indent="0" marL="0">
-              <a:buNone/>
-            </a:pPr>
-            <a:r>
-              <a:rPr/>
-              <a:t>Two things to stress about D. It is UNKNOWN, which is why we need data at all. And it is assumed FIXED - the same distribution generates the training data and the data we will meet later. That assumption is quiet and it fails constantly in practice: the hospital changes its equipment, the users change, the season turns. When it fails, models degrade without any warning from their metrics. Promise them we return to it.</a:t>
-            </a:r>
-          </a:p>
-          <a:p>
-            <a:pPr lvl="0" indent="0" marL="0">
-              <a:buNone/>
-            </a:pPr>
-          </a:p>
-          <a:p>
-            <a:pPr lvl="0" indent="0" marL="0">
-              <a:buNone/>
-            </a:pPr>
-            <a:r>
-              <a:rPr/>
-              <a:t>The loss function is where the domain enters the mathematics. Choosing it is a decision about which mistakes matter, and we make that choice explicitly in twenty minutes.</a:t>
-            </a:r>
-          </a:p>
-          <a:p>
-            <a:pPr lvl="0" indent="0" marL="0">
-              <a:buNone/>
-            </a:pPr>
-          </a:p>
-          <a:p>
-            <a:pPr lvl="0" indent="0" marL="0">
-              <a:buNone/>
-            </a:pPr>
-            <a:r>
-              <a:rPr/>
-              <a:t>Point at the dashed box. Three of these objects we handle directly - the inputs, the function we search for, the predictions. The fourth, the distribution the data comes from, we never see. Everything difficult in this course comes from that one box being out of reach.</a:t>
+              <a:t>This is the conceptual move that defines the field, so say it slowly while the figure is up.</a:t>
+            </a:r>
+          </a:p>
+          <a:p>
+            <a:pPr lvl="0" indent="0" marL="0">
+              <a:buNone/>
+            </a:pPr>
+          </a:p>
+          <a:p>
+            <a:pPr lvl="0" indent="0" marL="0">
+              <a:buNone/>
+            </a:pPr>
+            <a:r>
+              <a:rPr/>
+              <a:t>Traditional programming: you supply rules and data, the machine produces answers. Machine learning: you supply data and answers, and the machine produces the rules. The arrows literally reverse.</a:t>
+            </a:r>
+          </a:p>
+          <a:p>
+            <a:pPr lvl="0" indent="0" marL="0">
+              <a:buNone/>
+            </a:pPr>
+          </a:p>
+          <a:p>
+            <a:pPr lvl="0" indent="0" marL="0">
+              <a:buNone/>
+            </a:pPr>
+            <a:r>
+              <a:rPr/>
+              <a:t>Everything else in this course is machinery for doing that search well - and for telling whether the rules it found are real or an artefact of the sample you happened to collect.</a:t>
+            </a:r>
+          </a:p>
+          <a:p>
+            <a:pPr lvl="0" indent="0" marL="0">
+              <a:buNone/>
+            </a:pPr>
+          </a:p>
+          <a:p>
+            <a:pPr lvl="0" indent="0" marL="0">
+              <a:buNone/>
+            </a:pPr>
+            <a:r>
+              <a:rPr/>
+              <a:t>Worth adding: this framing is due to Arthur Samuel in the 1950s, and it is still the cleanest one-sentence description of what changed.</a:t>
             </a:r>
           </a:p>
         </p:txBody>
@@ -936,35 +929,49 @@
             </a:pPr>
             <a:r>
               <a:rPr/>
-              <a:t>Name it: expected risk, sometimes called true risk or generalisation error.</a:t>
-            </a:r>
-          </a:p>
-          <a:p>
-            <a:pPr lvl="0" indent="0" marL="0">
-              <a:buNone/>
-            </a:pPr>
-          </a:p>
-          <a:p>
-            <a:pPr lvl="0" indent="0" marL="0">
-              <a:buNone/>
-            </a:pPr>
-            <a:r>
-              <a:rPr/>
-              <a:t>Then deliver the punchline and pause on it - we cannot compute this. D is unknown, the expectation is over data that has not been collected, and no amount of cleverness gets around it.</a:t>
-            </a:r>
-          </a:p>
-          <a:p>
-            <a:pPr lvl="0" indent="0" marL="0">
-              <a:buNone/>
-            </a:pPr>
-          </a:p>
-          <a:p>
-            <a:pPr lvl="0" indent="0" marL="0">
-              <a:buNone/>
-            </a:pPr>
-            <a:r>
-              <a:rPr/>
-              <a:t>This is the central obstacle of the field, and everything else in the course follows from it. If a student takes one idea away today, this is a good candidate.</a:t>
+              <a:t>Keep this brisk - handout section 2.1 has the full treatment and they will read it.</a:t>
+            </a:r>
+          </a:p>
+          <a:p>
+            <a:pPr lvl="0" indent="0" marL="0">
+              <a:buNone/>
+            </a:pPr>
+          </a:p>
+          <a:p>
+            <a:pPr lvl="0" indent="0" marL="0">
+              <a:buNone/>
+            </a:pPr>
+            <a:r>
+              <a:rPr/>
+              <a:t>Two things to stress about D. It is UNKNOWN, which is why we need data at all. And it is assumed FIXED - the same distribution generates the training data and the data we will meet later. That assumption is quiet and it fails constantly in practice: the hospital changes its equipment, the users change, the season turns. When it fails, models degrade without any warning from their metrics. Promise them we return to it.</a:t>
+            </a:r>
+          </a:p>
+          <a:p>
+            <a:pPr lvl="0" indent="0" marL="0">
+              <a:buNone/>
+            </a:pPr>
+          </a:p>
+          <a:p>
+            <a:pPr lvl="0" indent="0" marL="0">
+              <a:buNone/>
+            </a:pPr>
+            <a:r>
+              <a:rPr/>
+              <a:t>The loss function is where the domain enters the mathematics. Choosing it is a decision about which mistakes matter, and we make that choice explicitly in twenty minutes.</a:t>
+            </a:r>
+          </a:p>
+          <a:p>
+            <a:pPr lvl="0" indent="0" marL="0">
+              <a:buNone/>
+            </a:pPr>
+          </a:p>
+          <a:p>
+            <a:pPr lvl="0" indent="0" marL="0">
+              <a:buNone/>
+            </a:pPr>
+            <a:r>
+              <a:rPr/>
+              <a:t>Point at the dashed box. Three of these objects we handle directly - the inputs, the function we search for, the predictions. The fourth, the distribution the data comes from, we never see. Everything difficult in this course comes from that one box being out of reach.</a:t>
             </a:r>
           </a:p>
         </p:txBody>
@@ -1046,21 +1053,35 @@
             </a:pPr>
             <a:r>
               <a:rPr/>
-              <a:t>Empirical risk. Minimising it is empirical risk minimisation, and essentially every method in this course is an instance of it - linear regression, logistic regression, trees, neural networks. Different function classes, same principle.</a:t>
-            </a:r>
-          </a:p>
-          <a:p>
-            <a:pPr lvl="0" indent="0" marL="0">
-              <a:buNone/>
-            </a:pPr>
-          </a:p>
-          <a:p>
-            <a:pPr lvl="0" indent="0" marL="0">
-              <a:buNone/>
-            </a:pPr>
-            <a:r>
-              <a:rPr/>
-              <a:t>Ask the room: what could go wrong with minimising this instead of the thing we actually want? Give them a moment. Someone usually says “it might not generalise”, which is exactly right and is the next slide.</a:t>
+              <a:t>Everything on the previous slide, drawn once so it can be pointed at for the rest of the course.</a:t>
+            </a:r>
+          </a:p>
+          <a:p>
+            <a:pPr lvl="0" indent="0" marL="0">
+              <a:buNone/>
+            </a:pPr>
+          </a:p>
+          <a:p>
+            <a:pPr lvl="0" indent="0" marL="0">
+              <a:buNone/>
+            </a:pPr>
+            <a:r>
+              <a:rPr/>
+              <a:t>Trace the path with a finger: a pair is drawn from D, x goes into f, f produces y-hat, the loss compares y-hat against the y that came with it. Then say what is unknown - D is unknown, and it is the only thing we actually care about.</a:t>
+            </a:r>
+          </a:p>
+          <a:p>
+            <a:pPr lvl="0" indent="0" marL="0">
+              <a:buNone/>
+            </a:pPr>
+          </a:p>
+          <a:p>
+            <a:pPr lvl="0" indent="0" marL="0">
+              <a:buNone/>
+            </a:pPr>
+            <a:r>
+              <a:rPr/>
+              <a:t>Worth naming now, because it returns in lesson 5: we never see D. We see a sample from it, and every claim we make about a model is an inference from the sample to the distribution. Most of the methodology later in the course is about not fooling yourself in that step.</a:t>
             </a:r>
           </a:p>
         </p:txBody>
@@ -1142,63 +1163,35 @@
             </a:pPr>
             <a:r>
               <a:rPr/>
-              <a:t>The central slide of the lesson. Walk the figure carefully.</a:t>
-            </a:r>
-          </a:p>
-          <a:p>
-            <a:pPr lvl="0" indent="0" marL="0">
-              <a:buNone/>
-            </a:pPr>
-          </a:p>
-          <a:p>
-            <a:pPr lvl="0" indent="0" marL="0">
-              <a:buNone/>
-            </a:pPr>
-            <a:r>
-              <a:rPr/>
-              <a:t>Empirical risk falls monotonically as the model gets more flexible - more parameters always fit the sample better, and with enough of them you reach zero by storing every example and reciting its answer.</a:t>
-            </a:r>
-          </a:p>
-          <a:p>
-            <a:pPr lvl="0" indent="0" marL="0">
-              <a:buNone/>
-            </a:pPr>
-          </a:p>
-          <a:p>
-            <a:pPr lvl="0" indent="0" marL="0">
-              <a:buNone/>
-            </a:pPr>
-            <a:r>
-              <a:rPr/>
-              <a:t>Expected risk turns back up. The shaded region between the curves is overfitting: the model has learnt the sample rather than the pattern.</a:t>
-            </a:r>
-          </a:p>
-          <a:p>
-            <a:pPr lvl="0" indent="0" marL="0">
-              <a:buNone/>
-            </a:pPr>
-          </a:p>
-          <a:p>
-            <a:pPr lvl="0" indent="0" marL="0">
-              <a:buNone/>
-            </a:pPr>
-            <a:r>
-              <a:rPr/>
-              <a:t>The consequence for practice: performance on data you fitted to is ALWAYS optimistic and sometimes meaningless. Handout section 2.2 makes the argument in full.</a:t>
-            </a:r>
-          </a:p>
-          <a:p>
-            <a:pPr lvl="0" indent="0" marL="0">
-              <a:buNone/>
-            </a:pPr>
-          </a:p>
-          <a:p>
-            <a:pPr lvl="0" indent="0" marL="0">
-              <a:buNone/>
-            </a:pPr>
-            <a:r>
-              <a:rPr/>
-              <a:t>Note the dotted line - the best trade-off - and say we spend lesson 5 learning to find it honestly, and lessons 3 and 7 meeting the two standard tools for controlling it, regularisation and ensembling.</a:t>
+              <a:t>Name it: expected risk, sometimes called true risk or generalisation error.</a:t>
+            </a:r>
+          </a:p>
+          <a:p>
+            <a:pPr lvl="0" indent="0" marL="0">
+              <a:buNone/>
+            </a:pPr>
+          </a:p>
+          <a:p>
+            <a:pPr lvl="0" indent="0" marL="0">
+              <a:buNone/>
+            </a:pPr>
+            <a:r>
+              <a:rPr/>
+              <a:t>Then deliver the punchline and pause on it - we cannot compute this. D is unknown, the expectation is over data that has not been collected, and no amount of cleverness gets around it.</a:t>
+            </a:r>
+          </a:p>
+          <a:p>
+            <a:pPr lvl="0" indent="0" marL="0">
+              <a:buNone/>
+            </a:pPr>
+          </a:p>
+          <a:p>
+            <a:pPr lvl="0" indent="0" marL="0">
+              <a:buNone/>
+            </a:pPr>
+            <a:r>
+              <a:rPr/>
+              <a:t>This is the central obstacle of the field, and everything else in the course follows from it. If a student takes one idea away today, this is a good candidate.</a:t>
             </a:r>
           </a:p>
         </p:txBody>
@@ -1280,35 +1273,21 @@
             </a:pPr>
             <a:r>
               <a:rPr/>
-              <a:t>Three fits to identical points. Left: a straight line cannot follow the curve, so it is wrong everywhere in the same way - high bias, poor on training AND test data. Right: degree-18 passes through nearly every point and oscillates wildly between them - it will be badly wrong on anything new.</a:t>
-            </a:r>
-          </a:p>
-          <a:p>
-            <a:pPr lvl="0" indent="0" marL="0">
-              <a:buNone/>
-            </a:pPr>
-          </a:p>
-          <a:p>
-            <a:pPr lvl="0" indent="0" marL="0">
-              <a:buNone/>
-            </a:pPr>
-            <a:r>
-              <a:rPr/>
-              <a:t>Ask which one they would choose without seeing the dashed line. That is the real situation: the true pattern is never visible, only the sample.</a:t>
-            </a:r>
-          </a:p>
-          <a:p>
-            <a:pPr lvl="0" indent="0" marL="0">
-              <a:buNone/>
-            </a:pPr>
-          </a:p>
-          <a:p>
-            <a:pPr lvl="0" indent="0" marL="0">
-              <a:buNone/>
-            </a:pPr>
-            <a:r>
-              <a:rPr/>
-              <a:t>Point out the trap in the right-hand panel - it has the LOWEST training error of the three. If you selected a model by training error you would pick it every time. That is precisely why we hold data out.</a:t>
+              <a:t>Empirical risk. Minimising it is empirical risk minimisation, and essentially every method in this course is an instance of it - linear regression, logistic regression, trees, neural networks. Different function classes, same principle.</a:t>
+            </a:r>
+          </a:p>
+          <a:p>
+            <a:pPr lvl="0" indent="0" marL="0">
+              <a:buNone/>
+            </a:pPr>
+          </a:p>
+          <a:p>
+            <a:pPr lvl="0" indent="0" marL="0">
+              <a:buNone/>
+            </a:pPr>
+            <a:r>
+              <a:rPr/>
+              <a:t>Ask the room: what could go wrong with minimising this instead of the thing we actually want? Give them a moment. Someone usually says “it might not generalise”, which is exactly right and is the next slide.</a:t>
             </a:r>
           </a:p>
         </p:txBody>
@@ -1390,91 +1369,63 @@
             </a:pPr>
             <a:r>
               <a:rPr/>
-              <a:t>Say clearly: this is not bureaucratic caution, and give the reason rather than the instruction. Handout sections 2.3 to 2.5 carry the full argument.</a:t>
-            </a:r>
-          </a:p>
-          <a:p>
-            <a:pPr lvl="0" indent="0" marL="0">
-              <a:buNone/>
-            </a:pPr>
-          </a:p>
-          <a:p>
-            <a:pPr lvl="0" indent="0" marL="0">
-              <a:buNone/>
-            </a:pPr>
-            <a:r>
-              <a:rPr/>
-              <a:t>The difficulty is not that a sample is small. It is that if the same data both CHOOSES the model and JUDGES it, the judgement stops being an unbiased estimate. The analogy that works: writing the exam questions after reading the students’ answers. Nobody cheated - you let the answers influence the question.</a:t>
-            </a:r>
-          </a:p>
-          <a:p>
-            <a:pPr lvl="0" indent="0" marL="0">
-              <a:buNone/>
-            </a:pPr>
-          </a:p>
-          <a:p>
-            <a:pPr lvl="0" indent="0" marL="0">
-              <a:buNone/>
-            </a:pPr>
-            <a:r>
-              <a:rPr/>
-              <a:t>Why a held-out set repairs it: if the test set played no part in choosing f, it stays independent of f, and the error measured on it is an unbiased estimate of the expected risk - the quantity we just said was not computable. Worth putting on the board.</a:t>
-            </a:r>
-          </a:p>
-          <a:p>
-            <a:pPr lvl="0" indent="0" marL="0">
-              <a:buNone/>
-            </a:pPr>
-          </a:p>
-          <a:p>
-            <a:pPr lvl="0" indent="0" marL="0">
-              <a:buNone/>
-            </a:pPr>
-            <a:r>
-              <a:rPr/>
-              <a:t>Stress what that argument depends on: the INDEPENDENCE of the test set, not its size or its proportion. The moment those rows influence any decision - a mean for scaling, a ranking for feature selection, a comparison between models - the independence breaks and the estimate is optimistic by an unknown amount. That is why the rule is “nothing is learned before the split” rather than “keep some data aside”.</a:t>
-            </a:r>
-          </a:p>
-          <a:p>
-            <a:pPr lvl="0" indent="0" marL="0">
-              <a:buNone/>
-            </a:pPr>
-          </a:p>
-          <a:p>
-            <a:pPr lvl="0" indent="0" marL="0">
-              <a:buNone/>
-            </a:pPr>
-            <a:r>
-              <a:rPr/>
-              <a:t>Warn them we will break exactly that independence later today and watch 77% accuracy appear out of coin-flip labels.</a:t>
-            </a:r>
-          </a:p>
-          <a:p>
-            <a:pPr lvl="0" indent="0" marL="0">
-              <a:buNone/>
-            </a:pPr>
-          </a:p>
-          <a:p>
-            <a:pPr lvl="0" indent="0" marL="0">
-              <a:buNone/>
-            </a:pPr>
-            <a:r>
-              <a:rPr/>
-              <a:t>If someone asks “how much do we hold out?” - typically 20-30%, and the trade-off is real in both directions: a bigger test set gives a more stable estimate (the standard error falls as one over root n), a bigger training set gives a better model. Give them the concrete number from notebook 01: 143 test examples at 0.986 accuracy carries a standard error of about one percentage point, so the third decimal place is noise. With a few hundred examples both sides hurt at once, which is what cross-validation exists for - lesson 5.</a:t>
-            </a:r>
-          </a:p>
-          <a:p>
-            <a:pPr lvl="0" indent="0" marL="0">
-              <a:buNone/>
-            </a:pPr>
-          </a:p>
-          <a:p>
-            <a:pPr lvl="0" indent="0" marL="0">
-              <a:buNone/>
-            </a:pPr>
-            <a:r>
-              <a:rPr/>
-              <a:t>If someone asks “what if I try ten models and report the best?” - they have just selected using the test set, and the number is optimistic again. That is the bridge to the validation set, and to lesson 5. Today we need only train and test because we make no choices: one model, no tuning.</a:t>
+              <a:t>The central slide of the lesson. Walk the figure carefully.</a:t>
+            </a:r>
+          </a:p>
+          <a:p>
+            <a:pPr lvl="0" indent="0" marL="0">
+              <a:buNone/>
+            </a:pPr>
+          </a:p>
+          <a:p>
+            <a:pPr lvl="0" indent="0" marL="0">
+              <a:buNone/>
+            </a:pPr>
+            <a:r>
+              <a:rPr/>
+              <a:t>Empirical risk falls monotonically as the model gets more flexible - more parameters always fit the sample better, and with enough of them you reach zero by storing every example and reciting its answer.</a:t>
+            </a:r>
+          </a:p>
+          <a:p>
+            <a:pPr lvl="0" indent="0" marL="0">
+              <a:buNone/>
+            </a:pPr>
+          </a:p>
+          <a:p>
+            <a:pPr lvl="0" indent="0" marL="0">
+              <a:buNone/>
+            </a:pPr>
+            <a:r>
+              <a:rPr/>
+              <a:t>Expected risk turns back up. The shaded region between the curves is overfitting: the model has learnt the sample rather than the pattern.</a:t>
+            </a:r>
+          </a:p>
+          <a:p>
+            <a:pPr lvl="0" indent="0" marL="0">
+              <a:buNone/>
+            </a:pPr>
+          </a:p>
+          <a:p>
+            <a:pPr lvl="0" indent="0" marL="0">
+              <a:buNone/>
+            </a:pPr>
+            <a:r>
+              <a:rPr/>
+              <a:t>The consequence for practice: performance on data you fitted to is ALWAYS optimistic and sometimes meaningless. Handout section 2.2 makes the argument in full.</a:t>
+            </a:r>
+          </a:p>
+          <a:p>
+            <a:pPr lvl="0" indent="0" marL="0">
+              <a:buNone/>
+            </a:pPr>
+          </a:p>
+          <a:p>
+            <a:pPr lvl="0" indent="0" marL="0">
+              <a:buNone/>
+            </a:pPr>
+            <a:r>
+              <a:rPr/>
+              <a:t>Note the dotted line - the best trade-off - and say we spend lesson 5 learning to find it honestly, and lessons 3 and 7 meeting the two standard tools for controlling it, regularisation and ensembling.</a:t>
             </a:r>
           </a:p>
         </p:txBody>
@@ -1556,77 +1507,35 @@
             </a:pPr>
             <a:r>
               <a:rPr/>
-              <a:t>Unfashionable and immediately useful - handout section 3.</a:t>
-            </a:r>
-          </a:p>
-          <a:p>
-            <a:pPr lvl="0" indent="0" marL="0">
-              <a:buNone/>
-            </a:pPr>
-          </a:p>
-          <a:p>
-            <a:pPr lvl="0" indent="0" marL="0">
-              <a:buNone/>
-            </a:pPr>
-            <a:r>
-              <a:rPr/>
-              <a:t>First point: nobody should train a classifier to detect whether a number is even. It sounds obvious and is violated constantly, usually because ML is the interesting option and a rule is boring.</a:t>
-            </a:r>
-          </a:p>
-          <a:p>
-            <a:pPr lvl="0" indent="0" marL="0">
-              <a:buNone/>
-            </a:pPr>
-          </a:p>
-          <a:p>
-            <a:pPr lvl="0" indent="0" marL="0">
-              <a:buNone/>
-            </a:pPr>
-            <a:r>
-              <a:rPr/>
-              <a:t>Second: a model learns the distribution it was trained on. Sample from one hospital, deploy in another, and the measured accuracy says very little.</a:t>
-            </a:r>
-          </a:p>
-          <a:p>
-            <a:pPr lvl="0" indent="0" marL="0">
-              <a:buNone/>
-            </a:pPr>
-          </a:p>
-          <a:p>
-            <a:pPr lvl="0" indent="0" marL="0">
-              <a:buNone/>
-            </a:pPr>
-            <a:r>
-              <a:rPr/>
-              <a:t>Third: learned models are wrong sometimes, in ways that are hard to predict and often hard to explain. If a mistake is unrecoverable and nobody reviews the output, the question is not whether accuracy is high enough but whether anyone can tell when it has failed.</a:t>
-            </a:r>
-          </a:p>
-          <a:p>
-            <a:pPr lvl="0" indent="0" marL="0">
-              <a:buNone/>
-            </a:pPr>
-          </a:p>
-          <a:p>
-            <a:pPr lvl="0" indent="0" marL="0">
-              <a:buNone/>
-            </a:pPr>
-            <a:r>
-              <a:rPr/>
-              <a:t>Fourth: a model is not neutral because it is mathematical. It is a compressed summary of the decisions in its training data. We return to this at the end of the lesson.</a:t>
-            </a:r>
-          </a:p>
-          <a:p>
-            <a:pPr lvl="0" indent="0" marL="0">
-              <a:buNone/>
-            </a:pPr>
-          </a:p>
-          <a:p>
-            <a:pPr lvl="0" indent="0" marL="0">
-              <a:buNone/>
-            </a:pPr>
-            <a:r>
-              <a:rPr/>
-              <a:t>Fifth: often a threshold on one variable solves 90% of the problem, is understandable by everyone, and needs no maintenance. Establishing baselines - step 4 of the workflow - is partly how you discover this before building something complicated.</a:t>
+              <a:t>Three fits to identical points. Left: a straight line cannot follow the curve, so it is wrong everywhere in the same way - high bias, poor on training AND test data. Right: degree-18 passes through nearly every point and oscillates wildly between them - it will be badly wrong on anything new.</a:t>
+            </a:r>
+          </a:p>
+          <a:p>
+            <a:pPr lvl="0" indent="0" marL="0">
+              <a:buNone/>
+            </a:pPr>
+          </a:p>
+          <a:p>
+            <a:pPr lvl="0" indent="0" marL="0">
+              <a:buNone/>
+            </a:pPr>
+            <a:r>
+              <a:rPr/>
+              <a:t>Ask which one they would choose without seeing the dashed line. That is the real situation: the true pattern is never visible, only the sample.</a:t>
+            </a:r>
+          </a:p>
+          <a:p>
+            <a:pPr lvl="0" indent="0" marL="0">
+              <a:buNone/>
+            </a:pPr>
+          </a:p>
+          <a:p>
+            <a:pPr lvl="0" indent="0" marL="0">
+              <a:buNone/>
+            </a:pPr>
+            <a:r>
+              <a:rPr/>
+              <a:t>Point out the trap in the right-hand panel - it has the LOWEST training error of the three. If you selected a model by training error you would pick it every time. That is precisely why we hold data out.</a:t>
             </a:r>
           </a:p>
         </p:txBody>
@@ -1708,21 +1617,91 @@
             </a:pPr>
             <a:r>
               <a:rPr/>
-              <a:t>Open the history section with the whole arc visible, then walk the individual moments. Resources/history_of_ai.md has the full version with primary sources - tell them it is worth an hour and is not examinable in itself.</a:t>
-            </a:r>
-          </a:p>
-          <a:p>
-            <a:pPr lvl="0" indent="0" marL="0">
-              <a:buNone/>
-            </a:pPr>
-          </a:p>
-          <a:p>
-            <a:pPr lvl="0" indent="0" marL="0">
-              <a:buNone/>
-            </a:pPr>
-            <a:r>
-              <a:rPr/>
-              <a:t>The two grey bands are the AI winters. Point at them now and say the question for the next ten minutes is what caused them, because the answer is not “the technology did not work”.</a:t>
+              <a:t>Say clearly: this is not bureaucratic caution, and give the reason rather than the instruction. Handout sections 2.3 to 2.5 carry the full argument.</a:t>
+            </a:r>
+          </a:p>
+          <a:p>
+            <a:pPr lvl="0" indent="0" marL="0">
+              <a:buNone/>
+            </a:pPr>
+          </a:p>
+          <a:p>
+            <a:pPr lvl="0" indent="0" marL="0">
+              <a:buNone/>
+            </a:pPr>
+            <a:r>
+              <a:rPr/>
+              <a:t>The difficulty is not that a sample is small. It is that if the same data both CHOOSES the model and JUDGES it, the judgement stops being an unbiased estimate. The analogy that works: writing the exam questions after reading the students’ answers. Nobody cheated - you let the answers influence the question.</a:t>
+            </a:r>
+          </a:p>
+          <a:p>
+            <a:pPr lvl="0" indent="0" marL="0">
+              <a:buNone/>
+            </a:pPr>
+          </a:p>
+          <a:p>
+            <a:pPr lvl="0" indent="0" marL="0">
+              <a:buNone/>
+            </a:pPr>
+            <a:r>
+              <a:rPr/>
+              <a:t>Why a held-out set repairs it: if the test set played no part in choosing f, it stays independent of f, and the error measured on it is an unbiased estimate of the expected risk - the quantity we just said was not computable. Worth putting on the board.</a:t>
+            </a:r>
+          </a:p>
+          <a:p>
+            <a:pPr lvl="0" indent="0" marL="0">
+              <a:buNone/>
+            </a:pPr>
+          </a:p>
+          <a:p>
+            <a:pPr lvl="0" indent="0" marL="0">
+              <a:buNone/>
+            </a:pPr>
+            <a:r>
+              <a:rPr/>
+              <a:t>Stress what that argument depends on: the INDEPENDENCE of the test set, not its size or its proportion. The moment those rows influence any decision - a mean for scaling, a ranking for feature selection, a comparison between models - the independence breaks and the estimate is optimistic by an unknown amount. That is why the rule is “nothing is learned before the split” rather than “keep some data aside”.</a:t>
+            </a:r>
+          </a:p>
+          <a:p>
+            <a:pPr lvl="0" indent="0" marL="0">
+              <a:buNone/>
+            </a:pPr>
+          </a:p>
+          <a:p>
+            <a:pPr lvl="0" indent="0" marL="0">
+              <a:buNone/>
+            </a:pPr>
+            <a:r>
+              <a:rPr/>
+              <a:t>Warn them we will break exactly that independence later today and watch 77% accuracy appear out of coin-flip labels.</a:t>
+            </a:r>
+          </a:p>
+          <a:p>
+            <a:pPr lvl="0" indent="0" marL="0">
+              <a:buNone/>
+            </a:pPr>
+          </a:p>
+          <a:p>
+            <a:pPr lvl="0" indent="0" marL="0">
+              <a:buNone/>
+            </a:pPr>
+            <a:r>
+              <a:rPr/>
+              <a:t>If someone asks “how much do we hold out?” - typically 20-30%, and the trade-off is real in both directions: a bigger test set gives a more stable estimate (the standard error falls as one over root n), a bigger training set gives a better model. Give them the concrete number from notebook 01: 143 test examples at 0.986 accuracy carries a standard error of about one percentage point, so the third decimal place is noise. With a few hundred examples both sides hurt at once, which is what cross-validation exists for - lesson 5.</a:t>
+            </a:r>
+          </a:p>
+          <a:p>
+            <a:pPr lvl="0" indent="0" marL="0">
+              <a:buNone/>
+            </a:pPr>
+          </a:p>
+          <a:p>
+            <a:pPr lvl="0" indent="0" marL="0">
+              <a:buNone/>
+            </a:pPr>
+            <a:r>
+              <a:rPr/>
+              <a:t>If someone asks “what if I try ten models and report the best?” - they have just selected using the test set, and the number is optimistic again. That is the bridge to the validation set, and to lesson 5. Today we need only train and test because we make no choices: one model, no tuning.</a:t>
             </a:r>
           </a:p>
         </p:txBody>
@@ -1804,49 +1783,77 @@
             </a:pPr>
             <a:r>
               <a:rPr/>
-              <a:t>A neurophysiologist and a logician. Their claim was philosophical as much as technical: thought might be computation. They showed networks of such units can compute any logical proposition.</a:t>
-            </a:r>
-          </a:p>
-          <a:p>
-            <a:pPr lvl="0" indent="0" marL="0">
-              <a:buNone/>
-            </a:pPr>
-          </a:p>
-          <a:p>
-            <a:pPr lvl="0" indent="0" marL="0">
-              <a:buNone/>
-            </a:pPr>
-            <a:r>
-              <a:rPr/>
-              <a:t>Weights were set by hand - nothing learned yet. That comes in 1957.</a:t>
-            </a:r>
-          </a:p>
-          <a:p>
-            <a:pPr lvl="0" indent="0" marL="0">
-              <a:buNone/>
-            </a:pPr>
-          </a:p>
-          <a:p>
-            <a:pPr lvl="0" indent="0" marL="0">
-              <a:buNone/>
-            </a:pPr>
-            <a:r>
-              <a:rPr/>
-              <a:t>Tell them the unit in lesson 9 is this unit with a smoother threshold. The history is not decoration; it is the same objects under different names.</a:t>
-            </a:r>
-          </a:p>
-          <a:p>
-            <a:pPr lvl="0" indent="0" marL="0">
-              <a:buNone/>
-            </a:pPr>
-          </a:p>
-          <a:p>
-            <a:pPr lvl="0" indent="0" marL="0">
-              <a:buNone/>
-            </a:pPr>
-            <a:r>
-              <a:rPr/>
-              <a:t>Walk the diagram: inputs, a weight on each, a sum, and a hard threshold. Then point at the right-hand panel - the step function is what makes it all-or-nothing, and it is exactly what gets replaced by a smooth sigmoid in lesson 4 and by ReLU in lesson 9. Same object, softened, so that it becomes differentiable and therefore trainable.</a:t>
+              <a:t>Unfashionable and immediately useful - handout section 3.</a:t>
+            </a:r>
+          </a:p>
+          <a:p>
+            <a:pPr lvl="0" indent="0" marL="0">
+              <a:buNone/>
+            </a:pPr>
+          </a:p>
+          <a:p>
+            <a:pPr lvl="0" indent="0" marL="0">
+              <a:buNone/>
+            </a:pPr>
+            <a:r>
+              <a:rPr/>
+              <a:t>First point: nobody should train a classifier to detect whether a number is even. It sounds obvious and is violated constantly, usually because ML is the interesting option and a rule is boring.</a:t>
+            </a:r>
+          </a:p>
+          <a:p>
+            <a:pPr lvl="0" indent="0" marL="0">
+              <a:buNone/>
+            </a:pPr>
+          </a:p>
+          <a:p>
+            <a:pPr lvl="0" indent="0" marL="0">
+              <a:buNone/>
+            </a:pPr>
+            <a:r>
+              <a:rPr/>
+              <a:t>Second: a model learns the distribution it was trained on. Sample from one hospital, deploy in another, and the measured accuracy says very little.</a:t>
+            </a:r>
+          </a:p>
+          <a:p>
+            <a:pPr lvl="0" indent="0" marL="0">
+              <a:buNone/>
+            </a:pPr>
+          </a:p>
+          <a:p>
+            <a:pPr lvl="0" indent="0" marL="0">
+              <a:buNone/>
+            </a:pPr>
+            <a:r>
+              <a:rPr/>
+              <a:t>Third: learned models are wrong sometimes, in ways that are hard to predict and often hard to explain. If a mistake is unrecoverable and nobody reviews the output, the question is not whether accuracy is high enough but whether anyone can tell when it has failed.</a:t>
+            </a:r>
+          </a:p>
+          <a:p>
+            <a:pPr lvl="0" indent="0" marL="0">
+              <a:buNone/>
+            </a:pPr>
+          </a:p>
+          <a:p>
+            <a:pPr lvl="0" indent="0" marL="0">
+              <a:buNone/>
+            </a:pPr>
+            <a:r>
+              <a:rPr/>
+              <a:t>Fourth: a model is not neutral because it is mathematical. It is a compressed summary of the decisions in its training data. We return to this at the end of the lesson.</a:t>
+            </a:r>
+          </a:p>
+          <a:p>
+            <a:pPr lvl="0" indent="0" marL="0">
+              <a:buNone/>
+            </a:pPr>
+          </a:p>
+          <a:p>
+            <a:pPr lvl="0" indent="0" marL="0">
+              <a:buNone/>
+            </a:pPr>
+            <a:r>
+              <a:rPr/>
+              <a:t>Fifth: often a threshold on one variable solves 90% of the problem, is understandable by everyone, and needs no maintenance. Establishing baselines - step 4 of the workflow - is partly how you discover this before building something complicated.</a:t>
             </a:r>
           </a:p>
         </p:txBody>
@@ -2038,49 +2045,21 @@
             </a:pPr>
             <a:r>
               <a:rPr/>
-              <a:t>Highlight the MOVE rather than the test. Turing opens by declaring the original question too meaningless to deserve discussion, and substitutes an operational one.</a:t>
-            </a:r>
-          </a:p>
-          <a:p>
-            <a:pPr lvl="0" indent="0" marL="0">
-              <a:buNone/>
-            </a:pPr>
-          </a:p>
-          <a:p>
-            <a:pPr lvl="0" indent="0" marL="0">
-              <a:buNone/>
-            </a:pPr>
-            <a:r>
-              <a:rPr/>
-              <a:t>That is exactly what they do every time they choose a metric: replace something that cannot be measured - “is this model good?” - with something that can. It carries the same obligation, to stay aware of the gap between the proxy and the thing itself. The whole of lesson 4 is about that gap for classification.</a:t>
-            </a:r>
-          </a:p>
-          <a:p>
-            <a:pPr lvl="0" indent="0" marL="0">
-              <a:buNone/>
-            </a:pPr>
-          </a:p>
-          <a:p>
-            <a:pPr lvl="0" indent="0" marL="0">
-              <a:buNone/>
-            </a:pPr>
-            <a:r>
-              <a:rPr/>
-              <a:t>Recommend the paper. It is readable, funny, and answers nine objections including “a machine can only do what it is told” - his reply, that this assumes we can foresee the consequences of what we tell it, has aged extremely well.</a:t>
-            </a:r>
-          </a:p>
-          <a:p>
-            <a:pPr lvl="0" indent="0" marL="0">
-              <a:buNone/>
-            </a:pPr>
-          </a:p>
-          <a:p>
-            <a:pPr lvl="0" indent="0" marL="0">
-              <a:buNone/>
-            </a:pPr>
-            <a:r>
-              <a:rPr/>
-              <a:t>The screen is the whole design: it removes appearance, voice and everything except the behaviour being tested. Ask the room what this test does NOT measure - understanding, consciousness, correctness - and note that Turing knew, and argued the substitution was worth making anyway.</a:t>
+              <a:t>Open the history section with the whole arc visible, then walk the individual moments. Resources/history_of_ai.md has the full version with primary sources - tell them it is worth an hour and is not examinable in itself.</a:t>
+            </a:r>
+          </a:p>
+          <a:p>
+            <a:pPr lvl="0" indent="0" marL="0">
+              <a:buNone/>
+            </a:pPr>
+          </a:p>
+          <a:p>
+            <a:pPr lvl="0" indent="0" marL="0">
+              <a:buNone/>
+            </a:pPr>
+            <a:r>
+              <a:rPr/>
+              <a:t>The two grey bands are the AI winters. Point at them now and say the question for the next ten minutes is what caused them, because the answer is not “the technology did not work”.</a:t>
             </a:r>
           </a:p>
         </p:txBody>
@@ -2162,35 +2141,49 @@
             </a:pPr>
             <a:r>
               <a:rPr/>
-              <a:t>Let the room react to “two months”. Seventy years later the problem is open.</a:t>
-            </a:r>
-          </a:p>
-          <a:p>
-            <a:pPr lvl="0" indent="0" marL="0">
-              <a:buNone/>
-            </a:pPr>
-          </a:p>
-          <a:p>
-            <a:pPr lvl="0" indent="0" marL="0">
-              <a:buNone/>
-            </a:pPr>
-            <a:r>
-              <a:rPr/>
-              <a:t>McCarthy, Minsky, Shannon and Rochester convened it. The optimism is not incidental - it is present at the field’s naming and it recurs on a cycle, which is the argument of this whole section.</a:t>
-            </a:r>
-          </a:p>
-          <a:p>
-            <a:pPr lvl="0" indent="0" marL="0">
-              <a:buNone/>
-            </a:pPr>
-          </a:p>
-          <a:p>
-            <a:pPr lvl="0" indent="0" marL="0">
-              <a:buNone/>
-            </a:pPr>
-            <a:r>
-              <a:rPr/>
-              <a:t>These are the seven topics from the actual proposal. Read two or three aloud - ‘self-improvement’, ‘randomness and creativity’ - and let the room judge how much of the list is settled. Then note that the proposal’s authors expected substantial progress on all of it in one summer.</a:t>
+              <a:t>A neurophysiologist and a logician. Their claim was philosophical as much as technical: thought might be computation. They showed networks of such units can compute any logical proposition.</a:t>
+            </a:r>
+          </a:p>
+          <a:p>
+            <a:pPr lvl="0" indent="0" marL="0">
+              <a:buNone/>
+            </a:pPr>
+          </a:p>
+          <a:p>
+            <a:pPr lvl="0" indent="0" marL="0">
+              <a:buNone/>
+            </a:pPr>
+            <a:r>
+              <a:rPr/>
+              <a:t>Weights were set by hand - nothing learned yet. That comes in 1957.</a:t>
+            </a:r>
+          </a:p>
+          <a:p>
+            <a:pPr lvl="0" indent="0" marL="0">
+              <a:buNone/>
+            </a:pPr>
+          </a:p>
+          <a:p>
+            <a:pPr lvl="0" indent="0" marL="0">
+              <a:buNone/>
+            </a:pPr>
+            <a:r>
+              <a:rPr/>
+              <a:t>Tell them the unit in lesson 9 is this unit with a smoother threshold. The history is not decoration; it is the same objects under different names.</a:t>
+            </a:r>
+          </a:p>
+          <a:p>
+            <a:pPr lvl="0" indent="0" marL="0">
+              <a:buNone/>
+            </a:pPr>
+          </a:p>
+          <a:p>
+            <a:pPr lvl="0" indent="0" marL="0">
+              <a:buNone/>
+            </a:pPr>
+            <a:r>
+              <a:rPr/>
+              <a:t>Walk the diagram: inputs, a weight on each, a sum, and a hard threshold. Then point at the right-hand panel - the step function is what makes it all-or-nothing, and it is exactly what gets replaced by a smooth sigmoid in lesson 4 and by ReLU in lesson 9. Same object, softened, so that it becomes differentiable and therefore trainable.</a:t>
             </a:r>
           </a:p>
         </p:txBody>
@@ -2272,49 +2265,49 @@
             </a:pPr>
             <a:r>
               <a:rPr/>
-              <a:t>The first machine that learns. Physical hardware - photocells, potentiometers, motors.</a:t>
-            </a:r>
-          </a:p>
-          <a:p>
-            <a:pPr lvl="0" indent="0" marL="0">
-              <a:buNone/>
-            </a:pPr>
-          </a:p>
-          <a:p>
-            <a:pPr lvl="0" indent="0" marL="0">
-              <a:buNone/>
-            </a:pPr>
-            <a:r>
-              <a:rPr/>
-              <a:t>Stress the CONDITION on the theorem: “if linearly separable”. The theorem is true and that clause is carrying enormous weight, as 1969 will show.</a:t>
-            </a:r>
-          </a:p>
-          <a:p>
-            <a:pPr lvl="0" indent="0" marL="0">
-              <a:buNone/>
-            </a:pPr>
-          </a:p>
-          <a:p>
-            <a:pPr lvl="0" indent="0" marL="0">
-              <a:buNone/>
-            </a:pPr>
-            <a:r>
-              <a:rPr/>
-              <a:t>Then the contrast: the New York Times reported the Navy expected a machine that would walk, talk, see, write and reproduce itself. Same year, same machine. Ask them which of those two statements a careful reader could have checked.</a:t>
-            </a:r>
-          </a:p>
-          <a:p>
-            <a:pPr lvl="0" indent="0" marL="0">
-              <a:buNone/>
-            </a:pPr>
-          </a:p>
-          <a:p>
-            <a:pPr lvl="0" indent="0" marL="0">
-              <a:buNone/>
-            </a:pPr>
-            <a:r>
-              <a:rPr/>
-              <a:t>The faded lines are earlier states of the boundary. Every time the machine misclassified an example it nudged the weights, and the line moved. That is the whole idea: the model is corrected by its own mistakes, which is still what gradient descent does in lesson 3 - just with a smoother update rule.</a:t>
+              <a:t>Highlight the MOVE rather than the test. Turing opens by declaring the original question too meaningless to deserve discussion, and substitutes an operational one.</a:t>
+            </a:r>
+          </a:p>
+          <a:p>
+            <a:pPr lvl="0" indent="0" marL="0">
+              <a:buNone/>
+            </a:pPr>
+          </a:p>
+          <a:p>
+            <a:pPr lvl="0" indent="0" marL="0">
+              <a:buNone/>
+            </a:pPr>
+            <a:r>
+              <a:rPr/>
+              <a:t>That is exactly what they do every time they choose a metric: replace something that cannot be measured - “is this model good?” - with something that can. It carries the same obligation, to stay aware of the gap between the proxy and the thing itself. The whole of lesson 4 is about that gap for classification.</a:t>
+            </a:r>
+          </a:p>
+          <a:p>
+            <a:pPr lvl="0" indent="0" marL="0">
+              <a:buNone/>
+            </a:pPr>
+          </a:p>
+          <a:p>
+            <a:pPr lvl="0" indent="0" marL="0">
+              <a:buNone/>
+            </a:pPr>
+            <a:r>
+              <a:rPr/>
+              <a:t>Recommend the paper. It is readable, funny, and answers nine objections including “a machine can only do what it is told” - his reply, that this assumes we can foresee the consequences of what we tell it, has aged extremely well.</a:t>
+            </a:r>
+          </a:p>
+          <a:p>
+            <a:pPr lvl="0" indent="0" marL="0">
+              <a:buNone/>
+            </a:pPr>
+          </a:p>
+          <a:p>
+            <a:pPr lvl="0" indent="0" marL="0">
+              <a:buNone/>
+            </a:pPr>
+            <a:r>
+              <a:rPr/>
+              <a:t>The screen is the whole design: it removes appearance, voice and everything except the behaviour being tested. Ask the room what this test does NOT measure - understanding, consciousness, correctness - and note that Turing knew, and argued the substitution was worth making anyway.</a:t>
             </a:r>
           </a:p>
         </p:txBody>
@@ -2396,63 +2389,35 @@
             </a:pPr>
             <a:r>
               <a:rPr/>
-              <a:t>Draw XOR on the board - four points, alternating labels - and let them see that no single straight line separates them. Takes thirty seconds and lands permanently.</a:t>
-            </a:r>
-          </a:p>
-          <a:p>
-            <a:pPr lvl="0" indent="0" marL="0">
-              <a:buNone/>
-            </a:pPr>
-          </a:p>
-          <a:p>
-            <a:pPr lvl="0" indent="0" marL="0">
-              <a:buNone/>
-            </a:pPr>
-            <a:r>
-              <a:rPr/>
-              <a:t>Then the key point: the result applies to ONE LAYER. Multi-layer networks were already known to be more expressive; what was missing was a way to train them. That distinction was lost in the retelling, funding collapsed, and neural network research became close to unpublishable for a decade.</a:t>
-            </a:r>
-          </a:p>
-          <a:p>
-            <a:pPr lvl="0" indent="0" marL="0">
-              <a:buNone/>
-            </a:pPr>
-          </a:p>
-          <a:p>
-            <a:pPr lvl="0" indent="0" marL="0">
-              <a:buNone/>
-            </a:pPr>
-            <a:r>
-              <a:rPr/>
-              <a:t>In lesson 9 a hidden layer disposes of XOR in four lines of Keras. Fifteen years of lost time for a limitation that a correct reading would have scoped much more narrowly.</a:t>
-            </a:r>
-          </a:p>
-          <a:p>
-            <a:pPr lvl="0" indent="0" marL="0">
-              <a:buNone/>
-            </a:pPr>
-          </a:p>
-          <a:p>
-            <a:pPr lvl="0" indent="0" marL="0">
-              <a:buNone/>
-            </a:pPr>
-            <a:r>
-              <a:rPr/>
-              <a:t>The transferable lesson: a correct result about a restricted case was received as a verdict on the whole approach. That failure mode is alive and well in how ML results get reported today.</a:t>
-            </a:r>
-          </a:p>
-          <a:p>
-            <a:pPr lvl="0" indent="0" marL="0">
-              <a:buNone/>
-            </a:pPr>
-          </a:p>
-          <a:p>
-            <a:pPr lvl="0" indent="0" marL="0">
-              <a:buNone/>
-            </a:pPr>
-            <a:r>
-              <a:rPr/>
-              <a:t>Use the figure instead of the board. AND on the left: one line, done. XOR on the right: the dashed lines are attempts, and each leaves a point on the wrong side. Ask them to try to find one that works before you move on - the impossibility is more convincing when they have looked for it themselves.</a:t>
+              <a:t>Let the room react to “two months”. Seventy years later the problem is open.</a:t>
+            </a:r>
+          </a:p>
+          <a:p>
+            <a:pPr lvl="0" indent="0" marL="0">
+              <a:buNone/>
+            </a:pPr>
+          </a:p>
+          <a:p>
+            <a:pPr lvl="0" indent="0" marL="0">
+              <a:buNone/>
+            </a:pPr>
+            <a:r>
+              <a:rPr/>
+              <a:t>McCarthy, Minsky, Shannon and Rochester convened it. The optimism is not incidental - it is present at the field’s naming and it recurs on a cycle, which is the argument of this whole section.</a:t>
+            </a:r>
+          </a:p>
+          <a:p>
+            <a:pPr lvl="0" indent="0" marL="0">
+              <a:buNone/>
+            </a:pPr>
+          </a:p>
+          <a:p>
+            <a:pPr lvl="0" indent="0" marL="0">
+              <a:buNone/>
+            </a:pPr>
+            <a:r>
+              <a:rPr/>
+              <a:t>These are the seven topics from the actual proposal. Read two or three aloud - ‘self-improvement’, ‘randomness and creativity’ - and let the room judge how much of the list is settled. Then note that the proposal’s authors expected substantial progress on all of it in one summer.</a:t>
             </a:r>
           </a:p>
         </p:txBody>
@@ -2534,49 +2499,49 @@
             </a:pPr>
             <a:r>
               <a:rPr/>
-              <a:t>Rumelhart, Hinton and Williams. Note the technique had been derived before - Linnainmaa 1970, Werbos 1974 - without taking hold. Ideas need context as much as correctness, which is a useful thing for a researcher to know.</a:t>
-            </a:r>
-          </a:p>
-          <a:p>
-            <a:pPr lvl="0" indent="0" marL="0">
-              <a:buNone/>
-            </a:pPr>
-          </a:p>
-          <a:p>
-            <a:pPr lvl="0" indent="0" marL="0">
-              <a:buNone/>
-            </a:pPr>
-            <a:r>
-              <a:rPr/>
-              <a:t>The second winter arrived in the early 1990s: networks were hard to train, needed more data than existed, and took too long on the hardware. Expert system companies collapsed as their products proved unmaintainable.</a:t>
-            </a:r>
-          </a:p>
-          <a:p>
-            <a:pPr lvl="0" indent="0" marL="0">
-              <a:buNone/>
-            </a:pPr>
-          </a:p>
-          <a:p>
-            <a:pPr lvl="0" indent="0" marL="0">
-              <a:buNone/>
-            </a:pPr>
-            <a:r>
-              <a:rPr/>
-              <a:t>Lesson 9 derives this algorithm.</a:t>
-            </a:r>
-          </a:p>
-          <a:p>
-            <a:pPr lvl="0" indent="0" marL="0">
-              <a:buNone/>
-            </a:pPr>
-          </a:p>
-          <a:p>
-            <a:pPr lvl="0" indent="0" marL="0">
-              <a:buNone/>
-            </a:pPr>
-            <a:r>
-              <a:rPr/>
-              <a:t>Two passes: forward to compute a prediction, backward to distribute the error across every weight, including the hidden ones. That second arrow is what was missing in 1969 - not expressiveness, but a way to assign blame to a unit that never sees the target directly. Lesson 9 derives it.</a:t>
+              <a:t>The first machine that learns. Physical hardware - photocells, potentiometers, motors.</a:t>
+            </a:r>
+          </a:p>
+          <a:p>
+            <a:pPr lvl="0" indent="0" marL="0">
+              <a:buNone/>
+            </a:pPr>
+          </a:p>
+          <a:p>
+            <a:pPr lvl="0" indent="0" marL="0">
+              <a:buNone/>
+            </a:pPr>
+            <a:r>
+              <a:rPr/>
+              <a:t>Stress the CONDITION on the theorem: “if linearly separable”. The theorem is true and that clause is carrying enormous weight, as 1969 will show.</a:t>
+            </a:r>
+          </a:p>
+          <a:p>
+            <a:pPr lvl="0" indent="0" marL="0">
+              <a:buNone/>
+            </a:pPr>
+          </a:p>
+          <a:p>
+            <a:pPr lvl="0" indent="0" marL="0">
+              <a:buNone/>
+            </a:pPr>
+            <a:r>
+              <a:rPr/>
+              <a:t>Then the contrast: the New York Times reported the Navy expected a machine that would walk, talk, see, write and reproduce itself. Same year, same machine. Ask them which of those two statements a careful reader could have checked.</a:t>
+            </a:r>
+          </a:p>
+          <a:p>
+            <a:pPr lvl="0" indent="0" marL="0">
+              <a:buNone/>
+            </a:pPr>
+          </a:p>
+          <a:p>
+            <a:pPr lvl="0" indent="0" marL="0">
+              <a:buNone/>
+            </a:pPr>
+            <a:r>
+              <a:rPr/>
+              <a:t>The faded lines are earlier states of the boundary. Every time the machine misclassified an example it nudged the weights, and the line moved. That is the whole idea: the model is corrected by its own mistakes, which is still what gradient descent does in lesson 3 - just with a smoother update rule.</a:t>
             </a:r>
           </a:p>
         </p:txBody>
@@ -2658,35 +2623,63 @@
             </a:pPr>
             <a:r>
               <a:rPr/>
-              <a:t>Say that most of this course lives here, and it is where the reliable tools come from. SVMs arrived with theory explaining WHY they generalise. Random forests and boosting won competitions for a decade. The bias-variance decomposition and cross-validation became standard practice.</a:t>
-            </a:r>
-          </a:p>
-          <a:p>
-            <a:pPr lvl="0" indent="0" marL="0">
-              <a:buNone/>
-            </a:pPr>
-          </a:p>
-          <a:p>
-            <a:pPr lvl="0" indent="0" marL="0">
-              <a:buNone/>
-            </a:pPr>
-            <a:r>
-              <a:rPr/>
-              <a:t>It is unglamorous and it is what actually gets deployed. Lessons 5, 6 and 7 are this period, and lesson 5 in particular is its central contribution.</a:t>
-            </a:r>
-          </a:p>
-          <a:p>
-            <a:pPr lvl="0" indent="0" marL="0">
-              <a:buNone/>
-            </a:pPr>
-          </a:p>
-          <a:p>
-            <a:pPr lvl="0" indent="0" marL="0">
-              <a:buNone/>
-            </a:pPr>
-            <a:r>
-              <a:rPr/>
-              <a:t>The dotted line also separates the classes perfectly, and would score identically on this training data. The SVM picks the solid one - the boundary furthest from both classes. Ask which they would trust on a new point near the middle. That intuition is what the theory of the period made precise, and it is lesson 6.</a:t>
+              <a:t>Draw XOR on the board - four points, alternating labels - and let them see that no single straight line separates them. Takes thirty seconds and lands permanently.</a:t>
+            </a:r>
+          </a:p>
+          <a:p>
+            <a:pPr lvl="0" indent="0" marL="0">
+              <a:buNone/>
+            </a:pPr>
+          </a:p>
+          <a:p>
+            <a:pPr lvl="0" indent="0" marL="0">
+              <a:buNone/>
+            </a:pPr>
+            <a:r>
+              <a:rPr/>
+              <a:t>Then the key point: the result applies to ONE LAYER. Multi-layer networks were already known to be more expressive; what was missing was a way to train them. That distinction was lost in the retelling, funding collapsed, and neural network research became close to unpublishable for a decade.</a:t>
+            </a:r>
+          </a:p>
+          <a:p>
+            <a:pPr lvl="0" indent="0" marL="0">
+              <a:buNone/>
+            </a:pPr>
+          </a:p>
+          <a:p>
+            <a:pPr lvl="0" indent="0" marL="0">
+              <a:buNone/>
+            </a:pPr>
+            <a:r>
+              <a:rPr/>
+              <a:t>In lesson 9 a hidden layer disposes of XOR in four lines of Keras. Fifteen years of lost time for a limitation that a correct reading would have scoped much more narrowly.</a:t>
+            </a:r>
+          </a:p>
+          <a:p>
+            <a:pPr lvl="0" indent="0" marL="0">
+              <a:buNone/>
+            </a:pPr>
+          </a:p>
+          <a:p>
+            <a:pPr lvl="0" indent="0" marL="0">
+              <a:buNone/>
+            </a:pPr>
+            <a:r>
+              <a:rPr/>
+              <a:t>The transferable lesson: a correct result about a restricted case was received as a verdict on the whole approach. That failure mode is alive and well in how ML results get reported today.</a:t>
+            </a:r>
+          </a:p>
+          <a:p>
+            <a:pPr lvl="0" indent="0" marL="0">
+              <a:buNone/>
+            </a:pPr>
+          </a:p>
+          <a:p>
+            <a:pPr lvl="0" indent="0" marL="0">
+              <a:buNone/>
+            </a:pPr>
+            <a:r>
+              <a:rPr/>
+              <a:t>Use the figure instead of the board. AND on the left: one line, done. XOR on the right: the dashed lines are attempts, and each leaves a point on the wrong side. Ask them to try to find one that works before you move on - the impossibility is more convincing when they have looked for it themselves.</a:t>
             </a:r>
           </a:p>
         </p:txBody>
@@ -2768,63 +2761,49 @@
             </a:pPr>
             <a:r>
               <a:rPr/>
-              <a:t>The most important slide in the history section.</a:t>
-            </a:r>
-          </a:p>
-          <a:p>
-            <a:pPr lvl="0" indent="0" marL="0">
-              <a:buNone/>
-            </a:pPr>
-          </a:p>
-          <a:p>
-            <a:pPr lvl="0" indent="0" marL="0">
-              <a:buNone/>
-            </a:pPr>
-            <a:r>
-              <a:rPr/>
-              <a:t>What changed was DATA - ImageNet, 1.2 million labelled images, assembled over years - and COMPUTE, two consumer GPUs. Plus details that mattered: ReLU activations, dropout, augmentation.</a:t>
-            </a:r>
-          </a:p>
-          <a:p>
-            <a:pPr lvl="0" indent="0" marL="0">
-              <a:buNone/>
-            </a:pPr>
-          </a:p>
-          <a:p>
-            <a:pPr lvl="0" indent="0" marL="0">
-              <a:buNone/>
-            </a:pPr>
-            <a:r>
-              <a:rPr/>
-              <a:t>A conceptual advance would have been visible in 1989, when LeCun was already reading postal codes with convolutional networks. This was a scaling result.</a:t>
-            </a:r>
-          </a:p>
-          <a:p>
-            <a:pPr lvl="0" indent="0" marL="0">
-              <a:buNone/>
-            </a:pPr>
-          </a:p>
-          <a:p>
-            <a:pPr lvl="0" indent="0" marL="0">
-              <a:buNone/>
-            </a:pPr>
-            <a:r>
-              <a:rPr/>
-              <a:t>Saying so is not a criticism. It is the single most important fact about the last decade, and it licenses very different predictions than a conceptual breakthrough would.</a:t>
-            </a:r>
-          </a:p>
-          <a:p>
-            <a:pPr lvl="0" indent="0" marL="0">
-              <a:buNone/>
-            </a:pPr>
-          </a:p>
-          <a:p>
-            <a:pPr lvl="0" indent="0" marL="0">
-              <a:buNone/>
-            </a:pPr>
-            <a:r>
-              <a:rPr/>
-              <a:t>Read the bars left to right. Two ordinary years, then the drop, then everyone adopts the approach and the error keeps falling past human performance by 2015. Point out that the years after 2012 fell further than 2012 itself did - the story is not one heroic result, it is a field switching methods.</a:t>
+              <a:t>Rumelhart, Hinton and Williams. Note the technique had been derived before - Linnainmaa 1970, Werbos 1974 - without taking hold. Ideas need context as much as correctness, which is a useful thing for a researcher to know.</a:t>
+            </a:r>
+          </a:p>
+          <a:p>
+            <a:pPr lvl="0" indent="0" marL="0">
+              <a:buNone/>
+            </a:pPr>
+          </a:p>
+          <a:p>
+            <a:pPr lvl="0" indent="0" marL="0">
+              <a:buNone/>
+            </a:pPr>
+            <a:r>
+              <a:rPr/>
+              <a:t>The second winter arrived in the early 1990s: networks were hard to train, needed more data than existed, and took too long on the hardware. Expert system companies collapsed as their products proved unmaintainable.</a:t>
+            </a:r>
+          </a:p>
+          <a:p>
+            <a:pPr lvl="0" indent="0" marL="0">
+              <a:buNone/>
+            </a:pPr>
+          </a:p>
+          <a:p>
+            <a:pPr lvl="0" indent="0" marL="0">
+              <a:buNone/>
+            </a:pPr>
+            <a:r>
+              <a:rPr/>
+              <a:t>Lesson 9 derives this algorithm.</a:t>
+            </a:r>
+          </a:p>
+          <a:p>
+            <a:pPr lvl="0" indent="0" marL="0">
+              <a:buNone/>
+            </a:pPr>
+          </a:p>
+          <a:p>
+            <a:pPr lvl="0" indent="0" marL="0">
+              <a:buNone/>
+            </a:pPr>
+            <a:r>
+              <a:rPr/>
+              <a:t>Two passes: forward to compute a prediction, backward to distribute the error across every weight, including the hidden ones. That second arrow is what was missing in 1969 - not expressiveness, but a way to assign blame to a unit that never sees the target directly. Lesson 9 derives it.</a:t>
             </a:r>
           </a:p>
         </p:txBody>
@@ -2906,35 +2885,35 @@
             </a:pPr>
             <a:r>
               <a:rPr/>
-              <a:t>Leave the question marks and ask the room what belongs there. It usually produces a good discussion, and there is no answer you need to supply.</a:t>
-            </a:r>
-          </a:p>
-          <a:p>
-            <a:pPr lvl="0" indent="0" marL="0">
-              <a:buNone/>
-            </a:pPr>
-          </a:p>
-          <a:p>
-            <a:pPr lvl="0" indent="0" marL="0">
-              <a:buNone/>
-            </a:pPr>
-            <a:r>
-              <a:rPr/>
-              <a:t>Three things to draw out. First, distinguishing a demonstrated result from an extrapolated promise: Rosenblatt’s theorem was true, “it will reproduce itself” was not, and both appeared in the same press cycle. Second, asking what changed - idea or resources. Third, and this is the one they will use professionally: the winters were caused by the gap between claims and evidence, not by the technology being worthless. The perceptron was genuinely useful; it was oversold.</a:t>
-            </a:r>
-          </a:p>
-          <a:p>
-            <a:pPr lvl="0" indent="0" marL="0">
-              <a:buNone/>
-            </a:pPr>
-          </a:p>
-          <a:p>
-            <a:pPr lvl="0" indent="0" marL="0">
-              <a:buNone/>
-            </a:pPr>
-            <a:r>
-              <a:rPr/>
-              <a:t>Then make the connection explicit: the habit that prevents this is the same one we use to evaluate a model - state precisely what was measured, on what data, and what that does not establish.</a:t>
+              <a:t>Say that most of this course lives here, and it is where the reliable tools come from. SVMs arrived with theory explaining WHY they generalise. Random forests and boosting won competitions for a decade. The bias-variance decomposition and cross-validation became standard practice.</a:t>
+            </a:r>
+          </a:p>
+          <a:p>
+            <a:pPr lvl="0" indent="0" marL="0">
+              <a:buNone/>
+            </a:pPr>
+          </a:p>
+          <a:p>
+            <a:pPr lvl="0" indent="0" marL="0">
+              <a:buNone/>
+            </a:pPr>
+            <a:r>
+              <a:rPr/>
+              <a:t>It is unglamorous and it is what actually gets deployed. Lessons 5, 6 and 7 are this period, and lesson 5 in particular is its central contribution.</a:t>
+            </a:r>
+          </a:p>
+          <a:p>
+            <a:pPr lvl="0" indent="0" marL="0">
+              <a:buNone/>
+            </a:pPr>
+          </a:p>
+          <a:p>
+            <a:pPr lvl="0" indent="0" marL="0">
+              <a:buNone/>
+            </a:pPr>
+            <a:r>
+              <a:rPr/>
+              <a:t>The dotted line also separates the classes perfectly, and would score identically on this training data. The SVM picks the solid one - the boundary furthest from both classes. Ask which they would trust on a new point near the middle. That intuition is what the theory of the period made precise, and it is lesson 6.</a:t>
             </a:r>
           </a:p>
         </p:txBody>
@@ -3016,21 +2995,63 @@
             </a:pPr>
             <a:r>
               <a:rPr/>
-              <a:t>Correct the common misconception immediately, before it takes hold. It is not about which algorithm you use: the same estimator can serve more than one setting, and they will see exactly that in notebook 02 where the supervised regression and the self-supervised task run identical code.</a:t>
-            </a:r>
-          </a:p>
-          <a:p>
-            <a:pPr lvl="0" indent="0" marL="0">
-              <a:buNone/>
-            </a:pPr>
-          </a:p>
-          <a:p>
-            <a:pPr lvl="0" indent="0" marL="0">
-              <a:buNone/>
-            </a:pPr>
-            <a:r>
-              <a:rPr/>
-              <a:t>Handout section 5 has the full taxonomy.</a:t>
+              <a:t>The most important slide in the history section.</a:t>
+            </a:r>
+          </a:p>
+          <a:p>
+            <a:pPr lvl="0" indent="0" marL="0">
+              <a:buNone/>
+            </a:pPr>
+          </a:p>
+          <a:p>
+            <a:pPr lvl="0" indent="0" marL="0">
+              <a:buNone/>
+            </a:pPr>
+            <a:r>
+              <a:rPr/>
+              <a:t>What changed was DATA - ImageNet, 1.2 million labelled images, assembled over years - and COMPUTE, two consumer GPUs. Plus details that mattered: ReLU activations, dropout, augmentation.</a:t>
+            </a:r>
+          </a:p>
+          <a:p>
+            <a:pPr lvl="0" indent="0" marL="0">
+              <a:buNone/>
+            </a:pPr>
+          </a:p>
+          <a:p>
+            <a:pPr lvl="0" indent="0" marL="0">
+              <a:buNone/>
+            </a:pPr>
+            <a:r>
+              <a:rPr/>
+              <a:t>A conceptual advance would have been visible in 1989, when LeCun was already reading postal codes with convolutional networks. This was a scaling result.</a:t>
+            </a:r>
+          </a:p>
+          <a:p>
+            <a:pPr lvl="0" indent="0" marL="0">
+              <a:buNone/>
+            </a:pPr>
+          </a:p>
+          <a:p>
+            <a:pPr lvl="0" indent="0" marL="0">
+              <a:buNone/>
+            </a:pPr>
+            <a:r>
+              <a:rPr/>
+              <a:t>Saying so is not a criticism. It is the single most important fact about the last decade, and it licenses very different predictions than a conceptual breakthrough would.</a:t>
+            </a:r>
+          </a:p>
+          <a:p>
+            <a:pPr lvl="0" indent="0" marL="0">
+              <a:buNone/>
+            </a:pPr>
+          </a:p>
+          <a:p>
+            <a:pPr lvl="0" indent="0" marL="0">
+              <a:buNone/>
+            </a:pPr>
+            <a:r>
+              <a:rPr/>
+              <a:t>Read the bars left to right. Two ordinary years, then the drop, then everyone adopts the approach and the error keeps falling past human performance by 2015. Point out that the years after 2012 fell further than 2012 itself did - the story is not one heroic result, it is a field switching methods.</a:t>
             </a:r>
           </a:p>
         </p:txBody>
@@ -3112,35 +3133,35 @@
             </a:pPr>
             <a:r>
               <a:rPr/>
-              <a:t>Lessons 3, 4, 6 and 7 are all supervised, so this is most of the course.</a:t>
-            </a:r>
-          </a:p>
-          <a:p>
-            <a:pPr lvl="0" indent="0" marL="0">
-              <a:buNone/>
-            </a:pPr>
-          </a:p>
-          <a:p>
-            <a:pPr lvl="0" indent="0" marL="0">
-              <a:buNone/>
-            </a:pPr>
-            <a:r>
-              <a:rPr/>
-              <a:t>Ask what the expensive part is. Someone will say the labels, and that is right: in practice labels - not algorithms, not compute - are what limits most real projects. Somebody has to produce them, correctly, in quantity, and for many problems that is expensive or simply impossible.</a:t>
-            </a:r>
-          </a:p>
-          <a:p>
-            <a:pPr lvl="0" indent="0" marL="0">
-              <a:buNone/>
-            </a:pPr>
-          </a:p>
-          <a:p>
-            <a:pPr lvl="0" indent="0" marL="0">
-              <a:buNone/>
-            </a:pPr>
-            <a:r>
-              <a:rPr/>
-              <a:t>Give the concrete example: ImageNet took years of human annotation, and it is the reason 2012 happened when it did rather than in 1995.</a:t>
+              <a:t>Leave the question marks and ask the room what belongs there. It usually produces a good discussion, and there is no answer you need to supply.</a:t>
+            </a:r>
+          </a:p>
+          <a:p>
+            <a:pPr lvl="0" indent="0" marL="0">
+              <a:buNone/>
+            </a:pPr>
+          </a:p>
+          <a:p>
+            <a:pPr lvl="0" indent="0" marL="0">
+              <a:buNone/>
+            </a:pPr>
+            <a:r>
+              <a:rPr/>
+              <a:t>Three things to draw out. First, distinguishing a demonstrated result from an extrapolated promise: Rosenblatt’s theorem was true, “it will reproduce itself” was not, and both appeared in the same press cycle. Second, asking what changed - idea or resources. Third, and this is the one they will use professionally: the winters were caused by the gap between claims and evidence, not by the technology being worthless. The perceptron was genuinely useful; it was oversold.</a:t>
+            </a:r>
+          </a:p>
+          <a:p>
+            <a:pPr lvl="0" indent="0" marL="0">
+              <a:buNone/>
+            </a:pPr>
+          </a:p>
+          <a:p>
+            <a:pPr lvl="0" indent="0" marL="0">
+              <a:buNone/>
+            </a:pPr>
+            <a:r>
+              <a:rPr/>
+              <a:t>Then make the connection explicit: the habit that prevents this is the same one we use to evaluate a model - state precisely what was measured, on what data, and what that does not establish.</a:t>
             </a:r>
           </a:p>
         </p:txBody>
@@ -3318,35 +3339,21 @@
             </a:pPr>
             <a:r>
               <a:rPr/>
-              <a:t>Lesson 8.</a:t>
-            </a:r>
-          </a:p>
-          <a:p>
-            <a:pPr lvl="0" indent="0" marL="0">
-              <a:buNone/>
-            </a:pPr>
-          </a:p>
-          <a:p>
-            <a:pPr lvl="0" indent="0" marL="0">
-              <a:buNone/>
-            </a:pPr>
-            <a:r>
-              <a:rPr/>
-              <a:t>Plant the difficulty now: there is no accuracy to report. The algorithm ALWAYS returns clusters, whether or not the data contains any groups. Whether they mean something is a judgement about the domain and cannot be delegated to a metric.</a:t>
-            </a:r>
-          </a:p>
-          <a:p>
-            <a:pPr lvl="0" indent="0" marL="0">
-              <a:buNone/>
-            </a:pPr>
-          </a:p>
-          <a:p>
-            <a:pPr lvl="0" indent="0" marL="0">
-              <a:buNone/>
-            </a:pPr>
-            <a:r>
-              <a:rPr/>
-              <a:t>This is genuinely harder than supervised learning to do well, which is the opposite of how it is usually taught - it looks easier because there is no labelling effort.</a:t>
+              <a:t>Correct the common misconception immediately, before it takes hold. It is not about which algorithm you use: the same estimator can serve more than one setting, and they will see exactly that in notebook 02 where the supervised regression and the self-supervised task run identical code.</a:t>
+            </a:r>
+          </a:p>
+          <a:p>
+            <a:pPr lvl="0" indent="0" marL="0">
+              <a:buNone/>
+            </a:pPr>
+          </a:p>
+          <a:p>
+            <a:pPr lvl="0" indent="0" marL="0">
+              <a:buNone/>
+            </a:pPr>
+            <a:r>
+              <a:rPr/>
+              <a:t>Handout section 5 has the full taxonomy.</a:t>
             </a:r>
           </a:p>
         </p:txBody>
@@ -3428,63 +3435,35 @@
             </a:pPr>
             <a:r>
               <a:rPr/>
-              <a:t>The one they will have heard about without a clean definition, so define it precisely.</a:t>
-            </a:r>
-          </a:p>
-          <a:p>
-            <a:pPr lvl="0" indent="0" marL="0">
-              <a:buNone/>
-            </a:pPr>
-          </a:p>
-          <a:p>
-            <a:pPr lvl="0" indent="0" marL="0">
-              <a:buNone/>
-            </a:pPr>
-            <a:r>
-              <a:rPr/>
-              <a:t>The reconstruction task is a PRETEXT: nobody wants a flavanoid predictor, which is what notebook 02 builds. The point is that solving it forces the model to represent how the parts of an input relate, and that representation transfers to tasks you do care about.</a:t>
-            </a:r>
-          </a:p>
-          <a:p>
-            <a:pPr lvl="0" indent="0" marL="0">
-              <a:buNone/>
-            </a:pPr>
-          </a:p>
-          <a:p>
-            <a:pPr lvl="0" indent="0" marL="0">
-              <a:buNone/>
-            </a:pPr>
-            <a:r>
-              <a:rPr/>
-              <a:t>Scale the idea up - hide a word in a sentence, hide a patch of an image - and it is how modern large models are trained. Free supervision is precisely why they scale: text and images exist in enormous quantities and nobody has to annotate them.</a:t>
-            </a:r>
-          </a:p>
-          <a:p>
-            <a:pPr lvl="0" indent="0" marL="0">
-              <a:buNone/>
-            </a:pPr>
-          </a:p>
-          <a:p>
-            <a:pPr lvl="0" indent="0" marL="0">
-              <a:buNone/>
-            </a:pPr>
-            <a:r>
-              <a:rPr/>
-              <a:t>This is the honest one-paragraph answer to “how does ChatGPT learn?”, and it is worth giving them, since they will be asked it at every family dinner.</a:t>
-            </a:r>
-          </a:p>
-          <a:p>
-            <a:pPr lvl="0" indent="0" marL="0">
-              <a:buNone/>
-            </a:pPr>
-          </a:p>
-          <a:p>
-            <a:pPr lvl="0" indent="0" marL="0">
-              <a:buNone/>
-            </a:pPr>
-            <a:r>
-              <a:rPr/>
-              <a:t>Walk it left to right: one column hidden, the rest used to predict it. Nobody labelled anything, yet there is a genuine target. Then scale the idea in their heads - hide a word in a sentence, a patch in an image - and they have the training principle behind every large model they have heard of.</a:t>
+              <a:t>Lessons 3, 4, 6 and 7 are all supervised, so this is most of the course.</a:t>
+            </a:r>
+          </a:p>
+          <a:p>
+            <a:pPr lvl="0" indent="0" marL="0">
+              <a:buNone/>
+            </a:pPr>
+          </a:p>
+          <a:p>
+            <a:pPr lvl="0" indent="0" marL="0">
+              <a:buNone/>
+            </a:pPr>
+            <a:r>
+              <a:rPr/>
+              <a:t>Ask what the expensive part is. Someone will say the labels, and that is right: in practice labels - not algorithms, not compute - are what limits most real projects. Somebody has to produce them, correctly, in quantity, and for many problems that is expensive or simply impossible.</a:t>
+            </a:r>
+          </a:p>
+          <a:p>
+            <a:pPr lvl="0" indent="0" marL="0">
+              <a:buNone/>
+            </a:pPr>
+          </a:p>
+          <a:p>
+            <a:pPr lvl="0" indent="0" marL="0">
+              <a:buNone/>
+            </a:pPr>
+            <a:r>
+              <a:rPr/>
+              <a:t>Give the concrete example: ImageNet took years of human annotation, and it is the reason 2012 happened when it did rather than in 1995.</a:t>
             </a:r>
           </a:p>
         </p:txBody>
@@ -3566,49 +3545,35 @@
             </a:pPr>
             <a:r>
               <a:rPr/>
-              <a:t>Work notebook 02 here, live. The same 178 wines appear in all three panels.</a:t>
-            </a:r>
-          </a:p>
-          <a:p>
-            <a:pPr lvl="0" indent="0" marL="0">
-              <a:buNone/>
-            </a:pPr>
-          </a:p>
-          <a:p>
-            <a:pPr lvl="0" indent="0" marL="0">
-              <a:buNone/>
-            </a:pPr>
-            <a:r>
-              <a:rPr/>
-              <a:t>Left: what the algorithm sees when there are no labels - just points in space. Middle: labels supplied by a person. Right: groups found by geometry alone.</a:t>
-            </a:r>
-          </a:p>
-          <a:p>
-            <a:pPr lvl="0" indent="0" marL="0">
-              <a:buNone/>
-            </a:pPr>
-          </a:p>
-          <a:p>
-            <a:pPr lvl="0" indent="0" marL="0">
-              <a:buNone/>
-            </a:pPr>
-            <a:r>
-              <a:rPr/>
-              <a:t>Point out that the cluster colours do not match the label colours. k-means numbers its groups arbitrarily, and without labels there is nothing to align to. That arbitrariness IS the point of the unsupervised setting.</a:t>
-            </a:r>
-          </a:p>
-          <a:p>
-            <a:pPr lvl="0" indent="0" marL="0">
-              <a:buNone/>
-            </a:pPr>
-          </a:p>
-          <a:p>
-            <a:pPr lvl="0" indent="0" marL="0">
-              <a:buNone/>
-            </a:pPr>
-            <a:r>
-              <a:rPr/>
-              <a:t>Warn them the strong agreement here - adjusted Rand index 0.897 - is a happy accident of this dataset, where the chemical groups really are geometrically separated. Do not expect it. In most real data, clustering finds structure that corresponds to nothing you care about.</a:t>
+              <a:t>Lesson 8.</a:t>
+            </a:r>
+          </a:p>
+          <a:p>
+            <a:pPr lvl="0" indent="0" marL="0">
+              <a:buNone/>
+            </a:pPr>
+          </a:p>
+          <a:p>
+            <a:pPr lvl="0" indent="0" marL="0">
+              <a:buNone/>
+            </a:pPr>
+            <a:r>
+              <a:rPr/>
+              <a:t>Plant the difficulty now: there is no accuracy to report. The algorithm ALWAYS returns clusters, whether or not the data contains any groups. Whether they mean something is a judgement about the domain and cannot be delegated to a metric.</a:t>
+            </a:r>
+          </a:p>
+          <a:p>
+            <a:pPr lvl="0" indent="0" marL="0">
+              <a:buNone/>
+            </a:pPr>
+          </a:p>
+          <a:p>
+            <a:pPr lvl="0" indent="0" marL="0">
+              <a:buNone/>
+            </a:pPr>
+            <a:r>
+              <a:rPr/>
+              <a:t>This is genuinely harder than supervised learning to do well, which is the opposite of how it is usually taught - it looks easier because there is no labelling effort.</a:t>
             </a:r>
           </a:p>
         </p:txBody>
@@ -3690,21 +3655,63 @@
             </a:pPr>
             <a:r>
               <a:rPr/>
-              <a:t>Read the cost column aloud: it explains why self-supervision dominates wherever data is abundant and annotation is not, and why supervised learning still wins whenever someone has already paid for good labels.</a:t>
-            </a:r>
-          </a:p>
-          <a:p>
-            <a:pPr lvl="0" indent="0" marL="0">
-              <a:buNone/>
-            </a:pPr>
-          </a:p>
-          <a:p>
-            <a:pPr lvl="0" indent="0" marL="0">
-              <a:buNone/>
-            </a:pPr>
-            <a:r>
-              <a:rPr/>
-              <a:t>Then read the right-hand column and flag the trap: in two cases out of three you cannot straightforwardly measure success at the thing you actually want. That is a much bigger practical problem than the choice of algorithm, and it is why unsupervised results are so often oversold.</a:t>
+              <a:t>The one they will have heard about without a clean definition, so define it precisely.</a:t>
+            </a:r>
+          </a:p>
+          <a:p>
+            <a:pPr lvl="0" indent="0" marL="0">
+              <a:buNone/>
+            </a:pPr>
+          </a:p>
+          <a:p>
+            <a:pPr lvl="0" indent="0" marL="0">
+              <a:buNone/>
+            </a:pPr>
+            <a:r>
+              <a:rPr/>
+              <a:t>The reconstruction task is a PRETEXT: nobody wants a flavanoid predictor, which is what notebook 02 builds. The point is that solving it forces the model to represent how the parts of an input relate, and that representation transfers to tasks you do care about.</a:t>
+            </a:r>
+          </a:p>
+          <a:p>
+            <a:pPr lvl="0" indent="0" marL="0">
+              <a:buNone/>
+            </a:pPr>
+          </a:p>
+          <a:p>
+            <a:pPr lvl="0" indent="0" marL="0">
+              <a:buNone/>
+            </a:pPr>
+            <a:r>
+              <a:rPr/>
+              <a:t>Scale the idea up - hide a word in a sentence, hide a patch of an image - and it is how modern large models are trained. Free supervision is precisely why they scale: text and images exist in enormous quantities and nobody has to annotate them.</a:t>
+            </a:r>
+          </a:p>
+          <a:p>
+            <a:pPr lvl="0" indent="0" marL="0">
+              <a:buNone/>
+            </a:pPr>
+          </a:p>
+          <a:p>
+            <a:pPr lvl="0" indent="0" marL="0">
+              <a:buNone/>
+            </a:pPr>
+            <a:r>
+              <a:rPr/>
+              <a:t>This is the honest one-paragraph answer to “how does ChatGPT learn?”, and it is worth giving them, since they will be asked it at every family dinner.</a:t>
+            </a:r>
+          </a:p>
+          <a:p>
+            <a:pPr lvl="0" indent="0" marL="0">
+              <a:buNone/>
+            </a:pPr>
+          </a:p>
+          <a:p>
+            <a:pPr lvl="0" indent="0" marL="0">
+              <a:buNone/>
+            </a:pPr>
+            <a:r>
+              <a:rPr/>
+              <a:t>Walk it left to right: one column hidden, the rest used to predict it. Nobody labelled anything, yet there is a genuine target. Then scale the idea in their heads - hide a word in a sentence, a patch in an image - and they have the training principle behind every large model they have heard of.</a:t>
             </a:r>
           </a:p>
         </p:txBody>
@@ -3786,35 +3793,49 @@
             </a:pPr>
             <a:r>
               <a:rPr/>
-              <a:t>Say the order is not a convention: several steps are only valid in this order, and step 3 is the one that cannot move - hence the colour.</a:t>
-            </a:r>
-          </a:p>
-          <a:p>
-            <a:pPr lvl="0" indent="0" marL="0">
-              <a:buNone/>
-            </a:pPr>
-          </a:p>
-          <a:p>
-            <a:pPr lvl="0" indent="0" marL="0">
-              <a:buNone/>
-            </a:pPr>
-            <a:r>
-              <a:rPr/>
-              <a:t>This is the map for notebook 01, which we now work through live. Tell them to open it and follow along rather than watch.</a:t>
-            </a:r>
-          </a:p>
-          <a:p>
-            <a:pPr lvl="0" indent="0" marL="0">
-              <a:buNone/>
-            </a:pPr>
-          </a:p>
-          <a:p>
-            <a:pPr lvl="0" indent="0" marL="0">
-              <a:buNone/>
-            </a:pPr>
-            <a:r>
-              <a:rPr/>
-              <a:t>Handout section 6 has each step in full. The two they will be tempted to skip are 1 and 4 - framing and baseline - and those are the two that make the difference between a result and a number.</a:t>
+              <a:t>Work notebook 02 here, live. The same 178 wines appear in all three panels.</a:t>
+            </a:r>
+          </a:p>
+          <a:p>
+            <a:pPr lvl="0" indent="0" marL="0">
+              <a:buNone/>
+            </a:pPr>
+          </a:p>
+          <a:p>
+            <a:pPr lvl="0" indent="0" marL="0">
+              <a:buNone/>
+            </a:pPr>
+            <a:r>
+              <a:rPr/>
+              <a:t>Left: what the algorithm sees when there are no labels - just points in space. Middle: labels supplied by a person. Right: groups found by geometry alone.</a:t>
+            </a:r>
+          </a:p>
+          <a:p>
+            <a:pPr lvl="0" indent="0" marL="0">
+              <a:buNone/>
+            </a:pPr>
+          </a:p>
+          <a:p>
+            <a:pPr lvl="0" indent="0" marL="0">
+              <a:buNone/>
+            </a:pPr>
+            <a:r>
+              <a:rPr/>
+              <a:t>Point out that the cluster colours do not match the label colours. k-means numbers its groups arbitrarily, and without labels there is nothing to align to. That arbitrariness IS the point of the unsupervised setting.</a:t>
+            </a:r>
+          </a:p>
+          <a:p>
+            <a:pPr lvl="0" indent="0" marL="0">
+              <a:buNone/>
+            </a:pPr>
+          </a:p>
+          <a:p>
+            <a:pPr lvl="0" indent="0" marL="0">
+              <a:buNone/>
+            </a:pPr>
+            <a:r>
+              <a:rPr/>
+              <a:t>Warn them the strong agreement here - adjusted Rand index 0.897 - is a happy accident of this dataset, where the chemical groups really are geometrically separated. Do not expect it. In most real data, clustering finds structure that corresponds to nothing you care about.</a:t>
             </a:r>
           </a:p>
         </p:txBody>
@@ -3896,63 +3917,21 @@
             </a:pPr>
             <a:r>
               <a:rPr/>
-              <a:t>The step everyone skips, and the one the exercise marks hardest.</a:t>
-            </a:r>
-          </a:p>
-          <a:p>
-            <a:pPr lvl="0" indent="0" marL="0">
-              <a:buNone/>
-            </a:pPr>
-          </a:p>
-          <a:p>
-            <a:pPr lvl="0" indent="0" marL="0">
-              <a:buNone/>
-            </a:pPr>
-            <a:r>
-              <a:rPr/>
-              <a:t>Our example: predicting whether a breast tumour is malignant from measurements of cell nuclei. A model here would be a screening aid, never a diagnosis - say that clearly, it matters.</a:t>
-            </a:r>
-          </a:p>
-          <a:p>
-            <a:pPr lvl="0" indent="0" marL="0">
-              <a:buNone/>
-            </a:pPr>
-          </a:p>
-          <a:p>
-            <a:pPr lvl="0" indent="0" marL="0">
-              <a:buNone/>
-            </a:pPr>
-            <a:r>
-              <a:rPr/>
-              <a:t>The two errors are not comparable. A false alarm costs anxiety and a follow-up test; a missed malignancy can cost a life. Ask the room which they would rather make, and let them answer before showing any metric.</a:t>
-            </a:r>
-          </a:p>
-          <a:p>
-            <a:pPr lvl="0" indent="0" marL="0">
-              <a:buNone/>
-            </a:pPr>
-          </a:p>
-          <a:p>
-            <a:pPr lvl="0" indent="0" marL="0">
-              <a:buNone/>
-            </a:pPr>
-            <a:r>
-              <a:rPr/>
-              <a:t>That answer determines the metric, and it must be fixed BEFORE seeing results. A metric chosen afterwards is a metric chosen to flatter - with enough candidates, one always looks good.</a:t>
-            </a:r>
-          </a:p>
-          <a:p>
-            <a:pPr lvl="0" indent="0" marL="0">
-              <a:buNone/>
-            </a:pPr>
-          </a:p>
-          <a:p>
-            <a:pPr lvl="0" indent="0" marL="0">
-              <a:buNone/>
-            </a:pPr>
-            <a:r>
-              <a:rPr/>
-              <a:t>Two of these cells are fine and two are not, and the two failures are not the same size. Accuracy adds them up as if they were. Ask which cell they would accept more of - and note that answering requires knowing who bears the cost, which is not a question about data.</a:t>
+              <a:t>Read the cost column aloud: it explains why self-supervision dominates wherever data is abundant and annotation is not, and why supervised learning still wins whenever someone has already paid for good labels.</a:t>
+            </a:r>
+          </a:p>
+          <a:p>
+            <a:pPr lvl="0" indent="0" marL="0">
+              <a:buNone/>
+            </a:pPr>
+          </a:p>
+          <a:p>
+            <a:pPr lvl="0" indent="0" marL="0">
+              <a:buNone/>
+            </a:pPr>
+            <a:r>
+              <a:rPr/>
+              <a:t>Then read the right-hand column and flag the trap: in two cases out of three you cannot straightforwardly measure success at the thing you actually want. That is a much bigger practical problem than the choice of algorithm, and it is why unsupervised results are so often oversold.</a:t>
             </a:r>
           </a:p>
         </p:txBody>
@@ -4034,35 +4013,35 @@
             </a:pPr>
             <a:r>
               <a:rPr/>
-              <a:t>569 samples, 30 features, 357 benign against 212 malignant.</a:t>
-            </a:r>
-          </a:p>
-          <a:p>
-            <a:pPr lvl="0" indent="0" marL="0">
-              <a:buNone/>
-            </a:pPr>
-          </a:p>
-          <a:p>
-            <a:pPr lvl="0" indent="0" marL="0">
-              <a:buNone/>
-            </a:pPr>
-            <a:r>
-              <a:rPr/>
-              <a:t>Get them to compute the consequence out loud: always answering “benign” is right 62.7% of the time. That number is the bar any real model has to clear, and it is why step 4 exists.</a:t>
-            </a:r>
-          </a:p>
-          <a:p>
-            <a:pPr lvl="0" indent="0" marL="0">
-              <a:buNone/>
-            </a:pPr>
-          </a:p>
-          <a:p>
-            <a:pPr lvl="0" indent="0" marL="0">
-              <a:buNone/>
-            </a:pPr>
-            <a:r>
-              <a:rPr/>
-              <a:t>Mild imbalance here. Later today we will see what happens at 99 to 1, where the same reasoning destroys accuracy as a metric entirely.</a:t>
+              <a:t>Say the order is not a convention: several steps are only valid in this order, and step 3 is the one that cannot move - hence the colour.</a:t>
+            </a:r>
+          </a:p>
+          <a:p>
+            <a:pPr lvl="0" indent="0" marL="0">
+              <a:buNone/>
+            </a:pPr>
+          </a:p>
+          <a:p>
+            <a:pPr lvl="0" indent="0" marL="0">
+              <a:buNone/>
+            </a:pPr>
+            <a:r>
+              <a:rPr/>
+              <a:t>This is the map for notebook 01, which we now work through live. Tell them to open it and follow along rather than watch.</a:t>
+            </a:r>
+          </a:p>
+          <a:p>
+            <a:pPr lvl="0" indent="0" marL="0">
+              <a:buNone/>
+            </a:pPr>
+          </a:p>
+          <a:p>
+            <a:pPr lvl="0" indent="0" marL="0">
+              <a:buNone/>
+            </a:pPr>
+            <a:r>
+              <a:rPr/>
+              <a:t>Handout section 6 has each step in full. The two they will be tempted to skip are 1 and 4 - framing and baseline - and those are the two that make the difference between a result and a number.</a:t>
             </a:r>
           </a:p>
         </p:txBody>
@@ -4144,63 +4123,63 @@
             </a:pPr>
             <a:r>
               <a:rPr/>
-              <a:t>Return to the risk_gap figure verbally - this slide is that argument made operational.</a:t>
-            </a:r>
-          </a:p>
-          <a:p>
-            <a:pPr lvl="0" indent="0" marL="0">
-              <a:buNone/>
-            </a:pPr>
-          </a:p>
-          <a:p>
-            <a:pPr lvl="0" indent="0" marL="0">
-              <a:buNone/>
-            </a:pPr>
-            <a:r>
-              <a:rPr/>
-              <a:t>The moment anything from the test rows influences a decision, even something as innocent as computing a mean for scaling, the test set stops being unseen and the number it gives you is optimistic.</a:t>
-            </a:r>
-          </a:p>
-          <a:p>
-            <a:pPr lvl="0" indent="0" marL="0">
-              <a:buNone/>
-            </a:pPr>
-          </a:p>
-          <a:p>
-            <a:pPr lvl="0" indent="0" marL="0">
-              <a:buNone/>
-            </a:pPr>
-            <a:r>
-              <a:rPr/>
-              <a:t>Mention stratify=y: it keeps the class proportions identical in both parts, so the test set is a fair miniature of the whole. Without it, on a small or imbalanced dataset, you can get a test set whose composition differs from the training set by chance.</a:t>
-            </a:r>
-          </a:p>
-          <a:p>
-            <a:pPr lvl="0" indent="0" marL="0">
-              <a:buNone/>
-            </a:pPr>
-          </a:p>
-          <a:p>
-            <a:pPr lvl="0" indent="0" marL="0">
-              <a:buNone/>
-            </a:pPr>
-            <a:r>
-              <a:rPr/>
-              <a:t>They will violate this deliberately in the third notebook and see what it costs.</a:t>
-            </a:r>
-          </a:p>
-          <a:p>
-            <a:pPr lvl="0" indent="0" marL="0">
-              <a:buNone/>
-            </a:pPr>
-          </a:p>
-          <a:p>
-            <a:pPr lvl="0" indent="0" marL="0">
-              <a:buNone/>
-            </a:pPr>
-            <a:r>
-              <a:rPr/>
-              <a:t>The caption under the test set is the whole discipline: touched once, at the very end. Say that every additional look spends some of its independence - if you test twenty variants and report the best, you have selected on the test set and the number is no longer honest.</a:t>
+              <a:t>The step everyone skips, and the one the exercise marks hardest.</a:t>
+            </a:r>
+          </a:p>
+          <a:p>
+            <a:pPr lvl="0" indent="0" marL="0">
+              <a:buNone/>
+            </a:pPr>
+          </a:p>
+          <a:p>
+            <a:pPr lvl="0" indent="0" marL="0">
+              <a:buNone/>
+            </a:pPr>
+            <a:r>
+              <a:rPr/>
+              <a:t>Our example: predicting whether a breast tumour is malignant from measurements of cell nuclei. A model here would be a screening aid, never a diagnosis - say that clearly, it matters.</a:t>
+            </a:r>
+          </a:p>
+          <a:p>
+            <a:pPr lvl="0" indent="0" marL="0">
+              <a:buNone/>
+            </a:pPr>
+          </a:p>
+          <a:p>
+            <a:pPr lvl="0" indent="0" marL="0">
+              <a:buNone/>
+            </a:pPr>
+            <a:r>
+              <a:rPr/>
+              <a:t>The two errors are not comparable. A false alarm costs anxiety and a follow-up test; a missed malignancy can cost a life. Ask the room which they would rather make, and let them answer before showing any metric.</a:t>
+            </a:r>
+          </a:p>
+          <a:p>
+            <a:pPr lvl="0" indent="0" marL="0">
+              <a:buNone/>
+            </a:pPr>
+          </a:p>
+          <a:p>
+            <a:pPr lvl="0" indent="0" marL="0">
+              <a:buNone/>
+            </a:pPr>
+            <a:r>
+              <a:rPr/>
+              <a:t>That answer determines the metric, and it must be fixed BEFORE seeing results. A metric chosen afterwards is a metric chosen to flatter - with enough candidates, one always looks good.</a:t>
+            </a:r>
+          </a:p>
+          <a:p>
+            <a:pPr lvl="0" indent="0" marL="0">
+              <a:buNone/>
+            </a:pPr>
+          </a:p>
+          <a:p>
+            <a:pPr lvl="0" indent="0" marL="0">
+              <a:buNone/>
+            </a:pPr>
+            <a:r>
+              <a:rPr/>
+              <a:t>Two of these cells are fine and two are not, and the two failures are not the same size. Accuracy adds them up as if they were. Ask which cell they would accept more of - and note that answering requires knowing who bears the cost, which is not a question about data.</a:t>
             </a:r>
           </a:p>
         </p:txBody>
@@ -4282,35 +4261,35 @@
             </a:pPr>
             <a:r>
               <a:rPr/>
-              <a:t>Without this, “96% accuracy” has no scale at all. With it, they can see whether the model is worth anything.</a:t>
-            </a:r>
-          </a:p>
-          <a:p>
-            <a:pPr lvl="0" indent="0" marL="0">
-              <a:buNone/>
-            </a:pPr>
-          </a:p>
-          <a:p>
-            <a:pPr lvl="0" indent="0" marL="0">
-              <a:buNone/>
-            </a:pPr>
-            <a:r>
-              <a:rPr/>
-              <a:t>DummyClassifier does this in two lines, and the exercise requires it.</a:t>
-            </a:r>
-          </a:p>
-          <a:p>
-            <a:pPr lvl="0" indent="0" marL="0">
-              <a:buNone/>
-            </a:pPr>
-          </a:p>
-          <a:p>
-            <a:pPr lvl="0" indent="0" marL="0">
-              <a:buNone/>
-            </a:pPr>
-            <a:r>
-              <a:rPr/>
-              <a:t>Foreshadow: on the imbalanced example later, the baseline will be unbeatable on accuracy and completely useless in practice. That is the lesson, not a curiosity - it is how you discover that accuracy is the wrong metric for your problem.</a:t>
+              <a:t>Two problems, the same confusion matrix, and opposite answers about which cell hurts.</a:t>
+            </a:r>
+          </a:p>
+          <a:p>
+            <a:pPr lvl="0" indent="0" marL="0">
+              <a:buNone/>
+            </a:pPr>
+          </a:p>
+          <a:p>
+            <a:pPr lvl="0" indent="0" marL="0">
+              <a:buNone/>
+            </a:pPr>
+            <a:r>
+              <a:rPr/>
+              <a:t>Ask the room before reading either side. Missing a malignant tumour versus raising a false alarm; blocking a legitimate email versus letting spam through. Nobody needs statistics to rank these, and that is the point - the ranking comes from the application, and it has to arrive before any modelling decision is made.</a:t>
+            </a:r>
+          </a:p>
+          <a:p>
+            <a:pPr lvl="0" indent="0" marL="0">
+              <a:buNone/>
+            </a:pPr>
+          </a:p>
+          <a:p>
+            <a:pPr lvl="0" indent="0" marL="0">
+              <a:buNone/>
+            </a:pPr>
+            <a:r>
+              <a:rPr/>
+              <a:t>Lesson 4 turns this into a threshold that can be computed. Today it is enough that they see the question is not a modelling question, and that answering it with accuracy answers it by accident.</a:t>
             </a:r>
           </a:p>
         </p:txBody>
@@ -4392,63 +4371,35 @@
             </a:pPr>
             <a:r>
               <a:rPr/>
-              <a:t>Explain WHY, not just what.</a:t>
-            </a:r>
-          </a:p>
-          <a:p>
-            <a:pPr lvl="0" indent="0" marL="0">
-              <a:buNone/>
-            </a:pPr>
-          </a:p>
-          <a:p>
-            <a:pPr lvl="0" indent="0" marL="0">
-              <a:buNone/>
-            </a:pPr>
-            <a:r>
-              <a:rPr/>
-              <a:t>StandardScaler LEARNS something - a mean and a standard deviation per feature. That makes it part of the model, not preparation of the data. Inside a pipeline it learns them from the training fold every time the pipeline is fitted, including inside each cross-validation fold in lesson 5.</a:t>
-            </a:r>
-          </a:p>
-          <a:p>
-            <a:pPr lvl="0" indent="0" marL="0">
-              <a:buNone/>
-            </a:pPr>
-          </a:p>
-          <a:p>
-            <a:pPr lvl="0" indent="0" marL="0">
-              <a:buNone/>
-            </a:pPr>
-            <a:r>
-              <a:rPr/>
-              <a:t>Write the two steps separately and one day you will scale using statistics computed over the whole dataset. Nothing warns you: no error, no exception, just a better number than you deserve.</a:t>
-            </a:r>
-          </a:p>
-          <a:p>
-            <a:pPr lvl="0" indent="0" marL="0">
-              <a:buNone/>
-            </a:pPr>
-          </a:p>
-          <a:p>
-            <a:pPr lvl="0" indent="0" marL="0">
-              <a:buNone/>
-            </a:pPr>
-            <a:r>
-              <a:rPr/>
-              <a:t>This is structure beating discipline, and it is the single most useful habit in the scikit-learn API.</a:t>
-            </a:r>
-          </a:p>
-          <a:p>
-            <a:pPr lvl="0" indent="0" marL="0">
-              <a:buNone/>
-            </a:pPr>
-          </a:p>
-          <a:p>
-            <a:pPr lvl="0" indent="0" marL="0">
-              <a:buNone/>
-            </a:pPr>
-            <a:r>
-              <a:rPr/>
-              <a:t>The top row is the mistake, and note where ‘split’ sits: after the scaling. The mean used to scale the training rows was computed with the test rows included. Nothing errors, nothing warns, and the score comes out slightly too good - which is the worst kind of bug, because there is nothing to debug.</a:t>
+              <a:t>569 samples, 30 features, 357 benign against 212 malignant.</a:t>
+            </a:r>
+          </a:p>
+          <a:p>
+            <a:pPr lvl="0" indent="0" marL="0">
+              <a:buNone/>
+            </a:pPr>
+          </a:p>
+          <a:p>
+            <a:pPr lvl="0" indent="0" marL="0">
+              <a:buNone/>
+            </a:pPr>
+            <a:r>
+              <a:rPr/>
+              <a:t>Get them to compute the consequence out loud: always answering “benign” is right 62.7% of the time. That number is the bar any real model has to clear, and it is why step 4 exists.</a:t>
+            </a:r>
+          </a:p>
+          <a:p>
+            <a:pPr lvl="0" indent="0" marL="0">
+              <a:buNone/>
+            </a:pPr>
+          </a:p>
+          <a:p>
+            <a:pPr lvl="0" indent="0" marL="0">
+              <a:buNone/>
+            </a:pPr>
+            <a:r>
+              <a:rPr/>
+              <a:t>Mild imbalance here. Later today we will see what happens at 99 to 1, where the same reasoning destroys accuracy as a metric entirely.</a:t>
             </a:r>
           </a:p>
         </p:txBody>
@@ -4640,21 +4591,63 @@
             </a:pPr>
             <a:r>
               <a:rPr/>
-              <a:t>Let “done?” hang for a few seconds. Someone will say no.</a:t>
-            </a:r>
-          </a:p>
-          <a:p>
-            <a:pPr lvl="0" indent="0" marL="0">
-              <a:buNone/>
-            </a:pPr>
-          </a:p>
-          <a:p>
-            <a:pPr lvl="0" indent="0" marL="0">
-              <a:buNone/>
-            </a:pPr>
-            <a:r>
-              <a:rPr/>
-              <a:t>If nobody does, ask what 0.986 does not tell them. Then move to the confusion matrix - this is the pivot of the entire lesson.</a:t>
+              <a:t>Return to the risk_gap figure verbally - this slide is that argument made operational.</a:t>
+            </a:r>
+          </a:p>
+          <a:p>
+            <a:pPr lvl="0" indent="0" marL="0">
+              <a:buNone/>
+            </a:pPr>
+          </a:p>
+          <a:p>
+            <a:pPr lvl="0" indent="0" marL="0">
+              <a:buNone/>
+            </a:pPr>
+            <a:r>
+              <a:rPr/>
+              <a:t>The moment anything from the test rows influences a decision, even something as innocent as computing a mean for scaling, the test set stops being unseen and the number it gives you is optimistic.</a:t>
+            </a:r>
+          </a:p>
+          <a:p>
+            <a:pPr lvl="0" indent="0" marL="0">
+              <a:buNone/>
+            </a:pPr>
+          </a:p>
+          <a:p>
+            <a:pPr lvl="0" indent="0" marL="0">
+              <a:buNone/>
+            </a:pPr>
+            <a:r>
+              <a:rPr/>
+              <a:t>Mention stratify=y: it keeps the class proportions identical in both parts, so the test set is a fair miniature of the whole. Without it, on a small or imbalanced dataset, you can get a test set whose composition differs from the training set by chance.</a:t>
+            </a:r>
+          </a:p>
+          <a:p>
+            <a:pPr lvl="0" indent="0" marL="0">
+              <a:buNone/>
+            </a:pPr>
+          </a:p>
+          <a:p>
+            <a:pPr lvl="0" indent="0" marL="0">
+              <a:buNone/>
+            </a:pPr>
+            <a:r>
+              <a:rPr/>
+              <a:t>They will violate this deliberately in the third notebook and see what it costs.</a:t>
+            </a:r>
+          </a:p>
+          <a:p>
+            <a:pPr lvl="0" indent="0" marL="0">
+              <a:buNone/>
+            </a:pPr>
+          </a:p>
+          <a:p>
+            <a:pPr lvl="0" indent="0" marL="0">
+              <a:buNone/>
+            </a:pPr>
+            <a:r>
+              <a:rPr/>
+              <a:t>The caption under the test set is the whole discipline: touched once, at the very end. Say that every additional look spends some of its independence - if you test twenty variants and report the best, you have selected on the test set and the number is no longer honest.</a:t>
             </a:r>
           </a:p>
         </p:txBody>
@@ -4736,49 +4729,35 @@
             </a:pPr>
             <a:r>
               <a:rPr/>
-              <a:t>One malignant tumour classified as benign.</a:t>
-            </a:r>
-          </a:p>
-          <a:p>
-            <a:pPr lvl="0" indent="0" marL="0">
-              <a:buNone/>
-            </a:pPr>
-          </a:p>
-          <a:p>
-            <a:pPr lvl="0" indent="0" marL="0">
-              <a:buNone/>
-            </a:pPr>
-            <a:r>
-              <a:rPr/>
-              <a:t>As a fraction it is 1 in 143 and vanishes into the accuracy figure. As a consequence it is a person sent home who should not have been.</a:t>
-            </a:r>
-          </a:p>
-          <a:p>
-            <a:pPr lvl="0" indent="0" marL="0">
-              <a:buNone/>
-            </a:pPr>
-          </a:p>
-          <a:p>
-            <a:pPr lvl="0" indent="0" marL="0">
-              <a:buNone/>
-            </a:pPr>
-            <a:r>
-              <a:rPr/>
-              <a:t>Say that sentence deliberately and let it sit. It is the gap between a metric and what the metric stands for, and it is the most important idea in today’s lesson.</a:t>
-            </a:r>
-          </a:p>
-          <a:p>
-            <a:pPr lvl="0" indent="0" marL="0">
-              <a:buNone/>
-            </a:pPr>
-          </a:p>
-          <a:p>
-            <a:pPr lvl="0" indent="0" marL="0">
-              <a:buNone/>
-            </a:pPr>
-            <a:r>
-              <a:rPr/>
-              <a:t>Then the practical form: accuracy collapses every kind of mistake into one number, and our two mistakes are not comparable. The confusion matrix is the minimum tool for seeing them separately.</a:t>
+              <a:t>Without this, “96% accuracy” has no scale at all. With it, they can see whether the model is worth anything.</a:t>
+            </a:r>
+          </a:p>
+          <a:p>
+            <a:pPr lvl="0" indent="0" marL="0">
+              <a:buNone/>
+            </a:pPr>
+          </a:p>
+          <a:p>
+            <a:pPr lvl="0" indent="0" marL="0">
+              <a:buNone/>
+            </a:pPr>
+            <a:r>
+              <a:rPr/>
+              <a:t>DummyClassifier does this in two lines, and the exercise requires it.</a:t>
+            </a:r>
+          </a:p>
+          <a:p>
+            <a:pPr lvl="0" indent="0" marL="0">
+              <a:buNone/>
+            </a:pPr>
+          </a:p>
+          <a:p>
+            <a:pPr lvl="0" indent="0" marL="0">
+              <a:buNone/>
+            </a:pPr>
+            <a:r>
+              <a:rPr/>
+              <a:t>Foreshadow: on the imbalanced example later, the baseline will be unbeatable on accuracy and completely useless in practice. That is the lesson, not a curiosity - it is how you discover that accuracy is the wrong metric for your problem.</a:t>
             </a:r>
           </a:p>
         </p:txBody>
@@ -4860,49 +4839,63 @@
             </a:pPr>
             <a:r>
               <a:rPr/>
-              <a:t>Use the figure to make the trade-off physical: the threshold is a line you slide, and sliding it moves errors from one column to the other.</a:t>
-            </a:r>
-          </a:p>
-          <a:p>
-            <a:pPr lvl="0" indent="0" marL="0">
-              <a:buNone/>
-            </a:pPr>
-          </a:p>
-          <a:p>
-            <a:pPr lvl="0" indent="0" marL="0">
-              <a:buNone/>
-            </a:pPr>
-            <a:r>
-              <a:rPr/>
-              <a:t>Push recall towards 1.0 by flagging anything suspicious, and precision collapses - the clinic drowns in unnecessary biopsies. Demand high precision and you start missing cases.</a:t>
-            </a:r>
-          </a:p>
-          <a:p>
-            <a:pPr lvl="0" indent="0" marL="0">
-              <a:buNone/>
-            </a:pPr>
-          </a:p>
-          <a:p>
-            <a:pPr lvl="0" indent="0" marL="0">
-              <a:buNone/>
-            </a:pPr>
-            <a:r>
-              <a:rPr/>
-              <a:t>No single number resolves this, because the resolution is not mathematical. It is a question about consequences and it belongs to the people who bear them - here, patients and clinicians, not the person who trained the model.</a:t>
-            </a:r>
-          </a:p>
-          <a:p>
-            <a:pPr lvl="0" indent="0" marL="0">
-              <a:buNone/>
-            </a:pPr>
-          </a:p>
-          <a:p>
-            <a:pPr lvl="0" indent="0" marL="0">
-              <a:buNone/>
-            </a:pPr>
-            <a:r>
-              <a:rPr/>
-              <a:t>Lesson 4 builds the tools properly: receiver operating characteristic (ROC) curves, precision-recall curves, choosing an operating point. Today they need to see that the trade-off exists and that it is not the model’s decision to make.</a:t>
+              <a:t>Explain WHY, not just what.</a:t>
+            </a:r>
+          </a:p>
+          <a:p>
+            <a:pPr lvl="0" indent="0" marL="0">
+              <a:buNone/>
+            </a:pPr>
+          </a:p>
+          <a:p>
+            <a:pPr lvl="0" indent="0" marL="0">
+              <a:buNone/>
+            </a:pPr>
+            <a:r>
+              <a:rPr/>
+              <a:t>StandardScaler LEARNS something - a mean and a standard deviation per feature. That makes it part of the model, not preparation of the data. Inside a pipeline it learns them from the training fold every time the pipeline is fitted, including inside each cross-validation fold in lesson 5.</a:t>
+            </a:r>
+          </a:p>
+          <a:p>
+            <a:pPr lvl="0" indent="0" marL="0">
+              <a:buNone/>
+            </a:pPr>
+          </a:p>
+          <a:p>
+            <a:pPr lvl="0" indent="0" marL="0">
+              <a:buNone/>
+            </a:pPr>
+            <a:r>
+              <a:rPr/>
+              <a:t>Write the two steps separately and one day you will scale using statistics computed over the whole dataset. Nothing warns you: no error, no exception, just a better number than you deserve.</a:t>
+            </a:r>
+          </a:p>
+          <a:p>
+            <a:pPr lvl="0" indent="0" marL="0">
+              <a:buNone/>
+            </a:pPr>
+          </a:p>
+          <a:p>
+            <a:pPr lvl="0" indent="0" marL="0">
+              <a:buNone/>
+            </a:pPr>
+            <a:r>
+              <a:rPr/>
+              <a:t>This is structure beating discipline, and it is the single most useful habit in the scikit-learn API.</a:t>
+            </a:r>
+          </a:p>
+          <a:p>
+            <a:pPr lvl="0" indent="0" marL="0">
+              <a:buNone/>
+            </a:pPr>
+          </a:p>
+          <a:p>
+            <a:pPr lvl="0" indent="0" marL="0">
+              <a:buNone/>
+            </a:pPr>
+            <a:r>
+              <a:rPr/>
+              <a:t>The top row is the mistake, and note where ‘split’ sits: after the scaling. The mean used to scale the training rows was computed with the test rows included. Nothing errors, nothing warns, and the score comes out slightly too good - which is the worst kind of bug, because there is nothing to debug.</a:t>
             </a:r>
           </a:p>
         </p:txBody>
@@ -4984,21 +4977,35 @@
             </a:pPr>
             <a:r>
               <a:rPr/>
-              <a:t>Name where each omission gets addressed: tuning and stability in lesson 5, model families in 6 and 7.</a:t>
-            </a:r>
-          </a:p>
-          <a:p>
-            <a:pPr lvl="0" indent="0" marL="0">
-              <a:buNone/>
-            </a:pPr>
-          </a:p>
-          <a:p>
-            <a:pPr lvl="0" indent="0" marL="0">
-              <a:buNone/>
-            </a:pPr>
-            <a:r>
-              <a:rPr/>
-              <a:t>Then land the last line, which is the point of the slide: that discipline is the reason the 0.986 is worth anything at all. Every one of the four failures we are about to see comes from breaking it in some form.</a:t>
+              <a:t>The same two steps, done in the two orders, with what each one shows the test set.</a:t>
+            </a:r>
+          </a:p>
+          <a:p>
+            <a:pPr lvl="0" indent="0" marL="0">
+              <a:buNone/>
+            </a:pPr>
+          </a:p>
+          <a:p>
+            <a:pPr lvl="0" indent="0" marL="0">
+              <a:buNone/>
+            </a:pPr>
+            <a:r>
+              <a:rPr/>
+              <a:t>On the manual side the scaler is fitted on everything, so the mean and the standard deviation it subtracts already contain the test rows. The model is then evaluated on data it has, in a small way, already seen. The score comes out slightly too high, and nothing anywhere raises an error.</a:t>
+            </a:r>
+          </a:p>
+          <a:p>
+            <a:pPr lvl="0" indent="0" marL="0">
+              <a:buNone/>
+            </a:pPr>
+          </a:p>
+          <a:p>
+            <a:pPr lvl="0" indent="0" marL="0">
+              <a:buNone/>
+            </a:pPr>
+            <a:r>
+              <a:rPr/>
+              <a:t>Emphasise that last part. This is not a mistake that announces itself: it produces a working notebook and a plausible number. Lesson 2 measures what it costs on a real dataset, and lesson 5 gives it its name.</a:t>
             </a:r>
           </a:p>
         </p:txBody>
@@ -5080,21 +5087,21 @@
             </a:pPr>
             <a:r>
               <a:rPr/>
-              <a:t>Open notebook 03. Frame it before starting: none of these is a coding error. All four run exactly as written and return a number that a reviewer, a supervisor or a customer would accept.</a:t>
-            </a:r>
-          </a:p>
-          <a:p>
-            <a:pPr lvl="0" indent="0" marL="0">
-              <a:buNone/>
-            </a:pPr>
-          </a:p>
-          <a:p>
-            <a:pPr lvl="0" indent="0" marL="0">
-              <a:buNone/>
-            </a:pPr>
-            <a:r>
-              <a:rPr/>
-              <a:t>This is the section they should still remember in five years. Handout section 7 summarises it, and every one of the four has been found in published work and in shipped products.</a:t>
+              <a:t>Let “done?” hang for a few seconds. Someone will say no.</a:t>
+            </a:r>
+          </a:p>
+          <a:p>
+            <a:pPr lvl="0" indent="0" marL="0">
+              <a:buNone/>
+            </a:pPr>
+          </a:p>
+          <a:p>
+            <a:pPr lvl="0" indent="0" marL="0">
+              <a:buNone/>
+            </a:pPr>
+            <a:r>
+              <a:rPr/>
+              <a:t>If nobody does, ask what 0.986 does not tell them. Then move to the confusion matrix - this is the pivot of the entire lesson.</a:t>
             </a:r>
           </a:p>
         </p:txBody>
@@ -5176,21 +5183,49 @@
             </a:pPr>
             <a:r>
               <a:rPr/>
-              <a:t>Set this up carefully before revealing anything. Make sure they understand the data is pure noise BY CONSTRUCTION - the labels come from a random number generator and no feature carries any information about them.</a:t>
-            </a:r>
-          </a:p>
-          <a:p>
-            <a:pPr lvl="0" indent="0" marL="0">
-              <a:buNone/>
-            </a:pPr>
-          </a:p>
-          <a:p>
-            <a:pPr lvl="0" indent="0" marL="0">
-              <a:buNone/>
-            </a:pPr>
-            <a:r>
-              <a:rPr/>
-              <a:t>Ask what accuracy they expect. The honest answer is 50%, chance.</a:t>
+              <a:t>One malignant tumour classified as benign.</a:t>
+            </a:r>
+          </a:p>
+          <a:p>
+            <a:pPr lvl="0" indent="0" marL="0">
+              <a:buNone/>
+            </a:pPr>
+          </a:p>
+          <a:p>
+            <a:pPr lvl="0" indent="0" marL="0">
+              <a:buNone/>
+            </a:pPr>
+            <a:r>
+              <a:rPr/>
+              <a:t>As a fraction it is 1 in 143 and vanishes into the accuracy figure. As a consequence it is a person sent home who should not have been.</a:t>
+            </a:r>
+          </a:p>
+          <a:p>
+            <a:pPr lvl="0" indent="0" marL="0">
+              <a:buNone/>
+            </a:pPr>
+          </a:p>
+          <a:p>
+            <a:pPr lvl="0" indent="0" marL="0">
+              <a:buNone/>
+            </a:pPr>
+            <a:r>
+              <a:rPr/>
+              <a:t>Say that sentence deliberately and let it sit. It is the gap between a metric and what the metric stands for, and it is the most important idea in today’s lesson.</a:t>
+            </a:r>
+          </a:p>
+          <a:p>
+            <a:pPr lvl="0" indent="0" marL="0">
+              <a:buNone/>
+            </a:pPr>
+          </a:p>
+          <a:p>
+            <a:pPr lvl="0" indent="0" marL="0">
+              <a:buNone/>
+            </a:pPr>
+            <a:r>
+              <a:rPr/>
+              <a:t>Then the practical form: accuracy collapses every kind of mistake into one number, and our two mistakes are not comparable. The confusion matrix is the minimum tool for seeing them separately.</a:t>
             </a:r>
           </a:p>
         </p:txBody>
@@ -5272,49 +5307,49 @@
             </a:pPr>
             <a:r>
               <a:rPr/>
-              <a:t>77% on pure noise, against 50% for the honest pipeline.</a:t>
-            </a:r>
-          </a:p>
-          <a:p>
-            <a:pPr lvl="0" indent="0" marL="0">
-              <a:buNone/>
-            </a:pPr>
-          </a:p>
-          <a:p>
-            <a:pPr lvl="0" indent="0" marL="0">
-              <a:buNone/>
-            </a:pPr>
-            <a:r>
-              <a:rPr/>
-              <a:t>Explain the mechanism: with 5000 random features, some correlate with the labels by chance. Selecting the best 20 using the whole dataset picks exactly those - including the ones that correlate with the labels of rows that later become the test set. The selection encoded information about the test labels, and the model inherited it.</a:t>
-            </a:r>
-          </a:p>
-          <a:p>
-            <a:pPr lvl="0" indent="0" marL="0">
-              <a:buNone/>
-            </a:pPr>
-          </a:p>
-          <a:p>
-            <a:pPr lvl="0" indent="0" marL="0">
-              <a:buNone/>
-            </a:pPr>
-            <a:r>
-              <a:rPr/>
-              <a:t>Nobody wrote a bug. Selection feels harmless because it fits no model - but it LEARNS from data, so it belongs inside the training fold.</a:t>
-            </a:r>
-          </a:p>
-          <a:p>
-            <a:pPr lvl="0" indent="0" marL="0">
-              <a:buNone/>
-            </a:pPr>
-          </a:p>
-          <a:p>
-            <a:pPr lvl="0" indent="0" marL="0">
-              <a:buNone/>
-            </a:pPr>
-            <a:r>
-              <a:rPr/>
-              <a:t>Then ask what happens with 20000 features instead of 5000. The illusion gets STRONGER, because there are more opportunities for a spurious correlation. That is the “try this” at the end of the notebook.</a:t>
+              <a:t>Use the figure to make the trade-off physical: the threshold is a line you slide, and sliding it moves errors from one column to the other.</a:t>
+            </a:r>
+          </a:p>
+          <a:p>
+            <a:pPr lvl="0" indent="0" marL="0">
+              <a:buNone/>
+            </a:pPr>
+          </a:p>
+          <a:p>
+            <a:pPr lvl="0" indent="0" marL="0">
+              <a:buNone/>
+            </a:pPr>
+            <a:r>
+              <a:rPr/>
+              <a:t>Push recall towards 1.0 by flagging anything suspicious, and precision collapses - the clinic drowns in unnecessary biopsies. Demand high precision and you start missing cases.</a:t>
+            </a:r>
+          </a:p>
+          <a:p>
+            <a:pPr lvl="0" indent="0" marL="0">
+              <a:buNone/>
+            </a:pPr>
+          </a:p>
+          <a:p>
+            <a:pPr lvl="0" indent="0" marL="0">
+              <a:buNone/>
+            </a:pPr>
+            <a:r>
+              <a:rPr/>
+              <a:t>No single number resolves this, because the resolution is not mathematical. It is a question about consequences and it belongs to the people who bear them - here, patients and clinicians, not the person who trained the model.</a:t>
+            </a:r>
+          </a:p>
+          <a:p>
+            <a:pPr lvl="0" indent="0" marL="0">
+              <a:buNone/>
+            </a:pPr>
+          </a:p>
+          <a:p>
+            <a:pPr lvl="0" indent="0" marL="0">
+              <a:buNone/>
+            </a:pPr>
+            <a:r>
+              <a:rPr/>
+              <a:t>Lesson 4 builds the tools properly: receiver operating characteristic (ROC) curves, precision-recall curves, choosing an operating point. Today they need to see that the trade-off exists and that it is not the model’s decision to make.</a:t>
             </a:r>
           </a:p>
         </p:txBody>
@@ -5396,35 +5431,35 @@
             </a:pPr>
             <a:r>
               <a:rPr/>
-              <a:t>The practical takeaway from the whole leakage section, and the thing to put on the board if anything goes on the board today.</a:t>
-            </a:r>
-          </a:p>
-          <a:p>
-            <a:pPr lvl="0" indent="0" marL="0">
-              <a:buNone/>
-            </a:pPr>
-          </a:p>
-          <a:p>
-            <a:pPr lvl="0" indent="0" marL="0">
-              <a:buNone/>
-            </a:pPr>
-            <a:r>
-              <a:rPr/>
-              <a:t>Pipelines enforce it structurally, which is why we used one from the first notebook.</a:t>
-            </a:r>
-          </a:p>
-          <a:p>
-            <a:pPr lvl="0" indent="0" marL="0">
-              <a:buNone/>
-            </a:pPr>
-          </a:p>
-          <a:p>
-            <a:pPr lvl="0" indent="0" marL="0">
-              <a:buNone/>
-            </a:pPr>
-            <a:r>
-              <a:rPr/>
-              <a:t>Tell them the exercise checks this: scaling the full dataset before splitting caps the methodology marks regardless of the result obtained.</a:t>
+              <a:t>One model, one dataset, and the threshold swept from one end to the other.</a:t>
+            </a:r>
+          </a:p>
+          <a:p>
+            <a:pPr lvl="0" indent="0" marL="0">
+              <a:buNone/>
+            </a:pPr>
+          </a:p>
+          <a:p>
+            <a:pPr lvl="0" indent="0" marL="0">
+              <a:buNone/>
+            </a:pPr>
+            <a:r>
+              <a:rPr/>
+              <a:t>Follow the two curves in opposite directions. Lower the threshold and recall rises - we catch more of what is there - while precision falls, because more of what we flag is wrong. There is no setting where both are at their best, and no amount of better modelling removes the trade.</a:t>
+            </a:r>
+          </a:p>
+          <a:p>
+            <a:pPr lvl="0" indent="0" marL="0">
+              <a:buNone/>
+            </a:pPr>
+          </a:p>
+          <a:p>
+            <a:pPr lvl="0" indent="0" marL="0">
+              <a:buNone/>
+            </a:pPr>
+            <a:r>
+              <a:rPr/>
+              <a:t>So the question of whether a model is good has no answer until somebody says which error is worse, which is the slide from earlier arriving again with a number attached. Lesson 4 spends an hour here.</a:t>
             </a:r>
           </a:p>
         </p:txBody>
@@ -5506,49 +5541,21 @@
             </a:pPr>
             <a:r>
               <a:rPr/>
-              <a:t>The trained model in the notebook reaches 0.987 accuracy - barely above the trivial one - while missing 20 of the 21 positives in the test set.</a:t>
-            </a:r>
-          </a:p>
-          <a:p>
-            <a:pPr lvl="0" indent="0" marL="0">
-              <a:buNone/>
-            </a:pPr>
-          </a:p>
-          <a:p>
-            <a:pPr lvl="0" indent="0" marL="0">
-              <a:buNone/>
-            </a:pPr>
-            <a:r>
-              <a:rPr/>
-              <a:t>On a problem where the positives are the entire reason the system exists.</a:t>
-            </a:r>
-          </a:p>
-          <a:p>
-            <a:pPr lvl="0" indent="0" marL="0">
-              <a:buNone/>
-            </a:pPr>
-          </a:p>
-          <a:p>
-            <a:pPr lvl="0" indent="0" marL="0">
-              <a:buNone/>
-            </a:pPr>
-            <a:r>
-              <a:rPr/>
-              <a:t>Accuracy is dominated by the class nobody is looking for. Ask them what metric they would report to someone deploying this, and steer towards recall on the positive class - then note that recall alone is also gameable, by flagging everything, which is why lesson 4 needs a whole session.</a:t>
-            </a:r>
-          </a:p>
-          <a:p>
-            <a:pPr lvl="0" indent="0" marL="0">
-              <a:buNone/>
-            </a:pPr>
-          </a:p>
-          <a:p>
-            <a:pPr lvl="0" indent="0" marL="0">
-              <a:buNone/>
-            </a:pPr>
-            <a:r>
-              <a:rPr/>
-              <a:t>Read the bottom-left cell in both matrices: 21 missed, then 20 missed. The accuracies differ by one thousandth. If you reported only accuracy, these two systems look identical - and one of them is a constant function that never looks at the input.</a:t>
+              <a:t>Name where each omission gets addressed: tuning and stability in lesson 5, model families in 6 and 7.</a:t>
+            </a:r>
+          </a:p>
+          <a:p>
+            <a:pPr lvl="0" indent="0" marL="0">
+              <a:buNone/>
+            </a:pPr>
+          </a:p>
+          <a:p>
+            <a:pPr lvl="0" indent="0" marL="0">
+              <a:buNone/>
+            </a:pPr>
+            <a:r>
+              <a:rPr/>
+              <a:t>Then land the last line, which is the point of the slide: that discipline is the reason the 0.986 is worth anything at all. Every one of the four failures we are about to see comes from breaking it in some form.</a:t>
             </a:r>
           </a:p>
         </p:txBody>
@@ -5630,63 +5637,21 @@
             </a:pPr>
             <a:r>
               <a:rPr/>
-              <a:t>Explain why it is worthless: biopsies are scheduled once malignancy is already suspected, so the field is populated AFTER the diagnosis it is supposed to predict. At prediction time for a new patient it is empty.</a:t>
-            </a:r>
-          </a:p>
-          <a:p>
-            <a:pPr lvl="0" indent="0" marL="0">
-              <a:buNone/>
-            </a:pPr>
-          </a:p>
-          <a:p>
-            <a:pPr lvl="0" indent="0" marL="0">
-              <a:buNone/>
-            </a:pPr>
-            <a:r>
-              <a:rPr/>
-              <a:t>Then the point that makes this different from the others: no metric detects it, including cross-validated ones, because the information genuinely IS in the training data. The model is not cheating; the data is.</a:t>
-            </a:r>
-          </a:p>
-          <a:p>
-            <a:pPr lvl="0" indent="0" marL="0">
-              <a:buNone/>
-            </a:pPr>
-          </a:p>
-          <a:p>
-            <a:pPr lvl="0" indent="0" marL="0">
-              <a:buNone/>
-            </a:pPr>
-            <a:r>
-              <a:rPr/>
-              <a:t>Only knowing how the data was recorded catches it. Ask them to imagine a hospital extract with 200 columns and no documentation - which is the normal case - and to think about how they would find this.</a:t>
-            </a:r>
-          </a:p>
-          <a:p>
-            <a:pPr lvl="0" indent="0" marL="0">
-              <a:buNone/>
-            </a:pPr>
-          </a:p>
-          <a:p>
-            <a:pPr lvl="0" indent="0" marL="0">
-              <a:buNone/>
-            </a:pPr>
-            <a:r>
-              <a:rPr/>
-              <a:t>The question to carry: at the moment a prediction is needed, does this value exist yet?</a:t>
-            </a:r>
-          </a:p>
-          <a:p>
-            <a:pPr lvl="0" indent="0" marL="0">
-              <a:buNone/>
-            </a:pPr>
-          </a:p>
-          <a:p>
-            <a:pPr lvl="0" indent="0" marL="0">
-              <a:buNone/>
-            </a:pPr>
-            <a:r>
-              <a:rPr/>
-              <a:t>The shaded region is the trap. Everything to the right of the blue marker happens after the moment a prediction is needed, so none of it can be an input. Give them the question in the title as the thing to ask of every column in every dataset they are handed.</a:t>
+              <a:t>Open notebook 03. Frame it before starting: none of these is a coding error. All four run exactly as written and return a number that a reviewer, a supervisor or a customer would accept.</a:t>
+            </a:r>
+          </a:p>
+          <a:p>
+            <a:pPr lvl="0" indent="0" marL="0">
+              <a:buNone/>
+            </a:pPr>
+          </a:p>
+          <a:p>
+            <a:pPr lvl="0" indent="0" marL="0">
+              <a:buNone/>
+            </a:pPr>
+            <a:r>
+              <a:rPr/>
+              <a:t>This is the section they should still remember in five years. Handout section 7 summarises it, and every one of the four has been found in published work and in shipped products.</a:t>
             </a:r>
           </a:p>
         </p:txBody>
@@ -5892,63 +5857,21 @@
             </a:pPr>
             <a:r>
               <a:rPr/>
-              <a:t>Same model, same data, 30 different random seeds. Accuracy ranges from 0.917 to 1.000 - a spread of 0.083.</a:t>
-            </a:r>
-          </a:p>
-          <a:p>
-            <a:pPr lvl="0" indent="0" marL="0">
-              <a:buNone/>
-            </a:pPr>
-          </a:p>
-          <a:p>
-            <a:pPr lvl="0" indent="0" marL="0">
-              <a:buNone/>
-            </a:pPr>
-            <a:r>
-              <a:rPr/>
-              <a:t>That is larger than most claimed improvements between competing methods in published work. Let that land.</a:t>
-            </a:r>
-          </a:p>
-          <a:p>
-            <a:pPr lvl="0" indent="0" marL="0">
-              <a:buNone/>
-            </a:pPr>
-          </a:p>
-          <a:p>
-            <a:pPr lvl="0" indent="0" marL="0">
-              <a:buNone/>
-            </a:pPr>
-            <a:r>
-              <a:rPr/>
-              <a:t>Pick your favourite seed and you can report anything in that range, and a reader seeing one number cannot tell which you got. This is not fraud; it is the default behaviour of anyone who runs the code once.</a:t>
-            </a:r>
-          </a:p>
-          <a:p>
-            <a:pPr lvl="0" indent="0" marL="0">
-              <a:buNone/>
-            </a:pPr>
-          </a:p>
-          <a:p>
-            <a:pPr lvl="0" indent="0" marL="0">
-              <a:buNone/>
-            </a:pPr>
-            <a:r>
-              <a:rPr/>
-              <a:t>Cross-validation replaces the single draw with an average and - more usefully - reports the spread. On this data, 5-fold gives 0.960 ± 0.030.</a:t>
-            </a:r>
-          </a:p>
-          <a:p>
-            <a:pPr lvl="0" indent="0" marL="0">
-              <a:buNone/>
-            </a:pPr>
-          </a:p>
-          <a:p>
-            <a:pPr lvl="0" indent="0" marL="0">
-              <a:buNone/>
-            </a:pPr>
-            <a:r>
-              <a:rPr/>
-              <a:t>A result quoted with no indication of variability is incomplete. Lesson 5 makes this the centre of the course.</a:t>
+              <a:t>Set this up carefully before revealing anything. Make sure they understand the data is pure noise BY CONSTRUCTION - the labels come from a random number generator and no feature carries any information about them.</a:t>
+            </a:r>
+          </a:p>
+          <a:p>
+            <a:pPr lvl="0" indent="0" marL="0">
+              <a:buNone/>
+            </a:pPr>
+          </a:p>
+          <a:p>
+            <a:pPr lvl="0" indent="0" marL="0">
+              <a:buNone/>
+            </a:pPr>
+            <a:r>
+              <a:rPr/>
+              <a:t>Ask what accuracy they expect. The honest answer is 50%, chance.</a:t>
             </a:r>
           </a:p>
         </p:txBody>
@@ -6030,35 +5953,49 @@
             </a:pPr>
             <a:r>
               <a:rPr/>
-              <a:t>They are caught by asking questions about the data and the process, not by reading the metric.</a:t>
-            </a:r>
-          </a:p>
-          <a:p>
-            <a:pPr lvl="0" indent="0" marL="0">
-              <a:buNone/>
-            </a:pPr>
-          </a:p>
-          <a:p>
-            <a:pPr lvl="0" indent="0" marL="0">
-              <a:buNone/>
-            </a:pPr>
-            <a:r>
-              <a:rPr/>
-              <a:t>Give them the three questions to carry out of this room: where did this number come from, what does it leave out, and would it still hold on data I have never touched?</a:t>
-            </a:r>
-          </a:p>
-          <a:p>
-            <a:pPr lvl="0" indent="0" marL="0">
-              <a:buNone/>
-            </a:pPr>
-          </a:p>
-          <a:p>
-            <a:pPr lvl="0" indent="0" marL="0">
-              <a:buNone/>
-            </a:pPr>
-            <a:r>
-              <a:rPr/>
-              <a:t>Then the professional version, connecting back to the history section: the habit of distinguishing what was demonstrated from what was extrapolated is the same habit, applied to your own work instead of someone else’s.</a:t>
+              <a:t>77% on pure noise, against 50% for the honest pipeline.</a:t>
+            </a:r>
+          </a:p>
+          <a:p>
+            <a:pPr lvl="0" indent="0" marL="0">
+              <a:buNone/>
+            </a:pPr>
+          </a:p>
+          <a:p>
+            <a:pPr lvl="0" indent="0" marL="0">
+              <a:buNone/>
+            </a:pPr>
+            <a:r>
+              <a:rPr/>
+              <a:t>Explain the mechanism: with 5000 random features, some correlate with the labels by chance. Selecting the best 20 using the whole dataset picks exactly those - including the ones that correlate with the labels of rows that later become the test set. The selection encoded information about the test labels, and the model inherited it.</a:t>
+            </a:r>
+          </a:p>
+          <a:p>
+            <a:pPr lvl="0" indent="0" marL="0">
+              <a:buNone/>
+            </a:pPr>
+          </a:p>
+          <a:p>
+            <a:pPr lvl="0" indent="0" marL="0">
+              <a:buNone/>
+            </a:pPr>
+            <a:r>
+              <a:rPr/>
+              <a:t>Nobody wrote a bug. Selection feels harmless because it fits no model - but it LEARNS from data, so it belongs inside the training fold.</a:t>
+            </a:r>
+          </a:p>
+          <a:p>
+            <a:pPr lvl="0" indent="0" marL="0">
+              <a:buNone/>
+            </a:pPr>
+          </a:p>
+          <a:p>
+            <a:pPr lvl="0" indent="0" marL="0">
+              <a:buNone/>
+            </a:pPr>
+            <a:r>
+              <a:rPr/>
+              <a:t>Then ask what happens with 20000 features instead of 5000. The illusion gets STRONGER, because there are more opportunities for a spurious correlation. That is the “try this” at the end of the notebook.</a:t>
             </a:r>
           </a:p>
         </p:txBody>
@@ -6140,63 +6077,35 @@
             </a:pPr>
             <a:r>
               <a:rPr/>
-              <a:t>Close the loop with the “when not to use ML” slide. Handout section 8.</a:t>
-            </a:r>
-          </a:p>
-          <a:p>
-            <a:pPr lvl="0" indent="0" marL="0">
-              <a:buNone/>
-            </a:pPr>
-          </a:p>
-          <a:p>
-            <a:pPr lvl="0" indent="0" marL="0">
-              <a:buNone/>
-            </a:pPr>
-            <a:r>
-              <a:rPr/>
-              <a:t>If past decisions discriminated, a model fitted to them discriminates too - and it does so with an appearance of objectivity that makes it HARDER to contest than a human decision would be. “The algorithm decided” is a much harder claim to argue with than “the manager decided”.</a:t>
-            </a:r>
-          </a:p>
-          <a:p>
-            <a:pPr lvl="0" indent="0" marL="0">
-              <a:buNone/>
-            </a:pPr>
-          </a:p>
-          <a:p>
-            <a:pPr lvl="0" indent="0" marL="0">
-              <a:buNone/>
-            </a:pPr>
-            <a:r>
-              <a:rPr/>
-              <a:t>Second point: nothing in empirical risk minimisation distinguishes a cause from a coincidence that predicts well in this sample. A model can be highly accurate and completely wrong about why - which is exactly why it fails abruptly when conditions change.</a:t>
-            </a:r>
-          </a:p>
-          <a:p>
-            <a:pPr lvl="0" indent="0" marL="0">
-              <a:buNone/>
-            </a:pPr>
-          </a:p>
-          <a:p>
-            <a:pPr lvl="0" indent="0" marL="0">
-              <a:buNone/>
-            </a:pPr>
-            <a:r>
-              <a:rPr/>
-              <a:t>Third: whether a decision can be explained to the person affected, whether errors are recoverable, and who bears the cost of being wrong are engineering requirements. They belong in step 1, where they can still change what you build, not in a paragraph at the end of a report.</a:t>
-            </a:r>
-          </a:p>
-          <a:p>
-            <a:pPr lvl="0" indent="0" marL="0">
-              <a:buNone/>
-            </a:pPr>
-          </a:p>
-          <a:p>
-            <a:pPr lvl="0" indent="0" marL="0">
-              <a:buNone/>
-            </a:pPr>
-            <a:r>
-              <a:rPr/>
-              <a:t>Keep this short and serious. Do not moralise - state it and move on.</a:t>
+              <a:t>The practical takeaway from the whole leakage section, and the thing to put on the board if anything goes on the board today.</a:t>
+            </a:r>
+          </a:p>
+          <a:p>
+            <a:pPr lvl="0" indent="0" marL="0">
+              <a:buNone/>
+            </a:pPr>
+          </a:p>
+          <a:p>
+            <a:pPr lvl="0" indent="0" marL="0">
+              <a:buNone/>
+            </a:pPr>
+            <a:r>
+              <a:rPr/>
+              <a:t>Pipelines enforce it structurally, which is why we used one from the first notebook.</a:t>
+            </a:r>
+          </a:p>
+          <a:p>
+            <a:pPr lvl="0" indent="0" marL="0">
+              <a:buNone/>
+            </a:pPr>
+          </a:p>
+          <a:p>
+            <a:pPr lvl="0" indent="0" marL="0">
+              <a:buNone/>
+            </a:pPr>
+            <a:r>
+              <a:rPr/>
+              <a:t>Tell them the exercise checks this: scaling the full dataset before splitting caps the methodology marks regardless of the result obtained.</a:t>
             </a:r>
           </a:p>
         </p:txBody>
@@ -6278,49 +6187,49 @@
             </a:pPr>
             <a:r>
               <a:rPr/>
-              <a:t>Set it explicitly - do not let anyone leave without knowing it exists and when it is due.</a:t>
-            </a:r>
-          </a:p>
-          <a:p>
-            <a:pPr lvl="0" indent="0" marL="0">
-              <a:buNone/>
-            </a:pPr>
-          </a:p>
-          <a:p>
-            <a:pPr lvl="0" indent="0" marL="0">
-              <a:buNone/>
-            </a:pPr>
-            <a:r>
-              <a:rPr/>
-              <a:t>Walk the tasks briefly. Task 1 is framing, and there is no single right answer: quality is an integer from 3 to 9, so they must decide how to treat it and defend the choice. Task 7 - repeat the split with ten seeds - connects directly to the figure they just saw.</a:t>
-            </a:r>
-          </a:p>
-          <a:p>
-            <a:pPr lvl="0" indent="0" marL="0">
-              <a:buNone/>
-            </a:pPr>
-          </a:p>
-          <a:p>
-            <a:pPr lvl="0" indent="0" marL="0">
-              <a:buNone/>
-            </a:pPr>
-            <a:r>
-              <a:rPr/>
-              <a:t>Remind them: scaling the full dataset before splitting loses the methodology marks regardless of the score. And there are no marks for accuracy anywhere in this course.</a:t>
-            </a:r>
-          </a:p>
-          <a:p>
-            <a:pPr lvl="0" indent="0" marL="0">
-              <a:buNone/>
-            </a:pPr>
-          </a:p>
-          <a:p>
-            <a:pPr lvl="0" indent="0" marL="0">
-              <a:buNone/>
-            </a:pPr>
-            <a:r>
-              <a:rPr/>
-              <a:t>Also point them at the quiz - 20 questions, ungraded, and the ones marked “reasoning” are the closest thing to the exam - and at the project brief, so they can start thinking about a dataset. Topic confirmed by lesson 4.</a:t>
+              <a:t>The trained model in the notebook reaches 0.987 accuracy - barely above the trivial one - while missing 20 of the 21 positives in the test set.</a:t>
+            </a:r>
+          </a:p>
+          <a:p>
+            <a:pPr lvl="0" indent="0" marL="0">
+              <a:buNone/>
+            </a:pPr>
+          </a:p>
+          <a:p>
+            <a:pPr lvl="0" indent="0" marL="0">
+              <a:buNone/>
+            </a:pPr>
+            <a:r>
+              <a:rPr/>
+              <a:t>On a problem where the positives are the entire reason the system exists.</a:t>
+            </a:r>
+          </a:p>
+          <a:p>
+            <a:pPr lvl="0" indent="0" marL="0">
+              <a:buNone/>
+            </a:pPr>
+          </a:p>
+          <a:p>
+            <a:pPr lvl="0" indent="0" marL="0">
+              <a:buNone/>
+            </a:pPr>
+            <a:r>
+              <a:rPr/>
+              <a:t>Accuracy is dominated by the class nobody is looking for. Ask them what metric they would report to someone deploying this, and steer towards recall on the positive class - then note that recall alone is also gameable, by flagging everything, which is why lesson 4 needs a whole session.</a:t>
+            </a:r>
+          </a:p>
+          <a:p>
+            <a:pPr lvl="0" indent="0" marL="0">
+              <a:buNone/>
+            </a:pPr>
+          </a:p>
+          <a:p>
+            <a:pPr lvl="0" indent="0" marL="0">
+              <a:buNone/>
+            </a:pPr>
+            <a:r>
+              <a:rPr/>
+              <a:t>Read the bottom-left cell in both matrices: 21 missed, then 20 missed. The accuracies differ by one thousandth. If you reported only accuracy, these two systems look identical - and one of them is a constant function that never looks at the input.</a:t>
             </a:r>
           </a:p>
         </p:txBody>
@@ -6402,35 +6311,35 @@
             </a:pPr>
             <a:r>
               <a:rPr/>
-              <a:t>Close on time and offer to stay for setup problems - it is worth twenty minutes now to avoid three people stuck for a fortnight.</a:t>
-            </a:r>
-          </a:p>
-          <a:p>
-            <a:pPr lvl="0" indent="0" marL="0">
-              <a:buNone/>
-            </a:pPr>
-          </a:p>
-          <a:p>
-            <a:pPr lvl="0" indent="0" marL="0">
-              <a:buNone/>
-            </a:pPr>
-            <a:r>
-              <a:rPr/>
-              <a:t>Tell them lesson 2 goes deeper into data preparation, and that the leakage they saw today was the simple, visible version. The next one is subtler.</a:t>
-            </a:r>
-          </a:p>
-          <a:p>
-            <a:pPr lvl="0" indent="0" marL="0">
-              <a:buNone/>
-            </a:pPr>
-          </a:p>
-          <a:p>
-            <a:pPr lvl="0" indent="0" marL="0">
-              <a:buNone/>
-            </a:pPr>
-            <a:r>
-              <a:rPr/>
-              <a:t>If anyone asks what to read beyond the handout: Resources/history_of_ai.md for context, and the scikit-learn “common pitfalls” page, which is the library’s own account of everything in notebook 03.</a:t>
+              <a:t>Two confusion matrices side by side. Give them a moment to spot that the accuracies agree to three decimal places.</a:t>
+            </a:r>
+          </a:p>
+          <a:p>
+            <a:pPr lvl="0" indent="0" marL="0">
+              <a:buNone/>
+            </a:pPr>
+          </a:p>
+          <a:p>
+            <a:pPr lvl="0" indent="0" marL="0">
+              <a:buNone/>
+            </a:pPr>
+            <a:r>
+              <a:rPr/>
+              <a:t>Left is the model that answers negative every time and has learned nothing whatever. Right is a trained model. 0.986 against 0.987 - and the one on the right finds a single positive out of twenty-one, which is barely better than nothing but is not nothing.</a:t>
+            </a:r>
+          </a:p>
+          <a:p>
+            <a:pPr lvl="0" indent="0" marL="0">
+              <a:buNone/>
+            </a:pPr>
+          </a:p>
+          <a:p>
+            <a:pPr lvl="0" indent="0" marL="0">
+              <a:buNone/>
+            </a:pPr>
+            <a:r>
+              <a:rPr/>
+              <a:t>Ask what a report containing only the accuracy would say about these two, and let the silence do the work. Then point at the bottom-left cell of each: that is the number the application cares about, and it is the one accuracy averages away.</a:t>
             </a:r>
           </a:p>
         </p:txBody>
@@ -6453,6 +6362,640 @@
             <a:fld id="{18BDFEC3-8487-43E8-A154-7C12CBC1FFF2}" type="slidenum">
               <a:rPr lang="en-US"/>
               <a:t>55</a:t>
+            </a:fld>
+            <a:endParaRPr lang="en-US"/>
+          </a:p>
+        </p:txBody>
+      </p:sp>
+    </p:spTree>
+  </p:cSld>
+</p:notes>
+</file>
+
+<file path=ppt/notesSlides/notesSlide55.xml><?xml version="1.0" encoding="utf-8"?>
+<p:notes xmlns:a="http://schemas.openxmlformats.org/drawingml/2006/main" xmlns:r="http://schemas.openxmlformats.org/officeDocument/2006/relationships" xmlns:p="http://schemas.openxmlformats.org/presentationml/2006/main">
+  <p:cSld>
+    <p:spTree>
+      <p:nvGrpSpPr>
+        <p:cNvPr id="1" name=""/>
+        <p:cNvGrpSpPr/>
+        <p:nvPr/>
+      </p:nvGrpSpPr>
+      <p:grpSpPr>
+        <a:xfrm>
+          <a:off x="0" y="0"/>
+          <a:ext cx="0" cy="0"/>
+          <a:chOff x="0" y="0"/>
+          <a:chExt cx="0" cy="0"/>
+        </a:xfrm>
+      </p:grpSpPr>
+      <p:sp>
+        <p:nvSpPr>
+          <p:cNvPr id="2" name="Slide Image Placeholder 1"/>
+          <p:cNvSpPr>
+            <a:spLocks noGrp="1" noRot="1" noChangeAspect="1"/>
+          </p:cNvSpPr>
+          <p:nvPr>
+            <p:ph type="sldImg"/>
+          </p:nvPr>
+        </p:nvSpPr>
+        <p:spPr/>
+      </p:sp>
+      <p:sp>
+        <p:nvSpPr>
+          <p:cNvPr id="3" name="Notes Placeholder 2"/>
+          <p:cNvSpPr>
+            <a:spLocks noGrp="1"/>
+          </p:cNvSpPr>
+          <p:nvPr>
+            <p:ph type="body" idx="1"/>
+          </p:nvPr>
+        </p:nvSpPr>
+        <p:spPr/>
+        <p:txBody>
+          <a:bodyPr/>
+          <a:lstStyle/>
+          <a:p>
+            <a:pPr lvl="0" indent="0" marL="0">
+              <a:buNone/>
+            </a:pPr>
+            <a:r>
+              <a:rPr/>
+              <a:t>Explain why it is worthless: biopsies are scheduled once malignancy is already suspected, so the field is populated AFTER the diagnosis it is supposed to predict. At prediction time for a new patient it is empty.</a:t>
+            </a:r>
+          </a:p>
+          <a:p>
+            <a:pPr lvl="0" indent="0" marL="0">
+              <a:buNone/>
+            </a:pPr>
+          </a:p>
+          <a:p>
+            <a:pPr lvl="0" indent="0" marL="0">
+              <a:buNone/>
+            </a:pPr>
+            <a:r>
+              <a:rPr/>
+              <a:t>Then the point that makes this different from the others: no metric detects it, including cross-validated ones, because the information genuinely IS in the training data. The model is not cheating; the data is.</a:t>
+            </a:r>
+          </a:p>
+          <a:p>
+            <a:pPr lvl="0" indent="0" marL="0">
+              <a:buNone/>
+            </a:pPr>
+          </a:p>
+          <a:p>
+            <a:pPr lvl="0" indent="0" marL="0">
+              <a:buNone/>
+            </a:pPr>
+            <a:r>
+              <a:rPr/>
+              <a:t>Only knowing how the data was recorded catches it. Ask them to imagine a hospital extract with 200 columns and no documentation - which is the normal case - and to think about how they would find this.</a:t>
+            </a:r>
+          </a:p>
+          <a:p>
+            <a:pPr lvl="0" indent="0" marL="0">
+              <a:buNone/>
+            </a:pPr>
+          </a:p>
+          <a:p>
+            <a:pPr lvl="0" indent="0" marL="0">
+              <a:buNone/>
+            </a:pPr>
+            <a:r>
+              <a:rPr/>
+              <a:t>The question to carry: at the moment a prediction is needed, does this value exist yet?</a:t>
+            </a:r>
+          </a:p>
+          <a:p>
+            <a:pPr lvl="0" indent="0" marL="0">
+              <a:buNone/>
+            </a:pPr>
+          </a:p>
+          <a:p>
+            <a:pPr lvl="0" indent="0" marL="0">
+              <a:buNone/>
+            </a:pPr>
+            <a:r>
+              <a:rPr/>
+              <a:t>The shaded region is the trap. Everything to the right of the blue marker happens after the moment a prediction is needed, so none of it can be an input. Give them the question in the title as the thing to ask of every column in every dataset they are handed.</a:t>
+            </a:r>
+          </a:p>
+        </p:txBody>
+      </p:sp>
+      <p:sp>
+        <p:nvSpPr>
+          <p:cNvPr id="4" name="Slide Number Placeholder 3"/>
+          <p:cNvSpPr>
+            <a:spLocks noGrp="1"/>
+          </p:cNvSpPr>
+          <p:nvPr>
+            <p:ph type="sldNum" sz="quarter" idx="10"/>
+          </p:nvPr>
+        </p:nvSpPr>
+        <p:spPr/>
+        <p:txBody>
+          <a:bodyPr/>
+          <a:lstStyle/>
+          <a:p>
+            <a:fld id="{18BDFEC3-8487-43E8-A154-7C12CBC1FFF2}" type="slidenum">
+              <a:rPr lang="en-US"/>
+              <a:t>56</a:t>
+            </a:fld>
+            <a:endParaRPr lang="en-US"/>
+          </a:p>
+        </p:txBody>
+      </p:sp>
+    </p:spTree>
+  </p:cSld>
+</p:notes>
+</file>
+
+<file path=ppt/notesSlides/notesSlide56.xml><?xml version="1.0" encoding="utf-8"?>
+<p:notes xmlns:a="http://schemas.openxmlformats.org/drawingml/2006/main" xmlns:r="http://schemas.openxmlformats.org/officeDocument/2006/relationships" xmlns:p="http://schemas.openxmlformats.org/presentationml/2006/main">
+  <p:cSld>
+    <p:spTree>
+      <p:nvGrpSpPr>
+        <p:cNvPr id="1" name=""/>
+        <p:cNvGrpSpPr/>
+        <p:nvPr/>
+      </p:nvGrpSpPr>
+      <p:grpSpPr>
+        <a:xfrm>
+          <a:off x="0" y="0"/>
+          <a:ext cx="0" cy="0"/>
+          <a:chOff x="0" y="0"/>
+          <a:chExt cx="0" cy="0"/>
+        </a:xfrm>
+      </p:grpSpPr>
+      <p:sp>
+        <p:nvSpPr>
+          <p:cNvPr id="2" name="Slide Image Placeholder 1"/>
+          <p:cNvSpPr>
+            <a:spLocks noGrp="1" noRot="1" noChangeAspect="1"/>
+          </p:cNvSpPr>
+          <p:nvPr>
+            <p:ph type="sldImg"/>
+          </p:nvPr>
+        </p:nvSpPr>
+        <p:spPr/>
+      </p:sp>
+      <p:sp>
+        <p:nvSpPr>
+          <p:cNvPr id="3" name="Notes Placeholder 2"/>
+          <p:cNvSpPr>
+            <a:spLocks noGrp="1"/>
+          </p:cNvSpPr>
+          <p:nvPr>
+            <p:ph type="body" idx="1"/>
+          </p:nvPr>
+        </p:nvSpPr>
+        <p:spPr/>
+        <p:txBody>
+          <a:bodyPr/>
+          <a:lstStyle/>
+          <a:p>
+            <a:pPr lvl="0" indent="0" marL="0">
+              <a:buNone/>
+            </a:pPr>
+            <a:r>
+              <a:rPr/>
+              <a:t>A timeline, with the moment of prediction marked, and everything that happens after it shaded.</a:t>
+            </a:r>
+          </a:p>
+          <a:p>
+            <a:pPr lvl="0" indent="0" marL="0">
+              <a:buNone/>
+            </a:pPr>
+          </a:p>
+          <a:p>
+            <a:pPr lvl="0" indent="0" marL="0">
+              <a:buNone/>
+            </a:pPr>
+            <a:r>
+              <a:rPr/>
+              <a:t>Walk left to right: the scan is taken, measurements are recorded - both before the prediction is needed, both usable. Then the shaded region: the diagnosis is made, the biopsy is scheduled. A model leaning on biopsy_scheduled scores beautifully in the notebook and has nothing to read at the moment it would actually be used.</a:t>
+            </a:r>
+          </a:p>
+          <a:p>
+            <a:pPr lvl="0" indent="0" marL="0">
+              <a:buNone/>
+            </a:pPr>
+          </a:p>
+          <a:p>
+            <a:pPr lvl="0" indent="0" marL="0">
+              <a:buNone/>
+            </a:pPr>
+            <a:r>
+              <a:rPr/>
+              <a:t>The question in the title is the one to make a habit of, and it is worth saying that it cannot be answered by looking at the data. It is answered by asking somebody who knows how the data is produced.</a:t>
+            </a:r>
+          </a:p>
+        </p:txBody>
+      </p:sp>
+      <p:sp>
+        <p:nvSpPr>
+          <p:cNvPr id="4" name="Slide Number Placeholder 3"/>
+          <p:cNvSpPr>
+            <a:spLocks noGrp="1"/>
+          </p:cNvSpPr>
+          <p:nvPr>
+            <p:ph type="sldNum" sz="quarter" idx="10"/>
+          </p:nvPr>
+        </p:nvSpPr>
+        <p:spPr/>
+        <p:txBody>
+          <a:bodyPr/>
+          <a:lstStyle/>
+          <a:p>
+            <a:fld id="{18BDFEC3-8487-43E8-A154-7C12CBC1FFF2}" type="slidenum">
+              <a:rPr lang="en-US"/>
+              <a:t>57</a:t>
+            </a:fld>
+            <a:endParaRPr lang="en-US"/>
+          </a:p>
+        </p:txBody>
+      </p:sp>
+    </p:spTree>
+  </p:cSld>
+</p:notes>
+</file>
+
+<file path=ppt/notesSlides/notesSlide57.xml><?xml version="1.0" encoding="utf-8"?>
+<p:notes xmlns:a="http://schemas.openxmlformats.org/drawingml/2006/main" xmlns:r="http://schemas.openxmlformats.org/officeDocument/2006/relationships" xmlns:p="http://schemas.openxmlformats.org/presentationml/2006/main">
+  <p:cSld>
+    <p:spTree>
+      <p:nvGrpSpPr>
+        <p:cNvPr id="1" name=""/>
+        <p:cNvGrpSpPr/>
+        <p:nvPr/>
+      </p:nvGrpSpPr>
+      <p:grpSpPr>
+        <a:xfrm>
+          <a:off x="0" y="0"/>
+          <a:ext cx="0" cy="0"/>
+          <a:chOff x="0" y="0"/>
+          <a:chExt cx="0" cy="0"/>
+        </a:xfrm>
+      </p:grpSpPr>
+      <p:sp>
+        <p:nvSpPr>
+          <p:cNvPr id="2" name="Slide Image Placeholder 1"/>
+          <p:cNvSpPr>
+            <a:spLocks noGrp="1" noRot="1" noChangeAspect="1"/>
+          </p:cNvSpPr>
+          <p:nvPr>
+            <p:ph type="sldImg"/>
+          </p:nvPr>
+        </p:nvSpPr>
+        <p:spPr/>
+      </p:sp>
+      <p:sp>
+        <p:nvSpPr>
+          <p:cNvPr id="3" name="Notes Placeholder 2"/>
+          <p:cNvSpPr>
+            <a:spLocks noGrp="1"/>
+          </p:cNvSpPr>
+          <p:nvPr>
+            <p:ph type="body" idx="1"/>
+          </p:nvPr>
+        </p:nvSpPr>
+        <p:spPr/>
+        <p:txBody>
+          <a:bodyPr/>
+          <a:lstStyle/>
+          <a:p>
+            <a:pPr lvl="0" indent="0" marL="0">
+              <a:buNone/>
+            </a:pPr>
+            <a:r>
+              <a:rPr/>
+              <a:t>Same model, same data, 30 different random seeds. Accuracy ranges from 0.917 to 1.000 - a spread of 0.083.</a:t>
+            </a:r>
+          </a:p>
+          <a:p>
+            <a:pPr lvl="0" indent="0" marL="0">
+              <a:buNone/>
+            </a:pPr>
+          </a:p>
+          <a:p>
+            <a:pPr lvl="0" indent="0" marL="0">
+              <a:buNone/>
+            </a:pPr>
+            <a:r>
+              <a:rPr/>
+              <a:t>That is larger than most claimed improvements between competing methods in published work. Let that land.</a:t>
+            </a:r>
+          </a:p>
+          <a:p>
+            <a:pPr lvl="0" indent="0" marL="0">
+              <a:buNone/>
+            </a:pPr>
+          </a:p>
+          <a:p>
+            <a:pPr lvl="0" indent="0" marL="0">
+              <a:buNone/>
+            </a:pPr>
+            <a:r>
+              <a:rPr/>
+              <a:t>Pick your favourite seed and you can report anything in that range, and a reader seeing one number cannot tell which you got. This is not fraud; it is the default behaviour of anyone who runs the code once.</a:t>
+            </a:r>
+          </a:p>
+          <a:p>
+            <a:pPr lvl="0" indent="0" marL="0">
+              <a:buNone/>
+            </a:pPr>
+          </a:p>
+          <a:p>
+            <a:pPr lvl="0" indent="0" marL="0">
+              <a:buNone/>
+            </a:pPr>
+            <a:r>
+              <a:rPr/>
+              <a:t>Cross-validation replaces the single draw with an average and - more usefully - reports the spread. On this data, 5-fold gives 0.960 ± 0.030.</a:t>
+            </a:r>
+          </a:p>
+          <a:p>
+            <a:pPr lvl="0" indent="0" marL="0">
+              <a:buNone/>
+            </a:pPr>
+          </a:p>
+          <a:p>
+            <a:pPr lvl="0" indent="0" marL="0">
+              <a:buNone/>
+            </a:pPr>
+            <a:r>
+              <a:rPr/>
+              <a:t>A result quoted with no indication of variability is incomplete. Lesson 5 makes this the centre of the course.</a:t>
+            </a:r>
+          </a:p>
+        </p:txBody>
+      </p:sp>
+      <p:sp>
+        <p:nvSpPr>
+          <p:cNvPr id="4" name="Slide Number Placeholder 3"/>
+          <p:cNvSpPr>
+            <a:spLocks noGrp="1"/>
+          </p:cNvSpPr>
+          <p:nvPr>
+            <p:ph type="sldNum" sz="quarter" idx="10"/>
+          </p:nvPr>
+        </p:nvSpPr>
+        <p:spPr/>
+        <p:txBody>
+          <a:bodyPr/>
+          <a:lstStyle/>
+          <a:p>
+            <a:fld id="{18BDFEC3-8487-43E8-A154-7C12CBC1FFF2}" type="slidenum">
+              <a:rPr lang="en-US"/>
+              <a:t>58</a:t>
+            </a:fld>
+            <a:endParaRPr lang="en-US"/>
+          </a:p>
+        </p:txBody>
+      </p:sp>
+    </p:spTree>
+  </p:cSld>
+</p:notes>
+</file>
+
+<file path=ppt/notesSlides/notesSlide58.xml><?xml version="1.0" encoding="utf-8"?>
+<p:notes xmlns:a="http://schemas.openxmlformats.org/drawingml/2006/main" xmlns:r="http://schemas.openxmlformats.org/officeDocument/2006/relationships" xmlns:p="http://schemas.openxmlformats.org/presentationml/2006/main">
+  <p:cSld>
+    <p:spTree>
+      <p:nvGrpSpPr>
+        <p:cNvPr id="1" name=""/>
+        <p:cNvGrpSpPr/>
+        <p:nvPr/>
+      </p:nvGrpSpPr>
+      <p:grpSpPr>
+        <a:xfrm>
+          <a:off x="0" y="0"/>
+          <a:ext cx="0" cy="0"/>
+          <a:chOff x="0" y="0"/>
+          <a:chExt cx="0" cy="0"/>
+        </a:xfrm>
+      </p:grpSpPr>
+      <p:sp>
+        <p:nvSpPr>
+          <p:cNvPr id="2" name="Slide Image Placeholder 1"/>
+          <p:cNvSpPr>
+            <a:spLocks noGrp="1" noRot="1" noChangeAspect="1"/>
+          </p:cNvSpPr>
+          <p:nvPr>
+            <p:ph type="sldImg"/>
+          </p:nvPr>
+        </p:nvSpPr>
+        <p:spPr/>
+      </p:sp>
+      <p:sp>
+        <p:nvSpPr>
+          <p:cNvPr id="3" name="Notes Placeholder 2"/>
+          <p:cNvSpPr>
+            <a:spLocks noGrp="1"/>
+          </p:cNvSpPr>
+          <p:nvPr>
+            <p:ph type="body" idx="1"/>
+          </p:nvPr>
+        </p:nvSpPr>
+        <p:spPr/>
+        <p:txBody>
+          <a:bodyPr/>
+          <a:lstStyle/>
+          <a:p>
+            <a:pPr lvl="0" indent="0" marL="0">
+              <a:buNone/>
+            </a:pPr>
+            <a:r>
+              <a:rPr/>
+              <a:t>They are caught by asking questions about the data and the process, not by reading the metric.</a:t>
+            </a:r>
+          </a:p>
+          <a:p>
+            <a:pPr lvl="0" indent="0" marL="0">
+              <a:buNone/>
+            </a:pPr>
+          </a:p>
+          <a:p>
+            <a:pPr lvl="0" indent="0" marL="0">
+              <a:buNone/>
+            </a:pPr>
+            <a:r>
+              <a:rPr/>
+              <a:t>Give them the three questions to carry out of this room: where did this number come from, what does it leave out, and would it still hold on data I have never touched?</a:t>
+            </a:r>
+          </a:p>
+          <a:p>
+            <a:pPr lvl="0" indent="0" marL="0">
+              <a:buNone/>
+            </a:pPr>
+          </a:p>
+          <a:p>
+            <a:pPr lvl="0" indent="0" marL="0">
+              <a:buNone/>
+            </a:pPr>
+            <a:r>
+              <a:rPr/>
+              <a:t>Then the professional version, connecting back to the history section: the habit of distinguishing what was demonstrated from what was extrapolated is the same habit, applied to your own work instead of someone else’s.</a:t>
+            </a:r>
+          </a:p>
+        </p:txBody>
+      </p:sp>
+      <p:sp>
+        <p:nvSpPr>
+          <p:cNvPr id="4" name="Slide Number Placeholder 3"/>
+          <p:cNvSpPr>
+            <a:spLocks noGrp="1"/>
+          </p:cNvSpPr>
+          <p:nvPr>
+            <p:ph type="sldNum" sz="quarter" idx="10"/>
+          </p:nvPr>
+        </p:nvSpPr>
+        <p:spPr/>
+        <p:txBody>
+          <a:bodyPr/>
+          <a:lstStyle/>
+          <a:p>
+            <a:fld id="{18BDFEC3-8487-43E8-A154-7C12CBC1FFF2}" type="slidenum">
+              <a:rPr lang="en-US"/>
+              <a:t>59</a:t>
+            </a:fld>
+            <a:endParaRPr lang="en-US"/>
+          </a:p>
+        </p:txBody>
+      </p:sp>
+    </p:spTree>
+  </p:cSld>
+</p:notes>
+</file>
+
+<file path=ppt/notesSlides/notesSlide59.xml><?xml version="1.0" encoding="utf-8"?>
+<p:notes xmlns:a="http://schemas.openxmlformats.org/drawingml/2006/main" xmlns:r="http://schemas.openxmlformats.org/officeDocument/2006/relationships" xmlns:p="http://schemas.openxmlformats.org/presentationml/2006/main">
+  <p:cSld>
+    <p:spTree>
+      <p:nvGrpSpPr>
+        <p:cNvPr id="1" name=""/>
+        <p:cNvGrpSpPr/>
+        <p:nvPr/>
+      </p:nvGrpSpPr>
+      <p:grpSpPr>
+        <a:xfrm>
+          <a:off x="0" y="0"/>
+          <a:ext cx="0" cy="0"/>
+          <a:chOff x="0" y="0"/>
+          <a:chExt cx="0" cy="0"/>
+        </a:xfrm>
+      </p:grpSpPr>
+      <p:sp>
+        <p:nvSpPr>
+          <p:cNvPr id="2" name="Slide Image Placeholder 1"/>
+          <p:cNvSpPr>
+            <a:spLocks noGrp="1" noRot="1" noChangeAspect="1"/>
+          </p:cNvSpPr>
+          <p:nvPr>
+            <p:ph type="sldImg"/>
+          </p:nvPr>
+        </p:nvSpPr>
+        <p:spPr/>
+      </p:sp>
+      <p:sp>
+        <p:nvSpPr>
+          <p:cNvPr id="3" name="Notes Placeholder 2"/>
+          <p:cNvSpPr>
+            <a:spLocks noGrp="1"/>
+          </p:cNvSpPr>
+          <p:nvPr>
+            <p:ph type="body" idx="1"/>
+          </p:nvPr>
+        </p:nvSpPr>
+        <p:spPr/>
+        <p:txBody>
+          <a:bodyPr/>
+          <a:lstStyle/>
+          <a:p>
+            <a:pPr lvl="0" indent="0" marL="0">
+              <a:buNone/>
+            </a:pPr>
+            <a:r>
+              <a:rPr/>
+              <a:t>Close the loop with the “when not to use ML” slide. Handout section 8.</a:t>
+            </a:r>
+          </a:p>
+          <a:p>
+            <a:pPr lvl="0" indent="0" marL="0">
+              <a:buNone/>
+            </a:pPr>
+          </a:p>
+          <a:p>
+            <a:pPr lvl="0" indent="0" marL="0">
+              <a:buNone/>
+            </a:pPr>
+            <a:r>
+              <a:rPr/>
+              <a:t>If past decisions discriminated, a model fitted to them discriminates too - and it does so with an appearance of objectivity that makes it HARDER to contest than a human decision would be. “The algorithm decided” is a much harder claim to argue with than “the manager decided”.</a:t>
+            </a:r>
+          </a:p>
+          <a:p>
+            <a:pPr lvl="0" indent="0" marL="0">
+              <a:buNone/>
+            </a:pPr>
+          </a:p>
+          <a:p>
+            <a:pPr lvl="0" indent="0" marL="0">
+              <a:buNone/>
+            </a:pPr>
+            <a:r>
+              <a:rPr/>
+              <a:t>Second point: nothing in empirical risk minimisation distinguishes a cause from a coincidence that predicts well in this sample. A model can be highly accurate and completely wrong about why - which is exactly why it fails abruptly when conditions change.</a:t>
+            </a:r>
+          </a:p>
+          <a:p>
+            <a:pPr lvl="0" indent="0" marL="0">
+              <a:buNone/>
+            </a:pPr>
+          </a:p>
+          <a:p>
+            <a:pPr lvl="0" indent="0" marL="0">
+              <a:buNone/>
+            </a:pPr>
+            <a:r>
+              <a:rPr/>
+              <a:t>Third: whether a decision can be explained to the person affected, whether errors are recoverable, and who bears the cost of being wrong are engineering requirements. They belong in step 1, where they can still change what you build, not in a paragraph at the end of a report.</a:t>
+            </a:r>
+          </a:p>
+          <a:p>
+            <a:pPr lvl="0" indent="0" marL="0">
+              <a:buNone/>
+            </a:pPr>
+          </a:p>
+          <a:p>
+            <a:pPr lvl="0" indent="0" marL="0">
+              <a:buNone/>
+            </a:pPr>
+            <a:r>
+              <a:rPr/>
+              <a:t>Keep this short and serious. Do not moralise - state it and move on.</a:t>
+            </a:r>
+          </a:p>
+        </p:txBody>
+      </p:sp>
+      <p:sp>
+        <p:nvSpPr>
+          <p:cNvPr id="4" name="Slide Number Placeholder 3"/>
+          <p:cNvSpPr>
+            <a:spLocks noGrp="1"/>
+          </p:cNvSpPr>
+          <p:nvPr>
+            <p:ph type="sldNum" sz="quarter" idx="10"/>
+          </p:nvPr>
+        </p:nvSpPr>
+        <p:spPr/>
+        <p:txBody>
+          <a:bodyPr/>
+          <a:lstStyle/>
+          <a:p>
+            <a:fld id="{18BDFEC3-8487-43E8-A154-7C12CBC1FFF2}" type="slidenum">
+              <a:rPr lang="en-US"/>
+              <a:t>60</a:t>
             </a:fld>
             <a:endParaRPr lang="en-US"/>
           </a:p>
@@ -6577,6 +7120,240 @@
             <a:fld id="{18BDFEC3-8487-43E8-A154-7C12CBC1FFF2}" type="slidenum">
               <a:rPr lang="en-US"/>
               <a:t>7</a:t>
+            </a:fld>
+            <a:endParaRPr lang="en-US"/>
+          </a:p>
+        </p:txBody>
+      </p:sp>
+    </p:spTree>
+  </p:cSld>
+</p:notes>
+</file>
+
+<file path=ppt/notesSlides/notesSlide60.xml><?xml version="1.0" encoding="utf-8"?>
+<p:notes xmlns:a="http://schemas.openxmlformats.org/drawingml/2006/main" xmlns:r="http://schemas.openxmlformats.org/officeDocument/2006/relationships" xmlns:p="http://schemas.openxmlformats.org/presentationml/2006/main">
+  <p:cSld>
+    <p:spTree>
+      <p:nvGrpSpPr>
+        <p:cNvPr id="1" name=""/>
+        <p:cNvGrpSpPr/>
+        <p:nvPr/>
+      </p:nvGrpSpPr>
+      <p:grpSpPr>
+        <a:xfrm>
+          <a:off x="0" y="0"/>
+          <a:ext cx="0" cy="0"/>
+          <a:chOff x="0" y="0"/>
+          <a:chExt cx="0" cy="0"/>
+        </a:xfrm>
+      </p:grpSpPr>
+      <p:sp>
+        <p:nvSpPr>
+          <p:cNvPr id="2" name="Slide Image Placeholder 1"/>
+          <p:cNvSpPr>
+            <a:spLocks noGrp="1" noRot="1" noChangeAspect="1"/>
+          </p:cNvSpPr>
+          <p:nvPr>
+            <p:ph type="sldImg"/>
+          </p:nvPr>
+        </p:nvSpPr>
+        <p:spPr/>
+      </p:sp>
+      <p:sp>
+        <p:nvSpPr>
+          <p:cNvPr id="3" name="Notes Placeholder 2"/>
+          <p:cNvSpPr>
+            <a:spLocks noGrp="1"/>
+          </p:cNvSpPr>
+          <p:nvPr>
+            <p:ph type="body" idx="1"/>
+          </p:nvPr>
+        </p:nvSpPr>
+        <p:spPr/>
+        <p:txBody>
+          <a:bodyPr/>
+          <a:lstStyle/>
+          <a:p>
+            <a:pPr lvl="0" indent="0" marL="0">
+              <a:buNone/>
+            </a:pPr>
+            <a:r>
+              <a:rPr/>
+              <a:t>Set it explicitly - do not let anyone leave without knowing it exists and when it is due.</a:t>
+            </a:r>
+          </a:p>
+          <a:p>
+            <a:pPr lvl="0" indent="0" marL="0">
+              <a:buNone/>
+            </a:pPr>
+          </a:p>
+          <a:p>
+            <a:pPr lvl="0" indent="0" marL="0">
+              <a:buNone/>
+            </a:pPr>
+            <a:r>
+              <a:rPr/>
+              <a:t>Walk the tasks briefly. Task 1 is framing, and there is no single right answer: quality is an integer from 3 to 9, so they must decide how to treat it and defend the choice. Task 7 - repeat the split with ten seeds - connects directly to the figure they just saw.</a:t>
+            </a:r>
+          </a:p>
+          <a:p>
+            <a:pPr lvl="0" indent="0" marL="0">
+              <a:buNone/>
+            </a:pPr>
+          </a:p>
+          <a:p>
+            <a:pPr lvl="0" indent="0" marL="0">
+              <a:buNone/>
+            </a:pPr>
+            <a:r>
+              <a:rPr/>
+              <a:t>Remind them: scaling the full dataset before splitting loses the methodology marks regardless of the score. And there are no marks for accuracy anywhere in this course.</a:t>
+            </a:r>
+          </a:p>
+          <a:p>
+            <a:pPr lvl="0" indent="0" marL="0">
+              <a:buNone/>
+            </a:pPr>
+          </a:p>
+          <a:p>
+            <a:pPr lvl="0" indent="0" marL="0">
+              <a:buNone/>
+            </a:pPr>
+            <a:r>
+              <a:rPr/>
+              <a:t>Also point them at the quiz - 20 questions, ungraded, and the ones marked “reasoning” are the closest thing to the exam - and at the project brief, so they can start thinking about a dataset. Topic confirmed by lesson 4.</a:t>
+            </a:r>
+          </a:p>
+        </p:txBody>
+      </p:sp>
+      <p:sp>
+        <p:nvSpPr>
+          <p:cNvPr id="4" name="Slide Number Placeholder 3"/>
+          <p:cNvSpPr>
+            <a:spLocks noGrp="1"/>
+          </p:cNvSpPr>
+          <p:nvPr>
+            <p:ph type="sldNum" sz="quarter" idx="10"/>
+          </p:nvPr>
+        </p:nvSpPr>
+        <p:spPr/>
+        <p:txBody>
+          <a:bodyPr/>
+          <a:lstStyle/>
+          <a:p>
+            <a:fld id="{18BDFEC3-8487-43E8-A154-7C12CBC1FFF2}" type="slidenum">
+              <a:rPr lang="en-US"/>
+              <a:t>61</a:t>
+            </a:fld>
+            <a:endParaRPr lang="en-US"/>
+          </a:p>
+        </p:txBody>
+      </p:sp>
+    </p:spTree>
+  </p:cSld>
+</p:notes>
+</file>
+
+<file path=ppt/notesSlides/notesSlide61.xml><?xml version="1.0" encoding="utf-8"?>
+<p:notes xmlns:a="http://schemas.openxmlformats.org/drawingml/2006/main" xmlns:r="http://schemas.openxmlformats.org/officeDocument/2006/relationships" xmlns:p="http://schemas.openxmlformats.org/presentationml/2006/main">
+  <p:cSld>
+    <p:spTree>
+      <p:nvGrpSpPr>
+        <p:cNvPr id="1" name=""/>
+        <p:cNvGrpSpPr/>
+        <p:nvPr/>
+      </p:nvGrpSpPr>
+      <p:grpSpPr>
+        <a:xfrm>
+          <a:off x="0" y="0"/>
+          <a:ext cx="0" cy="0"/>
+          <a:chOff x="0" y="0"/>
+          <a:chExt cx="0" cy="0"/>
+        </a:xfrm>
+      </p:grpSpPr>
+      <p:sp>
+        <p:nvSpPr>
+          <p:cNvPr id="2" name="Slide Image Placeholder 1"/>
+          <p:cNvSpPr>
+            <a:spLocks noGrp="1" noRot="1" noChangeAspect="1"/>
+          </p:cNvSpPr>
+          <p:nvPr>
+            <p:ph type="sldImg"/>
+          </p:nvPr>
+        </p:nvSpPr>
+        <p:spPr/>
+      </p:sp>
+      <p:sp>
+        <p:nvSpPr>
+          <p:cNvPr id="3" name="Notes Placeholder 2"/>
+          <p:cNvSpPr>
+            <a:spLocks noGrp="1"/>
+          </p:cNvSpPr>
+          <p:nvPr>
+            <p:ph type="body" idx="1"/>
+          </p:nvPr>
+        </p:nvSpPr>
+        <p:spPr/>
+        <p:txBody>
+          <a:bodyPr/>
+          <a:lstStyle/>
+          <a:p>
+            <a:pPr lvl="0" indent="0" marL="0">
+              <a:buNone/>
+            </a:pPr>
+            <a:r>
+              <a:rPr/>
+              <a:t>Close on time and offer to stay for setup problems - it is worth twenty minutes now to avoid three people stuck for a fortnight.</a:t>
+            </a:r>
+          </a:p>
+          <a:p>
+            <a:pPr lvl="0" indent="0" marL="0">
+              <a:buNone/>
+            </a:pPr>
+          </a:p>
+          <a:p>
+            <a:pPr lvl="0" indent="0" marL="0">
+              <a:buNone/>
+            </a:pPr>
+            <a:r>
+              <a:rPr/>
+              <a:t>Tell them lesson 2 goes deeper into data preparation, and that the leakage they saw today was the simple, visible version. The next one is subtler.</a:t>
+            </a:r>
+          </a:p>
+          <a:p>
+            <a:pPr lvl="0" indent="0" marL="0">
+              <a:buNone/>
+            </a:pPr>
+          </a:p>
+          <a:p>
+            <a:pPr lvl="0" indent="0" marL="0">
+              <a:buNone/>
+            </a:pPr>
+            <a:r>
+              <a:rPr/>
+              <a:t>If anyone asks what to read beyond the handout: Resources/history_of_ai.md for context, and the scikit-learn “common pitfalls” page, which is the library’s own account of everything in notebook 03.</a:t>
+            </a:r>
+          </a:p>
+        </p:txBody>
+      </p:sp>
+      <p:sp>
+        <p:nvSpPr>
+          <p:cNvPr id="4" name="Slide Number Placeholder 3"/>
+          <p:cNvSpPr>
+            <a:spLocks noGrp="1"/>
+          </p:cNvSpPr>
+          <p:nvPr>
+            <p:ph type="sldNum" sz="quarter" idx="10"/>
+          </p:nvPr>
+        </p:nvSpPr>
+        <p:spPr/>
+        <p:txBody>
+          <a:bodyPr/>
+          <a:lstStyle/>
+          <a:p>
+            <a:fld id="{18BDFEC3-8487-43E8-A154-7C12CBC1FFF2}" type="slidenum">
+              <a:rPr lang="en-US"/>
+              <a:t>62</a:t>
             </a:fld>
             <a:endParaRPr lang="en-US"/>
           </a:p>
@@ -10072,8 +10849,8 @@
         </p:nvSpPr>
         <p:spPr>
           <a:xfrm>
-            <a:off x="457200" y="205740"/>
-            <a:ext cx="8229600" cy="874395"/>
+            <a:off x="457200" y="205979"/>
+            <a:ext cx="8229600" cy="857250"/>
           </a:xfrm>
         </p:spPr>
         <p:txBody>
@@ -10092,18 +10869,18 @@
       </p:sp>
       <p:sp>
         <p:nvSpPr>
-          <p:cNvPr id="4" name="Text Placeholder 3"/>
-          <p:cNvSpPr>
-            <a:spLocks noGrp="1"/>
-          </p:cNvSpPr>
-          <p:nvPr>
-            <p:ph idx="2" sz="half" type="body"/>
+          <p:cNvPr id="3" name="Content Placeholder 2"/>
+          <p:cNvSpPr>
+            <a:spLocks noGrp="1"/>
+          </p:cNvSpPr>
+          <p:nvPr>
+            <p:ph idx="1"/>
           </p:nvPr>
         </p:nvSpPr>
         <p:spPr>
           <a:xfrm>
-            <a:off x="457200" y="1183005"/>
-            <a:ext cx="8229600" cy="2185987"/>
+            <a:off x="457200" y="1200151"/>
+            <a:ext cx="8229600" cy="3394472"/>
           </a:xfrm>
         </p:spPr>
         <p:txBody>
@@ -10137,6 +10914,58 @@
             <a:r>
               <a:rPr/>
               <a:t>The exceptions grow until nobody can maintain it</a:t>
+            </a:r>
+          </a:p>
+        </p:txBody>
+      </p:sp>
+    </p:spTree>
+  </p:cSld>
+</p:sld>
+</file>
+
+<file path=ppt/slides/slide11.xml><?xml version="1.0" encoding="utf-8"?>
+<p:sld xmlns:a="http://schemas.openxmlformats.org/drawingml/2006/main" xmlns:r="http://schemas.openxmlformats.org/officeDocument/2006/relationships" xmlns:p="http://schemas.openxmlformats.org/presentationml/2006/main">
+  <p:cSld>
+    <p:spTree>
+      <p:nvGrpSpPr>
+        <p:cNvPr id="1" name=""/>
+        <p:cNvGrpSpPr/>
+        <p:nvPr/>
+      </p:nvGrpSpPr>
+      <p:grpSpPr>
+        <a:xfrm>
+          <a:off x="0" y="0"/>
+          <a:ext cx="0" cy="0"/>
+          <a:chOff x="0" y="0"/>
+          <a:chExt cx="0" cy="0"/>
+        </a:xfrm>
+      </p:grpSpPr>
+      <p:sp>
+        <p:nvSpPr>
+          <p:cNvPr id="2" name="Title 1"/>
+          <p:cNvSpPr>
+            <a:spLocks noGrp="1"/>
+          </p:cNvSpPr>
+          <p:nvPr>
+            <p:ph type="title"/>
+          </p:nvPr>
+        </p:nvSpPr>
+        <p:spPr>
+          <a:xfrm>
+            <a:off x="457200" y="205979"/>
+            <a:ext cx="8229600" cy="857250"/>
+          </a:xfrm>
+        </p:spPr>
+        <p:txBody>
+          <a:bodyPr/>
+          <a:lstStyle/>
+          <a:p>
+            <a:pPr lvl="0" indent="0" marL="0">
+              <a:buNone/>
+            </a:pPr>
+            <a:r>
+              <a:rPr/>
+              <a:t>Every rule buys an exception</a:t>
             </a:r>
           </a:p>
         </p:txBody>
@@ -10157,8 +10986,8 @@
         </p:blipFill>
         <p:spPr bwMode="auto">
           <a:xfrm>
-            <a:off x="3130245" y="3471862"/>
-            <a:ext cx="2883510" cy="1054418"/>
+            <a:off x="457200" y="1341239"/>
+            <a:ext cx="8229600" cy="3009900"/>
           </a:xfrm>
           <a:prstGeom prst="rect">
             <a:avLst/>
@@ -10176,7 +11005,7 @@
 </p:sld>
 </file>
 
-<file path=ppt/slides/slide11.xml><?xml version="1.0" encoding="utf-8"?>
+<file path=ppt/slides/slide12.xml><?xml version="1.0" encoding="utf-8"?>
 <p:sld xmlns:a="http://schemas.openxmlformats.org/drawingml/2006/main" xmlns:r="http://schemas.openxmlformats.org/officeDocument/2006/relationships" xmlns:p="http://schemas.openxmlformats.org/presentationml/2006/main">
   <p:cSld>
     <p:spTree>
@@ -10296,7 +11125,7 @@
 </p:sld>
 </file>
 
-<file path=ppt/slides/slide12.xml><?xml version="1.0" encoding="utf-8"?>
+<file path=ppt/slides/slide13.xml><?xml version="1.0" encoding="utf-8"?>
 <p:sld xmlns:a="http://schemas.openxmlformats.org/drawingml/2006/main" xmlns:r="http://schemas.openxmlformats.org/officeDocument/2006/relationships" xmlns:p="http://schemas.openxmlformats.org/presentationml/2006/main">
   <p:cSld>
     <p:spTree>
@@ -10325,8 +11154,8 @@
         </p:nvSpPr>
         <p:spPr>
           <a:xfrm>
-            <a:off x="457200" y="205740"/>
-            <a:ext cx="8229600" cy="874395"/>
+            <a:off x="457200" y="205979"/>
+            <a:ext cx="8229600" cy="857250"/>
           </a:xfrm>
         </p:spPr>
         <p:txBody>
@@ -10345,18 +11174,18 @@
       </p:sp>
       <p:sp>
         <p:nvSpPr>
-          <p:cNvPr id="4" name="Text Placeholder 3"/>
-          <p:cNvSpPr>
-            <a:spLocks noGrp="1"/>
-          </p:cNvSpPr>
-          <p:nvPr>
-            <p:ph idx="2" sz="half" type="body"/>
+          <p:cNvPr id="3" name="Content Placeholder 2"/>
+          <p:cNvSpPr>
+            <a:spLocks noGrp="1"/>
+          </p:cNvSpPr>
+          <p:nvPr>
+            <p:ph idx="1"/>
           </p:nvPr>
         </p:nvSpPr>
         <p:spPr>
           <a:xfrm>
-            <a:off x="457200" y="1183005"/>
-            <a:ext cx="8229600" cy="2185987"/>
+            <a:off x="457200" y="1200151"/>
+            <a:ext cx="8229600" cy="3394472"/>
           </a:xfrm>
         </p:spPr>
         <p:txBody>
@@ -10420,6 +11249,58 @@
             <a:r>
               <a:rPr/>
               <a:t>Goal: find f: X → Y that predicts well</a:t>
+            </a:r>
+          </a:p>
+        </p:txBody>
+      </p:sp>
+    </p:spTree>
+  </p:cSld>
+</p:sld>
+</file>
+
+<file path=ppt/slides/slide14.xml><?xml version="1.0" encoding="utf-8"?>
+<p:sld xmlns:a="http://schemas.openxmlformats.org/drawingml/2006/main" xmlns:r="http://schemas.openxmlformats.org/officeDocument/2006/relationships" xmlns:p="http://schemas.openxmlformats.org/presentationml/2006/main">
+  <p:cSld>
+    <p:spTree>
+      <p:nvGrpSpPr>
+        <p:cNvPr id="1" name=""/>
+        <p:cNvGrpSpPr/>
+        <p:nvPr/>
+      </p:nvGrpSpPr>
+      <p:grpSpPr>
+        <a:xfrm>
+          <a:off x="0" y="0"/>
+          <a:ext cx="0" cy="0"/>
+          <a:chOff x="0" y="0"/>
+          <a:chExt cx="0" cy="0"/>
+        </a:xfrm>
+      </p:grpSpPr>
+      <p:sp>
+        <p:nvSpPr>
+          <p:cNvPr id="2" name="Title 1"/>
+          <p:cNvSpPr>
+            <a:spLocks noGrp="1"/>
+          </p:cNvSpPr>
+          <p:nvPr>
+            <p:ph type="title"/>
+          </p:nvPr>
+        </p:nvSpPr>
+        <p:spPr>
+          <a:xfrm>
+            <a:off x="457200" y="205979"/>
+            <a:ext cx="8229600" cy="857250"/>
+          </a:xfrm>
+        </p:spPr>
+        <p:txBody>
+          <a:bodyPr/>
+          <a:lstStyle/>
+          <a:p>
+            <a:pPr lvl="0" indent="0" marL="0">
+              <a:buNone/>
+            </a:pPr>
+            <a:r>
+              <a:rPr/>
+              <a:t>The setup, in one picture</a:t>
             </a:r>
           </a:p>
         </p:txBody>
@@ -10440,8 +11321,8 @@
         </p:blipFill>
         <p:spPr bwMode="auto">
           <a:xfrm>
-            <a:off x="2978481" y="3471862"/>
-            <a:ext cx="3187037" cy="1054418"/>
+            <a:off x="457200" y="1480939"/>
+            <a:ext cx="8229600" cy="2730500"/>
           </a:xfrm>
           <a:prstGeom prst="rect">
             <a:avLst/>
@@ -10459,7 +11340,7 @@
 </p:sld>
 </file>
 
-<file path=ppt/slides/slide13.xml><?xml version="1.0" encoding="utf-8"?>
+<file path=ppt/slides/slide15.xml><?xml version="1.0" encoding="utf-8"?>
 <p:sld xmlns:a="http://schemas.openxmlformats.org/drawingml/2006/main" xmlns:r="http://schemas.openxmlformats.org/officeDocument/2006/relationships" xmlns:p="http://schemas.openxmlformats.org/presentationml/2006/main">
   <p:cSld>
     <p:spTree>
@@ -10571,7 +11452,7 @@
 </p:sld>
 </file>
 
-<file path=ppt/slides/slide14.xml><?xml version="1.0" encoding="utf-8"?>
+<file path=ppt/slides/slide16.xml><?xml version="1.0" encoding="utf-8"?>
 <p:sld xmlns:a="http://schemas.openxmlformats.org/drawingml/2006/main" xmlns:r="http://schemas.openxmlformats.org/officeDocument/2006/relationships" xmlns:p="http://schemas.openxmlformats.org/presentationml/2006/main">
   <p:cSld>
     <p:spTree>
@@ -10683,7 +11564,7 @@
 </p:sld>
 </file>
 
-<file path=ppt/slides/slide15.xml><?xml version="1.0" encoding="utf-8"?>
+<file path=ppt/slides/slide17.xml><?xml version="1.0" encoding="utf-8"?>
 <p:sld xmlns:a="http://schemas.openxmlformats.org/drawingml/2006/main" xmlns:r="http://schemas.openxmlformats.org/officeDocument/2006/relationships" xmlns:p="http://schemas.openxmlformats.org/presentationml/2006/main">
   <p:cSld>
     <p:spTree>
@@ -10816,7 +11697,7 @@
 </p:sld>
 </file>
 
-<file path=ppt/slides/slide16.xml><?xml version="1.0" encoding="utf-8"?>
+<file path=ppt/slides/slide18.xml><?xml version="1.0" encoding="utf-8"?>
 <p:sld xmlns:a="http://schemas.openxmlformats.org/drawingml/2006/main" xmlns:r="http://schemas.openxmlformats.org/officeDocument/2006/relationships" xmlns:p="http://schemas.openxmlformats.org/presentationml/2006/main">
   <p:cSld>
     <p:spTree>
@@ -10898,7 +11779,7 @@
 </p:sld>
 </file>
 
-<file path=ppt/slides/slide17.xml><?xml version="1.0" encoding="utf-8"?>
+<file path=ppt/slides/slide19.xml><?xml version="1.0" encoding="utf-8"?>
 <p:sld xmlns:a="http://schemas.openxmlformats.org/drawingml/2006/main" xmlns:r="http://schemas.openxmlformats.org/officeDocument/2006/relationships" xmlns:p="http://schemas.openxmlformats.org/presentationml/2006/main">
   <p:cSld>
     <p:spTree>
@@ -10980,7 +11861,7 @@
 </p:sld>
 </file>
 
-<file path=ppt/slides/slide18.xml><?xml version="1.0" encoding="utf-8"?>
+<file path=ppt/slides/slide2.xml><?xml version="1.0" encoding="utf-8"?>
 <p:sld xmlns:a="http://schemas.openxmlformats.org/drawingml/2006/main" xmlns:r="http://schemas.openxmlformats.org/officeDocument/2006/relationships" xmlns:p="http://schemas.openxmlformats.org/presentationml/2006/main">
   <p:cSld>
     <p:spTree>
@@ -11022,15 +11903,7 @@
             </a:pPr>
             <a:r>
               <a:rPr/>
-              <a:t>When </a:t>
-            </a:r>
-            <a:r>
-              <a:rPr i="1"/>
-              <a:t>not</a:t>
-            </a:r>
-            <a:r>
-              <a:rPr/>
-              <a:t> to use machine learning</a:t>
+              <a:t>Welcome</a:t>
             </a:r>
           </a:p>
         </p:txBody>
@@ -11058,71 +11931,29 @@
             <a:pPr lvl="0"/>
             <a:r>
               <a:rPr/>
-              <a:t>The rule is </a:t>
+              <a:t>10 lessons, 3 hours each, every Friday until 27 November</a:t>
+            </a:r>
+          </a:p>
+          <a:p>
+            <a:pPr lvl="0"/>
+            <a:r>
+              <a:rPr/>
+              <a:t>A first course in </a:t>
             </a:r>
             <a:r>
               <a:rPr b="1"/>
-              <a:t>known</a:t>
-            </a:r>
-            <a:r>
-              <a:rPr/>
-              <a:t> — write it</a:t>
+              <a:t>machine learning</a:t>
+            </a:r>
+            <a:r>
+              <a:rPr/>
+              <a:t>, for people who can already program</a:t>
             </a:r>
           </a:p>
           <a:p>
             <a:pPr lvl="0"/>
             <a:r>
               <a:rPr/>
-              <a:t>The data is </a:t>
-            </a:r>
-            <a:r>
-              <a:rPr b="1"/>
-              <a:t>not representative</a:t>
-            </a:r>
-            <a:r>
-              <a:rPr/>
-              <a:t> of deployment</a:t>
-            </a:r>
-          </a:p>
-          <a:p>
-            <a:pPr lvl="0"/>
-            <a:r>
-              <a:rPr/>
-              <a:t>Errors are </a:t>
-            </a:r>
-            <a:r>
-              <a:rPr b="1"/>
-              <a:t>catastrophic and unexplainable</a:t>
-            </a:r>
-          </a:p>
-          <a:p>
-            <a:pPr lvl="0"/>
-            <a:r>
-              <a:rPr/>
-              <a:t>The data encodes an </a:t>
-            </a:r>
-            <a:r>
-              <a:rPr b="1"/>
-              <a:t>injustice</a:t>
-            </a:r>
-            <a:r>
-              <a:rPr/>
-              <a:t> you would automate</a:t>
-            </a:r>
-          </a:p>
-          <a:p>
-            <a:pPr lvl="0"/>
-            <a:r>
-              <a:rPr/>
-              <a:t>A </a:t>
-            </a:r>
-            <a:r>
-              <a:rPr b="1"/>
-              <a:t>simple baseline</a:t>
-            </a:r>
-            <a:r>
-              <a:rPr/>
-              <a:t> already suffices</a:t>
+              <a:t>Foundations, not products</a:t>
             </a:r>
           </a:p>
         </p:txBody>
@@ -11132,7 +11963,159 @@
 </p:sld>
 </file>
 
-<file path=ppt/slides/slide19.xml><?xml version="1.0" encoding="utf-8"?>
+<file path=ppt/slides/slide20.xml><?xml version="1.0" encoding="utf-8"?>
+<p:sld xmlns:a="http://schemas.openxmlformats.org/drawingml/2006/main" xmlns:r="http://schemas.openxmlformats.org/officeDocument/2006/relationships" xmlns:p="http://schemas.openxmlformats.org/presentationml/2006/main">
+  <p:cSld>
+    <p:spTree>
+      <p:nvGrpSpPr>
+        <p:cNvPr id="1" name=""/>
+        <p:cNvGrpSpPr/>
+        <p:nvPr/>
+      </p:nvGrpSpPr>
+      <p:grpSpPr>
+        <a:xfrm>
+          <a:off x="0" y="0"/>
+          <a:ext cx="0" cy="0"/>
+          <a:chOff x="0" y="0"/>
+          <a:chExt cx="0" cy="0"/>
+        </a:xfrm>
+      </p:grpSpPr>
+      <p:sp>
+        <p:nvSpPr>
+          <p:cNvPr id="2" name="Title 1"/>
+          <p:cNvSpPr>
+            <a:spLocks noGrp="1"/>
+          </p:cNvSpPr>
+          <p:nvPr>
+            <p:ph type="title"/>
+          </p:nvPr>
+        </p:nvSpPr>
+        <p:spPr>
+          <a:xfrm>
+            <a:off x="457200" y="205979"/>
+            <a:ext cx="8229600" cy="857250"/>
+          </a:xfrm>
+        </p:spPr>
+        <p:txBody>
+          <a:bodyPr/>
+          <a:lstStyle/>
+          <a:p>
+            <a:pPr lvl="0" indent="0" marL="0">
+              <a:buNone/>
+            </a:pPr>
+            <a:r>
+              <a:rPr/>
+              <a:t>When </a:t>
+            </a:r>
+            <a:r>
+              <a:rPr i="1"/>
+              <a:t>not</a:t>
+            </a:r>
+            <a:r>
+              <a:rPr/>
+              <a:t> to use machine learning</a:t>
+            </a:r>
+          </a:p>
+        </p:txBody>
+      </p:sp>
+      <p:sp>
+        <p:nvSpPr>
+          <p:cNvPr id="3" name="Content Placeholder 2"/>
+          <p:cNvSpPr>
+            <a:spLocks noGrp="1"/>
+          </p:cNvSpPr>
+          <p:nvPr>
+            <p:ph idx="1"/>
+          </p:nvPr>
+        </p:nvSpPr>
+        <p:spPr>
+          <a:xfrm>
+            <a:off x="457200" y="1200151"/>
+            <a:ext cx="8229600" cy="3394472"/>
+          </a:xfrm>
+        </p:spPr>
+        <p:txBody>
+          <a:bodyPr/>
+          <a:lstStyle/>
+          <a:p>
+            <a:pPr lvl="0"/>
+            <a:r>
+              <a:rPr/>
+              <a:t>The rule is </a:t>
+            </a:r>
+            <a:r>
+              <a:rPr b="1"/>
+              <a:t>known</a:t>
+            </a:r>
+            <a:r>
+              <a:rPr/>
+              <a:t> — write it</a:t>
+            </a:r>
+          </a:p>
+          <a:p>
+            <a:pPr lvl="0"/>
+            <a:r>
+              <a:rPr/>
+              <a:t>The data is </a:t>
+            </a:r>
+            <a:r>
+              <a:rPr b="1"/>
+              <a:t>not representative</a:t>
+            </a:r>
+            <a:r>
+              <a:rPr/>
+              <a:t> of deployment</a:t>
+            </a:r>
+          </a:p>
+          <a:p>
+            <a:pPr lvl="0"/>
+            <a:r>
+              <a:rPr/>
+              <a:t>Errors are </a:t>
+            </a:r>
+            <a:r>
+              <a:rPr b="1"/>
+              <a:t>catastrophic and unexplainable</a:t>
+            </a:r>
+          </a:p>
+          <a:p>
+            <a:pPr lvl="0"/>
+            <a:r>
+              <a:rPr/>
+              <a:t>The data encodes an </a:t>
+            </a:r>
+            <a:r>
+              <a:rPr b="1"/>
+              <a:t>injustice</a:t>
+            </a:r>
+            <a:r>
+              <a:rPr/>
+              <a:t> you would automate</a:t>
+            </a:r>
+          </a:p>
+          <a:p>
+            <a:pPr lvl="0"/>
+            <a:r>
+              <a:rPr/>
+              <a:t>A </a:t>
+            </a:r>
+            <a:r>
+              <a:rPr b="1"/>
+              <a:t>simple baseline</a:t>
+            </a:r>
+            <a:r>
+              <a:rPr/>
+              <a:t> already suffices</a:t>
+            </a:r>
+          </a:p>
+        </p:txBody>
+      </p:sp>
+    </p:spTree>
+  </p:cSld>
+</p:sld>
+</file>
+
+<file path=ppt/slides/slide21.xml><?xml version="1.0" encoding="utf-8"?>
 <p:sld xmlns:a="http://schemas.openxmlformats.org/drawingml/2006/main" xmlns:r="http://schemas.openxmlformats.org/officeDocument/2006/relationships" xmlns:p="http://schemas.openxmlformats.org/presentationml/2006/main">
   <p:cSld>
     <p:spTree>
@@ -11214,109 +12197,7 @@
 </p:sld>
 </file>
 
-<file path=ppt/slides/slide2.xml><?xml version="1.0" encoding="utf-8"?>
-<p:sld xmlns:a="http://schemas.openxmlformats.org/drawingml/2006/main" xmlns:r="http://schemas.openxmlformats.org/officeDocument/2006/relationships" xmlns:p="http://schemas.openxmlformats.org/presentationml/2006/main">
-  <p:cSld>
-    <p:spTree>
-      <p:nvGrpSpPr>
-        <p:cNvPr id="1" name=""/>
-        <p:cNvGrpSpPr/>
-        <p:nvPr/>
-      </p:nvGrpSpPr>
-      <p:grpSpPr>
-        <a:xfrm>
-          <a:off x="0" y="0"/>
-          <a:ext cx="0" cy="0"/>
-          <a:chOff x="0" y="0"/>
-          <a:chExt cx="0" cy="0"/>
-        </a:xfrm>
-      </p:grpSpPr>
-      <p:sp>
-        <p:nvSpPr>
-          <p:cNvPr id="2" name="Title 1"/>
-          <p:cNvSpPr>
-            <a:spLocks noGrp="1"/>
-          </p:cNvSpPr>
-          <p:nvPr>
-            <p:ph type="title"/>
-          </p:nvPr>
-        </p:nvSpPr>
-        <p:spPr>
-          <a:xfrm>
-            <a:off x="457200" y="205979"/>
-            <a:ext cx="8229600" cy="857250"/>
-          </a:xfrm>
-        </p:spPr>
-        <p:txBody>
-          <a:bodyPr/>
-          <a:lstStyle/>
-          <a:p>
-            <a:pPr lvl="0" indent="0" marL="0">
-              <a:buNone/>
-            </a:pPr>
-            <a:r>
-              <a:rPr/>
-              <a:t>Welcome</a:t>
-            </a:r>
-          </a:p>
-        </p:txBody>
-      </p:sp>
-      <p:sp>
-        <p:nvSpPr>
-          <p:cNvPr id="3" name="Content Placeholder 2"/>
-          <p:cNvSpPr>
-            <a:spLocks noGrp="1"/>
-          </p:cNvSpPr>
-          <p:nvPr>
-            <p:ph idx="1"/>
-          </p:nvPr>
-        </p:nvSpPr>
-        <p:spPr>
-          <a:xfrm>
-            <a:off x="457200" y="1200151"/>
-            <a:ext cx="8229600" cy="3394472"/>
-          </a:xfrm>
-        </p:spPr>
-        <p:txBody>
-          <a:bodyPr/>
-          <a:lstStyle/>
-          <a:p>
-            <a:pPr lvl="0"/>
-            <a:r>
-              <a:rPr/>
-              <a:t>10 lessons, 3 hours each, every Friday until 27 November</a:t>
-            </a:r>
-          </a:p>
-          <a:p>
-            <a:pPr lvl="0"/>
-            <a:r>
-              <a:rPr/>
-              <a:t>A first course in </a:t>
-            </a:r>
-            <a:r>
-              <a:rPr b="1"/>
-              <a:t>machine learning</a:t>
-            </a:r>
-            <a:r>
-              <a:rPr/>
-              <a:t>, for people who can already program</a:t>
-            </a:r>
-          </a:p>
-          <a:p>
-            <a:pPr lvl="0"/>
-            <a:r>
-              <a:rPr/>
-              <a:t>Foundations, not products</a:t>
-            </a:r>
-          </a:p>
-        </p:txBody>
-      </p:sp>
-    </p:spTree>
-  </p:cSld>
-</p:sld>
-</file>
-
-<file path=ppt/slides/slide20.xml><?xml version="1.0" encoding="utf-8"?>
+<file path=ppt/slides/slide22.xml><?xml version="1.0" encoding="utf-8"?>
 <p:sld xmlns:a="http://schemas.openxmlformats.org/drawingml/2006/main" xmlns:r="http://schemas.openxmlformats.org/officeDocument/2006/relationships" xmlns:p="http://schemas.openxmlformats.org/presentationml/2006/main">
   <p:cSld>
     <p:spTree>
@@ -11428,7 +12309,7 @@
 </p:sld>
 </file>
 
-<file path=ppt/slides/slide21.xml><?xml version="1.0" encoding="utf-8"?>
+<file path=ppt/slides/slide23.xml><?xml version="1.0" encoding="utf-8"?>
 <p:sld xmlns:a="http://schemas.openxmlformats.org/drawingml/2006/main" xmlns:r="http://schemas.openxmlformats.org/officeDocument/2006/relationships" xmlns:p="http://schemas.openxmlformats.org/presentationml/2006/main">
   <p:cSld>
     <p:spTree>
@@ -11540,7 +12421,7 @@
 </p:sld>
 </file>
 
-<file path=ppt/slides/slide22.xml><?xml version="1.0" encoding="utf-8"?>
+<file path=ppt/slides/slide24.xml><?xml version="1.0" encoding="utf-8"?>
 <p:sld xmlns:a="http://schemas.openxmlformats.org/drawingml/2006/main" xmlns:r="http://schemas.openxmlformats.org/officeDocument/2006/relationships" xmlns:p="http://schemas.openxmlformats.org/presentationml/2006/main">
   <p:cSld>
     <p:spTree>
@@ -11660,7 +12541,7 @@
 </p:sld>
 </file>
 
-<file path=ppt/slides/slide23.xml><?xml version="1.0" encoding="utf-8"?>
+<file path=ppt/slides/slide25.xml><?xml version="1.0" encoding="utf-8"?>
 <p:sld xmlns:a="http://schemas.openxmlformats.org/drawingml/2006/main" xmlns:r="http://schemas.openxmlformats.org/officeDocument/2006/relationships" xmlns:p="http://schemas.openxmlformats.org/presentationml/2006/main">
   <p:cSld>
     <p:spTree>
@@ -11780,7 +12661,7 @@
 </p:sld>
 </file>
 
-<file path=ppt/slides/slide24.xml><?xml version="1.0" encoding="utf-8"?>
+<file path=ppt/slides/slide26.xml><?xml version="1.0" encoding="utf-8"?>
 <p:sld xmlns:a="http://schemas.openxmlformats.org/drawingml/2006/main" xmlns:r="http://schemas.openxmlformats.org/officeDocument/2006/relationships" xmlns:p="http://schemas.openxmlformats.org/presentationml/2006/main">
   <p:cSld>
     <p:spTree>
@@ -11892,7 +12773,7 @@
 </p:sld>
 </file>
 
-<file path=ppt/slides/slide25.xml><?xml version="1.0" encoding="utf-8"?>
+<file path=ppt/slides/slide27.xml><?xml version="1.0" encoding="utf-8"?>
 <p:sld xmlns:a="http://schemas.openxmlformats.org/drawingml/2006/main" xmlns:r="http://schemas.openxmlformats.org/officeDocument/2006/relationships" xmlns:p="http://schemas.openxmlformats.org/presentationml/2006/main">
   <p:cSld>
     <p:spTree>
@@ -12004,7 +12885,7 @@
 </p:sld>
 </file>
 
-<file path=ppt/slides/slide26.xml><?xml version="1.0" encoding="utf-8"?>
+<file path=ppt/slides/slide28.xml><?xml version="1.0" encoding="utf-8"?>
 <p:sld xmlns:a="http://schemas.openxmlformats.org/drawingml/2006/main" xmlns:r="http://schemas.openxmlformats.org/officeDocument/2006/relationships" xmlns:p="http://schemas.openxmlformats.org/presentationml/2006/main">
   <p:cSld>
     <p:spTree>
@@ -12116,7 +12997,7 @@
 </p:sld>
 </file>
 
-<file path=ppt/slides/slide27.xml><?xml version="1.0" encoding="utf-8"?>
+<file path=ppt/slides/slide29.xml><?xml version="1.0" encoding="utf-8"?>
 <p:sld xmlns:a="http://schemas.openxmlformats.org/drawingml/2006/main" xmlns:r="http://schemas.openxmlformats.org/officeDocument/2006/relationships" xmlns:p="http://schemas.openxmlformats.org/presentationml/2006/main">
   <p:cSld>
     <p:spTree>
@@ -12223,368 +13104,6 @@
           </a:ln>
         </p:spPr>
       </p:pic>
-    </p:spTree>
-  </p:cSld>
-</p:sld>
-</file>
-
-<file path=ppt/slides/slide28.xml><?xml version="1.0" encoding="utf-8"?>
-<p:sld xmlns:a="http://schemas.openxmlformats.org/drawingml/2006/main" xmlns:r="http://schemas.openxmlformats.org/officeDocument/2006/relationships" xmlns:p="http://schemas.openxmlformats.org/presentationml/2006/main">
-  <p:cSld>
-    <p:spTree>
-      <p:nvGrpSpPr>
-        <p:cNvPr id="1" name=""/>
-        <p:cNvGrpSpPr/>
-        <p:nvPr/>
-      </p:nvGrpSpPr>
-      <p:grpSpPr>
-        <a:xfrm>
-          <a:off x="0" y="0"/>
-          <a:ext cx="0" cy="0"/>
-          <a:chOff x="0" y="0"/>
-          <a:chExt cx="0" cy="0"/>
-        </a:xfrm>
-      </p:grpSpPr>
-      <p:sp>
-        <p:nvSpPr>
-          <p:cNvPr id="2" name="Title 1"/>
-          <p:cNvSpPr>
-            <a:spLocks noGrp="1"/>
-          </p:cNvSpPr>
-          <p:nvPr>
-            <p:ph type="title"/>
-          </p:nvPr>
-        </p:nvSpPr>
-        <p:spPr>
-          <a:xfrm>
-            <a:off x="457200" y="205979"/>
-            <a:ext cx="8229600" cy="857250"/>
-          </a:xfrm>
-        </p:spPr>
-        <p:txBody>
-          <a:bodyPr/>
-          <a:lstStyle/>
-          <a:p>
-            <a:pPr lvl="0" indent="0" marL="0">
-              <a:buNone/>
-            </a:pPr>
-            <a:r>
-              <a:rPr/>
-              <a:t>The pattern</a:t>
-            </a:r>
-          </a:p>
-        </p:txBody>
-      </p:sp>
-      <p:graphicFrame>
-        <p:nvGraphicFramePr>
-          <p:cNvPr id="6" name="Content Placeholder 5"/>
-          <p:cNvGraphicFramePr>
-            <a:graphicFrameLocks noGrp="1"/>
-          </p:cNvGraphicFramePr>
-          <p:nvPr>
-            <p:ph idx="1"/>
-          </p:nvPr>
-        </p:nvGraphicFramePr>
-        <p:xfrm>
-          <a:off x="457200" y="1193800"/>
-          <a:ext cx="8229600" cy="3390900"/>
-        </p:xfrm>
-        <a:graphic>
-          <a:graphicData uri="http://schemas.openxmlformats.org/drawingml/2006/table">
-            <a:tbl>
-              <a:tblPr firstRow="1" bandRow="1">
-                <a:tableStyleId>{5C22544A-7EE6-4342-B048-85BDC9FD1C3A}</a:tableStyleId>
-              </a:tblPr>
-              <a:tblGrid>
-                <a:gridCol w="2743200"/>
-                <a:gridCol w="2743200"/>
-                <a:gridCol w="2743200"/>
-              </a:tblGrid>
-              <a:tr h="0">
-                <a:tc>
-                  <a:txBody>
-                    <a:bodyPr/>
-                    <a:lstStyle/>
-                    <a:p>
-                      <a:pPr lvl="0" indent="0" marL="0">
-                        <a:buNone/>
-                      </a:pPr>
-                      <a:r>
-                        <a:rPr/>
-                        <a:t>Advance</a:t>
-                      </a:r>
-                    </a:p>
-                  </a:txBody>
-                  <a:tcPr/>
-                </a:tc>
-                <a:tc>
-                  <a:txBody>
-                    <a:bodyPr/>
-                    <a:lstStyle/>
-                    <a:p>
-                      <a:pPr lvl="0" indent="0" marL="0">
-                        <a:buNone/>
-                      </a:pPr>
-                      <a:r>
-                        <a:rPr/>
-                        <a:t>Overclaim</a:t>
-                      </a:r>
-                    </a:p>
-                  </a:txBody>
-                  <a:tcPr/>
-                </a:tc>
-                <a:tc>
-                  <a:txBody>
-                    <a:bodyPr/>
-                    <a:lstStyle/>
-                    <a:p>
-                      <a:pPr lvl="0" indent="0" marL="0">
-                        <a:buNone/>
-                      </a:pPr>
-                      <a:r>
-                        <a:rPr/>
-                        <a:t>Correction</a:t>
-                      </a:r>
-                    </a:p>
-                  </a:txBody>
-                  <a:tcPr/>
-                </a:tc>
-              </a:tr>
-              <a:tr h="0">
-                <a:tc>
-                  <a:txBody>
-                    <a:bodyPr/>
-                    <a:lstStyle/>
-                    <a:p>
-                      <a:pPr lvl="0" indent="0" marL="0">
-                        <a:buNone/>
-                      </a:pPr>
-                      <a:r>
-                        <a:rPr/>
-                        <a:t>Perceptron learns</a:t>
-                      </a:r>
-                    </a:p>
-                  </a:txBody>
-                </a:tc>
-                <a:tc>
-                  <a:txBody>
-                    <a:bodyPr/>
-                    <a:lstStyle/>
-                    <a:p>
-                      <a:pPr lvl="0" indent="0" marL="0">
-                        <a:buNone/>
-                      </a:pPr>
-                      <a:r>
-                        <a:rPr/>
-                        <a:t>Machines that walk and talk</a:t>
-                      </a:r>
-                    </a:p>
-                  </a:txBody>
-                </a:tc>
-                <a:tc>
-                  <a:txBody>
-                    <a:bodyPr/>
-                    <a:lstStyle/>
-                    <a:p>
-                      <a:pPr lvl="0" indent="0" marL="0">
-                        <a:buNone/>
-                      </a:pPr>
-                      <a:r>
-                        <a:rPr/>
-                        <a:t>XOR, first winter</a:t>
-                      </a:r>
-                    </a:p>
-                  </a:txBody>
-                </a:tc>
-              </a:tr>
-              <a:tr h="0">
-                <a:tc>
-                  <a:txBody>
-                    <a:bodyPr/>
-                    <a:lstStyle/>
-                    <a:p>
-                      <a:pPr lvl="0" indent="0" marL="0">
-                        <a:buNone/>
-                      </a:pPr>
-                      <a:r>
-                        <a:rPr/>
-                        <a:t>Backprop trains depth</a:t>
-                      </a:r>
-                    </a:p>
-                  </a:txBody>
-                </a:tc>
-                <a:tc>
-                  <a:txBody>
-                    <a:bodyPr/>
-                    <a:lstStyle/>
-                    <a:p>
-                      <a:pPr lvl="0" indent="0" marL="0">
-                        <a:buNone/>
-                      </a:pPr>
-                      <a:r>
-                        <a:rPr/>
-                        <a:t>Networks solve everything</a:t>
-                      </a:r>
-                    </a:p>
-                  </a:txBody>
-                </a:tc>
-                <a:tc>
-                  <a:txBody>
-                    <a:bodyPr/>
-                    <a:lstStyle/>
-                    <a:p>
-                      <a:pPr lvl="0" indent="0" marL="0">
-                        <a:buNone/>
-                      </a:pPr>
-                      <a:r>
-                        <a:rPr/>
-                        <a:t>No data, second winter</a:t>
-                      </a:r>
-                    </a:p>
-                  </a:txBody>
-                </a:tc>
-              </a:tr>
-              <a:tr h="0">
-                <a:tc>
-                  <a:txBody>
-                    <a:bodyPr/>
-                    <a:lstStyle/>
-                    <a:p>
-                      <a:pPr lvl="0" indent="0" marL="0">
-                        <a:buNone/>
-                      </a:pPr>
-                      <a:r>
-                        <a:rPr/>
-                        <a:t>Scale delivers</a:t>
-                      </a:r>
-                    </a:p>
-                  </a:txBody>
-                </a:tc>
-                <a:tc>
-                  <a:txBody>
-                    <a:bodyPr/>
-                    <a:lstStyle/>
-                    <a:p>
-                      <a:pPr lvl="0" indent="0" marL="0">
-                        <a:buNone/>
-                      </a:pPr>
-                      <a:r>
-                        <a:rPr/>
-                        <a:t>?</a:t>
-                      </a:r>
-                    </a:p>
-                  </a:txBody>
-                </a:tc>
-                <a:tc>
-                  <a:txBody>
-                    <a:bodyPr/>
-                    <a:lstStyle/>
-                    <a:p>
-                      <a:pPr lvl="0" indent="0" marL="0">
-                        <a:buNone/>
-                      </a:pPr>
-                      <a:r>
-                        <a:rPr/>
-                        <a:t>?</a:t>
-                      </a:r>
-                    </a:p>
-                  </a:txBody>
-                </a:tc>
-              </a:tr>
-            </a:tbl>
-          </a:graphicData>
-        </a:graphic>
-      </p:graphicFrame>
-    </p:spTree>
-  </p:cSld>
-</p:sld>
-</file>
-
-<file path=ppt/slides/slide29.xml><?xml version="1.0" encoding="utf-8"?>
-<p:sld xmlns:a="http://schemas.openxmlformats.org/drawingml/2006/main" xmlns:r="http://schemas.openxmlformats.org/officeDocument/2006/relationships" xmlns:p="http://schemas.openxmlformats.org/presentationml/2006/main">
-  <p:cSld>
-    <p:spTree>
-      <p:nvGrpSpPr>
-        <p:cNvPr id="1" name=""/>
-        <p:cNvGrpSpPr/>
-        <p:nvPr/>
-      </p:nvGrpSpPr>
-      <p:grpSpPr>
-        <a:xfrm>
-          <a:off x="0" y="0"/>
-          <a:ext cx="0" cy="0"/>
-          <a:chOff x="0" y="0"/>
-          <a:chExt cx="0" cy="0"/>
-        </a:xfrm>
-      </p:grpSpPr>
-      <p:sp>
-        <p:nvSpPr>
-          <p:cNvPr id="2" name="Title 1"/>
-          <p:cNvSpPr>
-            <a:spLocks noGrp="1"/>
-          </p:cNvSpPr>
-          <p:nvPr>
-            <p:ph type="title"/>
-          </p:nvPr>
-        </p:nvSpPr>
-        <p:spPr>
-          <a:xfrm>
-            <a:off x="457200" y="205979"/>
-            <a:ext cx="8229600" cy="857250"/>
-          </a:xfrm>
-        </p:spPr>
-        <p:txBody>
-          <a:bodyPr/>
-          <a:lstStyle/>
-          <a:p>
-            <a:pPr lvl="0" indent="0" marL="0">
-              <a:buNone/>
-            </a:pPr>
-            <a:r>
-              <a:rPr/>
-              <a:t>Three kinds of learning</a:t>
-            </a:r>
-          </a:p>
-        </p:txBody>
-      </p:sp>
-      <p:sp>
-        <p:nvSpPr>
-          <p:cNvPr id="3" name="Content Placeholder 2"/>
-          <p:cNvSpPr>
-            <a:spLocks noGrp="1"/>
-          </p:cNvSpPr>
-          <p:nvPr>
-            <p:ph idx="1"/>
-          </p:nvPr>
-        </p:nvSpPr>
-        <p:spPr>
-          <a:xfrm>
-            <a:off x="457200" y="1200151"/>
-            <a:ext cx="8229600" cy="3394472"/>
-          </a:xfrm>
-        </p:spPr>
-        <p:txBody>
-          <a:bodyPr/>
-          <a:lstStyle/>
-          <a:p>
-            <a:pPr lvl="0" indent="0" marL="0">
-              <a:buNone/>
-            </a:pPr>
-            <a:r>
-              <a:rPr/>
-              <a:t>The taxonomy divides by </a:t>
-            </a:r>
-            <a:r>
-              <a:rPr b="1"/>
-              <a:t>where the target comes from</a:t>
-            </a:r>
-            <a:r>
-              <a:rPr/>
-              <a:t> — not by algorithm.</a:t>
-            </a:r>
-          </a:p>
-        </p:txBody>
-      </p:sp>
     </p:spTree>
   </p:cSld>
 </p:sld>
@@ -12904,70 +13423,231 @@
             </a:pPr>
             <a:r>
               <a:rPr/>
-              <a:t>Supervised</a:t>
-            </a:r>
-          </a:p>
-        </p:txBody>
-      </p:sp>
-      <p:sp>
-        <p:nvSpPr>
-          <p:cNvPr id="3" name="Content Placeholder 2"/>
-          <p:cNvSpPr>
-            <a:spLocks noGrp="1"/>
-          </p:cNvSpPr>
+              <a:t>The pattern</a:t>
+            </a:r>
+          </a:p>
+        </p:txBody>
+      </p:sp>
+      <p:graphicFrame>
+        <p:nvGraphicFramePr>
+          <p:cNvPr id="6" name="Content Placeholder 5"/>
+          <p:cNvGraphicFramePr>
+            <a:graphicFrameLocks noGrp="1"/>
+          </p:cNvGraphicFramePr>
           <p:nvPr>
             <p:ph idx="1"/>
           </p:nvPr>
-        </p:nvSpPr>
-        <p:spPr>
-          <a:xfrm>
-            <a:off x="457200" y="1200151"/>
-            <a:ext cx="8229600" cy="3394472"/>
-          </a:xfrm>
-        </p:spPr>
-        <p:txBody>
-          <a:bodyPr/>
-          <a:lstStyle/>
-          <a:p>
-            <a:pPr lvl="0" indent="0" marL="0">
-              <a:buNone/>
-            </a:pPr>
-            <a:r>
-              <a:rPr/>
-              <a:t>Each example carries a label a person produced.</a:t>
-            </a:r>
-          </a:p>
-          <a:p>
-            <a:pPr lvl="0"/>
-            <a:r>
-              <a:rPr/>
-              <a:t>Category → </a:t>
-            </a:r>
-            <a:r>
-              <a:rPr b="1"/>
-              <a:t>classification</a:t>
-            </a:r>
-          </a:p>
-          <a:p>
-            <a:pPr lvl="0"/>
-            <a:r>
-              <a:rPr/>
-              <a:t>Continuous → </a:t>
-            </a:r>
-            <a:r>
-              <a:rPr b="1"/>
-              <a:t>regression</a:t>
-            </a:r>
-          </a:p>
-          <a:p>
-            <a:pPr lvl="0"/>
-            <a:r>
-              <a:rPr/>
-              <a:t>You can check answers against truth</a:t>
-            </a:r>
-          </a:p>
-        </p:txBody>
-      </p:sp>
+        </p:nvGraphicFramePr>
+        <p:xfrm>
+          <a:off x="457200" y="1193800"/>
+          <a:ext cx="8229600" cy="3390900"/>
+        </p:xfrm>
+        <a:graphic>
+          <a:graphicData uri="http://schemas.openxmlformats.org/drawingml/2006/table">
+            <a:tbl>
+              <a:tblPr firstRow="1" bandRow="1">
+                <a:tableStyleId>{5C22544A-7EE6-4342-B048-85BDC9FD1C3A}</a:tableStyleId>
+              </a:tblPr>
+              <a:tblGrid>
+                <a:gridCol w="2743200"/>
+                <a:gridCol w="2743200"/>
+                <a:gridCol w="2743200"/>
+              </a:tblGrid>
+              <a:tr h="0">
+                <a:tc>
+                  <a:txBody>
+                    <a:bodyPr/>
+                    <a:lstStyle/>
+                    <a:p>
+                      <a:pPr lvl="0" indent="0" marL="0">
+                        <a:buNone/>
+                      </a:pPr>
+                      <a:r>
+                        <a:rPr/>
+                        <a:t>Advance</a:t>
+                      </a:r>
+                    </a:p>
+                  </a:txBody>
+                  <a:tcPr/>
+                </a:tc>
+                <a:tc>
+                  <a:txBody>
+                    <a:bodyPr/>
+                    <a:lstStyle/>
+                    <a:p>
+                      <a:pPr lvl="0" indent="0" marL="0">
+                        <a:buNone/>
+                      </a:pPr>
+                      <a:r>
+                        <a:rPr/>
+                        <a:t>Overclaim</a:t>
+                      </a:r>
+                    </a:p>
+                  </a:txBody>
+                  <a:tcPr/>
+                </a:tc>
+                <a:tc>
+                  <a:txBody>
+                    <a:bodyPr/>
+                    <a:lstStyle/>
+                    <a:p>
+                      <a:pPr lvl="0" indent="0" marL="0">
+                        <a:buNone/>
+                      </a:pPr>
+                      <a:r>
+                        <a:rPr/>
+                        <a:t>Correction</a:t>
+                      </a:r>
+                    </a:p>
+                  </a:txBody>
+                  <a:tcPr/>
+                </a:tc>
+              </a:tr>
+              <a:tr h="0">
+                <a:tc>
+                  <a:txBody>
+                    <a:bodyPr/>
+                    <a:lstStyle/>
+                    <a:p>
+                      <a:pPr lvl="0" indent="0" marL="0">
+                        <a:buNone/>
+                      </a:pPr>
+                      <a:r>
+                        <a:rPr/>
+                        <a:t>Perceptron learns</a:t>
+                      </a:r>
+                    </a:p>
+                  </a:txBody>
+                </a:tc>
+                <a:tc>
+                  <a:txBody>
+                    <a:bodyPr/>
+                    <a:lstStyle/>
+                    <a:p>
+                      <a:pPr lvl="0" indent="0" marL="0">
+                        <a:buNone/>
+                      </a:pPr>
+                      <a:r>
+                        <a:rPr/>
+                        <a:t>Machines that walk and talk</a:t>
+                      </a:r>
+                    </a:p>
+                  </a:txBody>
+                </a:tc>
+                <a:tc>
+                  <a:txBody>
+                    <a:bodyPr/>
+                    <a:lstStyle/>
+                    <a:p>
+                      <a:pPr lvl="0" indent="0" marL="0">
+                        <a:buNone/>
+                      </a:pPr>
+                      <a:r>
+                        <a:rPr/>
+                        <a:t>XOR, first winter</a:t>
+                      </a:r>
+                    </a:p>
+                  </a:txBody>
+                </a:tc>
+              </a:tr>
+              <a:tr h="0">
+                <a:tc>
+                  <a:txBody>
+                    <a:bodyPr/>
+                    <a:lstStyle/>
+                    <a:p>
+                      <a:pPr lvl="0" indent="0" marL="0">
+                        <a:buNone/>
+                      </a:pPr>
+                      <a:r>
+                        <a:rPr/>
+                        <a:t>Backprop trains depth</a:t>
+                      </a:r>
+                    </a:p>
+                  </a:txBody>
+                </a:tc>
+                <a:tc>
+                  <a:txBody>
+                    <a:bodyPr/>
+                    <a:lstStyle/>
+                    <a:p>
+                      <a:pPr lvl="0" indent="0" marL="0">
+                        <a:buNone/>
+                      </a:pPr>
+                      <a:r>
+                        <a:rPr/>
+                        <a:t>Networks solve everything</a:t>
+                      </a:r>
+                    </a:p>
+                  </a:txBody>
+                </a:tc>
+                <a:tc>
+                  <a:txBody>
+                    <a:bodyPr/>
+                    <a:lstStyle/>
+                    <a:p>
+                      <a:pPr lvl="0" indent="0" marL="0">
+                        <a:buNone/>
+                      </a:pPr>
+                      <a:r>
+                        <a:rPr/>
+                        <a:t>No data, second winter</a:t>
+                      </a:r>
+                    </a:p>
+                  </a:txBody>
+                </a:tc>
+              </a:tr>
+              <a:tr h="0">
+                <a:tc>
+                  <a:txBody>
+                    <a:bodyPr/>
+                    <a:lstStyle/>
+                    <a:p>
+                      <a:pPr lvl="0" indent="0" marL="0">
+                        <a:buNone/>
+                      </a:pPr>
+                      <a:r>
+                        <a:rPr/>
+                        <a:t>Scale delivers</a:t>
+                      </a:r>
+                    </a:p>
+                  </a:txBody>
+                </a:tc>
+                <a:tc>
+                  <a:txBody>
+                    <a:bodyPr/>
+                    <a:lstStyle/>
+                    <a:p>
+                      <a:pPr lvl="0" indent="0" marL="0">
+                        <a:buNone/>
+                      </a:pPr>
+                      <a:r>
+                        <a:rPr/>
+                        <a:t>?</a:t>
+                      </a:r>
+                    </a:p>
+                  </a:txBody>
+                </a:tc>
+                <a:tc>
+                  <a:txBody>
+                    <a:bodyPr/>
+                    <a:lstStyle/>
+                    <a:p>
+                      <a:pPr lvl="0" indent="0" marL="0">
+                        <a:buNone/>
+                      </a:pPr>
+                      <a:r>
+                        <a:rPr/>
+                        <a:t>?</a:t>
+                      </a:r>
+                    </a:p>
+                  </a:txBody>
+                </a:tc>
+              </a:tr>
+            </a:tbl>
+          </a:graphicData>
+        </a:graphic>
+      </p:graphicFrame>
     </p:spTree>
   </p:cSld>
 </p:sld>
@@ -13015,7 +13695,7 @@
             </a:pPr>
             <a:r>
               <a:rPr/>
-              <a:t>Unsupervised</a:t>
+              <a:t>Three kinds of learning</a:t>
             </a:r>
           </a:p>
         </p:txBody>
@@ -13045,28 +13725,15 @@
             </a:pPr>
             <a:r>
               <a:rPr/>
-              <a:t>No targets at all. Find structure.</a:t>
-            </a:r>
-          </a:p>
-          <a:p>
-            <a:pPr lvl="0"/>
-            <a:r>
-              <a:rPr/>
-              <a:t>Groups → clustering</a:t>
-            </a:r>
-          </a:p>
-          <a:p>
-            <a:pPr lvl="0"/>
-            <a:r>
-              <a:rPr/>
-              <a:t>Fewer dimensions → dimensionality reduction</a:t>
-            </a:r>
-          </a:p>
-          <a:p>
-            <a:pPr lvl="0"/>
-            <a:r>
-              <a:rPr/>
-              <a:t>Odd points → anomaly detection</a:t>
+              <a:t>The taxonomy divides by </a:t>
+            </a:r>
+            <a:r>
+              <a:rPr b="1"/>
+              <a:t>where the target comes from</a:t>
+            </a:r>
+            <a:r>
+              <a:rPr/>
+              <a:t> — not by algorithm.</a:t>
             </a:r>
           </a:p>
         </p:txBody>
@@ -13077,6 +13744,220 @@
 </file>
 
 <file path=ppt/slides/slide32.xml><?xml version="1.0" encoding="utf-8"?>
+<p:sld xmlns:a="http://schemas.openxmlformats.org/drawingml/2006/main" xmlns:r="http://schemas.openxmlformats.org/officeDocument/2006/relationships" xmlns:p="http://schemas.openxmlformats.org/presentationml/2006/main">
+  <p:cSld>
+    <p:spTree>
+      <p:nvGrpSpPr>
+        <p:cNvPr id="1" name=""/>
+        <p:cNvGrpSpPr/>
+        <p:nvPr/>
+      </p:nvGrpSpPr>
+      <p:grpSpPr>
+        <a:xfrm>
+          <a:off x="0" y="0"/>
+          <a:ext cx="0" cy="0"/>
+          <a:chOff x="0" y="0"/>
+          <a:chExt cx="0" cy="0"/>
+        </a:xfrm>
+      </p:grpSpPr>
+      <p:sp>
+        <p:nvSpPr>
+          <p:cNvPr id="2" name="Title 1"/>
+          <p:cNvSpPr>
+            <a:spLocks noGrp="1"/>
+          </p:cNvSpPr>
+          <p:nvPr>
+            <p:ph type="title"/>
+          </p:nvPr>
+        </p:nvSpPr>
+        <p:spPr>
+          <a:xfrm>
+            <a:off x="457200" y="205979"/>
+            <a:ext cx="8229600" cy="857250"/>
+          </a:xfrm>
+        </p:spPr>
+        <p:txBody>
+          <a:bodyPr/>
+          <a:lstStyle/>
+          <a:p>
+            <a:pPr lvl="0" indent="0" marL="0">
+              <a:buNone/>
+            </a:pPr>
+            <a:r>
+              <a:rPr/>
+              <a:t>Supervised</a:t>
+            </a:r>
+          </a:p>
+        </p:txBody>
+      </p:sp>
+      <p:sp>
+        <p:nvSpPr>
+          <p:cNvPr id="3" name="Content Placeholder 2"/>
+          <p:cNvSpPr>
+            <a:spLocks noGrp="1"/>
+          </p:cNvSpPr>
+          <p:nvPr>
+            <p:ph idx="1"/>
+          </p:nvPr>
+        </p:nvSpPr>
+        <p:spPr>
+          <a:xfrm>
+            <a:off x="457200" y="1200151"/>
+            <a:ext cx="8229600" cy="3394472"/>
+          </a:xfrm>
+        </p:spPr>
+        <p:txBody>
+          <a:bodyPr/>
+          <a:lstStyle/>
+          <a:p>
+            <a:pPr lvl="0" indent="0" marL="0">
+              <a:buNone/>
+            </a:pPr>
+            <a:r>
+              <a:rPr/>
+              <a:t>Each example carries a label a person produced.</a:t>
+            </a:r>
+          </a:p>
+          <a:p>
+            <a:pPr lvl="0"/>
+            <a:r>
+              <a:rPr/>
+              <a:t>Category → </a:t>
+            </a:r>
+            <a:r>
+              <a:rPr b="1"/>
+              <a:t>classification</a:t>
+            </a:r>
+          </a:p>
+          <a:p>
+            <a:pPr lvl="0"/>
+            <a:r>
+              <a:rPr/>
+              <a:t>Continuous → </a:t>
+            </a:r>
+            <a:r>
+              <a:rPr b="1"/>
+              <a:t>regression</a:t>
+            </a:r>
+          </a:p>
+          <a:p>
+            <a:pPr lvl="0"/>
+            <a:r>
+              <a:rPr/>
+              <a:t>You can check answers against truth</a:t>
+            </a:r>
+          </a:p>
+        </p:txBody>
+      </p:sp>
+    </p:spTree>
+  </p:cSld>
+</p:sld>
+</file>
+
+<file path=ppt/slides/slide33.xml><?xml version="1.0" encoding="utf-8"?>
+<p:sld xmlns:a="http://schemas.openxmlformats.org/drawingml/2006/main" xmlns:r="http://schemas.openxmlformats.org/officeDocument/2006/relationships" xmlns:p="http://schemas.openxmlformats.org/presentationml/2006/main">
+  <p:cSld>
+    <p:spTree>
+      <p:nvGrpSpPr>
+        <p:cNvPr id="1" name=""/>
+        <p:cNvGrpSpPr/>
+        <p:nvPr/>
+      </p:nvGrpSpPr>
+      <p:grpSpPr>
+        <a:xfrm>
+          <a:off x="0" y="0"/>
+          <a:ext cx="0" cy="0"/>
+          <a:chOff x="0" y="0"/>
+          <a:chExt cx="0" cy="0"/>
+        </a:xfrm>
+      </p:grpSpPr>
+      <p:sp>
+        <p:nvSpPr>
+          <p:cNvPr id="2" name="Title 1"/>
+          <p:cNvSpPr>
+            <a:spLocks noGrp="1"/>
+          </p:cNvSpPr>
+          <p:nvPr>
+            <p:ph type="title"/>
+          </p:nvPr>
+        </p:nvSpPr>
+        <p:spPr>
+          <a:xfrm>
+            <a:off x="457200" y="205979"/>
+            <a:ext cx="8229600" cy="857250"/>
+          </a:xfrm>
+        </p:spPr>
+        <p:txBody>
+          <a:bodyPr/>
+          <a:lstStyle/>
+          <a:p>
+            <a:pPr lvl="0" indent="0" marL="0">
+              <a:buNone/>
+            </a:pPr>
+            <a:r>
+              <a:rPr/>
+              <a:t>Unsupervised</a:t>
+            </a:r>
+          </a:p>
+        </p:txBody>
+      </p:sp>
+      <p:sp>
+        <p:nvSpPr>
+          <p:cNvPr id="3" name="Content Placeholder 2"/>
+          <p:cNvSpPr>
+            <a:spLocks noGrp="1"/>
+          </p:cNvSpPr>
+          <p:nvPr>
+            <p:ph idx="1"/>
+          </p:nvPr>
+        </p:nvSpPr>
+        <p:spPr>
+          <a:xfrm>
+            <a:off x="457200" y="1200151"/>
+            <a:ext cx="8229600" cy="3394472"/>
+          </a:xfrm>
+        </p:spPr>
+        <p:txBody>
+          <a:bodyPr/>
+          <a:lstStyle/>
+          <a:p>
+            <a:pPr lvl="0" indent="0" marL="0">
+              <a:buNone/>
+            </a:pPr>
+            <a:r>
+              <a:rPr/>
+              <a:t>No targets at all. Find structure.</a:t>
+            </a:r>
+          </a:p>
+          <a:p>
+            <a:pPr lvl="0"/>
+            <a:r>
+              <a:rPr/>
+              <a:t>Groups → clustering</a:t>
+            </a:r>
+          </a:p>
+          <a:p>
+            <a:pPr lvl="0"/>
+            <a:r>
+              <a:rPr/>
+              <a:t>Fewer dimensions → dimensionality reduction</a:t>
+            </a:r>
+          </a:p>
+          <a:p>
+            <a:pPr lvl="0"/>
+            <a:r>
+              <a:rPr/>
+              <a:t>Odd points → anomaly detection</a:t>
+            </a:r>
+          </a:p>
+        </p:txBody>
+      </p:sp>
+    </p:spTree>
+  </p:cSld>
+</p:sld>
+</file>
+
+<file path=ppt/slides/slide34.xml><?xml version="1.0" encoding="utf-8"?>
 <p:sld xmlns:a="http://schemas.openxmlformats.org/drawingml/2006/main" xmlns:r="http://schemas.openxmlformats.org/officeDocument/2006/relationships" xmlns:p="http://schemas.openxmlformats.org/presentationml/2006/main">
   <p:cSld>
     <p:spTree>
@@ -13197,7 +14078,7 @@
 </p:sld>
 </file>
 
-<file path=ppt/slides/slide33.xml><?xml version="1.0" encoding="utf-8"?>
+<file path=ppt/slides/slide35.xml><?xml version="1.0" encoding="utf-8"?>
 <p:sld xmlns:a="http://schemas.openxmlformats.org/drawingml/2006/main" xmlns:r="http://schemas.openxmlformats.org/officeDocument/2006/relationships" xmlns:p="http://schemas.openxmlformats.org/presentationml/2006/main">
   <p:cSld>
     <p:spTree>
@@ -13279,7 +14160,7 @@
 </p:sld>
 </file>
 
-<file path=ppt/slides/slide34.xml><?xml version="1.0" encoding="utf-8"?>
+<file path=ppt/slides/slide36.xml><?xml version="1.0" encoding="utf-8"?>
 <p:sld xmlns:a="http://schemas.openxmlformats.org/drawingml/2006/main" xmlns:r="http://schemas.openxmlformats.org/officeDocument/2006/relationships" xmlns:p="http://schemas.openxmlformats.org/presentationml/2006/main">
   <p:cSld>
     <p:spTree>
@@ -13607,7 +14488,7 @@
 </p:sld>
 </file>
 
-<file path=ppt/slides/slide35.xml><?xml version="1.0" encoding="utf-8"?>
+<file path=ppt/slides/slide37.xml><?xml version="1.0" encoding="utf-8"?>
 <p:sld xmlns:a="http://schemas.openxmlformats.org/drawingml/2006/main" xmlns:r="http://schemas.openxmlformats.org/officeDocument/2006/relationships" xmlns:p="http://schemas.openxmlformats.org/presentationml/2006/main">
   <p:cSld>
     <p:spTree>
@@ -13689,7 +14570,7 @@
 </p:sld>
 </file>
 
-<file path=ppt/slides/slide36.xml><?xml version="1.0" encoding="utf-8"?>
+<file path=ppt/slides/slide38.xml><?xml version="1.0" encoding="utf-8"?>
 <p:sld xmlns:a="http://schemas.openxmlformats.org/drawingml/2006/main" xmlns:r="http://schemas.openxmlformats.org/officeDocument/2006/relationships" xmlns:p="http://schemas.openxmlformats.org/presentationml/2006/main">
   <p:cSld>
     <p:spTree>
@@ -13718,8 +14599,8 @@
         </p:nvSpPr>
         <p:spPr>
           <a:xfrm>
-            <a:off x="457200" y="205740"/>
-            <a:ext cx="8229600" cy="874395"/>
+            <a:off x="457200" y="205979"/>
+            <a:ext cx="8229600" cy="857250"/>
           </a:xfrm>
         </p:spPr>
         <p:txBody>
@@ -13738,18 +14619,18 @@
       </p:sp>
       <p:sp>
         <p:nvSpPr>
-          <p:cNvPr id="4" name="Text Placeholder 3"/>
-          <p:cNvSpPr>
-            <a:spLocks noGrp="1"/>
-          </p:cNvSpPr>
-          <p:nvPr>
-            <p:ph idx="2" sz="half" type="body"/>
+          <p:cNvPr id="3" name="Content Placeholder 2"/>
+          <p:cNvSpPr>
+            <a:spLocks noGrp="1"/>
+          </p:cNvSpPr>
+          <p:nvPr>
+            <p:ph idx="1"/>
           </p:nvPr>
         </p:nvSpPr>
         <p:spPr>
           <a:xfrm>
-            <a:off x="457200" y="1183005"/>
-            <a:ext cx="8229600" cy="1311592"/>
+            <a:off x="457200" y="1200151"/>
+            <a:ext cx="8229600" cy="3394472"/>
           </a:xfrm>
         </p:spPr>
         <p:txBody>
@@ -13773,6 +14654,58 @@
             <a:pPr lvl="0"/>
             <a:r>
               <a:rPr b="1"/>
+              <a:t>Which error is worse?</a:t>
+            </a:r>
+          </a:p>
+        </p:txBody>
+      </p:sp>
+    </p:spTree>
+  </p:cSld>
+</p:sld>
+</file>
+
+<file path=ppt/slides/slide39.xml><?xml version="1.0" encoding="utf-8"?>
+<p:sld xmlns:a="http://schemas.openxmlformats.org/drawingml/2006/main" xmlns:r="http://schemas.openxmlformats.org/officeDocument/2006/relationships" xmlns:p="http://schemas.openxmlformats.org/presentationml/2006/main">
+  <p:cSld>
+    <p:spTree>
+      <p:nvGrpSpPr>
+        <p:cNvPr id="1" name=""/>
+        <p:cNvGrpSpPr/>
+        <p:nvPr/>
+      </p:nvGrpSpPr>
+      <p:grpSpPr>
+        <a:xfrm>
+          <a:off x="0" y="0"/>
+          <a:ext cx="0" cy="0"/>
+          <a:chOff x="0" y="0"/>
+          <a:chExt cx="0" cy="0"/>
+        </a:xfrm>
+      </p:grpSpPr>
+      <p:sp>
+        <p:nvSpPr>
+          <p:cNvPr id="2" name="Title 1"/>
+          <p:cNvSpPr>
+            <a:spLocks noGrp="1"/>
+          </p:cNvSpPr>
+          <p:nvPr>
+            <p:ph type="title"/>
+          </p:nvPr>
+        </p:nvSpPr>
+        <p:spPr>
+          <a:xfrm>
+            <a:off x="457200" y="205979"/>
+            <a:ext cx="8229600" cy="857250"/>
+          </a:xfrm>
+        </p:spPr>
+        <p:txBody>
+          <a:bodyPr/>
+          <a:lstStyle/>
+          <a:p>
+            <a:pPr lvl="0" indent="0" marL="0">
+              <a:buNone/>
+            </a:pPr>
+            <a:r>
+              <a:rPr/>
               <a:t>Which error is worse?</a:t>
             </a:r>
           </a:p>
@@ -13794,8 +14727,8 @@
         </p:blipFill>
         <p:spPr bwMode="auto">
           <a:xfrm>
-            <a:off x="2734600" y="2597467"/>
-            <a:ext cx="3674800" cy="1928813"/>
+            <a:off x="1362838" y="1166099"/>
+            <a:ext cx="6418323" cy="3360181"/>
           </a:xfrm>
           <a:prstGeom prst="rect">
             <a:avLst/>
@@ -13813,7 +14746,111 @@
 </p:sld>
 </file>
 
-<file path=ppt/slides/slide37.xml><?xml version="1.0" encoding="utf-8"?>
+<file path=ppt/slides/slide4.xml><?xml version="1.0" encoding="utf-8"?>
+<p:sld xmlns:a="http://schemas.openxmlformats.org/drawingml/2006/main" xmlns:r="http://schemas.openxmlformats.org/officeDocument/2006/relationships" xmlns:p="http://schemas.openxmlformats.org/presentationml/2006/main">
+  <p:cSld>
+    <p:spTree>
+      <p:nvGrpSpPr>
+        <p:cNvPr id="1" name=""/>
+        <p:cNvGrpSpPr/>
+        <p:nvPr/>
+      </p:nvGrpSpPr>
+      <p:grpSpPr>
+        <a:xfrm>
+          <a:off x="0" y="0"/>
+          <a:ext cx="0" cy="0"/>
+          <a:chOff x="0" y="0"/>
+          <a:chExt cx="0" cy="0"/>
+        </a:xfrm>
+      </p:grpSpPr>
+      <p:sp>
+        <p:nvSpPr>
+          <p:cNvPr id="2" name="Title 1"/>
+          <p:cNvSpPr>
+            <a:spLocks noGrp="1"/>
+          </p:cNvSpPr>
+          <p:nvPr>
+            <p:ph type="title"/>
+          </p:nvPr>
+        </p:nvSpPr>
+        <p:spPr>
+          <a:xfrm>
+            <a:off x="457200" y="205979"/>
+            <a:ext cx="8229600" cy="857250"/>
+          </a:xfrm>
+        </p:spPr>
+        <p:txBody>
+          <a:bodyPr/>
+          <a:lstStyle/>
+          <a:p>
+            <a:pPr lvl="0" indent="0" marL="0">
+              <a:buNone/>
+            </a:pPr>
+            <a:r>
+              <a:rPr/>
+              <a:t>What this course is not</a:t>
+            </a:r>
+          </a:p>
+        </p:txBody>
+      </p:sp>
+      <p:sp>
+        <p:nvSpPr>
+          <p:cNvPr id="3" name="Content Placeholder 2"/>
+          <p:cNvSpPr>
+            <a:spLocks noGrp="1"/>
+          </p:cNvSpPr>
+          <p:nvPr>
+            <p:ph idx="1"/>
+          </p:nvPr>
+        </p:nvSpPr>
+        <p:spPr>
+          <a:xfrm>
+            <a:off x="457200" y="1200151"/>
+            <a:ext cx="8229600" cy="3394472"/>
+          </a:xfrm>
+        </p:spPr>
+        <p:txBody>
+          <a:bodyPr/>
+          <a:lstStyle/>
+          <a:p>
+            <a:pPr lvl="0"/>
+            <a:r>
+              <a:rPr/>
+              <a:t>Not a tour of current AI products</a:t>
+            </a:r>
+          </a:p>
+          <a:p>
+            <a:pPr lvl="0"/>
+            <a:r>
+              <a:rPr/>
+              <a:t>Not a library tutorial</a:t>
+            </a:r>
+          </a:p>
+          <a:p>
+            <a:pPr lvl="0"/>
+            <a:r>
+              <a:rPr/>
+              <a:t>Not a course where you call </a:t>
+            </a:r>
+            <a:r>
+              <a:rPr>
+                <a:latin typeface="Courier"/>
+              </a:rPr>
+              <a:t>.fit()</a:t>
+            </a:r>
+            <a:r>
+              <a:rPr/>
+              <a:t> and report the number</a:t>
+            </a:r>
+          </a:p>
+        </p:txBody>
+      </p:sp>
+    </p:spTree>
+  </p:cSld>
+</p:sld>
+</file>
+
+<file path=ppt/slides/slide40.xml><?xml version="1.0" encoding="utf-8"?>
 <p:sld xmlns:a="http://schemas.openxmlformats.org/drawingml/2006/main" xmlns:r="http://schemas.openxmlformats.org/officeDocument/2006/relationships" xmlns:p="http://schemas.openxmlformats.org/presentationml/2006/main">
   <p:cSld>
     <p:spTree>
@@ -13895,7 +14932,7 @@
 </p:sld>
 </file>
 
-<file path=ppt/slides/slide38.xml><?xml version="1.0" encoding="utf-8"?>
+<file path=ppt/slides/slide41.xml><?xml version="1.0" encoding="utf-8"?>
 <p:sld xmlns:a="http://schemas.openxmlformats.org/drawingml/2006/main" xmlns:r="http://schemas.openxmlformats.org/officeDocument/2006/relationships" xmlns:p="http://schemas.openxmlformats.org/presentationml/2006/main">
   <p:cSld>
     <p:spTree>
@@ -14007,7 +15044,7 @@
 </p:sld>
 </file>
 
-<file path=ppt/slides/slide39.xml><?xml version="1.0" encoding="utf-8"?>
+<file path=ppt/slides/slide42.xml><?xml version="1.0" encoding="utf-8"?>
 <p:sld xmlns:a="http://schemas.openxmlformats.org/drawingml/2006/main" xmlns:r="http://schemas.openxmlformats.org/officeDocument/2006/relationships" xmlns:p="http://schemas.openxmlformats.org/presentationml/2006/main">
   <p:cSld>
     <p:spTree>
@@ -14107,7 +15144,7 @@
 </p:sld>
 </file>
 
-<file path=ppt/slides/slide4.xml><?xml version="1.0" encoding="utf-8"?>
+<file path=ppt/slides/slide43.xml><?xml version="1.0" encoding="utf-8"?>
 <p:sld xmlns:a="http://schemas.openxmlformats.org/drawingml/2006/main" xmlns:r="http://schemas.openxmlformats.org/officeDocument/2006/relationships" xmlns:p="http://schemas.openxmlformats.org/presentationml/2006/main">
   <p:cSld>
     <p:spTree>
@@ -14149,7 +15186,7 @@
             </a:pPr>
             <a:r>
               <a:rPr/>
-              <a:t>What this course is not</a:t>
+              <a:t>Step 5 — pipeline, not two steps</a:t>
             </a:r>
           </a:p>
         </p:txBody>
@@ -14174,34 +15211,81 @@
           <a:bodyPr/>
           <a:lstStyle/>
           <a:p>
-            <a:pPr lvl="0"/>
-            <a:r>
-              <a:rPr/>
-              <a:t>Not a tour of current AI products</a:t>
-            </a:r>
-          </a:p>
-          <a:p>
-            <a:pPr lvl="0"/>
-            <a:r>
-              <a:rPr/>
-              <a:t>Not a library tutorial</a:t>
-            </a:r>
-          </a:p>
-          <a:p>
-            <a:pPr lvl="0"/>
-            <a:r>
-              <a:rPr/>
-              <a:t>Not a course where you call </a:t>
-            </a:r>
+            <a:pPr lvl="0" indent="0">
+              <a:buNone/>
+            </a:pPr>
             <a:r>
               <a:rPr>
                 <a:latin typeface="Courier"/>
               </a:rPr>
-              <a:t>.fit()</a:t>
-            </a:r>
-            <a:r>
-              <a:rPr/>
-              <a:t> and report the number</a:t>
+              <a:t>model </a:t>
+            </a:r>
+            <a:r>
+              <a:rPr>
+                <a:solidFill>
+                  <a:srgbClr val="666666"/>
+                </a:solidFill>
+                <a:latin typeface="Courier"/>
+              </a:rPr>
+              <a:t>=</a:t>
+            </a:r>
+            <a:r>
+              <a:rPr>
+                <a:latin typeface="Courier"/>
+              </a:rPr>
+              <a:t> make_pipeline(</a:t>
+            </a:r>
+            <a:br/>
+            <a:r>
+              <a:rPr>
+                <a:latin typeface="Courier"/>
+              </a:rPr>
+              <a:t>    StandardScaler(),</a:t>
+            </a:r>
+            <a:br/>
+            <a:r>
+              <a:rPr>
+                <a:latin typeface="Courier"/>
+              </a:rPr>
+              <a:t>    LogisticRegression(max_iter</a:t>
+            </a:r>
+            <a:r>
+              <a:rPr>
+                <a:solidFill>
+                  <a:srgbClr val="666666"/>
+                </a:solidFill>
+                <a:latin typeface="Courier"/>
+              </a:rPr>
+              <a:t>=</a:t>
+            </a:r>
+            <a:r>
+              <a:rPr>
+                <a:solidFill>
+                  <a:srgbClr val="40A070"/>
+                </a:solidFill>
+                <a:latin typeface="Courier"/>
+              </a:rPr>
+              <a:t>5000</a:t>
+            </a:r>
+            <a:r>
+              <a:rPr>
+                <a:latin typeface="Courier"/>
+              </a:rPr>
+              <a:t>),</a:t>
+            </a:r>
+            <a:br/>
+            <a:r>
+              <a:rPr>
+                <a:latin typeface="Courier"/>
+              </a:rPr>
+              <a:t>)</a:t>
+            </a:r>
+            <a:br/>
+            <a:r>
+              <a:rPr>
+                <a:latin typeface="Courier"/>
+              </a:rPr>
+              <a:t>model.fit(X_train, y_train)</a:t>
             </a:r>
           </a:p>
         </p:txBody>
@@ -14211,7 +15295,7 @@
 </p:sld>
 </file>
 
-<file path=ppt/slides/slide40.xml><?xml version="1.0" encoding="utf-8"?>
+<file path=ppt/slides/slide44.xml><?xml version="1.0" encoding="utf-8"?>
 <p:sld xmlns:a="http://schemas.openxmlformats.org/drawingml/2006/main" xmlns:r="http://schemas.openxmlformats.org/officeDocument/2006/relationships" xmlns:p="http://schemas.openxmlformats.org/presentationml/2006/main">
   <p:cSld>
     <p:spTree>
@@ -14240,8 +15324,8 @@
         </p:nvSpPr>
         <p:spPr>
           <a:xfrm>
-            <a:off x="457200" y="205740"/>
-            <a:ext cx="8229600" cy="874395"/>
+            <a:off x="457200" y="205979"/>
+            <a:ext cx="8229600" cy="857250"/>
           </a:xfrm>
         </p:spPr>
         <p:txBody>
@@ -14253,106 +15337,7 @@
             </a:pPr>
             <a:r>
               <a:rPr/>
-              <a:t>Step 5 — pipeline, not two steps</a:t>
-            </a:r>
-          </a:p>
-        </p:txBody>
-      </p:sp>
-      <p:sp>
-        <p:nvSpPr>
-          <p:cNvPr id="4" name="Text Placeholder 3"/>
-          <p:cNvSpPr>
-            <a:spLocks noGrp="1"/>
-          </p:cNvSpPr>
-          <p:nvPr>
-            <p:ph idx="2" sz="half" type="body"/>
-          </p:nvPr>
-        </p:nvSpPr>
-        <p:spPr>
-          <a:xfrm>
-            <a:off x="457200" y="1183005"/>
-            <a:ext cx="8229600" cy="1311592"/>
-          </a:xfrm>
-        </p:spPr>
-        <p:txBody>
-          <a:bodyPr/>
-          <a:lstStyle/>
-          <a:p>
-            <a:pPr lvl="0" indent="0">
-              <a:buNone/>
-            </a:pPr>
-            <a:r>
-              <a:rPr>
-                <a:latin typeface="Courier"/>
-              </a:rPr>
-              <a:t>model </a:t>
-            </a:r>
-            <a:r>
-              <a:rPr>
-                <a:solidFill>
-                  <a:srgbClr val="666666"/>
-                </a:solidFill>
-                <a:latin typeface="Courier"/>
-              </a:rPr>
-              <a:t>=</a:t>
-            </a:r>
-            <a:r>
-              <a:rPr>
-                <a:latin typeface="Courier"/>
-              </a:rPr>
-              <a:t> make_pipeline(</a:t>
-            </a:r>
-            <a:br/>
-            <a:r>
-              <a:rPr>
-                <a:latin typeface="Courier"/>
-              </a:rPr>
-              <a:t>    StandardScaler(),</a:t>
-            </a:r>
-            <a:br/>
-            <a:r>
-              <a:rPr>
-                <a:latin typeface="Courier"/>
-              </a:rPr>
-              <a:t>    LogisticRegression(max_iter</a:t>
-            </a:r>
-            <a:r>
-              <a:rPr>
-                <a:solidFill>
-                  <a:srgbClr val="666666"/>
-                </a:solidFill>
-                <a:latin typeface="Courier"/>
-              </a:rPr>
-              <a:t>=</a:t>
-            </a:r>
-            <a:r>
-              <a:rPr>
-                <a:solidFill>
-                  <a:srgbClr val="40A070"/>
-                </a:solidFill>
-                <a:latin typeface="Courier"/>
-              </a:rPr>
-              <a:t>5000</a:t>
-            </a:r>
-            <a:r>
-              <a:rPr>
-                <a:latin typeface="Courier"/>
-              </a:rPr>
-              <a:t>),</a:t>
-            </a:r>
-            <a:br/>
-            <a:r>
-              <a:rPr>
-                <a:latin typeface="Courier"/>
-              </a:rPr>
-              <a:t>)</a:t>
-            </a:r>
-            <a:br/>
-            <a:r>
-              <a:rPr>
-                <a:latin typeface="Courier"/>
-              </a:rPr>
-              <a:t>model.fit(X_train, y_train)</a:t>
+              <a:t>What the pipeline prevents</a:t>
             </a:r>
           </a:p>
         </p:txBody>
@@ -14373,8 +15358,8 @@
         </p:blipFill>
         <p:spPr bwMode="auto">
           <a:xfrm>
-            <a:off x="2291462" y="2597467"/>
-            <a:ext cx="4561075" cy="1928813"/>
+            <a:off x="595157" y="1166099"/>
+            <a:ext cx="7953686" cy="3360181"/>
           </a:xfrm>
           <a:prstGeom prst="rect">
             <a:avLst/>
@@ -14392,7 +15377,7 @@
 </p:sld>
 </file>
 
-<file path=ppt/slides/slide41.xml><?xml version="1.0" encoding="utf-8"?>
+<file path=ppt/slides/slide45.xml><?xml version="1.0" encoding="utf-8"?>
 <p:sld xmlns:a="http://schemas.openxmlformats.org/drawingml/2006/main" xmlns:r="http://schemas.openxmlformats.org/officeDocument/2006/relationships" xmlns:p="http://schemas.openxmlformats.org/presentationml/2006/main">
   <p:cSld>
     <p:spTree>
@@ -14492,7 +15477,7 @@
 </p:sld>
 </file>
 
-<file path=ppt/slides/slide42.xml><?xml version="1.0" encoding="utf-8"?>
+<file path=ppt/slides/slide46.xml><?xml version="1.0" encoding="utf-8"?>
 <p:sld xmlns:a="http://schemas.openxmlformats.org/drawingml/2006/main" xmlns:r="http://schemas.openxmlformats.org/officeDocument/2006/relationships" xmlns:p="http://schemas.openxmlformats.org/presentationml/2006/main">
   <p:cSld>
     <p:spTree>
@@ -14574,7 +15559,7 @@
 </p:sld>
 </file>
 
-<file path=ppt/slides/slide43.xml><?xml version="1.0" encoding="utf-8"?>
+<file path=ppt/slides/slide47.xml><?xml version="1.0" encoding="utf-8"?>
 <p:sld xmlns:a="http://schemas.openxmlformats.org/drawingml/2006/main" xmlns:r="http://schemas.openxmlformats.org/officeDocument/2006/relationships" xmlns:p="http://schemas.openxmlformats.org/presentationml/2006/main">
   <p:cSld>
     <p:spTree>
@@ -14603,8 +15588,8 @@
         </p:nvSpPr>
         <p:spPr>
           <a:xfrm>
-            <a:off x="457200" y="205740"/>
-            <a:ext cx="8229600" cy="874395"/>
+            <a:off x="457200" y="205979"/>
+            <a:ext cx="8229600" cy="857250"/>
           </a:xfrm>
         </p:spPr>
         <p:txBody>
@@ -14623,18 +15608,18 @@
       </p:sp>
       <p:sp>
         <p:nvSpPr>
-          <p:cNvPr id="4" name="Text Placeholder 3"/>
-          <p:cNvSpPr>
-            <a:spLocks noGrp="1"/>
-          </p:cNvSpPr>
-          <p:nvPr>
-            <p:ph idx="2" sz="half" type="body"/>
+          <p:cNvPr id="3" name="Content Placeholder 2"/>
+          <p:cNvSpPr>
+            <a:spLocks noGrp="1"/>
+          </p:cNvSpPr>
+          <p:nvPr>
+            <p:ph idx="1"/>
           </p:nvPr>
         </p:nvSpPr>
         <p:spPr>
           <a:xfrm>
-            <a:off x="457200" y="1183005"/>
-            <a:ext cx="8229600" cy="1748790"/>
+            <a:off x="457200" y="1200151"/>
+            <a:ext cx="8229600" cy="3394472"/>
           </a:xfrm>
         </p:spPr>
         <p:txBody>
@@ -14667,6 +15652,58 @@
             <a:r>
               <a:rPr/>
               <a:t>They trade off against each other</a:t>
+            </a:r>
+          </a:p>
+        </p:txBody>
+      </p:sp>
+    </p:spTree>
+  </p:cSld>
+</p:sld>
+</file>
+
+<file path=ppt/slides/slide48.xml><?xml version="1.0" encoding="utf-8"?>
+<p:sld xmlns:a="http://schemas.openxmlformats.org/drawingml/2006/main" xmlns:r="http://schemas.openxmlformats.org/officeDocument/2006/relationships" xmlns:p="http://schemas.openxmlformats.org/presentationml/2006/main">
+  <p:cSld>
+    <p:spTree>
+      <p:nvGrpSpPr>
+        <p:cNvPr id="1" name=""/>
+        <p:cNvGrpSpPr/>
+        <p:nvPr/>
+      </p:nvGrpSpPr>
+      <p:grpSpPr>
+        <a:xfrm>
+          <a:off x="0" y="0"/>
+          <a:ext cx="0" cy="0"/>
+          <a:chOff x="0" y="0"/>
+          <a:chExt cx="0" cy="0"/>
+        </a:xfrm>
+      </p:grpSpPr>
+      <p:sp>
+        <p:nvSpPr>
+          <p:cNvPr id="2" name="Title 1"/>
+          <p:cNvSpPr>
+            <a:spLocks noGrp="1"/>
+          </p:cNvSpPr>
+          <p:nvPr>
+            <p:ph type="title"/>
+          </p:nvPr>
+        </p:nvSpPr>
+        <p:spPr>
+          <a:xfrm>
+            <a:off x="457200" y="205979"/>
+            <a:ext cx="8229600" cy="857250"/>
+          </a:xfrm>
+        </p:spPr>
+        <p:txBody>
+          <a:bodyPr/>
+          <a:lstStyle/>
+          <a:p>
+            <a:pPr lvl="0" indent="0" marL="0">
+              <a:buNone/>
+            </a:pPr>
+            <a:r>
+              <a:rPr/>
+              <a:t>The trade-off, drawn</a:t>
             </a:r>
           </a:p>
         </p:txBody>
@@ -14687,8 +15724,8 @@
         </p:blipFill>
         <p:spPr bwMode="auto">
           <a:xfrm>
-            <a:off x="3130584" y="3034665"/>
-            <a:ext cx="2882832" cy="1491615"/>
+            <a:off x="1325084" y="1166099"/>
+            <a:ext cx="6493832" cy="3360181"/>
           </a:xfrm>
           <a:prstGeom prst="rect">
             <a:avLst/>
@@ -14706,7 +15743,7 @@
 </p:sld>
 </file>
 
-<file path=ppt/slides/slide44.xml><?xml version="1.0" encoding="utf-8"?>
+<file path=ppt/slides/slide49.xml><?xml version="1.0" encoding="utf-8"?>
 <p:sld xmlns:a="http://schemas.openxmlformats.org/drawingml/2006/main" xmlns:r="http://schemas.openxmlformats.org/officeDocument/2006/relationships" xmlns:p="http://schemas.openxmlformats.org/presentationml/2006/main">
   <p:cSld>
     <p:spTree>
@@ -14809,7 +15846,7 @@
 </p:sld>
 </file>
 
-<file path=ppt/slides/slide45.xml><?xml version="1.0" encoding="utf-8"?>
+<file path=ppt/slides/slide5.xml><?xml version="1.0" encoding="utf-8"?>
 <p:sld xmlns:a="http://schemas.openxmlformats.org/drawingml/2006/main" xmlns:r="http://schemas.openxmlformats.org/officeDocument/2006/relationships" xmlns:p="http://schemas.openxmlformats.org/presentationml/2006/main">
   <p:cSld>
     <p:spTree>
@@ -14851,7 +15888,7 @@
             </a:pPr>
             <a:r>
               <a:rPr/>
-              <a:t>Four ways a model misleads you</a:t>
+              <a:t>Your advantage, and your gap</a:t>
             </a:r>
           </a:p>
         </p:txBody>
@@ -14876,40 +15913,29 @@
           <a:bodyPr/>
           <a:lstStyle/>
           <a:p>
-            <a:pPr lvl="0"/>
-            <a:r>
-              <a:rPr/>
-              <a:t>Leakage</a:t>
-            </a:r>
-          </a:p>
-          <a:p>
-            <a:pPr lvl="0"/>
-            <a:r>
-              <a:rPr/>
-              <a:t>Imbalance</a:t>
-            </a:r>
-          </a:p>
-          <a:p>
-            <a:pPr lvl="0"/>
-            <a:r>
-              <a:rPr/>
-              <a:t>Shortcut features</a:t>
-            </a:r>
-          </a:p>
-          <a:p>
-            <a:pPr lvl="0"/>
-            <a:r>
-              <a:rPr/>
-              <a:t>Single-split noise</a:t>
-            </a:r>
-          </a:p>
-          <a:p>
-            <a:pPr lvl="0" indent="0" marL="0">
-              <a:buNone/>
-            </a:pPr>
-            <a:r>
-              <a:rPr/>
-              <a:t>All produce numbers that pass a casual review.</a:t>
+            <a:pPr lvl="0" indent="0" marL="0">
+              <a:buNone/>
+            </a:pPr>
+            <a:r>
+              <a:rPr b="1"/>
+              <a:t>Advantage:</a:t>
+            </a:r>
+            <a:r>
+              <a:rPr/>
+              <a:t> you can program. You will implement methods, not only call them.</a:t>
+            </a:r>
+          </a:p>
+          <a:p>
+            <a:pPr lvl="0" indent="0" marL="0">
+              <a:buNone/>
+            </a:pPr>
+            <a:r>
+              <a:rPr b="1"/>
+              <a:t>Gap:</a:t>
+            </a:r>
+            <a:r>
+              <a:rPr/>
+              <a:t> you can produce results faster than you can judge them.</a:t>
             </a:r>
           </a:p>
         </p:txBody>
@@ -14919,7 +15945,7 @@
 </p:sld>
 </file>
 
-<file path=ppt/slides/slide46.xml><?xml version="1.0" encoding="utf-8"?>
+<file path=ppt/slides/slide50.xml><?xml version="1.0" encoding="utf-8"?>
 <p:sld xmlns:a="http://schemas.openxmlformats.org/drawingml/2006/main" xmlns:r="http://schemas.openxmlformats.org/officeDocument/2006/relationships" xmlns:p="http://schemas.openxmlformats.org/presentationml/2006/main">
   <p:cSld>
     <p:spTree>
@@ -14961,7 +15987,7 @@
             </a:pPr>
             <a:r>
               <a:rPr/>
-              <a:t>200 samples. 5000 random features. Coin-flip labels.</a:t>
+              <a:t>Four ways a model misleads you</a:t>
             </a:r>
           </a:p>
         </p:txBody>
@@ -14986,21 +16012,40 @@
           <a:bodyPr/>
           <a:lstStyle/>
           <a:p>
-            <a:pPr lvl="0" indent="0" marL="0">
-              <a:buNone/>
-            </a:pPr>
-            <a:r>
-              <a:rPr/>
-              <a:t>There is nothing to learn.</a:t>
-            </a:r>
-          </a:p>
-          <a:p>
-            <a:pPr lvl="0" indent="0" marL="0">
-              <a:buNone/>
-            </a:pPr>
-            <a:r>
-              <a:rPr/>
-              <a:t>Anything above 50% is an artefact.</a:t>
+            <a:pPr lvl="0"/>
+            <a:r>
+              <a:rPr/>
+              <a:t>Leakage</a:t>
+            </a:r>
+          </a:p>
+          <a:p>
+            <a:pPr lvl="0"/>
+            <a:r>
+              <a:rPr/>
+              <a:t>Imbalance</a:t>
+            </a:r>
+          </a:p>
+          <a:p>
+            <a:pPr lvl="0"/>
+            <a:r>
+              <a:rPr/>
+              <a:t>Shortcut features</a:t>
+            </a:r>
+          </a:p>
+          <a:p>
+            <a:pPr lvl="0"/>
+            <a:r>
+              <a:rPr/>
+              <a:t>Single-split noise</a:t>
+            </a:r>
+          </a:p>
+          <a:p>
+            <a:pPr lvl="0" indent="0" marL="0">
+              <a:buNone/>
+            </a:pPr>
+            <a:r>
+              <a:rPr/>
+              <a:t>All produce numbers that pass a casual review.</a:t>
             </a:r>
           </a:p>
         </p:txBody>
@@ -15010,7 +16055,98 @@
 </p:sld>
 </file>
 
-<file path=ppt/slides/slide47.xml><?xml version="1.0" encoding="utf-8"?>
+<file path=ppt/slides/slide51.xml><?xml version="1.0" encoding="utf-8"?>
+<p:sld xmlns:a="http://schemas.openxmlformats.org/drawingml/2006/main" xmlns:r="http://schemas.openxmlformats.org/officeDocument/2006/relationships" xmlns:p="http://schemas.openxmlformats.org/presentationml/2006/main">
+  <p:cSld>
+    <p:spTree>
+      <p:nvGrpSpPr>
+        <p:cNvPr id="1" name=""/>
+        <p:cNvGrpSpPr/>
+        <p:nvPr/>
+      </p:nvGrpSpPr>
+      <p:grpSpPr>
+        <a:xfrm>
+          <a:off x="0" y="0"/>
+          <a:ext cx="0" cy="0"/>
+          <a:chOff x="0" y="0"/>
+          <a:chExt cx="0" cy="0"/>
+        </a:xfrm>
+      </p:grpSpPr>
+      <p:sp>
+        <p:nvSpPr>
+          <p:cNvPr id="2" name="Title 1"/>
+          <p:cNvSpPr>
+            <a:spLocks noGrp="1"/>
+          </p:cNvSpPr>
+          <p:nvPr>
+            <p:ph type="title"/>
+          </p:nvPr>
+        </p:nvSpPr>
+        <p:spPr>
+          <a:xfrm>
+            <a:off x="457200" y="205979"/>
+            <a:ext cx="8229600" cy="857250"/>
+          </a:xfrm>
+        </p:spPr>
+        <p:txBody>
+          <a:bodyPr/>
+          <a:lstStyle/>
+          <a:p>
+            <a:pPr lvl="0" indent="0" marL="0">
+              <a:buNone/>
+            </a:pPr>
+            <a:r>
+              <a:rPr/>
+              <a:t>200 samples. 5000 random features. Coin-flip labels.</a:t>
+            </a:r>
+          </a:p>
+        </p:txBody>
+      </p:sp>
+      <p:sp>
+        <p:nvSpPr>
+          <p:cNvPr id="3" name="Content Placeholder 2"/>
+          <p:cNvSpPr>
+            <a:spLocks noGrp="1"/>
+          </p:cNvSpPr>
+          <p:nvPr>
+            <p:ph idx="1"/>
+          </p:nvPr>
+        </p:nvSpPr>
+        <p:spPr>
+          <a:xfrm>
+            <a:off x="457200" y="1200151"/>
+            <a:ext cx="8229600" cy="3394472"/>
+          </a:xfrm>
+        </p:spPr>
+        <p:txBody>
+          <a:bodyPr/>
+          <a:lstStyle/>
+          <a:p>
+            <a:pPr lvl="0" indent="0" marL="0">
+              <a:buNone/>
+            </a:pPr>
+            <a:r>
+              <a:rPr/>
+              <a:t>There is nothing to learn.</a:t>
+            </a:r>
+          </a:p>
+          <a:p>
+            <a:pPr lvl="0" indent="0" marL="0">
+              <a:buNone/>
+            </a:pPr>
+            <a:r>
+              <a:rPr/>
+              <a:t>Anything above 50% is an artefact.</a:t>
+            </a:r>
+          </a:p>
+        </p:txBody>
+      </p:sp>
+    </p:spTree>
+  </p:cSld>
+</p:sld>
+</file>
+
+<file path=ppt/slides/slide52.xml><?xml version="1.0" encoding="utf-8"?>
 <p:sld xmlns:a="http://schemas.openxmlformats.org/drawingml/2006/main" xmlns:r="http://schemas.openxmlformats.org/officeDocument/2006/relationships" xmlns:p="http://schemas.openxmlformats.org/presentationml/2006/main">
   <p:cSld>
     <p:spTree>
@@ -15092,7 +16228,7 @@
 </p:sld>
 </file>
 
-<file path=ppt/slides/slide48.xml><?xml version="1.0" encoding="utf-8"?>
+<file path=ppt/slides/slide53.xml><?xml version="1.0" encoding="utf-8"?>
 <p:sld xmlns:a="http://schemas.openxmlformats.org/drawingml/2006/main" xmlns:r="http://schemas.openxmlformats.org/officeDocument/2006/relationships" xmlns:p="http://schemas.openxmlformats.org/presentationml/2006/main">
   <p:cSld>
     <p:spTree>
@@ -15191,7 +16327,7 @@
 </p:sld>
 </file>
 
-<file path=ppt/slides/slide49.xml><?xml version="1.0" encoding="utf-8"?>
+<file path=ppt/slides/slide54.xml><?xml version="1.0" encoding="utf-8"?>
 <p:sld xmlns:a="http://schemas.openxmlformats.org/drawingml/2006/main" xmlns:r="http://schemas.openxmlformats.org/officeDocument/2006/relationships" xmlns:p="http://schemas.openxmlformats.org/presentationml/2006/main">
   <p:cSld>
     <p:spTree>
@@ -15220,8 +16356,8 @@
         </p:nvSpPr>
         <p:spPr>
           <a:xfrm>
-            <a:off x="457200" y="205740"/>
-            <a:ext cx="8229600" cy="874395"/>
+            <a:off x="457200" y="205979"/>
+            <a:ext cx="8229600" cy="857250"/>
           </a:xfrm>
         </p:spPr>
         <p:txBody>
@@ -15240,18 +16376,18 @@
       </p:sp>
       <p:sp>
         <p:nvSpPr>
-          <p:cNvPr id="4" name="Text Placeholder 3"/>
-          <p:cNvSpPr>
-            <a:spLocks noGrp="1"/>
-          </p:cNvSpPr>
-          <p:nvPr>
-            <p:ph idx="2" sz="half" type="body"/>
+          <p:cNvPr id="3" name="Content Placeholder 2"/>
+          <p:cNvSpPr>
+            <a:spLocks noGrp="1"/>
+          </p:cNvSpPr>
+          <p:nvPr>
+            <p:ph idx="1"/>
           </p:nvPr>
         </p:nvSpPr>
         <p:spPr>
           <a:xfrm>
-            <a:off x="457200" y="1183005"/>
-            <a:ext cx="8229600" cy="1311592"/>
+            <a:off x="457200" y="1200151"/>
+            <a:ext cx="8229600" cy="3394472"/>
           </a:xfrm>
         </p:spPr>
         <p:txBody>
@@ -15286,6 +16422,58 @@
             <a:r>
               <a:rPr b="1"/>
               <a:t>0.000</a:t>
+            </a:r>
+          </a:p>
+        </p:txBody>
+      </p:sp>
+    </p:spTree>
+  </p:cSld>
+</p:sld>
+</file>
+
+<file path=ppt/slides/slide55.xml><?xml version="1.0" encoding="utf-8"?>
+<p:sld xmlns:a="http://schemas.openxmlformats.org/drawingml/2006/main" xmlns:r="http://schemas.openxmlformats.org/officeDocument/2006/relationships" xmlns:p="http://schemas.openxmlformats.org/presentationml/2006/main">
+  <p:cSld>
+    <p:spTree>
+      <p:nvGrpSpPr>
+        <p:cNvPr id="1" name=""/>
+        <p:cNvGrpSpPr/>
+        <p:nvPr/>
+      </p:nvGrpSpPr>
+      <p:grpSpPr>
+        <a:xfrm>
+          <a:off x="0" y="0"/>
+          <a:ext cx="0" cy="0"/>
+          <a:chOff x="0" y="0"/>
+          <a:chExt cx="0" cy="0"/>
+        </a:xfrm>
+      </p:grpSpPr>
+      <p:sp>
+        <p:nvSpPr>
+          <p:cNvPr id="2" name="Title 1"/>
+          <p:cNvSpPr>
+            <a:spLocks noGrp="1"/>
+          </p:cNvSpPr>
+          <p:nvPr>
+            <p:ph type="title"/>
+          </p:nvPr>
+        </p:nvSpPr>
+        <p:spPr>
+          <a:xfrm>
+            <a:off x="457200" y="205979"/>
+            <a:ext cx="8229600" cy="857250"/>
+          </a:xfrm>
+        </p:spPr>
+        <p:txBody>
+          <a:bodyPr/>
+          <a:lstStyle/>
+          <a:p>
+            <a:pPr lvl="0" indent="0" marL="0">
+              <a:buNone/>
+            </a:pPr>
+            <a:r>
+              <a:rPr/>
+              <a:t>Two models, one accuracy</a:t>
             </a:r>
           </a:p>
         </p:txBody>
@@ -15306,8 +16494,8 @@
         </p:blipFill>
         <p:spPr bwMode="auto">
           <a:xfrm>
-            <a:off x="2583839" y="2597467"/>
-            <a:ext cx="3976322" cy="1928813"/>
+            <a:off x="1117432" y="1166099"/>
+            <a:ext cx="6909136" cy="3360181"/>
           </a:xfrm>
           <a:prstGeom prst="rect">
             <a:avLst/>
@@ -15325,7 +16513,7 @@
 </p:sld>
 </file>
 
-<file path=ppt/slides/slide5.xml><?xml version="1.0" encoding="utf-8"?>
+<file path=ppt/slides/slide56.xml><?xml version="1.0" encoding="utf-8"?>
 <p:sld xmlns:a="http://schemas.openxmlformats.org/drawingml/2006/main" xmlns:r="http://schemas.openxmlformats.org/officeDocument/2006/relationships" xmlns:p="http://schemas.openxmlformats.org/presentationml/2006/main">
   <p:cSld>
     <p:spTree>
@@ -15367,7 +16555,7 @@
             </a:pPr>
             <a:r>
               <a:rPr/>
-              <a:t>Your advantage, and your gap</a:t>
+              <a:t>Shortcut features</a:t>
             </a:r>
           </a:p>
         </p:txBody>
@@ -15396,25 +16584,31 @@
               <a:buNone/>
             </a:pPr>
             <a:r>
+              <a:rPr/>
+              <a:t>A column that is a </a:t>
+            </a:r>
+            <a:r>
               <a:rPr b="1"/>
-              <a:t>Advantage:</a:t>
-            </a:r>
-            <a:r>
-              <a:rPr/>
-              <a:t> you can program. You will implement methods, not only call them.</a:t>
-            </a:r>
-          </a:p>
-          <a:p>
-            <a:pPr lvl="0" indent="0" marL="0">
-              <a:buNone/>
-            </a:pPr>
-            <a:r>
-              <a:rPr b="1"/>
-              <a:t>Gap:</a:t>
-            </a:r>
-            <a:r>
-              <a:rPr/>
-              <a:t> you can produce results faster than you can judge them.</a:t>
+              <a:t>consequence</a:t>
+            </a:r>
+            <a:r>
+              <a:rPr/>
+              <a:t> of the label, not a predictor of it.</a:t>
+            </a:r>
+          </a:p>
+          <a:p>
+            <a:pPr lvl="0" indent="0" marL="0">
+              <a:buNone/>
+            </a:pPr>
+            <a:r>
+              <a:rPr>
+                <a:latin typeface="Courier"/>
+              </a:rPr>
+              <a:t>biopsy_scheduled</a:t>
+            </a:r>
+            <a:r>
+              <a:rPr/>
+              <a:t> → accuracy rises → model is worthless</a:t>
             </a:r>
           </a:p>
         </p:txBody>
@@ -15424,7 +16618,7 @@
 </p:sld>
 </file>
 
-<file path=ppt/slides/slide50.xml><?xml version="1.0" encoding="utf-8"?>
+<file path=ppt/slides/slide57.xml><?xml version="1.0" encoding="utf-8"?>
 <p:sld xmlns:a="http://schemas.openxmlformats.org/drawingml/2006/main" xmlns:r="http://schemas.openxmlformats.org/officeDocument/2006/relationships" xmlns:p="http://schemas.openxmlformats.org/presentationml/2006/main">
   <p:cSld>
     <p:spTree>
@@ -15453,8 +16647,8 @@
         </p:nvSpPr>
         <p:spPr>
           <a:xfrm>
-            <a:off x="457200" y="205740"/>
-            <a:ext cx="8229600" cy="874395"/>
+            <a:off x="457200" y="205979"/>
+            <a:ext cx="8229600" cy="857250"/>
           </a:xfrm>
         </p:spPr>
         <p:txBody>
@@ -15466,60 +16660,7 @@
             </a:pPr>
             <a:r>
               <a:rPr/>
-              <a:t>Shortcut features</a:t>
-            </a:r>
-          </a:p>
-        </p:txBody>
-      </p:sp>
-      <p:sp>
-        <p:nvSpPr>
-          <p:cNvPr id="4" name="Text Placeholder 3"/>
-          <p:cNvSpPr>
-            <a:spLocks noGrp="1"/>
-          </p:cNvSpPr>
-          <p:nvPr>
-            <p:ph idx="2" sz="half" type="body"/>
-          </p:nvPr>
-        </p:nvSpPr>
-        <p:spPr>
-          <a:xfrm>
-            <a:off x="457200" y="1183005"/>
-            <a:ext cx="8229600" cy="1748790"/>
-          </a:xfrm>
-        </p:spPr>
-        <p:txBody>
-          <a:bodyPr/>
-          <a:lstStyle/>
-          <a:p>
-            <a:pPr lvl="0" indent="0" marL="0">
-              <a:buNone/>
-            </a:pPr>
-            <a:r>
-              <a:rPr/>
-              <a:t>A column that is a </a:t>
-            </a:r>
-            <a:r>
-              <a:rPr b="1"/>
-              <a:t>consequence</a:t>
-            </a:r>
-            <a:r>
-              <a:rPr/>
-              <a:t> of the label, not a predictor of it.</a:t>
-            </a:r>
-          </a:p>
-          <a:p>
-            <a:pPr lvl="0" indent="0" marL="0">
-              <a:buNone/>
-            </a:pPr>
-            <a:r>
-              <a:rPr>
-                <a:latin typeface="Courier"/>
-              </a:rPr>
-              <a:t>biopsy_scheduled</a:t>
-            </a:r>
-            <a:r>
-              <a:rPr/>
-              <a:t> → accuracy rises → model is worthless</a:t>
+              <a:t>Does this value exist yet?</a:t>
             </a:r>
           </a:p>
         </p:txBody>
@@ -15540,8 +16681,8 @@
         </p:blipFill>
         <p:spPr bwMode="auto">
           <a:xfrm>
-            <a:off x="2247856" y="3034665"/>
-            <a:ext cx="4648288" cy="1491615"/>
+            <a:off x="457200" y="1525389"/>
+            <a:ext cx="8229600" cy="2641600"/>
           </a:xfrm>
           <a:prstGeom prst="rect">
             <a:avLst/>
@@ -15559,7 +16700,7 @@
 </p:sld>
 </file>
 
-<file path=ppt/slides/slide51.xml><?xml version="1.0" encoding="utf-8"?>
+<file path=ppt/slides/slide58.xml><?xml version="1.0" encoding="utf-8"?>
 <p:sld xmlns:a="http://schemas.openxmlformats.org/drawingml/2006/main" xmlns:r="http://schemas.openxmlformats.org/officeDocument/2006/relationships" xmlns:p="http://schemas.openxmlformats.org/presentationml/2006/main">
   <p:cSld>
     <p:spTree>
@@ -15641,7 +16782,7 @@
 </p:sld>
 </file>
 
-<file path=ppt/slides/slide52.xml><?xml version="1.0" encoding="utf-8"?>
+<file path=ppt/slides/slide59.xml><?xml version="1.0" encoding="utf-8"?>
 <p:sld xmlns:a="http://schemas.openxmlformats.org/drawingml/2006/main" xmlns:r="http://schemas.openxmlformats.org/officeDocument/2006/relationships" xmlns:p="http://schemas.openxmlformats.org/presentationml/2006/main">
   <p:cSld>
     <p:spTree>
@@ -15723,344 +16864,6 @@
             <a:r>
               <a:rPr/>
               <a:t>All four run exactly as written and return a plausible number.</a:t>
-            </a:r>
-          </a:p>
-        </p:txBody>
-      </p:sp>
-    </p:spTree>
-  </p:cSld>
-</p:sld>
-</file>
-
-<file path=ppt/slides/slide53.xml><?xml version="1.0" encoding="utf-8"?>
-<p:sld xmlns:a="http://schemas.openxmlformats.org/drawingml/2006/main" xmlns:r="http://schemas.openxmlformats.org/officeDocument/2006/relationships" xmlns:p="http://schemas.openxmlformats.org/presentationml/2006/main">
-  <p:cSld>
-    <p:spTree>
-      <p:nvGrpSpPr>
-        <p:cNvPr id="1" name=""/>
-        <p:cNvGrpSpPr/>
-        <p:nvPr/>
-      </p:nvGrpSpPr>
-      <p:grpSpPr>
-        <a:xfrm>
-          <a:off x="0" y="0"/>
-          <a:ext cx="0" cy="0"/>
-          <a:chOff x="0" y="0"/>
-          <a:chExt cx="0" cy="0"/>
-        </a:xfrm>
-      </p:grpSpPr>
-      <p:sp>
-        <p:nvSpPr>
-          <p:cNvPr id="2" name="Title 1"/>
-          <p:cNvSpPr>
-            <a:spLocks noGrp="1"/>
-          </p:cNvSpPr>
-          <p:nvPr>
-            <p:ph type="title"/>
-          </p:nvPr>
-        </p:nvSpPr>
-        <p:spPr>
-          <a:xfrm>
-            <a:off x="457200" y="205979"/>
-            <a:ext cx="8229600" cy="857250"/>
-          </a:xfrm>
-        </p:spPr>
-        <p:txBody>
-          <a:bodyPr/>
-          <a:lstStyle/>
-          <a:p>
-            <a:pPr lvl="0" indent="0" marL="0">
-              <a:buNone/>
-            </a:pPr>
-            <a:r>
-              <a:rPr/>
-              <a:t>A model is not objective</a:t>
-            </a:r>
-          </a:p>
-        </p:txBody>
-      </p:sp>
-      <p:sp>
-        <p:nvSpPr>
-          <p:cNvPr id="3" name="Content Placeholder 2"/>
-          <p:cNvSpPr>
-            <a:spLocks noGrp="1"/>
-          </p:cNvSpPr>
-          <p:nvPr>
-            <p:ph idx="1"/>
-          </p:nvPr>
-        </p:nvSpPr>
-        <p:spPr>
-          <a:xfrm>
-            <a:off x="457200" y="1200151"/>
-            <a:ext cx="8229600" cy="3394472"/>
-          </a:xfrm>
-        </p:spPr>
-        <p:txBody>
-          <a:bodyPr/>
-          <a:lstStyle/>
-          <a:p>
-            <a:pPr lvl="0"/>
-            <a:r>
-              <a:rPr/>
-              <a:t>It is a compressed summary of its training data, </a:t>
-            </a:r>
-            <a:r>
-              <a:rPr b="1"/>
-              <a:t>including its injustices</a:t>
-            </a:r>
-          </a:p>
-          <a:p>
-            <a:pPr lvl="0"/>
-            <a:r>
-              <a:rPr/>
-              <a:t>These methods find </a:t>
-            </a:r>
-            <a:r>
-              <a:rPr b="1"/>
-              <a:t>correlation</a:t>
-            </a:r>
-            <a:r>
-              <a:rPr/>
-              <a:t>, not cause</a:t>
-            </a:r>
-          </a:p>
-          <a:p>
-            <a:pPr lvl="0"/>
-            <a:r>
-              <a:rPr/>
-              <a:t>Accuracy is not the only property that matters</a:t>
-            </a:r>
-          </a:p>
-        </p:txBody>
-      </p:sp>
-    </p:spTree>
-  </p:cSld>
-</p:sld>
-</file>
-
-<file path=ppt/slides/slide54.xml><?xml version="1.0" encoding="utf-8"?>
-<p:sld xmlns:a="http://schemas.openxmlformats.org/drawingml/2006/main" xmlns:r="http://schemas.openxmlformats.org/officeDocument/2006/relationships" xmlns:p="http://schemas.openxmlformats.org/presentationml/2006/main">
-  <p:cSld>
-    <p:spTree>
-      <p:nvGrpSpPr>
-        <p:cNvPr id="1" name=""/>
-        <p:cNvGrpSpPr/>
-        <p:nvPr/>
-      </p:nvGrpSpPr>
-      <p:grpSpPr>
-        <a:xfrm>
-          <a:off x="0" y="0"/>
-          <a:ext cx="0" cy="0"/>
-          <a:chOff x="0" y="0"/>
-          <a:chExt cx="0" cy="0"/>
-        </a:xfrm>
-      </p:grpSpPr>
-      <p:sp>
-        <p:nvSpPr>
-          <p:cNvPr id="2" name="Title 1"/>
-          <p:cNvSpPr>
-            <a:spLocks noGrp="1"/>
-          </p:cNvSpPr>
-          <p:nvPr>
-            <p:ph type="title"/>
-          </p:nvPr>
-        </p:nvSpPr>
-        <p:spPr>
-          <a:xfrm>
-            <a:off x="457200" y="205979"/>
-            <a:ext cx="8229600" cy="857250"/>
-          </a:xfrm>
-        </p:spPr>
-        <p:txBody>
-          <a:bodyPr/>
-          <a:lstStyle/>
-          <a:p>
-            <a:pPr lvl="0" indent="0" marL="0">
-              <a:buNone/>
-            </a:pPr>
-            <a:r>
-              <a:rPr/>
-              <a:t>Homework — due Friday 2 October</a:t>
-            </a:r>
-          </a:p>
-        </p:txBody>
-      </p:sp>
-      <p:sp>
-        <p:nvSpPr>
-          <p:cNvPr id="3" name="Content Placeholder 2"/>
-          <p:cNvSpPr>
-            <a:spLocks noGrp="1"/>
-          </p:cNvSpPr>
-          <p:nvPr>
-            <p:ph idx="1"/>
-          </p:nvPr>
-        </p:nvSpPr>
-        <p:spPr>
-          <a:xfrm>
-            <a:off x="457200" y="1200151"/>
-            <a:ext cx="8229600" cy="3394472"/>
-          </a:xfrm>
-        </p:spPr>
-        <p:txBody>
-          <a:bodyPr/>
-          <a:lstStyle/>
-          <a:p>
-            <a:pPr lvl="0" indent="0" marL="0">
-              <a:buNone/>
-            </a:pPr>
-            <a:r>
-              <a:rPr>
-                <a:latin typeface="Courier"/>
-              </a:rPr>
-              <a:t>Exercises/01_first_workflow.md</a:t>
-            </a:r>
-          </a:p>
-          <a:p>
-            <a:pPr lvl="0" indent="0" marL="0">
-              <a:buNone/>
-            </a:pPr>
-            <a:r>
-              <a:rPr/>
-              <a:t>Wine quality: run the workflow yourself, and </a:t>
-            </a:r>
-            <a:r>
-              <a:rPr b="1"/>
-              <a:t>justify every decision</a:t>
-            </a:r>
-            <a:r>
-              <a:rPr/>
-              <a:t>.</a:t>
-            </a:r>
-          </a:p>
-          <a:p>
-            <a:pPr lvl="0"/>
-            <a:r>
-              <a:rPr/>
-              <a:t>No marks for accuracy</a:t>
-            </a:r>
-          </a:p>
-          <a:p>
-            <a:pPr lvl="0"/>
-            <a:r>
-              <a:rPr/>
-              <a:t>Marks for methodology, and for saying what your number does not mean</a:t>
-            </a:r>
-          </a:p>
-        </p:txBody>
-      </p:sp>
-    </p:spTree>
-  </p:cSld>
-</p:sld>
-</file>
-
-<file path=ppt/slides/slide55.xml><?xml version="1.0" encoding="utf-8"?>
-<p:sld xmlns:a="http://schemas.openxmlformats.org/drawingml/2006/main" xmlns:r="http://schemas.openxmlformats.org/officeDocument/2006/relationships" xmlns:p="http://schemas.openxmlformats.org/presentationml/2006/main">
-  <p:cSld>
-    <p:spTree>
-      <p:nvGrpSpPr>
-        <p:cNvPr id="1" name=""/>
-        <p:cNvGrpSpPr/>
-        <p:nvPr/>
-      </p:nvGrpSpPr>
-      <p:grpSpPr>
-        <a:xfrm>
-          <a:off x="0" y="0"/>
-          <a:ext cx="0" cy="0"/>
-          <a:chOff x="0" y="0"/>
-          <a:chExt cx="0" cy="0"/>
-        </a:xfrm>
-      </p:grpSpPr>
-      <p:sp>
-        <p:nvSpPr>
-          <p:cNvPr id="2" name="Title 1"/>
-          <p:cNvSpPr>
-            <a:spLocks noGrp="1"/>
-          </p:cNvSpPr>
-          <p:nvPr>
-            <p:ph type="title"/>
-          </p:nvPr>
-        </p:nvSpPr>
-        <p:spPr>
-          <a:xfrm>
-            <a:off x="457200" y="205979"/>
-            <a:ext cx="8229600" cy="857250"/>
-          </a:xfrm>
-        </p:spPr>
-        <p:txBody>
-          <a:bodyPr/>
-          <a:lstStyle/>
-          <a:p>
-            <a:pPr lvl="0" indent="0" marL="0">
-              <a:buNone/>
-            </a:pPr>
-            <a:r>
-              <a:rPr/>
-              <a:t>Before next week</a:t>
-            </a:r>
-          </a:p>
-        </p:txBody>
-      </p:sp>
-      <p:sp>
-        <p:nvSpPr>
-          <p:cNvPr id="3" name="Content Placeholder 2"/>
-          <p:cNvSpPr>
-            <a:spLocks noGrp="1"/>
-          </p:cNvSpPr>
-          <p:nvPr>
-            <p:ph idx="1"/>
-          </p:nvPr>
-        </p:nvSpPr>
-        <p:spPr>
-          <a:xfrm>
-            <a:off x="457200" y="1200151"/>
-            <a:ext cx="8229600" cy="3394472"/>
-          </a:xfrm>
-        </p:spPr>
-        <p:txBody>
-          <a:bodyPr/>
-          <a:lstStyle/>
-          <a:p>
-            <a:pPr lvl="0"/>
-            <a:r>
-              <a:rPr/>
-              <a:t>Get the environment running</a:t>
-            </a:r>
-          </a:p>
-          <a:p>
-            <a:pPr lvl="0"/>
-            <a:r>
-              <a:rPr/>
-              <a:t>Work the three notebooks in order</a:t>
-            </a:r>
-          </a:p>
-          <a:p>
-            <a:pPr lvl="0"/>
-            <a:r>
-              <a:rPr/>
-              <a:t>Read the handout</a:t>
-            </a:r>
-          </a:p>
-          <a:p>
-            <a:pPr lvl="0"/>
-            <a:r>
-              <a:rPr/>
-              <a:t>Take the quiz</a:t>
-            </a:r>
-          </a:p>
-          <a:p>
-            <a:pPr lvl="0"/>
-            <a:r>
-              <a:rPr b="1"/>
-              <a:t>Do the exercise</a:t>
-            </a:r>
-          </a:p>
-          <a:p>
-            <a:pPr lvl="0" indent="0" marL="0">
-              <a:buNone/>
-            </a:pPr>
-            <a:r>
-              <a:rPr/>
-              <a:t>Next: data — exploration, preparation, and leakage in earnest.</a:t>
             </a:r>
           </a:p>
         </p:txBody>
@@ -16167,6 +16970,344 @@
             <a:r>
               <a:rPr/>
               <a:t> — closed book, drawn from the handouts</a:t>
+            </a:r>
+          </a:p>
+        </p:txBody>
+      </p:sp>
+    </p:spTree>
+  </p:cSld>
+</p:sld>
+</file>
+
+<file path=ppt/slides/slide60.xml><?xml version="1.0" encoding="utf-8"?>
+<p:sld xmlns:a="http://schemas.openxmlformats.org/drawingml/2006/main" xmlns:r="http://schemas.openxmlformats.org/officeDocument/2006/relationships" xmlns:p="http://schemas.openxmlformats.org/presentationml/2006/main">
+  <p:cSld>
+    <p:spTree>
+      <p:nvGrpSpPr>
+        <p:cNvPr id="1" name=""/>
+        <p:cNvGrpSpPr/>
+        <p:nvPr/>
+      </p:nvGrpSpPr>
+      <p:grpSpPr>
+        <a:xfrm>
+          <a:off x="0" y="0"/>
+          <a:ext cx="0" cy="0"/>
+          <a:chOff x="0" y="0"/>
+          <a:chExt cx="0" cy="0"/>
+        </a:xfrm>
+      </p:grpSpPr>
+      <p:sp>
+        <p:nvSpPr>
+          <p:cNvPr id="2" name="Title 1"/>
+          <p:cNvSpPr>
+            <a:spLocks noGrp="1"/>
+          </p:cNvSpPr>
+          <p:nvPr>
+            <p:ph type="title"/>
+          </p:nvPr>
+        </p:nvSpPr>
+        <p:spPr>
+          <a:xfrm>
+            <a:off x="457200" y="205979"/>
+            <a:ext cx="8229600" cy="857250"/>
+          </a:xfrm>
+        </p:spPr>
+        <p:txBody>
+          <a:bodyPr/>
+          <a:lstStyle/>
+          <a:p>
+            <a:pPr lvl="0" indent="0" marL="0">
+              <a:buNone/>
+            </a:pPr>
+            <a:r>
+              <a:rPr/>
+              <a:t>A model is not objective</a:t>
+            </a:r>
+          </a:p>
+        </p:txBody>
+      </p:sp>
+      <p:sp>
+        <p:nvSpPr>
+          <p:cNvPr id="3" name="Content Placeholder 2"/>
+          <p:cNvSpPr>
+            <a:spLocks noGrp="1"/>
+          </p:cNvSpPr>
+          <p:nvPr>
+            <p:ph idx="1"/>
+          </p:nvPr>
+        </p:nvSpPr>
+        <p:spPr>
+          <a:xfrm>
+            <a:off x="457200" y="1200151"/>
+            <a:ext cx="8229600" cy="3394472"/>
+          </a:xfrm>
+        </p:spPr>
+        <p:txBody>
+          <a:bodyPr/>
+          <a:lstStyle/>
+          <a:p>
+            <a:pPr lvl="0"/>
+            <a:r>
+              <a:rPr/>
+              <a:t>It is a compressed summary of its training data, </a:t>
+            </a:r>
+            <a:r>
+              <a:rPr b="1"/>
+              <a:t>including its injustices</a:t>
+            </a:r>
+          </a:p>
+          <a:p>
+            <a:pPr lvl="0"/>
+            <a:r>
+              <a:rPr/>
+              <a:t>These methods find </a:t>
+            </a:r>
+            <a:r>
+              <a:rPr b="1"/>
+              <a:t>correlation</a:t>
+            </a:r>
+            <a:r>
+              <a:rPr/>
+              <a:t>, not cause</a:t>
+            </a:r>
+          </a:p>
+          <a:p>
+            <a:pPr lvl="0"/>
+            <a:r>
+              <a:rPr/>
+              <a:t>Accuracy is not the only property that matters</a:t>
+            </a:r>
+          </a:p>
+        </p:txBody>
+      </p:sp>
+    </p:spTree>
+  </p:cSld>
+</p:sld>
+</file>
+
+<file path=ppt/slides/slide61.xml><?xml version="1.0" encoding="utf-8"?>
+<p:sld xmlns:a="http://schemas.openxmlformats.org/drawingml/2006/main" xmlns:r="http://schemas.openxmlformats.org/officeDocument/2006/relationships" xmlns:p="http://schemas.openxmlformats.org/presentationml/2006/main">
+  <p:cSld>
+    <p:spTree>
+      <p:nvGrpSpPr>
+        <p:cNvPr id="1" name=""/>
+        <p:cNvGrpSpPr/>
+        <p:nvPr/>
+      </p:nvGrpSpPr>
+      <p:grpSpPr>
+        <a:xfrm>
+          <a:off x="0" y="0"/>
+          <a:ext cx="0" cy="0"/>
+          <a:chOff x="0" y="0"/>
+          <a:chExt cx="0" cy="0"/>
+        </a:xfrm>
+      </p:grpSpPr>
+      <p:sp>
+        <p:nvSpPr>
+          <p:cNvPr id="2" name="Title 1"/>
+          <p:cNvSpPr>
+            <a:spLocks noGrp="1"/>
+          </p:cNvSpPr>
+          <p:nvPr>
+            <p:ph type="title"/>
+          </p:nvPr>
+        </p:nvSpPr>
+        <p:spPr>
+          <a:xfrm>
+            <a:off x="457200" y="205979"/>
+            <a:ext cx="8229600" cy="857250"/>
+          </a:xfrm>
+        </p:spPr>
+        <p:txBody>
+          <a:bodyPr/>
+          <a:lstStyle/>
+          <a:p>
+            <a:pPr lvl="0" indent="0" marL="0">
+              <a:buNone/>
+            </a:pPr>
+            <a:r>
+              <a:rPr/>
+              <a:t>Homework — due Friday 2 October</a:t>
+            </a:r>
+          </a:p>
+        </p:txBody>
+      </p:sp>
+      <p:sp>
+        <p:nvSpPr>
+          <p:cNvPr id="3" name="Content Placeholder 2"/>
+          <p:cNvSpPr>
+            <a:spLocks noGrp="1"/>
+          </p:cNvSpPr>
+          <p:nvPr>
+            <p:ph idx="1"/>
+          </p:nvPr>
+        </p:nvSpPr>
+        <p:spPr>
+          <a:xfrm>
+            <a:off x="457200" y="1200151"/>
+            <a:ext cx="8229600" cy="3394472"/>
+          </a:xfrm>
+        </p:spPr>
+        <p:txBody>
+          <a:bodyPr/>
+          <a:lstStyle/>
+          <a:p>
+            <a:pPr lvl="0" indent="0" marL="0">
+              <a:buNone/>
+            </a:pPr>
+            <a:r>
+              <a:rPr>
+                <a:latin typeface="Courier"/>
+              </a:rPr>
+              <a:t>Exercises/01_first_workflow.md</a:t>
+            </a:r>
+          </a:p>
+          <a:p>
+            <a:pPr lvl="0" indent="0" marL="0">
+              <a:buNone/>
+            </a:pPr>
+            <a:r>
+              <a:rPr/>
+              <a:t>Wine quality: run the workflow yourself, and </a:t>
+            </a:r>
+            <a:r>
+              <a:rPr b="1"/>
+              <a:t>justify every decision</a:t>
+            </a:r>
+            <a:r>
+              <a:rPr/>
+              <a:t>.</a:t>
+            </a:r>
+          </a:p>
+          <a:p>
+            <a:pPr lvl="0"/>
+            <a:r>
+              <a:rPr/>
+              <a:t>No marks for accuracy</a:t>
+            </a:r>
+          </a:p>
+          <a:p>
+            <a:pPr lvl="0"/>
+            <a:r>
+              <a:rPr/>
+              <a:t>Marks for methodology, and for saying what your number does not mean</a:t>
+            </a:r>
+          </a:p>
+        </p:txBody>
+      </p:sp>
+    </p:spTree>
+  </p:cSld>
+</p:sld>
+</file>
+
+<file path=ppt/slides/slide62.xml><?xml version="1.0" encoding="utf-8"?>
+<p:sld xmlns:a="http://schemas.openxmlformats.org/drawingml/2006/main" xmlns:r="http://schemas.openxmlformats.org/officeDocument/2006/relationships" xmlns:p="http://schemas.openxmlformats.org/presentationml/2006/main">
+  <p:cSld>
+    <p:spTree>
+      <p:nvGrpSpPr>
+        <p:cNvPr id="1" name=""/>
+        <p:cNvGrpSpPr/>
+        <p:nvPr/>
+      </p:nvGrpSpPr>
+      <p:grpSpPr>
+        <a:xfrm>
+          <a:off x="0" y="0"/>
+          <a:ext cx="0" cy="0"/>
+          <a:chOff x="0" y="0"/>
+          <a:chExt cx="0" cy="0"/>
+        </a:xfrm>
+      </p:grpSpPr>
+      <p:sp>
+        <p:nvSpPr>
+          <p:cNvPr id="2" name="Title 1"/>
+          <p:cNvSpPr>
+            <a:spLocks noGrp="1"/>
+          </p:cNvSpPr>
+          <p:nvPr>
+            <p:ph type="title"/>
+          </p:nvPr>
+        </p:nvSpPr>
+        <p:spPr>
+          <a:xfrm>
+            <a:off x="457200" y="205979"/>
+            <a:ext cx="8229600" cy="857250"/>
+          </a:xfrm>
+        </p:spPr>
+        <p:txBody>
+          <a:bodyPr/>
+          <a:lstStyle/>
+          <a:p>
+            <a:pPr lvl="0" indent="0" marL="0">
+              <a:buNone/>
+            </a:pPr>
+            <a:r>
+              <a:rPr/>
+              <a:t>Before next week</a:t>
+            </a:r>
+          </a:p>
+        </p:txBody>
+      </p:sp>
+      <p:sp>
+        <p:nvSpPr>
+          <p:cNvPr id="3" name="Content Placeholder 2"/>
+          <p:cNvSpPr>
+            <a:spLocks noGrp="1"/>
+          </p:cNvSpPr>
+          <p:nvPr>
+            <p:ph idx="1"/>
+          </p:nvPr>
+        </p:nvSpPr>
+        <p:spPr>
+          <a:xfrm>
+            <a:off x="457200" y="1200151"/>
+            <a:ext cx="8229600" cy="3394472"/>
+          </a:xfrm>
+        </p:spPr>
+        <p:txBody>
+          <a:bodyPr/>
+          <a:lstStyle/>
+          <a:p>
+            <a:pPr lvl="0"/>
+            <a:r>
+              <a:rPr/>
+              <a:t>Get the environment running</a:t>
+            </a:r>
+          </a:p>
+          <a:p>
+            <a:pPr lvl="0"/>
+            <a:r>
+              <a:rPr/>
+              <a:t>Work the three notebooks in order</a:t>
+            </a:r>
+          </a:p>
+          <a:p>
+            <a:pPr lvl="0"/>
+            <a:r>
+              <a:rPr/>
+              <a:t>Read the handout</a:t>
+            </a:r>
+          </a:p>
+          <a:p>
+            <a:pPr lvl="0"/>
+            <a:r>
+              <a:rPr/>
+              <a:t>Take the quiz</a:t>
+            </a:r>
+          </a:p>
+          <a:p>
+            <a:pPr lvl="0"/>
+            <a:r>
+              <a:rPr b="1"/>
+              <a:t>Do the exercise</a:t>
+            </a:r>
+          </a:p>
+          <a:p>
+            <a:pPr lvl="0" indent="0" marL="0">
+              <a:buNone/>
+            </a:pPr>
+            <a:r>
+              <a:rPr/>
+              <a:t>Next: data — exploration, preparation, and leakage in earnest.</a:t>
             </a:r>
           </a:p>
         </p:txBody>

--- a/Lessons/01_introduction_and_workflow/Slides/introduction_and_workflow_slides.pptx
+++ b/Lessons/01_introduction_and_workflow/Slides/introduction_and_workflow_slides.pptx
@@ -1631,7 +1631,7 @@
             </a:pPr>
             <a:r>
               <a:rPr/>
-              <a:t>The difficulty is not that a sample is small. It is that if the same data both CHOOSES the model and JUDGES it, the judgement stops being an unbiased estimate. The analogy that works: writing the exam questions after reading the students’ answers. Nobody cheated - you let the answers influence the question.</a:t>
+              <a:t>The difficulty is not that a sample is small. It is that if the same data both CHOOSES the model and JUDGES it, the judgement stops being an unbiased estimate. The analogy that works: a revision session that happens to rehearse exactly the exam questions. Nobody cheated - the same questions both shaped the preparation and judged it.</a:t>
             </a:r>
           </a:p>
           <a:p>
@@ -11531,7 +11531,7 @@
       </p:sp>
       <p:pic>
         <p:nvPicPr>
-          <p:cNvPr descr="eq_117b158e76.png" id="0" name="Picture 1"/>
+          <p:cNvPr descr="eq_782c661939.png" id="0" name="Picture 1"/>
           <p:cNvPicPr>
             <a:picLocks noGrp="1" noChangeAspect="1"/>
           </p:cNvPicPr>
@@ -11545,8 +11545,8 @@
         </p:blipFill>
         <p:spPr bwMode="auto">
           <a:xfrm>
-            <a:off x="457200" y="2207099"/>
-            <a:ext cx="8229599" cy="2272352"/>
+            <a:off x="457202" y="2227571"/>
+            <a:ext cx="8229596" cy="2231408"/>
           </a:xfrm>
           <a:prstGeom prst="rect">
             <a:avLst/>

--- a/Lessons/01_introduction_and_workflow/Slides/introduction_and_workflow_slides.pptx
+++ b/Lessons/01_introduction_and_workflow/Slides/introduction_and_workflow_slides.pptx
@@ -1687,7 +1687,7 @@
             </a:pPr>
             <a:r>
               <a:rPr/>
-              <a:t>If someone asks “how much do we hold out?” - typically 20-30%, and the trade-off is real in both directions: a bigger test set gives a more stable estimate (the standard error falls as one over root n), a bigger training set gives a better model. Give them the concrete number from notebook 01: 143 test examples at 0.986 accuracy carries a standard error of about one percentage point, so the third decimal place is noise. With a few hundred examples both sides hurt at once, which is what cross-validation exists for - lesson 5.</a:t>
+              <a:t>If someone asks “how much do we hold out?” - typically 20-30%, and the trade-off is real in both directions: a bigger test set gives a more stable estimate (the standard error falls as one over root n), a bigger training set gives a better model. Give them the concrete number from notebook 01: 143 test examples at 0.986 accuracy carries a standard error of about one percentage point, so the third decimal place is noise. If anyone presses on the interval, concede it: 0.986 of 143 is two errors, the normal approximation is not admissible there - it returns an upper limit of 100.5% - and the honest lower bound is 95.0%, not 96.5%. Handout section 2.4 works it through. With a few hundred examples both sides hurt at once, which is what cross-validation exists for - lesson 5.</a:t>
             </a:r>
           </a:p>
           <a:p>

--- a/Lessons/01_introduction_and_workflow/Slides/introduction_and_workflow_slides.pptx
+++ b/Lessons/01_introduction_and_workflow/Slides/introduction_and_workflow_slides.pptx
@@ -1287,6 +1287,34 @@
             </a:pPr>
             <a:r>
               <a:rPr/>
+              <a:t>Say what L is, or it stays a placeholder all lesson. Simplest choice, the zero-one loss: 0 when right, 1 when wrong. Then the empirical risk IS the error rate, and accuracy is one minus it - so every score in today’s notebooks is an empirical risk under a friendlier name. Notebook 01: 0.986 on 143 examples is two mistakes, an empirical risk of 0.014.</a:t>
+            </a:r>
+          </a:p>
+          <a:p>
+            <a:pPr lvl="0" indent="0" marL="0">
+              <a:buNone/>
+            </a:pPr>
+          </a:p>
+          <a:p>
+            <a:pPr lvl="0" indent="0" marL="0">
+              <a:buNone/>
+            </a:pPr>
+            <a:r>
+              <a:rPr/>
+              <a:t>And say that choosing L is a modelling decision, not a technicality: it is where you state what counts as a bad mistake, before any model exists. Zero-one says every error costs the same, which is almost never true. Lesson 3 uses squared error, lesson 4 uses cross-entropy and then prices the two kinds of mistake separately. Handout 2.1.</a:t>
+            </a:r>
+          </a:p>
+          <a:p>
+            <a:pPr lvl="0" indent="0" marL="0">
+              <a:buNone/>
+            </a:pPr>
+          </a:p>
+          <a:p>
+            <a:pPr lvl="0" indent="0" marL="0">
+              <a:buNone/>
+            </a:pPr>
+            <a:r>
+              <a:rPr/>
               <a:t>Ask the room: what could go wrong with minimising this instead of the thing we actually want? Give them a moment. Someone usually says “it might not generalise”, which is exactly right and is the next slide.</a:t>
             </a:r>
           </a:p>
@@ -3559,7 +3587,35 @@
             </a:pPr>
             <a:r>
               <a:rPr/>
-              <a:t>Plant the difficulty now: there is no accuracy to report. The algorithm ALWAYS returns clusters, whether or not the data contains any groups. Whether they mean something is a judgement about the domain and cannot be delegated to a metric.</a:t>
+              <a:t>Plant the difficulty now, but plant the right one. It is NOT that there is nothing to minimise - k-means minimises the within-cluster sum of squares, which is an empirical risk in the sense of the slide before the break, with the loss measured against the model’s own summary instead of a label. Lesson 8 derives it and proves the algorithm decreases it every step.</a:t>
+            </a:r>
+          </a:p>
+          <a:p>
+            <a:pPr lvl="0" indent="0" marL="0">
+              <a:buNone/>
+            </a:pPr>
+          </a:p>
+          <a:p>
+            <a:pPr lvl="0" indent="0" marL="0">
+              <a:buNone/>
+            </a:pPr>
+            <a:r>
+              <a:rPr/>
+              <a:t>What is missing is ground truth to check the answer against. The algorithm ALWAYS returns clusters, whether or not the data contains any groups. Whether they mean something is a judgement about the domain and cannot be delegated to a metric. It is a validation problem, not an optimisation one - and the distinction matters, because they will meet that cost function in lesson 8 and remember what was said here.</a:t>
+            </a:r>
+          </a:p>
+          <a:p>
+            <a:pPr lvl="0" indent="0" marL="0">
+              <a:buNone/>
+            </a:pPr>
+          </a:p>
+          <a:p>
+            <a:pPr lvl="0" indent="0" marL="0">
+              <a:buNone/>
+            </a:pPr>
+            <a:r>
+              <a:rPr/>
+              <a:t>Worth thirty seconds: the overfitting gap survives the loss of the labels. One cluster per point drives the cost to exactly zero. Same memorisation, different clothes.</a:t>
             </a:r>
           </a:p>
           <a:p>
@@ -3656,6 +3712,20 @@
             <a:r>
               <a:rPr/>
               <a:t>The one they will have heard about without a clean definition, so define it precisely.</a:t>
+            </a:r>
+          </a:p>
+          <a:p>
+            <a:pPr lvl="0" indent="0" marL="0">
+              <a:buNone/>
+            </a:pPr>
+          </a:p>
+          <a:p>
+            <a:pPr lvl="0" indent="0" marL="0">
+              <a:buNone/>
+            </a:pPr>
+            <a:r>
+              <a:rPr/>
+              <a:t>Say the formal point first, because it is one sentence and it settles the taxonomy: y is manufactured from x, so everything from the first hour applies unchanged - same expected risk, same empirical risk, same gap, same reason to hold data out. The only thing that changed is that the labels became free.</a:t>
             </a:r>
           </a:p>
           <a:p>

--- a/Lessons/01_introduction_and_workflow/Slides/introduction_and_workflow_slides.pptx
+++ b/Lessons/01_introduction_and_workflow/Slides/introduction_and_workflow_slides.pptx
@@ -11391,8 +11391,8 @@
         </p:blipFill>
         <p:spPr bwMode="auto">
           <a:xfrm>
-            <a:off x="457200" y="1480939"/>
-            <a:ext cx="8229600" cy="2730500"/>
+            <a:off x="457200" y="1487289"/>
+            <a:ext cx="8229600" cy="2717800"/>
           </a:xfrm>
           <a:prstGeom prst="rect">
             <a:avLst/>
@@ -11748,8 +11748,8 @@
         </p:blipFill>
         <p:spPr bwMode="auto">
           <a:xfrm>
-            <a:off x="2458364" y="2160270"/>
-            <a:ext cx="4227271" cy="2366010"/>
+            <a:off x="2448929" y="2160270"/>
+            <a:ext cx="4246142" cy="2366010"/>
           </a:xfrm>
           <a:prstGeom prst="rect">
             <a:avLst/>
@@ -11830,8 +11830,8 @@
         </p:blipFill>
         <p:spPr bwMode="auto">
           <a:xfrm>
-            <a:off x="457200" y="1677789"/>
-            <a:ext cx="8229600" cy="2336800"/>
+            <a:off x="457200" y="1671439"/>
+            <a:ext cx="8229600" cy="2349500"/>
           </a:xfrm>
           <a:prstGeom prst="rect">
             <a:avLst/>
@@ -12360,8 +12360,8 @@
         </p:blipFill>
         <p:spPr bwMode="auto">
           <a:xfrm>
-            <a:off x="767456" y="2160270"/>
-            <a:ext cx="7609088" cy="2366010"/>
+            <a:off x="736774" y="2160270"/>
+            <a:ext cx="7670451" cy="2366010"/>
           </a:xfrm>
           <a:prstGeom prst="rect">
             <a:avLst/>
@@ -12592,8 +12592,8 @@
         </p:blipFill>
         <p:spPr bwMode="auto">
           <a:xfrm>
-            <a:off x="960174" y="1723072"/>
-            <a:ext cx="7223651" cy="2803208"/>
+            <a:off x="936872" y="1723072"/>
+            <a:ext cx="7270255" cy="2803208"/>
           </a:xfrm>
           <a:prstGeom prst="rect">
             <a:avLst/>
@@ -12712,8 +12712,8 @@
         </p:blipFill>
         <p:spPr bwMode="auto">
           <a:xfrm>
-            <a:off x="2646623" y="2160270"/>
-            <a:ext cx="3850753" cy="2366010"/>
+            <a:off x="2638797" y="2160270"/>
+            <a:ext cx="3866406" cy="2366010"/>
           </a:xfrm>
           <a:prstGeom prst="rect">
             <a:avLst/>
@@ -12824,8 +12824,8 @@
         </p:blipFill>
         <p:spPr bwMode="auto">
           <a:xfrm>
-            <a:off x="1277001" y="1723072"/>
-            <a:ext cx="6589997" cy="2803208"/>
+            <a:off x="1296158" y="1723072"/>
+            <a:ext cx="6551683" cy="2803208"/>
           </a:xfrm>
           <a:prstGeom prst="rect">
             <a:avLst/>
@@ -13048,8 +13048,8 @@
         </p:blipFill>
         <p:spPr bwMode="auto">
           <a:xfrm>
-            <a:off x="2646623" y="2160270"/>
-            <a:ext cx="3850753" cy="2366010"/>
+            <a:off x="2638797" y="2160270"/>
+            <a:ext cx="3866406" cy="2366010"/>
           </a:xfrm>
           <a:prstGeom prst="rect">
             <a:avLst/>
@@ -14797,8 +14797,8 @@
         </p:blipFill>
         <p:spPr bwMode="auto">
           <a:xfrm>
-            <a:off x="1362838" y="1166099"/>
-            <a:ext cx="6418323" cy="3360181"/>
+            <a:off x="1350253" y="1166099"/>
+            <a:ext cx="6443493" cy="3360181"/>
           </a:xfrm>
           <a:prstGeom prst="rect">
             <a:avLst/>
@@ -15428,8 +15428,8 @@
         </p:blipFill>
         <p:spPr bwMode="auto">
           <a:xfrm>
-            <a:off x="595157" y="1166099"/>
-            <a:ext cx="7953686" cy="3360181"/>
+            <a:off x="582572" y="1166099"/>
+            <a:ext cx="7978856" cy="3360181"/>
           </a:xfrm>
           <a:prstGeom prst="rect">
             <a:avLst/>
@@ -16564,8 +16564,8 @@
         </p:blipFill>
         <p:spPr bwMode="auto">
           <a:xfrm>
-            <a:off x="1117432" y="1166099"/>
-            <a:ext cx="6909136" cy="3360181"/>
+            <a:off x="1111139" y="1166099"/>
+            <a:ext cx="6921721" cy="3360181"/>
           </a:xfrm>
           <a:prstGeom prst="rect">
             <a:avLst/>
@@ -16751,8 +16751,8 @@
         </p:blipFill>
         <p:spPr bwMode="auto">
           <a:xfrm>
-            <a:off x="457200" y="1525389"/>
-            <a:ext cx="8229600" cy="2641600"/>
+            <a:off x="457200" y="1538089"/>
+            <a:ext cx="8229600" cy="2616200"/>
           </a:xfrm>
           <a:prstGeom prst="rect">
             <a:avLst/>

--- a/Lessons/01_introduction_and_workflow/Slides/introduction_and_workflow_slides.pptx
+++ b/Lessons/01_introduction_and_workflow/Slides/introduction_and_workflow_slides.pptx
@@ -14211,8 +14211,8 @@
         </p:blipFill>
         <p:spPr bwMode="auto">
           <a:xfrm>
-            <a:off x="457200" y="1582539"/>
-            <a:ext cx="8229600" cy="2527300"/>
+            <a:off x="457200" y="1595239"/>
+            <a:ext cx="8229600" cy="2501900"/>
           </a:xfrm>
           <a:prstGeom prst="rect">
             <a:avLst/>
@@ -14983,8 +14983,8 @@
         </p:blipFill>
         <p:spPr bwMode="auto">
           <a:xfrm>
-            <a:off x="1973208" y="1166099"/>
-            <a:ext cx="5197583" cy="3360181"/>
+            <a:off x="1960623" y="1166099"/>
+            <a:ext cx="5222753" cy="3360181"/>
           </a:xfrm>
           <a:prstGeom prst="rect">
             <a:avLst/>
@@ -15610,8 +15610,8 @@
         </p:blipFill>
         <p:spPr bwMode="auto">
           <a:xfrm>
-            <a:off x="2722013" y="1166099"/>
-            <a:ext cx="3699974" cy="3360181"/>
+            <a:off x="2715720" y="1166099"/>
+            <a:ext cx="3712559" cy="3360181"/>
           </a:xfrm>
           <a:prstGeom prst="rect">
             <a:avLst/>
@@ -16279,8 +16279,8 @@
         </p:blipFill>
         <p:spPr bwMode="auto">
           <a:xfrm>
-            <a:off x="1916576" y="1166099"/>
-            <a:ext cx="5310847" cy="3360181"/>
+            <a:off x="1910284" y="1166099"/>
+            <a:ext cx="5323432" cy="3360181"/>
           </a:xfrm>
           <a:prstGeom prst="rect">
             <a:avLst/>
@@ -16833,8 +16833,8 @@
         </p:blipFill>
         <p:spPr bwMode="auto">
           <a:xfrm>
-            <a:off x="1343961" y="1166099"/>
-            <a:ext cx="6456078" cy="3360181"/>
+            <a:off x="1331376" y="1166099"/>
+            <a:ext cx="6481247" cy="3360181"/>
           </a:xfrm>
           <a:prstGeom prst="rect">
             <a:avLst/>

--- a/Lessons/01_introduction_and_workflow/Slides/introduction_and_workflow_slides.pptx
+++ b/Lessons/01_introduction_and_workflow/Slides/introduction_and_workflow_slides.pptx
@@ -960,20 +960,6 @@
               <a:t>The loss function is where the domain enters the mathematics. Choosing it is a decision about which mistakes matter, and we make that choice explicitly in twenty minutes.</a:t>
             </a:r>
           </a:p>
-          <a:p>
-            <a:pPr lvl="0" indent="0" marL="0">
-              <a:buNone/>
-            </a:pPr>
-          </a:p>
-          <a:p>
-            <a:pPr lvl="0" indent="0" marL="0">
-              <a:buNone/>
-            </a:pPr>
-            <a:r>
-              <a:rPr/>
-              <a:t>Point at the dashed box. Three of these objects we handle directly - the inputs, the function we search for, the predictions. The fourth, the distribution the data comes from, we never see. Everything difficult in this course comes from that one box being out of reach.</a:t>
-            </a:r>
-          </a:p>
         </p:txBody>
       </p:sp>
       <p:sp>
@@ -1067,21 +1053,35 @@
             </a:pPr>
             <a:r>
               <a:rPr/>
-              <a:t>Trace the path with a finger: a pair is drawn from D, x goes into f, f produces y-hat, the loss compares y-hat against the y that came with it. Then say what is unknown - D is unknown, and it is the only thing we actually care about.</a:t>
-            </a:r>
-          </a:p>
-          <a:p>
-            <a:pPr lvl="0" indent="0" marL="0">
-              <a:buNone/>
-            </a:pPr>
-          </a:p>
-          <a:p>
-            <a:pPr lvl="0" indent="0" marL="0">
-              <a:buNone/>
-            </a:pPr>
-            <a:r>
-              <a:rPr/>
-              <a:t>Worth naming now, because it returns in lesson 5: we never see D. We see a sample from it, and every claim we make about a model is an inference from the sample to the distribution. Most of the methodology later in the course is about not fooling yourself in that step.</a:t>
+              <a:t>Trace the path with a finger: a pair is drawn from D, x goes into f, f produces y-hat, the loss compares y-hat against the y that came with it.</a:t>
+            </a:r>
+          </a:p>
+          <a:p>
+            <a:pPr lvl="0" indent="0" marL="0">
+              <a:buNone/>
+            </a:pPr>
+          </a:p>
+          <a:p>
+            <a:pPr lvl="0" indent="0" marL="0">
+              <a:buNone/>
+            </a:pPr>
+            <a:r>
+              <a:rPr/>
+              <a:t>Then point at the dashed box. Three of these objects we handle directly - the inputs, the function we search for, the predictions. The fourth, the distribution the data comes from, we never see. Everything difficult in this course comes from that one box being out of reach.</a:t>
+            </a:r>
+          </a:p>
+          <a:p>
+            <a:pPr lvl="0" indent="0" marL="0">
+              <a:buNone/>
+            </a:pPr>
+          </a:p>
+          <a:p>
+            <a:pPr lvl="0" indent="0" marL="0">
+              <a:buNone/>
+            </a:pPr>
+            <a:r>
+              <a:rPr/>
+              <a:t>Worth naming now, because it returns in lesson 5: we see a sample from D, never D itself, and every claim we make about a model is an inference from the sample to the distribution. Most of the methodology later in the course is about not fooling yourself in that step.</a:t>
             </a:r>
           </a:p>
         </p:txBody>
@@ -1687,6 +1687,20 @@
             </a:pPr>
             <a:r>
               <a:rPr/>
+              <a:t>Be precise about “unbiased”, because it is easy to over-read and somebody will. The average is taken over ALL the test sets of that size we might have drawn, not over the one we did draw. Our particular test set is still too high or too low by some amount; what the argument buys is that it is not too high SYSTEMATICALLY. One test set gives one draw from a distribution centred on the right answer - which is exactly why the next question is how wide that distribution is.</a:t>
+            </a:r>
+          </a:p>
+          <a:p>
+            <a:pPr lvl="0" indent="0" marL="0">
+              <a:buNone/>
+            </a:pPr>
+          </a:p>
+          <a:p>
+            <a:pPr lvl="0" indent="0" marL="0">
+              <a:buNone/>
+            </a:pPr>
+            <a:r>
+              <a:rPr/>
               <a:t>Stress what that argument depends on: the INDEPENDENCE of the test set, not its size or its proportion. The moment those rows influence any decision - a mean for scaling, a ranking for feature selection, a comparison between models - the independence breaks and the estimate is optimistic by an unknown amount. That is why the rule is “nothing is learned before the split” rather than “keep some data aside”.</a:t>
             </a:r>
           </a:p>
@@ -1715,7 +1729,7 @@
             </a:pPr>
             <a:r>
               <a:rPr/>
-              <a:t>If someone asks “how much do we hold out?” - typically 20-30%, and the trade-off is real in both directions: a bigger test set gives a more stable estimate (the standard error falls as one over root n), a bigger training set gives a better model. Give them the concrete number from notebook 01: 143 test examples at 0.986 accuracy carries a standard error of about one percentage point, so the third decimal place is noise. If anyone presses on the interval, concede it: 0.986 of 143 is two errors, the normal approximation is not admissible there - it returns an upper limit of 100.5% - and the honest lower bound is 95.0%, not 96.5%. Handout section 2.4 works it through. With a few hundred examples both sides hurt at once, which is what cross-validation exists for - lesson 5.</a:t>
+              <a:t>If someone asks “how much do we hold out?” - typically 20-30%, and the trade-off is real in both directions. A bigger test set gives a more stable estimate; a bigger training set gives a better model. Say what “more stable” means before using it: the standard error is how far the measured accuracy would typically move if you drew a different test set of the same size, and it shrinks as one over the square root of m, the number of TEST examples - so quadrupling the test set halves the error bar, and that is the only way to buy precision. Give them the concrete number from notebook 01: 143 test examples at 0.986 accuracy carries a standard error of about one percentage point, so the third decimal place is noise. If anyone presses on the interval, concede it: 0.986 of 143 is two errors, the normal approximation is not admissible there - it returns an upper limit of 100.5% - and the honest lower bound is 95.0%, not 96.5%. Handout section 2.4 works it through. With a few hundred examples both sides hurt at once, which is what cross-validation exists for - lesson 5.</a:t>
             </a:r>
           </a:p>
           <a:p>
@@ -4238,20 +4252,6 @@
               <a:t>That answer determines the metric, and it must be fixed BEFORE seeing results. A metric chosen afterwards is a metric chosen to flatter - with enough candidates, one always looks good.</a:t>
             </a:r>
           </a:p>
-          <a:p>
-            <a:pPr lvl="0" indent="0" marL="0">
-              <a:buNone/>
-            </a:pPr>
-          </a:p>
-          <a:p>
-            <a:pPr lvl="0" indent="0" marL="0">
-              <a:buNone/>
-            </a:pPr>
-            <a:r>
-              <a:rPr/>
-              <a:t>Two of these cells are fine and two are not, and the two failures are not the same size. Accuracy adds them up as if they were. Ask which cell they would accept more of - and note that answering requires knowing who bears the cost, which is not a question about data.</a:t>
-            </a:r>
-          </a:p>
         </p:txBody>
       </p:sp>
       <p:sp>
@@ -4331,21 +4331,35 @@
             </a:pPr>
             <a:r>
               <a:rPr/>
-              <a:t>Two problems, the same confusion matrix, and opposite answers about which cell hurts.</a:t>
-            </a:r>
-          </a:p>
-          <a:p>
-            <a:pPr lvl="0" indent="0" marL="0">
-              <a:buNone/>
-            </a:pPr>
-          </a:p>
-          <a:p>
-            <a:pPr lvl="0" indent="0" marL="0">
-              <a:buNone/>
-            </a:pPr>
-            <a:r>
-              <a:rPr/>
-              <a:t>Ask the room before reading either side. Missing a malignant tumour versus raising a false alarm; blocking a legitimate email versus letting spam through. Nobody needs statistics to rank these, and that is the point - the ranking comes from the application, and it has to arrive before any modelling decision is made.</a:t>
+              <a:t>One problem, four outcomes, and the two failures are not the same size. Two of these cells are fine and two are not, and accuracy adds all four up as though they weighed the same.</a:t>
+            </a:r>
+          </a:p>
+          <a:p>
+            <a:pPr lvl="0" indent="0" marL="0">
+              <a:buNone/>
+            </a:pPr>
+          </a:p>
+          <a:p>
+            <a:pPr lvl="0" indent="0" marL="0">
+              <a:buNone/>
+            </a:pPr>
+            <a:r>
+              <a:rPr/>
+              <a:t>Ask the room which of the two failures they would rather make, and let them answer before any metric appears. A missed case sends home a patient who should not go; a false alarm costs anxiety and a follow-up test. Nobody needs statistics to rank those.</a:t>
+            </a:r>
+          </a:p>
+          <a:p>
+            <a:pPr lvl="0" indent="0" marL="0">
+              <a:buNone/>
+            </a:pPr>
+          </a:p>
+          <a:p>
+            <a:pPr lvl="0" indent="0" marL="0">
+              <a:buNone/>
+            </a:pPr>
+            <a:r>
+              <a:rPr/>
+              <a:t>Then the part that makes it a lesson rather than an anecdote: answering requires knowing who bears the cost, which is not a question about data. Change the application and the answer changes with it - on a spam filter the expensive cell is the legitimate mail that got blocked, not the spam that got through. The ranking comes from the application, and it has to arrive before any modelling decision is made.</a:t>
             </a:r>
           </a:p>
           <a:p>
@@ -4954,20 +4968,6 @@
               <a:t>This is structure beating discipline, and it is the single most useful habit in the scikit-learn API.</a:t>
             </a:r>
           </a:p>
-          <a:p>
-            <a:pPr lvl="0" indent="0" marL="0">
-              <a:buNone/>
-            </a:pPr>
-          </a:p>
-          <a:p>
-            <a:pPr lvl="0" indent="0" marL="0">
-              <a:buNone/>
-            </a:pPr>
-            <a:r>
-              <a:rPr/>
-              <a:t>The top row is the mistake, and note where ‘split’ sits: after the scaling. The mean used to scale the training rows was computed with the test rows included. Nothing errors, nothing warns, and the score comes out slightly too good - which is the worst kind of bug, because there is nothing to debug.</a:t>
-            </a:r>
-          </a:p>
         </p:txBody>
       </p:sp>
       <p:sp>
@@ -5061,6 +5061,20 @@
             </a:pPr>
             <a:r>
               <a:rPr/>
+              <a:t>Point at the top row and at where ‘split’ sits on it: after the scaling. That is the whole mistake, and it is one line out of order.</a:t>
+            </a:r>
+          </a:p>
+          <a:p>
+            <a:pPr lvl="0" indent="0" marL="0">
+              <a:buNone/>
+            </a:pPr>
+          </a:p>
+          <a:p>
+            <a:pPr lvl="0" indent="0" marL="0">
+              <a:buNone/>
+            </a:pPr>
+            <a:r>
+              <a:rPr/>
               <a:t>On the manual side the scaler is fitted on everything, so the mean and the standard deviation it subtracts already contain the test rows. The model is then evaluated on data it has, in a small way, already seen. The score comes out slightly too high, and nothing anywhere raises an error.</a:t>
             </a:r>
           </a:p>
@@ -6288,20 +6302,6 @@
               <a:t>Accuracy is dominated by the class nobody is looking for. Ask them what metric they would report to someone deploying this, and steer towards recall on the positive class - then note that recall alone is also gameable, by flagging everything, which is why lesson 4 needs a whole session.</a:t>
             </a:r>
           </a:p>
-          <a:p>
-            <a:pPr lvl="0" indent="0" marL="0">
-              <a:buNone/>
-            </a:pPr>
-          </a:p>
-          <a:p>
-            <a:pPr lvl="0" indent="0" marL="0">
-              <a:buNone/>
-            </a:pPr>
-            <a:r>
-              <a:rPr/>
-              <a:t>Read the bottom-left cell in both matrices: 21 missed, then 20 missed. The accuracies differ by one thousandth. If you reported only accuracy, these two systems look identical - and one of them is a constant function that never looks at the input.</a:t>
-            </a:r>
-          </a:p>
         </p:txBody>
       </p:sp>
       <p:sp>
@@ -6409,7 +6409,7 @@
             </a:pPr>
             <a:r>
               <a:rPr/>
-              <a:t>Ask what a report containing only the accuracy would say about these two, and let the silence do the work. Then point at the bottom-left cell of each: that is the number the application cares about, and it is the one accuracy averages away.</a:t>
+              <a:t>Ask what a report containing only the accuracy would say about these two, and let the silence do the work. Then point at the bottom-left cell of each: 21 missed, then 20 missed. That is the number the application cares about, and it is the one accuracy averages away.</a:t>
             </a:r>
           </a:p>
         </p:txBody>
@@ -6536,20 +6536,6 @@
               <a:t>The question to carry: at the moment a prediction is needed, does this value exist yet?</a:t>
             </a:r>
           </a:p>
-          <a:p>
-            <a:pPr lvl="0" indent="0" marL="0">
-              <a:buNone/>
-            </a:pPr>
-          </a:p>
-          <a:p>
-            <a:pPr lvl="0" indent="0" marL="0">
-              <a:buNone/>
-            </a:pPr>
-            <a:r>
-              <a:rPr/>
-              <a:t>The shaded region is the trap. Everything to the right of the blue marker happens after the moment a prediction is needed, so none of it can be an input. Give them the question in the title as the thing to ask of every column in every dataset they are handed.</a:t>
-            </a:r>
-          </a:p>
         </p:txBody>
       </p:sp>
       <p:sp>
@@ -6657,7 +6643,21 @@
             </a:pPr>
             <a:r>
               <a:rPr/>
-              <a:t>The question in the title is the one to make a habit of, and it is worth saying that it cannot be answered by looking at the data. It is answered by asking somebody who knows how the data is produced.</a:t>
+              <a:t>The shaded region is the trap: everything to the right of the marked moment happens after a prediction is needed, so none of it can be an input.</a:t>
+            </a:r>
+          </a:p>
+          <a:p>
+            <a:pPr lvl="0" indent="0" marL="0">
+              <a:buNone/>
+            </a:pPr>
+          </a:p>
+          <a:p>
+            <a:pPr lvl="0" indent="0" marL="0">
+              <a:buNone/>
+            </a:pPr>
+            <a:r>
+              <a:rPr/>
+              <a:t>The question in the title is the one to make a habit of, and it is worth saying that it cannot be answered by looking at the data. It is answered by asking somebody who knows how the data is produced. Put it to them as the thing to ask of every column in every dataset they are handed.</a:t>
             </a:r>
           </a:p>
         </p:txBody>
@@ -7507,7 +7507,105 @@
             </a:r>
             <a:r>
               <a:rPr/>
-              <a:t> - a few megabytes, seconds - not a new multi-gigabyte image. The image only changes if the libraries change, and they will be told when that happens.</a:t>
+              <a:t> - a few megabytes, seconds - not a new image. The image only changes if the libraries change, and they will be told when that happens.</a:t>
+            </a:r>
+          </a:p>
+          <a:p>
+            <a:pPr lvl="0" indent="0" marL="0">
+              <a:buNone/>
+            </a:pPr>
+          </a:p>
+          <a:p>
+            <a:pPr lvl="0" indent="0" marL="0">
+              <a:buNone/>
+            </a:pPr>
+            <a:r>
+              <a:rPr/>
+              <a:t>Then the second thing to say, because it saves the room ten minutes today and a lecture in November. The image comes in two sizes. </a:t>
+            </a:r>
+            <a:r>
+              <a:rPr>
+                <a:latin typeface="Courier"/>
+              </a:rPr>
+              <a:t>docker compose up</a:t>
+            </a:r>
+            <a:r>
+              <a:rPr/>
+              <a:t> gives them </a:t>
+            </a:r>
+            <a:r>
+              <a:rPr>
+                <a:latin typeface="Courier"/>
+              </a:rPr>
+              <a:t>core</a:t>
+            </a:r>
+            <a:r>
+              <a:rPr/>
+              <a:t>, which is 770 MB and carries everything lessons 1 to 8 need. Before lesson 9 they change one line in </a:t>
+            </a:r>
+            <a:r>
+              <a:rPr>
+                <a:latin typeface="Courier"/>
+              </a:rPr>
+              <a:t>.env</a:t>
+            </a:r>
+            <a:r>
+              <a:rPr/>
+              <a:t> to </a:t>
+            </a:r>
+            <a:r>
+              <a:rPr>
+                <a:latin typeface="Courier"/>
+              </a:rPr>
+              <a:t>TAI_TAG=full</a:t>
+            </a:r>
+            <a:r>
+              <a:rPr/>
+              <a:t>, which adds TensorFlow - and because </a:t>
+            </a:r>
+            <a:r>
+              <a:rPr>
+                <a:latin typeface="Courier"/>
+              </a:rPr>
+              <a:t>full</a:t>
+            </a:r>
+            <a:r>
+              <a:rPr/>
+              <a:t> is built on top of </a:t>
+            </a:r>
+            <a:r>
+              <a:rPr>
+                <a:latin typeface="Courier"/>
+              </a:rPr>
+              <a:t>core</a:t>
+            </a:r>
+            <a:r>
+              <a:rPr/>
+              <a:t>, that switch downloads the TensorFlow layer alone rather than the whole environment again. Point them at Course/Setup/Docker_Quickstart.md for both steps.</a:t>
+            </a:r>
+          </a:p>
+          <a:p>
+            <a:pPr lvl="0" indent="0" marL="0">
+              <a:buNone/>
+            </a:pPr>
+          </a:p>
+          <a:p>
+            <a:pPr lvl="0" indent="0" marL="0">
+              <a:buNone/>
+            </a:pPr>
+            <a:r>
+              <a:rPr/>
+              <a:t>Ask who has already pulled it. Anyone who has not should run </a:t>
+            </a:r>
+            <a:r>
+              <a:rPr>
+                <a:latin typeface="Courier"/>
+              </a:rPr>
+              <a:t>docker compose pull</a:t>
+            </a:r>
+            <a:r>
+              <a:rPr/>
+              <a:t> at home tonight, not now: thirty simultaneous downloads on the lecture-theatre network is not a plan, and it is why the image was cut from 10.4 GB to 770 MB in the first place.</a:t>
             </a:r>
           </a:p>
           <a:p>
@@ -10814,7 +10912,7 @@
             </a:pPr>
             <a:r>
               <a:rPr/>
-              <a:t>Lesson 1 — Introduction and the ML Workflow</a:t>
+              <a:t>Lesson 1: Introduction and the ML Workflow</a:t>
             </a:r>
           </a:p>
         </p:txBody>
@@ -10850,7 +10948,7 @@
             <a:br/>
             <a:r>
               <a:rPr/>
-              <a:t>Fabio Antonini — Università degli Studi dell’Aquila</a:t>
+              <a:t>Fabio Antonini, Università degli Studi dell’Aquila</a:t>
             </a:r>
           </a:p>
         </p:txBody>
@@ -11482,7 +11580,7 @@
             </a:pPr>
             <a:r>
               <a:rPr/>
-              <a:t>The average loss over all data the world might produce — including data that does not exist yet:</a:t>
+              <a:t>The average loss over all data the world might produce, including data that does not exist yet:</a:t>
             </a:r>
           </a:p>
         </p:txBody>
@@ -12119,7 +12217,7 @@
             </a:r>
             <a:r>
               <a:rPr/>
-              <a:t> — write it</a:t>
+              <a:t>: write it</a:t>
             </a:r>
           </a:p>
           <a:p>
@@ -12309,7 +12407,7 @@
             </a:pPr>
             <a:r>
               <a:rPr/>
-              <a:t>1943 — the first artificial neuron</a:t>
+              <a:t>1943: the first artificial neuron</a:t>
             </a:r>
           </a:p>
         </p:txBody>
@@ -12421,7 +12519,7 @@
             </a:pPr>
             <a:r>
               <a:rPr/>
-              <a:t>1950 — Turing’s imitation game</a:t>
+              <a:t>1950: Turing’s imitation game</a:t>
             </a:r>
           </a:p>
         </p:txBody>
@@ -12451,7 +12549,7 @@
             </a:pPr>
             <a:r>
               <a:rPr/>
-              <a:t>“Can machines think?” — replaced by something observable.</a:t>
+              <a:t>“Can machines think?” becomes a question you can settle by observation.</a:t>
             </a:r>
           </a:p>
         </p:txBody>
@@ -12533,7 +12631,7 @@
             </a:pPr>
             <a:r>
               <a:rPr/>
-              <a:t>1956 — Dartmouth</a:t>
+              <a:t>1956: Dartmouth</a:t>
             </a:r>
           </a:p>
         </p:txBody>
@@ -12653,7 +12751,7 @@
             </a:pPr>
             <a:r>
               <a:rPr/>
-              <a:t>1957 — the perceptron learns</a:t>
+              <a:t>1957: the perceptron learns</a:t>
             </a:r>
           </a:p>
         </p:txBody>
@@ -12773,7 +12871,7 @@
             </a:pPr>
             <a:r>
               <a:rPr/>
-              <a:t>1969 — the first winter</a:t>
+              <a:t>1969: the first winter</a:t>
             </a:r>
           </a:p>
         </p:txBody>
@@ -12885,7 +12983,7 @@
             </a:pPr>
             <a:r>
               <a:rPr/>
-              <a:t>1986 — backpropagation</a:t>
+              <a:t>1986: backpropagation</a:t>
             </a:r>
           </a:p>
         </p:txBody>
@@ -12997,7 +13095,7 @@
             </a:pPr>
             <a:r>
               <a:rPr/>
-              <a:t>1995–2010 — statistics takes over</a:t>
+              <a:t>1995-2010: statistics takes over</a:t>
             </a:r>
           </a:p>
         </p:txBody>
@@ -13109,7 +13207,7 @@
             </a:pPr>
             <a:r>
               <a:rPr/>
-              <a:t>2012 — AlexNet</a:t>
+              <a:t>2012: AlexNet</a:t>
             </a:r>
           </a:p>
         </p:txBody>
@@ -13803,7 +13901,7 @@
             </a:r>
             <a:r>
               <a:rPr/>
-              <a:t> — not by algorithm.</a:t>
+              <a:t>, not by algorithm.</a:t>
             </a:r>
           </a:p>
         </p:txBody>
@@ -14108,7 +14206,7 @@
             </a:pPr>
             <a:r>
               <a:rPr/>
-              <a:t>Nobody annotates anything — and the supervision is real.</a:t>
+              <a:t>Nobody annotates anything, and the supervision is real.</a:t>
             </a:r>
           </a:p>
         </p:txBody>
@@ -14682,7 +14780,7 @@
             </a:pPr>
             <a:r>
               <a:rPr/>
-              <a:t>Step 1 — frame it</a:t>
+              <a:t>Step 1: frame it</a:t>
             </a:r>
           </a:p>
         </p:txBody>
@@ -14962,7 +15060,7 @@
             </a:pPr>
             <a:r>
               <a:rPr/>
-              <a:t>Step 2 — look first</a:t>
+              <a:t>Step 2: look first</a:t>
             </a:r>
           </a:p>
         </p:txBody>
@@ -15044,7 +15142,7 @@
             </a:pPr>
             <a:r>
               <a:rPr/>
-              <a:t>Step 3 — split, before anything else</a:t>
+              <a:t>Step 3: split, before anything else</a:t>
             </a:r>
           </a:p>
         </p:txBody>
@@ -15156,7 +15254,7 @@
             </a:pPr>
             <a:r>
               <a:rPr/>
-              <a:t>Step 4 — baseline first</a:t>
+              <a:t>Step 4: baseline first</a:t>
             </a:r>
           </a:p>
         </p:txBody>
@@ -15256,7 +15354,7 @@
             </a:pPr>
             <a:r>
               <a:rPr/>
-              <a:t>Step 5 — pipeline, not two steps</a:t>
+              <a:t>Step 5: pipeline, not two steps</a:t>
             </a:r>
           </a:p>
         </p:txBody>
@@ -15489,7 +15587,7 @@
             </a:pPr>
             <a:r>
               <a:rPr/>
-              <a:t>Step 6 — the result</a:t>
+              <a:t>Step 6: the result</a:t>
             </a:r>
           </a:p>
         </p:txBody>
@@ -17017,7 +17115,7 @@
             </a:r>
             <a:r>
               <a:rPr/>
-              <a:t> — set every Friday, due the next</a:t>
+              <a:t>: set every Friday, due the next</a:t>
             </a:r>
           </a:p>
           <a:p>
@@ -17028,7 +17126,7 @@
             </a:r>
             <a:r>
               <a:rPr/>
-              <a:t> — an end-to-end study, with peer review</a:t>
+              <a:t>: an end-to-end study, with peer review</a:t>
             </a:r>
           </a:p>
           <a:p>
@@ -17039,7 +17137,7 @@
             </a:r>
             <a:r>
               <a:rPr/>
-              <a:t> — closed book, drawn from the handouts</a:t>
+              <a:t>: closed book, drawn from the handouts</a:t>
             </a:r>
           </a:p>
         </p:txBody>
@@ -17197,7 +17295,7 @@
             </a:pPr>
             <a:r>
               <a:rPr/>
-              <a:t>Homework — due Friday 2 October</a:t>
+              <a:t>Homework: due Friday 2 October</a:t>
             </a:r>
           </a:p>
         </p:txBody>
@@ -17377,7 +17475,7 @@
             </a:pPr>
             <a:r>
               <a:rPr/>
-              <a:t>Next: data — exploration, preparation, and leakage in earnest.</a:t>
+              <a:t>Next week: data exploration, preparation, and leakage in earnest.</a:t>
             </a:r>
           </a:p>
         </p:txBody>
@@ -17461,7 +17559,7 @@
             </a:r>
             <a:r>
               <a:rPr/>
-              <a:t> — the reference text, with the mathematics</a:t>
+              <a:t>: the reference text, with the mathematics</a:t>
             </a:r>
           </a:p>
           <a:p>
@@ -17472,7 +17570,7 @@
             </a:r>
             <a:r>
               <a:rPr/>
-              <a:t> — what we do in the room</a:t>
+              <a:t>: what we do in the room</a:t>
             </a:r>
           </a:p>
           <a:p>
@@ -17483,7 +17581,7 @@
             </a:r>
             <a:r>
               <a:rPr/>
-              <a:t> — runnable implementations</a:t>
+              <a:t>: runnable implementations</a:t>
             </a:r>
           </a:p>
           <a:p>
@@ -17624,22 +17722,37 @@
               <a:rPr>
                 <a:latin typeface="Courier"/>
               </a:rPr>
-              <a:t>docker compose up</a:t>
-            </a:r>
-          </a:p>
-          <a:p>
-            <a:pPr lvl="0" indent="0" marL="0">
-              <a:buNone/>
-            </a:pPr>
-            <a:r>
-              <a:rPr/>
-              <a:t>Then </a:t>
-            </a:r>
+              <a:t>docker compose pull</a:t>
+            </a:r>
+            <a:br/>
             <a:r>
               <a:rPr>
                 <a:latin typeface="Courier"/>
               </a:rPr>
-              <a:t>http://127.0.0.1:8888/lab?token=aicourse</a:t>
+              <a:t>docker compose up</a:t>
+            </a:r>
+          </a:p>
+          <a:p>
+            <a:pPr lvl="0" indent="0" marL="0">
+              <a:buNone/>
+            </a:pPr>
+            <a:r>
+              <a:rPr/>
+              <a:t>Then open </a:t>
+            </a:r>
+            <a:r>
+              <a:rPr b="1"/>
+              <a:t>127.0.0.1:8888</a:t>
+            </a:r>
+            <a:r>
+              <a:rPr/>
+              <a:t>, token </a:t>
+            </a:r>
+            <a:r>
+              <a:rPr>
+                <a:latin typeface="Courier"/>
+              </a:rPr>
+              <a:t>aicourse</a:t>
             </a:r>
           </a:p>
         </p:txBody>

--- a/Lessons/01_introduction_and_workflow/Slides/introduction_and_workflow_slides.pptx
+++ b/Lessons/01_introduction_and_workflow/Slides/introduction_and_workflow_slides.pptx
@@ -5515,35 +5515,63 @@
             </a:pPr>
             <a:r>
               <a:rPr/>
-              <a:t>One model, one dataset, and the threshold swept from one end to the other.</a:t>
-            </a:r>
-          </a:p>
-          <a:p>
-            <a:pPr lvl="0" indent="0" marL="0">
-              <a:buNone/>
-            </a:pPr>
-          </a:p>
-          <a:p>
-            <a:pPr lvl="0" indent="0" marL="0">
-              <a:buNone/>
-            </a:pPr>
-            <a:r>
-              <a:rPr/>
-              <a:t>Follow the two curves in opposite directions. Lower the threshold and recall rises - we catch more of what is there - while precision falls, because more of what we flag is wrong. There is no setting where both are at their best, and no amount of better modelling removes the trade.</a:t>
-            </a:r>
-          </a:p>
-          <a:p>
-            <a:pPr lvl="0" indent="0" marL="0">
-              <a:buNone/>
-            </a:pPr>
-          </a:p>
-          <a:p>
-            <a:pPr lvl="0" indent="0" marL="0">
-              <a:buNone/>
-            </a:pPr>
-            <a:r>
-              <a:rPr/>
-              <a:t>So the question of whether a model is good has no answer until somebody says which error is worse, which is the slide from earlier arriving again with a number attached. Lesson 4 spends an hour here.</a:t>
+              <a:t>Say what the axis is before anything else, because nothing else makes sense without it: every dot is one of the 143 tumours in the test set, and its position is the probability our model gave to “malignant”. Not a distance, not a score - a probability, 0 to 1.</a:t>
+            </a:r>
+          </a:p>
+          <a:p>
+            <a:pPr lvl="0" indent="0" marL="0">
+              <a:buNone/>
+            </a:pPr>
+          </a:p>
+          <a:p>
+            <a:pPr lvl="0" indent="0" marL="0">
+              <a:buNone/>
+            </a:pPr>
+            <a:r>
+              <a:rPr/>
+              <a:t>The black line is 0.5, and it is worth saying out loud that nothing chose it. It is the default. Everything to the right of it we flag; everything to the left we send home.</a:t>
+            </a:r>
+          </a:p>
+          <a:p>
+            <a:pPr lvl="0" indent="0" marL="0">
+              <a:buNone/>
+            </a:pPr>
+          </a:p>
+          <a:p>
+            <a:pPr lvl="0" indent="0" marL="0">
+              <a:buNone/>
+            </a:pPr>
+            <a:r>
+              <a:rPr/>
+              <a:t>Now the point of the slide. Ask them where the line SHOULD go, and let the picture answer. Almost every tumour sits at one end, which is why the model scores 0.986 - but look at the middle. One malignancy at 0.11, one benign at 0.62. Those two dots are the whole of the disagreement, and they are what the threshold is for.</a:t>
+            </a:r>
+          </a:p>
+          <a:p>
+            <a:pPr lvl="0" indent="0" marL="0">
+              <a:buNone/>
+            </a:pPr>
+          </a:p>
+          <a:p>
+            <a:pPr lvl="0" indent="0" marL="0">
+              <a:buNone/>
+            </a:pPr>
+            <a:r>
+              <a:rPr/>
+              <a:t>Then the numbers, which are in notebook 01 and worth quoting: drag the line down to 0.10 and every malignancy is caught, at the price of 11 false alarms. Drag it up to 0.90 and there are no false alarms at all, at the price of 7 women sent home who should not have been.</a:t>
+            </a:r>
+          </a:p>
+          <a:p>
+            <a:pPr lvl="0" indent="0" marL="0">
+              <a:buNone/>
+            </a:pPr>
+          </a:p>
+          <a:p>
+            <a:pPr lvl="0" indent="0" marL="0">
+              <a:buNone/>
+            </a:pPr>
+            <a:r>
+              <a:rPr/>
+              <a:t>Nothing about the model changed between those two sentences. So the question of whether it is good has no answer until somebody says which error is worse - which is the earlier slide arriving again, now with a number attached. Lesson 4 spends an hour here.</a:t>
             </a:r>
           </a:p>
         </p:txBody>
@@ -7541,7 +7569,7 @@
             </a:r>
             <a:r>
               <a:rPr/>
-              <a:t>, which is 770 MB and carries everything lessons 1 to 8 need. Before lesson 9 they change one line in </a:t>
+              <a:t>, a 750 MB download carrying everything lessons 1 to 8 need. Before lesson 9 they change one line in </a:t>
             </a:r>
             <a:r>
               <a:rPr>
@@ -7605,7 +7633,7 @@
             </a:r>
             <a:r>
               <a:rPr/>
-              <a:t> at home tonight, not now: thirty simultaneous downloads on the lecture-theatre network is not a plan, and it is why the image was cut from 10.4 GB to 770 MB in the first place.</a:t>
+              <a:t> at home tonight, not now: thirty simultaneous downloads on the lecture-theatre network is not a plan, and it is why the image was cut down in the first place.</a:t>
             </a:r>
           </a:p>
           <a:p>
@@ -15892,8 +15920,8 @@
         </p:blipFill>
         <p:spPr bwMode="auto">
           <a:xfrm>
-            <a:off x="1325084" y="1166099"/>
-            <a:ext cx="6493832" cy="3360181"/>
+            <a:off x="1016752" y="1166099"/>
+            <a:ext cx="7110495" cy="3360181"/>
           </a:xfrm>
           <a:prstGeom prst="rect">
             <a:avLst/>

--- a/Lessons/01_introduction_and_workflow/Slides/introduction_and_workflow_slides.pptx
+++ b/Lessons/01_introduction_and_workflow/Slides/introduction_and_workflow_slides.pptx
@@ -5543,21 +5543,21 @@
             </a:pPr>
             <a:r>
               <a:rPr/>
-              <a:t>Now the point of the slide. Ask them where the line SHOULD go, and let the picture answer. Almost every tumour sits at one end, which is why the model scores 0.986 - but look at the middle. One malignancy at 0.11, one benign at 0.62. Those two dots are the whole of the disagreement, and they are what the threshold is for.</a:t>
-            </a:r>
-          </a:p>
-          <a:p>
-            <a:pPr lvl="0" indent="0" marL="0">
-              <a:buNone/>
-            </a:pPr>
-          </a:p>
-          <a:p>
-            <a:pPr lvl="0" indent="0" marL="0">
-              <a:buNone/>
-            </a:pPr>
-            <a:r>
-              <a:rPr/>
-              <a:t>Then the numbers, which are in notebook 01 and worth quoting: drag the line down to 0.10 and every malignancy is caught, at the price of 11 false alarms. Drag it up to 0.90 and there are no false alarms at all, at the price of 7 women sent home who should not have been.</a:t>
+              <a:t>Now the point of the slide. Most of the picture is the model being certain: 105 of the 143 sit within 0.02 of one end, which is where 0.986 comes from. Tell them to ignore those and look at the middle. The band from 0.11 to 0.62 holds the 12 it was unsure about - 1 malignant, 11 benign - and at 0.5 only two of the twelve are on the wrong side: the malignancy at 0.11 that we missed, and the benign at 0.62 that we flagged.</a:t>
+            </a:r>
+          </a:p>
+          <a:p>
+            <a:pPr lvl="0" indent="0" marL="0">
+              <a:buNone/>
+            </a:pPr>
+          </a:p>
+          <a:p>
+            <a:pPr lvl="0" indent="0" marL="0">
+              <a:buNone/>
+            </a:pPr>
+            <a:r>
+              <a:rPr/>
+              <a:t>Then slide the line, and make them watch the band rather than the numbers. Down to 0.10 and it passes below the whole band: the missed malignancy is caught, and all 11 uncertain benign tumours turn into false alarms. Point at them - the eleven are countable on the slide, which is the whole reason this figure is here rather than a table. Up to 0.90 instead and no false alarm survives, at the price of 7 women sent home who should not have been.</a:t>
             </a:r>
           </a:p>
           <a:p>

--- a/Lessons/01_introduction_and_workflow/Slides/introduction_and_workflow_slides.pptx
+++ b/Lessons/01_introduction_and_workflow/Slides/introduction_and_workflow_slides.pptx
@@ -11935,7 +11935,7 @@
             </a:pPr>
             <a:r>
               <a:rPr/>
-              <a:t>The same idea, on real data</a:t>
+              <a:t>The lowest training error is the worst model</a:t>
             </a:r>
           </a:p>
         </p:txBody>

--- a/Lessons/01_introduction_and_workflow/Slides/introduction_and_workflow_slides.pptx
+++ b/Lessons/01_introduction_and_workflow/Slides/introduction_and_workflow_slides.pptx
@@ -12950,8 +12950,8 @@
         </p:blipFill>
         <p:spPr bwMode="auto">
           <a:xfrm>
-            <a:off x="1296158" y="1723072"/>
-            <a:ext cx="6551683" cy="2803208"/>
+            <a:off x="1277001" y="1723072"/>
+            <a:ext cx="6589997" cy="2803208"/>
           </a:xfrm>
           <a:prstGeom prst="rect">
             <a:avLst/>
@@ -15554,8 +15554,8 @@
         </p:blipFill>
         <p:spPr bwMode="auto">
           <a:xfrm>
-            <a:off x="582572" y="1166099"/>
-            <a:ext cx="7978856" cy="3360181"/>
+            <a:off x="557402" y="1166099"/>
+            <a:ext cx="8029196" cy="3360181"/>
           </a:xfrm>
           <a:prstGeom prst="rect">
             <a:avLst/>
@@ -16690,8 +16690,8 @@
         </p:blipFill>
         <p:spPr bwMode="auto">
           <a:xfrm>
-            <a:off x="1111139" y="1166099"/>
-            <a:ext cx="6921721" cy="3360181"/>
+            <a:off x="1123724" y="1166099"/>
+            <a:ext cx="6896551" cy="3360181"/>
           </a:xfrm>
           <a:prstGeom prst="rect">
             <a:avLst/>

--- a/Lessons/01_introduction_and_workflow/Slides/introduction_and_workflow_slides.pptx
+++ b/Lessons/01_introduction_and_workflow/Slides/introduction_and_workflow_slides.pptx
@@ -5,7 +5,7 @@
     <p:sldMasterId id="2147483648" r:id="rId1"/>
   </p:sldMasterIdLst>
   <p:notesMasterIdLst>
-    <p:notesMasterId r:id="rId64"/>
+    <p:notesMasterId r:id="rId65"/>
   </p:notesMasterIdLst>
   <p:sldIdLst>
     <p:sldId id="256" r:id="rId2"/>
@@ -70,6 +70,7 @@
     <p:sldId id="315" r:id="rId61"/>
     <p:sldId id="316" r:id="rId62"/>
     <p:sldId id="317" r:id="rId63"/>
+    <p:sldId id="318" r:id="rId64"/>
   </p:sldIdLst>
   <p:sldSz cx="9144000" cy="5143500" type="screen16x9"/>
   <p:notesSz cx="6858000" cy="9144000"/>
@@ -4097,35 +4098,77 @@
             </a:pPr>
             <a:r>
               <a:rPr/>
-              <a:t>Say the order is not a convention: several steps are only valid in this order, and step 3 is the one that cannot move - hence the colour.</a:t>
-            </a:r>
-          </a:p>
-          <a:p>
-            <a:pPr lvl="0" indent="0" marL="0">
-              <a:buNone/>
-            </a:pPr>
-          </a:p>
-          <a:p>
-            <a:pPr lvl="0" indent="0" marL="0">
-              <a:buNone/>
-            </a:pPr>
-            <a:r>
-              <a:rPr/>
-              <a:t>This is the map for notebook 01, which we now work through live. Tell them to open it and follow along rather than watch.</a:t>
-            </a:r>
-          </a:p>
-          <a:p>
-            <a:pPr lvl="0" indent="0" marL="0">
-              <a:buNone/>
-            </a:pPr>
-          </a:p>
-          <a:p>
-            <a:pPr lvl="0" indent="0" marL="0">
-              <a:buNone/>
-            </a:pPr>
-            <a:r>
-              <a:rPr/>
-              <a:t>Handout section 6 has each step in full. The two they will be tempted to skip are 1 and 4 - framing and baseline - and those are the two that make the difference between a result and a number.</a:t>
+              <a:t>Open notebook 02 and run it. Twenty minutes, and it is the only place today where all three kinds appear on identical data, which is the whole argument of this segment made operational.</a:t>
+            </a:r>
+          </a:p>
+          <a:p>
+            <a:pPr lvl="0" indent="0" marL="0">
+              <a:buNone/>
+            </a:pPr>
+          </a:p>
+          <a:p>
+            <a:pPr lvl="0" indent="0" marL="0">
+              <a:buNone/>
+            </a:pPr>
+            <a:r>
+              <a:rPr/>
+              <a:t>The point to keep repeating as you scroll: nothing about the table changes between the four results. Same 178 wines, same 13 chemical measurements. What changes is which column is treated as the answer, and in the unsupervised case whether there is an answer at all.</a:t>
+            </a:r>
+          </a:p>
+          <a:p>
+            <a:pPr lvl="0" indent="0" marL="0">
+              <a:buNone/>
+            </a:pPr>
+          </a:p>
+          <a:p>
+            <a:pPr lvl="0" indent="0" marL="0">
+              <a:buNone/>
+            </a:pPr>
+            <a:r>
+              <a:rPr/>
+              <a:t>Two moments worth stopping on.</a:t>
+            </a:r>
+          </a:p>
+          <a:p>
+            <a:pPr lvl="0" indent="0" marL="0">
+              <a:buNone/>
+            </a:pPr>
+          </a:p>
+          <a:p>
+            <a:pPr lvl="0" indent="0" marL="0">
+              <a:buNone/>
+            </a:pPr>
+            <a:r>
+              <a:rPr/>
+              <a:t>The unsupervised score, 0.897, is suspiciously good, and the notebook says so: it is a happy accident of this dataset, where the chemical groups really are geometrically separated. Say plainly that this is not what clustering usually looks like, or they will leave expecting it.</a:t>
+            </a:r>
+          </a:p>
+          <a:p>
+            <a:pPr lvl="0" indent="0" marL="0">
+              <a:buNone/>
+            </a:pPr>
+          </a:p>
+          <a:p>
+            <a:pPr lvl="0" indent="0" marL="0">
+              <a:buNone/>
+            </a:pPr>
+            <a:r>
+              <a:rPr/>
+              <a:t>The self-supervised cell is mechanically identical to the regression cell two sections earlier - same estimator, same call. Ask the room what actually changed. The answer is only where the target came from: a person recorded the cultivar, whereas nobody produced the flavanoid column as a label, it was already in the table. That is the entire distinction the segment has been building to.</a:t>
+            </a:r>
+          </a:p>
+          <a:p>
+            <a:pPr lvl="0" indent="0" marL="0">
+              <a:buNone/>
+            </a:pPr>
+          </a:p>
+          <a:p>
+            <a:pPr lvl="0" indent="0" marL="0">
+              <a:buNone/>
+            </a:pPr>
+            <a:r>
+              <a:rPr/>
+              <a:t>If time is short, drop the R² aside and the n_init experiment; keep all four results, because the comparison is the content. Handout section 5.</a:t>
             </a:r>
           </a:p>
         </p:txBody>
@@ -4207,49 +4250,35 @@
             </a:pPr>
             <a:r>
               <a:rPr/>
-              <a:t>The step everyone skips, and the one the exercise marks hardest.</a:t>
-            </a:r>
-          </a:p>
-          <a:p>
-            <a:pPr lvl="0" indent="0" marL="0">
-              <a:buNone/>
-            </a:pPr>
-          </a:p>
-          <a:p>
-            <a:pPr lvl="0" indent="0" marL="0">
-              <a:buNone/>
-            </a:pPr>
-            <a:r>
-              <a:rPr/>
-              <a:t>Our example: predicting whether a breast tumour is malignant from measurements of cell nuclei. A model here would be a screening aid, never a diagnosis - say that clearly, it matters.</a:t>
-            </a:r>
-          </a:p>
-          <a:p>
-            <a:pPr lvl="0" indent="0" marL="0">
-              <a:buNone/>
-            </a:pPr>
-          </a:p>
-          <a:p>
-            <a:pPr lvl="0" indent="0" marL="0">
-              <a:buNone/>
-            </a:pPr>
-            <a:r>
-              <a:rPr/>
-              <a:t>The two errors are not comparable. A false alarm costs anxiety and a follow-up test; a missed malignancy can cost a life. Ask the room which they would rather make, and let them answer before showing any metric.</a:t>
-            </a:r>
-          </a:p>
-          <a:p>
-            <a:pPr lvl="0" indent="0" marL="0">
-              <a:buNone/>
-            </a:pPr>
-          </a:p>
-          <a:p>
-            <a:pPr lvl="0" indent="0" marL="0">
-              <a:buNone/>
-            </a:pPr>
-            <a:r>
-              <a:rPr/>
-              <a:t>That answer determines the metric, and it must be fixed BEFORE seeing results. A metric chosen afterwards is a metric chosen to flatter - with enough candidates, one always looks good.</a:t>
+              <a:t>Say the order is not a convention: several steps are only valid in this order, and step 3 is the one that cannot move - hence the colour.</a:t>
+            </a:r>
+          </a:p>
+          <a:p>
+            <a:pPr lvl="0" indent="0" marL="0">
+              <a:buNone/>
+            </a:pPr>
+          </a:p>
+          <a:p>
+            <a:pPr lvl="0" indent="0" marL="0">
+              <a:buNone/>
+            </a:pPr>
+            <a:r>
+              <a:rPr/>
+              <a:t>This is the map for notebook 01, which we now work through live. Tell them to open it and follow along rather than watch.</a:t>
+            </a:r>
+          </a:p>
+          <a:p>
+            <a:pPr lvl="0" indent="0" marL="0">
+              <a:buNone/>
+            </a:pPr>
+          </a:p>
+          <a:p>
+            <a:pPr lvl="0" indent="0" marL="0">
+              <a:buNone/>
+            </a:pPr>
+            <a:r>
+              <a:rPr/>
+              <a:t>Handout section 6 has each step in full. The two they will be tempted to skip are 1 and 4 - framing and baseline - and those are the two that make the difference between a result and a number.</a:t>
             </a:r>
           </a:p>
         </p:txBody>
@@ -4331,49 +4360,49 @@
             </a:pPr>
             <a:r>
               <a:rPr/>
-              <a:t>One problem, four outcomes, and the two failures are not the same size. Two of these cells are fine and two are not, and accuracy adds all four up as though they weighed the same.</a:t>
-            </a:r>
-          </a:p>
-          <a:p>
-            <a:pPr lvl="0" indent="0" marL="0">
-              <a:buNone/>
-            </a:pPr>
-          </a:p>
-          <a:p>
-            <a:pPr lvl="0" indent="0" marL="0">
-              <a:buNone/>
-            </a:pPr>
-            <a:r>
-              <a:rPr/>
-              <a:t>Ask the room which of the two failures they would rather make, and let them answer before any metric appears. A missed case sends home a patient who should not go; a false alarm costs anxiety and a follow-up test. Nobody needs statistics to rank those.</a:t>
-            </a:r>
-          </a:p>
-          <a:p>
-            <a:pPr lvl="0" indent="0" marL="0">
-              <a:buNone/>
-            </a:pPr>
-          </a:p>
-          <a:p>
-            <a:pPr lvl="0" indent="0" marL="0">
-              <a:buNone/>
-            </a:pPr>
-            <a:r>
-              <a:rPr/>
-              <a:t>Then the part that makes it a lesson rather than an anecdote: answering requires knowing who bears the cost, which is not a question about data. Change the application and the answer changes with it - on a spam filter the expensive cell is the legitimate mail that got blocked, not the spam that got through. The ranking comes from the application, and it has to arrive before any modelling decision is made.</a:t>
-            </a:r>
-          </a:p>
-          <a:p>
-            <a:pPr lvl="0" indent="0" marL="0">
-              <a:buNone/>
-            </a:pPr>
-          </a:p>
-          <a:p>
-            <a:pPr lvl="0" indent="0" marL="0">
-              <a:buNone/>
-            </a:pPr>
-            <a:r>
-              <a:rPr/>
-              <a:t>Lesson 4 turns this into a threshold that can be computed. Today it is enough that they see the question is not a modelling question, and that answering it with accuracy answers it by accident.</a:t>
+              <a:t>The step everyone skips, and the one the exercise marks hardest.</a:t>
+            </a:r>
+          </a:p>
+          <a:p>
+            <a:pPr lvl="0" indent="0" marL="0">
+              <a:buNone/>
+            </a:pPr>
+          </a:p>
+          <a:p>
+            <a:pPr lvl="0" indent="0" marL="0">
+              <a:buNone/>
+            </a:pPr>
+            <a:r>
+              <a:rPr/>
+              <a:t>Our example: predicting whether a breast tumour is malignant from measurements of cell nuclei. A model here would be a screening aid, never a diagnosis - say that clearly, it matters.</a:t>
+            </a:r>
+          </a:p>
+          <a:p>
+            <a:pPr lvl="0" indent="0" marL="0">
+              <a:buNone/>
+            </a:pPr>
+          </a:p>
+          <a:p>
+            <a:pPr lvl="0" indent="0" marL="0">
+              <a:buNone/>
+            </a:pPr>
+            <a:r>
+              <a:rPr/>
+              <a:t>The two errors are not comparable. A false alarm costs anxiety and a follow-up test; a missed malignancy can cost a life. Ask the room which they would rather make, and let them answer before showing any metric.</a:t>
+            </a:r>
+          </a:p>
+          <a:p>
+            <a:pPr lvl="0" indent="0" marL="0">
+              <a:buNone/>
+            </a:pPr>
+          </a:p>
+          <a:p>
+            <a:pPr lvl="0" indent="0" marL="0">
+              <a:buNone/>
+            </a:pPr>
+            <a:r>
+              <a:rPr/>
+              <a:t>That answer determines the metric, and it must be fixed BEFORE seeing results. A metric chosen afterwards is a metric chosen to flatter - with enough candidates, one always looks good.</a:t>
             </a:r>
           </a:p>
         </p:txBody>
@@ -4455,35 +4484,49 @@
             </a:pPr>
             <a:r>
               <a:rPr/>
-              <a:t>569 samples, 30 features, 357 benign against 212 malignant.</a:t>
-            </a:r>
-          </a:p>
-          <a:p>
-            <a:pPr lvl="0" indent="0" marL="0">
-              <a:buNone/>
-            </a:pPr>
-          </a:p>
-          <a:p>
-            <a:pPr lvl="0" indent="0" marL="0">
-              <a:buNone/>
-            </a:pPr>
-            <a:r>
-              <a:rPr/>
-              <a:t>Get them to compute the consequence out loud: always answering “benign” is right 62.7% of the time. That number is the bar any real model has to clear, and it is why step 4 exists.</a:t>
-            </a:r>
-          </a:p>
-          <a:p>
-            <a:pPr lvl="0" indent="0" marL="0">
-              <a:buNone/>
-            </a:pPr>
-          </a:p>
-          <a:p>
-            <a:pPr lvl="0" indent="0" marL="0">
-              <a:buNone/>
-            </a:pPr>
-            <a:r>
-              <a:rPr/>
-              <a:t>Mild imbalance here. Later today we will see what happens at 99 to 1, where the same reasoning destroys accuracy as a metric entirely.</a:t>
+              <a:t>One problem, four outcomes, and the two failures are not the same size. Two of these cells are fine and two are not, and accuracy adds all four up as though they weighed the same.</a:t>
+            </a:r>
+          </a:p>
+          <a:p>
+            <a:pPr lvl="0" indent="0" marL="0">
+              <a:buNone/>
+            </a:pPr>
+          </a:p>
+          <a:p>
+            <a:pPr lvl="0" indent="0" marL="0">
+              <a:buNone/>
+            </a:pPr>
+            <a:r>
+              <a:rPr/>
+              <a:t>Ask the room which of the two failures they would rather make, and let them answer before any metric appears. A missed case sends home a patient who should not go; a false alarm costs anxiety and a follow-up test. Nobody needs statistics to rank those.</a:t>
+            </a:r>
+          </a:p>
+          <a:p>
+            <a:pPr lvl="0" indent="0" marL="0">
+              <a:buNone/>
+            </a:pPr>
+          </a:p>
+          <a:p>
+            <a:pPr lvl="0" indent="0" marL="0">
+              <a:buNone/>
+            </a:pPr>
+            <a:r>
+              <a:rPr/>
+              <a:t>Then the part that makes it a lesson rather than an anecdote: answering requires knowing who bears the cost, which is not a question about data. Change the application and the answer changes with it - on a spam filter the expensive cell is the legitimate mail that got blocked, not the spam that got through. The ranking comes from the application, and it has to arrive before any modelling decision is made.</a:t>
+            </a:r>
+          </a:p>
+          <a:p>
+            <a:pPr lvl="0" indent="0" marL="0">
+              <a:buNone/>
+            </a:pPr>
+          </a:p>
+          <a:p>
+            <a:pPr lvl="0" indent="0" marL="0">
+              <a:buNone/>
+            </a:pPr>
+            <a:r>
+              <a:rPr/>
+              <a:t>Lesson 4 turns this into a threshold that can be computed. Today it is enough that they see the question is not a modelling question, and that answering it with accuracy answers it by accident.</a:t>
             </a:r>
           </a:p>
         </p:txBody>
@@ -4675,63 +4718,35 @@
             </a:pPr>
             <a:r>
               <a:rPr/>
-              <a:t>Return to the risk_gap figure verbally - this slide is that argument made operational.</a:t>
-            </a:r>
-          </a:p>
-          <a:p>
-            <a:pPr lvl="0" indent="0" marL="0">
-              <a:buNone/>
-            </a:pPr>
-          </a:p>
-          <a:p>
-            <a:pPr lvl="0" indent="0" marL="0">
-              <a:buNone/>
-            </a:pPr>
-            <a:r>
-              <a:rPr/>
-              <a:t>The moment anything from the test rows influences a decision, even something as innocent as computing a mean for scaling, the test set stops being unseen and the number it gives you is optimistic.</a:t>
-            </a:r>
-          </a:p>
-          <a:p>
-            <a:pPr lvl="0" indent="0" marL="0">
-              <a:buNone/>
-            </a:pPr>
-          </a:p>
-          <a:p>
-            <a:pPr lvl="0" indent="0" marL="0">
-              <a:buNone/>
-            </a:pPr>
-            <a:r>
-              <a:rPr/>
-              <a:t>Mention stratify=y: it keeps the class proportions identical in both parts, so the test set is a fair miniature of the whole. Without it, on a small or imbalanced dataset, you can get a test set whose composition differs from the training set by chance.</a:t>
-            </a:r>
-          </a:p>
-          <a:p>
-            <a:pPr lvl="0" indent="0" marL="0">
-              <a:buNone/>
-            </a:pPr>
-          </a:p>
-          <a:p>
-            <a:pPr lvl="0" indent="0" marL="0">
-              <a:buNone/>
-            </a:pPr>
-            <a:r>
-              <a:rPr/>
-              <a:t>They will violate this deliberately in the third notebook and see what it costs.</a:t>
-            </a:r>
-          </a:p>
-          <a:p>
-            <a:pPr lvl="0" indent="0" marL="0">
-              <a:buNone/>
-            </a:pPr>
-          </a:p>
-          <a:p>
-            <a:pPr lvl="0" indent="0" marL="0">
-              <a:buNone/>
-            </a:pPr>
-            <a:r>
-              <a:rPr/>
-              <a:t>The caption under the test set is the whole discipline: touched once, at the very end. Say that every additional look spends some of its independence - if you test twenty variants and report the best, you have selected on the test set and the number is no longer honest.</a:t>
+              <a:t>569 samples, 30 features, 357 benign against 212 malignant.</a:t>
+            </a:r>
+          </a:p>
+          <a:p>
+            <a:pPr lvl="0" indent="0" marL="0">
+              <a:buNone/>
+            </a:pPr>
+          </a:p>
+          <a:p>
+            <a:pPr lvl="0" indent="0" marL="0">
+              <a:buNone/>
+            </a:pPr>
+            <a:r>
+              <a:rPr/>
+              <a:t>Get them to compute the consequence out loud: always answering “benign” is right 62.7% of the time. That number is the bar any real model has to clear, and it is why step 4 exists.</a:t>
+            </a:r>
+          </a:p>
+          <a:p>
+            <a:pPr lvl="0" indent="0" marL="0">
+              <a:buNone/>
+            </a:pPr>
+          </a:p>
+          <a:p>
+            <a:pPr lvl="0" indent="0" marL="0">
+              <a:buNone/>
+            </a:pPr>
+            <a:r>
+              <a:rPr/>
+              <a:t>Mild imbalance here. Later today we will see what happens at 99 to 1, where the same reasoning destroys accuracy as a metric entirely.</a:t>
             </a:r>
           </a:p>
         </p:txBody>
@@ -4813,35 +4828,63 @@
             </a:pPr>
             <a:r>
               <a:rPr/>
-              <a:t>Without this, “96% accuracy” has no scale at all. With it, they can see whether the model is worth anything.</a:t>
-            </a:r>
-          </a:p>
-          <a:p>
-            <a:pPr lvl="0" indent="0" marL="0">
-              <a:buNone/>
-            </a:pPr>
-          </a:p>
-          <a:p>
-            <a:pPr lvl="0" indent="0" marL="0">
-              <a:buNone/>
-            </a:pPr>
-            <a:r>
-              <a:rPr/>
-              <a:t>DummyClassifier does this in two lines, and the exercise requires it.</a:t>
-            </a:r>
-          </a:p>
-          <a:p>
-            <a:pPr lvl="0" indent="0" marL="0">
-              <a:buNone/>
-            </a:pPr>
-          </a:p>
-          <a:p>
-            <a:pPr lvl="0" indent="0" marL="0">
-              <a:buNone/>
-            </a:pPr>
-            <a:r>
-              <a:rPr/>
-              <a:t>Foreshadow: on the imbalanced example later, the baseline will be unbeatable on accuracy and completely useless in practice. That is the lesson, not a curiosity - it is how you discover that accuracy is the wrong metric for your problem.</a:t>
+              <a:t>Return to the risk_gap figure verbally - this slide is that argument made operational.</a:t>
+            </a:r>
+          </a:p>
+          <a:p>
+            <a:pPr lvl="0" indent="0" marL="0">
+              <a:buNone/>
+            </a:pPr>
+          </a:p>
+          <a:p>
+            <a:pPr lvl="0" indent="0" marL="0">
+              <a:buNone/>
+            </a:pPr>
+            <a:r>
+              <a:rPr/>
+              <a:t>The moment anything from the test rows influences a decision, even something as innocent as computing a mean for scaling, the test set stops being unseen and the number it gives you is optimistic.</a:t>
+            </a:r>
+          </a:p>
+          <a:p>
+            <a:pPr lvl="0" indent="0" marL="0">
+              <a:buNone/>
+            </a:pPr>
+          </a:p>
+          <a:p>
+            <a:pPr lvl="0" indent="0" marL="0">
+              <a:buNone/>
+            </a:pPr>
+            <a:r>
+              <a:rPr/>
+              <a:t>Mention stratify=y: it keeps the class proportions identical in both parts, so the test set is a fair miniature of the whole. Without it, on a small or imbalanced dataset, you can get a test set whose composition differs from the training set by chance.</a:t>
+            </a:r>
+          </a:p>
+          <a:p>
+            <a:pPr lvl="0" indent="0" marL="0">
+              <a:buNone/>
+            </a:pPr>
+          </a:p>
+          <a:p>
+            <a:pPr lvl="0" indent="0" marL="0">
+              <a:buNone/>
+            </a:pPr>
+            <a:r>
+              <a:rPr/>
+              <a:t>They will violate this deliberately in the third notebook and see what it costs.</a:t>
+            </a:r>
+          </a:p>
+          <a:p>
+            <a:pPr lvl="0" indent="0" marL="0">
+              <a:buNone/>
+            </a:pPr>
+          </a:p>
+          <a:p>
+            <a:pPr lvl="0" indent="0" marL="0">
+              <a:buNone/>
+            </a:pPr>
+            <a:r>
+              <a:rPr/>
+              <a:t>The caption under the test set is the whole discipline: touched once, at the very end. Say that every additional look spends some of its independence - if you test twenty variants and report the best, you have selected on the test set and the number is no longer honest.</a:t>
             </a:r>
           </a:p>
         </p:txBody>
@@ -4923,49 +4966,35 @@
             </a:pPr>
             <a:r>
               <a:rPr/>
-              <a:t>Explain WHY, not just what.</a:t>
-            </a:r>
-          </a:p>
-          <a:p>
-            <a:pPr lvl="0" indent="0" marL="0">
-              <a:buNone/>
-            </a:pPr>
-          </a:p>
-          <a:p>
-            <a:pPr lvl="0" indent="0" marL="0">
-              <a:buNone/>
-            </a:pPr>
-            <a:r>
-              <a:rPr/>
-              <a:t>StandardScaler LEARNS something - a mean and a standard deviation per feature. That makes it part of the model, not preparation of the data. Inside a pipeline it learns them from the training fold every time the pipeline is fitted, including inside each cross-validation fold in lesson 5.</a:t>
-            </a:r>
-          </a:p>
-          <a:p>
-            <a:pPr lvl="0" indent="0" marL="0">
-              <a:buNone/>
-            </a:pPr>
-          </a:p>
-          <a:p>
-            <a:pPr lvl="0" indent="0" marL="0">
-              <a:buNone/>
-            </a:pPr>
-            <a:r>
-              <a:rPr/>
-              <a:t>Write the two steps separately and one day you will scale using statistics computed over the whole dataset. Nothing warns you: no error, no exception, just a better number than you deserve.</a:t>
-            </a:r>
-          </a:p>
-          <a:p>
-            <a:pPr lvl="0" indent="0" marL="0">
-              <a:buNone/>
-            </a:pPr>
-          </a:p>
-          <a:p>
-            <a:pPr lvl="0" indent="0" marL="0">
-              <a:buNone/>
-            </a:pPr>
-            <a:r>
-              <a:rPr/>
-              <a:t>This is structure beating discipline, and it is the single most useful habit in the scikit-learn API.</a:t>
+              <a:t>Without this, “96% accuracy” has no scale at all. With it, they can see whether the model is worth anything.</a:t>
+            </a:r>
+          </a:p>
+          <a:p>
+            <a:pPr lvl="0" indent="0" marL="0">
+              <a:buNone/>
+            </a:pPr>
+          </a:p>
+          <a:p>
+            <a:pPr lvl="0" indent="0" marL="0">
+              <a:buNone/>
+            </a:pPr>
+            <a:r>
+              <a:rPr/>
+              <a:t>DummyClassifier does this in two lines, and the exercise requires it.</a:t>
+            </a:r>
+          </a:p>
+          <a:p>
+            <a:pPr lvl="0" indent="0" marL="0">
+              <a:buNone/>
+            </a:pPr>
+          </a:p>
+          <a:p>
+            <a:pPr lvl="0" indent="0" marL="0">
+              <a:buNone/>
+            </a:pPr>
+            <a:r>
+              <a:rPr/>
+              <a:t>Foreshadow: on the imbalanced example later, the baseline will be unbeatable on accuracy and completely useless in practice. That is the lesson, not a curiosity - it is how you discover that accuracy is the wrong metric for your problem.</a:t>
             </a:r>
           </a:p>
         </p:txBody>
@@ -5047,49 +5076,49 @@
             </a:pPr>
             <a:r>
               <a:rPr/>
-              <a:t>The same two steps, done in the two orders, with what each one shows the test set.</a:t>
-            </a:r>
-          </a:p>
-          <a:p>
-            <a:pPr lvl="0" indent="0" marL="0">
-              <a:buNone/>
-            </a:pPr>
-          </a:p>
-          <a:p>
-            <a:pPr lvl="0" indent="0" marL="0">
-              <a:buNone/>
-            </a:pPr>
-            <a:r>
-              <a:rPr/>
-              <a:t>Point at the top row and at where ‘split’ sits on it: after the scaling. That is the whole mistake, and it is one line out of order.</a:t>
-            </a:r>
-          </a:p>
-          <a:p>
-            <a:pPr lvl="0" indent="0" marL="0">
-              <a:buNone/>
-            </a:pPr>
-          </a:p>
-          <a:p>
-            <a:pPr lvl="0" indent="0" marL="0">
-              <a:buNone/>
-            </a:pPr>
-            <a:r>
-              <a:rPr/>
-              <a:t>On the manual side the scaler is fitted on everything, so the mean and the standard deviation it subtracts already contain the test rows. The model is then evaluated on data it has, in a small way, already seen. The score comes out slightly too high, and nothing anywhere raises an error.</a:t>
-            </a:r>
-          </a:p>
-          <a:p>
-            <a:pPr lvl="0" indent="0" marL="0">
-              <a:buNone/>
-            </a:pPr>
-          </a:p>
-          <a:p>
-            <a:pPr lvl="0" indent="0" marL="0">
-              <a:buNone/>
-            </a:pPr>
-            <a:r>
-              <a:rPr/>
-              <a:t>Emphasise that last part. This is not a mistake that announces itself: it produces a working notebook and a plausible number. Lesson 2 measures what it costs on a real dataset, and lesson 5 gives it its name.</a:t>
+              <a:t>Explain WHY, not just what.</a:t>
+            </a:r>
+          </a:p>
+          <a:p>
+            <a:pPr lvl="0" indent="0" marL="0">
+              <a:buNone/>
+            </a:pPr>
+          </a:p>
+          <a:p>
+            <a:pPr lvl="0" indent="0" marL="0">
+              <a:buNone/>
+            </a:pPr>
+            <a:r>
+              <a:rPr/>
+              <a:t>StandardScaler LEARNS something - a mean and a standard deviation per feature. That makes it part of the model, not preparation of the data. Inside a pipeline it learns them from the training fold every time the pipeline is fitted, including inside each cross-validation fold in lesson 5.</a:t>
+            </a:r>
+          </a:p>
+          <a:p>
+            <a:pPr lvl="0" indent="0" marL="0">
+              <a:buNone/>
+            </a:pPr>
+          </a:p>
+          <a:p>
+            <a:pPr lvl="0" indent="0" marL="0">
+              <a:buNone/>
+            </a:pPr>
+            <a:r>
+              <a:rPr/>
+              <a:t>Write the two steps separately and one day you will scale using statistics computed over the whole dataset. Nothing warns you: no error, no exception, just a better number than you deserve.</a:t>
+            </a:r>
+          </a:p>
+          <a:p>
+            <a:pPr lvl="0" indent="0" marL="0">
+              <a:buNone/>
+            </a:pPr>
+          </a:p>
+          <a:p>
+            <a:pPr lvl="0" indent="0" marL="0">
+              <a:buNone/>
+            </a:pPr>
+            <a:r>
+              <a:rPr/>
+              <a:t>This is structure beating discipline, and it is the single most useful habit in the scikit-learn API.</a:t>
             </a:r>
           </a:p>
         </p:txBody>
@@ -5171,21 +5200,49 @@
             </a:pPr>
             <a:r>
               <a:rPr/>
-              <a:t>Let “done?” hang for a few seconds. Someone will say no.</a:t>
-            </a:r>
-          </a:p>
-          <a:p>
-            <a:pPr lvl="0" indent="0" marL="0">
-              <a:buNone/>
-            </a:pPr>
-          </a:p>
-          <a:p>
-            <a:pPr lvl="0" indent="0" marL="0">
-              <a:buNone/>
-            </a:pPr>
-            <a:r>
-              <a:rPr/>
-              <a:t>If nobody does, ask what 0.986 does not tell them. Then move to the confusion matrix - this is the pivot of the entire lesson.</a:t>
+              <a:t>The same two steps, done in the two orders, with what each one shows the test set.</a:t>
+            </a:r>
+          </a:p>
+          <a:p>
+            <a:pPr lvl="0" indent="0" marL="0">
+              <a:buNone/>
+            </a:pPr>
+          </a:p>
+          <a:p>
+            <a:pPr lvl="0" indent="0" marL="0">
+              <a:buNone/>
+            </a:pPr>
+            <a:r>
+              <a:rPr/>
+              <a:t>Point at the top row and at where ‘split’ sits on it: after the scaling. That is the whole mistake, and it is one line out of order.</a:t>
+            </a:r>
+          </a:p>
+          <a:p>
+            <a:pPr lvl="0" indent="0" marL="0">
+              <a:buNone/>
+            </a:pPr>
+          </a:p>
+          <a:p>
+            <a:pPr lvl="0" indent="0" marL="0">
+              <a:buNone/>
+            </a:pPr>
+            <a:r>
+              <a:rPr/>
+              <a:t>On the manual side the scaler is fitted on everything, so the mean and the standard deviation it subtracts already contain the test rows. The model is then evaluated on data it has, in a small way, already seen. The score comes out slightly too high, and nothing anywhere raises an error.</a:t>
+            </a:r>
+          </a:p>
+          <a:p>
+            <a:pPr lvl="0" indent="0" marL="0">
+              <a:buNone/>
+            </a:pPr>
+          </a:p>
+          <a:p>
+            <a:pPr lvl="0" indent="0" marL="0">
+              <a:buNone/>
+            </a:pPr>
+            <a:r>
+              <a:rPr/>
+              <a:t>Emphasise that last part. This is not a mistake that announces itself: it produces a working notebook and a plausible number. Lesson 2 measures what it costs on a real dataset, and lesson 5 gives it its name.</a:t>
             </a:r>
           </a:p>
         </p:txBody>
@@ -5267,49 +5324,21 @@
             </a:pPr>
             <a:r>
               <a:rPr/>
-              <a:t>One malignant tumour classified as benign.</a:t>
-            </a:r>
-          </a:p>
-          <a:p>
-            <a:pPr lvl="0" indent="0" marL="0">
-              <a:buNone/>
-            </a:pPr>
-          </a:p>
-          <a:p>
-            <a:pPr lvl="0" indent="0" marL="0">
-              <a:buNone/>
-            </a:pPr>
-            <a:r>
-              <a:rPr/>
-              <a:t>As a fraction it is 1 in 143 and vanishes into the accuracy figure. As a consequence it is a person sent home who should not have been.</a:t>
-            </a:r>
-          </a:p>
-          <a:p>
-            <a:pPr lvl="0" indent="0" marL="0">
-              <a:buNone/>
-            </a:pPr>
-          </a:p>
-          <a:p>
-            <a:pPr lvl="0" indent="0" marL="0">
-              <a:buNone/>
-            </a:pPr>
-            <a:r>
-              <a:rPr/>
-              <a:t>Say that sentence deliberately and let it sit. It is the gap between a metric and what the metric stands for, and it is the most important idea in today’s lesson.</a:t>
-            </a:r>
-          </a:p>
-          <a:p>
-            <a:pPr lvl="0" indent="0" marL="0">
-              <a:buNone/>
-            </a:pPr>
-          </a:p>
-          <a:p>
-            <a:pPr lvl="0" indent="0" marL="0">
-              <a:buNone/>
-            </a:pPr>
-            <a:r>
-              <a:rPr/>
-              <a:t>Then the practical form: accuracy collapses every kind of mistake into one number, and our two mistakes are not comparable. The confusion matrix is the minimum tool for seeing them separately.</a:t>
+              <a:t>Let “done?” hang for a few seconds. Someone will say no.</a:t>
+            </a:r>
+          </a:p>
+          <a:p>
+            <a:pPr lvl="0" indent="0" marL="0">
+              <a:buNone/>
+            </a:pPr>
+          </a:p>
+          <a:p>
+            <a:pPr lvl="0" indent="0" marL="0">
+              <a:buNone/>
+            </a:pPr>
+            <a:r>
+              <a:rPr/>
+              <a:t>If nobody does, ask what 0.986 does not tell them. Then move to the confusion matrix - this is the pivot of the entire lesson.</a:t>
             </a:r>
           </a:p>
         </p:txBody>
@@ -5391,49 +5420,49 @@
             </a:pPr>
             <a:r>
               <a:rPr/>
-              <a:t>Use the figure to make the trade-off physical: the threshold is a line you slide, and sliding it moves errors from one column to the other.</a:t>
-            </a:r>
-          </a:p>
-          <a:p>
-            <a:pPr lvl="0" indent="0" marL="0">
-              <a:buNone/>
-            </a:pPr>
-          </a:p>
-          <a:p>
-            <a:pPr lvl="0" indent="0" marL="0">
-              <a:buNone/>
-            </a:pPr>
-            <a:r>
-              <a:rPr/>
-              <a:t>Push recall towards 1.0 by flagging anything suspicious, and precision collapses - the clinic drowns in unnecessary biopsies. Demand high precision and you start missing cases.</a:t>
-            </a:r>
-          </a:p>
-          <a:p>
-            <a:pPr lvl="0" indent="0" marL="0">
-              <a:buNone/>
-            </a:pPr>
-          </a:p>
-          <a:p>
-            <a:pPr lvl="0" indent="0" marL="0">
-              <a:buNone/>
-            </a:pPr>
-            <a:r>
-              <a:rPr/>
-              <a:t>No single number resolves this, because the resolution is not mathematical. It is a question about consequences and it belongs to the people who bear them - here, patients and clinicians, not the person who trained the model.</a:t>
-            </a:r>
-          </a:p>
-          <a:p>
-            <a:pPr lvl="0" indent="0" marL="0">
-              <a:buNone/>
-            </a:pPr>
-          </a:p>
-          <a:p>
-            <a:pPr lvl="0" indent="0" marL="0">
-              <a:buNone/>
-            </a:pPr>
-            <a:r>
-              <a:rPr/>
-              <a:t>Lesson 4 builds the tools properly: receiver operating characteristic (ROC) curves, precision-recall curves, choosing an operating point. Today they need to see that the trade-off exists and that it is not the model’s decision to make.</a:t>
+              <a:t>One malignant tumour classified as benign.</a:t>
+            </a:r>
+          </a:p>
+          <a:p>
+            <a:pPr lvl="0" indent="0" marL="0">
+              <a:buNone/>
+            </a:pPr>
+          </a:p>
+          <a:p>
+            <a:pPr lvl="0" indent="0" marL="0">
+              <a:buNone/>
+            </a:pPr>
+            <a:r>
+              <a:rPr/>
+              <a:t>As a fraction it is 1 in 143 and vanishes into the accuracy figure. As a consequence it is a person sent home who should not have been.</a:t>
+            </a:r>
+          </a:p>
+          <a:p>
+            <a:pPr lvl="0" indent="0" marL="0">
+              <a:buNone/>
+            </a:pPr>
+          </a:p>
+          <a:p>
+            <a:pPr lvl="0" indent="0" marL="0">
+              <a:buNone/>
+            </a:pPr>
+            <a:r>
+              <a:rPr/>
+              <a:t>Say that sentence deliberately and let it sit. It is the gap between a metric and what the metric stands for, and it is the most important idea in today’s lesson.</a:t>
+            </a:r>
+          </a:p>
+          <a:p>
+            <a:pPr lvl="0" indent="0" marL="0">
+              <a:buNone/>
+            </a:pPr>
+          </a:p>
+          <a:p>
+            <a:pPr lvl="0" indent="0" marL="0">
+              <a:buNone/>
+            </a:pPr>
+            <a:r>
+              <a:rPr/>
+              <a:t>Then the practical form: accuracy collapses every kind of mistake into one number, and our two mistakes are not comparable. The confusion matrix is the minimum tool for seeing them separately.</a:t>
             </a:r>
           </a:p>
         </p:txBody>
@@ -5515,63 +5544,49 @@
             </a:pPr>
             <a:r>
               <a:rPr/>
-              <a:t>Say what the axis is before anything else, because nothing else makes sense without it: every dot is one of the 143 tumours in the test set, and its position is the probability our model gave to “malignant”. Not a distance, not a score - a probability, 0 to 1.</a:t>
-            </a:r>
-          </a:p>
-          <a:p>
-            <a:pPr lvl="0" indent="0" marL="0">
-              <a:buNone/>
-            </a:pPr>
-          </a:p>
-          <a:p>
-            <a:pPr lvl="0" indent="0" marL="0">
-              <a:buNone/>
-            </a:pPr>
-            <a:r>
-              <a:rPr/>
-              <a:t>The black line is 0.5, and it is worth saying out loud that nothing chose it. It is the default. Everything to the right of it we flag; everything to the left we send home.</a:t>
-            </a:r>
-          </a:p>
-          <a:p>
-            <a:pPr lvl="0" indent="0" marL="0">
-              <a:buNone/>
-            </a:pPr>
-          </a:p>
-          <a:p>
-            <a:pPr lvl="0" indent="0" marL="0">
-              <a:buNone/>
-            </a:pPr>
-            <a:r>
-              <a:rPr/>
-              <a:t>Now the point of the slide. Most of the picture is the model being certain: 105 of the 143 sit within 0.02 of one end, which is where 0.986 comes from. Tell them to ignore those and look at the middle. The band from 0.11 to 0.62 holds the 12 it was unsure about - 1 malignant, 11 benign - and at 0.5 only two of the twelve are on the wrong side: the malignancy at 0.11 that we missed, and the benign at 0.62 that we flagged.</a:t>
-            </a:r>
-          </a:p>
-          <a:p>
-            <a:pPr lvl="0" indent="0" marL="0">
-              <a:buNone/>
-            </a:pPr>
-          </a:p>
-          <a:p>
-            <a:pPr lvl="0" indent="0" marL="0">
-              <a:buNone/>
-            </a:pPr>
-            <a:r>
-              <a:rPr/>
-              <a:t>Then slide the line, and make them watch the band rather than the numbers. Down to 0.10 and it passes below the whole band: the missed malignancy is caught, and all 11 uncertain benign tumours turn into false alarms. Point at them - the eleven are countable on the slide, which is the whole reason this figure is here rather than a table. Up to 0.90 instead and no false alarm survives, at the price of 7 women sent home who should not have been.</a:t>
-            </a:r>
-          </a:p>
-          <a:p>
-            <a:pPr lvl="0" indent="0" marL="0">
-              <a:buNone/>
-            </a:pPr>
-          </a:p>
-          <a:p>
-            <a:pPr lvl="0" indent="0" marL="0">
-              <a:buNone/>
-            </a:pPr>
-            <a:r>
-              <a:rPr/>
-              <a:t>Nothing about the model changed between those two sentences. So the question of whether it is good has no answer until somebody says which error is worse - which is the earlier slide arriving again, now with a number attached. Lesson 4 spends an hour here.</a:t>
+              <a:t>Use the figure to make the trade-off physical: the threshold is a line you slide, and sliding it moves errors from one column to the other.</a:t>
+            </a:r>
+          </a:p>
+          <a:p>
+            <a:pPr lvl="0" indent="0" marL="0">
+              <a:buNone/>
+            </a:pPr>
+          </a:p>
+          <a:p>
+            <a:pPr lvl="0" indent="0" marL="0">
+              <a:buNone/>
+            </a:pPr>
+            <a:r>
+              <a:rPr/>
+              <a:t>Push recall towards 1.0 by flagging anything suspicious, and precision collapses - the clinic drowns in unnecessary biopsies. Demand high precision and you start missing cases.</a:t>
+            </a:r>
+          </a:p>
+          <a:p>
+            <a:pPr lvl="0" indent="0" marL="0">
+              <a:buNone/>
+            </a:pPr>
+          </a:p>
+          <a:p>
+            <a:pPr lvl="0" indent="0" marL="0">
+              <a:buNone/>
+            </a:pPr>
+            <a:r>
+              <a:rPr/>
+              <a:t>No single number resolves this, because the resolution is not mathematical. It is a question about consequences and it belongs to the people who bear them - here, patients and clinicians, not the person who trained the model.</a:t>
+            </a:r>
+          </a:p>
+          <a:p>
+            <a:pPr lvl="0" indent="0" marL="0">
+              <a:buNone/>
+            </a:pPr>
+          </a:p>
+          <a:p>
+            <a:pPr lvl="0" indent="0" marL="0">
+              <a:buNone/>
+            </a:pPr>
+            <a:r>
+              <a:rPr/>
+              <a:t>Lesson 4 builds the tools properly: receiver operating characteristic (ROC) curves, precision-recall curves, choosing an operating point. Today they need to see that the trade-off exists and that it is not the model’s decision to make.</a:t>
             </a:r>
           </a:p>
         </p:txBody>
@@ -5653,21 +5668,63 @@
             </a:pPr>
             <a:r>
               <a:rPr/>
-              <a:t>Name where each omission gets addressed: tuning and stability in lesson 5, model families in 6 and 7.</a:t>
-            </a:r>
-          </a:p>
-          <a:p>
-            <a:pPr lvl="0" indent="0" marL="0">
-              <a:buNone/>
-            </a:pPr>
-          </a:p>
-          <a:p>
-            <a:pPr lvl="0" indent="0" marL="0">
-              <a:buNone/>
-            </a:pPr>
-            <a:r>
-              <a:rPr/>
-              <a:t>Then land the last line, which is the point of the slide: that discipline is the reason the 0.986 is worth anything at all. Every one of the four failures we are about to see comes from breaking it in some form.</a:t>
+              <a:t>Say what the axis is before anything else, because nothing else makes sense without it: every dot is one of the 143 tumours in the test set, and its position is the probability our model gave to “malignant”. Not a distance, not a score - a probability, 0 to 1.</a:t>
+            </a:r>
+          </a:p>
+          <a:p>
+            <a:pPr lvl="0" indent="0" marL="0">
+              <a:buNone/>
+            </a:pPr>
+          </a:p>
+          <a:p>
+            <a:pPr lvl="0" indent="0" marL="0">
+              <a:buNone/>
+            </a:pPr>
+            <a:r>
+              <a:rPr/>
+              <a:t>The black line is 0.5, and it is worth saying out loud that nothing chose it. It is the default. Everything to the right of it we flag; everything to the left we send home.</a:t>
+            </a:r>
+          </a:p>
+          <a:p>
+            <a:pPr lvl="0" indent="0" marL="0">
+              <a:buNone/>
+            </a:pPr>
+          </a:p>
+          <a:p>
+            <a:pPr lvl="0" indent="0" marL="0">
+              <a:buNone/>
+            </a:pPr>
+            <a:r>
+              <a:rPr/>
+              <a:t>Now the point of the slide. Most of the picture is the model being certain: 105 of the 143 sit within 0.02 of one end, which is where 0.986 comes from. Tell them to ignore those and look at the middle. The band from 0.11 to 0.62 holds the 12 it was unsure about - 1 malignant, 11 benign - and at 0.5 only two of the twelve are on the wrong side: the malignancy at 0.11 that we missed, and the benign at 0.62 that we flagged.</a:t>
+            </a:r>
+          </a:p>
+          <a:p>
+            <a:pPr lvl="0" indent="0" marL="0">
+              <a:buNone/>
+            </a:pPr>
+          </a:p>
+          <a:p>
+            <a:pPr lvl="0" indent="0" marL="0">
+              <a:buNone/>
+            </a:pPr>
+            <a:r>
+              <a:rPr/>
+              <a:t>Then slide the line, and make them watch the band rather than the numbers. Down to 0.10 and it passes below the whole band: the missed malignancy is caught, and all 11 uncertain benign tumours turn into false alarms. Point at them - the eleven are countable on the slide, which is the whole reason this figure is here rather than a table. Up to 0.90 instead and no false alarm survives, at the price of 7 women sent home who should not have been.</a:t>
+            </a:r>
+          </a:p>
+          <a:p>
+            <a:pPr lvl="0" indent="0" marL="0">
+              <a:buNone/>
+            </a:pPr>
+          </a:p>
+          <a:p>
+            <a:pPr lvl="0" indent="0" marL="0">
+              <a:buNone/>
+            </a:pPr>
+            <a:r>
+              <a:rPr/>
+              <a:t>Nothing about the model changed between those two sentences. So the question of whether it is good has no answer until somebody says which error is worse - which is the earlier slide arriving again, now with a number attached. Lesson 4 spends an hour here.</a:t>
             </a:r>
           </a:p>
         </p:txBody>
@@ -5749,21 +5806,21 @@
             </a:pPr>
             <a:r>
               <a:rPr/>
-              <a:t>Open notebook 03. Frame it before starting: none of these is a coding error. All four run exactly as written and return a number that a reviewer, a supervisor or a customer would accept.</a:t>
-            </a:r>
-          </a:p>
-          <a:p>
-            <a:pPr lvl="0" indent="0" marL="0">
-              <a:buNone/>
-            </a:pPr>
-          </a:p>
-          <a:p>
-            <a:pPr lvl="0" indent="0" marL="0">
-              <a:buNone/>
-            </a:pPr>
-            <a:r>
-              <a:rPr/>
-              <a:t>This is the section they should still remember in five years. Handout section 7 summarises it, and every one of the four has been found in published work and in shipped products.</a:t>
+              <a:t>Name where each omission gets addressed: tuning and stability in lesson 5, model families in 6 and 7.</a:t>
+            </a:r>
+          </a:p>
+          <a:p>
+            <a:pPr lvl="0" indent="0" marL="0">
+              <a:buNone/>
+            </a:pPr>
+          </a:p>
+          <a:p>
+            <a:pPr lvl="0" indent="0" marL="0">
+              <a:buNone/>
+            </a:pPr>
+            <a:r>
+              <a:rPr/>
+              <a:t>Then land the last line, which is the point of the slide: that discipline is the reason the 0.986 is worth anything at all. Every one of the four failures we are about to see comes from breaking it in some form.</a:t>
             </a:r>
           </a:p>
         </p:txBody>
@@ -5969,21 +6026,21 @@
             </a:pPr>
             <a:r>
               <a:rPr/>
-              <a:t>Set this up carefully before revealing anything. Make sure they understand the data is pure noise BY CONSTRUCTION - the labels come from a random number generator and no feature carries any information about them.</a:t>
-            </a:r>
-          </a:p>
-          <a:p>
-            <a:pPr lvl="0" indent="0" marL="0">
-              <a:buNone/>
-            </a:pPr>
-          </a:p>
-          <a:p>
-            <a:pPr lvl="0" indent="0" marL="0">
-              <a:buNone/>
-            </a:pPr>
-            <a:r>
-              <a:rPr/>
-              <a:t>Ask what accuracy they expect. The honest answer is 50%, chance.</a:t>
+              <a:t>Open notebook 03. Frame it before starting: none of these is a coding error. All four run exactly as written and return a number that a reviewer, a supervisor or a customer would accept.</a:t>
+            </a:r>
+          </a:p>
+          <a:p>
+            <a:pPr lvl="0" indent="0" marL="0">
+              <a:buNone/>
+            </a:pPr>
+          </a:p>
+          <a:p>
+            <a:pPr lvl="0" indent="0" marL="0">
+              <a:buNone/>
+            </a:pPr>
+            <a:r>
+              <a:rPr/>
+              <a:t>This is the section they should still remember in five years. Handout section 7 summarises it, and every one of the four has been found in published work and in shipped products.</a:t>
             </a:r>
           </a:p>
         </p:txBody>
@@ -6065,49 +6122,21 @@
             </a:pPr>
             <a:r>
               <a:rPr/>
-              <a:t>77% on pure noise, against 50% for the honest pipeline.</a:t>
-            </a:r>
-          </a:p>
-          <a:p>
-            <a:pPr lvl="0" indent="0" marL="0">
-              <a:buNone/>
-            </a:pPr>
-          </a:p>
-          <a:p>
-            <a:pPr lvl="0" indent="0" marL="0">
-              <a:buNone/>
-            </a:pPr>
-            <a:r>
-              <a:rPr/>
-              <a:t>Explain the mechanism: with 5000 random features, some correlate with the labels by chance. Selecting the best 20 using the whole dataset picks exactly those - including the ones that correlate with the labels of rows that later become the test set. The selection encoded information about the test labels, and the model inherited it.</a:t>
-            </a:r>
-          </a:p>
-          <a:p>
-            <a:pPr lvl="0" indent="0" marL="0">
-              <a:buNone/>
-            </a:pPr>
-          </a:p>
-          <a:p>
-            <a:pPr lvl="0" indent="0" marL="0">
-              <a:buNone/>
-            </a:pPr>
-            <a:r>
-              <a:rPr/>
-              <a:t>Nobody wrote a bug. Selection feels harmless because it fits no model - but it LEARNS from data, so it belongs inside the training fold.</a:t>
-            </a:r>
-          </a:p>
-          <a:p>
-            <a:pPr lvl="0" indent="0" marL="0">
-              <a:buNone/>
-            </a:pPr>
-          </a:p>
-          <a:p>
-            <a:pPr lvl="0" indent="0" marL="0">
-              <a:buNone/>
-            </a:pPr>
-            <a:r>
-              <a:rPr/>
-              <a:t>Then ask what happens with 20000 features instead of 5000. The illusion gets STRONGER, because there are more opportunities for a spurious correlation. That is the “try this” at the end of the notebook.</a:t>
+              <a:t>Set this up carefully before revealing anything. Make sure they understand the data is pure noise BY CONSTRUCTION - the labels come from a random number generator and no feature carries any information about them.</a:t>
+            </a:r>
+          </a:p>
+          <a:p>
+            <a:pPr lvl="0" indent="0" marL="0">
+              <a:buNone/>
+            </a:pPr>
+          </a:p>
+          <a:p>
+            <a:pPr lvl="0" indent="0" marL="0">
+              <a:buNone/>
+            </a:pPr>
+            <a:r>
+              <a:rPr/>
+              <a:t>Ask what accuracy they expect. The honest answer is 50%, chance.</a:t>
             </a:r>
           </a:p>
         </p:txBody>
@@ -6189,35 +6218,49 @@
             </a:pPr>
             <a:r>
               <a:rPr/>
-              <a:t>The practical takeaway from the whole leakage section, and the thing to put on the board if anything goes on the board today.</a:t>
-            </a:r>
-          </a:p>
-          <a:p>
-            <a:pPr lvl="0" indent="0" marL="0">
-              <a:buNone/>
-            </a:pPr>
-          </a:p>
-          <a:p>
-            <a:pPr lvl="0" indent="0" marL="0">
-              <a:buNone/>
-            </a:pPr>
-            <a:r>
-              <a:rPr/>
-              <a:t>Pipelines enforce it structurally, which is why we used one from the first notebook.</a:t>
-            </a:r>
-          </a:p>
-          <a:p>
-            <a:pPr lvl="0" indent="0" marL="0">
-              <a:buNone/>
-            </a:pPr>
-          </a:p>
-          <a:p>
-            <a:pPr lvl="0" indent="0" marL="0">
-              <a:buNone/>
-            </a:pPr>
-            <a:r>
-              <a:rPr/>
-              <a:t>Tell them the exercise checks this: scaling the full dataset before splitting caps the methodology marks regardless of the result obtained.</a:t>
+              <a:t>77% on pure noise, against 50% for the honest pipeline.</a:t>
+            </a:r>
+          </a:p>
+          <a:p>
+            <a:pPr lvl="0" indent="0" marL="0">
+              <a:buNone/>
+            </a:pPr>
+          </a:p>
+          <a:p>
+            <a:pPr lvl="0" indent="0" marL="0">
+              <a:buNone/>
+            </a:pPr>
+            <a:r>
+              <a:rPr/>
+              <a:t>Explain the mechanism: with 5000 random features, some correlate with the labels by chance. Selecting the best 20 using the whole dataset picks exactly those - including the ones that correlate with the labels of rows that later become the test set. The selection encoded information about the test labels, and the model inherited it.</a:t>
+            </a:r>
+          </a:p>
+          <a:p>
+            <a:pPr lvl="0" indent="0" marL="0">
+              <a:buNone/>
+            </a:pPr>
+          </a:p>
+          <a:p>
+            <a:pPr lvl="0" indent="0" marL="0">
+              <a:buNone/>
+            </a:pPr>
+            <a:r>
+              <a:rPr/>
+              <a:t>Nobody wrote a bug. Selection feels harmless because it fits no model - but it LEARNS from data, so it belongs inside the training fold.</a:t>
+            </a:r>
+          </a:p>
+          <a:p>
+            <a:pPr lvl="0" indent="0" marL="0">
+              <a:buNone/>
+            </a:pPr>
+          </a:p>
+          <a:p>
+            <a:pPr lvl="0" indent="0" marL="0">
+              <a:buNone/>
+            </a:pPr>
+            <a:r>
+              <a:rPr/>
+              <a:t>Then ask what happens with 20000 features instead of 5000. The illusion gets STRONGER, because there are more opportunities for a spurious correlation. That is the “try this” at the end of the notebook.</a:t>
             </a:r>
           </a:p>
         </p:txBody>
@@ -6299,35 +6342,35 @@
             </a:pPr>
             <a:r>
               <a:rPr/>
-              <a:t>The trained model in the notebook reaches 0.987 accuracy - barely above the trivial one - while missing 20 of the 21 positives in the test set.</a:t>
-            </a:r>
-          </a:p>
-          <a:p>
-            <a:pPr lvl="0" indent="0" marL="0">
-              <a:buNone/>
-            </a:pPr>
-          </a:p>
-          <a:p>
-            <a:pPr lvl="0" indent="0" marL="0">
-              <a:buNone/>
-            </a:pPr>
-            <a:r>
-              <a:rPr/>
-              <a:t>On a problem where the positives are the entire reason the system exists.</a:t>
-            </a:r>
-          </a:p>
-          <a:p>
-            <a:pPr lvl="0" indent="0" marL="0">
-              <a:buNone/>
-            </a:pPr>
-          </a:p>
-          <a:p>
-            <a:pPr lvl="0" indent="0" marL="0">
-              <a:buNone/>
-            </a:pPr>
-            <a:r>
-              <a:rPr/>
-              <a:t>Accuracy is dominated by the class nobody is looking for. Ask them what metric they would report to someone deploying this, and steer towards recall on the positive class - then note that recall alone is also gameable, by flagging everything, which is why lesson 4 needs a whole session.</a:t>
+              <a:t>The practical takeaway from the whole leakage section, and the thing to put on the board if anything goes on the board today.</a:t>
+            </a:r>
+          </a:p>
+          <a:p>
+            <a:pPr lvl="0" indent="0" marL="0">
+              <a:buNone/>
+            </a:pPr>
+          </a:p>
+          <a:p>
+            <a:pPr lvl="0" indent="0" marL="0">
+              <a:buNone/>
+            </a:pPr>
+            <a:r>
+              <a:rPr/>
+              <a:t>Pipelines enforce it structurally, which is why we used one from the first notebook.</a:t>
+            </a:r>
+          </a:p>
+          <a:p>
+            <a:pPr lvl="0" indent="0" marL="0">
+              <a:buNone/>
+            </a:pPr>
+          </a:p>
+          <a:p>
+            <a:pPr lvl="0" indent="0" marL="0">
+              <a:buNone/>
+            </a:pPr>
+            <a:r>
+              <a:rPr/>
+              <a:t>Tell them the exercise checks this: scaling the full dataset before splitting caps the methodology marks regardless of the result obtained.</a:t>
             </a:r>
           </a:p>
         </p:txBody>
@@ -6409,35 +6452,35 @@
             </a:pPr>
             <a:r>
               <a:rPr/>
-              <a:t>Two confusion matrices side by side. Give them a moment to spot that the accuracies agree to three decimal places.</a:t>
-            </a:r>
-          </a:p>
-          <a:p>
-            <a:pPr lvl="0" indent="0" marL="0">
-              <a:buNone/>
-            </a:pPr>
-          </a:p>
-          <a:p>
-            <a:pPr lvl="0" indent="0" marL="0">
-              <a:buNone/>
-            </a:pPr>
-            <a:r>
-              <a:rPr/>
-              <a:t>Left is the model that answers negative every time and has learned nothing whatever. Right is a trained model. 0.986 against 0.987 - and the one on the right finds a single positive out of twenty-one, which is barely better than nothing but is not nothing.</a:t>
-            </a:r>
-          </a:p>
-          <a:p>
-            <a:pPr lvl="0" indent="0" marL="0">
-              <a:buNone/>
-            </a:pPr>
-          </a:p>
-          <a:p>
-            <a:pPr lvl="0" indent="0" marL="0">
-              <a:buNone/>
-            </a:pPr>
-            <a:r>
-              <a:rPr/>
-              <a:t>Ask what a report containing only the accuracy would say about these two, and let the silence do the work. Then point at the bottom-left cell of each: 21 missed, then 20 missed. That is the number the application cares about, and it is the one accuracy averages away.</a:t>
+              <a:t>The trained model in the notebook reaches 0.987 accuracy - barely above the trivial one - while missing 20 of the 21 positives in the test set.</a:t>
+            </a:r>
+          </a:p>
+          <a:p>
+            <a:pPr lvl="0" indent="0" marL="0">
+              <a:buNone/>
+            </a:pPr>
+          </a:p>
+          <a:p>
+            <a:pPr lvl="0" indent="0" marL="0">
+              <a:buNone/>
+            </a:pPr>
+            <a:r>
+              <a:rPr/>
+              <a:t>On a problem where the positives are the entire reason the system exists.</a:t>
+            </a:r>
+          </a:p>
+          <a:p>
+            <a:pPr lvl="0" indent="0" marL="0">
+              <a:buNone/>
+            </a:pPr>
+          </a:p>
+          <a:p>
+            <a:pPr lvl="0" indent="0" marL="0">
+              <a:buNone/>
+            </a:pPr>
+            <a:r>
+              <a:rPr/>
+              <a:t>Accuracy is dominated by the class nobody is looking for. Ask them what metric they would report to someone deploying this, and steer towards recall on the positive class - then note that recall alone is also gameable, by flagging everything, which is why lesson 4 needs a whole session.</a:t>
             </a:r>
           </a:p>
         </p:txBody>
@@ -6519,49 +6562,35 @@
             </a:pPr>
             <a:r>
               <a:rPr/>
-              <a:t>Explain why it is worthless: biopsies are scheduled once malignancy is already suspected, so the field is populated AFTER the diagnosis it is supposed to predict. At prediction time for a new patient it is empty.</a:t>
-            </a:r>
-          </a:p>
-          <a:p>
-            <a:pPr lvl="0" indent="0" marL="0">
-              <a:buNone/>
-            </a:pPr>
-          </a:p>
-          <a:p>
-            <a:pPr lvl="0" indent="0" marL="0">
-              <a:buNone/>
-            </a:pPr>
-            <a:r>
-              <a:rPr/>
-              <a:t>Then the point that makes this different from the others: no metric detects it, including cross-validated ones, because the information genuinely IS in the training data. The model is not cheating; the data is.</a:t>
-            </a:r>
-          </a:p>
-          <a:p>
-            <a:pPr lvl="0" indent="0" marL="0">
-              <a:buNone/>
-            </a:pPr>
-          </a:p>
-          <a:p>
-            <a:pPr lvl="0" indent="0" marL="0">
-              <a:buNone/>
-            </a:pPr>
-            <a:r>
-              <a:rPr/>
-              <a:t>Only knowing how the data was recorded catches it. Ask them to imagine a hospital extract with 200 columns and no documentation - which is the normal case - and to think about how they would find this.</a:t>
-            </a:r>
-          </a:p>
-          <a:p>
-            <a:pPr lvl="0" indent="0" marL="0">
-              <a:buNone/>
-            </a:pPr>
-          </a:p>
-          <a:p>
-            <a:pPr lvl="0" indent="0" marL="0">
-              <a:buNone/>
-            </a:pPr>
-            <a:r>
-              <a:rPr/>
-              <a:t>The question to carry: at the moment a prediction is needed, does this value exist yet?</a:t>
+              <a:t>Two confusion matrices side by side. Give them a moment to spot that the accuracies agree to three decimal places.</a:t>
+            </a:r>
+          </a:p>
+          <a:p>
+            <a:pPr lvl="0" indent="0" marL="0">
+              <a:buNone/>
+            </a:pPr>
+          </a:p>
+          <a:p>
+            <a:pPr lvl="0" indent="0" marL="0">
+              <a:buNone/>
+            </a:pPr>
+            <a:r>
+              <a:rPr/>
+              <a:t>Left is the model that answers negative every time and has learned nothing whatever. Right is a trained model. 0.986 against 0.987 - and the one on the right finds a single positive out of twenty-one, which is barely better than nothing but is not nothing.</a:t>
+            </a:r>
+          </a:p>
+          <a:p>
+            <a:pPr lvl="0" indent="0" marL="0">
+              <a:buNone/>
+            </a:pPr>
+          </a:p>
+          <a:p>
+            <a:pPr lvl="0" indent="0" marL="0">
+              <a:buNone/>
+            </a:pPr>
+            <a:r>
+              <a:rPr/>
+              <a:t>Ask what a report containing only the accuracy would say about these two, and let the silence do the work. Then point at the bottom-left cell of each: 21 missed, then 20 missed. That is the number the application cares about, and it is the one accuracy averages away.</a:t>
             </a:r>
           </a:p>
         </p:txBody>
@@ -6643,49 +6672,49 @@
             </a:pPr>
             <a:r>
               <a:rPr/>
-              <a:t>A timeline, with the moment of prediction marked, and everything that happens after it shaded.</a:t>
-            </a:r>
-          </a:p>
-          <a:p>
-            <a:pPr lvl="0" indent="0" marL="0">
-              <a:buNone/>
-            </a:pPr>
-          </a:p>
-          <a:p>
-            <a:pPr lvl="0" indent="0" marL="0">
-              <a:buNone/>
-            </a:pPr>
-            <a:r>
-              <a:rPr/>
-              <a:t>Walk left to right: the scan is taken, measurements are recorded - both before the prediction is needed, both usable. Then the shaded region: the diagnosis is made, the biopsy is scheduled. A model leaning on biopsy_scheduled scores beautifully in the notebook and has nothing to read at the moment it would actually be used.</a:t>
-            </a:r>
-          </a:p>
-          <a:p>
-            <a:pPr lvl="0" indent="0" marL="0">
-              <a:buNone/>
-            </a:pPr>
-          </a:p>
-          <a:p>
-            <a:pPr lvl="0" indent="0" marL="0">
-              <a:buNone/>
-            </a:pPr>
-            <a:r>
-              <a:rPr/>
-              <a:t>The shaded region is the trap: everything to the right of the marked moment happens after a prediction is needed, so none of it can be an input.</a:t>
-            </a:r>
-          </a:p>
-          <a:p>
-            <a:pPr lvl="0" indent="0" marL="0">
-              <a:buNone/>
-            </a:pPr>
-          </a:p>
-          <a:p>
-            <a:pPr lvl="0" indent="0" marL="0">
-              <a:buNone/>
-            </a:pPr>
-            <a:r>
-              <a:rPr/>
-              <a:t>The question in the title is the one to make a habit of, and it is worth saying that it cannot be answered by looking at the data. It is answered by asking somebody who knows how the data is produced. Put it to them as the thing to ask of every column in every dataset they are handed.</a:t>
+              <a:t>Explain why it is worthless: biopsies are scheduled once malignancy is already suspected, so the field is populated AFTER the diagnosis it is supposed to predict. At prediction time for a new patient it is empty.</a:t>
+            </a:r>
+          </a:p>
+          <a:p>
+            <a:pPr lvl="0" indent="0" marL="0">
+              <a:buNone/>
+            </a:pPr>
+          </a:p>
+          <a:p>
+            <a:pPr lvl="0" indent="0" marL="0">
+              <a:buNone/>
+            </a:pPr>
+            <a:r>
+              <a:rPr/>
+              <a:t>Then the point that makes this different from the others: no metric detects it, including cross-validated ones, because the information genuinely IS in the training data. The model is not cheating; the data is.</a:t>
+            </a:r>
+          </a:p>
+          <a:p>
+            <a:pPr lvl="0" indent="0" marL="0">
+              <a:buNone/>
+            </a:pPr>
+          </a:p>
+          <a:p>
+            <a:pPr lvl="0" indent="0" marL="0">
+              <a:buNone/>
+            </a:pPr>
+            <a:r>
+              <a:rPr/>
+              <a:t>Only knowing how the data was recorded catches it. Ask them to imagine a hospital extract with 200 columns and no documentation - which is the normal case - and to think about how they would find this.</a:t>
+            </a:r>
+          </a:p>
+          <a:p>
+            <a:pPr lvl="0" indent="0" marL="0">
+              <a:buNone/>
+            </a:pPr>
+          </a:p>
+          <a:p>
+            <a:pPr lvl="0" indent="0" marL="0">
+              <a:buNone/>
+            </a:pPr>
+            <a:r>
+              <a:rPr/>
+              <a:t>The question to carry: at the moment a prediction is needed, does this value exist yet?</a:t>
             </a:r>
           </a:p>
         </p:txBody>
@@ -6767,63 +6796,49 @@
             </a:pPr>
             <a:r>
               <a:rPr/>
-              <a:t>Same model, same data, 30 different random seeds. Accuracy ranges from 0.917 to 1.000 - a spread of 0.083.</a:t>
-            </a:r>
-          </a:p>
-          <a:p>
-            <a:pPr lvl="0" indent="0" marL="0">
-              <a:buNone/>
-            </a:pPr>
-          </a:p>
-          <a:p>
-            <a:pPr lvl="0" indent="0" marL="0">
-              <a:buNone/>
-            </a:pPr>
-            <a:r>
-              <a:rPr/>
-              <a:t>That is larger than most claimed improvements between competing methods in published work. Let that land.</a:t>
-            </a:r>
-          </a:p>
-          <a:p>
-            <a:pPr lvl="0" indent="0" marL="0">
-              <a:buNone/>
-            </a:pPr>
-          </a:p>
-          <a:p>
-            <a:pPr lvl="0" indent="0" marL="0">
-              <a:buNone/>
-            </a:pPr>
-            <a:r>
-              <a:rPr/>
-              <a:t>Pick your favourite seed and you can report anything in that range, and a reader seeing one number cannot tell which you got. This is not fraud; it is the default behaviour of anyone who runs the code once.</a:t>
-            </a:r>
-          </a:p>
-          <a:p>
-            <a:pPr lvl="0" indent="0" marL="0">
-              <a:buNone/>
-            </a:pPr>
-          </a:p>
-          <a:p>
-            <a:pPr lvl="0" indent="0" marL="0">
-              <a:buNone/>
-            </a:pPr>
-            <a:r>
-              <a:rPr/>
-              <a:t>Cross-validation replaces the single draw with an average and - more usefully - reports the spread. On this data, 5-fold gives 0.960 ± 0.030.</a:t>
-            </a:r>
-          </a:p>
-          <a:p>
-            <a:pPr lvl="0" indent="0" marL="0">
-              <a:buNone/>
-            </a:pPr>
-          </a:p>
-          <a:p>
-            <a:pPr lvl="0" indent="0" marL="0">
-              <a:buNone/>
-            </a:pPr>
-            <a:r>
-              <a:rPr/>
-              <a:t>A result quoted with no indication of variability is incomplete. Lesson 5 makes this the centre of the course.</a:t>
+              <a:t>A timeline, with the moment of prediction marked, and everything that happens after it shaded.</a:t>
+            </a:r>
+          </a:p>
+          <a:p>
+            <a:pPr lvl="0" indent="0" marL="0">
+              <a:buNone/>
+            </a:pPr>
+          </a:p>
+          <a:p>
+            <a:pPr lvl="0" indent="0" marL="0">
+              <a:buNone/>
+            </a:pPr>
+            <a:r>
+              <a:rPr/>
+              <a:t>Walk left to right: the scan is taken, measurements are recorded - both before the prediction is needed, both usable. Then the shaded region: the diagnosis is made, the biopsy is scheduled. A model leaning on biopsy_scheduled scores beautifully in the notebook and has nothing to read at the moment it would actually be used.</a:t>
+            </a:r>
+          </a:p>
+          <a:p>
+            <a:pPr lvl="0" indent="0" marL="0">
+              <a:buNone/>
+            </a:pPr>
+          </a:p>
+          <a:p>
+            <a:pPr lvl="0" indent="0" marL="0">
+              <a:buNone/>
+            </a:pPr>
+            <a:r>
+              <a:rPr/>
+              <a:t>The shaded region is the trap: everything to the right of the marked moment happens after a prediction is needed, so none of it can be an input.</a:t>
+            </a:r>
+          </a:p>
+          <a:p>
+            <a:pPr lvl="0" indent="0" marL="0">
+              <a:buNone/>
+            </a:pPr>
+          </a:p>
+          <a:p>
+            <a:pPr lvl="0" indent="0" marL="0">
+              <a:buNone/>
+            </a:pPr>
+            <a:r>
+              <a:rPr/>
+              <a:t>The question in the title is the one to make a habit of, and it is worth saying that it cannot be answered by looking at the data. It is answered by asking somebody who knows how the data is produced. Put it to them as the thing to ask of every column in every dataset they are handed.</a:t>
             </a:r>
           </a:p>
         </p:txBody>
@@ -6905,35 +6920,63 @@
             </a:pPr>
             <a:r>
               <a:rPr/>
-              <a:t>They are caught by asking questions about the data and the process, not by reading the metric.</a:t>
-            </a:r>
-          </a:p>
-          <a:p>
-            <a:pPr lvl="0" indent="0" marL="0">
-              <a:buNone/>
-            </a:pPr>
-          </a:p>
-          <a:p>
-            <a:pPr lvl="0" indent="0" marL="0">
-              <a:buNone/>
-            </a:pPr>
-            <a:r>
-              <a:rPr/>
-              <a:t>Give them the three questions to carry out of this room: where did this number come from, what does it leave out, and would it still hold on data I have never touched?</a:t>
-            </a:r>
-          </a:p>
-          <a:p>
-            <a:pPr lvl="0" indent="0" marL="0">
-              <a:buNone/>
-            </a:pPr>
-          </a:p>
-          <a:p>
-            <a:pPr lvl="0" indent="0" marL="0">
-              <a:buNone/>
-            </a:pPr>
-            <a:r>
-              <a:rPr/>
-              <a:t>Then the professional version, connecting back to the history section: the habit of distinguishing what was demonstrated from what was extrapolated is the same habit, applied to your own work instead of someone else’s.</a:t>
+              <a:t>Same model, same data, 30 different random seeds. Accuracy ranges from 0.917 to 1.000 - a spread of 0.083.</a:t>
+            </a:r>
+          </a:p>
+          <a:p>
+            <a:pPr lvl="0" indent="0" marL="0">
+              <a:buNone/>
+            </a:pPr>
+          </a:p>
+          <a:p>
+            <a:pPr lvl="0" indent="0" marL="0">
+              <a:buNone/>
+            </a:pPr>
+            <a:r>
+              <a:rPr/>
+              <a:t>That is larger than most claimed improvements between competing methods in published work. Let that land.</a:t>
+            </a:r>
+          </a:p>
+          <a:p>
+            <a:pPr lvl="0" indent="0" marL="0">
+              <a:buNone/>
+            </a:pPr>
+          </a:p>
+          <a:p>
+            <a:pPr lvl="0" indent="0" marL="0">
+              <a:buNone/>
+            </a:pPr>
+            <a:r>
+              <a:rPr/>
+              <a:t>Pick your favourite seed and you can report anything in that range, and a reader seeing one number cannot tell which you got. This is not fraud; it is the default behaviour of anyone who runs the code once.</a:t>
+            </a:r>
+          </a:p>
+          <a:p>
+            <a:pPr lvl="0" indent="0" marL="0">
+              <a:buNone/>
+            </a:pPr>
+          </a:p>
+          <a:p>
+            <a:pPr lvl="0" indent="0" marL="0">
+              <a:buNone/>
+            </a:pPr>
+            <a:r>
+              <a:rPr/>
+              <a:t>Cross-validation replaces the single draw with an average and - more usefully - reports the spread. On this data, 5-fold gives 0.960 ± 0.030.</a:t>
+            </a:r>
+          </a:p>
+          <a:p>
+            <a:pPr lvl="0" indent="0" marL="0">
+              <a:buNone/>
+            </a:pPr>
+          </a:p>
+          <a:p>
+            <a:pPr lvl="0" indent="0" marL="0">
+              <a:buNone/>
+            </a:pPr>
+            <a:r>
+              <a:rPr/>
+              <a:t>A result quoted with no indication of variability is incomplete. Lesson 5 makes this the centre of the course.</a:t>
             </a:r>
           </a:p>
         </p:txBody>
@@ -7015,63 +7058,35 @@
             </a:pPr>
             <a:r>
               <a:rPr/>
-              <a:t>Close the loop with the “when not to use ML” slide. Handout section 8.</a:t>
-            </a:r>
-          </a:p>
-          <a:p>
-            <a:pPr lvl="0" indent="0" marL="0">
-              <a:buNone/>
-            </a:pPr>
-          </a:p>
-          <a:p>
-            <a:pPr lvl="0" indent="0" marL="0">
-              <a:buNone/>
-            </a:pPr>
-            <a:r>
-              <a:rPr/>
-              <a:t>If past decisions discriminated, a model fitted to them discriminates too - and it does so with an appearance of objectivity that makes it HARDER to contest than a human decision would be. “The algorithm decided” is a much harder claim to argue with than “the manager decided”.</a:t>
-            </a:r>
-          </a:p>
-          <a:p>
-            <a:pPr lvl="0" indent="0" marL="0">
-              <a:buNone/>
-            </a:pPr>
-          </a:p>
-          <a:p>
-            <a:pPr lvl="0" indent="0" marL="0">
-              <a:buNone/>
-            </a:pPr>
-            <a:r>
-              <a:rPr/>
-              <a:t>Second point: nothing in empirical risk minimisation distinguishes a cause from a coincidence that predicts well in this sample. A model can be highly accurate and completely wrong about why - which is exactly why it fails abruptly when conditions change.</a:t>
-            </a:r>
-          </a:p>
-          <a:p>
-            <a:pPr lvl="0" indent="0" marL="0">
-              <a:buNone/>
-            </a:pPr>
-          </a:p>
-          <a:p>
-            <a:pPr lvl="0" indent="0" marL="0">
-              <a:buNone/>
-            </a:pPr>
-            <a:r>
-              <a:rPr/>
-              <a:t>Third: whether a decision can be explained to the person affected, whether errors are recoverable, and who bears the cost of being wrong are engineering requirements. They belong in step 1, where they can still change what you build, not in a paragraph at the end of a report.</a:t>
-            </a:r>
-          </a:p>
-          <a:p>
-            <a:pPr lvl="0" indent="0" marL="0">
-              <a:buNone/>
-            </a:pPr>
-          </a:p>
-          <a:p>
-            <a:pPr lvl="0" indent="0" marL="0">
-              <a:buNone/>
-            </a:pPr>
-            <a:r>
-              <a:rPr/>
-              <a:t>Keep this short and serious. Do not moralise - state it and move on.</a:t>
+              <a:t>They are caught by asking questions about the data and the process, not by reading the metric.</a:t>
+            </a:r>
+          </a:p>
+          <a:p>
+            <a:pPr lvl="0" indent="0" marL="0">
+              <a:buNone/>
+            </a:pPr>
+          </a:p>
+          <a:p>
+            <a:pPr lvl="0" indent="0" marL="0">
+              <a:buNone/>
+            </a:pPr>
+            <a:r>
+              <a:rPr/>
+              <a:t>Give them the three questions to carry out of this room: where did this number come from, what does it leave out, and would it still hold on data I have never touched?</a:t>
+            </a:r>
+          </a:p>
+          <a:p>
+            <a:pPr lvl="0" indent="0" marL="0">
+              <a:buNone/>
+            </a:pPr>
+          </a:p>
+          <a:p>
+            <a:pPr lvl="0" indent="0" marL="0">
+              <a:buNone/>
+            </a:pPr>
+            <a:r>
+              <a:rPr/>
+              <a:t>Then the professional version, connecting back to the history section: the habit of distinguishing what was demonstrated from what was extrapolated is the same habit, applied to your own work instead of someone else’s.</a:t>
             </a:r>
           </a:p>
         </p:txBody>
@@ -7277,49 +7292,63 @@
             </a:pPr>
             <a:r>
               <a:rPr/>
-              <a:t>Set it explicitly - do not let anyone leave without knowing it exists and when it is due.</a:t>
-            </a:r>
-          </a:p>
-          <a:p>
-            <a:pPr lvl="0" indent="0" marL="0">
-              <a:buNone/>
-            </a:pPr>
-          </a:p>
-          <a:p>
-            <a:pPr lvl="0" indent="0" marL="0">
-              <a:buNone/>
-            </a:pPr>
-            <a:r>
-              <a:rPr/>
-              <a:t>Walk the tasks briefly. Task 1 is framing, and there is no single right answer: quality is an integer from 3 to 9, so they must decide how to treat it and defend the choice. Task 7 - repeat the split with ten seeds - connects directly to the figure they just saw.</a:t>
-            </a:r>
-          </a:p>
-          <a:p>
-            <a:pPr lvl="0" indent="0" marL="0">
-              <a:buNone/>
-            </a:pPr>
-          </a:p>
-          <a:p>
-            <a:pPr lvl="0" indent="0" marL="0">
-              <a:buNone/>
-            </a:pPr>
-            <a:r>
-              <a:rPr/>
-              <a:t>Remind them: scaling the full dataset before splitting loses the methodology marks regardless of the score. And there are no marks for accuracy anywhere in this course.</a:t>
-            </a:r>
-          </a:p>
-          <a:p>
-            <a:pPr lvl="0" indent="0" marL="0">
-              <a:buNone/>
-            </a:pPr>
-          </a:p>
-          <a:p>
-            <a:pPr lvl="0" indent="0" marL="0">
-              <a:buNone/>
-            </a:pPr>
-            <a:r>
-              <a:rPr/>
-              <a:t>Also point them at the quiz - 20 questions, ungraded, and the ones marked “reasoning” are the closest thing to the exam - and at the project brief, so they can start thinking about a dataset. Topic confirmed by lesson 4.</a:t>
+              <a:t>Close the loop with the “when not to use ML” slide. Handout section 8.</a:t>
+            </a:r>
+          </a:p>
+          <a:p>
+            <a:pPr lvl="0" indent="0" marL="0">
+              <a:buNone/>
+            </a:pPr>
+          </a:p>
+          <a:p>
+            <a:pPr lvl="0" indent="0" marL="0">
+              <a:buNone/>
+            </a:pPr>
+            <a:r>
+              <a:rPr/>
+              <a:t>If past decisions discriminated, a model fitted to them discriminates too - and it does so with an appearance of objectivity that makes it HARDER to contest than a human decision would be. “The algorithm decided” is a much harder claim to argue with than “the manager decided”.</a:t>
+            </a:r>
+          </a:p>
+          <a:p>
+            <a:pPr lvl="0" indent="0" marL="0">
+              <a:buNone/>
+            </a:pPr>
+          </a:p>
+          <a:p>
+            <a:pPr lvl="0" indent="0" marL="0">
+              <a:buNone/>
+            </a:pPr>
+            <a:r>
+              <a:rPr/>
+              <a:t>Second point: nothing in empirical risk minimisation distinguishes a cause from a coincidence that predicts well in this sample. A model can be highly accurate and completely wrong about why - which is exactly why it fails abruptly when conditions change.</a:t>
+            </a:r>
+          </a:p>
+          <a:p>
+            <a:pPr lvl="0" indent="0" marL="0">
+              <a:buNone/>
+            </a:pPr>
+          </a:p>
+          <a:p>
+            <a:pPr lvl="0" indent="0" marL="0">
+              <a:buNone/>
+            </a:pPr>
+            <a:r>
+              <a:rPr/>
+              <a:t>Third: whether a decision can be explained to the person affected, whether errors are recoverable, and who bears the cost of being wrong are engineering requirements. They belong in step 1, where they can still change what you build, not in a paragraph at the end of a report.</a:t>
+            </a:r>
+          </a:p>
+          <a:p>
+            <a:pPr lvl="0" indent="0" marL="0">
+              <a:buNone/>
+            </a:pPr>
+          </a:p>
+          <a:p>
+            <a:pPr lvl="0" indent="0" marL="0">
+              <a:buNone/>
+            </a:pPr>
+            <a:r>
+              <a:rPr/>
+              <a:t>Keep this short and serious. Do not moralise - state it and move on.</a:t>
             </a:r>
           </a:p>
         </p:txBody>
@@ -7401,35 +7430,49 @@
             </a:pPr>
             <a:r>
               <a:rPr/>
-              <a:t>Close on time and offer to stay for setup problems - it is worth twenty minutes now to avoid three people stuck for a fortnight.</a:t>
-            </a:r>
-          </a:p>
-          <a:p>
-            <a:pPr lvl="0" indent="0" marL="0">
-              <a:buNone/>
-            </a:pPr>
-          </a:p>
-          <a:p>
-            <a:pPr lvl="0" indent="0" marL="0">
-              <a:buNone/>
-            </a:pPr>
-            <a:r>
-              <a:rPr/>
-              <a:t>Tell them lesson 2 goes deeper into data preparation, and that the leakage they saw today was the simple, visible version. The next one is subtler.</a:t>
-            </a:r>
-          </a:p>
-          <a:p>
-            <a:pPr lvl="0" indent="0" marL="0">
-              <a:buNone/>
-            </a:pPr>
-          </a:p>
-          <a:p>
-            <a:pPr lvl="0" indent="0" marL="0">
-              <a:buNone/>
-            </a:pPr>
-            <a:r>
-              <a:rPr/>
-              <a:t>If anyone asks what to read beyond the handout: Resources/history_of_ai.md for context, and the scikit-learn “common pitfalls” page, which is the library’s own account of everything in notebook 03.</a:t>
+              <a:t>Set it explicitly - do not let anyone leave without knowing it exists and when it is due.</a:t>
+            </a:r>
+          </a:p>
+          <a:p>
+            <a:pPr lvl="0" indent="0" marL="0">
+              <a:buNone/>
+            </a:pPr>
+          </a:p>
+          <a:p>
+            <a:pPr lvl="0" indent="0" marL="0">
+              <a:buNone/>
+            </a:pPr>
+            <a:r>
+              <a:rPr/>
+              <a:t>Walk the tasks briefly. Task 1 is framing, and there is no single right answer: quality is an integer from 3 to 9, so they must decide how to treat it and defend the choice. Task 7 - repeat the split with ten seeds - connects directly to the figure they just saw.</a:t>
+            </a:r>
+          </a:p>
+          <a:p>
+            <a:pPr lvl="0" indent="0" marL="0">
+              <a:buNone/>
+            </a:pPr>
+          </a:p>
+          <a:p>
+            <a:pPr lvl="0" indent="0" marL="0">
+              <a:buNone/>
+            </a:pPr>
+            <a:r>
+              <a:rPr/>
+              <a:t>Remind them: scaling the full dataset before splitting loses the methodology marks regardless of the score. And there are no marks for accuracy anywhere in this course.</a:t>
+            </a:r>
+          </a:p>
+          <a:p>
+            <a:pPr lvl="0" indent="0" marL="0">
+              <a:buNone/>
+            </a:pPr>
+          </a:p>
+          <a:p>
+            <a:pPr lvl="0" indent="0" marL="0">
+              <a:buNone/>
+            </a:pPr>
+            <a:r>
+              <a:rPr/>
+              <a:t>Also point them at the quiz - 20 questions, ungraded, and the ones marked “reasoning” are the closest thing to the exam - and at the project brief, so they can start thinking about a dataset. Topic confirmed by lesson 4.</a:t>
             </a:r>
           </a:p>
         </p:txBody>
@@ -7452,6 +7495,116 @@
             <a:fld id="{18BDFEC3-8487-43E8-A154-7C12CBC1FFF2}" type="slidenum">
               <a:rPr lang="en-US"/>
               <a:t>62</a:t>
+            </a:fld>
+            <a:endParaRPr lang="en-US"/>
+          </a:p>
+        </p:txBody>
+      </p:sp>
+    </p:spTree>
+  </p:cSld>
+</p:notes>
+</file>
+
+<file path=ppt/notesSlides/notesSlide62.xml><?xml version="1.0" encoding="utf-8"?>
+<p:notes xmlns:a="http://schemas.openxmlformats.org/drawingml/2006/main" xmlns:r="http://schemas.openxmlformats.org/officeDocument/2006/relationships" xmlns:p="http://schemas.openxmlformats.org/presentationml/2006/main">
+  <p:cSld>
+    <p:spTree>
+      <p:nvGrpSpPr>
+        <p:cNvPr id="1" name=""/>
+        <p:cNvGrpSpPr/>
+        <p:nvPr/>
+      </p:nvGrpSpPr>
+      <p:grpSpPr>
+        <a:xfrm>
+          <a:off x="0" y="0"/>
+          <a:ext cx="0" cy="0"/>
+          <a:chOff x="0" y="0"/>
+          <a:chExt cx="0" cy="0"/>
+        </a:xfrm>
+      </p:grpSpPr>
+      <p:sp>
+        <p:nvSpPr>
+          <p:cNvPr id="2" name="Slide Image Placeholder 1"/>
+          <p:cNvSpPr>
+            <a:spLocks noGrp="1" noRot="1" noChangeAspect="1"/>
+          </p:cNvSpPr>
+          <p:nvPr>
+            <p:ph type="sldImg"/>
+          </p:nvPr>
+        </p:nvSpPr>
+        <p:spPr/>
+      </p:sp>
+      <p:sp>
+        <p:nvSpPr>
+          <p:cNvPr id="3" name="Notes Placeholder 2"/>
+          <p:cNvSpPr>
+            <a:spLocks noGrp="1"/>
+          </p:cNvSpPr>
+          <p:nvPr>
+            <p:ph type="body" idx="1"/>
+          </p:nvPr>
+        </p:nvSpPr>
+        <p:spPr/>
+        <p:txBody>
+          <a:bodyPr/>
+          <a:lstStyle/>
+          <a:p>
+            <a:pPr lvl="0" indent="0" marL="0">
+              <a:buNone/>
+            </a:pPr>
+            <a:r>
+              <a:rPr/>
+              <a:t>Close on time and offer to stay for setup problems - it is worth twenty minutes now to avoid three people stuck for a fortnight.</a:t>
+            </a:r>
+          </a:p>
+          <a:p>
+            <a:pPr lvl="0" indent="0" marL="0">
+              <a:buNone/>
+            </a:pPr>
+          </a:p>
+          <a:p>
+            <a:pPr lvl="0" indent="0" marL="0">
+              <a:buNone/>
+            </a:pPr>
+            <a:r>
+              <a:rPr/>
+              <a:t>Tell them lesson 2 goes deeper into data preparation, and that the leakage they saw today was the simple, visible version. The next one is subtler.</a:t>
+            </a:r>
+          </a:p>
+          <a:p>
+            <a:pPr lvl="0" indent="0" marL="0">
+              <a:buNone/>
+            </a:pPr>
+          </a:p>
+          <a:p>
+            <a:pPr lvl="0" indent="0" marL="0">
+              <a:buNone/>
+            </a:pPr>
+            <a:r>
+              <a:rPr/>
+              <a:t>If anyone asks what to read beyond the handout: Resources/history_of_ai.md for context, and the scikit-learn “common pitfalls” page, which is the library’s own account of everything in notebook 03.</a:t>
+            </a:r>
+          </a:p>
+        </p:txBody>
+      </p:sp>
+      <p:sp>
+        <p:nvSpPr>
+          <p:cNvPr id="4" name="Slide Number Placeholder 3"/>
+          <p:cNvSpPr>
+            <a:spLocks noGrp="1"/>
+          </p:cNvSpPr>
+          <p:nvPr>
+            <p:ph type="sldNum" sz="quarter" idx="10"/>
+          </p:nvPr>
+        </p:nvSpPr>
+        <p:spPr/>
+        <p:txBody>
+          <a:bodyPr/>
+          <a:lstStyle/>
+          <a:p>
+            <a:fld id="{18BDFEC3-8487-43E8-A154-7C12CBC1FFF2}" type="slidenum">
+              <a:rPr lang="en-US"/>
+              <a:t>63</a:t>
             </a:fld>
             <a:endParaRPr lang="en-US"/>
           </a:p>
@@ -14726,6 +14879,149 @@
             </a:pPr>
             <a:r>
               <a:rPr/>
+              <a:t>Notebook 02, live</a:t>
+            </a:r>
+          </a:p>
+        </p:txBody>
+      </p:sp>
+      <p:sp>
+        <p:nvSpPr>
+          <p:cNvPr id="3" name="Content Placeholder 2"/>
+          <p:cNvSpPr>
+            <a:spLocks noGrp="1"/>
+          </p:cNvSpPr>
+          <p:nvPr>
+            <p:ph idx="1"/>
+          </p:nvPr>
+        </p:nvSpPr>
+        <p:spPr>
+          <a:xfrm>
+            <a:off x="457200" y="1200151"/>
+            <a:ext cx="8229600" cy="3394472"/>
+          </a:xfrm>
+        </p:spPr>
+        <p:txBody>
+          <a:bodyPr/>
+          <a:lstStyle/>
+          <a:p>
+            <a:pPr lvl="0"/>
+            <a:r>
+              <a:rPr b="1"/>
+              <a:t>Supervised</a:t>
+            </a:r>
+            <a:r>
+              <a:rPr/>
+              <a:t>: predict the cultivar. Accuracy </a:t>
+            </a:r>
+            <a:r>
+              <a:rPr b="1"/>
+              <a:t>0.981</a:t>
+            </a:r>
+          </a:p>
+          <a:p>
+            <a:pPr lvl="0"/>
+            <a:r>
+              <a:rPr b="1"/>
+              <a:t>Supervised</a:t>
+            </a:r>
+            <a:r>
+              <a:rPr/>
+              <a:t>: predict colour intensity instead. R² </a:t>
+            </a:r>
+            <a:r>
+              <a:rPr b="1"/>
+              <a:t>0.622</a:t>
+            </a:r>
+          </a:p>
+          <a:p>
+            <a:pPr lvl="0"/>
+            <a:r>
+              <a:rPr b="1"/>
+              <a:t>Unsupervised</a:t>
+            </a:r>
+            <a:r>
+              <a:rPr/>
+              <a:t>: throw the labels away. Recovers the cultivars at </a:t>
+            </a:r>
+            <a:r>
+              <a:rPr b="1"/>
+              <a:t>0.897</a:t>
+            </a:r>
+          </a:p>
+          <a:p>
+            <a:pPr lvl="0"/>
+            <a:r>
+              <a:rPr b="1"/>
+              <a:t>Self-supervised</a:t>
+            </a:r>
+            <a:r>
+              <a:rPr/>
+              <a:t>: hide </a:t>
+            </a:r>
+            <a:r>
+              <a:rPr>
+                <a:latin typeface="Courier"/>
+              </a:rPr>
+              <a:t>flavanoids</a:t>
+            </a:r>
+            <a:r>
+              <a:rPr/>
+              <a:t>, predict it. R² </a:t>
+            </a:r>
+            <a:r>
+              <a:rPr b="1"/>
+              <a:t>0.816</a:t>
+            </a:r>
+          </a:p>
+        </p:txBody>
+      </p:sp>
+    </p:spTree>
+  </p:cSld>
+</p:sld>
+</file>
+
+<file path=ppt/slides/slide38.xml><?xml version="1.0" encoding="utf-8"?>
+<p:sld xmlns:a="http://schemas.openxmlformats.org/drawingml/2006/main" xmlns:r="http://schemas.openxmlformats.org/officeDocument/2006/relationships" xmlns:p="http://schemas.openxmlformats.org/presentationml/2006/main">
+  <p:cSld>
+    <p:spTree>
+      <p:nvGrpSpPr>
+        <p:cNvPr id="1" name=""/>
+        <p:cNvGrpSpPr/>
+        <p:nvPr/>
+      </p:nvGrpSpPr>
+      <p:grpSpPr>
+        <a:xfrm>
+          <a:off x="0" y="0"/>
+          <a:ext cx="0" cy="0"/>
+          <a:chOff x="0" y="0"/>
+          <a:chExt cx="0" cy="0"/>
+        </a:xfrm>
+      </p:grpSpPr>
+      <p:sp>
+        <p:nvSpPr>
+          <p:cNvPr id="2" name="Title 1"/>
+          <p:cNvSpPr>
+            <a:spLocks noGrp="1"/>
+          </p:cNvSpPr>
+          <p:nvPr>
+            <p:ph type="title"/>
+          </p:nvPr>
+        </p:nvSpPr>
+        <p:spPr>
+          <a:xfrm>
+            <a:off x="457200" y="205979"/>
+            <a:ext cx="8229600" cy="857250"/>
+          </a:xfrm>
+        </p:spPr>
+        <p:txBody>
+          <a:bodyPr/>
+          <a:lstStyle/>
+          <a:p>
+            <a:pPr lvl="0" indent="0" marL="0">
+              <a:buNone/>
+            </a:pPr>
+            <a:r>
+              <a:rPr/>
               <a:t>The workflow</a:t>
             </a:r>
           </a:p>
@@ -14766,7 +15062,7 @@
 </p:sld>
 </file>
 
-<file path=ppt/slides/slide38.xml><?xml version="1.0" encoding="utf-8"?>
+<file path=ppt/slides/slide39.xml><?xml version="1.0" encoding="utf-8"?>
 <p:sld xmlns:a="http://schemas.openxmlformats.org/drawingml/2006/main" xmlns:r="http://schemas.openxmlformats.org/officeDocument/2006/relationships" xmlns:p="http://schemas.openxmlformats.org/presentationml/2006/main">
   <p:cSld>
     <p:spTree>
@@ -14860,7 +15156,111 @@
 </p:sld>
 </file>
 
-<file path=ppt/slides/slide39.xml><?xml version="1.0" encoding="utf-8"?>
+<file path=ppt/slides/slide4.xml><?xml version="1.0" encoding="utf-8"?>
+<p:sld xmlns:a="http://schemas.openxmlformats.org/drawingml/2006/main" xmlns:r="http://schemas.openxmlformats.org/officeDocument/2006/relationships" xmlns:p="http://schemas.openxmlformats.org/presentationml/2006/main">
+  <p:cSld>
+    <p:spTree>
+      <p:nvGrpSpPr>
+        <p:cNvPr id="1" name=""/>
+        <p:cNvGrpSpPr/>
+        <p:nvPr/>
+      </p:nvGrpSpPr>
+      <p:grpSpPr>
+        <a:xfrm>
+          <a:off x="0" y="0"/>
+          <a:ext cx="0" cy="0"/>
+          <a:chOff x="0" y="0"/>
+          <a:chExt cx="0" cy="0"/>
+        </a:xfrm>
+      </p:grpSpPr>
+      <p:sp>
+        <p:nvSpPr>
+          <p:cNvPr id="2" name="Title 1"/>
+          <p:cNvSpPr>
+            <a:spLocks noGrp="1"/>
+          </p:cNvSpPr>
+          <p:nvPr>
+            <p:ph type="title"/>
+          </p:nvPr>
+        </p:nvSpPr>
+        <p:spPr>
+          <a:xfrm>
+            <a:off x="457200" y="205979"/>
+            <a:ext cx="8229600" cy="857250"/>
+          </a:xfrm>
+        </p:spPr>
+        <p:txBody>
+          <a:bodyPr/>
+          <a:lstStyle/>
+          <a:p>
+            <a:pPr lvl="0" indent="0" marL="0">
+              <a:buNone/>
+            </a:pPr>
+            <a:r>
+              <a:rPr/>
+              <a:t>What this course is not</a:t>
+            </a:r>
+          </a:p>
+        </p:txBody>
+      </p:sp>
+      <p:sp>
+        <p:nvSpPr>
+          <p:cNvPr id="3" name="Content Placeholder 2"/>
+          <p:cNvSpPr>
+            <a:spLocks noGrp="1"/>
+          </p:cNvSpPr>
+          <p:nvPr>
+            <p:ph idx="1"/>
+          </p:nvPr>
+        </p:nvSpPr>
+        <p:spPr>
+          <a:xfrm>
+            <a:off x="457200" y="1200151"/>
+            <a:ext cx="8229600" cy="3394472"/>
+          </a:xfrm>
+        </p:spPr>
+        <p:txBody>
+          <a:bodyPr/>
+          <a:lstStyle/>
+          <a:p>
+            <a:pPr lvl="0"/>
+            <a:r>
+              <a:rPr/>
+              <a:t>Not a tour of current AI products</a:t>
+            </a:r>
+          </a:p>
+          <a:p>
+            <a:pPr lvl="0"/>
+            <a:r>
+              <a:rPr/>
+              <a:t>Not a library tutorial</a:t>
+            </a:r>
+          </a:p>
+          <a:p>
+            <a:pPr lvl="0"/>
+            <a:r>
+              <a:rPr/>
+              <a:t>Not a course where you call </a:t>
+            </a:r>
+            <a:r>
+              <a:rPr>
+                <a:latin typeface="Courier"/>
+              </a:rPr>
+              <a:t>.fit()</a:t>
+            </a:r>
+            <a:r>
+              <a:rPr/>
+              <a:t> and report the number</a:t>
+            </a:r>
+          </a:p>
+        </p:txBody>
+      </p:sp>
+    </p:spTree>
+  </p:cSld>
+</p:sld>
+</file>
+
+<file path=ppt/slides/slide40.xml><?xml version="1.0" encoding="utf-8"?>
 <p:sld xmlns:a="http://schemas.openxmlformats.org/drawingml/2006/main" xmlns:r="http://schemas.openxmlformats.org/officeDocument/2006/relationships" xmlns:p="http://schemas.openxmlformats.org/presentationml/2006/main">
   <p:cSld>
     <p:spTree>
@@ -14942,111 +15342,7 @@
 </p:sld>
 </file>
 
-<file path=ppt/slides/slide4.xml><?xml version="1.0" encoding="utf-8"?>
-<p:sld xmlns:a="http://schemas.openxmlformats.org/drawingml/2006/main" xmlns:r="http://schemas.openxmlformats.org/officeDocument/2006/relationships" xmlns:p="http://schemas.openxmlformats.org/presentationml/2006/main">
-  <p:cSld>
-    <p:spTree>
-      <p:nvGrpSpPr>
-        <p:cNvPr id="1" name=""/>
-        <p:cNvGrpSpPr/>
-        <p:nvPr/>
-      </p:nvGrpSpPr>
-      <p:grpSpPr>
-        <a:xfrm>
-          <a:off x="0" y="0"/>
-          <a:ext cx="0" cy="0"/>
-          <a:chOff x="0" y="0"/>
-          <a:chExt cx="0" cy="0"/>
-        </a:xfrm>
-      </p:grpSpPr>
-      <p:sp>
-        <p:nvSpPr>
-          <p:cNvPr id="2" name="Title 1"/>
-          <p:cNvSpPr>
-            <a:spLocks noGrp="1"/>
-          </p:cNvSpPr>
-          <p:nvPr>
-            <p:ph type="title"/>
-          </p:nvPr>
-        </p:nvSpPr>
-        <p:spPr>
-          <a:xfrm>
-            <a:off x="457200" y="205979"/>
-            <a:ext cx="8229600" cy="857250"/>
-          </a:xfrm>
-        </p:spPr>
-        <p:txBody>
-          <a:bodyPr/>
-          <a:lstStyle/>
-          <a:p>
-            <a:pPr lvl="0" indent="0" marL="0">
-              <a:buNone/>
-            </a:pPr>
-            <a:r>
-              <a:rPr/>
-              <a:t>What this course is not</a:t>
-            </a:r>
-          </a:p>
-        </p:txBody>
-      </p:sp>
-      <p:sp>
-        <p:nvSpPr>
-          <p:cNvPr id="3" name="Content Placeholder 2"/>
-          <p:cNvSpPr>
-            <a:spLocks noGrp="1"/>
-          </p:cNvSpPr>
-          <p:nvPr>
-            <p:ph idx="1"/>
-          </p:nvPr>
-        </p:nvSpPr>
-        <p:spPr>
-          <a:xfrm>
-            <a:off x="457200" y="1200151"/>
-            <a:ext cx="8229600" cy="3394472"/>
-          </a:xfrm>
-        </p:spPr>
-        <p:txBody>
-          <a:bodyPr/>
-          <a:lstStyle/>
-          <a:p>
-            <a:pPr lvl="0"/>
-            <a:r>
-              <a:rPr/>
-              <a:t>Not a tour of current AI products</a:t>
-            </a:r>
-          </a:p>
-          <a:p>
-            <a:pPr lvl="0"/>
-            <a:r>
-              <a:rPr/>
-              <a:t>Not a library tutorial</a:t>
-            </a:r>
-          </a:p>
-          <a:p>
-            <a:pPr lvl="0"/>
-            <a:r>
-              <a:rPr/>
-              <a:t>Not a course where you call </a:t>
-            </a:r>
-            <a:r>
-              <a:rPr>
-                <a:latin typeface="Courier"/>
-              </a:rPr>
-              <a:t>.fit()</a:t>
-            </a:r>
-            <a:r>
-              <a:rPr/>
-              <a:t> and report the number</a:t>
-            </a:r>
-          </a:p>
-        </p:txBody>
-      </p:sp>
-    </p:spTree>
-  </p:cSld>
-</p:sld>
-</file>
-
-<file path=ppt/slides/slide40.xml><?xml version="1.0" encoding="utf-8"?>
+<file path=ppt/slides/slide41.xml><?xml version="1.0" encoding="utf-8"?>
 <p:sld xmlns:a="http://schemas.openxmlformats.org/drawingml/2006/main" xmlns:r="http://schemas.openxmlformats.org/officeDocument/2006/relationships" xmlns:p="http://schemas.openxmlformats.org/presentationml/2006/main">
   <p:cSld>
     <p:spTree>
@@ -15128,7 +15424,7 @@
 </p:sld>
 </file>
 
-<file path=ppt/slides/slide41.xml><?xml version="1.0" encoding="utf-8"?>
+<file path=ppt/slides/slide42.xml><?xml version="1.0" encoding="utf-8"?>
 <p:sld xmlns:a="http://schemas.openxmlformats.org/drawingml/2006/main" xmlns:r="http://schemas.openxmlformats.org/officeDocument/2006/relationships" xmlns:p="http://schemas.openxmlformats.org/presentationml/2006/main">
   <p:cSld>
     <p:spTree>
@@ -15240,106 +15536,6 @@
 </p:sld>
 </file>
 
-<file path=ppt/slides/slide42.xml><?xml version="1.0" encoding="utf-8"?>
-<p:sld xmlns:a="http://schemas.openxmlformats.org/drawingml/2006/main" xmlns:r="http://schemas.openxmlformats.org/officeDocument/2006/relationships" xmlns:p="http://schemas.openxmlformats.org/presentationml/2006/main">
-  <p:cSld>
-    <p:spTree>
-      <p:nvGrpSpPr>
-        <p:cNvPr id="1" name=""/>
-        <p:cNvGrpSpPr/>
-        <p:nvPr/>
-      </p:nvGrpSpPr>
-      <p:grpSpPr>
-        <a:xfrm>
-          <a:off x="0" y="0"/>
-          <a:ext cx="0" cy="0"/>
-          <a:chOff x="0" y="0"/>
-          <a:chExt cx="0" cy="0"/>
-        </a:xfrm>
-      </p:grpSpPr>
-      <p:sp>
-        <p:nvSpPr>
-          <p:cNvPr id="2" name="Title 1"/>
-          <p:cNvSpPr>
-            <a:spLocks noGrp="1"/>
-          </p:cNvSpPr>
-          <p:nvPr>
-            <p:ph type="title"/>
-          </p:nvPr>
-        </p:nvSpPr>
-        <p:spPr>
-          <a:xfrm>
-            <a:off x="457200" y="205979"/>
-            <a:ext cx="8229600" cy="857250"/>
-          </a:xfrm>
-        </p:spPr>
-        <p:txBody>
-          <a:bodyPr/>
-          <a:lstStyle/>
-          <a:p>
-            <a:pPr lvl="0" indent="0" marL="0">
-              <a:buNone/>
-            </a:pPr>
-            <a:r>
-              <a:rPr/>
-              <a:t>Step 4: baseline first</a:t>
-            </a:r>
-          </a:p>
-        </p:txBody>
-      </p:sp>
-      <p:sp>
-        <p:nvSpPr>
-          <p:cNvPr id="3" name="Content Placeholder 2"/>
-          <p:cNvSpPr>
-            <a:spLocks noGrp="1"/>
-          </p:cNvSpPr>
-          <p:nvPr>
-            <p:ph idx="1"/>
-          </p:nvPr>
-        </p:nvSpPr>
-        <p:spPr>
-          <a:xfrm>
-            <a:off x="457200" y="1200151"/>
-            <a:ext cx="8229600" cy="3394472"/>
-          </a:xfrm>
-        </p:spPr>
-        <p:txBody>
-          <a:bodyPr/>
-          <a:lstStyle/>
-          <a:p>
-            <a:pPr lvl="0" indent="0" marL="0">
-              <a:buNone/>
-            </a:pPr>
-            <a:r>
-              <a:rPr/>
-              <a:t>Predict the majority class. Nothing else.</a:t>
-            </a:r>
-          </a:p>
-          <a:p>
-            <a:pPr lvl="0" indent="0" marL="0">
-              <a:buNone/>
-            </a:pPr>
-            <a:r>
-              <a:rPr b="1"/>
-              <a:t>62.7%</a:t>
-            </a:r>
-          </a:p>
-          <a:p>
-            <a:pPr lvl="0" indent="0" marL="0">
-              <a:buNone/>
-            </a:pPr>
-            <a:r>
-              <a:rPr/>
-              <a:t>Everything from here is measured against that.</a:t>
-            </a:r>
-          </a:p>
-        </p:txBody>
-      </p:sp>
-    </p:spTree>
-  </p:cSld>
-</p:sld>
-</file>
-
 <file path=ppt/slides/slide43.xml><?xml version="1.0" encoding="utf-8"?>
 <p:sld xmlns:a="http://schemas.openxmlformats.org/drawingml/2006/main" xmlns:r="http://schemas.openxmlformats.org/officeDocument/2006/relationships" xmlns:p="http://schemas.openxmlformats.org/presentationml/2006/main">
   <p:cSld>
@@ -15382,6 +15578,106 @@
             </a:pPr>
             <a:r>
               <a:rPr/>
+              <a:t>Step 4: baseline first</a:t>
+            </a:r>
+          </a:p>
+        </p:txBody>
+      </p:sp>
+      <p:sp>
+        <p:nvSpPr>
+          <p:cNvPr id="3" name="Content Placeholder 2"/>
+          <p:cNvSpPr>
+            <a:spLocks noGrp="1"/>
+          </p:cNvSpPr>
+          <p:nvPr>
+            <p:ph idx="1"/>
+          </p:nvPr>
+        </p:nvSpPr>
+        <p:spPr>
+          <a:xfrm>
+            <a:off x="457200" y="1200151"/>
+            <a:ext cx="8229600" cy="3394472"/>
+          </a:xfrm>
+        </p:spPr>
+        <p:txBody>
+          <a:bodyPr/>
+          <a:lstStyle/>
+          <a:p>
+            <a:pPr lvl="0" indent="0" marL="0">
+              <a:buNone/>
+            </a:pPr>
+            <a:r>
+              <a:rPr/>
+              <a:t>Predict the majority class. Nothing else.</a:t>
+            </a:r>
+          </a:p>
+          <a:p>
+            <a:pPr lvl="0" indent="0" marL="0">
+              <a:buNone/>
+            </a:pPr>
+            <a:r>
+              <a:rPr b="1"/>
+              <a:t>62.7%</a:t>
+            </a:r>
+          </a:p>
+          <a:p>
+            <a:pPr lvl="0" indent="0" marL="0">
+              <a:buNone/>
+            </a:pPr>
+            <a:r>
+              <a:rPr/>
+              <a:t>Everything from here is measured against that.</a:t>
+            </a:r>
+          </a:p>
+        </p:txBody>
+      </p:sp>
+    </p:spTree>
+  </p:cSld>
+</p:sld>
+</file>
+
+<file path=ppt/slides/slide44.xml><?xml version="1.0" encoding="utf-8"?>
+<p:sld xmlns:a="http://schemas.openxmlformats.org/drawingml/2006/main" xmlns:r="http://schemas.openxmlformats.org/officeDocument/2006/relationships" xmlns:p="http://schemas.openxmlformats.org/presentationml/2006/main">
+  <p:cSld>
+    <p:spTree>
+      <p:nvGrpSpPr>
+        <p:cNvPr id="1" name=""/>
+        <p:cNvGrpSpPr/>
+        <p:nvPr/>
+      </p:nvGrpSpPr>
+      <p:grpSpPr>
+        <a:xfrm>
+          <a:off x="0" y="0"/>
+          <a:ext cx="0" cy="0"/>
+          <a:chOff x="0" y="0"/>
+          <a:chExt cx="0" cy="0"/>
+        </a:xfrm>
+      </p:grpSpPr>
+      <p:sp>
+        <p:nvSpPr>
+          <p:cNvPr id="2" name="Title 1"/>
+          <p:cNvSpPr>
+            <a:spLocks noGrp="1"/>
+          </p:cNvSpPr>
+          <p:nvPr>
+            <p:ph type="title"/>
+          </p:nvPr>
+        </p:nvSpPr>
+        <p:spPr>
+          <a:xfrm>
+            <a:off x="457200" y="205979"/>
+            <a:ext cx="8229600" cy="857250"/>
+          </a:xfrm>
+        </p:spPr>
+        <p:txBody>
+          <a:bodyPr/>
+          <a:lstStyle/>
+          <a:p>
+            <a:pPr lvl="0" indent="0" marL="0">
+              <a:buNone/>
+            </a:pPr>
+            <a:r>
+              <a:rPr/>
               <a:t>Step 5: pipeline, not two steps</a:t>
             </a:r>
           </a:p>
@@ -15491,7 +15787,7 @@
 </p:sld>
 </file>
 
-<file path=ppt/slides/slide44.xml><?xml version="1.0" encoding="utf-8"?>
+<file path=ppt/slides/slide45.xml><?xml version="1.0" encoding="utf-8"?>
 <p:sld xmlns:a="http://schemas.openxmlformats.org/drawingml/2006/main" xmlns:r="http://schemas.openxmlformats.org/officeDocument/2006/relationships" xmlns:p="http://schemas.openxmlformats.org/presentationml/2006/main">
   <p:cSld>
     <p:spTree>
@@ -15573,7 +15869,7 @@
 </p:sld>
 </file>
 
-<file path=ppt/slides/slide45.xml><?xml version="1.0" encoding="utf-8"?>
+<file path=ppt/slides/slide46.xml><?xml version="1.0" encoding="utf-8"?>
 <p:sld xmlns:a="http://schemas.openxmlformats.org/drawingml/2006/main" xmlns:r="http://schemas.openxmlformats.org/officeDocument/2006/relationships" xmlns:p="http://schemas.openxmlformats.org/presentationml/2006/main">
   <p:cSld>
     <p:spTree>
@@ -15673,7 +15969,7 @@
 </p:sld>
 </file>
 
-<file path=ppt/slides/slide46.xml><?xml version="1.0" encoding="utf-8"?>
+<file path=ppt/slides/slide47.xml><?xml version="1.0" encoding="utf-8"?>
 <p:sld xmlns:a="http://schemas.openxmlformats.org/drawingml/2006/main" xmlns:r="http://schemas.openxmlformats.org/officeDocument/2006/relationships" xmlns:p="http://schemas.openxmlformats.org/presentationml/2006/main">
   <p:cSld>
     <p:spTree>
@@ -15755,7 +16051,7 @@
 </p:sld>
 </file>
 
-<file path=ppt/slides/slide47.xml><?xml version="1.0" encoding="utf-8"?>
+<file path=ppt/slides/slide48.xml><?xml version="1.0" encoding="utf-8"?>
 <p:sld xmlns:a="http://schemas.openxmlformats.org/drawingml/2006/main" xmlns:r="http://schemas.openxmlformats.org/officeDocument/2006/relationships" xmlns:p="http://schemas.openxmlformats.org/presentationml/2006/main">
   <p:cSld>
     <p:spTree>
@@ -15857,7 +16153,7 @@
 </p:sld>
 </file>
 
-<file path=ppt/slides/slide48.xml><?xml version="1.0" encoding="utf-8"?>
+<file path=ppt/slides/slide49.xml><?xml version="1.0" encoding="utf-8"?>
 <p:sld xmlns:a="http://schemas.openxmlformats.org/drawingml/2006/main" xmlns:r="http://schemas.openxmlformats.org/officeDocument/2006/relationships" xmlns:p="http://schemas.openxmlformats.org/presentationml/2006/main">
   <p:cSld>
     <p:spTree>
@@ -15939,109 +16235,6 @@
 </p:sld>
 </file>
 
-<file path=ppt/slides/slide49.xml><?xml version="1.0" encoding="utf-8"?>
-<p:sld xmlns:a="http://schemas.openxmlformats.org/drawingml/2006/main" xmlns:r="http://schemas.openxmlformats.org/officeDocument/2006/relationships" xmlns:p="http://schemas.openxmlformats.org/presentationml/2006/main">
-  <p:cSld>
-    <p:spTree>
-      <p:nvGrpSpPr>
-        <p:cNvPr id="1" name=""/>
-        <p:cNvGrpSpPr/>
-        <p:nvPr/>
-      </p:nvGrpSpPr>
-      <p:grpSpPr>
-        <a:xfrm>
-          <a:off x="0" y="0"/>
-          <a:ext cx="0" cy="0"/>
-          <a:chOff x="0" y="0"/>
-          <a:chExt cx="0" cy="0"/>
-        </a:xfrm>
-      </p:grpSpPr>
-      <p:sp>
-        <p:nvSpPr>
-          <p:cNvPr id="2" name="Title 1"/>
-          <p:cNvSpPr>
-            <a:spLocks noGrp="1"/>
-          </p:cNvSpPr>
-          <p:nvPr>
-            <p:ph type="title"/>
-          </p:nvPr>
-        </p:nvSpPr>
-        <p:spPr>
-          <a:xfrm>
-            <a:off x="457200" y="205979"/>
-            <a:ext cx="8229600" cy="857250"/>
-          </a:xfrm>
-        </p:spPr>
-        <p:txBody>
-          <a:bodyPr/>
-          <a:lstStyle/>
-          <a:p>
-            <a:pPr lvl="0" indent="0" marL="0">
-              <a:buNone/>
-            </a:pPr>
-            <a:r>
-              <a:rPr/>
-              <a:t>What we did not do</a:t>
-            </a:r>
-          </a:p>
-        </p:txBody>
-      </p:sp>
-      <p:sp>
-        <p:nvSpPr>
-          <p:cNvPr id="3" name="Content Placeholder 2"/>
-          <p:cNvSpPr>
-            <a:spLocks noGrp="1"/>
-          </p:cNvSpPr>
-          <p:nvPr>
-            <p:ph idx="1"/>
-          </p:nvPr>
-        </p:nvSpPr>
-        <p:spPr>
-          <a:xfrm>
-            <a:off x="457200" y="1200151"/>
-            <a:ext cx="8229600" cy="3394472"/>
-          </a:xfrm>
-        </p:spPr>
-        <p:txBody>
-          <a:bodyPr/>
-          <a:lstStyle/>
-          <a:p>
-            <a:pPr lvl="0"/>
-            <a:r>
-              <a:rPr/>
-              <a:t>No tuning</a:t>
-            </a:r>
-          </a:p>
-          <a:p>
-            <a:pPr lvl="0"/>
-            <a:r>
-              <a:rPr/>
-              <a:t>No comparison of model families</a:t>
-            </a:r>
-          </a:p>
-          <a:p>
-            <a:pPr lvl="0"/>
-            <a:r>
-              <a:rPr/>
-              <a:t>No check of stability across splits</a:t>
-            </a:r>
-          </a:p>
-          <a:p>
-            <a:pPr lvl="0" indent="0" marL="0">
-              <a:buNone/>
-            </a:pPr>
-            <a:r>
-              <a:rPr/>
-              <a:t>And: we never looked at the test set to make a decision.</a:t>
-            </a:r>
-          </a:p>
-        </p:txBody>
-      </p:sp>
-    </p:spTree>
-  </p:cSld>
-</p:sld>
-</file>
-
 <file path=ppt/slides/slide5.xml><?xml version="1.0" encoding="utf-8"?>
 <p:sld xmlns:a="http://schemas.openxmlformats.org/drawingml/2006/main" xmlns:r="http://schemas.openxmlformats.org/officeDocument/2006/relationships" xmlns:p="http://schemas.openxmlformats.org/presentationml/2006/main">
   <p:cSld>
@@ -16183,7 +16376,7 @@
             </a:pPr>
             <a:r>
               <a:rPr/>
-              <a:t>Four ways a model misleads you</a:t>
+              <a:t>What we did not do</a:t>
             </a:r>
           </a:p>
         </p:txBody>
@@ -16211,37 +16404,30 @@
             <a:pPr lvl="0"/>
             <a:r>
               <a:rPr/>
-              <a:t>Leakage</a:t>
+              <a:t>No tuning</a:t>
             </a:r>
           </a:p>
           <a:p>
             <a:pPr lvl="0"/>
             <a:r>
               <a:rPr/>
-              <a:t>Imbalance</a:t>
+              <a:t>No comparison of model families</a:t>
             </a:r>
           </a:p>
           <a:p>
             <a:pPr lvl="0"/>
             <a:r>
               <a:rPr/>
-              <a:t>Shortcut features</a:t>
-            </a:r>
-          </a:p>
-          <a:p>
-            <a:pPr lvl="0"/>
-            <a:r>
-              <a:rPr/>
-              <a:t>Single-split noise</a:t>
-            </a:r>
-          </a:p>
-          <a:p>
-            <a:pPr lvl="0" indent="0" marL="0">
-              <a:buNone/>
-            </a:pPr>
-            <a:r>
-              <a:rPr/>
-              <a:t>All produce numbers that pass a casual review.</a:t>
+              <a:t>No check of stability across splits</a:t>
+            </a:r>
+          </a:p>
+          <a:p>
+            <a:pPr lvl="0" indent="0" marL="0">
+              <a:buNone/>
+            </a:pPr>
+            <a:r>
+              <a:rPr/>
+              <a:t>And: we never looked at the test set to make a decision.</a:t>
             </a:r>
           </a:p>
         </p:txBody>
@@ -16293,7 +16479,7 @@
             </a:pPr>
             <a:r>
               <a:rPr/>
-              <a:t>200 samples. 5000 random features. Coin-flip labels.</a:t>
+              <a:t>Four ways a model misleads you</a:t>
             </a:r>
           </a:p>
         </p:txBody>
@@ -16318,21 +16504,40 @@
           <a:bodyPr/>
           <a:lstStyle/>
           <a:p>
-            <a:pPr lvl="0" indent="0" marL="0">
-              <a:buNone/>
-            </a:pPr>
-            <a:r>
-              <a:rPr/>
-              <a:t>There is nothing to learn.</a:t>
-            </a:r>
-          </a:p>
-          <a:p>
-            <a:pPr lvl="0" indent="0" marL="0">
-              <a:buNone/>
-            </a:pPr>
-            <a:r>
-              <a:rPr/>
-              <a:t>Anything above 50% is an artefact.</a:t>
+            <a:pPr lvl="0"/>
+            <a:r>
+              <a:rPr/>
+              <a:t>Leakage</a:t>
+            </a:r>
+          </a:p>
+          <a:p>
+            <a:pPr lvl="0"/>
+            <a:r>
+              <a:rPr/>
+              <a:t>Imbalance</a:t>
+            </a:r>
+          </a:p>
+          <a:p>
+            <a:pPr lvl="0"/>
+            <a:r>
+              <a:rPr/>
+              <a:t>Shortcut features</a:t>
+            </a:r>
+          </a:p>
+          <a:p>
+            <a:pPr lvl="0"/>
+            <a:r>
+              <a:rPr/>
+              <a:t>Single-split noise</a:t>
+            </a:r>
+          </a:p>
+          <a:p>
+            <a:pPr lvl="0" indent="0" marL="0">
+              <a:buNone/>
+            </a:pPr>
+            <a:r>
+              <a:rPr/>
+              <a:t>All produce numbers that pass a casual review.</a:t>
             </a:r>
           </a:p>
         </p:txBody>
@@ -16343,6 +16548,97 @@
 </file>
 
 <file path=ppt/slides/slide52.xml><?xml version="1.0" encoding="utf-8"?>
+<p:sld xmlns:a="http://schemas.openxmlformats.org/drawingml/2006/main" xmlns:r="http://schemas.openxmlformats.org/officeDocument/2006/relationships" xmlns:p="http://schemas.openxmlformats.org/presentationml/2006/main">
+  <p:cSld>
+    <p:spTree>
+      <p:nvGrpSpPr>
+        <p:cNvPr id="1" name=""/>
+        <p:cNvGrpSpPr/>
+        <p:nvPr/>
+      </p:nvGrpSpPr>
+      <p:grpSpPr>
+        <a:xfrm>
+          <a:off x="0" y="0"/>
+          <a:ext cx="0" cy="0"/>
+          <a:chOff x="0" y="0"/>
+          <a:chExt cx="0" cy="0"/>
+        </a:xfrm>
+      </p:grpSpPr>
+      <p:sp>
+        <p:nvSpPr>
+          <p:cNvPr id="2" name="Title 1"/>
+          <p:cNvSpPr>
+            <a:spLocks noGrp="1"/>
+          </p:cNvSpPr>
+          <p:nvPr>
+            <p:ph type="title"/>
+          </p:nvPr>
+        </p:nvSpPr>
+        <p:spPr>
+          <a:xfrm>
+            <a:off x="457200" y="205979"/>
+            <a:ext cx="8229600" cy="857250"/>
+          </a:xfrm>
+        </p:spPr>
+        <p:txBody>
+          <a:bodyPr/>
+          <a:lstStyle/>
+          <a:p>
+            <a:pPr lvl="0" indent="0" marL="0">
+              <a:buNone/>
+            </a:pPr>
+            <a:r>
+              <a:rPr/>
+              <a:t>200 samples. 5000 random features. Coin-flip labels.</a:t>
+            </a:r>
+          </a:p>
+        </p:txBody>
+      </p:sp>
+      <p:sp>
+        <p:nvSpPr>
+          <p:cNvPr id="3" name="Content Placeholder 2"/>
+          <p:cNvSpPr>
+            <a:spLocks noGrp="1"/>
+          </p:cNvSpPr>
+          <p:nvPr>
+            <p:ph idx="1"/>
+          </p:nvPr>
+        </p:nvSpPr>
+        <p:spPr>
+          <a:xfrm>
+            <a:off x="457200" y="1200151"/>
+            <a:ext cx="8229600" cy="3394472"/>
+          </a:xfrm>
+        </p:spPr>
+        <p:txBody>
+          <a:bodyPr/>
+          <a:lstStyle/>
+          <a:p>
+            <a:pPr lvl="0" indent="0" marL="0">
+              <a:buNone/>
+            </a:pPr>
+            <a:r>
+              <a:rPr/>
+              <a:t>There is nothing to learn.</a:t>
+            </a:r>
+          </a:p>
+          <a:p>
+            <a:pPr lvl="0" indent="0" marL="0">
+              <a:buNone/>
+            </a:pPr>
+            <a:r>
+              <a:rPr/>
+              <a:t>Anything above 50% is an artefact.</a:t>
+            </a:r>
+          </a:p>
+        </p:txBody>
+      </p:sp>
+    </p:spTree>
+  </p:cSld>
+</p:sld>
+</file>
+
+<file path=ppt/slides/slide53.xml><?xml version="1.0" encoding="utf-8"?>
 <p:sld xmlns:a="http://schemas.openxmlformats.org/drawingml/2006/main" xmlns:r="http://schemas.openxmlformats.org/officeDocument/2006/relationships" xmlns:p="http://schemas.openxmlformats.org/presentationml/2006/main">
   <p:cSld>
     <p:spTree>
@@ -16424,105 +16720,6 @@
 </p:sld>
 </file>
 
-<file path=ppt/slides/slide53.xml><?xml version="1.0" encoding="utf-8"?>
-<p:sld xmlns:a="http://schemas.openxmlformats.org/drawingml/2006/main" xmlns:r="http://schemas.openxmlformats.org/officeDocument/2006/relationships" xmlns:p="http://schemas.openxmlformats.org/presentationml/2006/main">
-  <p:cSld>
-    <p:spTree>
-      <p:nvGrpSpPr>
-        <p:cNvPr id="1" name=""/>
-        <p:cNvGrpSpPr/>
-        <p:nvPr/>
-      </p:nvGrpSpPr>
-      <p:grpSpPr>
-        <a:xfrm>
-          <a:off x="0" y="0"/>
-          <a:ext cx="0" cy="0"/>
-          <a:chOff x="0" y="0"/>
-          <a:chExt cx="0" cy="0"/>
-        </a:xfrm>
-      </p:grpSpPr>
-      <p:sp>
-        <p:nvSpPr>
-          <p:cNvPr id="2" name="Title 1"/>
-          <p:cNvSpPr>
-            <a:spLocks noGrp="1"/>
-          </p:cNvSpPr>
-          <p:nvPr>
-            <p:ph type="title"/>
-          </p:nvPr>
-        </p:nvSpPr>
-        <p:spPr>
-          <a:xfrm>
-            <a:off x="457200" y="205979"/>
-            <a:ext cx="8229600" cy="857250"/>
-          </a:xfrm>
-        </p:spPr>
-        <p:txBody>
-          <a:bodyPr/>
-          <a:lstStyle/>
-          <a:p>
-            <a:pPr lvl="0" indent="0" marL="0">
-              <a:buNone/>
-            </a:pPr>
-            <a:r>
-              <a:rPr/>
-              <a:t>The rule</a:t>
-            </a:r>
-          </a:p>
-        </p:txBody>
-      </p:sp>
-      <p:sp>
-        <p:nvSpPr>
-          <p:cNvPr id="3" name="Content Placeholder 2"/>
-          <p:cNvSpPr>
-            <a:spLocks noGrp="1"/>
-          </p:cNvSpPr>
-          <p:nvPr>
-            <p:ph idx="1"/>
-          </p:nvPr>
-        </p:nvSpPr>
-        <p:spPr>
-          <a:xfrm>
-            <a:off x="457200" y="1200151"/>
-            <a:ext cx="8229600" cy="3394472"/>
-          </a:xfrm>
-        </p:spPr>
-        <p:txBody>
-          <a:bodyPr/>
-          <a:lstStyle/>
-          <a:p>
-            <a:pPr lvl="0" indent="0" marL="0">
-              <a:buNone/>
-            </a:pPr>
-            <a:r>
-              <a:rPr/>
-              <a:t>Every step that </a:t>
-            </a:r>
-            <a:r>
-              <a:rPr b="1"/>
-              <a:t>learns anything</a:t>
-            </a:r>
-            <a:r>
-              <a:rPr/>
-              <a:t> must be fitted inside the training fold.</a:t>
-            </a:r>
-          </a:p>
-          <a:p>
-            <a:pPr lvl="0" indent="0" marL="0">
-              <a:buNone/>
-            </a:pPr>
-            <a:r>
-              <a:rPr/>
-              <a:t>Scaling. Imputation. Encoding. Selection. Tuning.</a:t>
-            </a:r>
-          </a:p>
-        </p:txBody>
-      </p:sp>
-    </p:spTree>
-  </p:cSld>
-</p:sld>
-</file>
-
 <file path=ppt/slides/slide54.xml><?xml version="1.0" encoding="utf-8"?>
 <p:sld xmlns:a="http://schemas.openxmlformats.org/drawingml/2006/main" xmlns:r="http://schemas.openxmlformats.org/officeDocument/2006/relationships" xmlns:p="http://schemas.openxmlformats.org/presentationml/2006/main">
   <p:cSld>
@@ -16565,7 +16762,7 @@
             </a:pPr>
             <a:r>
               <a:rPr/>
-              <a:t>99% accuracy, detecting nothing</a:t>
+              <a:t>The rule</a:t>
             </a:r>
           </a:p>
         </p:txBody>
@@ -16595,29 +16792,24 @@
             </a:pPr>
             <a:r>
               <a:rPr/>
-              <a:t>1% positives. Answer “negative” every time.</a:t>
-            </a:r>
-          </a:p>
-          <a:p>
-            <a:pPr lvl="0"/>
-            <a:r>
-              <a:rPr/>
-              <a:t>Accuracy: </a:t>
+              <a:t>Every step that </a:t>
             </a:r>
             <a:r>
               <a:rPr b="1"/>
-              <a:t>0.986</a:t>
-            </a:r>
-          </a:p>
-          <a:p>
-            <a:pPr lvl="0"/>
-            <a:r>
-              <a:rPr/>
-              <a:t>Recall on positives: </a:t>
-            </a:r>
-            <a:r>
-              <a:rPr b="1"/>
-              <a:t>0.000</a:t>
+              <a:t>learns anything</a:t>
+            </a:r>
+            <a:r>
+              <a:rPr/>
+              <a:t> must be fitted inside the training fold.</a:t>
+            </a:r>
+          </a:p>
+          <a:p>
+            <a:pPr lvl="0" indent="0" marL="0">
+              <a:buNone/>
+            </a:pPr>
+            <a:r>
+              <a:rPr/>
+              <a:t>Scaling. Imputation. Encoding. Selection. Tuning.</a:t>
             </a:r>
           </a:p>
         </p:txBody>
@@ -16628,6 +16820,110 @@
 </file>
 
 <file path=ppt/slides/slide55.xml><?xml version="1.0" encoding="utf-8"?>
+<p:sld xmlns:a="http://schemas.openxmlformats.org/drawingml/2006/main" xmlns:r="http://schemas.openxmlformats.org/officeDocument/2006/relationships" xmlns:p="http://schemas.openxmlformats.org/presentationml/2006/main">
+  <p:cSld>
+    <p:spTree>
+      <p:nvGrpSpPr>
+        <p:cNvPr id="1" name=""/>
+        <p:cNvGrpSpPr/>
+        <p:nvPr/>
+      </p:nvGrpSpPr>
+      <p:grpSpPr>
+        <a:xfrm>
+          <a:off x="0" y="0"/>
+          <a:ext cx="0" cy="0"/>
+          <a:chOff x="0" y="0"/>
+          <a:chExt cx="0" cy="0"/>
+        </a:xfrm>
+      </p:grpSpPr>
+      <p:sp>
+        <p:nvSpPr>
+          <p:cNvPr id="2" name="Title 1"/>
+          <p:cNvSpPr>
+            <a:spLocks noGrp="1"/>
+          </p:cNvSpPr>
+          <p:nvPr>
+            <p:ph type="title"/>
+          </p:nvPr>
+        </p:nvSpPr>
+        <p:spPr>
+          <a:xfrm>
+            <a:off x="457200" y="205979"/>
+            <a:ext cx="8229600" cy="857250"/>
+          </a:xfrm>
+        </p:spPr>
+        <p:txBody>
+          <a:bodyPr/>
+          <a:lstStyle/>
+          <a:p>
+            <a:pPr lvl="0" indent="0" marL="0">
+              <a:buNone/>
+            </a:pPr>
+            <a:r>
+              <a:rPr/>
+              <a:t>99% accuracy, detecting nothing</a:t>
+            </a:r>
+          </a:p>
+        </p:txBody>
+      </p:sp>
+      <p:sp>
+        <p:nvSpPr>
+          <p:cNvPr id="3" name="Content Placeholder 2"/>
+          <p:cNvSpPr>
+            <a:spLocks noGrp="1"/>
+          </p:cNvSpPr>
+          <p:nvPr>
+            <p:ph idx="1"/>
+          </p:nvPr>
+        </p:nvSpPr>
+        <p:spPr>
+          <a:xfrm>
+            <a:off x="457200" y="1200151"/>
+            <a:ext cx="8229600" cy="3394472"/>
+          </a:xfrm>
+        </p:spPr>
+        <p:txBody>
+          <a:bodyPr/>
+          <a:lstStyle/>
+          <a:p>
+            <a:pPr lvl="0" indent="0" marL="0">
+              <a:buNone/>
+            </a:pPr>
+            <a:r>
+              <a:rPr/>
+              <a:t>1% positives. Answer “negative” every time.</a:t>
+            </a:r>
+          </a:p>
+          <a:p>
+            <a:pPr lvl="0"/>
+            <a:r>
+              <a:rPr/>
+              <a:t>Accuracy: </a:t>
+            </a:r>
+            <a:r>
+              <a:rPr b="1"/>
+              <a:t>0.986</a:t>
+            </a:r>
+          </a:p>
+          <a:p>
+            <a:pPr lvl="0"/>
+            <a:r>
+              <a:rPr/>
+              <a:t>Recall on positives: </a:t>
+            </a:r>
+            <a:r>
+              <a:rPr b="1"/>
+              <a:t>0.000</a:t>
+            </a:r>
+          </a:p>
+        </p:txBody>
+      </p:sp>
+    </p:spTree>
+  </p:cSld>
+</p:sld>
+</file>
+
+<file path=ppt/slides/slide56.xml><?xml version="1.0" encoding="utf-8"?>
 <p:sld xmlns:a="http://schemas.openxmlformats.org/drawingml/2006/main" xmlns:r="http://schemas.openxmlformats.org/officeDocument/2006/relationships" xmlns:p="http://schemas.openxmlformats.org/presentationml/2006/main">
   <p:cSld>
     <p:spTree>
@@ -16709,7 +17005,7 @@
 </p:sld>
 </file>
 
-<file path=ppt/slides/slide56.xml><?xml version="1.0" encoding="utf-8"?>
+<file path=ppt/slides/slide57.xml><?xml version="1.0" encoding="utf-8"?>
 <p:sld xmlns:a="http://schemas.openxmlformats.org/drawingml/2006/main" xmlns:r="http://schemas.openxmlformats.org/officeDocument/2006/relationships" xmlns:p="http://schemas.openxmlformats.org/presentationml/2006/main">
   <p:cSld>
     <p:spTree>
@@ -16814,7 +17110,7 @@
 </p:sld>
 </file>
 
-<file path=ppt/slides/slide57.xml><?xml version="1.0" encoding="utf-8"?>
+<file path=ppt/slides/slide58.xml><?xml version="1.0" encoding="utf-8"?>
 <p:sld xmlns:a="http://schemas.openxmlformats.org/drawingml/2006/main" xmlns:r="http://schemas.openxmlformats.org/officeDocument/2006/relationships" xmlns:p="http://schemas.openxmlformats.org/presentationml/2006/main">
   <p:cSld>
     <p:spTree>
@@ -16896,7 +17192,7 @@
 </p:sld>
 </file>
 
-<file path=ppt/slides/slide58.xml><?xml version="1.0" encoding="utf-8"?>
+<file path=ppt/slides/slide59.xml><?xml version="1.0" encoding="utf-8"?>
 <p:sld xmlns:a="http://schemas.openxmlformats.org/drawingml/2006/main" xmlns:r="http://schemas.openxmlformats.org/officeDocument/2006/relationships" xmlns:p="http://schemas.openxmlformats.org/presentationml/2006/main">
   <p:cSld>
     <p:spTree>
@@ -16978,97 +17274,6 @@
 </p:sld>
 </file>
 
-<file path=ppt/slides/slide59.xml><?xml version="1.0" encoding="utf-8"?>
-<p:sld xmlns:a="http://schemas.openxmlformats.org/drawingml/2006/main" xmlns:r="http://schemas.openxmlformats.org/officeDocument/2006/relationships" xmlns:p="http://schemas.openxmlformats.org/presentationml/2006/main">
-  <p:cSld>
-    <p:spTree>
-      <p:nvGrpSpPr>
-        <p:cNvPr id="1" name=""/>
-        <p:cNvGrpSpPr/>
-        <p:nvPr/>
-      </p:nvGrpSpPr>
-      <p:grpSpPr>
-        <a:xfrm>
-          <a:off x="0" y="0"/>
-          <a:ext cx="0" cy="0"/>
-          <a:chOff x="0" y="0"/>
-          <a:chExt cx="0" cy="0"/>
-        </a:xfrm>
-      </p:grpSpPr>
-      <p:sp>
-        <p:nvSpPr>
-          <p:cNvPr id="2" name="Title 1"/>
-          <p:cNvSpPr>
-            <a:spLocks noGrp="1"/>
-          </p:cNvSpPr>
-          <p:nvPr>
-            <p:ph type="title"/>
-          </p:nvPr>
-        </p:nvSpPr>
-        <p:spPr>
-          <a:xfrm>
-            <a:off x="457200" y="205979"/>
-            <a:ext cx="8229600" cy="857250"/>
-          </a:xfrm>
-        </p:spPr>
-        <p:txBody>
-          <a:bodyPr/>
-          <a:lstStyle/>
-          <a:p>
-            <a:pPr lvl="0" indent="0" marL="0">
-              <a:buNone/>
-            </a:pPr>
-            <a:r>
-              <a:rPr/>
-              <a:t>What the four have in common</a:t>
-            </a:r>
-          </a:p>
-        </p:txBody>
-      </p:sp>
-      <p:sp>
-        <p:nvSpPr>
-          <p:cNvPr id="3" name="Content Placeholder 2"/>
-          <p:cNvSpPr>
-            <a:spLocks noGrp="1"/>
-          </p:cNvSpPr>
-          <p:nvPr>
-            <p:ph idx="1"/>
-          </p:nvPr>
-        </p:nvSpPr>
-        <p:spPr>
-          <a:xfrm>
-            <a:off x="457200" y="1200151"/>
-            <a:ext cx="8229600" cy="3394472"/>
-          </a:xfrm>
-        </p:spPr>
-        <p:txBody>
-          <a:bodyPr/>
-          <a:lstStyle/>
-          <a:p>
-            <a:pPr lvl="0" indent="0" marL="0">
-              <a:buNone/>
-            </a:pPr>
-            <a:r>
-              <a:rPr/>
-              <a:t>None is a coding error.</a:t>
-            </a:r>
-          </a:p>
-          <a:p>
-            <a:pPr lvl="0" indent="0" marL="0">
-              <a:buNone/>
-            </a:pPr>
-            <a:r>
-              <a:rPr/>
-              <a:t>All four run exactly as written and return a plausible number.</a:t>
-            </a:r>
-          </a:p>
-        </p:txBody>
-      </p:sp>
-    </p:spTree>
-  </p:cSld>
-</p:sld>
-</file>
-
 <file path=ppt/slides/slide6.xml><?xml version="1.0" encoding="utf-8"?>
 <p:sld xmlns:a="http://schemas.openxmlformats.org/drawingml/2006/main" xmlns:r="http://schemas.openxmlformats.org/officeDocument/2006/relationships" xmlns:p="http://schemas.openxmlformats.org/presentationml/2006/main">
   <p:cSld>
@@ -17217,7 +17422,7 @@
             </a:pPr>
             <a:r>
               <a:rPr/>
-              <a:t>A model is not objective</a:t>
+              <a:t>What the four have in common</a:t>
             </a:r>
           </a:p>
         </p:txBody>
@@ -17242,36 +17447,21 @@
           <a:bodyPr/>
           <a:lstStyle/>
           <a:p>
-            <a:pPr lvl="0"/>
-            <a:r>
-              <a:rPr/>
-              <a:t>It is a compressed summary of its training data, </a:t>
-            </a:r>
-            <a:r>
-              <a:rPr b="1"/>
-              <a:t>including its injustices</a:t>
-            </a:r>
-          </a:p>
-          <a:p>
-            <a:pPr lvl="0"/>
-            <a:r>
-              <a:rPr/>
-              <a:t>These methods find </a:t>
-            </a:r>
-            <a:r>
-              <a:rPr b="1"/>
-              <a:t>correlation</a:t>
-            </a:r>
-            <a:r>
-              <a:rPr/>
-              <a:t>, not cause</a:t>
-            </a:r>
-          </a:p>
-          <a:p>
-            <a:pPr lvl="0"/>
-            <a:r>
-              <a:rPr/>
-              <a:t>Accuracy is not the only property that matters</a:t>
+            <a:pPr lvl="0" indent="0" marL="0">
+              <a:buNone/>
+            </a:pPr>
+            <a:r>
+              <a:rPr/>
+              <a:t>None is a coding error.</a:t>
+            </a:r>
+          </a:p>
+          <a:p>
+            <a:pPr lvl="0" indent="0" marL="0">
+              <a:buNone/>
+            </a:pPr>
+            <a:r>
+              <a:rPr/>
+              <a:t>All four run exactly as written and return a plausible number.</a:t>
             </a:r>
           </a:p>
         </p:txBody>
@@ -17323,7 +17513,7 @@
             </a:pPr>
             <a:r>
               <a:rPr/>
-              <a:t>Homework: due Friday 2 October</a:t>
+              <a:t>A model is not objective</a:t>
             </a:r>
           </a:p>
         </p:txBody>
@@ -17348,45 +17538,36 @@
           <a:bodyPr/>
           <a:lstStyle/>
           <a:p>
-            <a:pPr lvl="0" indent="0" marL="0">
-              <a:buNone/>
-            </a:pPr>
-            <a:r>
-              <a:rPr>
-                <a:latin typeface="Courier"/>
-              </a:rPr>
-              <a:t>Exercises/01_first_workflow.md</a:t>
-            </a:r>
-          </a:p>
-          <a:p>
-            <a:pPr lvl="0" indent="0" marL="0">
-              <a:buNone/>
-            </a:pPr>
-            <a:r>
-              <a:rPr/>
-              <a:t>Wine quality: run the workflow yourself, and </a:t>
+            <a:pPr lvl="0"/>
+            <a:r>
+              <a:rPr/>
+              <a:t>It is a compressed summary of its training data, </a:t>
             </a:r>
             <a:r>
               <a:rPr b="1"/>
-              <a:t>justify every decision</a:t>
-            </a:r>
-            <a:r>
-              <a:rPr/>
-              <a:t>.</a:t>
+              <a:t>including its injustices</a:t>
             </a:r>
           </a:p>
           <a:p>
             <a:pPr lvl="0"/>
             <a:r>
               <a:rPr/>
-              <a:t>No marks for accuracy</a:t>
+              <a:t>These methods find </a:t>
+            </a:r>
+            <a:r>
+              <a:rPr b="1"/>
+              <a:t>correlation</a:t>
+            </a:r>
+            <a:r>
+              <a:rPr/>
+              <a:t>, not cause</a:t>
             </a:r>
           </a:p>
           <a:p>
             <a:pPr lvl="0"/>
             <a:r>
               <a:rPr/>
-              <a:t>Marks for methodology, and for saying what your number does not mean</a:t>
+              <a:t>Accuracy is not the only property that matters</a:t>
             </a:r>
           </a:p>
         </p:txBody>
@@ -17397,6 +17578,121 @@
 </file>
 
 <file path=ppt/slides/slide62.xml><?xml version="1.0" encoding="utf-8"?>
+<p:sld xmlns:a="http://schemas.openxmlformats.org/drawingml/2006/main" xmlns:r="http://schemas.openxmlformats.org/officeDocument/2006/relationships" xmlns:p="http://schemas.openxmlformats.org/presentationml/2006/main">
+  <p:cSld>
+    <p:spTree>
+      <p:nvGrpSpPr>
+        <p:cNvPr id="1" name=""/>
+        <p:cNvGrpSpPr/>
+        <p:nvPr/>
+      </p:nvGrpSpPr>
+      <p:grpSpPr>
+        <a:xfrm>
+          <a:off x="0" y="0"/>
+          <a:ext cx="0" cy="0"/>
+          <a:chOff x="0" y="0"/>
+          <a:chExt cx="0" cy="0"/>
+        </a:xfrm>
+      </p:grpSpPr>
+      <p:sp>
+        <p:nvSpPr>
+          <p:cNvPr id="2" name="Title 1"/>
+          <p:cNvSpPr>
+            <a:spLocks noGrp="1"/>
+          </p:cNvSpPr>
+          <p:nvPr>
+            <p:ph type="title"/>
+          </p:nvPr>
+        </p:nvSpPr>
+        <p:spPr>
+          <a:xfrm>
+            <a:off x="457200" y="205979"/>
+            <a:ext cx="8229600" cy="857250"/>
+          </a:xfrm>
+        </p:spPr>
+        <p:txBody>
+          <a:bodyPr/>
+          <a:lstStyle/>
+          <a:p>
+            <a:pPr lvl="0" indent="0" marL="0">
+              <a:buNone/>
+            </a:pPr>
+            <a:r>
+              <a:rPr/>
+              <a:t>Homework: due Friday 2 October</a:t>
+            </a:r>
+          </a:p>
+        </p:txBody>
+      </p:sp>
+      <p:sp>
+        <p:nvSpPr>
+          <p:cNvPr id="3" name="Content Placeholder 2"/>
+          <p:cNvSpPr>
+            <a:spLocks noGrp="1"/>
+          </p:cNvSpPr>
+          <p:nvPr>
+            <p:ph idx="1"/>
+          </p:nvPr>
+        </p:nvSpPr>
+        <p:spPr>
+          <a:xfrm>
+            <a:off x="457200" y="1200151"/>
+            <a:ext cx="8229600" cy="3394472"/>
+          </a:xfrm>
+        </p:spPr>
+        <p:txBody>
+          <a:bodyPr/>
+          <a:lstStyle/>
+          <a:p>
+            <a:pPr lvl="0" indent="0" marL="0">
+              <a:buNone/>
+            </a:pPr>
+            <a:r>
+              <a:rPr>
+                <a:latin typeface="Courier"/>
+              </a:rPr>
+              <a:t>Exercises/01_first_workflow.md</a:t>
+            </a:r>
+          </a:p>
+          <a:p>
+            <a:pPr lvl="0" indent="0" marL="0">
+              <a:buNone/>
+            </a:pPr>
+            <a:r>
+              <a:rPr/>
+              <a:t>Wine quality: run the workflow yourself, and </a:t>
+            </a:r>
+            <a:r>
+              <a:rPr b="1"/>
+              <a:t>justify every decision</a:t>
+            </a:r>
+            <a:r>
+              <a:rPr/>
+              <a:t>.</a:t>
+            </a:r>
+          </a:p>
+          <a:p>
+            <a:pPr lvl="0"/>
+            <a:r>
+              <a:rPr/>
+              <a:t>No marks for accuracy</a:t>
+            </a:r>
+          </a:p>
+          <a:p>
+            <a:pPr lvl="0"/>
+            <a:r>
+              <a:rPr/>
+              <a:t>Marks for methodology, and for saying what your number does not mean</a:t>
+            </a:r>
+          </a:p>
+        </p:txBody>
+      </p:sp>
+    </p:spTree>
+  </p:cSld>
+</p:sld>
+</file>
+
+<file path=ppt/slides/slide63.xml><?xml version="1.0" encoding="utf-8"?>
 <p:sld xmlns:a="http://schemas.openxmlformats.org/drawingml/2006/main" xmlns:r="http://schemas.openxmlformats.org/officeDocument/2006/relationships" xmlns:p="http://schemas.openxmlformats.org/presentationml/2006/main">
   <p:cSld>
     <p:spTree>

--- a/Lessons/01_introduction_and_workflow/Slides/introduction_and_workflow_slides.pptx
+++ b/Lessons/01_introduction_and_workflow/Slides/introduction_and_workflow_slides.pptx
@@ -1868,7 +1868,49 @@
             </a:pPr>
             <a:r>
               <a:rPr/>
-              <a:t>Third: learned models are wrong sometimes, in ways that are hard to predict and often hard to explain. If a mistake is unrecoverable and nobody reviews the output, the question is not whether accuracy is high enough but whether anyone can tell when it has failed.</a:t>
+              <a:t>Third, and expect this one to be challenged, because it sounds like something you could only know after deploying. Make the point that all three judgements are available before any code is written.</a:t>
+            </a:r>
+          </a:p>
+          <a:p>
+            <a:pPr lvl="0" indent="0" marL="0">
+              <a:buNone/>
+            </a:pPr>
+          </a:p>
+          <a:p>
+            <a:pPr lvl="0" indent="0" marL="0">
+              <a:buNone/>
+            </a:pPr>
+            <a:r>
+              <a:rPr/>
+              <a:t>The model WILL be wrong - not might be. Section 2.2 settled that, and today’s best model gets 2 of 143 wrong. You cannot know which 2 in advance; if you could, you would fix them. Whether a wrong answer can be undone is a fact about the application - a misfiled ticket is reopened, a wrong dose is not. Whether a person sees the output before it acts is a fact about the deployment, not about the weights.</a:t>
+            </a:r>
+          </a:p>
+          <a:p>
+            <a:pPr lvl="0" indent="0" marL="0">
+              <a:buNone/>
+            </a:pPr>
+          </a:p>
+          <a:p>
+            <a:pPr lvl="0" indent="0" marL="0">
+              <a:buNone/>
+            </a:pPr>
+            <a:r>
+              <a:rPr/>
+              <a:t>Certain, unrecoverable and unseen: no accuracy figure rescues that design, and you knew all three before you started.</a:t>
+            </a:r>
+          </a:p>
+          <a:p>
+            <a:pPr lvl="0" indent="0" marL="0">
+              <a:buNone/>
+            </a:pPr>
+          </a:p>
+          <a:p>
+            <a:pPr lvl="0" indent="0" marL="0">
+              <a:buNone/>
+            </a:pPr>
+            <a:r>
+              <a:rPr/>
+              <a:t>Worth adding if someone raises it: “unexplainable” is partly a choice. A short tree in lesson 7 states its reasoning; a linear model in lesson 3 attributes the answer feature by feature. If somebody must justify the decision to the person it affects, that belongs in the framing step, where it rules families in or out.</a:t>
             </a:r>
           </a:p>
           <a:p>
@@ -12424,7 +12466,7 @@
             </a:r>
             <a:r>
               <a:rPr b="1"/>
-              <a:t>catastrophic and unexplainable</a:t>
+              <a:t>certain, unrecoverable and unreviewed</a:t>
             </a:r>
           </a:p>
           <a:p>

--- a/Lessons/01_introduction_and_workflow/Slides/introduction_and_workflow_slides.pptx
+++ b/Lessons/01_introduction_and_workflow/Slides/introduction_and_workflow_slides.pptx
@@ -5586,7 +5586,7 @@
             </a:pPr>
             <a:r>
               <a:rPr/>
-              <a:t>Use the figure to make the trade-off physical: the threshold is a line you slide, and sliding it moves errors from one column to the other.</a:t>
+              <a:t>Define both against the confusion matrix still in their heads from the last slide, and keep them the right way round: recall divides by the row of things that really were malignant, precision by the column of things we flagged. The next slide makes the trade physical.</a:t>
             </a:r>
           </a:p>
           <a:p>

--- a/Lessons/01_introduction_and_workflow/Slides/introduction_and_workflow_slides.pptx
+++ b/Lessons/01_introduction_and_workflow/Slides/introduction_and_workflow_slides.pptx
@@ -7700,6 +7700,30 @@
         <p:txBody>
           <a:bodyPr/>
           <a:lstStyle/>
+          <a:p>
+            <a:pPr lvl="0" indent="0" marL="0">
+              <a:buNone/>
+            </a:pPr>
+            <a:r>
+              <a:rPr/>
+              <a:t>Put the repository URL on the board or paste it in the chat, and have them clone into a short folder - </a:t>
+            </a:r>
+            <a:r>
+              <a:rPr>
+                <a:latin typeface="Courier"/>
+              </a:rPr>
+              <a:t>git clone &lt;url&gt; tai</a:t>
+            </a:r>
+            <a:r>
+              <a:rPr/>
+              <a:t>. The full address is github.com/fabioantonini/technologies-for-artificial-intelligence and it does not fit on a slide in a form anyone can copy; Course/Setup/Docker_Quickstart.md has it written out, and that is what to point them at. The folder name is theirs to choose: Docker Compose does not care what it is called.</a:t>
+            </a:r>
+          </a:p>
+          <a:p>
+            <a:pPr lvl="0" indent="0" marL="0">
+              <a:buNone/>
+            </a:pPr>
+          </a:p>
           <a:p>
             <a:pPr lvl="0" indent="0" marL="0">
               <a:buNone/>
@@ -18049,23 +18073,22 @@
               <a:rPr>
                 <a:latin typeface="Courier"/>
               </a:rPr>
-              <a:t> clone https://github.com/fabioantonini/</a:t>
+              <a:t> clone </a:t>
             </a:r>
             <a:r>
               <a:rPr>
                 <a:solidFill>
-                  <a:srgbClr val="902000"/>
+                  <a:srgbClr val="19177C"/>
                 </a:solidFill>
                 <a:latin typeface="Courier"/>
               </a:rPr>
-              <a:t>\</a:t>
-            </a:r>
-            <a:br/>
+              <a:t>$URL</a:t>
+            </a:r>
             <a:r>
               <a:rPr>
                 <a:latin typeface="Courier"/>
               </a:rPr>
-              <a:t>technologies-for-artificial-intelligence.git</a:t>
+              <a:t> tai</a:t>
             </a:r>
             <a:br/>
             <a:r>
@@ -18081,7 +18104,7 @@
               <a:rPr>
                 <a:latin typeface="Courier"/>
               </a:rPr>
-              <a:t> technologies-for-artificial-intelligence</a:t>
+              <a:t> tai</a:t>
             </a:r>
             <a:br/>
             <a:r>
@@ -18103,8 +18126,24 @@
               <a:buNone/>
             </a:pPr>
             <a:r>
-              <a:rPr/>
-              <a:t>Then open </a:t>
+              <a:rPr>
+                <a:latin typeface="Courier"/>
+              </a:rPr>
+              <a:t>$URL</a:t>
+            </a:r>
+            <a:r>
+              <a:rPr/>
+              <a:t> is in </a:t>
+            </a:r>
+            <a:r>
+              <a:rPr>
+                <a:latin typeface="Courier"/>
+              </a:rPr>
+              <a:t>Course/Setup/</a:t>
+            </a:r>
+            <a:r>
+              <a:rPr/>
+              <a:t>. Then open </a:t>
             </a:r>
             <a:r>
               <a:rPr b="1"/>

--- a/Lessons/01_introduction_and_workflow/Slides/introduction_and_workflow_slides.pptx
+++ b/Lessons/01_introduction_and_workflow/Slides/introduction_and_workflow_slides.pptx
@@ -17685,7 +17685,7 @@
             </a:pPr>
             <a:r>
               <a:rPr/>
-              <a:t>Homework: due Friday 2 October</a:t>
+              <a:t>Homework: due Friday 2 October, 09:00</a:t>
             </a:r>
           </a:p>
         </p:txBody>

--- a/Lessons/01_introduction_and_workflow/Slides/introduction_and_workflow_slides.pptx
+++ b/Lessons/01_introduction_and_workflow/Slides/introduction_and_workflow_slides.pptx
@@ -5944,7 +5944,21 @@
             </a:pPr>
             <a:r>
               <a:rPr/>
-              <a:t>Set expectations now. The exercises are not optional and they build towards the project: by lesson 5 they should be able to write their project’s evaluation plan, by lesson 7 to have a draft comparison.</a:t>
+              <a:t>Set expectations now, and be explicit about the exercises, because the arrangement is unusual and they will assume the ordinary one. Nothing is handed in and nothing comes back with a mark on it. Each lesson opens by discussing the exercise set the week before, and at the exam one of the ten is drawn and they talk through their own notebook for it - so all ten are worth keeping, and an exercise skipped is one they may have to sit in front of with nothing to say.</a:t>
+            </a:r>
+          </a:p>
+          <a:p>
+            <a:pPr lvl="0" indent="0" marL="0">
+              <a:buNone/>
+            </a:pPr>
+          </a:p>
+          <a:p>
+            <a:pPr lvl="0" indent="0" marL="0">
+              <a:buNone/>
+            </a:pPr>
+            <a:r>
+              <a:rPr/>
+              <a:t>They are not optional and they build towards the project: by lesson 5 they should be able to write their project’s evaluation plan, by lesson 7 to have a draft comparison.</a:t>
             </a:r>
           </a:p>
           <a:p>
@@ -5986,7 +6000,7 @@
             </a:pPr>
             <a:r>
               <a:rPr/>
-              <a:t>The exam is closed book and drawn from the handouts, including the derivations. Say this now so nobody treats the handouts as optional reading.</a:t>
+              <a:t>The written paper is closed book and drawn from the handouts, including the derivations. Say this now so nobody treats the handouts as optional reading.</a:t>
             </a:r>
           </a:p>
         </p:txBody>
@@ -17414,7 +17428,7 @@
             </a:r>
             <a:r>
               <a:rPr/>
-              <a:t>: set every Friday, due the next</a:t>
+              <a:t>: set each Friday, discussed the next. Never collected</a:t>
             </a:r>
           </a:p>
           <a:p>
@@ -17432,11 +17446,19 @@
             <a:pPr lvl="0"/>
             <a:r>
               <a:rPr b="1"/>
-              <a:t>Written exam</a:t>
-            </a:r>
-            <a:r>
-              <a:rPr/>
-              <a:t>: closed book, drawn from the handouts</a:t>
+              <a:t>Exam</a:t>
+            </a:r>
+            <a:r>
+              <a:rPr/>
+              <a:t>: a written paper, then </a:t>
+            </a:r>
+            <a:r>
+              <a:rPr b="1"/>
+              <a:t>one of the ten exercises drawn</a:t>
+            </a:r>
+            <a:r>
+              <a:rPr/>
+              <a:t> to discuss</a:t>
             </a:r>
           </a:p>
         </p:txBody>
@@ -17685,7 +17707,7 @@
             </a:pPr>
             <a:r>
               <a:rPr/>
-              <a:t>Homework: due Friday 2 October, 09:00</a:t>
+              <a:t>Homework: we discuss it on Friday 2 October</a:t>
             </a:r>
           </a:p>
         </p:txBody>

--- a/Lessons/01_introduction_and_workflow/Slides/introduction_and_workflow_slides.pptx
+++ b/Lessons/01_introduction_and_workflow/Slides/introduction_and_workflow_slides.pptx
@@ -11862,8 +11862,8 @@
         </p:blipFill>
         <p:spPr bwMode="auto">
           <a:xfrm>
-            <a:off x="457202" y="2872427"/>
-            <a:ext cx="8229595" cy="941695"/>
+            <a:off x="457202" y="2923606"/>
+            <a:ext cx="8229596" cy="839337"/>
           </a:xfrm>
           <a:prstGeom prst="rect">
             <a:avLst/>
@@ -11974,8 +11974,8 @@
         </p:blipFill>
         <p:spPr bwMode="auto">
           <a:xfrm>
-            <a:off x="457202" y="2227571"/>
-            <a:ext cx="8229596" cy="2231408"/>
+            <a:off x="796505" y="2366530"/>
+            <a:ext cx="7550990" cy="1953490"/>
           </a:xfrm>
           <a:prstGeom prst="rect">
             <a:avLst/>
@@ -13596,7 +13596,7 @@
           </p:nvPr>
         </p:nvGraphicFramePr>
         <p:xfrm>
-          <a:off x="457200" y="1193800"/>
+          <a:off x="457200" y="1166099"/>
           <a:ext cx="8229600" cy="3390900"/>
         </p:xfrm>
         <a:graphic>
@@ -13868,7 +13868,7 @@
           </p:nvPr>
         </p:nvGraphicFramePr>
         <p:xfrm>
-          <a:off x="457200" y="1193800"/>
+          <a:off x="457200" y="1166099"/>
           <a:ext cx="8229600" cy="3390900"/>
         </p:xfrm>
         <a:graphic>
@@ -14647,7 +14647,7 @@
           </p:nvPr>
         </p:nvGraphicFramePr>
         <p:xfrm>
-          <a:off x="457200" y="1193800"/>
+          <a:off x="457200" y="1166099"/>
           <a:ext cx="8229600" cy="3390900"/>
         </p:xfrm>
         <a:graphic>

--- a/Lessons/01_introduction_and_workflow/Slides/introduction_and_workflow_slides.pptx
+++ b/Lessons/01_introduction_and_workflow/Slides/introduction_and_workflow_slides.pptx
@@ -11862,8 +11862,8 @@
         </p:blipFill>
         <p:spPr bwMode="auto">
           <a:xfrm>
-            <a:off x="457202" y="2923606"/>
-            <a:ext cx="8229596" cy="839337"/>
+            <a:off x="457205" y="2913371"/>
+            <a:ext cx="8229590" cy="859808"/>
           </a:xfrm>
           <a:prstGeom prst="rect">
             <a:avLst/>
@@ -11974,8 +11974,8 @@
         </p:blipFill>
         <p:spPr bwMode="auto">
           <a:xfrm>
-            <a:off x="796505" y="2366530"/>
-            <a:ext cx="7550990" cy="1953490"/>
+            <a:off x="836214" y="2358217"/>
+            <a:ext cx="7471572" cy="1970116"/>
           </a:xfrm>
           <a:prstGeom prst="rect">
             <a:avLst/>
